--- a/slides/1_python_slides/5_loops.pptx
+++ b/slides/1_python_slides/5_loops.pptx
@@ -400,7 +400,7 @@
             <a:pPr indent="0" algn="r">
               <a:buNone/>
             </a:pPr>
-            <a:fld id="{CBA0743F-4D65-4B12-ACDB-85F4E46FEF3C}" type="slidenum">
+            <a:fld id="{B6966954-3E87-4912-8EF7-76AB637AB8E3}" type="slidenum">
               <a:rPr lang="en-US" sz="1400" b="0" u="none" strike="noStrike">
                 <a:solidFill>
                   <a:srgbClr val="000000"/>
@@ -458,7 +458,7 @@
         <p:spPr>
           <a:xfrm>
             <a:off x="685800" y="1143000"/>
-            <a:ext cx="5486040" cy="3085920"/>
+            <a:ext cx="5485680" cy="3085560"/>
           </a:xfrm>
           <a:prstGeom prst="rect">
             <a:avLst/>
@@ -481,7 +481,7 @@
         <p:spPr>
           <a:xfrm>
             <a:off x="685800" y="4400640"/>
-            <a:ext cx="5486040" cy="3600000"/>
+            <a:ext cx="5485680" cy="3599640"/>
           </a:xfrm>
           <a:prstGeom prst="rect">
             <a:avLst/>
@@ -501,6 +501,9 @@
                 <a:spcPct val="100000"/>
               </a:lnSpc>
               <a:buNone/>
+              <a:tabLst>
+                <a:tab pos="0" algn="l"/>
+              </a:tabLst>
             </a:pPr>
             <a:r>
               <a:rPr lang="en-US" sz="2000" b="0" u="none" strike="noStrike">
@@ -511,7 +514,370 @@
                 <a:uFillTx/>
                 <a:latin typeface="Arial"/>
               </a:rPr>
-              <a:t>Title slide. This is the payoff session — lists/tuples from last time finally get used properly.</a:t>
+              <a:t>Titl</a:t>
+            </a:r>
+            <a:r>
+              <a:rPr lang="en-US" sz="2000" b="0" u="none" strike="noStrike">
+                <a:solidFill>
+                  <a:srgbClr val="000000"/>
+                </a:solidFill>
+                <a:effectLst/>
+                <a:uFillTx/>
+                <a:latin typeface="Arial"/>
+              </a:rPr>
+              <a:t>e </a:t>
+            </a:r>
+            <a:r>
+              <a:rPr lang="en-US" sz="2000" b="0" u="none" strike="noStrike">
+                <a:solidFill>
+                  <a:srgbClr val="000000"/>
+                </a:solidFill>
+                <a:effectLst/>
+                <a:uFillTx/>
+                <a:latin typeface="Arial"/>
+              </a:rPr>
+              <a:t>sli</a:t>
+            </a:r>
+            <a:r>
+              <a:rPr lang="en-US" sz="2000" b="0" u="none" strike="noStrike">
+                <a:solidFill>
+                  <a:srgbClr val="000000"/>
+                </a:solidFill>
+                <a:effectLst/>
+                <a:uFillTx/>
+                <a:latin typeface="Arial"/>
+              </a:rPr>
+              <a:t>de. </a:t>
+            </a:r>
+            <a:r>
+              <a:rPr lang="en-US" sz="2000" b="0" u="none" strike="noStrike">
+                <a:solidFill>
+                  <a:srgbClr val="000000"/>
+                </a:solidFill>
+                <a:effectLst/>
+                <a:uFillTx/>
+                <a:latin typeface="Arial"/>
+              </a:rPr>
+              <a:t>Thi</a:t>
+            </a:r>
+            <a:r>
+              <a:rPr lang="en-US" sz="2000" b="0" u="none" strike="noStrike">
+                <a:solidFill>
+                  <a:srgbClr val="000000"/>
+                </a:solidFill>
+                <a:effectLst/>
+                <a:uFillTx/>
+                <a:latin typeface="Arial"/>
+              </a:rPr>
+              <a:t>s </a:t>
+            </a:r>
+            <a:r>
+              <a:rPr lang="en-US" sz="2000" b="0" u="none" strike="noStrike">
+                <a:solidFill>
+                  <a:srgbClr val="000000"/>
+                </a:solidFill>
+                <a:effectLst/>
+                <a:uFillTx/>
+                <a:latin typeface="Arial"/>
+              </a:rPr>
+              <a:t>is </a:t>
+            </a:r>
+            <a:r>
+              <a:rPr lang="en-US" sz="2000" b="0" u="none" strike="noStrike">
+                <a:solidFill>
+                  <a:srgbClr val="000000"/>
+                </a:solidFill>
+                <a:effectLst/>
+                <a:uFillTx/>
+                <a:latin typeface="Arial"/>
+              </a:rPr>
+              <a:t>the </a:t>
+            </a:r>
+            <a:r>
+              <a:rPr lang="en-US" sz="2000" b="0" u="none" strike="noStrike">
+                <a:solidFill>
+                  <a:srgbClr val="000000"/>
+                </a:solidFill>
+                <a:effectLst/>
+                <a:uFillTx/>
+                <a:latin typeface="Arial"/>
+              </a:rPr>
+              <a:t>pa</a:t>
+            </a:r>
+            <a:r>
+              <a:rPr lang="en-US" sz="2000" b="0" u="none" strike="noStrike">
+                <a:solidFill>
+                  <a:srgbClr val="000000"/>
+                </a:solidFill>
+                <a:effectLst/>
+                <a:uFillTx/>
+                <a:latin typeface="Arial"/>
+              </a:rPr>
+              <a:t>yof</a:t>
+            </a:r>
+            <a:r>
+              <a:rPr lang="en-US" sz="2000" b="0" u="none" strike="noStrike">
+                <a:solidFill>
+                  <a:srgbClr val="000000"/>
+                </a:solidFill>
+                <a:effectLst/>
+                <a:uFillTx/>
+                <a:latin typeface="Arial"/>
+              </a:rPr>
+              <a:t>f </a:t>
+            </a:r>
+            <a:r>
+              <a:rPr lang="en-US" sz="2000" b="0" u="none" strike="noStrike">
+                <a:solidFill>
+                  <a:srgbClr val="000000"/>
+                </a:solidFill>
+                <a:effectLst/>
+                <a:uFillTx/>
+                <a:latin typeface="Arial"/>
+              </a:rPr>
+              <a:t>se</a:t>
+            </a:r>
+            <a:r>
+              <a:rPr lang="en-US" sz="2000" b="0" u="none" strike="noStrike">
+                <a:solidFill>
+                  <a:srgbClr val="000000"/>
+                </a:solidFill>
+                <a:effectLst/>
+                <a:uFillTx/>
+                <a:latin typeface="Arial"/>
+              </a:rPr>
+              <a:t>ssi</a:t>
+            </a:r>
+            <a:r>
+              <a:rPr lang="en-US" sz="2000" b="0" u="none" strike="noStrike">
+                <a:solidFill>
+                  <a:srgbClr val="000000"/>
+                </a:solidFill>
+                <a:effectLst/>
+                <a:uFillTx/>
+                <a:latin typeface="Arial"/>
+              </a:rPr>
+              <a:t>on </a:t>
+            </a:r>
+            <a:r>
+              <a:rPr lang="en-US" sz="2000" b="0" u="none" strike="noStrike">
+                <a:solidFill>
+                  <a:srgbClr val="000000"/>
+                </a:solidFill>
+                <a:effectLst/>
+                <a:uFillTx/>
+                <a:latin typeface="Arial"/>
+              </a:rPr>
+              <a:t>— </a:t>
+            </a:r>
+            <a:r>
+              <a:rPr lang="en-US" sz="2000" b="0" u="none" strike="noStrike">
+                <a:solidFill>
+                  <a:srgbClr val="000000"/>
+                </a:solidFill>
+                <a:effectLst/>
+                <a:uFillTx/>
+                <a:latin typeface="Arial"/>
+              </a:rPr>
+              <a:t>list</a:t>
+            </a:r>
+            <a:r>
+              <a:rPr lang="en-US" sz="2000" b="0" u="none" strike="noStrike">
+                <a:solidFill>
+                  <a:srgbClr val="000000"/>
+                </a:solidFill>
+                <a:effectLst/>
+                <a:uFillTx/>
+                <a:latin typeface="Arial"/>
+              </a:rPr>
+              <a:t>s/t</a:t>
+            </a:r>
+            <a:r>
+              <a:rPr lang="en-US" sz="2000" b="0" u="none" strike="noStrike">
+                <a:solidFill>
+                  <a:srgbClr val="000000"/>
+                </a:solidFill>
+                <a:effectLst/>
+                <a:uFillTx/>
+                <a:latin typeface="Arial"/>
+              </a:rPr>
+              <a:t>upl</a:t>
+            </a:r>
+            <a:r>
+              <a:rPr lang="en-US" sz="2000" b="0" u="none" strike="noStrike">
+                <a:solidFill>
+                  <a:srgbClr val="000000"/>
+                </a:solidFill>
+                <a:effectLst/>
+                <a:uFillTx/>
+                <a:latin typeface="Arial"/>
+              </a:rPr>
+              <a:t>es </a:t>
+            </a:r>
+            <a:r>
+              <a:rPr lang="en-US" sz="2000" b="0" u="none" strike="noStrike">
+                <a:solidFill>
+                  <a:srgbClr val="000000"/>
+                </a:solidFill>
+                <a:effectLst/>
+                <a:uFillTx/>
+                <a:latin typeface="Arial"/>
+              </a:rPr>
+              <a:t>fro</a:t>
+            </a:r>
+            <a:r>
+              <a:rPr lang="en-US" sz="2000" b="0" u="none" strike="noStrike">
+                <a:solidFill>
+                  <a:srgbClr val="000000"/>
+                </a:solidFill>
+                <a:effectLst/>
+                <a:uFillTx/>
+                <a:latin typeface="Arial"/>
+              </a:rPr>
+              <a:t>m </a:t>
+            </a:r>
+            <a:r>
+              <a:rPr lang="en-US" sz="2000" b="0" u="none" strike="noStrike">
+                <a:solidFill>
+                  <a:srgbClr val="000000"/>
+                </a:solidFill>
+                <a:effectLst/>
+                <a:uFillTx/>
+                <a:latin typeface="Arial"/>
+              </a:rPr>
+              <a:t>las</a:t>
+            </a:r>
+            <a:r>
+              <a:rPr lang="en-US" sz="2000" b="0" u="none" strike="noStrike">
+                <a:solidFill>
+                  <a:srgbClr val="000000"/>
+                </a:solidFill>
+                <a:effectLst/>
+                <a:uFillTx/>
+                <a:latin typeface="Arial"/>
+              </a:rPr>
+              <a:t>t </a:t>
+            </a:r>
+            <a:r>
+              <a:rPr lang="en-US" sz="2000" b="0" u="none" strike="noStrike">
+                <a:solidFill>
+                  <a:srgbClr val="000000"/>
+                </a:solidFill>
+                <a:effectLst/>
+                <a:uFillTx/>
+                <a:latin typeface="Arial"/>
+              </a:rPr>
+              <a:t>tim</a:t>
+            </a:r>
+            <a:r>
+              <a:rPr lang="en-US" sz="2000" b="0" u="none" strike="noStrike">
+                <a:solidFill>
+                  <a:srgbClr val="000000"/>
+                </a:solidFill>
+                <a:effectLst/>
+                <a:uFillTx/>
+                <a:latin typeface="Arial"/>
+              </a:rPr>
+              <a:t>e </a:t>
+            </a:r>
+            <a:r>
+              <a:rPr lang="en-US" sz="2000" b="0" u="none" strike="noStrike">
+                <a:solidFill>
+                  <a:srgbClr val="000000"/>
+                </a:solidFill>
+                <a:effectLst/>
+                <a:uFillTx/>
+                <a:latin typeface="Arial"/>
+              </a:rPr>
+              <a:t>fin</a:t>
+            </a:r>
+            <a:r>
+              <a:rPr lang="en-US" sz="2000" b="0" u="none" strike="noStrike">
+                <a:solidFill>
+                  <a:srgbClr val="000000"/>
+                </a:solidFill>
+                <a:effectLst/>
+                <a:uFillTx/>
+                <a:latin typeface="Arial"/>
+              </a:rPr>
+              <a:t>all</a:t>
+            </a:r>
+            <a:r>
+              <a:rPr lang="en-US" sz="2000" b="0" u="none" strike="noStrike">
+                <a:solidFill>
+                  <a:srgbClr val="000000"/>
+                </a:solidFill>
+                <a:effectLst/>
+                <a:uFillTx/>
+                <a:latin typeface="Arial"/>
+              </a:rPr>
+              <a:t>y </a:t>
+            </a:r>
+            <a:r>
+              <a:rPr lang="en-US" sz="2000" b="0" u="none" strike="noStrike">
+                <a:solidFill>
+                  <a:srgbClr val="000000"/>
+                </a:solidFill>
+                <a:effectLst/>
+                <a:uFillTx/>
+                <a:latin typeface="Arial"/>
+              </a:rPr>
+              <a:t>get </a:t>
+            </a:r>
+            <a:r>
+              <a:rPr lang="en-US" sz="2000" b="0" u="none" strike="noStrike">
+                <a:solidFill>
+                  <a:srgbClr val="000000"/>
+                </a:solidFill>
+                <a:effectLst/>
+                <a:uFillTx/>
+                <a:latin typeface="Arial"/>
+              </a:rPr>
+              <a:t>us</a:t>
+            </a:r>
+            <a:r>
+              <a:rPr lang="en-US" sz="2000" b="0" u="none" strike="noStrike">
+                <a:solidFill>
+                  <a:srgbClr val="000000"/>
+                </a:solidFill>
+                <a:effectLst/>
+                <a:uFillTx/>
+                <a:latin typeface="Arial"/>
+              </a:rPr>
+              <a:t>ed </a:t>
+            </a:r>
+            <a:r>
+              <a:rPr lang="en-US" sz="2000" b="0" u="none" strike="noStrike">
+                <a:solidFill>
+                  <a:srgbClr val="000000"/>
+                </a:solidFill>
+                <a:effectLst/>
+                <a:uFillTx/>
+                <a:latin typeface="Arial"/>
+              </a:rPr>
+              <a:t>pro</a:t>
+            </a:r>
+            <a:r>
+              <a:rPr lang="en-US" sz="2000" b="0" u="none" strike="noStrike">
+                <a:solidFill>
+                  <a:srgbClr val="000000"/>
+                </a:solidFill>
+                <a:effectLst/>
+                <a:uFillTx/>
+                <a:latin typeface="Arial"/>
+              </a:rPr>
+              <a:t>per</a:t>
+            </a:r>
+            <a:r>
+              <a:rPr lang="en-US" sz="2000" b="0" u="none" strike="noStrike">
+                <a:solidFill>
+                  <a:srgbClr val="000000"/>
+                </a:solidFill>
+                <a:effectLst/>
+                <a:uFillTx/>
+                <a:latin typeface="Arial"/>
+              </a:rPr>
+              <a:t>ly.</a:t>
             </a:r>
             <a:endParaRPr lang="en-US" sz="2000" b="0" u="none" strike="noStrike">
               <a:solidFill>
@@ -537,7 +903,7 @@
         <p:spPr>
           <a:xfrm>
             <a:off x="3884760" y="8685360"/>
-            <a:ext cx="2971440" cy="458280"/>
+            <a:ext cx="2971080" cy="457920"/>
           </a:xfrm>
           <a:prstGeom prst="rect">
             <a:avLst/>
@@ -557,6 +923,9 @@
                 <a:spcPct val="100000"/>
               </a:lnSpc>
               <a:buNone/>
+              <a:tabLst>
+                <a:tab pos="0" algn="l"/>
+              </a:tabLst>
               <a:defRPr lang="en-US" sz="1200" b="0" u="none" strike="noStrike">
                 <a:solidFill>
                   <a:schemeClr val="dk1"/>
@@ -574,8 +943,11 @@
                 <a:spcPct val="100000"/>
               </a:lnSpc>
               <a:buNone/>
-            </a:pPr>
-            <a:fld id="{53A89E96-8E55-4B49-A222-F004A139A6D7}" type="slidenum">
+              <a:tabLst>
+                <a:tab pos="0" algn="l"/>
+              </a:tabLst>
+            </a:pPr>
+            <a:fld id="{928C667A-C6C7-4E65-804A-9C2BF13ECE1E}" type="slidenum">
               <a:rPr lang="en-US" sz="1200" b="0" u="none" strike="noStrike">
                 <a:solidFill>
                   <a:schemeClr val="dk1"/>
@@ -633,7 +1005,7 @@
         <p:spPr>
           <a:xfrm>
             <a:off x="685800" y="1143000"/>
-            <a:ext cx="5486040" cy="3085920"/>
+            <a:ext cx="5485680" cy="3085560"/>
           </a:xfrm>
           <a:prstGeom prst="rect">
             <a:avLst/>
@@ -656,7 +1028,7 @@
         <p:spPr>
           <a:xfrm>
             <a:off x="685800" y="4400640"/>
-            <a:ext cx="5486040" cy="3600000"/>
+            <a:ext cx="5485680" cy="3599640"/>
           </a:xfrm>
           <a:prstGeom prst="rect">
             <a:avLst/>
@@ -676,6 +1048,9 @@
                 <a:spcPct val="100000"/>
               </a:lnSpc>
               <a:buNone/>
+              <a:tabLst>
+                <a:tab pos="0" algn="l"/>
+              </a:tabLst>
             </a:pPr>
             <a:r>
               <a:rPr lang="en-US" sz="2000" b="0" u="none" strike="noStrike">
@@ -712,7 +1087,7 @@
         <p:spPr>
           <a:xfrm>
             <a:off x="3884760" y="8685360"/>
-            <a:ext cx="2971440" cy="458280"/>
+            <a:ext cx="2971080" cy="457920"/>
           </a:xfrm>
           <a:prstGeom prst="rect">
             <a:avLst/>
@@ -732,6 +1107,9 @@
                 <a:spcPct val="100000"/>
               </a:lnSpc>
               <a:buNone/>
+              <a:tabLst>
+                <a:tab pos="0" algn="l"/>
+              </a:tabLst>
               <a:defRPr lang="en-US" sz="1200" b="0" u="none" strike="noStrike">
                 <a:solidFill>
                   <a:schemeClr val="dk1"/>
@@ -749,8 +1127,11 @@
                 <a:spcPct val="100000"/>
               </a:lnSpc>
               <a:buNone/>
-            </a:pPr>
-            <a:fld id="{E5CF773E-F4EC-4884-8D36-76D447E8D596}" type="slidenum">
+              <a:tabLst>
+                <a:tab pos="0" algn="l"/>
+              </a:tabLst>
+            </a:pPr>
+            <a:fld id="{493BDB76-6867-4746-839C-A6444EDF94A1}" type="slidenum">
               <a:rPr lang="en-US" sz="1200" b="0" u="none" strike="noStrike">
                 <a:solidFill>
                   <a:schemeClr val="dk1"/>
@@ -808,7 +1189,7 @@
         <p:spPr>
           <a:xfrm>
             <a:off x="685800" y="1143000"/>
-            <a:ext cx="5486040" cy="3085920"/>
+            <a:ext cx="5485680" cy="3085560"/>
           </a:xfrm>
           <a:prstGeom prst="rect">
             <a:avLst/>
@@ -831,7 +1212,7 @@
         <p:spPr>
           <a:xfrm>
             <a:off x="685800" y="4400640"/>
-            <a:ext cx="5486040" cy="3600000"/>
+            <a:ext cx="5485680" cy="3599640"/>
           </a:xfrm>
           <a:prstGeom prst="rect">
             <a:avLst/>
@@ -851,6 +1232,9 @@
                 <a:spcPct val="100000"/>
               </a:lnSpc>
               <a:buNone/>
+              <a:tabLst>
+                <a:tab pos="0" algn="l"/>
+              </a:tabLst>
             </a:pPr>
             <a:r>
               <a:rPr lang="en-US" sz="2000" b="0" u="none" strike="noStrike">
@@ -887,7 +1271,7 @@
         <p:spPr>
           <a:xfrm>
             <a:off x="3884760" y="8685360"/>
-            <a:ext cx="2971440" cy="458280"/>
+            <a:ext cx="2971080" cy="457920"/>
           </a:xfrm>
           <a:prstGeom prst="rect">
             <a:avLst/>
@@ -907,6 +1291,9 @@
                 <a:spcPct val="100000"/>
               </a:lnSpc>
               <a:buNone/>
+              <a:tabLst>
+                <a:tab pos="0" algn="l"/>
+              </a:tabLst>
               <a:defRPr lang="en-US" sz="1200" b="0" u="none" strike="noStrike">
                 <a:solidFill>
                   <a:schemeClr val="dk1"/>
@@ -924,8 +1311,11 @@
                 <a:spcPct val="100000"/>
               </a:lnSpc>
               <a:buNone/>
-            </a:pPr>
-            <a:fld id="{981D5900-71B4-45C7-A856-48D2FDDFDDB8}" type="slidenum">
+              <a:tabLst>
+                <a:tab pos="0" algn="l"/>
+              </a:tabLst>
+            </a:pPr>
+            <a:fld id="{D7C00544-FC23-41C2-AE90-7176FC6B69A7}" type="slidenum">
               <a:rPr lang="en-US" sz="1200" b="0" u="none" strike="noStrike">
                 <a:solidFill>
                   <a:schemeClr val="dk1"/>
@@ -983,7 +1373,7 @@
         <p:spPr>
           <a:xfrm>
             <a:off x="685800" y="1143000"/>
-            <a:ext cx="5486040" cy="3085920"/>
+            <a:ext cx="5485680" cy="3085560"/>
           </a:xfrm>
           <a:prstGeom prst="rect">
             <a:avLst/>
@@ -1006,7 +1396,7 @@
         <p:spPr>
           <a:xfrm>
             <a:off x="685800" y="4400640"/>
-            <a:ext cx="5486040" cy="3600000"/>
+            <a:ext cx="5485680" cy="3599640"/>
           </a:xfrm>
           <a:prstGeom prst="rect">
             <a:avLst/>
@@ -1048,7 +1438,7 @@
         <p:spPr>
           <a:xfrm>
             <a:off x="3884760" y="8685360"/>
-            <a:ext cx="2971440" cy="458280"/>
+            <a:ext cx="2971080" cy="457920"/>
           </a:xfrm>
           <a:prstGeom prst="rect">
             <a:avLst/>
@@ -1068,6 +1458,9 @@
                 <a:spcPct val="100000"/>
               </a:lnSpc>
               <a:buNone/>
+              <a:tabLst>
+                <a:tab pos="0" algn="l"/>
+              </a:tabLst>
               <a:defRPr lang="en-US" sz="1200" b="0" u="none" strike="noStrike">
                 <a:solidFill>
                   <a:schemeClr val="dk1"/>
@@ -1085,8 +1478,11 @@
                 <a:spcPct val="100000"/>
               </a:lnSpc>
               <a:buNone/>
-            </a:pPr>
-            <a:fld id="{EF1E23FE-E56E-4B24-9A9B-08EC2AECE71B}" type="slidenum">
+              <a:tabLst>
+                <a:tab pos="0" algn="l"/>
+              </a:tabLst>
+            </a:pPr>
+            <a:fld id="{75CAFADA-89EC-40E3-BD31-E50F66C6288A}" type="slidenum">
               <a:rPr lang="en-US" sz="1200" b="0" u="none" strike="noStrike">
                 <a:solidFill>
                   <a:schemeClr val="dk1"/>
@@ -1144,7 +1540,7 @@
         <p:spPr>
           <a:xfrm>
             <a:off x="685800" y="1143000"/>
-            <a:ext cx="5486040" cy="3085920"/>
+            <a:ext cx="5485680" cy="3085560"/>
           </a:xfrm>
           <a:prstGeom prst="rect">
             <a:avLst/>
@@ -1167,7 +1563,7 @@
         <p:spPr>
           <a:xfrm>
             <a:off x="685800" y="4400640"/>
-            <a:ext cx="5486040" cy="3600000"/>
+            <a:ext cx="5485680" cy="3599640"/>
           </a:xfrm>
           <a:prstGeom prst="rect">
             <a:avLst/>
@@ -1209,7 +1605,7 @@
         <p:spPr>
           <a:xfrm>
             <a:off x="3884760" y="8685360"/>
-            <a:ext cx="2971440" cy="458280"/>
+            <a:ext cx="2971080" cy="457920"/>
           </a:xfrm>
           <a:prstGeom prst="rect">
             <a:avLst/>
@@ -1229,6 +1625,9 @@
                 <a:spcPct val="100000"/>
               </a:lnSpc>
               <a:buNone/>
+              <a:tabLst>
+                <a:tab pos="0" algn="l"/>
+              </a:tabLst>
               <a:defRPr lang="en-US" sz="1200" b="0" u="none" strike="noStrike">
                 <a:solidFill>
                   <a:schemeClr val="dk1"/>
@@ -1246,8 +1645,11 @@
                 <a:spcPct val="100000"/>
               </a:lnSpc>
               <a:buNone/>
-            </a:pPr>
-            <a:fld id="{6D70AEE8-EF0B-4962-93AA-E01426EC44C2}" type="slidenum">
+              <a:tabLst>
+                <a:tab pos="0" algn="l"/>
+              </a:tabLst>
+            </a:pPr>
+            <a:fld id="{80BCFEDC-8B53-40ED-81B5-4DBBB576E96C}" type="slidenum">
               <a:rPr lang="en-US" sz="1200" b="0" u="none" strike="noStrike">
                 <a:solidFill>
                   <a:schemeClr val="dk1"/>
@@ -1305,7 +1707,7 @@
         <p:spPr>
           <a:xfrm>
             <a:off x="685800" y="1143000"/>
-            <a:ext cx="5486040" cy="3085920"/>
+            <a:ext cx="5485680" cy="3085560"/>
           </a:xfrm>
           <a:prstGeom prst="rect">
             <a:avLst/>
@@ -1328,7 +1730,7 @@
         <p:spPr>
           <a:xfrm>
             <a:off x="685800" y="4400640"/>
-            <a:ext cx="5486040" cy="3600000"/>
+            <a:ext cx="5485680" cy="3599640"/>
           </a:xfrm>
           <a:prstGeom prst="rect">
             <a:avLst/>
@@ -1370,7 +1772,7 @@
         <p:spPr>
           <a:xfrm>
             <a:off x="3884760" y="8685360"/>
-            <a:ext cx="2971440" cy="458280"/>
+            <a:ext cx="2971080" cy="457920"/>
           </a:xfrm>
           <a:prstGeom prst="rect">
             <a:avLst/>
@@ -1390,6 +1792,9 @@
                 <a:spcPct val="100000"/>
               </a:lnSpc>
               <a:buNone/>
+              <a:tabLst>
+                <a:tab pos="0" algn="l"/>
+              </a:tabLst>
               <a:defRPr lang="en-US" sz="1200" b="0" u="none" strike="noStrike">
                 <a:solidFill>
                   <a:schemeClr val="dk1"/>
@@ -1407,8 +1812,11 @@
                 <a:spcPct val="100000"/>
               </a:lnSpc>
               <a:buNone/>
-            </a:pPr>
-            <a:fld id="{8EEED25A-FB11-4F2B-9760-49961677C8BC}" type="slidenum">
+              <a:tabLst>
+                <a:tab pos="0" algn="l"/>
+              </a:tabLst>
+            </a:pPr>
+            <a:fld id="{1684E8D1-2060-4855-941B-400C1C58B2EA}" type="slidenum">
               <a:rPr lang="en-US" sz="1200" b="0" u="none" strike="noStrike">
                 <a:solidFill>
                   <a:schemeClr val="dk1"/>
@@ -1466,7 +1874,7 @@
         <p:spPr>
           <a:xfrm>
             <a:off x="685800" y="1143000"/>
-            <a:ext cx="5486040" cy="3085920"/>
+            <a:ext cx="5485680" cy="3085560"/>
           </a:xfrm>
           <a:prstGeom prst="rect">
             <a:avLst/>
@@ -1489,7 +1897,7 @@
         <p:spPr>
           <a:xfrm>
             <a:off x="685800" y="4400640"/>
-            <a:ext cx="5486040" cy="3600000"/>
+            <a:ext cx="5485680" cy="3599640"/>
           </a:xfrm>
           <a:prstGeom prst="rect">
             <a:avLst/>
@@ -1531,7 +1939,7 @@
         <p:spPr>
           <a:xfrm>
             <a:off x="3884760" y="8685360"/>
-            <a:ext cx="2971440" cy="458280"/>
+            <a:ext cx="2971080" cy="457920"/>
           </a:xfrm>
           <a:prstGeom prst="rect">
             <a:avLst/>
@@ -1551,6 +1959,9 @@
                 <a:spcPct val="100000"/>
               </a:lnSpc>
               <a:buNone/>
+              <a:tabLst>
+                <a:tab pos="0" algn="l"/>
+              </a:tabLst>
               <a:defRPr lang="en-US" sz="1200" b="0" u="none" strike="noStrike">
                 <a:solidFill>
                   <a:schemeClr val="dk1"/>
@@ -1568,8 +1979,11 @@
                 <a:spcPct val="100000"/>
               </a:lnSpc>
               <a:buNone/>
-            </a:pPr>
-            <a:fld id="{DD1E4D34-F9FE-4EC1-8C72-EB162AF003DB}" type="slidenum">
+              <a:tabLst>
+                <a:tab pos="0" algn="l"/>
+              </a:tabLst>
+            </a:pPr>
+            <a:fld id="{D96DD151-DE2C-4700-A383-4914F7410635}" type="slidenum">
               <a:rPr lang="en-US" sz="1200" b="0" u="none" strike="noStrike">
                 <a:solidFill>
                   <a:schemeClr val="dk1"/>
@@ -1627,7 +2041,7 @@
         <p:spPr>
           <a:xfrm>
             <a:off x="685800" y="1143000"/>
-            <a:ext cx="5486040" cy="3085920"/>
+            <a:ext cx="5485680" cy="3085560"/>
           </a:xfrm>
           <a:prstGeom prst="rect">
             <a:avLst/>
@@ -1650,7 +2064,7 @@
         <p:spPr>
           <a:xfrm>
             <a:off x="685800" y="4400640"/>
-            <a:ext cx="5486040" cy="3600000"/>
+            <a:ext cx="5485680" cy="3599640"/>
           </a:xfrm>
           <a:prstGeom prst="rect">
             <a:avLst/>
@@ -1670,6 +2084,9 @@
                 <a:spcPct val="100000"/>
               </a:lnSpc>
               <a:buNone/>
+              <a:tabLst>
+                <a:tab pos="0" algn="l"/>
+              </a:tabLst>
             </a:pPr>
             <a:r>
               <a:rPr lang="en-US" sz="2000" b="0" u="none" strike="noStrike">
@@ -1680,18 +2097,7 @@
                 <a:uFillTx/>
                 <a:latin typeface="Arial"/>
               </a:rPr>
-              <a:t>Deliberately run the broken version live, then Ctrl+C to stop it — a memorable, safe way to </a:t>
-            </a:r>
-            <a:r>
-              <a:rPr lang="en-US" sz="2000" b="0" u="none" strike="noStrike">
-                <a:solidFill>
-                  <a:srgbClr val="000000"/>
-                </a:solidFill>
-                <a:effectLst/>
-                <a:uFillTx/>
-                <a:latin typeface="Arial"/>
-              </a:rPr>
-              <a:t>show this.</a:t>
+              <a:t>Deliberately run the broken version live, then Ctrl+C to stop it — a memorable, safe way to show this.</a:t>
             </a:r>
             <a:endParaRPr lang="en-US" sz="2000" b="0" u="none" strike="noStrike">
               <a:solidFill>
@@ -1717,7 +2123,7 @@
         <p:spPr>
           <a:xfrm>
             <a:off x="3884760" y="8685360"/>
-            <a:ext cx="2971440" cy="458280"/>
+            <a:ext cx="2971080" cy="457920"/>
           </a:xfrm>
           <a:prstGeom prst="rect">
             <a:avLst/>
@@ -1737,6 +2143,9 @@
                 <a:spcPct val="100000"/>
               </a:lnSpc>
               <a:buNone/>
+              <a:tabLst>
+                <a:tab pos="0" algn="l"/>
+              </a:tabLst>
               <a:defRPr lang="en-US" sz="1200" b="0" u="none" strike="noStrike">
                 <a:solidFill>
                   <a:schemeClr val="dk1"/>
@@ -1754,8 +2163,11 @@
                 <a:spcPct val="100000"/>
               </a:lnSpc>
               <a:buNone/>
-            </a:pPr>
-            <a:fld id="{2DABD397-4ABF-44D9-86E4-73B19FE351B7}" type="slidenum">
+              <a:tabLst>
+                <a:tab pos="0" algn="l"/>
+              </a:tabLst>
+            </a:pPr>
+            <a:fld id="{EA3780FF-D4BD-44F8-B7C5-A692DA888E62}" type="slidenum">
               <a:rPr lang="en-US" sz="1200" b="0" u="none" strike="noStrike">
                 <a:solidFill>
                   <a:schemeClr val="dk1"/>
@@ -1813,7 +2225,7 @@
         <p:spPr>
           <a:xfrm>
             <a:off x="685800" y="1143000"/>
-            <a:ext cx="5486040" cy="3085920"/>
+            <a:ext cx="5485680" cy="3085560"/>
           </a:xfrm>
           <a:prstGeom prst="rect">
             <a:avLst/>
@@ -1836,7 +2248,7 @@
         <p:spPr>
           <a:xfrm>
             <a:off x="685800" y="4400640"/>
-            <a:ext cx="5486040" cy="3600000"/>
+            <a:ext cx="5485680" cy="3599640"/>
           </a:xfrm>
           <a:prstGeom prst="rect">
             <a:avLst/>
@@ -1878,7 +2290,7 @@
         <p:spPr>
           <a:xfrm>
             <a:off x="3884760" y="8685360"/>
-            <a:ext cx="2971440" cy="458280"/>
+            <a:ext cx="2971080" cy="457920"/>
           </a:xfrm>
           <a:prstGeom prst="rect">
             <a:avLst/>
@@ -1898,6 +2310,9 @@
                 <a:spcPct val="100000"/>
               </a:lnSpc>
               <a:buNone/>
+              <a:tabLst>
+                <a:tab pos="0" algn="l"/>
+              </a:tabLst>
               <a:defRPr lang="en-US" sz="1200" b="0" u="none" strike="noStrike">
                 <a:solidFill>
                   <a:schemeClr val="dk1"/>
@@ -1915,8 +2330,11 @@
                 <a:spcPct val="100000"/>
               </a:lnSpc>
               <a:buNone/>
-            </a:pPr>
-            <a:fld id="{2C3C1843-7ABE-4372-8863-16D4C4B696C2}" type="slidenum">
+              <a:tabLst>
+                <a:tab pos="0" algn="l"/>
+              </a:tabLst>
+            </a:pPr>
+            <a:fld id="{C0D20F9B-1DDF-4A1F-9498-2322EA138AA2}" type="slidenum">
               <a:rPr lang="en-US" sz="1200" b="0" u="none" strike="noStrike">
                 <a:solidFill>
                   <a:schemeClr val="dk1"/>
@@ -1974,7 +2392,7 @@
         <p:spPr>
           <a:xfrm>
             <a:off x="685800" y="1143000"/>
-            <a:ext cx="5486040" cy="3085920"/>
+            <a:ext cx="5485680" cy="3085560"/>
           </a:xfrm>
           <a:prstGeom prst="rect">
             <a:avLst/>
@@ -1997,7 +2415,7 @@
         <p:spPr>
           <a:xfrm>
             <a:off x="685800" y="4400640"/>
-            <a:ext cx="5486040" cy="3600000"/>
+            <a:ext cx="5485680" cy="3599640"/>
           </a:xfrm>
           <a:prstGeom prst="rect">
             <a:avLst/>
@@ -2039,7 +2457,7 @@
         <p:spPr>
           <a:xfrm>
             <a:off x="3884760" y="8685360"/>
-            <a:ext cx="2971440" cy="458280"/>
+            <a:ext cx="2971080" cy="457920"/>
           </a:xfrm>
           <a:prstGeom prst="rect">
             <a:avLst/>
@@ -2059,6 +2477,9 @@
                 <a:spcPct val="100000"/>
               </a:lnSpc>
               <a:buNone/>
+              <a:tabLst>
+                <a:tab pos="0" algn="l"/>
+              </a:tabLst>
               <a:defRPr lang="en-US" sz="1200" b="0" u="none" strike="noStrike">
                 <a:solidFill>
                   <a:schemeClr val="dk1"/>
@@ -2076,8 +2497,11 @@
                 <a:spcPct val="100000"/>
               </a:lnSpc>
               <a:buNone/>
-            </a:pPr>
-            <a:fld id="{58AFF38C-3C03-401E-999C-D147D2605496}" type="slidenum">
+              <a:tabLst>
+                <a:tab pos="0" algn="l"/>
+              </a:tabLst>
+            </a:pPr>
+            <a:fld id="{C992903B-9B48-49E0-BDAF-91738445A667}" type="slidenum">
               <a:rPr lang="en-US" sz="1200" b="0" u="none" strike="noStrike">
                 <a:solidFill>
                   <a:schemeClr val="dk1"/>
@@ -2135,7 +2559,7 @@
         <p:spPr>
           <a:xfrm>
             <a:off x="685800" y="1143000"/>
-            <a:ext cx="5486040" cy="3085920"/>
+            <a:ext cx="5485680" cy="3085560"/>
           </a:xfrm>
           <a:prstGeom prst="rect">
             <a:avLst/>
@@ -2158,7 +2582,7 @@
         <p:spPr>
           <a:xfrm>
             <a:off x="685800" y="4400640"/>
-            <a:ext cx="5486040" cy="3600000"/>
+            <a:ext cx="5485680" cy="3599640"/>
           </a:xfrm>
           <a:prstGeom prst="rect">
             <a:avLst/>
@@ -2200,7 +2624,7 @@
         <p:spPr>
           <a:xfrm>
             <a:off x="3884760" y="8685360"/>
-            <a:ext cx="2971440" cy="458280"/>
+            <a:ext cx="2971080" cy="457920"/>
           </a:xfrm>
           <a:prstGeom prst="rect">
             <a:avLst/>
@@ -2220,6 +2644,9 @@
                 <a:spcPct val="100000"/>
               </a:lnSpc>
               <a:buNone/>
+              <a:tabLst>
+                <a:tab pos="0" algn="l"/>
+              </a:tabLst>
               <a:defRPr lang="en-US" sz="1200" b="0" u="none" strike="noStrike">
                 <a:solidFill>
                   <a:schemeClr val="dk1"/>
@@ -2237,8 +2664,11 @@
                 <a:spcPct val="100000"/>
               </a:lnSpc>
               <a:buNone/>
-            </a:pPr>
-            <a:fld id="{48DD89E2-2631-4E42-97A5-5A9802464CCE}" type="slidenum">
+              <a:tabLst>
+                <a:tab pos="0" algn="l"/>
+              </a:tabLst>
+            </a:pPr>
+            <a:fld id="{AF8B9274-948B-4FD2-A320-122BE9951523}" type="slidenum">
               <a:rPr lang="en-US" sz="1200" b="0" u="none" strike="noStrike">
                 <a:solidFill>
                   <a:schemeClr val="dk1"/>
@@ -2296,7 +2726,7 @@
         <p:spPr>
           <a:xfrm>
             <a:off x="685800" y="1143000"/>
-            <a:ext cx="5486040" cy="3085920"/>
+            <a:ext cx="5485680" cy="3085560"/>
           </a:xfrm>
           <a:prstGeom prst="rect">
             <a:avLst/>
@@ -2319,7 +2749,7 @@
         <p:spPr>
           <a:xfrm>
             <a:off x="685800" y="4400640"/>
-            <a:ext cx="5486040" cy="3600000"/>
+            <a:ext cx="5485680" cy="3599640"/>
           </a:xfrm>
           <a:prstGeom prst="rect">
             <a:avLst/>
@@ -2361,7 +2791,7 @@
         <p:spPr>
           <a:xfrm>
             <a:off x="3884760" y="8685360"/>
-            <a:ext cx="2971440" cy="458280"/>
+            <a:ext cx="2971080" cy="457920"/>
           </a:xfrm>
           <a:prstGeom prst="rect">
             <a:avLst/>
@@ -2381,6 +2811,9 @@
                 <a:spcPct val="100000"/>
               </a:lnSpc>
               <a:buNone/>
+              <a:tabLst>
+                <a:tab pos="0" algn="l"/>
+              </a:tabLst>
               <a:defRPr lang="en-US" sz="1200" b="0" u="none" strike="noStrike">
                 <a:solidFill>
                   <a:schemeClr val="dk1"/>
@@ -2398,8 +2831,11 @@
                 <a:spcPct val="100000"/>
               </a:lnSpc>
               <a:buNone/>
-            </a:pPr>
-            <a:fld id="{FB03A6C3-0213-4942-BFA8-2F1539BF359B}" type="slidenum">
+              <a:tabLst>
+                <a:tab pos="0" algn="l"/>
+              </a:tabLst>
+            </a:pPr>
+            <a:fld id="{FC7531C1-B671-491E-90E7-1A5F974ECEFF}" type="slidenum">
               <a:rPr lang="en-US" sz="1200" b="0" u="none" strike="noStrike">
                 <a:solidFill>
                   <a:schemeClr val="dk1"/>
@@ -2457,7 +2893,7 @@
         <p:spPr>
           <a:xfrm>
             <a:off x="685800" y="1143000"/>
-            <a:ext cx="5486040" cy="3085920"/>
+            <a:ext cx="5485680" cy="3085560"/>
           </a:xfrm>
           <a:prstGeom prst="rect">
             <a:avLst/>
@@ -2480,7 +2916,7 @@
         <p:spPr>
           <a:xfrm>
             <a:off x="685800" y="4400640"/>
-            <a:ext cx="5486040" cy="3600000"/>
+            <a:ext cx="5485680" cy="3599640"/>
           </a:xfrm>
           <a:prstGeom prst="rect">
             <a:avLst/>
@@ -2522,7 +2958,7 @@
         <p:spPr>
           <a:xfrm>
             <a:off x="3884760" y="8685360"/>
-            <a:ext cx="2971440" cy="458280"/>
+            <a:ext cx="2971080" cy="457920"/>
           </a:xfrm>
           <a:prstGeom prst="rect">
             <a:avLst/>
@@ -2542,6 +2978,9 @@
                 <a:spcPct val="100000"/>
               </a:lnSpc>
               <a:buNone/>
+              <a:tabLst>
+                <a:tab pos="0" algn="l"/>
+              </a:tabLst>
               <a:defRPr lang="en-US" sz="1200" b="0" u="none" strike="noStrike">
                 <a:solidFill>
                   <a:schemeClr val="dk1"/>
@@ -2559,8 +2998,11 @@
                 <a:spcPct val="100000"/>
               </a:lnSpc>
               <a:buNone/>
-            </a:pPr>
-            <a:fld id="{4DBA3942-4CC0-4DAF-86E1-15EB18CA7E2D}" type="slidenum">
+              <a:tabLst>
+                <a:tab pos="0" algn="l"/>
+              </a:tabLst>
+            </a:pPr>
+            <a:fld id="{32819B08-CF52-4B75-9072-6CD21DE5066C}" type="slidenum">
               <a:rPr lang="en-US" sz="1200" b="0" u="none" strike="noStrike">
                 <a:solidFill>
                   <a:schemeClr val="dk1"/>
@@ -2618,7 +3060,7 @@
         <p:spPr>
           <a:xfrm>
             <a:off x="685800" y="1143000"/>
-            <a:ext cx="5486040" cy="3085920"/>
+            <a:ext cx="5485680" cy="3085560"/>
           </a:xfrm>
           <a:prstGeom prst="rect">
             <a:avLst/>
@@ -2641,7 +3083,7 @@
         <p:spPr>
           <a:xfrm>
             <a:off x="685800" y="4400640"/>
-            <a:ext cx="5486040" cy="3600000"/>
+            <a:ext cx="5485680" cy="3599640"/>
           </a:xfrm>
           <a:prstGeom prst="rect">
             <a:avLst/>
@@ -2683,7 +3125,7 @@
         <p:spPr>
           <a:xfrm>
             <a:off x="3884760" y="8685360"/>
-            <a:ext cx="2971440" cy="458280"/>
+            <a:ext cx="2971080" cy="457920"/>
           </a:xfrm>
           <a:prstGeom prst="rect">
             <a:avLst/>
@@ -2703,6 +3145,9 @@
                 <a:spcPct val="100000"/>
               </a:lnSpc>
               <a:buNone/>
+              <a:tabLst>
+                <a:tab pos="0" algn="l"/>
+              </a:tabLst>
               <a:defRPr lang="en-US" sz="1200" b="0" u="none" strike="noStrike">
                 <a:solidFill>
                   <a:schemeClr val="dk1"/>
@@ -2720,8 +3165,11 @@
                 <a:spcPct val="100000"/>
               </a:lnSpc>
               <a:buNone/>
-            </a:pPr>
-            <a:fld id="{C655F7E9-92D2-4776-B39E-0B47487F4A05}" type="slidenum">
+              <a:tabLst>
+                <a:tab pos="0" algn="l"/>
+              </a:tabLst>
+            </a:pPr>
+            <a:fld id="{B16F0082-07FF-4CE4-8E7C-33C9DCF046A7}" type="slidenum">
               <a:rPr lang="en-US" sz="1200" b="0" u="none" strike="noStrike">
                 <a:solidFill>
                   <a:schemeClr val="dk1"/>
@@ -2779,7 +3227,7 @@
         <p:spPr>
           <a:xfrm>
             <a:off x="685800" y="1143000"/>
-            <a:ext cx="5486040" cy="3085920"/>
+            <a:ext cx="5485680" cy="3085560"/>
           </a:xfrm>
           <a:prstGeom prst="rect">
             <a:avLst/>
@@ -2802,7 +3250,7 @@
         <p:spPr>
           <a:xfrm>
             <a:off x="685800" y="4400640"/>
-            <a:ext cx="5486040" cy="3600000"/>
+            <a:ext cx="5485680" cy="3599640"/>
           </a:xfrm>
           <a:prstGeom prst="rect">
             <a:avLst/>
@@ -2844,7 +3292,7 @@
         <p:spPr>
           <a:xfrm>
             <a:off x="3884760" y="8685360"/>
-            <a:ext cx="2971440" cy="458280"/>
+            <a:ext cx="2971080" cy="457920"/>
           </a:xfrm>
           <a:prstGeom prst="rect">
             <a:avLst/>
@@ -2864,6 +3312,9 @@
                 <a:spcPct val="100000"/>
               </a:lnSpc>
               <a:buNone/>
+              <a:tabLst>
+                <a:tab pos="0" algn="l"/>
+              </a:tabLst>
               <a:defRPr lang="en-US" sz="1200" b="0" u="none" strike="noStrike">
                 <a:solidFill>
                   <a:schemeClr val="dk1"/>
@@ -2881,8 +3332,11 @@
                 <a:spcPct val="100000"/>
               </a:lnSpc>
               <a:buNone/>
-            </a:pPr>
-            <a:fld id="{14C97384-A98A-4DF4-866C-F168ABE1DADC}" type="slidenum">
+              <a:tabLst>
+                <a:tab pos="0" algn="l"/>
+              </a:tabLst>
+            </a:pPr>
+            <a:fld id="{63B78786-0B25-4190-AA99-17A47E96B146}" type="slidenum">
               <a:rPr lang="en-US" sz="1200" b="0" u="none" strike="noStrike">
                 <a:solidFill>
                   <a:schemeClr val="dk1"/>
@@ -2940,7 +3394,7 @@
         <p:spPr>
           <a:xfrm>
             <a:off x="685800" y="1143000"/>
-            <a:ext cx="5486040" cy="3085920"/>
+            <a:ext cx="5485680" cy="3085560"/>
           </a:xfrm>
           <a:prstGeom prst="rect">
             <a:avLst/>
@@ -2963,7 +3417,7 @@
         <p:spPr>
           <a:xfrm>
             <a:off x="685800" y="4400640"/>
-            <a:ext cx="5486040" cy="3600000"/>
+            <a:ext cx="5485680" cy="3599640"/>
           </a:xfrm>
           <a:prstGeom prst="rect">
             <a:avLst/>
@@ -2983,6 +3437,9 @@
                 <a:spcPct val="100000"/>
               </a:lnSpc>
               <a:buNone/>
+              <a:tabLst>
+                <a:tab pos="0" algn="l"/>
+              </a:tabLst>
             </a:pPr>
             <a:r>
               <a:rPr lang="en-US" sz="2000" b="0" u="none" strike="noStrike">
@@ -2993,7 +3450,18 @@
                 <a:uFillTx/>
                 <a:latin typeface="Arial"/>
               </a:rPr>
-              <a:t>Worth flagging explicitly as a Python quirk — most other languages don't have this at all.</a:t>
+              <a:t>Worth flagging explicitly as a Python quirk — most other languages don't have this </a:t>
+            </a:r>
+            <a:r>
+              <a:rPr lang="en-US" sz="2000" b="0" u="none" strike="noStrike">
+                <a:solidFill>
+                  <a:srgbClr val="000000"/>
+                </a:solidFill>
+                <a:effectLst/>
+                <a:uFillTx/>
+                <a:latin typeface="Arial"/>
+              </a:rPr>
+              <a:t>at all.</a:t>
             </a:r>
             <a:endParaRPr lang="en-US" sz="2000" b="0" u="none" strike="noStrike">
               <a:solidFill>
@@ -3019,7 +3487,7 @@
         <p:spPr>
           <a:xfrm>
             <a:off x="3884760" y="8685360"/>
-            <a:ext cx="2971440" cy="458280"/>
+            <a:ext cx="2971080" cy="457920"/>
           </a:xfrm>
           <a:prstGeom prst="rect">
             <a:avLst/>
@@ -3039,6 +3507,9 @@
                 <a:spcPct val="100000"/>
               </a:lnSpc>
               <a:buNone/>
+              <a:tabLst>
+                <a:tab pos="0" algn="l"/>
+              </a:tabLst>
               <a:defRPr lang="en-US" sz="1200" b="0" u="none" strike="noStrike">
                 <a:solidFill>
                   <a:schemeClr val="dk1"/>
@@ -3056,8 +3527,11 @@
                 <a:spcPct val="100000"/>
               </a:lnSpc>
               <a:buNone/>
-            </a:pPr>
-            <a:fld id="{C9162698-5053-46EF-BC86-3FE439960A77}" type="slidenum">
+              <a:tabLst>
+                <a:tab pos="0" algn="l"/>
+              </a:tabLst>
+            </a:pPr>
+            <a:fld id="{70674137-3A7F-4564-B81B-9198DAB9875C}" type="slidenum">
               <a:rPr lang="en-US" sz="1200" b="0" u="none" strike="noStrike">
                 <a:solidFill>
                   <a:schemeClr val="dk1"/>
@@ -3115,7 +3589,7 @@
         <p:spPr>
           <a:xfrm>
             <a:off x="685800" y="1143000"/>
-            <a:ext cx="5486040" cy="3085920"/>
+            <a:ext cx="5485680" cy="3085560"/>
           </a:xfrm>
           <a:prstGeom prst="rect">
             <a:avLst/>
@@ -3138,7 +3612,7 @@
         <p:spPr>
           <a:xfrm>
             <a:off x="685800" y="4400640"/>
-            <a:ext cx="5486040" cy="3600000"/>
+            <a:ext cx="5485680" cy="3599640"/>
           </a:xfrm>
           <a:prstGeom prst="rect">
             <a:avLst/>
@@ -3158,6 +3632,9 @@
                 <a:spcPct val="100000"/>
               </a:lnSpc>
               <a:buNone/>
+              <a:tabLst>
+                <a:tab pos="0" algn="l"/>
+              </a:tabLst>
             </a:pPr>
             <a:r>
               <a:rPr lang="en-US" sz="2000" b="0" u="none" strike="noStrike">
@@ -3194,7 +3671,7 @@
         <p:spPr>
           <a:xfrm>
             <a:off x="3884760" y="8685360"/>
-            <a:ext cx="2971440" cy="458280"/>
+            <a:ext cx="2971080" cy="457920"/>
           </a:xfrm>
           <a:prstGeom prst="rect">
             <a:avLst/>
@@ -3214,6 +3691,9 @@
                 <a:spcPct val="100000"/>
               </a:lnSpc>
               <a:buNone/>
+              <a:tabLst>
+                <a:tab pos="0" algn="l"/>
+              </a:tabLst>
               <a:defRPr lang="en-US" sz="1200" b="0" u="none" strike="noStrike">
                 <a:solidFill>
                   <a:schemeClr val="dk1"/>
@@ -3231,8 +3711,11 @@
                 <a:spcPct val="100000"/>
               </a:lnSpc>
               <a:buNone/>
-            </a:pPr>
-            <a:fld id="{C1DB5D7C-36DB-4EBD-B5B6-16CF7F22C6A4}" type="slidenum">
+              <a:tabLst>
+                <a:tab pos="0" algn="l"/>
+              </a:tabLst>
+            </a:pPr>
+            <a:fld id="{6E0F846B-B1F2-4F96-91C4-A14E70798CE0}" type="slidenum">
               <a:rPr lang="en-US" sz="1200" b="0" u="none" strike="noStrike">
                 <a:solidFill>
                   <a:schemeClr val="dk1"/>
@@ -3290,7 +3773,7 @@
         <p:spPr>
           <a:xfrm>
             <a:off x="685800" y="1143000"/>
-            <a:ext cx="5486040" cy="3085920"/>
+            <a:ext cx="5485680" cy="3085560"/>
           </a:xfrm>
           <a:prstGeom prst="rect">
             <a:avLst/>
@@ -3313,7 +3796,7 @@
         <p:spPr>
           <a:xfrm>
             <a:off x="685800" y="4400640"/>
-            <a:ext cx="5486040" cy="3600000"/>
+            <a:ext cx="5485680" cy="3599640"/>
           </a:xfrm>
           <a:prstGeom prst="rect">
             <a:avLst/>
@@ -3355,7 +3838,7 @@
         <p:spPr>
           <a:xfrm>
             <a:off x="3884760" y="8685360"/>
-            <a:ext cx="2971440" cy="458280"/>
+            <a:ext cx="2971080" cy="457920"/>
           </a:xfrm>
           <a:prstGeom prst="rect">
             <a:avLst/>
@@ -3375,6 +3858,9 @@
                 <a:spcPct val="100000"/>
               </a:lnSpc>
               <a:buNone/>
+              <a:tabLst>
+                <a:tab pos="0" algn="l"/>
+              </a:tabLst>
               <a:defRPr lang="en-US" sz="1200" b="0" u="none" strike="noStrike">
                 <a:solidFill>
                   <a:schemeClr val="dk1"/>
@@ -3392,8 +3878,11 @@
                 <a:spcPct val="100000"/>
               </a:lnSpc>
               <a:buNone/>
-            </a:pPr>
-            <a:fld id="{A2CF213D-0E90-43F3-AF13-691E9C9CEF51}" type="slidenum">
+              <a:tabLst>
+                <a:tab pos="0" algn="l"/>
+              </a:tabLst>
+            </a:pPr>
+            <a:fld id="{6FD2B850-53BF-40B6-9A2D-AF20E877637E}" type="slidenum">
               <a:rPr lang="en-US" sz="1200" b="0" u="none" strike="noStrike">
                 <a:solidFill>
                   <a:schemeClr val="dk1"/>
@@ -3451,7 +3940,7 @@
         <p:spPr>
           <a:xfrm>
             <a:off x="685800" y="1143000"/>
-            <a:ext cx="5486040" cy="3085920"/>
+            <a:ext cx="5485680" cy="3085560"/>
           </a:xfrm>
           <a:prstGeom prst="rect">
             <a:avLst/>
@@ -3474,7 +3963,7 @@
         <p:spPr>
           <a:xfrm>
             <a:off x="685800" y="4400640"/>
-            <a:ext cx="5486040" cy="3600000"/>
+            <a:ext cx="5485680" cy="3599640"/>
           </a:xfrm>
           <a:prstGeom prst="rect">
             <a:avLst/>
@@ -3516,7 +4005,7 @@
         <p:spPr>
           <a:xfrm>
             <a:off x="3884760" y="8685360"/>
-            <a:ext cx="2971440" cy="458280"/>
+            <a:ext cx="2971080" cy="457920"/>
           </a:xfrm>
           <a:prstGeom prst="rect">
             <a:avLst/>
@@ -3536,6 +4025,9 @@
                 <a:spcPct val="100000"/>
               </a:lnSpc>
               <a:buNone/>
+              <a:tabLst>
+                <a:tab pos="0" algn="l"/>
+              </a:tabLst>
               <a:defRPr lang="en-US" sz="1200" b="0" u="none" strike="noStrike">
                 <a:solidFill>
                   <a:schemeClr val="dk1"/>
@@ -3553,8 +4045,11 @@
                 <a:spcPct val="100000"/>
               </a:lnSpc>
               <a:buNone/>
-            </a:pPr>
-            <a:fld id="{AE461E52-7702-43B6-BF3F-734EDB9DC7E8}" type="slidenum">
+              <a:tabLst>
+                <a:tab pos="0" algn="l"/>
+              </a:tabLst>
+            </a:pPr>
+            <a:fld id="{3FC94CC8-4D47-4DCC-A813-0ADADF1E1DF2}" type="slidenum">
               <a:rPr lang="en-US" sz="1200" b="0" u="none" strike="noStrike">
                 <a:solidFill>
                   <a:schemeClr val="dk1"/>
@@ -3612,7 +4107,7 @@
         <p:spPr>
           <a:xfrm>
             <a:off x="685800" y="1143000"/>
-            <a:ext cx="5486040" cy="3085920"/>
+            <a:ext cx="5485680" cy="3085560"/>
           </a:xfrm>
           <a:prstGeom prst="rect">
             <a:avLst/>
@@ -3635,7 +4130,7 @@
         <p:spPr>
           <a:xfrm>
             <a:off x="685800" y="4400640"/>
-            <a:ext cx="5486040" cy="3600000"/>
+            <a:ext cx="5485680" cy="3599640"/>
           </a:xfrm>
           <a:prstGeom prst="rect">
             <a:avLst/>
@@ -3677,7 +4172,7 @@
         <p:spPr>
           <a:xfrm>
             <a:off x="3884760" y="8685360"/>
-            <a:ext cx="2971440" cy="458280"/>
+            <a:ext cx="2971080" cy="457920"/>
           </a:xfrm>
           <a:prstGeom prst="rect">
             <a:avLst/>
@@ -3697,6 +4192,9 @@
                 <a:spcPct val="100000"/>
               </a:lnSpc>
               <a:buNone/>
+              <a:tabLst>
+                <a:tab pos="0" algn="l"/>
+              </a:tabLst>
               <a:defRPr lang="en-US" sz="1200" b="0" u="none" strike="noStrike">
                 <a:solidFill>
                   <a:schemeClr val="dk1"/>
@@ -3714,8 +4212,11 @@
                 <a:spcPct val="100000"/>
               </a:lnSpc>
               <a:buNone/>
-            </a:pPr>
-            <a:fld id="{9E4CC22C-36AC-4445-B732-0720C4DCADC9}" type="slidenum">
+              <a:tabLst>
+                <a:tab pos="0" algn="l"/>
+              </a:tabLst>
+            </a:pPr>
+            <a:fld id="{66C28EE8-DB69-468F-9871-737B771CD663}" type="slidenum">
               <a:rPr lang="en-US" sz="1200" b="0" u="none" strike="noStrike">
                 <a:solidFill>
                   <a:schemeClr val="dk1"/>
@@ -3773,7 +4274,7 @@
         <p:spPr>
           <a:xfrm>
             <a:off x="685800" y="1143000"/>
-            <a:ext cx="5486040" cy="3085920"/>
+            <a:ext cx="5485680" cy="3085560"/>
           </a:xfrm>
           <a:prstGeom prst="rect">
             <a:avLst/>
@@ -3796,7 +4297,7 @@
         <p:spPr>
           <a:xfrm>
             <a:off x="685800" y="4400640"/>
-            <a:ext cx="5486040" cy="3600000"/>
+            <a:ext cx="5485680" cy="3599640"/>
           </a:xfrm>
           <a:prstGeom prst="rect">
             <a:avLst/>
@@ -3838,7 +4339,7 @@
         <p:spPr>
           <a:xfrm>
             <a:off x="3884760" y="8685360"/>
-            <a:ext cx="2971440" cy="458280"/>
+            <a:ext cx="2971080" cy="457920"/>
           </a:xfrm>
           <a:prstGeom prst="rect">
             <a:avLst/>
@@ -3858,6 +4359,9 @@
                 <a:spcPct val="100000"/>
               </a:lnSpc>
               <a:buNone/>
+              <a:tabLst>
+                <a:tab pos="0" algn="l"/>
+              </a:tabLst>
               <a:defRPr lang="en-US" sz="1200" b="0" u="none" strike="noStrike">
                 <a:solidFill>
                   <a:schemeClr val="dk1"/>
@@ -3875,8 +4379,11 @@
                 <a:spcPct val="100000"/>
               </a:lnSpc>
               <a:buNone/>
-            </a:pPr>
-            <a:fld id="{30E0EE64-329C-47C8-B862-1B4EA09AB747}" type="slidenum">
+              <a:tabLst>
+                <a:tab pos="0" algn="l"/>
+              </a:tabLst>
+            </a:pPr>
+            <a:fld id="{87E94C4C-3E23-4976-97D7-05EA66C01055}" type="slidenum">
               <a:rPr lang="en-US" sz="1200" b="0" u="none" strike="noStrike">
                 <a:solidFill>
                   <a:schemeClr val="dk1"/>
@@ -3934,7 +4441,7 @@
         <p:spPr>
           <a:xfrm>
             <a:off x="685800" y="1143000"/>
-            <a:ext cx="5486040" cy="3085920"/>
+            <a:ext cx="5485680" cy="3085560"/>
           </a:xfrm>
           <a:prstGeom prst="rect">
             <a:avLst/>
@@ -3957,7 +4464,7 @@
         <p:spPr>
           <a:xfrm>
             <a:off x="685800" y="4400640"/>
-            <a:ext cx="5486040" cy="3600000"/>
+            <a:ext cx="5485680" cy="3599640"/>
           </a:xfrm>
           <a:prstGeom prst="rect">
             <a:avLst/>
@@ -3977,6 +4484,9 @@
                 <a:spcPct val="100000"/>
               </a:lnSpc>
               <a:buNone/>
+              <a:tabLst>
+                <a:tab pos="0" algn="l"/>
+              </a:tabLst>
             </a:pPr>
             <a:r>
               <a:rPr lang="en-US" sz="2000" b="0" u="none" strike="noStrike">
@@ -4013,7 +4523,7 @@
         <p:spPr>
           <a:xfrm>
             <a:off x="3884760" y="8685360"/>
-            <a:ext cx="2971440" cy="458280"/>
+            <a:ext cx="2971080" cy="457920"/>
           </a:xfrm>
           <a:prstGeom prst="rect">
             <a:avLst/>
@@ -4033,6 +4543,9 @@
                 <a:spcPct val="100000"/>
               </a:lnSpc>
               <a:buNone/>
+              <a:tabLst>
+                <a:tab pos="0" algn="l"/>
+              </a:tabLst>
               <a:defRPr lang="en-US" sz="1200" b="0" u="none" strike="noStrike">
                 <a:solidFill>
                   <a:schemeClr val="dk1"/>
@@ -4050,8 +4563,11 @@
                 <a:spcPct val="100000"/>
               </a:lnSpc>
               <a:buNone/>
-            </a:pPr>
-            <a:fld id="{8D80C6E6-EBA3-4D8B-A27B-A8218F7A2632}" type="slidenum">
+              <a:tabLst>
+                <a:tab pos="0" algn="l"/>
+              </a:tabLst>
+            </a:pPr>
+            <a:fld id="{8B287C43-BC9D-4383-AA2B-AE7E03D97CD7}" type="slidenum">
               <a:rPr lang="en-US" sz="1200" b="0" u="none" strike="noStrike">
                 <a:solidFill>
                   <a:schemeClr val="dk1"/>
@@ -4109,7 +4625,7 @@
         <p:spPr>
           <a:xfrm>
             <a:off x="685800" y="1143000"/>
-            <a:ext cx="5486040" cy="3085920"/>
+            <a:ext cx="5485680" cy="3085560"/>
           </a:xfrm>
           <a:prstGeom prst="rect">
             <a:avLst/>
@@ -4132,7 +4648,7 @@
         <p:spPr>
           <a:xfrm>
             <a:off x="685800" y="4400640"/>
-            <a:ext cx="5486040" cy="3600000"/>
+            <a:ext cx="5485680" cy="3599640"/>
           </a:xfrm>
           <a:prstGeom prst="rect">
             <a:avLst/>
@@ -4174,7 +4690,7 @@
         <p:spPr>
           <a:xfrm>
             <a:off x="3884760" y="8685360"/>
-            <a:ext cx="2971440" cy="458280"/>
+            <a:ext cx="2971080" cy="457920"/>
           </a:xfrm>
           <a:prstGeom prst="rect">
             <a:avLst/>
@@ -4194,6 +4710,9 @@
                 <a:spcPct val="100000"/>
               </a:lnSpc>
               <a:buNone/>
+              <a:tabLst>
+                <a:tab pos="0" algn="l"/>
+              </a:tabLst>
               <a:defRPr lang="en-US" sz="1200" b="0" u="none" strike="noStrike">
                 <a:solidFill>
                   <a:schemeClr val="dk1"/>
@@ -4211,8 +4730,11 @@
                 <a:spcPct val="100000"/>
               </a:lnSpc>
               <a:buNone/>
-            </a:pPr>
-            <a:fld id="{9106629C-77A5-4F57-B8C3-6E339E3C46D6}" type="slidenum">
+              <a:tabLst>
+                <a:tab pos="0" algn="l"/>
+              </a:tabLst>
+            </a:pPr>
+            <a:fld id="{84283502-F702-4BB0-9898-432906411777}" type="slidenum">
               <a:rPr lang="en-US" sz="1200" b="0" u="none" strike="noStrike">
                 <a:solidFill>
                   <a:schemeClr val="dk1"/>
@@ -4270,7 +4792,7 @@
         <p:spPr>
           <a:xfrm>
             <a:off x="685800" y="1143000"/>
-            <a:ext cx="5486040" cy="3085920"/>
+            <a:ext cx="5485680" cy="3085560"/>
           </a:xfrm>
           <a:prstGeom prst="rect">
             <a:avLst/>
@@ -4293,7 +4815,7 @@
         <p:spPr>
           <a:xfrm>
             <a:off x="685800" y="4400640"/>
-            <a:ext cx="5486040" cy="3600000"/>
+            <a:ext cx="5485680" cy="3599640"/>
           </a:xfrm>
           <a:prstGeom prst="rect">
             <a:avLst/>
@@ -4313,6 +4835,9 @@
                 <a:spcPct val="100000"/>
               </a:lnSpc>
               <a:buNone/>
+              <a:tabLst>
+                <a:tab pos="0" algn="l"/>
+              </a:tabLst>
             </a:pPr>
             <a:r>
               <a:rPr lang="en-US" sz="2000" b="0" u="none" strike="noStrike">
@@ -4349,7 +4874,7 @@
         <p:spPr>
           <a:xfrm>
             <a:off x="3884760" y="8685360"/>
-            <a:ext cx="2971440" cy="458280"/>
+            <a:ext cx="2971080" cy="457920"/>
           </a:xfrm>
           <a:prstGeom prst="rect">
             <a:avLst/>
@@ -4369,6 +4894,9 @@
                 <a:spcPct val="100000"/>
               </a:lnSpc>
               <a:buNone/>
+              <a:tabLst>
+                <a:tab pos="0" algn="l"/>
+              </a:tabLst>
               <a:defRPr lang="en-US" sz="1200" b="0" u="none" strike="noStrike">
                 <a:solidFill>
                   <a:schemeClr val="dk1"/>
@@ -4386,8 +4914,11 @@
                 <a:spcPct val="100000"/>
               </a:lnSpc>
               <a:buNone/>
-            </a:pPr>
-            <a:fld id="{A10A91A1-8D58-4FBF-BC1E-4907BB8F3207}" type="slidenum">
+              <a:tabLst>
+                <a:tab pos="0" algn="l"/>
+              </a:tabLst>
+            </a:pPr>
+            <a:fld id="{FD92A284-3DF8-4EFF-94C1-ED30A7E2C610}" type="slidenum">
               <a:rPr lang="en-US" sz="1200" b="0" u="none" strike="noStrike">
                 <a:solidFill>
                   <a:schemeClr val="dk1"/>
@@ -4445,7 +4976,7 @@
         <p:spPr>
           <a:xfrm>
             <a:off x="685800" y="1143000"/>
-            <a:ext cx="5486040" cy="3085920"/>
+            <a:ext cx="5485680" cy="3085560"/>
           </a:xfrm>
           <a:prstGeom prst="rect">
             <a:avLst/>
@@ -4468,7 +4999,7 @@
         <p:spPr>
           <a:xfrm>
             <a:off x="685800" y="4400640"/>
-            <a:ext cx="5486040" cy="3600000"/>
+            <a:ext cx="5485680" cy="3599640"/>
           </a:xfrm>
           <a:prstGeom prst="rect">
             <a:avLst/>
@@ -4488,6 +5019,9 @@
                 <a:spcPct val="100000"/>
               </a:lnSpc>
               <a:buNone/>
+              <a:tabLst>
+                <a:tab pos="0" algn="l"/>
+              </a:tabLst>
             </a:pPr>
             <a:r>
               <a:rPr lang="en-US" sz="2000" b="0" u="none" strike="noStrike">
@@ -4524,7 +5058,7 @@
         <p:spPr>
           <a:xfrm>
             <a:off x="3884760" y="8685360"/>
-            <a:ext cx="2971440" cy="458280"/>
+            <a:ext cx="2971080" cy="457920"/>
           </a:xfrm>
           <a:prstGeom prst="rect">
             <a:avLst/>
@@ -4544,6 +5078,9 @@
                 <a:spcPct val="100000"/>
               </a:lnSpc>
               <a:buNone/>
+              <a:tabLst>
+                <a:tab pos="0" algn="l"/>
+              </a:tabLst>
               <a:defRPr lang="en-US" sz="1200" b="0" u="none" strike="noStrike">
                 <a:solidFill>
                   <a:schemeClr val="dk1"/>
@@ -4561,8 +5098,11 @@
                 <a:spcPct val="100000"/>
               </a:lnSpc>
               <a:buNone/>
-            </a:pPr>
-            <a:fld id="{D5086470-96B7-4D65-86E2-8CA09CBA0DA2}" type="slidenum">
+              <a:tabLst>
+                <a:tab pos="0" algn="l"/>
+              </a:tabLst>
+            </a:pPr>
+            <a:fld id="{8C9289E6-C943-4DC0-B723-E84D09271402}" type="slidenum">
               <a:rPr lang="en-US" sz="1200" b="0" u="none" strike="noStrike">
                 <a:solidFill>
                   <a:schemeClr val="dk1"/>
@@ -4620,7 +5160,7 @@
         <p:spPr>
           <a:xfrm>
             <a:off x="685800" y="1143000"/>
-            <a:ext cx="5486040" cy="3085920"/>
+            <a:ext cx="5485680" cy="3085560"/>
           </a:xfrm>
           <a:prstGeom prst="rect">
             <a:avLst/>
@@ -4643,7 +5183,7 @@
         <p:spPr>
           <a:xfrm>
             <a:off x="685800" y="4400640"/>
-            <a:ext cx="5486040" cy="3600000"/>
+            <a:ext cx="5485680" cy="3599640"/>
           </a:xfrm>
           <a:prstGeom prst="rect">
             <a:avLst/>
@@ -4685,7 +5225,7 @@
         <p:spPr>
           <a:xfrm>
             <a:off x="3884760" y="8685360"/>
-            <a:ext cx="2971440" cy="458280"/>
+            <a:ext cx="2971080" cy="457920"/>
           </a:xfrm>
           <a:prstGeom prst="rect">
             <a:avLst/>
@@ -4705,6 +5245,9 @@
                 <a:spcPct val="100000"/>
               </a:lnSpc>
               <a:buNone/>
+              <a:tabLst>
+                <a:tab pos="0" algn="l"/>
+              </a:tabLst>
               <a:defRPr lang="en-US" sz="1200" b="0" u="none" strike="noStrike">
                 <a:solidFill>
                   <a:schemeClr val="dk1"/>
@@ -4722,8 +5265,11 @@
                 <a:spcPct val="100000"/>
               </a:lnSpc>
               <a:buNone/>
-            </a:pPr>
-            <a:fld id="{A09626B8-9664-41C6-9AC8-1956A217FCCC}" type="slidenum">
+              <a:tabLst>
+                <a:tab pos="0" algn="l"/>
+              </a:tabLst>
+            </a:pPr>
+            <a:fld id="{73553586-82BF-4B75-9E58-B9D8859EF37B}" type="slidenum">
               <a:rPr lang="en-US" sz="1200" b="0" u="none" strike="noStrike">
                 <a:solidFill>
                   <a:schemeClr val="dk1"/>
@@ -4781,7 +5327,7 @@
         <p:spPr>
           <a:xfrm>
             <a:off x="685800" y="1143000"/>
-            <a:ext cx="5486040" cy="3085920"/>
+            <a:ext cx="5485680" cy="3085560"/>
           </a:xfrm>
           <a:prstGeom prst="rect">
             <a:avLst/>
@@ -4804,7 +5350,7 @@
         <p:spPr>
           <a:xfrm>
             <a:off x="685800" y="4400640"/>
-            <a:ext cx="5486040" cy="3600000"/>
+            <a:ext cx="5485680" cy="3599640"/>
           </a:xfrm>
           <a:prstGeom prst="rect">
             <a:avLst/>
@@ -4846,7 +5392,7 @@
         <p:spPr>
           <a:xfrm>
             <a:off x="3884760" y="8685360"/>
-            <a:ext cx="2971440" cy="458280"/>
+            <a:ext cx="2971080" cy="457920"/>
           </a:xfrm>
           <a:prstGeom prst="rect">
             <a:avLst/>
@@ -4866,6 +5412,9 @@
                 <a:spcPct val="100000"/>
               </a:lnSpc>
               <a:buNone/>
+              <a:tabLst>
+                <a:tab pos="0" algn="l"/>
+              </a:tabLst>
               <a:defRPr lang="en-US" sz="1200" b="0" u="none" strike="noStrike">
                 <a:solidFill>
                   <a:schemeClr val="dk1"/>
@@ -4883,8 +5432,11 @@
                 <a:spcPct val="100000"/>
               </a:lnSpc>
               <a:buNone/>
-            </a:pPr>
-            <a:fld id="{C8FEEBE9-2743-4B18-B863-A93B736F22D5}" type="slidenum">
+              <a:tabLst>
+                <a:tab pos="0" algn="l"/>
+              </a:tabLst>
+            </a:pPr>
+            <a:fld id="{8CDF2A16-338A-40A7-95FC-96EC6CB5F467}" type="slidenum">
               <a:rPr lang="en-US" sz="1200" b="0" u="none" strike="noStrike">
                 <a:solidFill>
                   <a:schemeClr val="dk1"/>
@@ -4942,7 +5494,7 @@
         <p:spPr>
           <a:xfrm>
             <a:off x="685800" y="1143000"/>
-            <a:ext cx="5486040" cy="3085920"/>
+            <a:ext cx="5485680" cy="3085560"/>
           </a:xfrm>
           <a:prstGeom prst="rect">
             <a:avLst/>
@@ -4965,7 +5517,7 @@
         <p:spPr>
           <a:xfrm>
             <a:off x="685800" y="4400640"/>
-            <a:ext cx="5486040" cy="3600000"/>
+            <a:ext cx="5485680" cy="3599640"/>
           </a:xfrm>
           <a:prstGeom prst="rect">
             <a:avLst/>
@@ -5007,7 +5559,7 @@
         <p:spPr>
           <a:xfrm>
             <a:off x="3884760" y="8685360"/>
-            <a:ext cx="2971440" cy="458280"/>
+            <a:ext cx="2971080" cy="457920"/>
           </a:xfrm>
           <a:prstGeom prst="rect">
             <a:avLst/>
@@ -5027,6 +5579,9 @@
                 <a:spcPct val="100000"/>
               </a:lnSpc>
               <a:buNone/>
+              <a:tabLst>
+                <a:tab pos="0" algn="l"/>
+              </a:tabLst>
               <a:defRPr lang="en-US" sz="1200" b="0" u="none" strike="noStrike">
                 <a:solidFill>
                   <a:schemeClr val="dk1"/>
@@ -5044,8 +5599,11 @@
                 <a:spcPct val="100000"/>
               </a:lnSpc>
               <a:buNone/>
-            </a:pPr>
-            <a:fld id="{1DC798D7-48FB-4FA6-9F18-2CACD0B4326E}" type="slidenum">
+              <a:tabLst>
+                <a:tab pos="0" algn="l"/>
+              </a:tabLst>
+            </a:pPr>
+            <a:fld id="{31C27743-8E26-4DC2-8FB5-4487B166F595}" type="slidenum">
               <a:rPr lang="en-US" sz="1200" b="0" u="none" strike="noStrike">
                 <a:solidFill>
                   <a:schemeClr val="dk1"/>
@@ -5103,7 +5661,7 @@
         <p:spPr>
           <a:xfrm>
             <a:off x="685800" y="1143000"/>
-            <a:ext cx="5486040" cy="3085920"/>
+            <a:ext cx="5485680" cy="3085560"/>
           </a:xfrm>
           <a:prstGeom prst="rect">
             <a:avLst/>
@@ -5126,7 +5684,7 @@
         <p:spPr>
           <a:xfrm>
             <a:off x="685800" y="4400640"/>
-            <a:ext cx="5486040" cy="3600000"/>
+            <a:ext cx="5485680" cy="3599640"/>
           </a:xfrm>
           <a:prstGeom prst="rect">
             <a:avLst/>
@@ -5168,7 +5726,7 @@
         <p:spPr>
           <a:xfrm>
             <a:off x="3884760" y="8685360"/>
-            <a:ext cx="2971440" cy="458280"/>
+            <a:ext cx="2971080" cy="457920"/>
           </a:xfrm>
           <a:prstGeom prst="rect">
             <a:avLst/>
@@ -5188,6 +5746,9 @@
                 <a:spcPct val="100000"/>
               </a:lnSpc>
               <a:buNone/>
+              <a:tabLst>
+                <a:tab pos="0" algn="l"/>
+              </a:tabLst>
               <a:defRPr lang="en-US" sz="1200" b="0" u="none" strike="noStrike">
                 <a:solidFill>
                   <a:schemeClr val="dk1"/>
@@ -5205,8 +5766,11 @@
                 <a:spcPct val="100000"/>
               </a:lnSpc>
               <a:buNone/>
-            </a:pPr>
-            <a:fld id="{00E5D0B6-A510-4E3F-BF6F-2DE27D5397FA}" type="slidenum">
+              <a:tabLst>
+                <a:tab pos="0" algn="l"/>
+              </a:tabLst>
+            </a:pPr>
+            <a:fld id="{F9C8D9DC-0778-4CA1-BC26-6D5F3AE04AAB}" type="slidenum">
               <a:rPr lang="en-US" sz="1200" b="0" u="none" strike="noStrike">
                 <a:solidFill>
                   <a:schemeClr val="dk1"/>
@@ -5264,7 +5828,7 @@
         <p:spPr>
           <a:xfrm>
             <a:off x="685800" y="1143000"/>
-            <a:ext cx="5486040" cy="3085920"/>
+            <a:ext cx="5485680" cy="3085560"/>
           </a:xfrm>
           <a:prstGeom prst="rect">
             <a:avLst/>
@@ -5287,7 +5851,7 @@
         <p:spPr>
           <a:xfrm>
             <a:off x="685800" y="4400640"/>
-            <a:ext cx="5486040" cy="3600000"/>
+            <a:ext cx="5485680" cy="3599640"/>
           </a:xfrm>
           <a:prstGeom prst="rect">
             <a:avLst/>
@@ -5329,7 +5893,7 @@
         <p:spPr>
           <a:xfrm>
             <a:off x="3884760" y="8685360"/>
-            <a:ext cx="2971440" cy="458280"/>
+            <a:ext cx="2971080" cy="457920"/>
           </a:xfrm>
           <a:prstGeom prst="rect">
             <a:avLst/>
@@ -5349,6 +5913,9 @@
                 <a:spcPct val="100000"/>
               </a:lnSpc>
               <a:buNone/>
+              <a:tabLst>
+                <a:tab pos="0" algn="l"/>
+              </a:tabLst>
               <a:defRPr lang="en-US" sz="1200" b="0" u="none" strike="noStrike">
                 <a:solidFill>
                   <a:schemeClr val="dk1"/>
@@ -5366,8 +5933,11 @@
                 <a:spcPct val="100000"/>
               </a:lnSpc>
               <a:buNone/>
-            </a:pPr>
-            <a:fld id="{00AF8725-2CC0-47A4-8FBB-7326F5E92396}" type="slidenum">
+              <a:tabLst>
+                <a:tab pos="0" algn="l"/>
+              </a:tabLst>
+            </a:pPr>
+            <a:fld id="{671D6208-1D54-4A48-A04D-B127101F68DF}" type="slidenum">
               <a:rPr lang="en-US" sz="1200" b="0" u="none" strike="noStrike">
                 <a:solidFill>
                   <a:schemeClr val="dk1"/>
@@ -5425,7 +5995,7 @@
         <p:spPr>
           <a:xfrm>
             <a:off x="685800" y="1143000"/>
-            <a:ext cx="5486040" cy="3085920"/>
+            <a:ext cx="5485680" cy="3085560"/>
           </a:xfrm>
           <a:prstGeom prst="rect">
             <a:avLst/>
@@ -5448,7 +6018,7 @@
         <p:spPr>
           <a:xfrm>
             <a:off x="685800" y="4400640"/>
-            <a:ext cx="5486040" cy="3600000"/>
+            <a:ext cx="5485680" cy="3599640"/>
           </a:xfrm>
           <a:prstGeom prst="rect">
             <a:avLst/>
@@ -5468,6 +6038,9 @@
                 <a:spcPct val="100000"/>
               </a:lnSpc>
               <a:buNone/>
+              <a:tabLst>
+                <a:tab pos="0" algn="l"/>
+              </a:tabLst>
             </a:pPr>
             <a:r>
               <a:rPr lang="en-US" sz="2000" b="0" u="none" strike="noStrike">
@@ -5504,7 +6077,7 @@
         <p:spPr>
           <a:xfrm>
             <a:off x="3884760" y="8685360"/>
-            <a:ext cx="2971440" cy="458280"/>
+            <a:ext cx="2971080" cy="457920"/>
           </a:xfrm>
           <a:prstGeom prst="rect">
             <a:avLst/>
@@ -5524,6 +6097,9 @@
                 <a:spcPct val="100000"/>
               </a:lnSpc>
               <a:buNone/>
+              <a:tabLst>
+                <a:tab pos="0" algn="l"/>
+              </a:tabLst>
               <a:defRPr lang="en-US" sz="1200" b="0" u="none" strike="noStrike">
                 <a:solidFill>
                   <a:schemeClr val="dk1"/>
@@ -5541,8 +6117,11 @@
                 <a:spcPct val="100000"/>
               </a:lnSpc>
               <a:buNone/>
-            </a:pPr>
-            <a:fld id="{56394CB9-51CF-462C-AD63-16D9FF7B5496}" type="slidenum">
+              <a:tabLst>
+                <a:tab pos="0" algn="l"/>
+              </a:tabLst>
+            </a:pPr>
+            <a:fld id="{BB1D50A6-7D1D-4AB0-B1C8-686C1444AD0E}" type="slidenum">
               <a:rPr lang="en-US" sz="1200" b="0" u="none" strike="noStrike">
                 <a:solidFill>
                   <a:schemeClr val="dk1"/>
@@ -5600,7 +6179,7 @@
         <p:spPr>
           <a:xfrm>
             <a:off x="685800" y="1143000"/>
-            <a:ext cx="5486040" cy="3085920"/>
+            <a:ext cx="5485680" cy="3085560"/>
           </a:xfrm>
           <a:prstGeom prst="rect">
             <a:avLst/>
@@ -5623,7 +6202,7 @@
         <p:spPr>
           <a:xfrm>
             <a:off x="685800" y="4400640"/>
-            <a:ext cx="5486040" cy="3600000"/>
+            <a:ext cx="5485680" cy="3599640"/>
           </a:xfrm>
           <a:prstGeom prst="rect">
             <a:avLst/>
@@ -5665,7 +6244,7 @@
         <p:spPr>
           <a:xfrm>
             <a:off x="3884760" y="8685360"/>
-            <a:ext cx="2971440" cy="458280"/>
+            <a:ext cx="2971080" cy="457920"/>
           </a:xfrm>
           <a:prstGeom prst="rect">
             <a:avLst/>
@@ -5685,6 +6264,9 @@
                 <a:spcPct val="100000"/>
               </a:lnSpc>
               <a:buNone/>
+              <a:tabLst>
+                <a:tab pos="0" algn="l"/>
+              </a:tabLst>
               <a:defRPr lang="en-US" sz="1200" b="0" u="none" strike="noStrike">
                 <a:solidFill>
                   <a:schemeClr val="dk1"/>
@@ -5702,8 +6284,11 @@
                 <a:spcPct val="100000"/>
               </a:lnSpc>
               <a:buNone/>
-            </a:pPr>
-            <a:fld id="{8819A323-738A-4DF5-B7D8-64569DEA8E6B}" type="slidenum">
+              <a:tabLst>
+                <a:tab pos="0" algn="l"/>
+              </a:tabLst>
+            </a:pPr>
+            <a:fld id="{748B6CE8-B91D-45C4-98AE-72CD4176D265}" type="slidenum">
               <a:rPr lang="en-US" sz="1200" b="0" u="none" strike="noStrike">
                 <a:solidFill>
                   <a:schemeClr val="dk1"/>
@@ -5761,7 +6346,7 @@
         <p:spPr>
           <a:xfrm>
             <a:off x="685800" y="1143000"/>
-            <a:ext cx="5486040" cy="3085920"/>
+            <a:ext cx="5485680" cy="3085560"/>
           </a:xfrm>
           <a:prstGeom prst="rect">
             <a:avLst/>
@@ -5784,7 +6369,7 @@
         <p:spPr>
           <a:xfrm>
             <a:off x="685800" y="4400640"/>
-            <a:ext cx="5486040" cy="3600000"/>
+            <a:ext cx="5485680" cy="3599640"/>
           </a:xfrm>
           <a:prstGeom prst="rect">
             <a:avLst/>
@@ -5826,7 +6411,7 @@
         <p:spPr>
           <a:xfrm>
             <a:off x="3884760" y="8685360"/>
-            <a:ext cx="2971440" cy="458280"/>
+            <a:ext cx="2971080" cy="457920"/>
           </a:xfrm>
           <a:prstGeom prst="rect">
             <a:avLst/>
@@ -5846,6 +6431,9 @@
                 <a:spcPct val="100000"/>
               </a:lnSpc>
               <a:buNone/>
+              <a:tabLst>
+                <a:tab pos="0" algn="l"/>
+              </a:tabLst>
               <a:defRPr lang="en-US" sz="1200" b="0" u="none" strike="noStrike">
                 <a:solidFill>
                   <a:schemeClr val="dk1"/>
@@ -5863,8 +6451,11 @@
                 <a:spcPct val="100000"/>
               </a:lnSpc>
               <a:buNone/>
-            </a:pPr>
-            <a:fld id="{2D46419B-180C-4368-8F6E-AA697B221333}" type="slidenum">
+              <a:tabLst>
+                <a:tab pos="0" algn="l"/>
+              </a:tabLst>
+            </a:pPr>
+            <a:fld id="{FEC04D4C-79ED-4F20-B33D-84C17A3CEEE1}" type="slidenum">
               <a:rPr lang="en-US" sz="1200" b="0" u="none" strike="noStrike">
                 <a:solidFill>
                   <a:schemeClr val="dk1"/>
@@ -5922,7 +6513,7 @@
         <p:spPr>
           <a:xfrm>
             <a:off x="685800" y="1143000"/>
-            <a:ext cx="5486040" cy="3085920"/>
+            <a:ext cx="5485680" cy="3085560"/>
           </a:xfrm>
           <a:prstGeom prst="rect">
             <a:avLst/>
@@ -5945,7 +6536,7 @@
         <p:spPr>
           <a:xfrm>
             <a:off x="685800" y="4400640"/>
-            <a:ext cx="5486040" cy="3600000"/>
+            <a:ext cx="5485680" cy="3599640"/>
           </a:xfrm>
           <a:prstGeom prst="rect">
             <a:avLst/>
@@ -5965,6 +6556,9 @@
                 <a:spcPct val="100000"/>
               </a:lnSpc>
               <a:buNone/>
+              <a:tabLst>
+                <a:tab pos="0" algn="l"/>
+              </a:tabLst>
             </a:pPr>
             <a:r>
               <a:rPr lang="en-US" sz="2000" b="0" u="none" strike="noStrike">
@@ -6001,7 +6595,7 @@
         <p:spPr>
           <a:xfrm>
             <a:off x="3884760" y="8685360"/>
-            <a:ext cx="2971440" cy="458280"/>
+            <a:ext cx="2971080" cy="457920"/>
           </a:xfrm>
           <a:prstGeom prst="rect">
             <a:avLst/>
@@ -6021,6 +6615,9 @@
                 <a:spcPct val="100000"/>
               </a:lnSpc>
               <a:buNone/>
+              <a:tabLst>
+                <a:tab pos="0" algn="l"/>
+              </a:tabLst>
               <a:defRPr lang="en-US" sz="1200" b="0" u="none" strike="noStrike">
                 <a:solidFill>
                   <a:schemeClr val="dk1"/>
@@ -6038,8 +6635,11 @@
                 <a:spcPct val="100000"/>
               </a:lnSpc>
               <a:buNone/>
-            </a:pPr>
-            <a:fld id="{FC59FDE1-7E11-43F2-95AA-80DC8925A8D3}" type="slidenum">
+              <a:tabLst>
+                <a:tab pos="0" algn="l"/>
+              </a:tabLst>
+            </a:pPr>
+            <a:fld id="{524DED91-E94C-4537-84C8-F480FDA6DC0E}" type="slidenum">
               <a:rPr lang="en-US" sz="1200" b="0" u="none" strike="noStrike">
                 <a:solidFill>
                   <a:schemeClr val="dk1"/>
@@ -6097,7 +6697,7 @@
         <p:spPr>
           <a:xfrm>
             <a:off x="685800" y="1143000"/>
-            <a:ext cx="5486040" cy="3085920"/>
+            <a:ext cx="5485680" cy="3085560"/>
           </a:xfrm>
           <a:prstGeom prst="rect">
             <a:avLst/>
@@ -6120,7 +6720,7 @@
         <p:spPr>
           <a:xfrm>
             <a:off x="685800" y="4400640"/>
-            <a:ext cx="5486040" cy="3600000"/>
+            <a:ext cx="5485680" cy="3599640"/>
           </a:xfrm>
           <a:prstGeom prst="rect">
             <a:avLst/>
@@ -6162,7 +6762,7 @@
         <p:spPr>
           <a:xfrm>
             <a:off x="3884760" y="8685360"/>
-            <a:ext cx="2971440" cy="458280"/>
+            <a:ext cx="2971080" cy="457920"/>
           </a:xfrm>
           <a:prstGeom prst="rect">
             <a:avLst/>
@@ -6182,6 +6782,9 @@
                 <a:spcPct val="100000"/>
               </a:lnSpc>
               <a:buNone/>
+              <a:tabLst>
+                <a:tab pos="0" algn="l"/>
+              </a:tabLst>
               <a:defRPr lang="en-US" sz="1200" b="0" u="none" strike="noStrike">
                 <a:solidFill>
                   <a:schemeClr val="dk1"/>
@@ -6199,8 +6802,11 @@
                 <a:spcPct val="100000"/>
               </a:lnSpc>
               <a:buNone/>
-            </a:pPr>
-            <a:fld id="{3F0E7EAD-795C-4601-B039-10467327340B}" type="slidenum">
+              <a:tabLst>
+                <a:tab pos="0" algn="l"/>
+              </a:tabLst>
+            </a:pPr>
+            <a:fld id="{90427D43-0E9A-45AA-840A-3D1DB56E9499}" type="slidenum">
               <a:rPr lang="en-US" sz="1200" b="0" u="none" strike="noStrike">
                 <a:solidFill>
                   <a:schemeClr val="dk1"/>
@@ -6258,7 +6864,7 @@
         <p:spPr>
           <a:xfrm>
             <a:off x="685800" y="1143000"/>
-            <a:ext cx="5486040" cy="3085920"/>
+            <a:ext cx="5485680" cy="3085560"/>
           </a:xfrm>
           <a:prstGeom prst="rect">
             <a:avLst/>
@@ -6281,7 +6887,7 @@
         <p:spPr>
           <a:xfrm>
             <a:off x="685800" y="4400640"/>
-            <a:ext cx="5486040" cy="3600000"/>
+            <a:ext cx="5485680" cy="3599640"/>
           </a:xfrm>
           <a:prstGeom prst="rect">
             <a:avLst/>
@@ -6301,6 +6907,9 @@
                 <a:spcPct val="100000"/>
               </a:lnSpc>
               <a:buNone/>
+              <a:tabLst>
+                <a:tab pos="0" algn="l"/>
+              </a:tabLst>
             </a:pPr>
             <a:r>
               <a:rPr lang="en-US" sz="2000" b="0" u="none" strike="noStrike">
@@ -6337,7 +6946,7 @@
         <p:spPr>
           <a:xfrm>
             <a:off x="3884760" y="8685360"/>
-            <a:ext cx="2971440" cy="458280"/>
+            <a:ext cx="2971080" cy="457920"/>
           </a:xfrm>
           <a:prstGeom prst="rect">
             <a:avLst/>
@@ -6357,6 +6966,9 @@
                 <a:spcPct val="100000"/>
               </a:lnSpc>
               <a:buNone/>
+              <a:tabLst>
+                <a:tab pos="0" algn="l"/>
+              </a:tabLst>
               <a:defRPr lang="en-US" sz="1200" b="0" u="none" strike="noStrike">
                 <a:solidFill>
                   <a:schemeClr val="dk1"/>
@@ -6374,8 +6986,11 @@
                 <a:spcPct val="100000"/>
               </a:lnSpc>
               <a:buNone/>
-            </a:pPr>
-            <a:fld id="{91DD93F0-DC8F-4FBC-A6D9-0AD5722B2047}" type="slidenum">
+              <a:tabLst>
+                <a:tab pos="0" algn="l"/>
+              </a:tabLst>
+            </a:pPr>
+            <a:fld id="{78408543-6ABC-42AE-ACB4-CEE5C8AFE479}" type="slidenum">
               <a:rPr lang="en-US" sz="1200" b="0" u="none" strike="noStrike">
                 <a:solidFill>
                   <a:schemeClr val="dk1"/>
@@ -6433,7 +7048,7 @@
         <p:spPr>
           <a:xfrm>
             <a:off x="685800" y="1143000"/>
-            <a:ext cx="5486040" cy="3085920"/>
+            <a:ext cx="5485680" cy="3085560"/>
           </a:xfrm>
           <a:prstGeom prst="rect">
             <a:avLst/>
@@ -6456,7 +7071,7 @@
         <p:spPr>
           <a:xfrm>
             <a:off x="685800" y="4400640"/>
-            <a:ext cx="5486040" cy="3600000"/>
+            <a:ext cx="5485680" cy="3599640"/>
           </a:xfrm>
           <a:prstGeom prst="rect">
             <a:avLst/>
@@ -6498,7 +7113,7 @@
         <p:spPr>
           <a:xfrm>
             <a:off x="3884760" y="8685360"/>
-            <a:ext cx="2971440" cy="458280"/>
+            <a:ext cx="2971080" cy="457920"/>
           </a:xfrm>
           <a:prstGeom prst="rect">
             <a:avLst/>
@@ -6518,6 +7133,9 @@
                 <a:spcPct val="100000"/>
               </a:lnSpc>
               <a:buNone/>
+              <a:tabLst>
+                <a:tab pos="0" algn="l"/>
+              </a:tabLst>
               <a:defRPr lang="en-US" sz="1200" b="0" u="none" strike="noStrike">
                 <a:solidFill>
                   <a:schemeClr val="dk1"/>
@@ -6535,8 +7153,11 @@
                 <a:spcPct val="100000"/>
               </a:lnSpc>
               <a:buNone/>
-            </a:pPr>
-            <a:fld id="{03B05E2D-C45E-440E-B681-94F13A6FA371}" type="slidenum">
+              <a:tabLst>
+                <a:tab pos="0" algn="l"/>
+              </a:tabLst>
+            </a:pPr>
+            <a:fld id="{85520EB9-7374-40E7-B7B4-9EDCF4D25DDC}" type="slidenum">
               <a:rPr lang="en-US" sz="1200" b="0" u="none" strike="noStrike">
                 <a:solidFill>
                   <a:schemeClr val="dk1"/>
@@ -6640,6 +7261,9 @@
           <a:lstStyle>
             <a:lvl1pPr indent="0" algn="l">
               <a:buNone/>
+              <a:tabLst>
+                <a:tab pos="0" algn="l"/>
+              </a:tabLst>
               <a:defRPr lang="en-US" sz="1800" b="0" u="none" strike="noStrike">
                 <a:solidFill>
                   <a:schemeClr val="dk1"/>
@@ -6653,6 +7277,9 @@
           <a:p>
             <a:pPr indent="0" algn="l">
               <a:buNone/>
+              <a:tabLst>
+                <a:tab pos="0" algn="l"/>
+              </a:tabLst>
             </a:pPr>
             <a:r>
               <a:rPr lang="en-US" sz="1800" b="0" u="none" strike="noStrike">
@@ -6839,7 +7466,7 @@
             </a:lvl7pPr>
           </a:lstStyle>
           <a:p>
-            <a:pPr marL="432000" indent="-324000" algn="l">
+            <a:pPr indent="-324000" algn="l">
               <a:spcBef>
                 <a:spcPts val="1417"/>
               </a:spcBef>
@@ -7106,7 +7733,7 @@
         <p:spPr>
           <a:xfrm>
             <a:off x="-2286000" y="3657600"/>
-            <a:ext cx="6400440" cy="6400440"/>
+            <a:ext cx="6400080" cy="6400080"/>
           </a:xfrm>
           <a:prstGeom prst="ellipse">
             <a:avLst/>
@@ -7149,7 +7776,7 @@
         <p:spPr>
           <a:xfrm>
             <a:off x="8229600" y="-2743200"/>
-            <a:ext cx="6400440" cy="6400440"/>
+            <a:ext cx="6400080" cy="6400080"/>
           </a:xfrm>
           <a:prstGeom prst="ellipse">
             <a:avLst/>
@@ -7192,7 +7819,7 @@
         <p:spPr>
           <a:xfrm>
             <a:off x="5500080" y="914400"/>
-            <a:ext cx="1188360" cy="1188360"/>
+            <a:ext cx="1188000" cy="1188000"/>
           </a:xfrm>
           <a:prstGeom prst="ellipse">
             <a:avLst/>
@@ -7239,7 +7866,7 @@
         <p:spPr>
           <a:xfrm>
             <a:off x="5678280" y="1092600"/>
-            <a:ext cx="831600" cy="831600"/>
+            <a:ext cx="831240" cy="831240"/>
           </a:xfrm>
           <a:prstGeom prst="rect">
             <a:avLst/>
@@ -7259,7 +7886,7 @@
         <p:spPr>
           <a:xfrm>
             <a:off x="914400" y="2377440"/>
-            <a:ext cx="10359720" cy="1005480"/>
+            <a:ext cx="10359360" cy="1005120"/>
           </a:xfrm>
           <a:prstGeom prst="rect">
             <a:avLst/>
@@ -7320,7 +7947,7 @@
         <p:spPr>
           <a:xfrm>
             <a:off x="914400" y="3383280"/>
-            <a:ext cx="10359720" cy="548280"/>
+            <a:ext cx="10359360" cy="547920"/>
           </a:xfrm>
           <a:prstGeom prst="rect">
             <a:avLst/>
@@ -7381,7 +8008,7 @@
         <p:spPr>
           <a:xfrm>
             <a:off x="914400" y="3977640"/>
-            <a:ext cx="10359720" cy="456840"/>
+            <a:ext cx="10359360" cy="456480"/>
           </a:xfrm>
           <a:prstGeom prst="rect">
             <a:avLst/>
@@ -7442,7 +8069,7 @@
         <p:spPr>
           <a:xfrm>
             <a:off x="11521440" y="6446520"/>
-            <a:ext cx="456840" cy="273960"/>
+            <a:ext cx="456480" cy="273600"/>
           </a:xfrm>
           <a:prstGeom prst="rect">
             <a:avLst/>
@@ -7540,7 +8167,7 @@
         <p:spPr>
           <a:xfrm>
             <a:off x="-1828800" y="5120640"/>
-            <a:ext cx="3657240" cy="3657240"/>
+            <a:ext cx="3656880" cy="3656880"/>
           </a:xfrm>
           <a:prstGeom prst="ellipse">
             <a:avLst/>
@@ -7583,7 +8210,7 @@
         <p:spPr>
           <a:xfrm>
             <a:off x="457200" y="457200"/>
-            <a:ext cx="639720" cy="639720"/>
+            <a:ext cx="639360" cy="639360"/>
           </a:xfrm>
           <a:prstGeom prst="ellipse">
             <a:avLst/>
@@ -7630,7 +8257,7 @@
         <p:spPr>
           <a:xfrm>
             <a:off x="553320" y="553320"/>
-            <a:ext cx="447840" cy="447840"/>
+            <a:ext cx="447480" cy="447480"/>
           </a:xfrm>
           <a:prstGeom prst="rect">
             <a:avLst/>
@@ -7650,7 +8277,7 @@
         <p:spPr>
           <a:xfrm>
             <a:off x="1280160" y="457200"/>
-            <a:ext cx="10423800" cy="639720"/>
+            <a:ext cx="10423440" cy="639360"/>
           </a:xfrm>
           <a:prstGeom prst="rect">
             <a:avLst/>
@@ -7711,7 +8338,7 @@
         <p:spPr>
           <a:xfrm>
             <a:off x="548640" y="1828800"/>
-            <a:ext cx="4754520" cy="4023000"/>
+            <a:ext cx="4754160" cy="4022640"/>
           </a:xfrm>
           <a:prstGeom prst="rect">
             <a:avLst/>
@@ -7812,7 +8439,7 @@
         <p:spPr>
           <a:xfrm>
             <a:off x="5486400" y="1691640"/>
-            <a:ext cx="6217560" cy="4343040"/>
+            <a:ext cx="6217200" cy="4342680"/>
           </a:xfrm>
           <a:prstGeom prst="roundRect">
             <a:avLst>
@@ -7857,7 +8484,7 @@
         <p:spPr>
           <a:xfrm>
             <a:off x="5806440" y="1965960"/>
-            <a:ext cx="5577480" cy="3794400"/>
+            <a:ext cx="5577120" cy="3794040"/>
           </a:xfrm>
           <a:prstGeom prst="rect">
             <a:avLst/>
@@ -7904,7 +8531,7 @@
               </a:solidFill>
               <a:effectLst/>
               <a:uFillTx/>
-              <a:latin typeface="Cantarell"/>
+              <a:latin typeface="Arial"/>
             </a:endParaRPr>
           </a:p>
           <a:p>
@@ -7934,7 +8561,7 @@
               </a:solidFill>
               <a:effectLst/>
               <a:uFillTx/>
-              <a:latin typeface="Cantarell"/>
+              <a:latin typeface="Arial"/>
             </a:endParaRPr>
           </a:p>
           <a:p>
@@ -7964,7 +8591,7 @@
               </a:solidFill>
               <a:effectLst/>
               <a:uFillTx/>
-              <a:latin typeface="Cantarell"/>
+              <a:latin typeface="Arial"/>
             </a:endParaRPr>
           </a:p>
           <a:p>
@@ -7994,7 +8621,7 @@
               </a:solidFill>
               <a:effectLst/>
               <a:uFillTx/>
-              <a:latin typeface="Cantarell"/>
+              <a:latin typeface="Arial"/>
             </a:endParaRPr>
           </a:p>
           <a:p>
@@ -8024,7 +8651,7 @@
               </a:solidFill>
               <a:effectLst/>
               <a:uFillTx/>
-              <a:latin typeface="Cantarell"/>
+              <a:latin typeface="Arial"/>
             </a:endParaRPr>
           </a:p>
           <a:p>
@@ -8054,7 +8681,7 @@
               </a:solidFill>
               <a:effectLst/>
               <a:uFillTx/>
-              <a:latin typeface="Cantarell"/>
+              <a:latin typeface="Arial"/>
             </a:endParaRPr>
           </a:p>
           <a:p>
@@ -8084,7 +8711,7 @@
               </a:solidFill>
               <a:effectLst/>
               <a:uFillTx/>
-              <a:latin typeface="Cantarell"/>
+              <a:latin typeface="Arial"/>
             </a:endParaRPr>
           </a:p>
           <a:p>
@@ -8114,7 +8741,7 @@
               </a:solidFill>
               <a:effectLst/>
               <a:uFillTx/>
-              <a:latin typeface="Cantarell"/>
+              <a:latin typeface="Arial"/>
             </a:endParaRPr>
           </a:p>
         </p:txBody>
@@ -8128,7 +8755,7 @@
         <p:spPr>
           <a:xfrm>
             <a:off x="457200" y="6446520"/>
-            <a:ext cx="6400440" cy="273960"/>
+            <a:ext cx="6400080" cy="273600"/>
           </a:xfrm>
           <a:prstGeom prst="rect">
             <a:avLst/>
@@ -8189,7 +8816,7 @@
         <p:spPr>
           <a:xfrm>
             <a:off x="11521440" y="6446520"/>
-            <a:ext cx="456840" cy="273960"/>
+            <a:ext cx="456480" cy="273600"/>
           </a:xfrm>
           <a:prstGeom prst="rect">
             <a:avLst/>
@@ -8287,7 +8914,7 @@
         <p:spPr>
           <a:xfrm>
             <a:off x="-1828800" y="5120640"/>
-            <a:ext cx="3657240" cy="3657240"/>
+            <a:ext cx="3656880" cy="3656880"/>
           </a:xfrm>
           <a:prstGeom prst="ellipse">
             <a:avLst/>
@@ -8330,7 +8957,7 @@
         <p:spPr>
           <a:xfrm>
             <a:off x="457200" y="457200"/>
-            <a:ext cx="639720" cy="639720"/>
+            <a:ext cx="639360" cy="639360"/>
           </a:xfrm>
           <a:prstGeom prst="ellipse">
             <a:avLst/>
@@ -8377,7 +9004,7 @@
         <p:spPr>
           <a:xfrm>
             <a:off x="553320" y="553320"/>
-            <a:ext cx="447840" cy="447840"/>
+            <a:ext cx="447480" cy="447480"/>
           </a:xfrm>
           <a:prstGeom prst="rect">
             <a:avLst/>
@@ -8397,7 +9024,7 @@
         <p:spPr>
           <a:xfrm>
             <a:off x="1280160" y="457200"/>
-            <a:ext cx="10423800" cy="639720"/>
+            <a:ext cx="10423440" cy="639360"/>
           </a:xfrm>
           <a:prstGeom prst="rect">
             <a:avLst/>
@@ -8458,7 +9085,7 @@
         <p:spPr>
           <a:xfrm>
             <a:off x="548640" y="1828800"/>
-            <a:ext cx="4754520" cy="4023000"/>
+            <a:ext cx="4754160" cy="4022640"/>
           </a:xfrm>
           <a:prstGeom prst="rect">
             <a:avLst/>
@@ -8594,7 +9221,7 @@
         <p:spPr>
           <a:xfrm>
             <a:off x="5486400" y="1691640"/>
-            <a:ext cx="6217560" cy="4343040"/>
+            <a:ext cx="6217200" cy="4342680"/>
           </a:xfrm>
           <a:prstGeom prst="roundRect">
             <a:avLst>
@@ -8639,7 +9266,7 @@
         <p:spPr>
           <a:xfrm>
             <a:off x="5806440" y="1965960"/>
-            <a:ext cx="5577480" cy="3794400"/>
+            <a:ext cx="5577120" cy="3794040"/>
           </a:xfrm>
           <a:prstGeom prst="rect">
             <a:avLst/>
@@ -8686,7 +9313,7 @@
               </a:solidFill>
               <a:effectLst/>
               <a:uFillTx/>
-              <a:latin typeface="Cantarell"/>
+              <a:latin typeface="Arial"/>
             </a:endParaRPr>
           </a:p>
           <a:p>
@@ -8716,7 +9343,7 @@
               </a:solidFill>
               <a:effectLst/>
               <a:uFillTx/>
-              <a:latin typeface="Cantarell"/>
+              <a:latin typeface="Arial"/>
             </a:endParaRPr>
           </a:p>
           <a:p>
@@ -8746,7 +9373,7 @@
               </a:solidFill>
               <a:effectLst/>
               <a:uFillTx/>
-              <a:latin typeface="Cantarell"/>
+              <a:latin typeface="Arial"/>
             </a:endParaRPr>
           </a:p>
           <a:p>
@@ -8776,7 +9403,7 @@
               </a:solidFill>
               <a:effectLst/>
               <a:uFillTx/>
-              <a:latin typeface="Cantarell"/>
+              <a:latin typeface="Arial"/>
             </a:endParaRPr>
           </a:p>
           <a:p>
@@ -8806,7 +9433,7 @@
               </a:solidFill>
               <a:effectLst/>
               <a:uFillTx/>
-              <a:latin typeface="Cantarell"/>
+              <a:latin typeface="Arial"/>
             </a:endParaRPr>
           </a:p>
           <a:p>
@@ -8836,7 +9463,7 @@
               </a:solidFill>
               <a:effectLst/>
               <a:uFillTx/>
-              <a:latin typeface="Cantarell"/>
+              <a:latin typeface="Arial"/>
             </a:endParaRPr>
           </a:p>
           <a:p>
@@ -8866,7 +9493,7 @@
               </a:solidFill>
               <a:effectLst/>
               <a:uFillTx/>
-              <a:latin typeface="Cantarell"/>
+              <a:latin typeface="Arial"/>
             </a:endParaRPr>
           </a:p>
           <a:p>
@@ -8896,7 +9523,7 @@
               </a:solidFill>
               <a:effectLst/>
               <a:uFillTx/>
-              <a:latin typeface="Cantarell"/>
+              <a:latin typeface="Arial"/>
             </a:endParaRPr>
           </a:p>
           <a:p>
@@ -8926,7 +9553,7 @@
               </a:solidFill>
               <a:effectLst/>
               <a:uFillTx/>
-              <a:latin typeface="Cantarell"/>
+              <a:latin typeface="Arial"/>
             </a:endParaRPr>
           </a:p>
         </p:txBody>
@@ -8940,7 +9567,7 @@
         <p:spPr>
           <a:xfrm>
             <a:off x="457200" y="6446520"/>
-            <a:ext cx="6400440" cy="273960"/>
+            <a:ext cx="6400080" cy="273600"/>
           </a:xfrm>
           <a:prstGeom prst="rect">
             <a:avLst/>
@@ -9001,7 +9628,7 @@
         <p:spPr>
           <a:xfrm>
             <a:off x="11521440" y="6446520"/>
-            <a:ext cx="456840" cy="273960"/>
+            <a:ext cx="456480" cy="273600"/>
           </a:xfrm>
           <a:prstGeom prst="rect">
             <a:avLst/>
@@ -9099,7 +9726,7 @@
         <p:spPr>
           <a:xfrm>
             <a:off x="-1828800" y="5029200"/>
-            <a:ext cx="3657240" cy="3657240"/>
+            <a:ext cx="3656880" cy="3656880"/>
           </a:xfrm>
           <a:prstGeom prst="ellipse">
             <a:avLst/>
@@ -9142,7 +9769,7 @@
         <p:spPr>
           <a:xfrm>
             <a:off x="457200" y="457200"/>
-            <a:ext cx="639720" cy="639720"/>
+            <a:ext cx="639360" cy="639360"/>
           </a:xfrm>
           <a:prstGeom prst="ellipse">
             <a:avLst/>
@@ -9189,7 +9816,7 @@
         <p:spPr>
           <a:xfrm>
             <a:off x="553320" y="553320"/>
-            <a:ext cx="447840" cy="447840"/>
+            <a:ext cx="447480" cy="447480"/>
           </a:xfrm>
           <a:prstGeom prst="rect">
             <a:avLst/>
@@ -9209,7 +9836,7 @@
         <p:spPr>
           <a:xfrm>
             <a:off x="1280160" y="457200"/>
-            <a:ext cx="10423800" cy="639720"/>
+            <a:ext cx="10423440" cy="639360"/>
           </a:xfrm>
           <a:prstGeom prst="rect">
             <a:avLst/>
@@ -9270,7 +9897,7 @@
         <p:spPr>
           <a:xfrm>
             <a:off x="457200" y="1600200"/>
-            <a:ext cx="11274120" cy="4480200"/>
+            <a:ext cx="11273760" cy="4479840"/>
           </a:xfrm>
           <a:prstGeom prst="roundRect">
             <a:avLst>
@@ -9315,7 +9942,7 @@
         <p:spPr>
           <a:xfrm>
             <a:off x="822960" y="1828800"/>
-            <a:ext cx="10515240" cy="456840"/>
+            <a:ext cx="10514880" cy="456480"/>
           </a:xfrm>
           <a:prstGeom prst="rect">
             <a:avLst/>
@@ -9376,7 +10003,7 @@
         <p:spPr>
           <a:xfrm>
             <a:off x="822960" y="2423160"/>
-            <a:ext cx="383760" cy="383760"/>
+            <a:ext cx="383400" cy="383400"/>
           </a:xfrm>
           <a:prstGeom prst="ellipse">
             <a:avLst/>
@@ -9419,7 +10046,7 @@
         <p:spPr>
           <a:xfrm>
             <a:off x="822960" y="2423160"/>
-            <a:ext cx="383760" cy="383760"/>
+            <a:ext cx="383400" cy="383400"/>
           </a:xfrm>
           <a:prstGeom prst="rect">
             <a:avLst/>
@@ -9480,7 +10107,7 @@
         <p:spPr>
           <a:xfrm>
             <a:off x="1435680" y="2423160"/>
-            <a:ext cx="9582480" cy="383760"/>
+            <a:ext cx="9582120" cy="383400"/>
           </a:xfrm>
           <a:prstGeom prst="rect">
             <a:avLst/>
@@ -9541,7 +10168,7 @@
         <p:spPr>
           <a:xfrm>
             <a:off x="822960" y="3009960"/>
-            <a:ext cx="383760" cy="383760"/>
+            <a:ext cx="383400" cy="383400"/>
           </a:xfrm>
           <a:prstGeom prst="ellipse">
             <a:avLst/>
@@ -9584,7 +10211,7 @@
         <p:spPr>
           <a:xfrm>
             <a:off x="822960" y="3009960"/>
-            <a:ext cx="383760" cy="383760"/>
+            <a:ext cx="383400" cy="383400"/>
           </a:xfrm>
           <a:prstGeom prst="rect">
             <a:avLst/>
@@ -9645,7 +10272,7 @@
         <p:spPr>
           <a:xfrm>
             <a:off x="1435680" y="3009960"/>
-            <a:ext cx="9582480" cy="383760"/>
+            <a:ext cx="9582120" cy="383400"/>
           </a:xfrm>
           <a:prstGeom prst="rect">
             <a:avLst/>
@@ -9706,7 +10333,7 @@
         <p:spPr>
           <a:xfrm>
             <a:off x="822960" y="3596760"/>
-            <a:ext cx="383760" cy="383760"/>
+            <a:ext cx="383400" cy="383400"/>
           </a:xfrm>
           <a:prstGeom prst="ellipse">
             <a:avLst/>
@@ -9749,7 +10376,7 @@
         <p:spPr>
           <a:xfrm>
             <a:off x="822960" y="3596760"/>
-            <a:ext cx="383760" cy="383760"/>
+            <a:ext cx="383400" cy="383400"/>
           </a:xfrm>
           <a:prstGeom prst="rect">
             <a:avLst/>
@@ -9810,7 +10437,7 @@
         <p:spPr>
           <a:xfrm>
             <a:off x="1435680" y="3596760"/>
-            <a:ext cx="9582480" cy="383760"/>
+            <a:ext cx="9582120" cy="383400"/>
           </a:xfrm>
           <a:prstGeom prst="rect">
             <a:avLst/>
@@ -9871,7 +10498,7 @@
         <p:spPr>
           <a:xfrm>
             <a:off x="822960" y="4183560"/>
-            <a:ext cx="383760" cy="383760"/>
+            <a:ext cx="383400" cy="383400"/>
           </a:xfrm>
           <a:prstGeom prst="ellipse">
             <a:avLst/>
@@ -9914,7 +10541,7 @@
         <p:spPr>
           <a:xfrm>
             <a:off x="822960" y="4183560"/>
-            <a:ext cx="383760" cy="383760"/>
+            <a:ext cx="383400" cy="383400"/>
           </a:xfrm>
           <a:prstGeom prst="rect">
             <a:avLst/>
@@ -9975,7 +10602,7 @@
         <p:spPr>
           <a:xfrm>
             <a:off x="1435680" y="4183560"/>
-            <a:ext cx="9582480" cy="383760"/>
+            <a:ext cx="9582120" cy="383400"/>
           </a:xfrm>
           <a:prstGeom prst="rect">
             <a:avLst/>
@@ -10036,7 +10663,7 @@
         <p:spPr>
           <a:xfrm>
             <a:off x="822960" y="4770000"/>
-            <a:ext cx="383760" cy="383760"/>
+            <a:ext cx="383400" cy="383400"/>
           </a:xfrm>
           <a:prstGeom prst="ellipse">
             <a:avLst/>
@@ -10079,7 +10706,7 @@
         <p:spPr>
           <a:xfrm>
             <a:off x="822960" y="4770000"/>
-            <a:ext cx="383760" cy="383760"/>
+            <a:ext cx="383400" cy="383400"/>
           </a:xfrm>
           <a:prstGeom prst="rect">
             <a:avLst/>
@@ -10140,7 +10767,7 @@
         <p:spPr>
           <a:xfrm>
             <a:off x="1435680" y="4770000"/>
-            <a:ext cx="9582480" cy="383760"/>
+            <a:ext cx="9582120" cy="383400"/>
           </a:xfrm>
           <a:prstGeom prst="rect">
             <a:avLst/>
@@ -10201,7 +10828,7 @@
         <p:spPr>
           <a:xfrm>
             <a:off x="822960" y="5356800"/>
-            <a:ext cx="383760" cy="383760"/>
+            <a:ext cx="383400" cy="383400"/>
           </a:xfrm>
           <a:prstGeom prst="ellipse">
             <a:avLst/>
@@ -10244,7 +10871,7 @@
         <p:spPr>
           <a:xfrm>
             <a:off x="822960" y="5356800"/>
-            <a:ext cx="383760" cy="383760"/>
+            <a:ext cx="383400" cy="383400"/>
           </a:xfrm>
           <a:prstGeom prst="rect">
             <a:avLst/>
@@ -10305,7 +10932,7 @@
         <p:spPr>
           <a:xfrm>
             <a:off x="1435680" y="5356800"/>
-            <a:ext cx="9582480" cy="383760"/>
+            <a:ext cx="9582120" cy="383400"/>
           </a:xfrm>
           <a:prstGeom prst="rect">
             <a:avLst/>
@@ -10366,7 +10993,7 @@
         <p:spPr>
           <a:xfrm>
             <a:off x="457200" y="6446520"/>
-            <a:ext cx="6400440" cy="273960"/>
+            <a:ext cx="6400080" cy="273600"/>
           </a:xfrm>
           <a:prstGeom prst="rect">
             <a:avLst/>
@@ -10427,7 +11054,7 @@
         <p:spPr>
           <a:xfrm>
             <a:off x="11521440" y="6446520"/>
-            <a:ext cx="456840" cy="273960"/>
+            <a:ext cx="456480" cy="273600"/>
           </a:xfrm>
           <a:prstGeom prst="rect">
             <a:avLst/>
@@ -10525,7 +11152,7 @@
         <p:spPr>
           <a:xfrm>
             <a:off x="-1828800" y="4114800"/>
-            <a:ext cx="5486040" cy="5486040"/>
+            <a:ext cx="5485680" cy="5485680"/>
           </a:xfrm>
           <a:prstGeom prst="ellipse">
             <a:avLst/>
@@ -10568,7 +11195,7 @@
         <p:spPr>
           <a:xfrm>
             <a:off x="9601200" y="-2286000"/>
-            <a:ext cx="5486040" cy="5486040"/>
+            <a:ext cx="5485680" cy="5485680"/>
           </a:xfrm>
           <a:prstGeom prst="ellipse">
             <a:avLst/>
@@ -10611,7 +11238,7 @@
         <p:spPr>
           <a:xfrm>
             <a:off x="5591520" y="731520"/>
-            <a:ext cx="1005480" cy="1005480"/>
+            <a:ext cx="1005120" cy="1005120"/>
           </a:xfrm>
           <a:prstGeom prst="ellipse">
             <a:avLst/>
@@ -10658,7 +11285,7 @@
         <p:spPr>
           <a:xfrm>
             <a:off x="5742360" y="882360"/>
-            <a:ext cx="703800" cy="703800"/>
+            <a:ext cx="703440" cy="703440"/>
           </a:xfrm>
           <a:prstGeom prst="rect">
             <a:avLst/>
@@ -10678,7 +11305,7 @@
         <p:spPr>
           <a:xfrm>
             <a:off x="914400" y="1965960"/>
-            <a:ext cx="10359720" cy="365400"/>
+            <a:ext cx="10359360" cy="365040"/>
           </a:xfrm>
           <a:prstGeom prst="rect">
             <a:avLst/>
@@ -10739,7 +11366,7 @@
         <p:spPr>
           <a:xfrm>
             <a:off x="914400" y="2377440"/>
-            <a:ext cx="10359720" cy="2011320"/>
+            <a:ext cx="10359360" cy="2010960"/>
           </a:xfrm>
           <a:prstGeom prst="rect">
             <a:avLst/>
@@ -10800,7 +11427,7 @@
         <p:spPr>
           <a:xfrm>
             <a:off x="11521440" y="6446520"/>
-            <a:ext cx="456840" cy="273960"/>
+            <a:ext cx="456480" cy="273600"/>
           </a:xfrm>
           <a:prstGeom prst="rect">
             <a:avLst/>
@@ -10898,7 +11525,7 @@
         <p:spPr>
           <a:xfrm>
             <a:off x="-1828800" y="5120640"/>
-            <a:ext cx="3657240" cy="3657240"/>
+            <a:ext cx="3656880" cy="3656880"/>
           </a:xfrm>
           <a:prstGeom prst="ellipse">
             <a:avLst/>
@@ -10941,7 +11568,7 @@
         <p:spPr>
           <a:xfrm>
             <a:off x="457200" y="457200"/>
-            <a:ext cx="639720" cy="639720"/>
+            <a:ext cx="639360" cy="639360"/>
           </a:xfrm>
           <a:prstGeom prst="ellipse">
             <a:avLst/>
@@ -10988,7 +11615,7 @@
         <p:spPr>
           <a:xfrm>
             <a:off x="553320" y="553320"/>
-            <a:ext cx="447840" cy="447840"/>
+            <a:ext cx="447480" cy="447480"/>
           </a:xfrm>
           <a:prstGeom prst="rect">
             <a:avLst/>
@@ -11008,7 +11635,7 @@
         <p:spPr>
           <a:xfrm>
             <a:off x="1280160" y="457200"/>
-            <a:ext cx="10423800" cy="639720"/>
+            <a:ext cx="10423440" cy="639360"/>
           </a:xfrm>
           <a:prstGeom prst="rect">
             <a:avLst/>
@@ -11069,7 +11696,7 @@
         <p:spPr>
           <a:xfrm>
             <a:off x="548640" y="1828800"/>
-            <a:ext cx="4754520" cy="4023000"/>
+            <a:ext cx="4754160" cy="4022640"/>
           </a:xfrm>
           <a:prstGeom prst="rect">
             <a:avLst/>
@@ -11205,7 +11832,7 @@
         <p:spPr>
           <a:xfrm>
             <a:off x="5486400" y="1691640"/>
-            <a:ext cx="6217560" cy="4343040"/>
+            <a:ext cx="6217200" cy="4342680"/>
           </a:xfrm>
           <a:prstGeom prst="roundRect">
             <a:avLst>
@@ -11250,7 +11877,7 @@
         <p:spPr>
           <a:xfrm>
             <a:off x="5806440" y="1965960"/>
-            <a:ext cx="5577480" cy="3794400"/>
+            <a:ext cx="5577120" cy="3794040"/>
           </a:xfrm>
           <a:prstGeom prst="rect">
             <a:avLst/>
@@ -11289,8 +11916,26 @@
                 <a:latin typeface="Cantarell"/>
                 <a:ea typeface="Consolas"/>
               </a:rPr>
-              <a:t>coun</a:t>
-            </a:r>
+              <a:t>count = 1</a:t>
+            </a:r>
+            <a:endParaRPr lang="en-US" sz="1300" b="0" u="none" strike="noStrike">
+              <a:solidFill>
+                <a:srgbClr val="000000"/>
+              </a:solidFill>
+              <a:effectLst/>
+              <a:uFillTx/>
+              <a:latin typeface="Arial"/>
+            </a:endParaRPr>
+          </a:p>
+          <a:p>
+            <a:pPr defTabSz="914400">
+              <a:lnSpc>
+                <a:spcPct val="140000"/>
+              </a:lnSpc>
+              <a:tabLst>
+                <a:tab pos="0" algn="l"/>
+              </a:tabLst>
+            </a:pPr>
             <a:r>
               <a:rPr lang="en-US" sz="1300" b="0" u="none" strike="noStrike">
                 <a:solidFill>
@@ -11301,7 +11946,7 @@
                 <a:latin typeface="Cantarell"/>
                 <a:ea typeface="Consolas"/>
               </a:rPr>
-              <a:t>t = 1</a:t>
+              <a:t> </a:t>
             </a:r>
             <a:endParaRPr lang="en-US" sz="1300" b="0" u="none" strike="noStrike">
               <a:solidFill>
@@ -11309,7 +11954,7 @@
               </a:solidFill>
               <a:effectLst/>
               <a:uFillTx/>
-              <a:latin typeface="Cantarell"/>
+              <a:latin typeface="Arial"/>
             </a:endParaRPr>
           </a:p>
           <a:p>
@@ -11331,7 +11976,7 @@
                 <a:latin typeface="Cantarell"/>
                 <a:ea typeface="Consolas"/>
               </a:rPr>
-              <a:t> </a:t>
+              <a:t>while count &lt;= 5:</a:t>
             </a:r>
             <a:endParaRPr lang="en-US" sz="1300" b="0" u="none" strike="noStrike">
               <a:solidFill>
@@ -11339,7 +11984,7 @@
               </a:solidFill>
               <a:effectLst/>
               <a:uFillTx/>
-              <a:latin typeface="Cantarell"/>
+              <a:latin typeface="Arial"/>
             </a:endParaRPr>
           </a:p>
           <a:p>
@@ -11361,8 +12006,26 @@
                 <a:latin typeface="Cantarell"/>
                 <a:ea typeface="Consolas"/>
               </a:rPr>
-              <a:t>whil</a:t>
-            </a:r>
+              <a:t>    print(count)</a:t>
+            </a:r>
+            <a:endParaRPr lang="en-US" sz="1300" b="0" u="none" strike="noStrike">
+              <a:solidFill>
+                <a:srgbClr val="000000"/>
+              </a:solidFill>
+              <a:effectLst/>
+              <a:uFillTx/>
+              <a:latin typeface="Arial"/>
+            </a:endParaRPr>
+          </a:p>
+          <a:p>
+            <a:pPr defTabSz="914400">
+              <a:lnSpc>
+                <a:spcPct val="140000"/>
+              </a:lnSpc>
+              <a:tabLst>
+                <a:tab pos="0" algn="l"/>
+              </a:tabLst>
+            </a:pPr>
             <a:r>
               <a:rPr lang="en-US" sz="1300" b="0" u="none" strike="noStrike">
                 <a:solidFill>
@@ -11373,8 +12036,26 @@
                 <a:latin typeface="Cantarell"/>
                 <a:ea typeface="Consolas"/>
               </a:rPr>
-              <a:t>e </a:t>
-            </a:r>
+              <a:t>    count += 1</a:t>
+            </a:r>
+            <a:endParaRPr lang="en-US" sz="1300" b="0" u="none" strike="noStrike">
+              <a:solidFill>
+                <a:srgbClr val="000000"/>
+              </a:solidFill>
+              <a:effectLst/>
+              <a:uFillTx/>
+              <a:latin typeface="Arial"/>
+            </a:endParaRPr>
+          </a:p>
+          <a:p>
+            <a:pPr defTabSz="914400">
+              <a:lnSpc>
+                <a:spcPct val="140000"/>
+              </a:lnSpc>
+              <a:tabLst>
+                <a:tab pos="0" algn="l"/>
+              </a:tabLst>
+            </a:pPr>
             <a:r>
               <a:rPr lang="en-US" sz="1300" b="0" u="none" strike="noStrike">
                 <a:solidFill>
@@ -11385,31 +12066,37 @@
                 <a:latin typeface="Cantarell"/>
                 <a:ea typeface="Consolas"/>
               </a:rPr>
-              <a:t>coun</a:t>
-            </a:r>
+              <a:t> </a:t>
+            </a:r>
+            <a:endParaRPr lang="en-US" sz="1300" b="0" u="none" strike="noStrike">
+              <a:solidFill>
+                <a:srgbClr val="000000"/>
+              </a:solidFill>
+              <a:effectLst/>
+              <a:uFillTx/>
+              <a:latin typeface="Arial"/>
+            </a:endParaRPr>
+          </a:p>
+          <a:p>
+            <a:pPr defTabSz="914400">
+              <a:lnSpc>
+                <a:spcPct val="140000"/>
+              </a:lnSpc>
+              <a:tabLst>
+                <a:tab pos="0" algn="l"/>
+              </a:tabLst>
+            </a:pPr>
             <a:r>
               <a:rPr lang="en-US" sz="1300" b="0" u="none" strike="noStrike">
                 <a:solidFill>
-                  <a:srgbClr val="C9D3CC"/>
+                  <a:srgbClr val="5C6C63"/>
                 </a:solidFill>
                 <a:effectLst/>
                 <a:uFillTx/>
                 <a:latin typeface="Cantarell"/>
                 <a:ea typeface="Consolas"/>
               </a:rPr>
-              <a:t>t &lt;= </a:t>
-            </a:r>
-            <a:r>
-              <a:rPr lang="en-US" sz="1300" b="0" u="none" strike="noStrike">
-                <a:solidFill>
-                  <a:srgbClr val="C9D3CC"/>
-                </a:solidFill>
-                <a:effectLst/>
-                <a:uFillTx/>
-                <a:latin typeface="Cantarell"/>
-                <a:ea typeface="Consolas"/>
-              </a:rPr>
-              <a:t>5:</a:t>
+              <a:t># 1 2 3 4 5</a:t>
             </a:r>
             <a:endParaRPr lang="en-US" sz="1300" b="0" u="none" strike="noStrike">
               <a:solidFill>
@@ -11417,211 +12104,7 @@
               </a:solidFill>
               <a:effectLst/>
               <a:uFillTx/>
-              <a:latin typeface="Cantarell"/>
-            </a:endParaRPr>
-          </a:p>
-          <a:p>
-            <a:pPr defTabSz="914400">
-              <a:lnSpc>
-                <a:spcPct val="140000"/>
-              </a:lnSpc>
-              <a:tabLst>
-                <a:tab pos="0" algn="l"/>
-              </a:tabLst>
-            </a:pPr>
-            <a:r>
-              <a:rPr lang="en-US" sz="1300" b="0" u="none" strike="noStrike">
-                <a:solidFill>
-                  <a:srgbClr val="C9D3CC"/>
-                </a:solidFill>
-                <a:effectLst/>
-                <a:uFillTx/>
-                <a:latin typeface="Cantarell"/>
-                <a:ea typeface="Consolas"/>
-              </a:rPr>
-              <a:t>    </a:t>
-            </a:r>
-            <a:r>
-              <a:rPr lang="en-US" sz="1300" b="0" u="none" strike="noStrike">
-                <a:solidFill>
-                  <a:srgbClr val="C9D3CC"/>
-                </a:solidFill>
-                <a:effectLst/>
-                <a:uFillTx/>
-                <a:latin typeface="Cantarell"/>
-                <a:ea typeface="Consolas"/>
-              </a:rPr>
-              <a:t>print</a:t>
-            </a:r>
-            <a:r>
-              <a:rPr lang="en-US" sz="1300" b="0" u="none" strike="noStrike">
-                <a:solidFill>
-                  <a:srgbClr val="C9D3CC"/>
-                </a:solidFill>
-                <a:effectLst/>
-                <a:uFillTx/>
-                <a:latin typeface="Cantarell"/>
-                <a:ea typeface="Consolas"/>
-              </a:rPr>
-              <a:t>(cou</a:t>
-            </a:r>
-            <a:r>
-              <a:rPr lang="en-US" sz="1300" b="0" u="none" strike="noStrike">
-                <a:solidFill>
-                  <a:srgbClr val="C9D3CC"/>
-                </a:solidFill>
-                <a:effectLst/>
-                <a:uFillTx/>
-                <a:latin typeface="Cantarell"/>
-                <a:ea typeface="Consolas"/>
-              </a:rPr>
-              <a:t>nt)</a:t>
-            </a:r>
-            <a:endParaRPr lang="en-US" sz="1300" b="0" u="none" strike="noStrike">
-              <a:solidFill>
-                <a:srgbClr val="000000"/>
-              </a:solidFill>
-              <a:effectLst/>
-              <a:uFillTx/>
-              <a:latin typeface="Cantarell"/>
-            </a:endParaRPr>
-          </a:p>
-          <a:p>
-            <a:pPr defTabSz="914400">
-              <a:lnSpc>
-                <a:spcPct val="140000"/>
-              </a:lnSpc>
-              <a:tabLst>
-                <a:tab pos="0" algn="l"/>
-              </a:tabLst>
-            </a:pPr>
-            <a:r>
-              <a:rPr lang="en-US" sz="1300" b="0" u="none" strike="noStrike">
-                <a:solidFill>
-                  <a:srgbClr val="C9D3CC"/>
-                </a:solidFill>
-                <a:effectLst/>
-                <a:uFillTx/>
-                <a:latin typeface="Cantarell"/>
-                <a:ea typeface="Consolas"/>
-              </a:rPr>
-              <a:t>    </a:t>
-            </a:r>
-            <a:r>
-              <a:rPr lang="en-US" sz="1300" b="0" u="none" strike="noStrike">
-                <a:solidFill>
-                  <a:srgbClr val="C9D3CC"/>
-                </a:solidFill>
-                <a:effectLst/>
-                <a:uFillTx/>
-                <a:latin typeface="Cantarell"/>
-                <a:ea typeface="Consolas"/>
-              </a:rPr>
-              <a:t>coun</a:t>
-            </a:r>
-            <a:r>
-              <a:rPr lang="en-US" sz="1300" b="0" u="none" strike="noStrike">
-                <a:solidFill>
-                  <a:srgbClr val="C9D3CC"/>
-                </a:solidFill>
-                <a:effectLst/>
-                <a:uFillTx/>
-                <a:latin typeface="Cantarell"/>
-                <a:ea typeface="Consolas"/>
-              </a:rPr>
-              <a:t>t += </a:t>
-            </a:r>
-            <a:r>
-              <a:rPr lang="en-US" sz="1300" b="0" u="none" strike="noStrike">
-                <a:solidFill>
-                  <a:srgbClr val="C9D3CC"/>
-                </a:solidFill>
-                <a:effectLst/>
-                <a:uFillTx/>
-                <a:latin typeface="Cantarell"/>
-                <a:ea typeface="Consolas"/>
-              </a:rPr>
-              <a:t>1</a:t>
-            </a:r>
-            <a:endParaRPr lang="en-US" sz="1300" b="0" u="none" strike="noStrike">
-              <a:solidFill>
-                <a:srgbClr val="000000"/>
-              </a:solidFill>
-              <a:effectLst/>
-              <a:uFillTx/>
-              <a:latin typeface="Cantarell"/>
-            </a:endParaRPr>
-          </a:p>
-          <a:p>
-            <a:pPr defTabSz="914400">
-              <a:lnSpc>
-                <a:spcPct val="140000"/>
-              </a:lnSpc>
-              <a:tabLst>
-                <a:tab pos="0" algn="l"/>
-              </a:tabLst>
-            </a:pPr>
-            <a:r>
-              <a:rPr lang="en-US" sz="1300" b="0" u="none" strike="noStrike">
-                <a:solidFill>
-                  <a:srgbClr val="C9D3CC"/>
-                </a:solidFill>
-                <a:effectLst/>
-                <a:uFillTx/>
-                <a:latin typeface="Cantarell"/>
-                <a:ea typeface="Consolas"/>
-              </a:rPr>
-              <a:t> </a:t>
-            </a:r>
-            <a:endParaRPr lang="en-US" sz="1300" b="0" u="none" strike="noStrike">
-              <a:solidFill>
-                <a:srgbClr val="000000"/>
-              </a:solidFill>
-              <a:effectLst/>
-              <a:uFillTx/>
-              <a:latin typeface="Cantarell"/>
-            </a:endParaRPr>
-          </a:p>
-          <a:p>
-            <a:pPr defTabSz="914400">
-              <a:lnSpc>
-                <a:spcPct val="140000"/>
-              </a:lnSpc>
-              <a:tabLst>
-                <a:tab pos="0" algn="l"/>
-              </a:tabLst>
-            </a:pPr>
-            <a:r>
-              <a:rPr lang="en-US" sz="1300" b="0" u="none" strike="noStrike">
-                <a:solidFill>
-                  <a:srgbClr val="5C6C63"/>
-                </a:solidFill>
-                <a:effectLst/>
-                <a:uFillTx/>
-                <a:latin typeface="Cantarell"/>
-                <a:ea typeface="Consolas"/>
-              </a:rPr>
-              <a:t># 1 2 </a:t>
-            </a:r>
-            <a:r>
-              <a:rPr lang="en-US" sz="1300" b="0" u="none" strike="noStrike">
-                <a:solidFill>
-                  <a:srgbClr val="5C6C63"/>
-                </a:solidFill>
-                <a:effectLst/>
-                <a:uFillTx/>
-                <a:latin typeface="Cantarell"/>
-                <a:ea typeface="Consolas"/>
-              </a:rPr>
-              <a:t>3 4 5</a:t>
-            </a:r>
-            <a:endParaRPr lang="en-US" sz="1300" b="0" u="none" strike="noStrike">
-              <a:solidFill>
-                <a:srgbClr val="000000"/>
-              </a:solidFill>
-              <a:effectLst/>
-              <a:uFillTx/>
-              <a:latin typeface="Cantarell"/>
+              <a:latin typeface="Arial"/>
             </a:endParaRPr>
           </a:p>
         </p:txBody>
@@ -11635,7 +12118,7 @@
         <p:spPr>
           <a:xfrm>
             <a:off x="457200" y="6446520"/>
-            <a:ext cx="6400440" cy="273960"/>
+            <a:ext cx="6400080" cy="273600"/>
           </a:xfrm>
           <a:prstGeom prst="rect">
             <a:avLst/>
@@ -11696,7 +12179,7 @@
         <p:spPr>
           <a:xfrm>
             <a:off x="11521440" y="6446520"/>
-            <a:ext cx="456840" cy="273960"/>
+            <a:ext cx="456480" cy="273600"/>
           </a:xfrm>
           <a:prstGeom prst="rect">
             <a:avLst/>
@@ -11794,7 +12277,7 @@
         <p:spPr>
           <a:xfrm>
             <a:off x="457200" y="457200"/>
-            <a:ext cx="639720" cy="639720"/>
+            <a:ext cx="639360" cy="639360"/>
           </a:xfrm>
           <a:prstGeom prst="ellipse">
             <a:avLst/>
@@ -11841,7 +12324,7 @@
         <p:spPr>
           <a:xfrm>
             <a:off x="553320" y="553320"/>
-            <a:ext cx="447840" cy="447840"/>
+            <a:ext cx="447480" cy="447480"/>
           </a:xfrm>
           <a:prstGeom prst="rect">
             <a:avLst/>
@@ -11861,7 +12344,7 @@
         <p:spPr>
           <a:xfrm>
             <a:off x="1280160" y="457200"/>
-            <a:ext cx="10423800" cy="639720"/>
+            <a:ext cx="10423440" cy="639360"/>
           </a:xfrm>
           <a:prstGeom prst="rect">
             <a:avLst/>
@@ -11922,7 +12405,7 @@
         <p:spPr>
           <a:xfrm>
             <a:off x="457200" y="1645920"/>
-            <a:ext cx="5348880" cy="4480200"/>
+            <a:ext cx="5348520" cy="4479840"/>
           </a:xfrm>
           <a:prstGeom prst="roundRect">
             <a:avLst>
@@ -11967,7 +12450,7 @@
         <p:spPr>
           <a:xfrm>
             <a:off x="731520" y="1874520"/>
-            <a:ext cx="456840" cy="456840"/>
+            <a:ext cx="456480" cy="456480"/>
           </a:xfrm>
           <a:prstGeom prst="ellipse">
             <a:avLst/>
@@ -12014,7 +12497,7 @@
         <p:spPr>
           <a:xfrm>
             <a:off x="800280" y="1943280"/>
-            <a:ext cx="319680" cy="319680"/>
+            <a:ext cx="319320" cy="319320"/>
           </a:xfrm>
           <a:prstGeom prst="rect">
             <a:avLst/>
@@ -12034,7 +12517,7 @@
         <p:spPr>
           <a:xfrm>
             <a:off x="1325880" y="1874520"/>
-            <a:ext cx="4343040" cy="456840"/>
+            <a:ext cx="4342680" cy="456480"/>
           </a:xfrm>
           <a:prstGeom prst="rect">
             <a:avLst/>
@@ -12095,7 +12578,7 @@
         <p:spPr>
           <a:xfrm>
             <a:off x="731520" y="2514600"/>
-            <a:ext cx="4800240" cy="3382920"/>
+            <a:ext cx="4799880" cy="3382560"/>
           </a:xfrm>
           <a:prstGeom prst="rect">
             <a:avLst/>
@@ -12231,7 +12714,7 @@
         <p:spPr>
           <a:xfrm>
             <a:off x="6172200" y="1645920"/>
-            <a:ext cx="5348880" cy="4480200"/>
+            <a:ext cx="5348520" cy="4479840"/>
           </a:xfrm>
           <a:prstGeom prst="roundRect">
             <a:avLst>
@@ -12276,7 +12759,7 @@
         <p:spPr>
           <a:xfrm>
             <a:off x="6446520" y="1874520"/>
-            <a:ext cx="456840" cy="456840"/>
+            <a:ext cx="456480" cy="456480"/>
           </a:xfrm>
           <a:prstGeom prst="ellipse">
             <a:avLst/>
@@ -12323,7 +12806,7 @@
         <p:spPr>
           <a:xfrm>
             <a:off x="6515280" y="1943280"/>
-            <a:ext cx="319680" cy="319680"/>
+            <a:ext cx="319320" cy="319320"/>
           </a:xfrm>
           <a:prstGeom prst="rect">
             <a:avLst/>
@@ -12343,7 +12826,7 @@
         <p:spPr>
           <a:xfrm>
             <a:off x="7040880" y="1874520"/>
-            <a:ext cx="4343040" cy="456840"/>
+            <a:ext cx="4342680" cy="456480"/>
           </a:xfrm>
           <a:prstGeom prst="rect">
             <a:avLst/>
@@ -12404,7 +12887,7 @@
         <p:spPr>
           <a:xfrm>
             <a:off x="6446520" y="2514600"/>
-            <a:ext cx="4800240" cy="3382920"/>
+            <a:ext cx="4799880" cy="3382560"/>
           </a:xfrm>
           <a:prstGeom prst="rect">
             <a:avLst/>
@@ -12540,7 +13023,7 @@
         <p:spPr>
           <a:xfrm>
             <a:off x="457200" y="6446520"/>
-            <a:ext cx="6400440" cy="273960"/>
+            <a:ext cx="6400080" cy="273600"/>
           </a:xfrm>
           <a:prstGeom prst="rect">
             <a:avLst/>
@@ -12601,7 +13084,7 @@
         <p:spPr>
           <a:xfrm>
             <a:off x="11521440" y="6446520"/>
-            <a:ext cx="456840" cy="273960"/>
+            <a:ext cx="456480" cy="273600"/>
           </a:xfrm>
           <a:prstGeom prst="rect">
             <a:avLst/>
@@ -12699,7 +13182,7 @@
         <p:spPr>
           <a:xfrm>
             <a:off x="-1828800" y="5120640"/>
-            <a:ext cx="3657240" cy="3657240"/>
+            <a:ext cx="3656880" cy="3656880"/>
           </a:xfrm>
           <a:prstGeom prst="ellipse">
             <a:avLst/>
@@ -12742,7 +13225,7 @@
         <p:spPr>
           <a:xfrm>
             <a:off x="457200" y="457200"/>
-            <a:ext cx="639720" cy="639720"/>
+            <a:ext cx="639360" cy="639360"/>
           </a:xfrm>
           <a:prstGeom prst="ellipse">
             <a:avLst/>
@@ -12789,7 +13272,7 @@
         <p:spPr>
           <a:xfrm>
             <a:off x="553320" y="553320"/>
-            <a:ext cx="447840" cy="447840"/>
+            <a:ext cx="447480" cy="447480"/>
           </a:xfrm>
           <a:prstGeom prst="rect">
             <a:avLst/>
@@ -12809,7 +13292,7 @@
         <p:spPr>
           <a:xfrm>
             <a:off x="1280160" y="457200"/>
-            <a:ext cx="10423800" cy="639720"/>
+            <a:ext cx="10423440" cy="639360"/>
           </a:xfrm>
           <a:prstGeom prst="rect">
             <a:avLst/>
@@ -12870,7 +13353,7 @@
         <p:spPr>
           <a:xfrm>
             <a:off x="548640" y="1828800"/>
-            <a:ext cx="4754520" cy="4023000"/>
+            <a:ext cx="4754160" cy="4022640"/>
           </a:xfrm>
           <a:prstGeom prst="rect">
             <a:avLst/>
@@ -13006,7 +13489,7 @@
         <p:spPr>
           <a:xfrm>
             <a:off x="5486400" y="1691640"/>
-            <a:ext cx="6217560" cy="4343040"/>
+            <a:ext cx="6217200" cy="4342680"/>
           </a:xfrm>
           <a:prstGeom prst="roundRect">
             <a:avLst>
@@ -13051,7 +13534,7 @@
         <p:spPr>
           <a:xfrm>
             <a:off x="5806440" y="1965960"/>
-            <a:ext cx="5577480" cy="3794400"/>
+            <a:ext cx="5577120" cy="3794040"/>
           </a:xfrm>
           <a:prstGeom prst="rect">
             <a:avLst/>
@@ -13098,7 +13581,7 @@
               </a:solidFill>
               <a:effectLst/>
               <a:uFillTx/>
-              <a:latin typeface="Cantarell"/>
+              <a:latin typeface="Arial"/>
             </a:endParaRPr>
           </a:p>
           <a:p>
@@ -13128,7 +13611,7 @@
               </a:solidFill>
               <a:effectLst/>
               <a:uFillTx/>
-              <a:latin typeface="Cantarell"/>
+              <a:latin typeface="Arial"/>
             </a:endParaRPr>
           </a:p>
           <a:p>
@@ -13158,7 +13641,7 @@
               </a:solidFill>
               <a:effectLst/>
               <a:uFillTx/>
-              <a:latin typeface="Cantarell"/>
+              <a:latin typeface="Arial"/>
             </a:endParaRPr>
           </a:p>
           <a:p>
@@ -13188,7 +13671,7 @@
               </a:solidFill>
               <a:effectLst/>
               <a:uFillTx/>
-              <a:latin typeface="Cantarell"/>
+              <a:latin typeface="Arial"/>
             </a:endParaRPr>
           </a:p>
           <a:p>
@@ -13218,7 +13701,7 @@
               </a:solidFill>
               <a:effectLst/>
               <a:uFillTx/>
-              <a:latin typeface="Cantarell"/>
+              <a:latin typeface="Arial"/>
             </a:endParaRPr>
           </a:p>
           <a:p>
@@ -13248,7 +13731,7 @@
               </a:solidFill>
               <a:effectLst/>
               <a:uFillTx/>
-              <a:latin typeface="Cantarell"/>
+              <a:latin typeface="Arial"/>
             </a:endParaRPr>
           </a:p>
           <a:p>
@@ -13278,7 +13761,7 @@
               </a:solidFill>
               <a:effectLst/>
               <a:uFillTx/>
-              <a:latin typeface="Cantarell"/>
+              <a:latin typeface="Arial"/>
             </a:endParaRPr>
           </a:p>
           <a:p>
@@ -13308,7 +13791,7 @@
               </a:solidFill>
               <a:effectLst/>
               <a:uFillTx/>
-              <a:latin typeface="Cantarell"/>
+              <a:latin typeface="Arial"/>
             </a:endParaRPr>
           </a:p>
           <a:p>
@@ -13338,7 +13821,7 @@
               </a:solidFill>
               <a:effectLst/>
               <a:uFillTx/>
-              <a:latin typeface="Cantarell"/>
+              <a:latin typeface="Arial"/>
             </a:endParaRPr>
           </a:p>
           <a:p>
@@ -13368,7 +13851,7 @@
               </a:solidFill>
               <a:effectLst/>
               <a:uFillTx/>
-              <a:latin typeface="Cantarell"/>
+              <a:latin typeface="Arial"/>
             </a:endParaRPr>
           </a:p>
         </p:txBody>
@@ -13382,7 +13865,7 @@
         <p:spPr>
           <a:xfrm>
             <a:off x="457200" y="6446520"/>
-            <a:ext cx="6400440" cy="273960"/>
+            <a:ext cx="6400080" cy="273600"/>
           </a:xfrm>
           <a:prstGeom prst="rect">
             <a:avLst/>
@@ -13443,7 +13926,7 @@
         <p:spPr>
           <a:xfrm>
             <a:off x="11521440" y="6446520"/>
-            <a:ext cx="456840" cy="273960"/>
+            <a:ext cx="456480" cy="273600"/>
           </a:xfrm>
           <a:prstGeom prst="rect">
             <a:avLst/>
@@ -13541,7 +14024,7 @@
         <p:spPr>
           <a:xfrm>
             <a:off x="-1828800" y="5120640"/>
-            <a:ext cx="3657240" cy="3657240"/>
+            <a:ext cx="3656880" cy="3656880"/>
           </a:xfrm>
           <a:prstGeom prst="ellipse">
             <a:avLst/>
@@ -13584,7 +14067,7 @@
         <p:spPr>
           <a:xfrm>
             <a:off x="457200" y="457200"/>
-            <a:ext cx="639720" cy="639720"/>
+            <a:ext cx="639360" cy="639360"/>
           </a:xfrm>
           <a:prstGeom prst="ellipse">
             <a:avLst/>
@@ -13631,7 +14114,7 @@
         <p:spPr>
           <a:xfrm>
             <a:off x="553320" y="553320"/>
-            <a:ext cx="447840" cy="447840"/>
+            <a:ext cx="447480" cy="447480"/>
           </a:xfrm>
           <a:prstGeom prst="rect">
             <a:avLst/>
@@ -13651,7 +14134,7 @@
         <p:spPr>
           <a:xfrm>
             <a:off x="1280160" y="457200"/>
-            <a:ext cx="10423800" cy="639720"/>
+            <a:ext cx="10423440" cy="639360"/>
           </a:xfrm>
           <a:prstGeom prst="rect">
             <a:avLst/>
@@ -13712,7 +14195,7 @@
         <p:spPr>
           <a:xfrm>
             <a:off x="548640" y="1828800"/>
-            <a:ext cx="4754520" cy="4023000"/>
+            <a:ext cx="4754160" cy="4022640"/>
           </a:xfrm>
           <a:prstGeom prst="rect">
             <a:avLst/>
@@ -13813,7 +14296,7 @@
         <p:spPr>
           <a:xfrm>
             <a:off x="5486400" y="1691640"/>
-            <a:ext cx="6217560" cy="4343040"/>
+            <a:ext cx="6217200" cy="4342680"/>
           </a:xfrm>
           <a:prstGeom prst="roundRect">
             <a:avLst>
@@ -13858,7 +14341,7 @@
         <p:spPr>
           <a:xfrm>
             <a:off x="5806440" y="1965960"/>
-            <a:ext cx="5577480" cy="3794400"/>
+            <a:ext cx="5577120" cy="3794040"/>
           </a:xfrm>
           <a:prstGeom prst="rect">
             <a:avLst/>
@@ -13905,7 +14388,7 @@
               </a:solidFill>
               <a:effectLst/>
               <a:uFillTx/>
-              <a:latin typeface="Cantarell"/>
+              <a:latin typeface="Arial"/>
             </a:endParaRPr>
           </a:p>
           <a:p>
@@ -13935,7 +14418,7 @@
               </a:solidFill>
               <a:effectLst/>
               <a:uFillTx/>
-              <a:latin typeface="Cantarell"/>
+              <a:latin typeface="Arial"/>
             </a:endParaRPr>
           </a:p>
           <a:p>
@@ -13965,7 +14448,7 @@
               </a:solidFill>
               <a:effectLst/>
               <a:uFillTx/>
-              <a:latin typeface="Cantarell"/>
+              <a:latin typeface="Arial"/>
             </a:endParaRPr>
           </a:p>
           <a:p>
@@ -13995,7 +14478,7 @@
               </a:solidFill>
               <a:effectLst/>
               <a:uFillTx/>
-              <a:latin typeface="Cantarell"/>
+              <a:latin typeface="Arial"/>
             </a:endParaRPr>
           </a:p>
           <a:p>
@@ -14025,7 +14508,7 @@
               </a:solidFill>
               <a:effectLst/>
               <a:uFillTx/>
-              <a:latin typeface="Cantarell"/>
+              <a:latin typeface="Arial"/>
             </a:endParaRPr>
           </a:p>
           <a:p>
@@ -14055,7 +14538,7 @@
               </a:solidFill>
               <a:effectLst/>
               <a:uFillTx/>
-              <a:latin typeface="Cantarell"/>
+              <a:latin typeface="Arial"/>
             </a:endParaRPr>
           </a:p>
           <a:p>
@@ -14085,7 +14568,7 @@
               </a:solidFill>
               <a:effectLst/>
               <a:uFillTx/>
-              <a:latin typeface="Cantarell"/>
+              <a:latin typeface="Arial"/>
             </a:endParaRPr>
           </a:p>
         </p:txBody>
@@ -14099,7 +14582,7 @@
         <p:spPr>
           <a:xfrm>
             <a:off x="457200" y="6446520"/>
-            <a:ext cx="6400440" cy="273960"/>
+            <a:ext cx="6400080" cy="273600"/>
           </a:xfrm>
           <a:prstGeom prst="rect">
             <a:avLst/>
@@ -14160,7 +14643,7 @@
         <p:spPr>
           <a:xfrm>
             <a:off x="11521440" y="6446520"/>
-            <a:ext cx="456840" cy="273960"/>
+            <a:ext cx="456480" cy="273600"/>
           </a:xfrm>
           <a:prstGeom prst="rect">
             <a:avLst/>
@@ -14258,7 +14741,7 @@
         <p:spPr>
           <a:xfrm>
             <a:off x="-1828800" y="5120640"/>
-            <a:ext cx="3657240" cy="3657240"/>
+            <a:ext cx="3656880" cy="3656880"/>
           </a:xfrm>
           <a:prstGeom prst="ellipse">
             <a:avLst/>
@@ -14301,7 +14784,7 @@
         <p:spPr>
           <a:xfrm>
             <a:off x="457200" y="457200"/>
-            <a:ext cx="639720" cy="639720"/>
+            <a:ext cx="639360" cy="639360"/>
           </a:xfrm>
           <a:prstGeom prst="ellipse">
             <a:avLst/>
@@ -14348,7 +14831,7 @@
         <p:spPr>
           <a:xfrm>
             <a:off x="553320" y="553320"/>
-            <a:ext cx="447840" cy="447840"/>
+            <a:ext cx="447480" cy="447480"/>
           </a:xfrm>
           <a:prstGeom prst="rect">
             <a:avLst/>
@@ -14368,7 +14851,7 @@
         <p:spPr>
           <a:xfrm>
             <a:off x="1280160" y="457200"/>
-            <a:ext cx="10423800" cy="639720"/>
+            <a:ext cx="10423440" cy="639360"/>
           </a:xfrm>
           <a:prstGeom prst="rect">
             <a:avLst/>
@@ -14429,7 +14912,7 @@
         <p:spPr>
           <a:xfrm>
             <a:off x="548640" y="1828800"/>
-            <a:ext cx="4754520" cy="4023000"/>
+            <a:ext cx="4754160" cy="4022640"/>
           </a:xfrm>
           <a:prstGeom prst="rect">
             <a:avLst/>
@@ -14530,7 +15013,7 @@
         <p:spPr>
           <a:xfrm>
             <a:off x="5486400" y="1691640"/>
-            <a:ext cx="6217560" cy="4343040"/>
+            <a:ext cx="6217200" cy="4342680"/>
           </a:xfrm>
           <a:prstGeom prst="roundRect">
             <a:avLst>
@@ -14575,7 +15058,7 @@
         <p:spPr>
           <a:xfrm>
             <a:off x="5806440" y="1965960"/>
-            <a:ext cx="5577480" cy="3794400"/>
+            <a:ext cx="5577120" cy="3794040"/>
           </a:xfrm>
           <a:prstGeom prst="rect">
             <a:avLst/>
@@ -14622,7 +15105,7 @@
               </a:solidFill>
               <a:effectLst/>
               <a:uFillTx/>
-              <a:latin typeface="Cantarell"/>
+              <a:latin typeface="Arial"/>
             </a:endParaRPr>
           </a:p>
           <a:p>
@@ -14652,7 +15135,7 @@
               </a:solidFill>
               <a:effectLst/>
               <a:uFillTx/>
-              <a:latin typeface="Cantarell"/>
+              <a:latin typeface="Arial"/>
             </a:endParaRPr>
           </a:p>
           <a:p>
@@ -14682,7 +15165,7 @@
               </a:solidFill>
               <a:effectLst/>
               <a:uFillTx/>
-              <a:latin typeface="Cantarell"/>
+              <a:latin typeface="Arial"/>
             </a:endParaRPr>
           </a:p>
           <a:p>
@@ -14712,7 +15195,7 @@
               </a:solidFill>
               <a:effectLst/>
               <a:uFillTx/>
-              <a:latin typeface="Cantarell"/>
+              <a:latin typeface="Arial"/>
             </a:endParaRPr>
           </a:p>
           <a:p>
@@ -14742,7 +15225,7 @@
               </a:solidFill>
               <a:effectLst/>
               <a:uFillTx/>
-              <a:latin typeface="Cantarell"/>
+              <a:latin typeface="Arial"/>
             </a:endParaRPr>
           </a:p>
           <a:p>
@@ -14772,7 +15255,7 @@
               </a:solidFill>
               <a:effectLst/>
               <a:uFillTx/>
-              <a:latin typeface="Cantarell"/>
+              <a:latin typeface="Arial"/>
             </a:endParaRPr>
           </a:p>
           <a:p>
@@ -14802,7 +15285,7 @@
               </a:solidFill>
               <a:effectLst/>
               <a:uFillTx/>
-              <a:latin typeface="Cantarell"/>
+              <a:latin typeface="Arial"/>
             </a:endParaRPr>
           </a:p>
         </p:txBody>
@@ -14816,7 +15299,7 @@
         <p:spPr>
           <a:xfrm>
             <a:off x="457200" y="6446520"/>
-            <a:ext cx="6400440" cy="273960"/>
+            <a:ext cx="6400080" cy="273600"/>
           </a:xfrm>
           <a:prstGeom prst="rect">
             <a:avLst/>
@@ -14877,7 +15360,7 @@
         <p:spPr>
           <a:xfrm>
             <a:off x="11521440" y="6446520"/>
-            <a:ext cx="456840" cy="273960"/>
+            <a:ext cx="456480" cy="273600"/>
           </a:xfrm>
           <a:prstGeom prst="rect">
             <a:avLst/>
@@ -14975,7 +15458,7 @@
         <p:spPr>
           <a:xfrm>
             <a:off x="-1828800" y="5029200"/>
-            <a:ext cx="3657240" cy="3657240"/>
+            <a:ext cx="3656880" cy="3656880"/>
           </a:xfrm>
           <a:prstGeom prst="ellipse">
             <a:avLst/>
@@ -15018,7 +15501,7 @@
         <p:spPr>
           <a:xfrm>
             <a:off x="457200" y="457200"/>
-            <a:ext cx="639720" cy="639720"/>
+            <a:ext cx="639360" cy="639360"/>
           </a:xfrm>
           <a:prstGeom prst="ellipse">
             <a:avLst/>
@@ -15065,7 +15548,7 @@
         <p:spPr>
           <a:xfrm>
             <a:off x="553320" y="553320"/>
-            <a:ext cx="447840" cy="447840"/>
+            <a:ext cx="447480" cy="447480"/>
           </a:xfrm>
           <a:prstGeom prst="rect">
             <a:avLst/>
@@ -15085,7 +15568,7 @@
         <p:spPr>
           <a:xfrm>
             <a:off x="1280160" y="457200"/>
-            <a:ext cx="10423800" cy="639720"/>
+            <a:ext cx="10423440" cy="639360"/>
           </a:xfrm>
           <a:prstGeom prst="rect">
             <a:avLst/>
@@ -15146,7 +15629,7 @@
         <p:spPr>
           <a:xfrm>
             <a:off x="457200" y="1600200"/>
-            <a:ext cx="11274120" cy="4480200"/>
+            <a:ext cx="11273760" cy="4479840"/>
           </a:xfrm>
           <a:prstGeom prst="roundRect">
             <a:avLst>
@@ -15191,7 +15674,7 @@
         <p:spPr>
           <a:xfrm>
             <a:off x="822960" y="1828800"/>
-            <a:ext cx="10515240" cy="456840"/>
+            <a:ext cx="10514880" cy="456480"/>
           </a:xfrm>
           <a:prstGeom prst="rect">
             <a:avLst/>
@@ -15252,7 +15735,7 @@
         <p:spPr>
           <a:xfrm>
             <a:off x="822960" y="2423160"/>
-            <a:ext cx="383760" cy="383760"/>
+            <a:ext cx="383400" cy="383400"/>
           </a:xfrm>
           <a:prstGeom prst="ellipse">
             <a:avLst/>
@@ -15295,7 +15778,7 @@
         <p:spPr>
           <a:xfrm>
             <a:off x="822960" y="2423160"/>
-            <a:ext cx="383760" cy="383760"/>
+            <a:ext cx="383400" cy="383400"/>
           </a:xfrm>
           <a:prstGeom prst="rect">
             <a:avLst/>
@@ -15356,7 +15839,7 @@
         <p:spPr>
           <a:xfrm>
             <a:off x="1435680" y="2423160"/>
-            <a:ext cx="9582480" cy="383760"/>
+            <a:ext cx="9582120" cy="383400"/>
           </a:xfrm>
           <a:prstGeom prst="rect">
             <a:avLst/>
@@ -15417,7 +15900,7 @@
         <p:spPr>
           <a:xfrm>
             <a:off x="822960" y="3303360"/>
-            <a:ext cx="383760" cy="383760"/>
+            <a:ext cx="383400" cy="383400"/>
           </a:xfrm>
           <a:prstGeom prst="ellipse">
             <a:avLst/>
@@ -15460,7 +15943,7 @@
         <p:spPr>
           <a:xfrm>
             <a:off x="822960" y="3303360"/>
-            <a:ext cx="383760" cy="383760"/>
+            <a:ext cx="383400" cy="383400"/>
           </a:xfrm>
           <a:prstGeom prst="rect">
             <a:avLst/>
@@ -15521,7 +16004,7 @@
         <p:spPr>
           <a:xfrm>
             <a:off x="1435680" y="3303360"/>
-            <a:ext cx="9582480" cy="383760"/>
+            <a:ext cx="9582120" cy="383400"/>
           </a:xfrm>
           <a:prstGeom prst="rect">
             <a:avLst/>
@@ -15582,7 +16065,7 @@
         <p:spPr>
           <a:xfrm>
             <a:off x="822960" y="4183560"/>
-            <a:ext cx="383760" cy="383760"/>
+            <a:ext cx="383400" cy="383400"/>
           </a:xfrm>
           <a:prstGeom prst="ellipse">
             <a:avLst/>
@@ -15625,7 +16108,7 @@
         <p:spPr>
           <a:xfrm>
             <a:off x="822960" y="4183560"/>
-            <a:ext cx="383760" cy="383760"/>
+            <a:ext cx="383400" cy="383400"/>
           </a:xfrm>
           <a:prstGeom prst="rect">
             <a:avLst/>
@@ -15686,7 +16169,7 @@
         <p:spPr>
           <a:xfrm>
             <a:off x="1435680" y="4183560"/>
-            <a:ext cx="9582480" cy="383760"/>
+            <a:ext cx="9582120" cy="383400"/>
           </a:xfrm>
           <a:prstGeom prst="rect">
             <a:avLst/>
@@ -15747,7 +16230,7 @@
         <p:spPr>
           <a:xfrm>
             <a:off x="822960" y="5063400"/>
-            <a:ext cx="383760" cy="383760"/>
+            <a:ext cx="383400" cy="383400"/>
           </a:xfrm>
           <a:prstGeom prst="ellipse">
             <a:avLst/>
@@ -15790,7 +16273,7 @@
         <p:spPr>
           <a:xfrm>
             <a:off x="822960" y="5063400"/>
-            <a:ext cx="383760" cy="383760"/>
+            <a:ext cx="383400" cy="383400"/>
           </a:xfrm>
           <a:prstGeom prst="rect">
             <a:avLst/>
@@ -15851,7 +16334,7 @@
         <p:spPr>
           <a:xfrm>
             <a:off x="1435680" y="5063400"/>
-            <a:ext cx="9582480" cy="383760"/>
+            <a:ext cx="9582120" cy="383400"/>
           </a:xfrm>
           <a:prstGeom prst="rect">
             <a:avLst/>
@@ -15912,7 +16395,7 @@
         <p:spPr>
           <a:xfrm>
             <a:off x="457200" y="6446520"/>
-            <a:ext cx="6400440" cy="273960"/>
+            <a:ext cx="6400080" cy="273600"/>
           </a:xfrm>
           <a:prstGeom prst="rect">
             <a:avLst/>
@@ -15973,7 +16456,7 @@
         <p:spPr>
           <a:xfrm>
             <a:off x="11521440" y="6446520"/>
-            <a:ext cx="456840" cy="273960"/>
+            <a:ext cx="456480" cy="273600"/>
           </a:xfrm>
           <a:prstGeom prst="rect">
             <a:avLst/>
@@ -16071,7 +16554,7 @@
         <p:spPr>
           <a:xfrm>
             <a:off x="10515600" y="-1371600"/>
-            <a:ext cx="3657240" cy="3657240"/>
+            <a:ext cx="3656880" cy="3656880"/>
           </a:xfrm>
           <a:prstGeom prst="ellipse">
             <a:avLst/>
@@ -16114,7 +16597,7 @@
         <p:spPr>
           <a:xfrm>
             <a:off x="457200" y="457200"/>
-            <a:ext cx="639720" cy="639720"/>
+            <a:ext cx="639360" cy="639360"/>
           </a:xfrm>
           <a:prstGeom prst="ellipse">
             <a:avLst/>
@@ -16161,7 +16644,7 @@
         <p:spPr>
           <a:xfrm>
             <a:off x="553320" y="553320"/>
-            <a:ext cx="447840" cy="447840"/>
+            <a:ext cx="447480" cy="447480"/>
           </a:xfrm>
           <a:prstGeom prst="rect">
             <a:avLst/>
@@ -16181,7 +16664,7 @@
         <p:spPr>
           <a:xfrm>
             <a:off x="1280160" y="457200"/>
-            <a:ext cx="10423800" cy="639720"/>
+            <a:ext cx="10423440" cy="639360"/>
           </a:xfrm>
           <a:prstGeom prst="rect">
             <a:avLst/>
@@ -16242,7 +16725,7 @@
         <p:spPr>
           <a:xfrm>
             <a:off x="457200" y="1600200"/>
-            <a:ext cx="11274120" cy="446760"/>
+            <a:ext cx="11273760" cy="446400"/>
           </a:xfrm>
           <a:prstGeom prst="roundRect">
             <a:avLst>
@@ -16287,7 +16770,7 @@
         <p:spPr>
           <a:xfrm>
             <a:off x="621720" y="1662840"/>
-            <a:ext cx="321480" cy="321480"/>
+            <a:ext cx="321120" cy="321120"/>
           </a:xfrm>
           <a:prstGeom prst="ellipse">
             <a:avLst/>
@@ -16334,7 +16817,7 @@
         <p:spPr>
           <a:xfrm>
             <a:off x="669960" y="1711080"/>
-            <a:ext cx="225000" cy="225000"/>
+            <a:ext cx="224640" cy="224640"/>
           </a:xfrm>
           <a:prstGeom prst="rect">
             <a:avLst/>
@@ -16354,7 +16837,7 @@
         <p:spPr>
           <a:xfrm>
             <a:off x="1325880" y="1600200"/>
-            <a:ext cx="10058040" cy="446760"/>
+            <a:ext cx="10057680" cy="446400"/>
           </a:xfrm>
           <a:prstGeom prst="rect">
             <a:avLst/>
@@ -16415,7 +16898,7 @@
         <p:spPr>
           <a:xfrm>
             <a:off x="457200" y="2138760"/>
-            <a:ext cx="11274120" cy="446760"/>
+            <a:ext cx="11273760" cy="446400"/>
           </a:xfrm>
           <a:prstGeom prst="roundRect">
             <a:avLst>
@@ -16460,7 +16943,7 @@
         <p:spPr>
           <a:xfrm>
             <a:off x="621720" y="2201400"/>
-            <a:ext cx="321480" cy="321480"/>
+            <a:ext cx="321120" cy="321120"/>
           </a:xfrm>
           <a:prstGeom prst="ellipse">
             <a:avLst/>
@@ -16507,7 +16990,7 @@
         <p:spPr>
           <a:xfrm>
             <a:off x="669960" y="2249640"/>
-            <a:ext cx="225000" cy="225000"/>
+            <a:ext cx="224640" cy="224640"/>
           </a:xfrm>
           <a:prstGeom prst="rect">
             <a:avLst/>
@@ -16527,7 +17010,7 @@
         <p:spPr>
           <a:xfrm>
             <a:off x="1325880" y="2138760"/>
-            <a:ext cx="10058040" cy="446760"/>
+            <a:ext cx="10057680" cy="446400"/>
           </a:xfrm>
           <a:prstGeom prst="rect">
             <a:avLst/>
@@ -16588,7 +17071,7 @@
         <p:spPr>
           <a:xfrm>
             <a:off x="457200" y="2677320"/>
-            <a:ext cx="11274120" cy="446760"/>
+            <a:ext cx="11273760" cy="446400"/>
           </a:xfrm>
           <a:prstGeom prst="roundRect">
             <a:avLst>
@@ -16633,7 +17116,7 @@
         <p:spPr>
           <a:xfrm>
             <a:off x="621720" y="2739600"/>
-            <a:ext cx="321480" cy="321480"/>
+            <a:ext cx="321120" cy="321120"/>
           </a:xfrm>
           <a:prstGeom prst="ellipse">
             <a:avLst/>
@@ -16680,7 +17163,7 @@
         <p:spPr>
           <a:xfrm>
             <a:off x="669960" y="2788200"/>
-            <a:ext cx="225000" cy="225000"/>
+            <a:ext cx="224640" cy="224640"/>
           </a:xfrm>
           <a:prstGeom prst="rect">
             <a:avLst/>
@@ -16700,7 +17183,7 @@
         <p:spPr>
           <a:xfrm>
             <a:off x="1325880" y="2677320"/>
-            <a:ext cx="10058040" cy="446760"/>
+            <a:ext cx="10057680" cy="446400"/>
           </a:xfrm>
           <a:prstGeom prst="rect">
             <a:avLst/>
@@ -16761,7 +17244,7 @@
         <p:spPr>
           <a:xfrm>
             <a:off x="457200" y="3215520"/>
-            <a:ext cx="11274120" cy="446760"/>
+            <a:ext cx="11273760" cy="446400"/>
           </a:xfrm>
           <a:prstGeom prst="roundRect">
             <a:avLst>
@@ -16806,7 +17289,7 @@
         <p:spPr>
           <a:xfrm>
             <a:off x="621720" y="3278160"/>
-            <a:ext cx="321480" cy="321480"/>
+            <a:ext cx="321120" cy="321120"/>
           </a:xfrm>
           <a:prstGeom prst="ellipse">
             <a:avLst/>
@@ -16853,7 +17336,7 @@
         <p:spPr>
           <a:xfrm>
             <a:off x="669960" y="3326400"/>
-            <a:ext cx="225000" cy="225000"/>
+            <a:ext cx="224640" cy="224640"/>
           </a:xfrm>
           <a:prstGeom prst="rect">
             <a:avLst/>
@@ -16873,7 +17356,7 @@
         <p:spPr>
           <a:xfrm>
             <a:off x="1325880" y="3215520"/>
-            <a:ext cx="10058040" cy="446760"/>
+            <a:ext cx="10057680" cy="446400"/>
           </a:xfrm>
           <a:prstGeom prst="rect">
             <a:avLst/>
@@ -16934,7 +17417,7 @@
         <p:spPr>
           <a:xfrm>
             <a:off x="457200" y="3754080"/>
-            <a:ext cx="11274120" cy="446760"/>
+            <a:ext cx="11273760" cy="446400"/>
           </a:xfrm>
           <a:prstGeom prst="roundRect">
             <a:avLst>
@@ -16979,7 +17462,7 @@
         <p:spPr>
           <a:xfrm>
             <a:off x="621720" y="3816720"/>
-            <a:ext cx="321480" cy="321480"/>
+            <a:ext cx="321120" cy="321120"/>
           </a:xfrm>
           <a:prstGeom prst="ellipse">
             <a:avLst/>
@@ -17026,7 +17509,7 @@
         <p:spPr>
           <a:xfrm>
             <a:off x="669960" y="3864960"/>
-            <a:ext cx="225000" cy="225000"/>
+            <a:ext cx="224640" cy="224640"/>
           </a:xfrm>
           <a:prstGeom prst="rect">
             <a:avLst/>
@@ -17046,7 +17529,7 @@
         <p:spPr>
           <a:xfrm>
             <a:off x="1325880" y="3754080"/>
-            <a:ext cx="10058040" cy="446760"/>
+            <a:ext cx="10057680" cy="446400"/>
           </a:xfrm>
           <a:prstGeom prst="rect">
             <a:avLst/>
@@ -17107,7 +17590,7 @@
         <p:spPr>
           <a:xfrm>
             <a:off x="457200" y="4292640"/>
-            <a:ext cx="11274120" cy="446760"/>
+            <a:ext cx="11273760" cy="446400"/>
           </a:xfrm>
           <a:prstGeom prst="roundRect">
             <a:avLst>
@@ -17152,7 +17635,7 @@
         <p:spPr>
           <a:xfrm>
             <a:off x="621720" y="4355280"/>
-            <a:ext cx="321480" cy="321480"/>
+            <a:ext cx="321120" cy="321120"/>
           </a:xfrm>
           <a:prstGeom prst="ellipse">
             <a:avLst/>
@@ -17199,7 +17682,7 @@
         <p:spPr>
           <a:xfrm>
             <a:off x="669960" y="4403520"/>
-            <a:ext cx="225000" cy="225000"/>
+            <a:ext cx="224640" cy="224640"/>
           </a:xfrm>
           <a:prstGeom prst="rect">
             <a:avLst/>
@@ -17219,7 +17702,7 @@
         <p:spPr>
           <a:xfrm>
             <a:off x="1325880" y="4292640"/>
-            <a:ext cx="10058040" cy="446760"/>
+            <a:ext cx="10057680" cy="446400"/>
           </a:xfrm>
           <a:prstGeom prst="rect">
             <a:avLst/>
@@ -17280,7 +17763,7 @@
         <p:spPr>
           <a:xfrm>
             <a:off x="457200" y="4831200"/>
-            <a:ext cx="11274120" cy="446760"/>
+            <a:ext cx="11273760" cy="446400"/>
           </a:xfrm>
           <a:prstGeom prst="roundRect">
             <a:avLst>
@@ -17325,7 +17808,7 @@
         <p:spPr>
           <a:xfrm>
             <a:off x="621720" y="4893840"/>
-            <a:ext cx="321480" cy="321480"/>
+            <a:ext cx="321120" cy="321120"/>
           </a:xfrm>
           <a:prstGeom prst="ellipse">
             <a:avLst/>
@@ -17372,7 +17855,7 @@
         <p:spPr>
           <a:xfrm>
             <a:off x="669960" y="4942080"/>
-            <a:ext cx="225000" cy="225000"/>
+            <a:ext cx="224640" cy="224640"/>
           </a:xfrm>
           <a:prstGeom prst="rect">
             <a:avLst/>
@@ -17392,7 +17875,7 @@
         <p:spPr>
           <a:xfrm>
             <a:off x="1325880" y="4831200"/>
-            <a:ext cx="10058040" cy="446760"/>
+            <a:ext cx="10057680" cy="446400"/>
           </a:xfrm>
           <a:prstGeom prst="rect">
             <a:avLst/>
@@ -17453,7 +17936,7 @@
         <p:spPr>
           <a:xfrm>
             <a:off x="457200" y="5369400"/>
-            <a:ext cx="11274120" cy="446760"/>
+            <a:ext cx="11273760" cy="446400"/>
           </a:xfrm>
           <a:prstGeom prst="roundRect">
             <a:avLst>
@@ -17498,7 +17981,7 @@
         <p:spPr>
           <a:xfrm>
             <a:off x="621720" y="5432040"/>
-            <a:ext cx="321480" cy="321480"/>
+            <a:ext cx="321120" cy="321120"/>
           </a:xfrm>
           <a:prstGeom prst="ellipse">
             <a:avLst/>
@@ -17545,7 +18028,7 @@
         <p:spPr>
           <a:xfrm>
             <a:off x="669960" y="5480280"/>
-            <a:ext cx="225000" cy="225000"/>
+            <a:ext cx="224640" cy="224640"/>
           </a:xfrm>
           <a:prstGeom prst="rect">
             <a:avLst/>
@@ -17565,7 +18048,7 @@
         <p:spPr>
           <a:xfrm>
             <a:off x="1325880" y="5369400"/>
-            <a:ext cx="10058040" cy="446760"/>
+            <a:ext cx="10057680" cy="446400"/>
           </a:xfrm>
           <a:prstGeom prst="rect">
             <a:avLst/>
@@ -17626,7 +18109,7 @@
         <p:spPr>
           <a:xfrm>
             <a:off x="457200" y="5907960"/>
-            <a:ext cx="11274120" cy="446760"/>
+            <a:ext cx="11273760" cy="446400"/>
           </a:xfrm>
           <a:prstGeom prst="roundRect">
             <a:avLst>
@@ -17671,7 +18154,7 @@
         <p:spPr>
           <a:xfrm>
             <a:off x="621720" y="5970600"/>
-            <a:ext cx="321480" cy="321480"/>
+            <a:ext cx="321120" cy="321120"/>
           </a:xfrm>
           <a:prstGeom prst="ellipse">
             <a:avLst/>
@@ -17718,7 +18201,7 @@
         <p:spPr>
           <a:xfrm>
             <a:off x="669960" y="6018840"/>
-            <a:ext cx="225000" cy="225000"/>
+            <a:ext cx="224640" cy="224640"/>
           </a:xfrm>
           <a:prstGeom prst="rect">
             <a:avLst/>
@@ -17738,7 +18221,7 @@
         <p:spPr>
           <a:xfrm>
             <a:off x="1325880" y="5907960"/>
-            <a:ext cx="10058040" cy="446760"/>
+            <a:ext cx="10057680" cy="446400"/>
           </a:xfrm>
           <a:prstGeom prst="rect">
             <a:avLst/>
@@ -17777,67 +18260,163 @@
                 <a:latin typeface="Calibri"/>
                 <a:ea typeface="Calibri"/>
               </a:rPr>
-              <a:t>Mini projects tying everything together</a:t>
-            </a:r>
-            <a:endParaRPr lang="en-US" sz="1350" b="0" u="none" strike="noStrike">
-              <a:solidFill>
-                <a:srgbClr val="000000"/>
-              </a:solidFill>
-              <a:effectLst/>
-              <a:uFillTx/>
-              <a:latin typeface="Arial"/>
-            </a:endParaRPr>
-          </a:p>
-        </p:txBody>
-      </p:sp>
-      <p:sp>
-        <p:nvSpPr>
-          <p:cNvPr id="58" name="Text 30"/>
-          <p:cNvSpPr/>
-          <p:nvPr/>
-        </p:nvSpPr>
-        <p:spPr>
-          <a:xfrm>
-            <a:off x="457200" y="6446520"/>
-            <a:ext cx="6400440" cy="273960"/>
-          </a:xfrm>
-          <a:prstGeom prst="rect">
-            <a:avLst/>
-          </a:prstGeom>
-          <a:noFill/>
-          <a:ln w="0">
-            <a:noFill/>
-          </a:ln>
-        </p:spPr>
-        <p:style>
-          <a:lnRef idx="0"/>
-          <a:fillRef idx="0"/>
-          <a:effectRef idx="0"/>
-          <a:fontRef idx="minor"/>
-        </p:style>
-        <p:txBody>
-          <a:bodyPr lIns="0" tIns="0" rIns="0" bIns="0" anchor="ctr">
-            <a:noAutofit/>
-          </a:bodyPr>
-          <a:p>
-            <a:pPr defTabSz="914400">
-              <a:lnSpc>
-                <a:spcPct val="100000"/>
-              </a:lnSpc>
-              <a:tabLst>
-                <a:tab pos="0" algn="l"/>
-              </a:tabLst>
-            </a:pPr>
-            <a:r>
-              <a:rPr lang="en-US" sz="1000" b="0" u="none" strike="noStrike">
-                <a:solidFill>
-                  <a:srgbClr val="A9B0A7"/>
+              <a:t>Mini </a:t>
+            </a:r>
+            <a:r>
+              <a:rPr lang="en-US" sz="1350" b="0" u="none" strike="noStrike">
+                <a:solidFill>
+                  <a:srgbClr val="1B2420"/>
                 </a:solidFill>
                 <a:effectLst/>
                 <a:uFillTx/>
                 <a:latin typeface="Calibri"/>
                 <a:ea typeface="Calibri"/>
               </a:rPr>
+              <a:t>proje</a:t>
+            </a:r>
+            <a:r>
+              <a:rPr lang="en-US" sz="1350" b="0" u="none" strike="noStrike">
+                <a:solidFill>
+                  <a:srgbClr val="1B2420"/>
+                </a:solidFill>
+                <a:effectLst/>
+                <a:uFillTx/>
+                <a:latin typeface="Calibri"/>
+                <a:ea typeface="Calibri"/>
+              </a:rPr>
+              <a:t>cts </a:t>
+            </a:r>
+            <a:r>
+              <a:rPr lang="en-US" sz="1350" b="0" u="none" strike="noStrike">
+                <a:solidFill>
+                  <a:srgbClr val="1B2420"/>
+                </a:solidFill>
+                <a:effectLst/>
+                <a:uFillTx/>
+                <a:latin typeface="Calibri"/>
+                <a:ea typeface="Calibri"/>
+              </a:rPr>
+              <a:t>tying </a:t>
+            </a:r>
+            <a:r>
+              <a:rPr lang="en-US" sz="1350" b="0" u="none" strike="noStrike">
+                <a:solidFill>
+                  <a:srgbClr val="1B2420"/>
+                </a:solidFill>
+                <a:effectLst/>
+                <a:uFillTx/>
+                <a:latin typeface="Calibri"/>
+                <a:ea typeface="Calibri"/>
+              </a:rPr>
+              <a:t>ever</a:t>
+            </a:r>
+            <a:r>
+              <a:rPr lang="en-US" sz="1350" b="0" u="none" strike="noStrike">
+                <a:solidFill>
+                  <a:srgbClr val="1B2420"/>
+                </a:solidFill>
+                <a:effectLst/>
+                <a:uFillTx/>
+                <a:latin typeface="Calibri"/>
+                <a:ea typeface="Calibri"/>
+              </a:rPr>
+              <a:t>ythin</a:t>
+            </a:r>
+            <a:r>
+              <a:rPr lang="en-US" sz="1350" b="0" u="none" strike="noStrike">
+                <a:solidFill>
+                  <a:srgbClr val="1B2420"/>
+                </a:solidFill>
+                <a:effectLst/>
+                <a:uFillTx/>
+                <a:latin typeface="Calibri"/>
+                <a:ea typeface="Calibri"/>
+              </a:rPr>
+              <a:t>g </a:t>
+            </a:r>
+            <a:r>
+              <a:rPr lang="en-US" sz="1350" b="0" u="none" strike="noStrike">
+                <a:solidFill>
+                  <a:srgbClr val="1B2420"/>
+                </a:solidFill>
+                <a:effectLst/>
+                <a:uFillTx/>
+                <a:latin typeface="Calibri"/>
+                <a:ea typeface="Calibri"/>
+              </a:rPr>
+              <a:t>toget</a:t>
+            </a:r>
+            <a:r>
+              <a:rPr lang="en-US" sz="1350" b="0" u="none" strike="noStrike">
+                <a:solidFill>
+                  <a:srgbClr val="1B2420"/>
+                </a:solidFill>
+                <a:effectLst/>
+                <a:uFillTx/>
+                <a:latin typeface="Calibri"/>
+                <a:ea typeface="Calibri"/>
+              </a:rPr>
+              <a:t>her</a:t>
+            </a:r>
+            <a:endParaRPr lang="en-US" sz="1350" b="0" u="none" strike="noStrike">
+              <a:solidFill>
+                <a:srgbClr val="000000"/>
+              </a:solidFill>
+              <a:effectLst/>
+              <a:uFillTx/>
+              <a:latin typeface="Arial"/>
+            </a:endParaRPr>
+          </a:p>
+        </p:txBody>
+      </p:sp>
+      <p:sp>
+        <p:nvSpPr>
+          <p:cNvPr id="58" name="Text 30"/>
+          <p:cNvSpPr/>
+          <p:nvPr/>
+        </p:nvSpPr>
+        <p:spPr>
+          <a:xfrm>
+            <a:off x="457200" y="6446520"/>
+            <a:ext cx="6400080" cy="273600"/>
+          </a:xfrm>
+          <a:prstGeom prst="rect">
+            <a:avLst/>
+          </a:prstGeom>
+          <a:noFill/>
+          <a:ln w="0">
+            <a:noFill/>
+          </a:ln>
+        </p:spPr>
+        <p:style>
+          <a:lnRef idx="0"/>
+          <a:fillRef idx="0"/>
+          <a:effectRef idx="0"/>
+          <a:fontRef idx="minor"/>
+        </p:style>
+        <p:txBody>
+          <a:bodyPr lIns="0" tIns="0" rIns="0" bIns="0" anchor="ctr">
+            <a:noAutofit/>
+          </a:bodyPr>
+          <a:p>
+            <a:pPr defTabSz="914400">
+              <a:lnSpc>
+                <a:spcPct val="100000"/>
+              </a:lnSpc>
+              <a:tabLst>
+                <a:tab pos="0" algn="l"/>
+              </a:tabLst>
+            </a:pPr>
+            <a:r>
+              <a:rPr lang="en-US" sz="1000" b="0" u="none" strike="noStrike">
+                <a:solidFill>
+                  <a:srgbClr val="A9B0A7"/>
+                </a:solidFill>
+                <a:effectLst/>
+                <a:uFillTx/>
+                <a:latin typeface="Calibri"/>
+                <a:ea typeface="Calibri"/>
+              </a:rPr>
               <a:t>Loops  ·  Session 6</a:t>
             </a:r>
             <a:endParaRPr lang="en-US" sz="1000" b="0" u="none" strike="noStrike">
@@ -17860,7 +18439,7 @@
         <p:spPr>
           <a:xfrm>
             <a:off x="11521440" y="6446520"/>
-            <a:ext cx="456840" cy="273960"/>
+            <a:ext cx="456480" cy="273600"/>
           </a:xfrm>
           <a:prstGeom prst="rect">
             <a:avLst/>
@@ -17958,7 +18537,7 @@
         <p:spPr>
           <a:xfrm>
             <a:off x="-1828800" y="4114800"/>
-            <a:ext cx="5486040" cy="5486040"/>
+            <a:ext cx="5485680" cy="5485680"/>
           </a:xfrm>
           <a:prstGeom prst="ellipse">
             <a:avLst/>
@@ -18001,7 +18580,7 @@
         <p:spPr>
           <a:xfrm>
             <a:off x="9601200" y="-2286000"/>
-            <a:ext cx="5486040" cy="5486040"/>
+            <a:ext cx="5485680" cy="5485680"/>
           </a:xfrm>
           <a:prstGeom prst="ellipse">
             <a:avLst/>
@@ -18044,7 +18623,7 @@
         <p:spPr>
           <a:xfrm>
             <a:off x="5591520" y="731520"/>
-            <a:ext cx="1005480" cy="1005480"/>
+            <a:ext cx="1005120" cy="1005120"/>
           </a:xfrm>
           <a:prstGeom prst="ellipse">
             <a:avLst/>
@@ -18091,7 +18670,7 @@
         <p:spPr>
           <a:xfrm>
             <a:off x="5742360" y="882360"/>
-            <a:ext cx="703800" cy="703800"/>
+            <a:ext cx="703440" cy="703440"/>
           </a:xfrm>
           <a:prstGeom prst="rect">
             <a:avLst/>
@@ -18111,7 +18690,7 @@
         <p:spPr>
           <a:xfrm>
             <a:off x="914400" y="1965960"/>
-            <a:ext cx="10359720" cy="365400"/>
+            <a:ext cx="10359360" cy="365040"/>
           </a:xfrm>
           <a:prstGeom prst="rect">
             <a:avLst/>
@@ -18172,7 +18751,7 @@
         <p:spPr>
           <a:xfrm>
             <a:off x="914400" y="2377440"/>
-            <a:ext cx="10359720" cy="2011320"/>
+            <a:ext cx="10359360" cy="2010960"/>
           </a:xfrm>
           <a:prstGeom prst="rect">
             <a:avLst/>
@@ -18233,7 +18812,7 @@
         <p:spPr>
           <a:xfrm>
             <a:off x="11521440" y="6446520"/>
-            <a:ext cx="456840" cy="273960"/>
+            <a:ext cx="456480" cy="273600"/>
           </a:xfrm>
           <a:prstGeom prst="rect">
             <a:avLst/>
@@ -18331,7 +18910,7 @@
         <p:spPr>
           <a:xfrm>
             <a:off x="-1828800" y="5120640"/>
-            <a:ext cx="3657240" cy="3657240"/>
+            <a:ext cx="3656880" cy="3656880"/>
           </a:xfrm>
           <a:prstGeom prst="ellipse">
             <a:avLst/>
@@ -18374,7 +18953,7 @@
         <p:spPr>
           <a:xfrm>
             <a:off x="457200" y="457200"/>
-            <a:ext cx="639720" cy="639720"/>
+            <a:ext cx="639360" cy="639360"/>
           </a:xfrm>
           <a:prstGeom prst="ellipse">
             <a:avLst/>
@@ -18421,7 +19000,7 @@
         <p:spPr>
           <a:xfrm>
             <a:off x="553320" y="553320"/>
-            <a:ext cx="447840" cy="447840"/>
+            <a:ext cx="447480" cy="447480"/>
           </a:xfrm>
           <a:prstGeom prst="rect">
             <a:avLst/>
@@ -18441,7 +19020,7 @@
         <p:spPr>
           <a:xfrm>
             <a:off x="1280160" y="457200"/>
-            <a:ext cx="10423800" cy="639720"/>
+            <a:ext cx="10423440" cy="639360"/>
           </a:xfrm>
           <a:prstGeom prst="rect">
             <a:avLst/>
@@ -18502,7 +19081,7 @@
         <p:spPr>
           <a:xfrm>
             <a:off x="548640" y="1828800"/>
-            <a:ext cx="4754520" cy="4023000"/>
+            <a:ext cx="4754160" cy="4022640"/>
           </a:xfrm>
           <a:prstGeom prst="rect">
             <a:avLst/>
@@ -18603,7 +19182,7 @@
         <p:spPr>
           <a:xfrm>
             <a:off x="5486400" y="1691640"/>
-            <a:ext cx="6217560" cy="4343040"/>
+            <a:ext cx="6217200" cy="4342680"/>
           </a:xfrm>
           <a:prstGeom prst="roundRect">
             <a:avLst>
@@ -18648,7 +19227,7 @@
         <p:spPr>
           <a:xfrm>
             <a:off x="5806440" y="1965960"/>
-            <a:ext cx="5577480" cy="3794400"/>
+            <a:ext cx="5577120" cy="3794040"/>
           </a:xfrm>
           <a:prstGeom prst="rect">
             <a:avLst/>
@@ -18695,7 +19274,7 @@
               </a:solidFill>
               <a:effectLst/>
               <a:uFillTx/>
-              <a:latin typeface="Cantarell"/>
+              <a:latin typeface="Arial"/>
             </a:endParaRPr>
           </a:p>
           <a:p>
@@ -18725,7 +19304,7 @@
               </a:solidFill>
               <a:effectLst/>
               <a:uFillTx/>
-              <a:latin typeface="Cantarell"/>
+              <a:latin typeface="Arial"/>
             </a:endParaRPr>
           </a:p>
           <a:p>
@@ -18755,7 +19334,7 @@
               </a:solidFill>
               <a:effectLst/>
               <a:uFillTx/>
-              <a:latin typeface="Cantarell"/>
+              <a:latin typeface="Arial"/>
             </a:endParaRPr>
           </a:p>
           <a:p>
@@ -18785,7 +19364,7 @@
               </a:solidFill>
               <a:effectLst/>
               <a:uFillTx/>
-              <a:latin typeface="Cantarell"/>
+              <a:latin typeface="Arial"/>
             </a:endParaRPr>
           </a:p>
           <a:p>
@@ -18815,7 +19394,7 @@
               </a:solidFill>
               <a:effectLst/>
               <a:uFillTx/>
-              <a:latin typeface="Cantarell"/>
+              <a:latin typeface="Arial"/>
             </a:endParaRPr>
           </a:p>
           <a:p>
@@ -18845,7 +19424,7 @@
               </a:solidFill>
               <a:effectLst/>
               <a:uFillTx/>
-              <a:latin typeface="Cantarell"/>
+              <a:latin typeface="Arial"/>
             </a:endParaRPr>
           </a:p>
           <a:p>
@@ -18875,7 +19454,7 @@
               </a:solidFill>
               <a:effectLst/>
               <a:uFillTx/>
-              <a:latin typeface="Cantarell"/>
+              <a:latin typeface="Arial"/>
             </a:endParaRPr>
           </a:p>
         </p:txBody>
@@ -18889,7 +19468,7 @@
         <p:spPr>
           <a:xfrm>
             <a:off x="457200" y="6446520"/>
-            <a:ext cx="6400440" cy="273960"/>
+            <a:ext cx="6400080" cy="273600"/>
           </a:xfrm>
           <a:prstGeom prst="rect">
             <a:avLst/>
@@ -18950,7 +19529,7 @@
         <p:spPr>
           <a:xfrm>
             <a:off x="11521440" y="6446520"/>
-            <a:ext cx="456840" cy="273960"/>
+            <a:ext cx="456480" cy="273600"/>
           </a:xfrm>
           <a:prstGeom prst="rect">
             <a:avLst/>
@@ -19048,7 +19627,7 @@
         <p:spPr>
           <a:xfrm>
             <a:off x="-1828800" y="5120640"/>
-            <a:ext cx="3657240" cy="3657240"/>
+            <a:ext cx="3656880" cy="3656880"/>
           </a:xfrm>
           <a:prstGeom prst="ellipse">
             <a:avLst/>
@@ -19091,7 +19670,7 @@
         <p:spPr>
           <a:xfrm>
             <a:off x="457200" y="457200"/>
-            <a:ext cx="639720" cy="639720"/>
+            <a:ext cx="639360" cy="639360"/>
           </a:xfrm>
           <a:prstGeom prst="ellipse">
             <a:avLst/>
@@ -19138,7 +19717,7 @@
         <p:spPr>
           <a:xfrm>
             <a:off x="553320" y="553320"/>
-            <a:ext cx="447840" cy="447840"/>
+            <a:ext cx="447480" cy="447480"/>
           </a:xfrm>
           <a:prstGeom prst="rect">
             <a:avLst/>
@@ -19158,7 +19737,7 @@
         <p:spPr>
           <a:xfrm>
             <a:off x="1280160" y="457200"/>
-            <a:ext cx="10423800" cy="639720"/>
+            <a:ext cx="10423440" cy="639360"/>
           </a:xfrm>
           <a:prstGeom prst="rect">
             <a:avLst/>
@@ -19219,7 +19798,7 @@
         <p:spPr>
           <a:xfrm>
             <a:off x="548640" y="1828800"/>
-            <a:ext cx="4754520" cy="4023000"/>
+            <a:ext cx="4754160" cy="4022640"/>
           </a:xfrm>
           <a:prstGeom prst="rect">
             <a:avLst/>
@@ -19320,7 +19899,7 @@
         <p:spPr>
           <a:xfrm>
             <a:off x="5486400" y="1691640"/>
-            <a:ext cx="6217560" cy="4343040"/>
+            <a:ext cx="6217200" cy="4342680"/>
           </a:xfrm>
           <a:prstGeom prst="roundRect">
             <a:avLst>
@@ -19365,7 +19944,7 @@
         <p:spPr>
           <a:xfrm>
             <a:off x="5806440" y="1965960"/>
-            <a:ext cx="5577480" cy="3794400"/>
+            <a:ext cx="5577120" cy="3794040"/>
           </a:xfrm>
           <a:prstGeom prst="rect">
             <a:avLst/>
@@ -19412,7 +19991,7 @@
               </a:solidFill>
               <a:effectLst/>
               <a:uFillTx/>
-              <a:latin typeface="Cantarell"/>
+              <a:latin typeface="Arial"/>
             </a:endParaRPr>
           </a:p>
           <a:p>
@@ -19442,7 +20021,7 @@
               </a:solidFill>
               <a:effectLst/>
               <a:uFillTx/>
-              <a:latin typeface="Cantarell"/>
+              <a:latin typeface="Arial"/>
             </a:endParaRPr>
           </a:p>
           <a:p>
@@ -19472,7 +20051,7 @@
               </a:solidFill>
               <a:effectLst/>
               <a:uFillTx/>
-              <a:latin typeface="Cantarell"/>
+              <a:latin typeface="Arial"/>
             </a:endParaRPr>
           </a:p>
           <a:p>
@@ -19502,7 +20081,7 @@
               </a:solidFill>
               <a:effectLst/>
               <a:uFillTx/>
-              <a:latin typeface="Cantarell"/>
+              <a:latin typeface="Arial"/>
             </a:endParaRPr>
           </a:p>
           <a:p>
@@ -19532,7 +20111,7 @@
               </a:solidFill>
               <a:effectLst/>
               <a:uFillTx/>
-              <a:latin typeface="Cantarell"/>
+              <a:latin typeface="Arial"/>
             </a:endParaRPr>
           </a:p>
           <a:p>
@@ -19562,7 +20141,7 @@
               </a:solidFill>
               <a:effectLst/>
               <a:uFillTx/>
-              <a:latin typeface="Cantarell"/>
+              <a:latin typeface="Arial"/>
             </a:endParaRPr>
           </a:p>
           <a:p>
@@ -19592,7 +20171,7 @@
               </a:solidFill>
               <a:effectLst/>
               <a:uFillTx/>
-              <a:latin typeface="Cantarell"/>
+              <a:latin typeface="Arial"/>
             </a:endParaRPr>
           </a:p>
           <a:p>
@@ -19622,7 +20201,7 @@
               </a:solidFill>
               <a:effectLst/>
               <a:uFillTx/>
-              <a:latin typeface="Cantarell"/>
+              <a:latin typeface="Arial"/>
             </a:endParaRPr>
           </a:p>
         </p:txBody>
@@ -19636,7 +20215,7 @@
         <p:spPr>
           <a:xfrm>
             <a:off x="457200" y="6446520"/>
-            <a:ext cx="6400440" cy="273960"/>
+            <a:ext cx="6400080" cy="273600"/>
           </a:xfrm>
           <a:prstGeom prst="rect">
             <a:avLst/>
@@ -19697,7 +20276,7 @@
         <p:spPr>
           <a:xfrm>
             <a:off x="11521440" y="6446520"/>
-            <a:ext cx="456840" cy="273960"/>
+            <a:ext cx="456480" cy="273600"/>
           </a:xfrm>
           <a:prstGeom prst="rect">
             <a:avLst/>
@@ -19795,7 +20374,7 @@
         <p:spPr>
           <a:xfrm>
             <a:off x="-1828800" y="5120640"/>
-            <a:ext cx="3657240" cy="3657240"/>
+            <a:ext cx="3656880" cy="3656880"/>
           </a:xfrm>
           <a:prstGeom prst="ellipse">
             <a:avLst/>
@@ -19838,7 +20417,7 @@
         <p:spPr>
           <a:xfrm>
             <a:off x="457200" y="457200"/>
-            <a:ext cx="639720" cy="639720"/>
+            <a:ext cx="639360" cy="639360"/>
           </a:xfrm>
           <a:prstGeom prst="ellipse">
             <a:avLst/>
@@ -19885,7 +20464,7 @@
         <p:spPr>
           <a:xfrm>
             <a:off x="553320" y="553320"/>
-            <a:ext cx="447840" cy="447840"/>
+            <a:ext cx="447480" cy="447480"/>
           </a:xfrm>
           <a:prstGeom prst="rect">
             <a:avLst/>
@@ -19905,7 +20484,7 @@
         <p:spPr>
           <a:xfrm>
             <a:off x="1280160" y="457200"/>
-            <a:ext cx="10423800" cy="639720"/>
+            <a:ext cx="10423440" cy="639360"/>
           </a:xfrm>
           <a:prstGeom prst="rect">
             <a:avLst/>
@@ -19966,7 +20545,7 @@
         <p:spPr>
           <a:xfrm>
             <a:off x="548640" y="1828800"/>
-            <a:ext cx="4754520" cy="4023000"/>
+            <a:ext cx="4754160" cy="4022640"/>
           </a:xfrm>
           <a:prstGeom prst="rect">
             <a:avLst/>
@@ -20102,7 +20681,7 @@
         <p:spPr>
           <a:xfrm>
             <a:off x="5486400" y="1691640"/>
-            <a:ext cx="6217560" cy="4343040"/>
+            <a:ext cx="6217200" cy="4342680"/>
           </a:xfrm>
           <a:prstGeom prst="roundRect">
             <a:avLst>
@@ -20147,7 +20726,7 @@
         <p:spPr>
           <a:xfrm>
             <a:off x="5806440" y="1965960"/>
-            <a:ext cx="5577480" cy="3794400"/>
+            <a:ext cx="5577120" cy="3794040"/>
           </a:xfrm>
           <a:prstGeom prst="rect">
             <a:avLst/>
@@ -20194,7 +20773,7 @@
               </a:solidFill>
               <a:effectLst/>
               <a:uFillTx/>
-              <a:latin typeface="Cantarell"/>
+              <a:latin typeface="Arial"/>
             </a:endParaRPr>
           </a:p>
           <a:p>
@@ -20224,7 +20803,7 @@
               </a:solidFill>
               <a:effectLst/>
               <a:uFillTx/>
-              <a:latin typeface="Cantarell"/>
+              <a:latin typeface="Arial"/>
             </a:endParaRPr>
           </a:p>
           <a:p>
@@ -20254,7 +20833,7 @@
               </a:solidFill>
               <a:effectLst/>
               <a:uFillTx/>
-              <a:latin typeface="Cantarell"/>
+              <a:latin typeface="Arial"/>
             </a:endParaRPr>
           </a:p>
           <a:p>
@@ -20284,7 +20863,7 @@
               </a:solidFill>
               <a:effectLst/>
               <a:uFillTx/>
-              <a:latin typeface="Cantarell"/>
+              <a:latin typeface="Arial"/>
             </a:endParaRPr>
           </a:p>
           <a:p>
@@ -20314,7 +20893,7 @@
               </a:solidFill>
               <a:effectLst/>
               <a:uFillTx/>
-              <a:latin typeface="Cantarell"/>
+              <a:latin typeface="Arial"/>
             </a:endParaRPr>
           </a:p>
           <a:p>
@@ -20344,7 +20923,7 @@
               </a:solidFill>
               <a:effectLst/>
               <a:uFillTx/>
-              <a:latin typeface="Cantarell"/>
+              <a:latin typeface="Arial"/>
             </a:endParaRPr>
           </a:p>
           <a:p>
@@ -20374,7 +20953,7 @@
               </a:solidFill>
               <a:effectLst/>
               <a:uFillTx/>
-              <a:latin typeface="Cantarell"/>
+              <a:latin typeface="Arial"/>
             </a:endParaRPr>
           </a:p>
           <a:p>
@@ -20404,7 +20983,7 @@
               </a:solidFill>
               <a:effectLst/>
               <a:uFillTx/>
-              <a:latin typeface="Cantarell"/>
+              <a:latin typeface="Arial"/>
             </a:endParaRPr>
           </a:p>
         </p:txBody>
@@ -20418,7 +20997,7 @@
         <p:spPr>
           <a:xfrm>
             <a:off x="457200" y="6446520"/>
-            <a:ext cx="6400440" cy="273960"/>
+            <a:ext cx="6400080" cy="273600"/>
           </a:xfrm>
           <a:prstGeom prst="rect">
             <a:avLst/>
@@ -20479,7 +21058,7 @@
         <p:spPr>
           <a:xfrm>
             <a:off x="11521440" y="6446520"/>
-            <a:ext cx="456840" cy="273960"/>
+            <a:ext cx="456480" cy="273600"/>
           </a:xfrm>
           <a:prstGeom prst="rect">
             <a:avLst/>
@@ -20577,7 +21156,7 @@
         <p:spPr>
           <a:xfrm>
             <a:off x="-1828800" y="5120640"/>
-            <a:ext cx="3657240" cy="3657240"/>
+            <a:ext cx="3656880" cy="3656880"/>
           </a:xfrm>
           <a:prstGeom prst="ellipse">
             <a:avLst/>
@@ -20620,7 +21199,7 @@
         <p:spPr>
           <a:xfrm>
             <a:off x="457200" y="457200"/>
-            <a:ext cx="639720" cy="639720"/>
+            <a:ext cx="639360" cy="639360"/>
           </a:xfrm>
           <a:prstGeom prst="ellipse">
             <a:avLst/>
@@ -20667,7 +21246,7 @@
         <p:spPr>
           <a:xfrm>
             <a:off x="553320" y="553320"/>
-            <a:ext cx="447840" cy="447840"/>
+            <a:ext cx="447480" cy="447480"/>
           </a:xfrm>
           <a:prstGeom prst="rect">
             <a:avLst/>
@@ -20687,7 +21266,7 @@
         <p:spPr>
           <a:xfrm>
             <a:off x="1280160" y="457200"/>
-            <a:ext cx="10423800" cy="639720"/>
+            <a:ext cx="10423440" cy="639360"/>
           </a:xfrm>
           <a:prstGeom prst="rect">
             <a:avLst/>
@@ -20748,7 +21327,7 @@
         <p:spPr>
           <a:xfrm>
             <a:off x="548640" y="1828800"/>
-            <a:ext cx="4754520" cy="4023000"/>
+            <a:ext cx="4754160" cy="4022640"/>
           </a:xfrm>
           <a:prstGeom prst="rect">
             <a:avLst/>
@@ -20849,7 +21428,7 @@
         <p:spPr>
           <a:xfrm>
             <a:off x="5486400" y="1691640"/>
-            <a:ext cx="6217560" cy="4343040"/>
+            <a:ext cx="6217200" cy="4342680"/>
           </a:xfrm>
           <a:prstGeom prst="roundRect">
             <a:avLst>
@@ -20894,7 +21473,7 @@
         <p:spPr>
           <a:xfrm>
             <a:off x="5806440" y="1965960"/>
-            <a:ext cx="5577480" cy="3794400"/>
+            <a:ext cx="5577120" cy="3794040"/>
           </a:xfrm>
           <a:prstGeom prst="rect">
             <a:avLst/>
@@ -20941,7 +21520,7 @@
               </a:solidFill>
               <a:effectLst/>
               <a:uFillTx/>
-              <a:latin typeface="Cantarell"/>
+              <a:latin typeface="Arial"/>
             </a:endParaRPr>
           </a:p>
           <a:p>
@@ -20971,7 +21550,7 @@
               </a:solidFill>
               <a:effectLst/>
               <a:uFillTx/>
-              <a:latin typeface="Cantarell"/>
+              <a:latin typeface="Arial"/>
             </a:endParaRPr>
           </a:p>
           <a:p>
@@ -21001,7 +21580,7 @@
               </a:solidFill>
               <a:effectLst/>
               <a:uFillTx/>
-              <a:latin typeface="Cantarell"/>
+              <a:latin typeface="Arial"/>
             </a:endParaRPr>
           </a:p>
           <a:p>
@@ -21031,7 +21610,7 @@
               </a:solidFill>
               <a:effectLst/>
               <a:uFillTx/>
-              <a:latin typeface="Cantarell"/>
+              <a:latin typeface="Arial"/>
             </a:endParaRPr>
           </a:p>
           <a:p>
@@ -21061,7 +21640,7 @@
               </a:solidFill>
               <a:effectLst/>
               <a:uFillTx/>
-              <a:latin typeface="Cantarell"/>
+              <a:latin typeface="Arial"/>
             </a:endParaRPr>
           </a:p>
           <a:p>
@@ -21091,7 +21670,7 @@
               </a:solidFill>
               <a:effectLst/>
               <a:uFillTx/>
-              <a:latin typeface="Cantarell"/>
+              <a:latin typeface="Arial"/>
             </a:endParaRPr>
           </a:p>
           <a:p>
@@ -21121,7 +21700,7 @@
               </a:solidFill>
               <a:effectLst/>
               <a:uFillTx/>
-              <a:latin typeface="Cantarell"/>
+              <a:latin typeface="Arial"/>
             </a:endParaRPr>
           </a:p>
         </p:txBody>
@@ -21135,7 +21714,7 @@
         <p:spPr>
           <a:xfrm>
             <a:off x="457200" y="6446520"/>
-            <a:ext cx="6400440" cy="273960"/>
+            <a:ext cx="6400080" cy="273600"/>
           </a:xfrm>
           <a:prstGeom prst="rect">
             <a:avLst/>
@@ -21196,7 +21775,7 @@
         <p:spPr>
           <a:xfrm>
             <a:off x="11521440" y="6446520"/>
-            <a:ext cx="456840" cy="273960"/>
+            <a:ext cx="456480" cy="273600"/>
           </a:xfrm>
           <a:prstGeom prst="rect">
             <a:avLst/>
@@ -21294,7 +21873,7 @@
         <p:spPr>
           <a:xfrm>
             <a:off x="-1828800" y="5029200"/>
-            <a:ext cx="3657240" cy="3657240"/>
+            <a:ext cx="3656880" cy="3656880"/>
           </a:xfrm>
           <a:prstGeom prst="ellipse">
             <a:avLst/>
@@ -21337,7 +21916,7 @@
         <p:spPr>
           <a:xfrm>
             <a:off x="457200" y="457200"/>
-            <a:ext cx="639720" cy="639720"/>
+            <a:ext cx="639360" cy="639360"/>
           </a:xfrm>
           <a:prstGeom prst="ellipse">
             <a:avLst/>
@@ -21384,7 +21963,7 @@
         <p:spPr>
           <a:xfrm>
             <a:off x="553320" y="553320"/>
-            <a:ext cx="447840" cy="447840"/>
+            <a:ext cx="447480" cy="447480"/>
           </a:xfrm>
           <a:prstGeom prst="rect">
             <a:avLst/>
@@ -21404,7 +21983,7 @@
         <p:spPr>
           <a:xfrm>
             <a:off x="1280160" y="457200"/>
-            <a:ext cx="10423800" cy="639720"/>
+            <a:ext cx="10423440" cy="639360"/>
           </a:xfrm>
           <a:prstGeom prst="rect">
             <a:avLst/>
@@ -21465,7 +22044,7 @@
         <p:spPr>
           <a:xfrm>
             <a:off x="457200" y="1600200"/>
-            <a:ext cx="11274120" cy="4480200"/>
+            <a:ext cx="11273760" cy="4479840"/>
           </a:xfrm>
           <a:prstGeom prst="roundRect">
             <a:avLst>
@@ -21510,7 +22089,7 @@
         <p:spPr>
           <a:xfrm>
             <a:off x="822960" y="1828800"/>
-            <a:ext cx="10515240" cy="456840"/>
+            <a:ext cx="10514880" cy="456480"/>
           </a:xfrm>
           <a:prstGeom prst="rect">
             <a:avLst/>
@@ -21571,7 +22150,7 @@
         <p:spPr>
           <a:xfrm>
             <a:off x="822960" y="2423160"/>
-            <a:ext cx="383760" cy="383760"/>
+            <a:ext cx="383400" cy="383400"/>
           </a:xfrm>
           <a:prstGeom prst="ellipse">
             <a:avLst/>
@@ -21614,7 +22193,7 @@
         <p:spPr>
           <a:xfrm>
             <a:off x="822960" y="2423160"/>
-            <a:ext cx="383760" cy="383760"/>
+            <a:ext cx="383400" cy="383400"/>
           </a:xfrm>
           <a:prstGeom prst="rect">
             <a:avLst/>
@@ -21675,7 +22254,7 @@
         <p:spPr>
           <a:xfrm>
             <a:off x="1435680" y="2423160"/>
-            <a:ext cx="9582480" cy="383760"/>
+            <a:ext cx="9582120" cy="383400"/>
           </a:xfrm>
           <a:prstGeom prst="rect">
             <a:avLst/>
@@ -21736,7 +22315,7 @@
         <p:spPr>
           <a:xfrm>
             <a:off x="822960" y="3303360"/>
-            <a:ext cx="383760" cy="383760"/>
+            <a:ext cx="383400" cy="383400"/>
           </a:xfrm>
           <a:prstGeom prst="ellipse">
             <a:avLst/>
@@ -21779,7 +22358,7 @@
         <p:spPr>
           <a:xfrm>
             <a:off x="822960" y="3303360"/>
-            <a:ext cx="383760" cy="383760"/>
+            <a:ext cx="383400" cy="383400"/>
           </a:xfrm>
           <a:prstGeom prst="rect">
             <a:avLst/>
@@ -21840,7 +22419,7 @@
         <p:spPr>
           <a:xfrm>
             <a:off x="1435680" y="3303360"/>
-            <a:ext cx="9582480" cy="383760"/>
+            <a:ext cx="9582120" cy="383400"/>
           </a:xfrm>
           <a:prstGeom prst="rect">
             <a:avLst/>
@@ -21901,7 +22480,7 @@
         <p:spPr>
           <a:xfrm>
             <a:off x="822960" y="4183560"/>
-            <a:ext cx="383760" cy="383760"/>
+            <a:ext cx="383400" cy="383400"/>
           </a:xfrm>
           <a:prstGeom prst="ellipse">
             <a:avLst/>
@@ -21944,7 +22523,7 @@
         <p:spPr>
           <a:xfrm>
             <a:off x="822960" y="4183560"/>
-            <a:ext cx="383760" cy="383760"/>
+            <a:ext cx="383400" cy="383400"/>
           </a:xfrm>
           <a:prstGeom prst="rect">
             <a:avLst/>
@@ -22005,7 +22584,7 @@
         <p:spPr>
           <a:xfrm>
             <a:off x="1435680" y="4183560"/>
-            <a:ext cx="9582480" cy="383760"/>
+            <a:ext cx="9582120" cy="383400"/>
           </a:xfrm>
           <a:prstGeom prst="rect">
             <a:avLst/>
@@ -22066,7 +22645,7 @@
         <p:spPr>
           <a:xfrm>
             <a:off x="822960" y="5063400"/>
-            <a:ext cx="383760" cy="383760"/>
+            <a:ext cx="383400" cy="383400"/>
           </a:xfrm>
           <a:prstGeom prst="ellipse">
             <a:avLst/>
@@ -22109,7 +22688,7 @@
         <p:spPr>
           <a:xfrm>
             <a:off x="822960" y="5063400"/>
-            <a:ext cx="383760" cy="383760"/>
+            <a:ext cx="383400" cy="383400"/>
           </a:xfrm>
           <a:prstGeom prst="rect">
             <a:avLst/>
@@ -22170,7 +22749,7 @@
         <p:spPr>
           <a:xfrm>
             <a:off x="1435680" y="5063400"/>
-            <a:ext cx="9582480" cy="383760"/>
+            <a:ext cx="9582120" cy="383400"/>
           </a:xfrm>
           <a:prstGeom prst="rect">
             <a:avLst/>
@@ -22231,7 +22810,7 @@
         <p:spPr>
           <a:xfrm>
             <a:off x="457200" y="6446520"/>
-            <a:ext cx="6400440" cy="273960"/>
+            <a:ext cx="6400080" cy="273600"/>
           </a:xfrm>
           <a:prstGeom prst="rect">
             <a:avLst/>
@@ -22292,7 +22871,7 @@
         <p:spPr>
           <a:xfrm>
             <a:off x="11521440" y="6446520"/>
-            <a:ext cx="456840" cy="273960"/>
+            <a:ext cx="456480" cy="273600"/>
           </a:xfrm>
           <a:prstGeom prst="rect">
             <a:avLst/>
@@ -22390,7 +22969,7 @@
         <p:spPr>
           <a:xfrm>
             <a:off x="-1828800" y="4114800"/>
-            <a:ext cx="5486040" cy="5486040"/>
+            <a:ext cx="5485680" cy="5485680"/>
           </a:xfrm>
           <a:prstGeom prst="ellipse">
             <a:avLst/>
@@ -22433,7 +23012,7 @@
         <p:spPr>
           <a:xfrm>
             <a:off x="9601200" y="-2286000"/>
-            <a:ext cx="5486040" cy="5486040"/>
+            <a:ext cx="5485680" cy="5485680"/>
           </a:xfrm>
           <a:prstGeom prst="ellipse">
             <a:avLst/>
@@ -22476,7 +23055,7 @@
         <p:spPr>
           <a:xfrm>
             <a:off x="5591520" y="731520"/>
-            <a:ext cx="1005480" cy="1005480"/>
+            <a:ext cx="1005120" cy="1005120"/>
           </a:xfrm>
           <a:prstGeom prst="ellipse">
             <a:avLst/>
@@ -22523,7 +23102,7 @@
         <p:spPr>
           <a:xfrm>
             <a:off x="5742360" y="882360"/>
-            <a:ext cx="703800" cy="703800"/>
+            <a:ext cx="703440" cy="703440"/>
           </a:xfrm>
           <a:prstGeom prst="rect">
             <a:avLst/>
@@ -22543,7 +23122,7 @@
         <p:spPr>
           <a:xfrm>
             <a:off x="914400" y="1965960"/>
-            <a:ext cx="10359720" cy="365400"/>
+            <a:ext cx="10359360" cy="365040"/>
           </a:xfrm>
           <a:prstGeom prst="rect">
             <a:avLst/>
@@ -22604,7 +23183,7 @@
         <p:spPr>
           <a:xfrm>
             <a:off x="914400" y="2377440"/>
-            <a:ext cx="10359720" cy="2011320"/>
+            <a:ext cx="10359360" cy="2010960"/>
           </a:xfrm>
           <a:prstGeom prst="rect">
             <a:avLst/>
@@ -22665,7 +23244,7 @@
         <p:spPr>
           <a:xfrm>
             <a:off x="1463040" y="4572000"/>
-            <a:ext cx="9262440" cy="1096920"/>
+            <a:ext cx="9262080" cy="1096560"/>
           </a:xfrm>
           <a:prstGeom prst="rect">
             <a:avLst/>
@@ -22726,7 +23305,7 @@
         <p:spPr>
           <a:xfrm>
             <a:off x="11521440" y="6446520"/>
-            <a:ext cx="456840" cy="273960"/>
+            <a:ext cx="456480" cy="273600"/>
           </a:xfrm>
           <a:prstGeom prst="rect">
             <a:avLst/>
@@ -22824,7 +23403,7 @@
         <p:spPr>
           <a:xfrm>
             <a:off x="-1828800" y="5120640"/>
-            <a:ext cx="3657240" cy="3657240"/>
+            <a:ext cx="3656880" cy="3656880"/>
           </a:xfrm>
           <a:prstGeom prst="ellipse">
             <a:avLst/>
@@ -22867,7 +23446,7 @@
         <p:spPr>
           <a:xfrm>
             <a:off x="457200" y="457200"/>
-            <a:ext cx="639720" cy="639720"/>
+            <a:ext cx="639360" cy="639360"/>
           </a:xfrm>
           <a:prstGeom prst="ellipse">
             <a:avLst/>
@@ -22914,7 +23493,7 @@
         <p:spPr>
           <a:xfrm>
             <a:off x="553320" y="553320"/>
-            <a:ext cx="447840" cy="447840"/>
+            <a:ext cx="447480" cy="447480"/>
           </a:xfrm>
           <a:prstGeom prst="rect">
             <a:avLst/>
@@ -22934,7 +23513,7 @@
         <p:spPr>
           <a:xfrm>
             <a:off x="1280160" y="457200"/>
-            <a:ext cx="10423800" cy="639720"/>
+            <a:ext cx="10423440" cy="639360"/>
           </a:xfrm>
           <a:prstGeom prst="rect">
             <a:avLst/>
@@ -22995,7 +23574,7 @@
         <p:spPr>
           <a:xfrm>
             <a:off x="548640" y="1828800"/>
-            <a:ext cx="4754520" cy="4023000"/>
+            <a:ext cx="4754160" cy="4022640"/>
           </a:xfrm>
           <a:prstGeom prst="rect">
             <a:avLst/>
@@ -23096,7 +23675,7 @@
         <p:spPr>
           <a:xfrm>
             <a:off x="5486400" y="1691640"/>
-            <a:ext cx="6217560" cy="4343040"/>
+            <a:ext cx="6217200" cy="4342680"/>
           </a:xfrm>
           <a:prstGeom prst="roundRect">
             <a:avLst>
@@ -23141,7 +23720,7 @@
         <p:spPr>
           <a:xfrm>
             <a:off x="5806440" y="1965960"/>
-            <a:ext cx="5577480" cy="3794400"/>
+            <a:ext cx="5577120" cy="3794040"/>
           </a:xfrm>
           <a:prstGeom prst="rect">
             <a:avLst/>
@@ -23188,7 +23767,7 @@
               </a:solidFill>
               <a:effectLst/>
               <a:uFillTx/>
-              <a:latin typeface="Cantarell"/>
+              <a:latin typeface="Arial"/>
             </a:endParaRPr>
           </a:p>
           <a:p>
@@ -23218,7 +23797,7 @@
               </a:solidFill>
               <a:effectLst/>
               <a:uFillTx/>
-              <a:latin typeface="Cantarell"/>
+              <a:latin typeface="Arial"/>
             </a:endParaRPr>
           </a:p>
           <a:p>
@@ -23248,7 +23827,7 @@
               </a:solidFill>
               <a:effectLst/>
               <a:uFillTx/>
-              <a:latin typeface="Cantarell"/>
+              <a:latin typeface="Arial"/>
             </a:endParaRPr>
           </a:p>
           <a:p>
@@ -23278,7 +23857,7 @@
               </a:solidFill>
               <a:effectLst/>
               <a:uFillTx/>
-              <a:latin typeface="Cantarell"/>
+              <a:latin typeface="Arial"/>
             </a:endParaRPr>
           </a:p>
           <a:p>
@@ -23308,7 +23887,7 @@
               </a:solidFill>
               <a:effectLst/>
               <a:uFillTx/>
-              <a:latin typeface="Cantarell"/>
+              <a:latin typeface="Arial"/>
             </a:endParaRPr>
           </a:p>
           <a:p>
@@ -23338,7 +23917,7 @@
               </a:solidFill>
               <a:effectLst/>
               <a:uFillTx/>
-              <a:latin typeface="Cantarell"/>
+              <a:latin typeface="Arial"/>
             </a:endParaRPr>
           </a:p>
           <a:p>
@@ -23368,7 +23947,7 @@
               </a:solidFill>
               <a:effectLst/>
               <a:uFillTx/>
-              <a:latin typeface="Cantarell"/>
+              <a:latin typeface="Arial"/>
             </a:endParaRPr>
           </a:p>
         </p:txBody>
@@ -23382,7 +23961,7 @@
         <p:spPr>
           <a:xfrm>
             <a:off x="457200" y="6446520"/>
-            <a:ext cx="6400440" cy="273960"/>
+            <a:ext cx="6400080" cy="273600"/>
           </a:xfrm>
           <a:prstGeom prst="rect">
             <a:avLst/>
@@ -23443,7 +24022,7 @@
         <p:spPr>
           <a:xfrm>
             <a:off x="11521440" y="6446520"/>
-            <a:ext cx="456840" cy="273960"/>
+            <a:ext cx="456480" cy="273600"/>
           </a:xfrm>
           <a:prstGeom prst="rect">
             <a:avLst/>
@@ -23541,7 +24120,7 @@
         <p:spPr>
           <a:xfrm>
             <a:off x="-1828800" y="5120640"/>
-            <a:ext cx="3657240" cy="3657240"/>
+            <a:ext cx="3656880" cy="3656880"/>
           </a:xfrm>
           <a:prstGeom prst="ellipse">
             <a:avLst/>
@@ -23584,7 +24163,7 @@
         <p:spPr>
           <a:xfrm>
             <a:off x="457200" y="457200"/>
-            <a:ext cx="639720" cy="639720"/>
+            <a:ext cx="639360" cy="639360"/>
           </a:xfrm>
           <a:prstGeom prst="ellipse">
             <a:avLst/>
@@ -23631,7 +24210,7 @@
         <p:spPr>
           <a:xfrm>
             <a:off x="553320" y="553320"/>
-            <a:ext cx="447840" cy="447840"/>
+            <a:ext cx="447480" cy="447480"/>
           </a:xfrm>
           <a:prstGeom prst="rect">
             <a:avLst/>
@@ -23651,7 +24230,7 @@
         <p:spPr>
           <a:xfrm>
             <a:off x="1280160" y="457200"/>
-            <a:ext cx="10423800" cy="639720"/>
+            <a:ext cx="10423440" cy="639360"/>
           </a:xfrm>
           <a:prstGeom prst="rect">
             <a:avLst/>
@@ -23712,7 +24291,7 @@
         <p:spPr>
           <a:xfrm>
             <a:off x="548640" y="1828800"/>
-            <a:ext cx="4754520" cy="4023000"/>
+            <a:ext cx="4754160" cy="4022640"/>
           </a:xfrm>
           <a:prstGeom prst="rect">
             <a:avLst/>
@@ -23813,7 +24392,7 @@
         <p:spPr>
           <a:xfrm>
             <a:off x="5486400" y="1691640"/>
-            <a:ext cx="6217560" cy="4343040"/>
+            <a:ext cx="6217200" cy="4342680"/>
           </a:xfrm>
           <a:prstGeom prst="roundRect">
             <a:avLst>
@@ -23858,7 +24437,7 @@
         <p:spPr>
           <a:xfrm>
             <a:off x="5806440" y="1965960"/>
-            <a:ext cx="5577480" cy="3794400"/>
+            <a:ext cx="5577120" cy="3794040"/>
           </a:xfrm>
           <a:prstGeom prst="rect">
             <a:avLst/>
@@ -23905,7 +24484,7 @@
               </a:solidFill>
               <a:effectLst/>
               <a:uFillTx/>
-              <a:latin typeface="Cantarell"/>
+              <a:latin typeface="Arial"/>
             </a:endParaRPr>
           </a:p>
           <a:p>
@@ -23935,7 +24514,7 @@
               </a:solidFill>
               <a:effectLst/>
               <a:uFillTx/>
-              <a:latin typeface="Cantarell"/>
+              <a:latin typeface="Arial"/>
             </a:endParaRPr>
           </a:p>
           <a:p>
@@ -23965,7 +24544,7 @@
               </a:solidFill>
               <a:effectLst/>
               <a:uFillTx/>
-              <a:latin typeface="Cantarell"/>
+              <a:latin typeface="Arial"/>
             </a:endParaRPr>
           </a:p>
           <a:p>
@@ -23995,7 +24574,7 @@
               </a:solidFill>
               <a:effectLst/>
               <a:uFillTx/>
-              <a:latin typeface="Cantarell"/>
+              <a:latin typeface="Arial"/>
             </a:endParaRPr>
           </a:p>
           <a:p>
@@ -24025,7 +24604,7 @@
               </a:solidFill>
               <a:effectLst/>
               <a:uFillTx/>
-              <a:latin typeface="Cantarell"/>
+              <a:latin typeface="Arial"/>
             </a:endParaRPr>
           </a:p>
           <a:p>
@@ -24055,7 +24634,7 @@
               </a:solidFill>
               <a:effectLst/>
               <a:uFillTx/>
-              <a:latin typeface="Cantarell"/>
+              <a:latin typeface="Arial"/>
             </a:endParaRPr>
           </a:p>
           <a:p>
@@ -24085,7 +24664,7 @@
               </a:solidFill>
               <a:effectLst/>
               <a:uFillTx/>
-              <a:latin typeface="Cantarell"/>
+              <a:latin typeface="Arial"/>
             </a:endParaRPr>
           </a:p>
         </p:txBody>
@@ -24099,7 +24678,7 @@
         <p:spPr>
           <a:xfrm>
             <a:off x="457200" y="6446520"/>
-            <a:ext cx="6400440" cy="273960"/>
+            <a:ext cx="6400080" cy="273600"/>
           </a:xfrm>
           <a:prstGeom prst="rect">
             <a:avLst/>
@@ -24160,7 +24739,7 @@
         <p:spPr>
           <a:xfrm>
             <a:off x="11521440" y="6446520"/>
-            <a:ext cx="456840" cy="273960"/>
+            <a:ext cx="456480" cy="273600"/>
           </a:xfrm>
           <a:prstGeom prst="rect">
             <a:avLst/>
@@ -24258,7 +24837,7 @@
         <p:spPr>
           <a:xfrm>
             <a:off x="-1828800" y="5120640"/>
-            <a:ext cx="3657240" cy="3657240"/>
+            <a:ext cx="3656880" cy="3656880"/>
           </a:xfrm>
           <a:prstGeom prst="ellipse">
             <a:avLst/>
@@ -24301,7 +24880,7 @@
         <p:spPr>
           <a:xfrm>
             <a:off x="457200" y="457200"/>
-            <a:ext cx="639720" cy="639720"/>
+            <a:ext cx="639360" cy="639360"/>
           </a:xfrm>
           <a:prstGeom prst="ellipse">
             <a:avLst/>
@@ -24348,7 +24927,7 @@
         <p:spPr>
           <a:xfrm>
             <a:off x="553320" y="553320"/>
-            <a:ext cx="447840" cy="447840"/>
+            <a:ext cx="447480" cy="447480"/>
           </a:xfrm>
           <a:prstGeom prst="rect">
             <a:avLst/>
@@ -24368,7 +24947,7 @@
         <p:spPr>
           <a:xfrm>
             <a:off x="1280160" y="457200"/>
-            <a:ext cx="10423800" cy="639720"/>
+            <a:ext cx="10423440" cy="639360"/>
           </a:xfrm>
           <a:prstGeom prst="rect">
             <a:avLst/>
@@ -24429,7 +25008,7 @@
         <p:spPr>
           <a:xfrm>
             <a:off x="548640" y="1828800"/>
-            <a:ext cx="4754520" cy="4023000"/>
+            <a:ext cx="4754160" cy="4022640"/>
           </a:xfrm>
           <a:prstGeom prst="rect">
             <a:avLst/>
@@ -24565,7 +25144,7 @@
         <p:spPr>
           <a:xfrm>
             <a:off x="5486400" y="1691640"/>
-            <a:ext cx="6217560" cy="4343040"/>
+            <a:ext cx="6217200" cy="4342680"/>
           </a:xfrm>
           <a:prstGeom prst="roundRect">
             <a:avLst>
@@ -24610,7 +25189,7 @@
         <p:spPr>
           <a:xfrm>
             <a:off x="5806440" y="1965960"/>
-            <a:ext cx="5577480" cy="3794400"/>
+            <a:ext cx="5577120" cy="3794040"/>
           </a:xfrm>
           <a:prstGeom prst="rect">
             <a:avLst/>
@@ -24657,7 +25236,7 @@
               </a:solidFill>
               <a:effectLst/>
               <a:uFillTx/>
-              <a:latin typeface="Cantarell"/>
+              <a:latin typeface="Arial"/>
             </a:endParaRPr>
           </a:p>
           <a:p>
@@ -24687,7 +25266,7 @@
               </a:solidFill>
               <a:effectLst/>
               <a:uFillTx/>
-              <a:latin typeface="Cantarell"/>
+              <a:latin typeface="Arial"/>
             </a:endParaRPr>
           </a:p>
           <a:p>
@@ -24717,7 +25296,7 @@
               </a:solidFill>
               <a:effectLst/>
               <a:uFillTx/>
-              <a:latin typeface="Cantarell"/>
+              <a:latin typeface="Arial"/>
             </a:endParaRPr>
           </a:p>
           <a:p>
@@ -24747,7 +25326,7 @@
               </a:solidFill>
               <a:effectLst/>
               <a:uFillTx/>
-              <a:latin typeface="Cantarell"/>
+              <a:latin typeface="Arial"/>
             </a:endParaRPr>
           </a:p>
           <a:p>
@@ -24777,7 +25356,7 @@
               </a:solidFill>
               <a:effectLst/>
               <a:uFillTx/>
-              <a:latin typeface="Cantarell"/>
+              <a:latin typeface="Arial"/>
             </a:endParaRPr>
           </a:p>
           <a:p>
@@ -24807,7 +25386,7 @@
               </a:solidFill>
               <a:effectLst/>
               <a:uFillTx/>
-              <a:latin typeface="Cantarell"/>
+              <a:latin typeface="Arial"/>
             </a:endParaRPr>
           </a:p>
           <a:p>
@@ -24837,7 +25416,7 @@
               </a:solidFill>
               <a:effectLst/>
               <a:uFillTx/>
-              <a:latin typeface="Cantarell"/>
+              <a:latin typeface="Arial"/>
             </a:endParaRPr>
           </a:p>
           <a:p>
@@ -24867,7 +25446,7 @@
               </a:solidFill>
               <a:effectLst/>
               <a:uFillTx/>
-              <a:latin typeface="Cantarell"/>
+              <a:latin typeface="Arial"/>
             </a:endParaRPr>
           </a:p>
         </p:txBody>
@@ -24881,7 +25460,7 @@
         <p:spPr>
           <a:xfrm>
             <a:off x="457200" y="6446520"/>
-            <a:ext cx="6400440" cy="273960"/>
+            <a:ext cx="6400080" cy="273600"/>
           </a:xfrm>
           <a:prstGeom prst="rect">
             <a:avLst/>
@@ -24942,7 +25521,7 @@
         <p:spPr>
           <a:xfrm>
             <a:off x="11521440" y="6446520"/>
-            <a:ext cx="456840" cy="273960"/>
+            <a:ext cx="456480" cy="273600"/>
           </a:xfrm>
           <a:prstGeom prst="rect">
             <a:avLst/>
@@ -25040,7 +25619,7 @@
         <p:spPr>
           <a:xfrm>
             <a:off x="-1828800" y="4114800"/>
-            <a:ext cx="5486040" cy="5486040"/>
+            <a:ext cx="5485680" cy="5485680"/>
           </a:xfrm>
           <a:prstGeom prst="ellipse">
             <a:avLst/>
@@ -25083,7 +25662,7 @@
         <p:spPr>
           <a:xfrm>
             <a:off x="9601200" y="-2286000"/>
-            <a:ext cx="5486040" cy="5486040"/>
+            <a:ext cx="5485680" cy="5485680"/>
           </a:xfrm>
           <a:prstGeom prst="ellipse">
             <a:avLst/>
@@ -25126,7 +25705,7 @@
         <p:spPr>
           <a:xfrm>
             <a:off x="5591520" y="731520"/>
-            <a:ext cx="1005480" cy="1005480"/>
+            <a:ext cx="1005120" cy="1005120"/>
           </a:xfrm>
           <a:prstGeom prst="ellipse">
             <a:avLst/>
@@ -25173,7 +25752,7 @@
         <p:spPr>
           <a:xfrm>
             <a:off x="5742360" y="882360"/>
-            <a:ext cx="703800" cy="703800"/>
+            <a:ext cx="703440" cy="703440"/>
           </a:xfrm>
           <a:prstGeom prst="rect">
             <a:avLst/>
@@ -25193,7 +25772,7 @@
         <p:spPr>
           <a:xfrm>
             <a:off x="914400" y="1965960"/>
-            <a:ext cx="10359720" cy="365400"/>
+            <a:ext cx="10359360" cy="365040"/>
           </a:xfrm>
           <a:prstGeom prst="rect">
             <a:avLst/>
@@ -25254,7 +25833,7 @@
         <p:spPr>
           <a:xfrm>
             <a:off x="914400" y="2377440"/>
-            <a:ext cx="10359720" cy="2011320"/>
+            <a:ext cx="10359360" cy="2010960"/>
           </a:xfrm>
           <a:prstGeom prst="rect">
             <a:avLst/>
@@ -25315,7 +25894,7 @@
         <p:spPr>
           <a:xfrm>
             <a:off x="1463040" y="4572000"/>
-            <a:ext cx="9262440" cy="1096920"/>
+            <a:ext cx="9262080" cy="1096560"/>
           </a:xfrm>
           <a:prstGeom prst="rect">
             <a:avLst/>
@@ -25376,7 +25955,7 @@
         <p:spPr>
           <a:xfrm>
             <a:off x="11521440" y="6446520"/>
-            <a:ext cx="456840" cy="273960"/>
+            <a:ext cx="456480" cy="273600"/>
           </a:xfrm>
           <a:prstGeom prst="rect">
             <a:avLst/>
@@ -25474,7 +26053,7 @@
         <p:spPr>
           <a:xfrm>
             <a:off x="-1828800" y="5120640"/>
-            <a:ext cx="3657240" cy="3657240"/>
+            <a:ext cx="3656880" cy="3656880"/>
           </a:xfrm>
           <a:prstGeom prst="ellipse">
             <a:avLst/>
@@ -25517,7 +26096,7 @@
         <p:spPr>
           <a:xfrm>
             <a:off x="457200" y="457200"/>
-            <a:ext cx="639720" cy="639720"/>
+            <a:ext cx="639360" cy="639360"/>
           </a:xfrm>
           <a:prstGeom prst="ellipse">
             <a:avLst/>
@@ -25564,7 +26143,7 @@
         <p:spPr>
           <a:xfrm>
             <a:off x="553320" y="553320"/>
-            <a:ext cx="447840" cy="447840"/>
+            <a:ext cx="447480" cy="447480"/>
           </a:xfrm>
           <a:prstGeom prst="rect">
             <a:avLst/>
@@ -25584,7 +26163,7 @@
         <p:spPr>
           <a:xfrm>
             <a:off x="1280160" y="457200"/>
-            <a:ext cx="10423800" cy="639720"/>
+            <a:ext cx="10423440" cy="639360"/>
           </a:xfrm>
           <a:prstGeom prst="rect">
             <a:avLst/>
@@ -25645,7 +26224,7 @@
         <p:spPr>
           <a:xfrm>
             <a:off x="548640" y="1828800"/>
-            <a:ext cx="4754520" cy="4023000"/>
+            <a:ext cx="4754160" cy="4022640"/>
           </a:xfrm>
           <a:prstGeom prst="rect">
             <a:avLst/>
@@ -25781,7 +26360,7 @@
         <p:spPr>
           <a:xfrm>
             <a:off x="5486400" y="1691640"/>
-            <a:ext cx="6217560" cy="4343040"/>
+            <a:ext cx="6217200" cy="4342680"/>
           </a:xfrm>
           <a:prstGeom prst="roundRect">
             <a:avLst>
@@ -25826,7 +26405,7 @@
         <p:spPr>
           <a:xfrm>
             <a:off x="5806440" y="1965960"/>
-            <a:ext cx="5577480" cy="3794400"/>
+            <a:ext cx="5577120" cy="3794040"/>
           </a:xfrm>
           <a:prstGeom prst="rect">
             <a:avLst/>
@@ -25873,7 +26452,7 @@
               </a:solidFill>
               <a:effectLst/>
               <a:uFillTx/>
-              <a:latin typeface="Cantarell"/>
+              <a:latin typeface="Arial"/>
             </a:endParaRPr>
           </a:p>
           <a:p>
@@ -25895,7 +26474,7 @@
                 <a:latin typeface="Cantarell"/>
                 <a:ea typeface="Consolas"/>
               </a:rPr>
-              <a:t>numbers = [1, 2, 3, 4]</a:t>
+              <a:t>numbers = [1, 2, 4, 6]</a:t>
             </a:r>
             <a:endParaRPr lang="en-US" sz="1300" b="0" u="none" strike="noStrike">
               <a:solidFill>
@@ -25903,7 +26482,7 @@
               </a:solidFill>
               <a:effectLst/>
               <a:uFillTx/>
-              <a:latin typeface="Cantarell"/>
+              <a:latin typeface="Arial"/>
             </a:endParaRPr>
           </a:p>
           <a:p>
@@ -25933,7 +26512,7 @@
               </a:solidFill>
               <a:effectLst/>
               <a:uFillTx/>
-              <a:latin typeface="Cantarell"/>
+              <a:latin typeface="Arial"/>
             </a:endParaRPr>
           </a:p>
           <a:p>
@@ -25963,7 +26542,7 @@
               </a:solidFill>
               <a:effectLst/>
               <a:uFillTx/>
-              <a:latin typeface="Cantarell"/>
+              <a:latin typeface="Arial"/>
             </a:endParaRPr>
           </a:p>
           <a:p>
@@ -25993,7 +26572,25 @@
               </a:solidFill>
               <a:effectLst/>
               <a:uFillTx/>
-              <a:latin typeface="Cantarell"/>
+              <a:latin typeface="Arial"/>
+            </a:endParaRPr>
+          </a:p>
+          <a:p>
+            <a:pPr defTabSz="914400">
+              <a:lnSpc>
+                <a:spcPct val="140000"/>
+              </a:lnSpc>
+              <a:tabLst>
+                <a:tab pos="0" algn="l"/>
+              </a:tabLst>
+            </a:pPr>
+            <a:endParaRPr lang="en-US" sz="1300" b="0" u="none" strike="noStrike">
+              <a:solidFill>
+                <a:srgbClr val="000000"/>
+              </a:solidFill>
+              <a:effectLst/>
+              <a:uFillTx/>
+              <a:latin typeface="Arial"/>
             </a:endParaRPr>
           </a:p>
           <a:p>
@@ -26015,7 +26612,7 @@
                 <a:latin typeface="Cantarell"/>
                 <a:ea typeface="Consolas"/>
               </a:rPr>
-              <a:t> </a:t>
+              <a:t>print(numbers)</a:t>
             </a:r>
             <a:endParaRPr lang="en-US" sz="1300" b="0" u="none" strike="noStrike">
               <a:solidFill>
@@ -26023,7 +26620,7 @@
               </a:solidFill>
               <a:effectLst/>
               <a:uFillTx/>
-              <a:latin typeface="Cantarell"/>
+              <a:latin typeface="Arial"/>
             </a:endParaRPr>
           </a:p>
           <a:p>
@@ -26053,7 +26650,7 @@
               </a:solidFill>
               <a:effectLst/>
               <a:uFillTx/>
-              <a:latin typeface="Cantarell"/>
+              <a:latin typeface="Arial"/>
             </a:endParaRPr>
           </a:p>
           <a:p>
@@ -26075,7 +26672,7 @@
                 <a:latin typeface="Cantarell"/>
                 <a:ea typeface="Consolas"/>
               </a:rPr>
-              <a:t>for n in numbers[:]:</a:t>
+              <a:t>numbers = [1, 2, 4, 6]</a:t>
             </a:r>
             <a:endParaRPr lang="en-US" sz="1300" b="0" u="none" strike="noStrike">
               <a:solidFill>
@@ -26083,7 +26680,7 @@
               </a:solidFill>
               <a:effectLst/>
               <a:uFillTx/>
-              <a:latin typeface="Cantarell"/>
+              <a:latin typeface="Arial"/>
             </a:endParaRPr>
           </a:p>
           <a:p>
@@ -26105,7 +26702,7 @@
                 <a:latin typeface="Cantarell"/>
                 <a:ea typeface="Consolas"/>
               </a:rPr>
-              <a:t>    if n % 2 == 0:</a:t>
+              <a:t>for n in numbers[:]:</a:t>
             </a:r>
             <a:endParaRPr lang="en-US" sz="1300" b="0" u="none" strike="noStrike">
               <a:solidFill>
@@ -26113,7 +26710,7 @@
               </a:solidFill>
               <a:effectLst/>
               <a:uFillTx/>
-              <a:latin typeface="Cantarell"/>
+              <a:latin typeface="Arial"/>
             </a:endParaRPr>
           </a:p>
           <a:p>
@@ -26135,6 +26732,36 @@
                 <a:latin typeface="Cantarell"/>
                 <a:ea typeface="Consolas"/>
               </a:rPr>
+              <a:t>    if n % 2 == 0:</a:t>
+            </a:r>
+            <a:endParaRPr lang="en-US" sz="1300" b="0" u="none" strike="noStrike">
+              <a:solidFill>
+                <a:srgbClr val="000000"/>
+              </a:solidFill>
+              <a:effectLst/>
+              <a:uFillTx/>
+              <a:latin typeface="Arial"/>
+            </a:endParaRPr>
+          </a:p>
+          <a:p>
+            <a:pPr defTabSz="914400">
+              <a:lnSpc>
+                <a:spcPct val="140000"/>
+              </a:lnSpc>
+              <a:tabLst>
+                <a:tab pos="0" algn="l"/>
+              </a:tabLst>
+            </a:pPr>
+            <a:r>
+              <a:rPr lang="en-US" sz="1300" b="0" u="none" strike="noStrike">
+                <a:solidFill>
+                  <a:srgbClr val="C9D3CC"/>
+                </a:solidFill>
+                <a:effectLst/>
+                <a:uFillTx/>
+                <a:latin typeface="Cantarell"/>
+                <a:ea typeface="Consolas"/>
+              </a:rPr>
               <a:t>        numbers.remove(n)</a:t>
             </a:r>
             <a:endParaRPr lang="en-US" sz="1300" b="0" u="none" strike="noStrike">
@@ -26143,7 +26770,37 @@
               </a:solidFill>
               <a:effectLst/>
               <a:uFillTx/>
-              <a:latin typeface="Cantarell"/>
+              <a:latin typeface="Arial"/>
+            </a:endParaRPr>
+          </a:p>
+          <a:p>
+            <a:pPr defTabSz="914400">
+              <a:lnSpc>
+                <a:spcPct val="140000"/>
+              </a:lnSpc>
+              <a:tabLst>
+                <a:tab pos="0" algn="l"/>
+              </a:tabLst>
+            </a:pPr>
+            <a:r>
+              <a:rPr lang="en-US" sz="1300" b="0" u="none" strike="noStrike">
+                <a:solidFill>
+                  <a:srgbClr val="C9D3CC"/>
+                </a:solidFill>
+                <a:effectLst/>
+                <a:uFillTx/>
+                <a:latin typeface="Cantarell"/>
+                <a:ea typeface="Consolas"/>
+              </a:rPr>
+              <a:t>print(numbers)</a:t>
+            </a:r>
+            <a:endParaRPr lang="en-US" sz="1300" b="0" u="none" strike="noStrike">
+              <a:solidFill>
+                <a:srgbClr val="000000"/>
+              </a:solidFill>
+              <a:effectLst/>
+              <a:uFillTx/>
+              <a:latin typeface="Arial"/>
             </a:endParaRPr>
           </a:p>
         </p:txBody>
@@ -26157,7 +26814,7 @@
         <p:spPr>
           <a:xfrm>
             <a:off x="457200" y="6446520"/>
-            <a:ext cx="6400440" cy="273960"/>
+            <a:ext cx="6400080" cy="273600"/>
           </a:xfrm>
           <a:prstGeom prst="rect">
             <a:avLst/>
@@ -26218,7 +26875,7 @@
         <p:spPr>
           <a:xfrm>
             <a:off x="11521440" y="6446520"/>
-            <a:ext cx="456840" cy="273960"/>
+            <a:ext cx="456480" cy="273600"/>
           </a:xfrm>
           <a:prstGeom prst="rect">
             <a:avLst/>
@@ -26316,7 +26973,7 @@
         <p:spPr>
           <a:xfrm>
             <a:off x="457200" y="457200"/>
-            <a:ext cx="639720" cy="639720"/>
+            <a:ext cx="639360" cy="639360"/>
           </a:xfrm>
           <a:prstGeom prst="ellipse">
             <a:avLst/>
@@ -26363,7 +27020,7 @@
         <p:spPr>
           <a:xfrm>
             <a:off x="553320" y="553320"/>
-            <a:ext cx="447840" cy="447840"/>
+            <a:ext cx="447480" cy="447480"/>
           </a:xfrm>
           <a:prstGeom prst="rect">
             <a:avLst/>
@@ -26383,7 +27040,7 @@
         <p:spPr>
           <a:xfrm>
             <a:off x="1280160" y="457200"/>
-            <a:ext cx="10423800" cy="639720"/>
+            <a:ext cx="10423440" cy="639360"/>
           </a:xfrm>
           <a:prstGeom prst="rect">
             <a:avLst/>
@@ -26444,7 +27101,7 @@
         <p:spPr>
           <a:xfrm>
             <a:off x="457200" y="1508760"/>
-            <a:ext cx="5522760" cy="4891680"/>
+            <a:ext cx="5522400" cy="4891320"/>
           </a:xfrm>
           <a:prstGeom prst="roundRect">
             <a:avLst>
@@ -26496,7 +27153,7 @@
         <p:spPr>
           <a:xfrm>
             <a:off x="2944440" y="2095920"/>
-            <a:ext cx="548280" cy="548280"/>
+            <a:ext cx="547920" cy="547920"/>
           </a:xfrm>
           <a:prstGeom prst="ellipse">
             <a:avLst/>
@@ -26543,7 +27200,7 @@
         <p:spPr>
           <a:xfrm>
             <a:off x="3026520" y="2178000"/>
-            <a:ext cx="383760" cy="383760"/>
+            <a:ext cx="383400" cy="383400"/>
           </a:xfrm>
           <a:prstGeom prst="rect">
             <a:avLst/>
@@ -26563,7 +27220,7 @@
         <p:spPr>
           <a:xfrm>
             <a:off x="548640" y="2717640"/>
-            <a:ext cx="5339880" cy="365400"/>
+            <a:ext cx="5339520" cy="365040"/>
           </a:xfrm>
           <a:prstGeom prst="rect">
             <a:avLst/>
@@ -26624,7 +27281,7 @@
         <p:spPr>
           <a:xfrm>
             <a:off x="603360" y="3101760"/>
-            <a:ext cx="5230080" cy="3252960"/>
+            <a:ext cx="5229720" cy="3252600"/>
           </a:xfrm>
           <a:prstGeom prst="rect">
             <a:avLst/>
@@ -26685,7 +27342,7 @@
         <p:spPr>
           <a:xfrm>
             <a:off x="6208920" y="1508760"/>
-            <a:ext cx="5522760" cy="4891680"/>
+            <a:ext cx="5522400" cy="4891320"/>
           </a:xfrm>
           <a:prstGeom prst="roundRect">
             <a:avLst>
@@ -26737,7 +27394,7 @@
         <p:spPr>
           <a:xfrm>
             <a:off x="8695800" y="2095920"/>
-            <a:ext cx="548280" cy="548280"/>
+            <a:ext cx="547920" cy="547920"/>
           </a:xfrm>
           <a:prstGeom prst="ellipse">
             <a:avLst/>
@@ -26784,7 +27441,7 @@
         <p:spPr>
           <a:xfrm>
             <a:off x="8778240" y="2178000"/>
-            <a:ext cx="383760" cy="383760"/>
+            <a:ext cx="383400" cy="383400"/>
           </a:xfrm>
           <a:prstGeom prst="rect">
             <a:avLst/>
@@ -26804,7 +27461,7 @@
         <p:spPr>
           <a:xfrm>
             <a:off x="6300360" y="2717640"/>
-            <a:ext cx="5339880" cy="365400"/>
+            <a:ext cx="5339520" cy="365040"/>
           </a:xfrm>
           <a:prstGeom prst="rect">
             <a:avLst/>
@@ -26865,7 +27522,7 @@
         <p:spPr>
           <a:xfrm>
             <a:off x="6355080" y="3101760"/>
-            <a:ext cx="5230080" cy="3252960"/>
+            <a:ext cx="5229720" cy="3252600"/>
           </a:xfrm>
           <a:prstGeom prst="rect">
             <a:avLst/>
@@ -26926,7 +27583,7 @@
         <p:spPr>
           <a:xfrm>
             <a:off x="457200" y="6446520"/>
-            <a:ext cx="6400440" cy="273960"/>
+            <a:ext cx="6400080" cy="273600"/>
           </a:xfrm>
           <a:prstGeom prst="rect">
             <a:avLst/>
@@ -26987,7 +27644,7 @@
         <p:spPr>
           <a:xfrm>
             <a:off x="11521440" y="6446520"/>
-            <a:ext cx="456840" cy="273960"/>
+            <a:ext cx="456480" cy="273600"/>
           </a:xfrm>
           <a:prstGeom prst="rect">
             <a:avLst/>
@@ -27085,7 +27742,7 @@
         <p:spPr>
           <a:xfrm>
             <a:off x="-1828800" y="5029200"/>
-            <a:ext cx="3657240" cy="3657240"/>
+            <a:ext cx="3656880" cy="3656880"/>
           </a:xfrm>
           <a:prstGeom prst="ellipse">
             <a:avLst/>
@@ -27128,7 +27785,7 @@
         <p:spPr>
           <a:xfrm>
             <a:off x="457200" y="457200"/>
-            <a:ext cx="639720" cy="639720"/>
+            <a:ext cx="639360" cy="639360"/>
           </a:xfrm>
           <a:prstGeom prst="ellipse">
             <a:avLst/>
@@ -27175,7 +27832,7 @@
         <p:spPr>
           <a:xfrm>
             <a:off x="553320" y="553320"/>
-            <a:ext cx="447840" cy="447840"/>
+            <a:ext cx="447480" cy="447480"/>
           </a:xfrm>
           <a:prstGeom prst="rect">
             <a:avLst/>
@@ -27195,7 +27852,7 @@
         <p:spPr>
           <a:xfrm>
             <a:off x="1280160" y="457200"/>
-            <a:ext cx="10423800" cy="639720"/>
+            <a:ext cx="10423440" cy="639360"/>
           </a:xfrm>
           <a:prstGeom prst="rect">
             <a:avLst/>
@@ -27256,7 +27913,7 @@
         <p:spPr>
           <a:xfrm>
             <a:off x="457200" y="1600200"/>
-            <a:ext cx="11274120" cy="4480200"/>
+            <a:ext cx="11273760" cy="4479840"/>
           </a:xfrm>
           <a:prstGeom prst="roundRect">
             <a:avLst>
@@ -27301,7 +27958,7 @@
         <p:spPr>
           <a:xfrm>
             <a:off x="822960" y="1828800"/>
-            <a:ext cx="10515240" cy="456840"/>
+            <a:ext cx="10514880" cy="456480"/>
           </a:xfrm>
           <a:prstGeom prst="rect">
             <a:avLst/>
@@ -27362,7 +28019,7 @@
         <p:spPr>
           <a:xfrm>
             <a:off x="822960" y="2423160"/>
-            <a:ext cx="383760" cy="383760"/>
+            <a:ext cx="383400" cy="383400"/>
           </a:xfrm>
           <a:prstGeom prst="ellipse">
             <a:avLst/>
@@ -27405,7 +28062,7 @@
         <p:spPr>
           <a:xfrm>
             <a:off x="822960" y="2423160"/>
-            <a:ext cx="383760" cy="383760"/>
+            <a:ext cx="383400" cy="383400"/>
           </a:xfrm>
           <a:prstGeom prst="rect">
             <a:avLst/>
@@ -27466,7 +28123,7 @@
         <p:spPr>
           <a:xfrm>
             <a:off x="1435680" y="2423160"/>
-            <a:ext cx="9582480" cy="383760"/>
+            <a:ext cx="9582120" cy="383400"/>
           </a:xfrm>
           <a:prstGeom prst="rect">
             <a:avLst/>
@@ -27527,7 +28184,7 @@
         <p:spPr>
           <a:xfrm>
             <a:off x="822960" y="3303360"/>
-            <a:ext cx="383760" cy="383760"/>
+            <a:ext cx="383400" cy="383400"/>
           </a:xfrm>
           <a:prstGeom prst="ellipse">
             <a:avLst/>
@@ -27570,7 +28227,7 @@
         <p:spPr>
           <a:xfrm>
             <a:off x="822960" y="3303360"/>
-            <a:ext cx="383760" cy="383760"/>
+            <a:ext cx="383400" cy="383400"/>
           </a:xfrm>
           <a:prstGeom prst="rect">
             <a:avLst/>
@@ -27631,7 +28288,7 @@
         <p:spPr>
           <a:xfrm>
             <a:off x="1435680" y="3303360"/>
-            <a:ext cx="9582480" cy="383760"/>
+            <a:ext cx="9582120" cy="383400"/>
           </a:xfrm>
           <a:prstGeom prst="rect">
             <a:avLst/>
@@ -27670,7 +28327,187 @@
                 <a:latin typeface="Calibri"/>
                 <a:ea typeface="Calibri"/>
               </a:rPr>
-              <a:t>Use the search pattern to check if a specific word exists in a list of words</a:t>
+              <a:t>Use </a:t>
+            </a:r>
+            <a:r>
+              <a:rPr lang="en-US" sz="1300" b="0" u="none" strike="noStrike">
+                <a:solidFill>
+                  <a:srgbClr val="1B2420"/>
+                </a:solidFill>
+                <a:effectLst/>
+                <a:uFillTx/>
+                <a:latin typeface="Calibri"/>
+                <a:ea typeface="Calibri"/>
+              </a:rPr>
+              <a:t>the </a:t>
+            </a:r>
+            <a:r>
+              <a:rPr lang="en-US" sz="1300" b="0" u="none" strike="noStrike">
+                <a:solidFill>
+                  <a:srgbClr val="1B2420"/>
+                </a:solidFill>
+                <a:effectLst/>
+                <a:uFillTx/>
+                <a:latin typeface="Calibri"/>
+                <a:ea typeface="Calibri"/>
+              </a:rPr>
+              <a:t>searc</a:t>
+            </a:r>
+            <a:r>
+              <a:rPr lang="en-US" sz="1300" b="0" u="none" strike="noStrike">
+                <a:solidFill>
+                  <a:srgbClr val="1B2420"/>
+                </a:solidFill>
+                <a:effectLst/>
+                <a:uFillTx/>
+                <a:latin typeface="Calibri"/>
+                <a:ea typeface="Calibri"/>
+              </a:rPr>
+              <a:t>h </a:t>
+            </a:r>
+            <a:r>
+              <a:rPr lang="en-US" sz="1300" b="0" u="none" strike="noStrike">
+                <a:solidFill>
+                  <a:srgbClr val="1B2420"/>
+                </a:solidFill>
+                <a:effectLst/>
+                <a:uFillTx/>
+                <a:latin typeface="Calibri"/>
+                <a:ea typeface="Calibri"/>
+              </a:rPr>
+              <a:t>patte</a:t>
+            </a:r>
+            <a:r>
+              <a:rPr lang="en-US" sz="1300" b="0" u="none" strike="noStrike">
+                <a:solidFill>
+                  <a:srgbClr val="1B2420"/>
+                </a:solidFill>
+                <a:effectLst/>
+                <a:uFillTx/>
+                <a:latin typeface="Calibri"/>
+                <a:ea typeface="Calibri"/>
+              </a:rPr>
+              <a:t>rn to </a:t>
+            </a:r>
+            <a:r>
+              <a:rPr lang="en-US" sz="1300" b="0" u="none" strike="noStrike">
+                <a:solidFill>
+                  <a:srgbClr val="1B2420"/>
+                </a:solidFill>
+                <a:effectLst/>
+                <a:uFillTx/>
+                <a:latin typeface="Calibri"/>
+                <a:ea typeface="Calibri"/>
+              </a:rPr>
+              <a:t>check </a:t>
+            </a:r>
+            <a:r>
+              <a:rPr lang="en-US" sz="1300" b="0" u="none" strike="noStrike">
+                <a:solidFill>
+                  <a:srgbClr val="1B2420"/>
+                </a:solidFill>
+                <a:effectLst/>
+                <a:uFillTx/>
+                <a:latin typeface="Calibri"/>
+                <a:ea typeface="Calibri"/>
+              </a:rPr>
+              <a:t>if a </a:t>
+            </a:r>
+            <a:r>
+              <a:rPr lang="en-US" sz="1300" b="0" u="none" strike="noStrike">
+                <a:solidFill>
+                  <a:srgbClr val="1B2420"/>
+                </a:solidFill>
+                <a:effectLst/>
+                <a:uFillTx/>
+                <a:latin typeface="Calibri"/>
+                <a:ea typeface="Calibri"/>
+              </a:rPr>
+              <a:t>specif</a:t>
+            </a:r>
+            <a:r>
+              <a:rPr lang="en-US" sz="1300" b="0" u="none" strike="noStrike">
+                <a:solidFill>
+                  <a:srgbClr val="1B2420"/>
+                </a:solidFill>
+                <a:effectLst/>
+                <a:uFillTx/>
+                <a:latin typeface="Calibri"/>
+                <a:ea typeface="Calibri"/>
+              </a:rPr>
+              <a:t>ic </a:t>
+            </a:r>
+            <a:r>
+              <a:rPr lang="en-US" sz="1300" b="0" u="none" strike="noStrike">
+                <a:solidFill>
+                  <a:srgbClr val="1B2420"/>
+                </a:solidFill>
+                <a:effectLst/>
+                <a:uFillTx/>
+                <a:latin typeface="Calibri"/>
+                <a:ea typeface="Calibri"/>
+              </a:rPr>
+              <a:t>word </a:t>
+            </a:r>
+            <a:r>
+              <a:rPr lang="en-US" sz="1300" b="0" u="none" strike="noStrike">
+                <a:solidFill>
+                  <a:srgbClr val="1B2420"/>
+                </a:solidFill>
+                <a:effectLst/>
+                <a:uFillTx/>
+                <a:latin typeface="Calibri"/>
+                <a:ea typeface="Calibri"/>
+              </a:rPr>
+              <a:t>exists </a:t>
+            </a:r>
+            <a:r>
+              <a:rPr lang="en-US" sz="1300" b="0" u="none" strike="noStrike">
+                <a:solidFill>
+                  <a:srgbClr val="1B2420"/>
+                </a:solidFill>
+                <a:effectLst/>
+                <a:uFillTx/>
+                <a:latin typeface="Calibri"/>
+                <a:ea typeface="Calibri"/>
+              </a:rPr>
+              <a:t>in a </a:t>
+            </a:r>
+            <a:r>
+              <a:rPr lang="en-US" sz="1300" b="0" u="none" strike="noStrike">
+                <a:solidFill>
+                  <a:srgbClr val="1B2420"/>
+                </a:solidFill>
+                <a:effectLst/>
+                <a:uFillTx/>
+                <a:latin typeface="Calibri"/>
+                <a:ea typeface="Calibri"/>
+              </a:rPr>
+              <a:t>list of </a:t>
+            </a:r>
+            <a:r>
+              <a:rPr lang="en-US" sz="1300" b="0" u="none" strike="noStrike">
+                <a:solidFill>
+                  <a:srgbClr val="1B2420"/>
+                </a:solidFill>
+                <a:effectLst/>
+                <a:uFillTx/>
+                <a:latin typeface="Calibri"/>
+                <a:ea typeface="Calibri"/>
+              </a:rPr>
+              <a:t>word</a:t>
+            </a:r>
+            <a:r>
+              <a:rPr lang="en-US" sz="1300" b="0" u="none" strike="noStrike">
+                <a:solidFill>
+                  <a:srgbClr val="1B2420"/>
+                </a:solidFill>
+                <a:effectLst/>
+                <a:uFillTx/>
+                <a:latin typeface="Calibri"/>
+                <a:ea typeface="Calibri"/>
+              </a:rPr>
+              <a:t>s</a:t>
             </a:r>
             <a:endParaRPr lang="en-US" sz="1300" b="0" u="none" strike="noStrike">
               <a:solidFill>
@@ -27692,7 +28529,7 @@
         <p:spPr>
           <a:xfrm>
             <a:off x="822960" y="4183560"/>
-            <a:ext cx="383760" cy="383760"/>
+            <a:ext cx="383400" cy="383400"/>
           </a:xfrm>
           <a:prstGeom prst="ellipse">
             <a:avLst/>
@@ -27735,7 +28572,7 @@
         <p:spPr>
           <a:xfrm>
             <a:off x="822960" y="4183560"/>
-            <a:ext cx="383760" cy="383760"/>
+            <a:ext cx="383400" cy="383400"/>
           </a:xfrm>
           <a:prstGeom prst="rect">
             <a:avLst/>
@@ -27796,7 +28633,7 @@
         <p:spPr>
           <a:xfrm>
             <a:off x="1435680" y="4183560"/>
-            <a:ext cx="9582480" cy="383760"/>
+            <a:ext cx="9582120" cy="383400"/>
           </a:xfrm>
           <a:prstGeom prst="rect">
             <a:avLst/>
@@ -27857,7 +28694,7 @@
         <p:spPr>
           <a:xfrm>
             <a:off x="822960" y="5063400"/>
-            <a:ext cx="383760" cy="383760"/>
+            <a:ext cx="383400" cy="383400"/>
           </a:xfrm>
           <a:prstGeom prst="ellipse">
             <a:avLst/>
@@ -27900,7 +28737,7 @@
         <p:spPr>
           <a:xfrm>
             <a:off x="822960" y="5063400"/>
-            <a:ext cx="383760" cy="383760"/>
+            <a:ext cx="383400" cy="383400"/>
           </a:xfrm>
           <a:prstGeom prst="rect">
             <a:avLst/>
@@ -27961,7 +28798,7 @@
         <p:spPr>
           <a:xfrm>
             <a:off x="1435680" y="5063400"/>
-            <a:ext cx="9582480" cy="383760"/>
+            <a:ext cx="9582120" cy="383400"/>
           </a:xfrm>
           <a:prstGeom prst="rect">
             <a:avLst/>
@@ -28022,7 +28859,7 @@
         <p:spPr>
           <a:xfrm>
             <a:off x="457200" y="6446520"/>
-            <a:ext cx="6400440" cy="273960"/>
+            <a:ext cx="6400080" cy="273600"/>
           </a:xfrm>
           <a:prstGeom prst="rect">
             <a:avLst/>
@@ -28083,7 +28920,7 @@
         <p:spPr>
           <a:xfrm>
             <a:off x="11521440" y="6446520"/>
-            <a:ext cx="456840" cy="273960"/>
+            <a:ext cx="456480" cy="273600"/>
           </a:xfrm>
           <a:prstGeom prst="rect">
             <a:avLst/>
@@ -28181,7 +29018,7 @@
         <p:spPr>
           <a:xfrm>
             <a:off x="-1828800" y="5029200"/>
-            <a:ext cx="3657240" cy="3657240"/>
+            <a:ext cx="3656880" cy="3656880"/>
           </a:xfrm>
           <a:prstGeom prst="ellipse">
             <a:avLst/>
@@ -28224,7 +29061,7 @@
         <p:spPr>
           <a:xfrm>
             <a:off x="457200" y="457200"/>
-            <a:ext cx="639720" cy="639720"/>
+            <a:ext cx="639360" cy="639360"/>
           </a:xfrm>
           <a:prstGeom prst="ellipse">
             <a:avLst/>
@@ -28271,7 +29108,7 @@
         <p:spPr>
           <a:xfrm>
             <a:off x="553320" y="553320"/>
-            <a:ext cx="447840" cy="447840"/>
+            <a:ext cx="447480" cy="447480"/>
           </a:xfrm>
           <a:prstGeom prst="rect">
             <a:avLst/>
@@ -28291,7 +29128,7 @@
         <p:spPr>
           <a:xfrm>
             <a:off x="1280160" y="457200"/>
-            <a:ext cx="10423800" cy="639720"/>
+            <a:ext cx="10423440" cy="639360"/>
           </a:xfrm>
           <a:prstGeom prst="rect">
             <a:avLst/>
@@ -28352,7 +29189,7 @@
         <p:spPr>
           <a:xfrm>
             <a:off x="457200" y="1600200"/>
-            <a:ext cx="11274120" cy="4480200"/>
+            <a:ext cx="11273760" cy="4479840"/>
           </a:xfrm>
           <a:prstGeom prst="roundRect">
             <a:avLst>
@@ -28397,7 +29234,7 @@
         <p:spPr>
           <a:xfrm>
             <a:off x="822960" y="1828800"/>
-            <a:ext cx="10515240" cy="456840"/>
+            <a:ext cx="10514880" cy="456480"/>
           </a:xfrm>
           <a:prstGeom prst="rect">
             <a:avLst/>
@@ -28458,7 +29295,7 @@
         <p:spPr>
           <a:xfrm>
             <a:off x="822960" y="2423160"/>
-            <a:ext cx="420120" cy="420120"/>
+            <a:ext cx="419760" cy="419760"/>
           </a:xfrm>
           <a:prstGeom prst="ellipse">
             <a:avLst/>
@@ -28505,7 +29342,7 @@
         <p:spPr>
           <a:xfrm>
             <a:off x="885960" y="2486160"/>
-            <a:ext cx="294120" cy="294120"/>
+            <a:ext cx="293760" cy="293760"/>
           </a:xfrm>
           <a:prstGeom prst="rect">
             <a:avLst/>
@@ -28525,7 +29362,7 @@
         <p:spPr>
           <a:xfrm>
             <a:off x="1417320" y="2441520"/>
-            <a:ext cx="420120" cy="383760"/>
+            <a:ext cx="419760" cy="383400"/>
           </a:xfrm>
           <a:prstGeom prst="roundRect">
             <a:avLst>
@@ -28573,7 +29410,7 @@
         <p:spPr>
           <a:xfrm>
             <a:off x="1417320" y="2441520"/>
-            <a:ext cx="420120" cy="383760"/>
+            <a:ext cx="419760" cy="383400"/>
           </a:xfrm>
           <a:prstGeom prst="rect">
             <a:avLst/>
@@ -28634,7 +29471,7 @@
         <p:spPr>
           <a:xfrm>
             <a:off x="2011680" y="2423160"/>
-            <a:ext cx="9417960" cy="420120"/>
+            <a:ext cx="9417600" cy="419760"/>
           </a:xfrm>
           <a:prstGeom prst="rect">
             <a:avLst/>
@@ -28695,7 +29532,7 @@
         <p:spPr>
           <a:xfrm>
             <a:off x="822960" y="3303360"/>
-            <a:ext cx="420120" cy="420120"/>
+            <a:ext cx="419760" cy="419760"/>
           </a:xfrm>
           <a:prstGeom prst="ellipse">
             <a:avLst/>
@@ -28742,7 +29579,7 @@
         <p:spPr>
           <a:xfrm>
             <a:off x="885960" y="3366360"/>
-            <a:ext cx="294120" cy="294120"/>
+            <a:ext cx="293760" cy="293760"/>
           </a:xfrm>
           <a:prstGeom prst="rect">
             <a:avLst/>
@@ -28762,7 +29599,7 @@
         <p:spPr>
           <a:xfrm>
             <a:off x="1417320" y="3321720"/>
-            <a:ext cx="420120" cy="383760"/>
+            <a:ext cx="419760" cy="383400"/>
           </a:xfrm>
           <a:prstGeom prst="roundRect">
             <a:avLst>
@@ -28810,7 +29647,7 @@
         <p:spPr>
           <a:xfrm>
             <a:off x="1417320" y="3321720"/>
-            <a:ext cx="420120" cy="383760"/>
+            <a:ext cx="419760" cy="383400"/>
           </a:xfrm>
           <a:prstGeom prst="rect">
             <a:avLst/>
@@ -28871,7 +29708,7 @@
         <p:spPr>
           <a:xfrm>
             <a:off x="2011680" y="3303360"/>
-            <a:ext cx="9417960" cy="420120"/>
+            <a:ext cx="9417600" cy="419760"/>
           </a:xfrm>
           <a:prstGeom prst="rect">
             <a:avLst/>
@@ -28932,7 +29769,7 @@
         <p:spPr>
           <a:xfrm>
             <a:off x="822960" y="4183560"/>
-            <a:ext cx="420120" cy="420120"/>
+            <a:ext cx="419760" cy="419760"/>
           </a:xfrm>
           <a:prstGeom prst="ellipse">
             <a:avLst/>
@@ -28979,7 +29816,7 @@
         <p:spPr>
           <a:xfrm>
             <a:off x="885960" y="4246560"/>
-            <a:ext cx="294120" cy="294120"/>
+            <a:ext cx="293760" cy="293760"/>
           </a:xfrm>
           <a:prstGeom prst="rect">
             <a:avLst/>
@@ -28999,7 +29836,7 @@
         <p:spPr>
           <a:xfrm>
             <a:off x="1417320" y="4201560"/>
-            <a:ext cx="420120" cy="383760"/>
+            <a:ext cx="419760" cy="383400"/>
           </a:xfrm>
           <a:prstGeom prst="roundRect">
             <a:avLst>
@@ -29047,7 +29884,7 @@
         <p:spPr>
           <a:xfrm>
             <a:off x="1417320" y="4201560"/>
-            <a:ext cx="420120" cy="383760"/>
+            <a:ext cx="419760" cy="383400"/>
           </a:xfrm>
           <a:prstGeom prst="rect">
             <a:avLst/>
@@ -29108,7 +29945,7 @@
         <p:spPr>
           <a:xfrm>
             <a:off x="2011680" y="4183560"/>
-            <a:ext cx="9417960" cy="420120"/>
+            <a:ext cx="9417600" cy="419760"/>
           </a:xfrm>
           <a:prstGeom prst="rect">
             <a:avLst/>
@@ -29169,7 +30006,7 @@
         <p:spPr>
           <a:xfrm>
             <a:off x="822960" y="5063400"/>
-            <a:ext cx="420120" cy="420120"/>
+            <a:ext cx="419760" cy="419760"/>
           </a:xfrm>
           <a:prstGeom prst="ellipse">
             <a:avLst/>
@@ -29216,7 +30053,7 @@
         <p:spPr>
           <a:xfrm>
             <a:off x="885960" y="5126760"/>
-            <a:ext cx="294120" cy="294120"/>
+            <a:ext cx="293760" cy="293760"/>
           </a:xfrm>
           <a:prstGeom prst="rect">
             <a:avLst/>
@@ -29236,7 +30073,7 @@
         <p:spPr>
           <a:xfrm>
             <a:off x="1417320" y="5081760"/>
-            <a:ext cx="420120" cy="383760"/>
+            <a:ext cx="419760" cy="383400"/>
           </a:xfrm>
           <a:prstGeom prst="roundRect">
             <a:avLst>
@@ -29284,7 +30121,7 @@
         <p:spPr>
           <a:xfrm>
             <a:off x="1417320" y="5081760"/>
-            <a:ext cx="420120" cy="383760"/>
+            <a:ext cx="419760" cy="383400"/>
           </a:xfrm>
           <a:prstGeom prst="rect">
             <a:avLst/>
@@ -29345,7 +30182,7 @@
         <p:spPr>
           <a:xfrm>
             <a:off x="2011680" y="5063400"/>
-            <a:ext cx="9417960" cy="420120"/>
+            <a:ext cx="9417600" cy="419760"/>
           </a:xfrm>
           <a:prstGeom prst="rect">
             <a:avLst/>
@@ -29406,7 +30243,7 @@
         <p:spPr>
           <a:xfrm>
             <a:off x="457200" y="6446520"/>
-            <a:ext cx="6400440" cy="273960"/>
+            <a:ext cx="6400080" cy="273600"/>
           </a:xfrm>
           <a:prstGeom prst="rect">
             <a:avLst/>
@@ -29467,7 +30304,7 @@
         <p:spPr>
           <a:xfrm>
             <a:off x="11521440" y="6446520"/>
-            <a:ext cx="456840" cy="273960"/>
+            <a:ext cx="456480" cy="273600"/>
           </a:xfrm>
           <a:prstGeom prst="rect">
             <a:avLst/>
@@ -29565,7 +30402,7 @@
         <p:spPr>
           <a:xfrm>
             <a:off x="-1828800" y="5029200"/>
-            <a:ext cx="3657240" cy="3657240"/>
+            <a:ext cx="3656880" cy="3656880"/>
           </a:xfrm>
           <a:prstGeom prst="ellipse">
             <a:avLst/>
@@ -29608,7 +30445,7 @@
         <p:spPr>
           <a:xfrm>
             <a:off x="457200" y="457200"/>
-            <a:ext cx="639720" cy="639720"/>
+            <a:ext cx="639360" cy="639360"/>
           </a:xfrm>
           <a:prstGeom prst="ellipse">
             <a:avLst/>
@@ -29655,7 +30492,7 @@
         <p:spPr>
           <a:xfrm>
             <a:off x="553320" y="553320"/>
-            <a:ext cx="447840" cy="447840"/>
+            <a:ext cx="447480" cy="447480"/>
           </a:xfrm>
           <a:prstGeom prst="rect">
             <a:avLst/>
@@ -29675,7 +30512,7 @@
         <p:spPr>
           <a:xfrm>
             <a:off x="1280160" y="457200"/>
-            <a:ext cx="10423800" cy="639720"/>
+            <a:ext cx="10423440" cy="639360"/>
           </a:xfrm>
           <a:prstGeom prst="rect">
             <a:avLst/>
@@ -29736,7 +30573,7 @@
         <p:spPr>
           <a:xfrm>
             <a:off x="457200" y="1600200"/>
-            <a:ext cx="11274120" cy="4480200"/>
+            <a:ext cx="11273760" cy="4479840"/>
           </a:xfrm>
           <a:prstGeom prst="roundRect">
             <a:avLst>
@@ -29781,7 +30618,7 @@
         <p:spPr>
           <a:xfrm>
             <a:off x="822960" y="1828800"/>
-            <a:ext cx="10515240" cy="456840"/>
+            <a:ext cx="10514880" cy="456480"/>
           </a:xfrm>
           <a:prstGeom prst="rect">
             <a:avLst/>
@@ -29842,7 +30679,7 @@
         <p:spPr>
           <a:xfrm>
             <a:off x="822960" y="2423160"/>
-            <a:ext cx="420120" cy="420120"/>
+            <a:ext cx="419760" cy="419760"/>
           </a:xfrm>
           <a:prstGeom prst="ellipse">
             <a:avLst/>
@@ -29889,7 +30726,7 @@
         <p:spPr>
           <a:xfrm>
             <a:off x="885960" y="2486160"/>
-            <a:ext cx="294120" cy="294120"/>
+            <a:ext cx="293760" cy="293760"/>
           </a:xfrm>
           <a:prstGeom prst="rect">
             <a:avLst/>
@@ -29909,7 +30746,7 @@
         <p:spPr>
           <a:xfrm>
             <a:off x="1417320" y="2441520"/>
-            <a:ext cx="420120" cy="383760"/>
+            <a:ext cx="419760" cy="383400"/>
           </a:xfrm>
           <a:prstGeom prst="roundRect">
             <a:avLst>
@@ -29957,7 +30794,7 @@
         <p:spPr>
           <a:xfrm>
             <a:off x="1417320" y="2441520"/>
-            <a:ext cx="420120" cy="383760"/>
+            <a:ext cx="419760" cy="383400"/>
           </a:xfrm>
           <a:prstGeom prst="rect">
             <a:avLst/>
@@ -30018,7 +30855,7 @@
         <p:spPr>
           <a:xfrm>
             <a:off x="2011680" y="2423160"/>
-            <a:ext cx="9417960" cy="420120"/>
+            <a:ext cx="9417600" cy="419760"/>
           </a:xfrm>
           <a:prstGeom prst="rect">
             <a:avLst/>
@@ -30079,7 +30916,7 @@
         <p:spPr>
           <a:xfrm>
             <a:off x="822960" y="3596760"/>
-            <a:ext cx="420120" cy="420120"/>
+            <a:ext cx="419760" cy="419760"/>
           </a:xfrm>
           <a:prstGeom prst="ellipse">
             <a:avLst/>
@@ -30126,7 +30963,7 @@
         <p:spPr>
           <a:xfrm>
             <a:off x="885960" y="3659760"/>
-            <a:ext cx="294120" cy="294120"/>
+            <a:ext cx="293760" cy="293760"/>
           </a:xfrm>
           <a:prstGeom prst="rect">
             <a:avLst/>
@@ -30146,7 +30983,7 @@
         <p:spPr>
           <a:xfrm>
             <a:off x="1417320" y="3614760"/>
-            <a:ext cx="420120" cy="383760"/>
+            <a:ext cx="419760" cy="383400"/>
           </a:xfrm>
           <a:prstGeom prst="roundRect">
             <a:avLst>
@@ -30194,7 +31031,7 @@
         <p:spPr>
           <a:xfrm>
             <a:off x="1417320" y="3614760"/>
-            <a:ext cx="420120" cy="383760"/>
+            <a:ext cx="419760" cy="383400"/>
           </a:xfrm>
           <a:prstGeom prst="rect">
             <a:avLst/>
@@ -30255,7 +31092,7 @@
         <p:spPr>
           <a:xfrm>
             <a:off x="2011680" y="3596760"/>
-            <a:ext cx="9417960" cy="420120"/>
+            <a:ext cx="9417600" cy="419760"/>
           </a:xfrm>
           <a:prstGeom prst="rect">
             <a:avLst/>
@@ -30316,7 +31153,7 @@
         <p:spPr>
           <a:xfrm>
             <a:off x="822960" y="4770000"/>
-            <a:ext cx="420120" cy="420120"/>
+            <a:ext cx="419760" cy="419760"/>
           </a:xfrm>
           <a:prstGeom prst="ellipse">
             <a:avLst/>
@@ -30363,7 +31200,7 @@
         <p:spPr>
           <a:xfrm>
             <a:off x="885960" y="4833360"/>
-            <a:ext cx="294120" cy="294120"/>
+            <a:ext cx="293760" cy="293760"/>
           </a:xfrm>
           <a:prstGeom prst="rect">
             <a:avLst/>
@@ -30383,7 +31220,7 @@
         <p:spPr>
           <a:xfrm>
             <a:off x="1417320" y="4788360"/>
-            <a:ext cx="420120" cy="383760"/>
+            <a:ext cx="419760" cy="383400"/>
           </a:xfrm>
           <a:prstGeom prst="roundRect">
             <a:avLst>
@@ -30431,7 +31268,7 @@
         <p:spPr>
           <a:xfrm>
             <a:off x="1417320" y="4788360"/>
-            <a:ext cx="420120" cy="383760"/>
+            <a:ext cx="419760" cy="383400"/>
           </a:xfrm>
           <a:prstGeom prst="rect">
             <a:avLst/>
@@ -30492,7 +31329,7 @@
         <p:spPr>
           <a:xfrm>
             <a:off x="2011680" y="4770000"/>
-            <a:ext cx="9417960" cy="420120"/>
+            <a:ext cx="9417600" cy="419760"/>
           </a:xfrm>
           <a:prstGeom prst="rect">
             <a:avLst/>
@@ -30553,7 +31390,7 @@
         <p:spPr>
           <a:xfrm>
             <a:off x="457200" y="6446520"/>
-            <a:ext cx="6400440" cy="273960"/>
+            <a:ext cx="6400080" cy="273600"/>
           </a:xfrm>
           <a:prstGeom prst="rect">
             <a:avLst/>
@@ -30614,7 +31451,7 @@
         <p:spPr>
           <a:xfrm>
             <a:off x="11521440" y="6446520"/>
-            <a:ext cx="456840" cy="273960"/>
+            <a:ext cx="456480" cy="273600"/>
           </a:xfrm>
           <a:prstGeom prst="rect">
             <a:avLst/>
@@ -30712,7 +31549,7 @@
         <p:spPr>
           <a:xfrm>
             <a:off x="-1828800" y="4114800"/>
-            <a:ext cx="5486040" cy="5486040"/>
+            <a:ext cx="5485680" cy="5485680"/>
           </a:xfrm>
           <a:prstGeom prst="ellipse">
             <a:avLst/>
@@ -30755,7 +31592,7 @@
         <p:spPr>
           <a:xfrm>
             <a:off x="9601200" y="-2286000"/>
-            <a:ext cx="5486040" cy="5486040"/>
+            <a:ext cx="5485680" cy="5485680"/>
           </a:xfrm>
           <a:prstGeom prst="ellipse">
             <a:avLst/>
@@ -30798,7 +31635,7 @@
         <p:spPr>
           <a:xfrm>
             <a:off x="5591520" y="731520"/>
-            <a:ext cx="1005480" cy="1005480"/>
+            <a:ext cx="1005120" cy="1005120"/>
           </a:xfrm>
           <a:prstGeom prst="ellipse">
             <a:avLst/>
@@ -30845,7 +31682,7 @@
         <p:spPr>
           <a:xfrm>
             <a:off x="5742360" y="882360"/>
-            <a:ext cx="703800" cy="703800"/>
+            <a:ext cx="703440" cy="703440"/>
           </a:xfrm>
           <a:prstGeom prst="rect">
             <a:avLst/>
@@ -30865,7 +31702,7 @@
         <p:spPr>
           <a:xfrm>
             <a:off x="914400" y="1965960"/>
-            <a:ext cx="10359720" cy="365400"/>
+            <a:ext cx="10359360" cy="365040"/>
           </a:xfrm>
           <a:prstGeom prst="rect">
             <a:avLst/>
@@ -30926,7 +31763,7 @@
         <p:spPr>
           <a:xfrm>
             <a:off x="914400" y="2377440"/>
-            <a:ext cx="10359720" cy="2011320"/>
+            <a:ext cx="10359360" cy="2010960"/>
           </a:xfrm>
           <a:prstGeom prst="rect">
             <a:avLst/>
@@ -30987,7 +31824,7 @@
         <p:spPr>
           <a:xfrm>
             <a:off x="1463040" y="4572000"/>
-            <a:ext cx="9262440" cy="1096920"/>
+            <a:ext cx="9262080" cy="1096560"/>
           </a:xfrm>
           <a:prstGeom prst="rect">
             <a:avLst/>
@@ -31048,7 +31885,7 @@
         <p:spPr>
           <a:xfrm>
             <a:off x="11521440" y="6446520"/>
-            <a:ext cx="456840" cy="273960"/>
+            <a:ext cx="456480" cy="273600"/>
           </a:xfrm>
           <a:prstGeom prst="rect">
             <a:avLst/>
@@ -31146,7 +31983,7 @@
         <p:spPr>
           <a:xfrm>
             <a:off x="10515600" y="5669280"/>
-            <a:ext cx="3200040" cy="3200040"/>
+            <a:ext cx="3199680" cy="3199680"/>
           </a:xfrm>
           <a:prstGeom prst="ellipse">
             <a:avLst/>
@@ -31189,7 +32026,7 @@
         <p:spPr>
           <a:xfrm>
             <a:off x="457200" y="457200"/>
-            <a:ext cx="639720" cy="639720"/>
+            <a:ext cx="639360" cy="639360"/>
           </a:xfrm>
           <a:prstGeom prst="ellipse">
             <a:avLst/>
@@ -31236,7 +32073,7 @@
         <p:spPr>
           <a:xfrm>
             <a:off x="553320" y="553320"/>
-            <a:ext cx="447840" cy="447840"/>
+            <a:ext cx="447480" cy="447480"/>
           </a:xfrm>
           <a:prstGeom prst="rect">
             <a:avLst/>
@@ -31256,7 +32093,7 @@
         <p:spPr>
           <a:xfrm>
             <a:off x="1280160" y="457200"/>
-            <a:ext cx="10423800" cy="639720"/>
+            <a:ext cx="10423440" cy="639360"/>
           </a:xfrm>
           <a:prstGeom prst="rect">
             <a:avLst/>
@@ -31317,7 +32154,7 @@
         <p:spPr>
           <a:xfrm>
             <a:off x="457200" y="1554480"/>
-            <a:ext cx="3657240" cy="4663080"/>
+            <a:ext cx="3656880" cy="4662720"/>
           </a:xfrm>
           <a:prstGeom prst="roundRect">
             <a:avLst>
@@ -31362,7 +32199,7 @@
         <p:spPr>
           <a:xfrm>
             <a:off x="1508760" y="2194560"/>
-            <a:ext cx="1554120" cy="1554120"/>
+            <a:ext cx="1553760" cy="1553760"/>
           </a:xfrm>
           <a:prstGeom prst="ellipse">
             <a:avLst/>
@@ -31409,7 +32246,7 @@
         <p:spPr>
           <a:xfrm>
             <a:off x="1742040" y="2427840"/>
-            <a:ext cx="1087920" cy="1087920"/>
+            <a:ext cx="1087560" cy="1087560"/>
           </a:xfrm>
           <a:prstGeom prst="rect">
             <a:avLst/>
@@ -31429,7 +32266,7 @@
         <p:spPr>
           <a:xfrm>
             <a:off x="640080" y="3977640"/>
-            <a:ext cx="3291480" cy="1737000"/>
+            <a:ext cx="3291120" cy="1736640"/>
           </a:xfrm>
           <a:prstGeom prst="rect">
             <a:avLst/>
@@ -31520,7 +32357,7 @@
         <p:spPr>
           <a:xfrm>
             <a:off x="4572000" y="1737360"/>
-            <a:ext cx="7131960" cy="4114440"/>
+            <a:ext cx="7131600" cy="4114080"/>
           </a:xfrm>
           <a:prstGeom prst="rect">
             <a:avLst/>
@@ -31691,7 +32528,7 @@
         <p:spPr>
           <a:xfrm>
             <a:off x="457200" y="6446520"/>
-            <a:ext cx="6400440" cy="273960"/>
+            <a:ext cx="6400080" cy="273600"/>
           </a:xfrm>
           <a:prstGeom prst="rect">
             <a:avLst/>
@@ -31752,7 +32589,7 @@
         <p:spPr>
           <a:xfrm>
             <a:off x="11521440" y="6446520"/>
-            <a:ext cx="456840" cy="273960"/>
+            <a:ext cx="456480" cy="273600"/>
           </a:xfrm>
           <a:prstGeom prst="rect">
             <a:avLst/>
@@ -31850,7 +32687,7 @@
         <p:spPr>
           <a:xfrm>
             <a:off x="-1828800" y="4114800"/>
-            <a:ext cx="5486040" cy="5486040"/>
+            <a:ext cx="5485680" cy="5485680"/>
           </a:xfrm>
           <a:prstGeom prst="ellipse">
             <a:avLst/>
@@ -31893,7 +32730,7 @@
         <p:spPr>
           <a:xfrm>
             <a:off x="9601200" y="-2286000"/>
-            <a:ext cx="5486040" cy="5486040"/>
+            <a:ext cx="5485680" cy="5485680"/>
           </a:xfrm>
           <a:prstGeom prst="ellipse">
             <a:avLst/>
@@ -31936,7 +32773,7 @@
         <p:spPr>
           <a:xfrm>
             <a:off x="5591520" y="731520"/>
-            <a:ext cx="1005480" cy="1005480"/>
+            <a:ext cx="1005120" cy="1005120"/>
           </a:xfrm>
           <a:prstGeom prst="ellipse">
             <a:avLst/>
@@ -31983,7 +32820,7 @@
         <p:spPr>
           <a:xfrm>
             <a:off x="5742360" y="882360"/>
-            <a:ext cx="703800" cy="703800"/>
+            <a:ext cx="703440" cy="703440"/>
           </a:xfrm>
           <a:prstGeom prst="rect">
             <a:avLst/>
@@ -32003,7 +32840,7 @@
         <p:spPr>
           <a:xfrm>
             <a:off x="914400" y="1965960"/>
-            <a:ext cx="10359720" cy="365400"/>
+            <a:ext cx="10359360" cy="365040"/>
           </a:xfrm>
           <a:prstGeom prst="rect">
             <a:avLst/>
@@ -32064,7 +32901,7 @@
         <p:spPr>
           <a:xfrm>
             <a:off x="914400" y="2377440"/>
-            <a:ext cx="10359720" cy="2011320"/>
+            <a:ext cx="10359360" cy="2010960"/>
           </a:xfrm>
           <a:prstGeom prst="rect">
             <a:avLst/>
@@ -32155,7 +32992,7 @@
         <p:spPr>
           <a:xfrm>
             <a:off x="1463040" y="4572000"/>
-            <a:ext cx="9262440" cy="1096920"/>
+            <a:ext cx="9262080" cy="1096560"/>
           </a:xfrm>
           <a:prstGeom prst="rect">
             <a:avLst/>
@@ -32216,7 +33053,7 @@
         <p:spPr>
           <a:xfrm>
             <a:off x="11521440" y="6446520"/>
-            <a:ext cx="456840" cy="273960"/>
+            <a:ext cx="456480" cy="273600"/>
           </a:xfrm>
           <a:prstGeom prst="rect">
             <a:avLst/>
@@ -32314,7 +33151,7 @@
         <p:spPr>
           <a:xfrm>
             <a:off x="10515600" y="5669280"/>
-            <a:ext cx="3200040" cy="3200040"/>
+            <a:ext cx="3199680" cy="3199680"/>
           </a:xfrm>
           <a:prstGeom prst="ellipse">
             <a:avLst/>
@@ -32357,7 +33194,7 @@
         <p:spPr>
           <a:xfrm>
             <a:off x="457200" y="457200"/>
-            <a:ext cx="639720" cy="639720"/>
+            <a:ext cx="639360" cy="639360"/>
           </a:xfrm>
           <a:prstGeom prst="ellipse">
             <a:avLst/>
@@ -32404,7 +33241,7 @@
         <p:spPr>
           <a:xfrm>
             <a:off x="553320" y="553320"/>
-            <a:ext cx="447840" cy="447840"/>
+            <a:ext cx="447480" cy="447480"/>
           </a:xfrm>
           <a:prstGeom prst="rect">
             <a:avLst/>
@@ -32424,7 +33261,7 @@
         <p:spPr>
           <a:xfrm>
             <a:off x="1280160" y="457200"/>
-            <a:ext cx="10423800" cy="639720"/>
+            <a:ext cx="10423440" cy="639360"/>
           </a:xfrm>
           <a:prstGeom prst="rect">
             <a:avLst/>
@@ -32485,7 +33322,7 @@
         <p:spPr>
           <a:xfrm>
             <a:off x="457200" y="1554480"/>
-            <a:ext cx="3657240" cy="4663080"/>
+            <a:ext cx="3656880" cy="4662720"/>
           </a:xfrm>
           <a:prstGeom prst="roundRect">
             <a:avLst>
@@ -32530,7 +33367,7 @@
         <p:spPr>
           <a:xfrm>
             <a:off x="1508760" y="2194560"/>
-            <a:ext cx="1554120" cy="1554120"/>
+            <a:ext cx="1553760" cy="1553760"/>
           </a:xfrm>
           <a:prstGeom prst="ellipse">
             <a:avLst/>
@@ -32577,7 +33414,7 @@
         <p:spPr>
           <a:xfrm>
             <a:off x="1742040" y="2427840"/>
-            <a:ext cx="1087920" cy="1087920"/>
+            <a:ext cx="1087560" cy="1087560"/>
           </a:xfrm>
           <a:prstGeom prst="rect">
             <a:avLst/>
@@ -32597,7 +33434,7 @@
         <p:spPr>
           <a:xfrm>
             <a:off x="640080" y="3977640"/>
-            <a:ext cx="3291480" cy="1737000"/>
+            <a:ext cx="3291120" cy="1736640"/>
           </a:xfrm>
           <a:prstGeom prst="rect">
             <a:avLst/>
@@ -32718,7 +33555,7 @@
         <p:spPr>
           <a:xfrm>
             <a:off x="4572000" y="1737360"/>
-            <a:ext cx="7131960" cy="4114440"/>
+            <a:ext cx="7131600" cy="4114080"/>
           </a:xfrm>
           <a:prstGeom prst="rect">
             <a:avLst/>
@@ -32738,6 +33575,44 @@
           <a:bodyPr lIns="0" tIns="0" rIns="0" bIns="0" anchor="t">
             <a:noAutofit/>
           </a:bodyPr>
+          <a:p>
+            <a:pPr marL="343080" indent="-343080" defTabSz="914400">
+              <a:lnSpc>
+                <a:spcPct val="100000"/>
+              </a:lnSpc>
+              <a:spcBef>
+                <a:spcPts val="1191"/>
+              </a:spcBef>
+              <a:spcAft>
+                <a:spcPts val="992"/>
+              </a:spcAft>
+              <a:buClr>
+                <a:srgbClr val="1B2420"/>
+              </a:buClr>
+              <a:buFont typeface="Symbol" charset="2"/>
+              <a:buChar char=""/>
+            </a:pPr>
+            <a:r>
+              <a:rPr lang="en-US" sz="1600" b="0" u="none" strike="noStrike">
+                <a:solidFill>
+                  <a:srgbClr val="1B2420"/>
+                </a:solidFill>
+                <a:effectLst/>
+                <a:uFillTx/>
+                <a:latin typeface="Calibri"/>
+                <a:ea typeface="Calibri"/>
+              </a:rPr>
+              <a:t>A loop is an iterative control structure that repeatedly executes a block of code as long as a specified condition is satisfied or for a specified number of iterations.</a:t>
+            </a:r>
+            <a:endParaRPr lang="en-US" sz="1600" b="0" u="none" strike="noStrike">
+              <a:solidFill>
+                <a:srgbClr val="000000"/>
+              </a:solidFill>
+              <a:effectLst/>
+              <a:uFillTx/>
+              <a:latin typeface="Arial"/>
+            </a:endParaRPr>
+          </a:p>
           <a:p>
             <a:pPr marL="343080" indent="-343080" defTabSz="914400">
               <a:lnSpc>
@@ -32889,7 +33764,7 @@
         <p:spPr>
           <a:xfrm>
             <a:off x="457200" y="6446520"/>
-            <a:ext cx="6400440" cy="273960"/>
+            <a:ext cx="6400080" cy="273600"/>
           </a:xfrm>
           <a:prstGeom prst="rect">
             <a:avLst/>
@@ -32950,7 +33825,7 @@
         <p:spPr>
           <a:xfrm>
             <a:off x="11521440" y="6446520"/>
-            <a:ext cx="456840" cy="273960"/>
+            <a:ext cx="456480" cy="273600"/>
           </a:xfrm>
           <a:prstGeom prst="rect">
             <a:avLst/>
@@ -33048,7 +33923,7 @@
         <p:spPr>
           <a:xfrm>
             <a:off x="-1828800" y="5120640"/>
-            <a:ext cx="3657240" cy="3657240"/>
+            <a:ext cx="3656880" cy="3656880"/>
           </a:xfrm>
           <a:prstGeom prst="ellipse">
             <a:avLst/>
@@ -33091,7 +33966,7 @@
         <p:spPr>
           <a:xfrm>
             <a:off x="457200" y="457200"/>
-            <a:ext cx="639720" cy="639720"/>
+            <a:ext cx="639360" cy="639360"/>
           </a:xfrm>
           <a:prstGeom prst="ellipse">
             <a:avLst/>
@@ -33138,7 +34013,7 @@
         <p:spPr>
           <a:xfrm>
             <a:off x="553320" y="553320"/>
-            <a:ext cx="447840" cy="447840"/>
+            <a:ext cx="447480" cy="447480"/>
           </a:xfrm>
           <a:prstGeom prst="rect">
             <a:avLst/>
@@ -33158,7 +34033,7 @@
         <p:spPr>
           <a:xfrm>
             <a:off x="1280160" y="457200"/>
-            <a:ext cx="10423800" cy="639720"/>
+            <a:ext cx="10423440" cy="639360"/>
           </a:xfrm>
           <a:prstGeom prst="rect">
             <a:avLst/>
@@ -33219,7 +34094,7 @@
         <p:spPr>
           <a:xfrm>
             <a:off x="548640" y="1828800"/>
-            <a:ext cx="4754520" cy="4023000"/>
+            <a:ext cx="4754160" cy="4022640"/>
           </a:xfrm>
           <a:prstGeom prst="rect">
             <a:avLst/>
@@ -33355,7 +34230,7 @@
         <p:spPr>
           <a:xfrm>
             <a:off x="5486400" y="1691640"/>
-            <a:ext cx="6217560" cy="4343040"/>
+            <a:ext cx="6217200" cy="4342680"/>
           </a:xfrm>
           <a:prstGeom prst="roundRect">
             <a:avLst>
@@ -33400,7 +34275,7 @@
         <p:spPr>
           <a:xfrm>
             <a:off x="5806440" y="1965960"/>
-            <a:ext cx="5577480" cy="3794400"/>
+            <a:ext cx="5577120" cy="3794040"/>
           </a:xfrm>
           <a:prstGeom prst="rect">
             <a:avLst/>
@@ -33447,7 +34322,7 @@
               </a:solidFill>
               <a:effectLst/>
               <a:uFillTx/>
-              <a:latin typeface="Cantarell"/>
+              <a:latin typeface="Arial"/>
             </a:endParaRPr>
           </a:p>
           <a:p>
@@ -33477,7 +34352,7 @@
               </a:solidFill>
               <a:effectLst/>
               <a:uFillTx/>
-              <a:latin typeface="Cantarell"/>
+              <a:latin typeface="Arial"/>
             </a:endParaRPr>
           </a:p>
           <a:p>
@@ -33507,7 +34382,7 @@
               </a:solidFill>
               <a:effectLst/>
               <a:uFillTx/>
-              <a:latin typeface="Cantarell"/>
+              <a:latin typeface="Arial"/>
             </a:endParaRPr>
           </a:p>
           <a:p>
@@ -33537,7 +34412,7 @@
               </a:solidFill>
               <a:effectLst/>
               <a:uFillTx/>
-              <a:latin typeface="Cantarell"/>
+              <a:latin typeface="Arial"/>
             </a:endParaRPr>
           </a:p>
           <a:p>
@@ -33567,7 +34442,7 @@
               </a:solidFill>
               <a:effectLst/>
               <a:uFillTx/>
-              <a:latin typeface="Cantarell"/>
+              <a:latin typeface="Arial"/>
             </a:endParaRPr>
           </a:p>
           <a:p>
@@ -33597,7 +34472,7 @@
               </a:solidFill>
               <a:effectLst/>
               <a:uFillTx/>
-              <a:latin typeface="Cantarell"/>
+              <a:latin typeface="Arial"/>
             </a:endParaRPr>
           </a:p>
           <a:p>
@@ -33627,7 +34502,7 @@
               </a:solidFill>
               <a:effectLst/>
               <a:uFillTx/>
-              <a:latin typeface="Cantarell"/>
+              <a:latin typeface="Arial"/>
             </a:endParaRPr>
           </a:p>
           <a:p>
@@ -33657,7 +34532,7 @@
               </a:solidFill>
               <a:effectLst/>
               <a:uFillTx/>
-              <a:latin typeface="Cantarell"/>
+              <a:latin typeface="Arial"/>
             </a:endParaRPr>
           </a:p>
         </p:txBody>
@@ -33671,7 +34546,7 @@
         <p:spPr>
           <a:xfrm>
             <a:off x="457200" y="6446520"/>
-            <a:ext cx="6400440" cy="273960"/>
+            <a:ext cx="6400080" cy="273600"/>
           </a:xfrm>
           <a:prstGeom prst="rect">
             <a:avLst/>
@@ -33732,7 +34607,7 @@
         <p:spPr>
           <a:xfrm>
             <a:off x="11521440" y="6446520"/>
-            <a:ext cx="456840" cy="273960"/>
+            <a:ext cx="456480" cy="273600"/>
           </a:xfrm>
           <a:prstGeom prst="rect">
             <a:avLst/>
@@ -33830,7 +34705,7 @@
         <p:spPr>
           <a:xfrm>
             <a:off x="457200" y="457200"/>
-            <a:ext cx="639720" cy="639720"/>
+            <a:ext cx="639360" cy="639360"/>
           </a:xfrm>
           <a:prstGeom prst="ellipse">
             <a:avLst/>
@@ -33877,7 +34752,7 @@
         <p:spPr>
           <a:xfrm>
             <a:off x="553320" y="553320"/>
-            <a:ext cx="447840" cy="447840"/>
+            <a:ext cx="447480" cy="447480"/>
           </a:xfrm>
           <a:prstGeom prst="rect">
             <a:avLst/>
@@ -33897,7 +34772,7 @@
         <p:spPr>
           <a:xfrm>
             <a:off x="1280160" y="457200"/>
-            <a:ext cx="10423800" cy="639720"/>
+            <a:ext cx="10423440" cy="639360"/>
           </a:xfrm>
           <a:prstGeom prst="rect">
             <a:avLst/>
@@ -33958,7 +34833,7 @@
         <p:spPr>
           <a:xfrm>
             <a:off x="548640" y="1417320"/>
-            <a:ext cx="11091240" cy="502560"/>
+            <a:ext cx="11090880" cy="502200"/>
           </a:xfrm>
           <a:prstGeom prst="roundRect">
             <a:avLst>
@@ -34003,7 +34878,7 @@
         <p:spPr>
           <a:xfrm>
             <a:off x="731520" y="1417320"/>
-            <a:ext cx="10725480" cy="502560"/>
+            <a:ext cx="10725120" cy="502200"/>
           </a:xfrm>
           <a:prstGeom prst="rect">
             <a:avLst/>
@@ -34050,7 +34925,7 @@
               </a:solidFill>
               <a:effectLst/>
               <a:uFillTx/>
-              <a:latin typeface="Cantarell"/>
+              <a:latin typeface="Arial"/>
             </a:endParaRPr>
           </a:p>
         </p:txBody>
@@ -34064,7 +34939,7 @@
         <p:spPr>
           <a:xfrm>
             <a:off x="2743200" y="2743200"/>
-            <a:ext cx="1828440" cy="621360"/>
+            <a:ext cx="1828080" cy="621000"/>
           </a:xfrm>
           <a:prstGeom prst="roundRect">
             <a:avLst>
@@ -34112,7 +34987,7 @@
         <p:spPr>
           <a:xfrm>
             <a:off x="2743200" y="2743200"/>
-            <a:ext cx="1828440" cy="621360"/>
+            <a:ext cx="1828080" cy="621000"/>
           </a:xfrm>
           <a:prstGeom prst="rect">
             <a:avLst/>
@@ -34159,7 +35034,7 @@
               </a:solidFill>
               <a:effectLst/>
               <a:uFillTx/>
-              <a:latin typeface="Cantarell"/>
+              <a:latin typeface="Arial"/>
             </a:endParaRPr>
           </a:p>
         </p:txBody>
@@ -34173,7 +35048,7 @@
         <p:spPr>
           <a:xfrm>
             <a:off x="2743200" y="2450520"/>
-            <a:ext cx="1828440" cy="273960"/>
+            <a:ext cx="1828080" cy="273600"/>
           </a:xfrm>
           <a:prstGeom prst="rect">
             <a:avLst/>
@@ -34234,7 +35109,7 @@
         <p:spPr>
           <a:xfrm>
             <a:off x="4626720" y="2743200"/>
-            <a:ext cx="1828440" cy="621360"/>
+            <a:ext cx="1828080" cy="621000"/>
           </a:xfrm>
           <a:prstGeom prst="roundRect">
             <a:avLst>
@@ -34282,7 +35157,7 @@
         <p:spPr>
           <a:xfrm>
             <a:off x="4626720" y="2743200"/>
-            <a:ext cx="1828440" cy="621360"/>
+            <a:ext cx="1828080" cy="621000"/>
           </a:xfrm>
           <a:prstGeom prst="rect">
             <a:avLst/>
@@ -34329,7 +35204,7 @@
               </a:solidFill>
               <a:effectLst/>
               <a:uFillTx/>
-              <a:latin typeface="Cantarell"/>
+              <a:latin typeface="Arial"/>
             </a:endParaRPr>
           </a:p>
         </p:txBody>
@@ -34343,7 +35218,7 @@
         <p:spPr>
           <a:xfrm>
             <a:off x="6510600" y="2743200"/>
-            <a:ext cx="1828440" cy="621360"/>
+            <a:ext cx="1828080" cy="621000"/>
           </a:xfrm>
           <a:prstGeom prst="roundRect">
             <a:avLst>
@@ -34391,7 +35266,7 @@
         <p:spPr>
           <a:xfrm>
             <a:off x="6510600" y="2743200"/>
-            <a:ext cx="1828440" cy="621360"/>
+            <a:ext cx="1828080" cy="621000"/>
           </a:xfrm>
           <a:prstGeom prst="rect">
             <a:avLst/>
@@ -34438,7 +35313,7 @@
               </a:solidFill>
               <a:effectLst/>
               <a:uFillTx/>
-              <a:latin typeface="Cantarell"/>
+              <a:latin typeface="Arial"/>
             </a:endParaRPr>
           </a:p>
         </p:txBody>
@@ -34452,7 +35327,7 @@
         <p:spPr>
           <a:xfrm>
             <a:off x="548640" y="4206240"/>
-            <a:ext cx="11091240" cy="1462680"/>
+            <a:ext cx="11090880" cy="1462320"/>
           </a:xfrm>
           <a:prstGeom prst="rect">
             <a:avLst/>
@@ -34588,7 +35463,7 @@
         <p:spPr>
           <a:xfrm>
             <a:off x="457200" y="6446520"/>
-            <a:ext cx="6400440" cy="273960"/>
+            <a:ext cx="6400080" cy="273600"/>
           </a:xfrm>
           <a:prstGeom prst="rect">
             <a:avLst/>
@@ -34649,7 +35524,7 @@
         <p:spPr>
           <a:xfrm>
             <a:off x="11521440" y="6446520"/>
-            <a:ext cx="456840" cy="273960"/>
+            <a:ext cx="456480" cy="273600"/>
           </a:xfrm>
           <a:prstGeom prst="rect">
             <a:avLst/>
@@ -34747,7 +35622,7 @@
         <p:spPr>
           <a:xfrm>
             <a:off x="-1828800" y="5120640"/>
-            <a:ext cx="3657240" cy="3657240"/>
+            <a:ext cx="3656880" cy="3656880"/>
           </a:xfrm>
           <a:prstGeom prst="ellipse">
             <a:avLst/>
@@ -34790,7 +35665,7 @@
         <p:spPr>
           <a:xfrm>
             <a:off x="457200" y="457200"/>
-            <a:ext cx="639720" cy="639720"/>
+            <a:ext cx="639360" cy="639360"/>
           </a:xfrm>
           <a:prstGeom prst="ellipse">
             <a:avLst/>
@@ -34837,7 +35712,7 @@
         <p:spPr>
           <a:xfrm>
             <a:off x="553320" y="553320"/>
-            <a:ext cx="447840" cy="447840"/>
+            <a:ext cx="447480" cy="447480"/>
           </a:xfrm>
           <a:prstGeom prst="rect">
             <a:avLst/>
@@ -34857,7 +35732,7 @@
         <p:spPr>
           <a:xfrm>
             <a:off x="1280160" y="457200"/>
-            <a:ext cx="10423800" cy="639720"/>
+            <a:ext cx="10423440" cy="639360"/>
           </a:xfrm>
           <a:prstGeom prst="rect">
             <a:avLst/>
@@ -34918,7 +35793,7 @@
         <p:spPr>
           <a:xfrm>
             <a:off x="548640" y="1828800"/>
-            <a:ext cx="4754520" cy="4023000"/>
+            <a:ext cx="4754160" cy="4022640"/>
           </a:xfrm>
           <a:prstGeom prst="rect">
             <a:avLst/>
@@ -35054,7 +35929,7 @@
         <p:spPr>
           <a:xfrm>
             <a:off x="5486400" y="1691640"/>
-            <a:ext cx="6217560" cy="4343040"/>
+            <a:ext cx="6217200" cy="4342680"/>
           </a:xfrm>
           <a:prstGeom prst="roundRect">
             <a:avLst>
@@ -35099,7 +35974,7 @@
         <p:spPr>
           <a:xfrm>
             <a:off x="5806440" y="1965960"/>
-            <a:ext cx="5577480" cy="3794400"/>
+            <a:ext cx="5577120" cy="3794040"/>
           </a:xfrm>
           <a:prstGeom prst="rect">
             <a:avLst/>
@@ -35146,7 +36021,7 @@
               </a:solidFill>
               <a:effectLst/>
               <a:uFillTx/>
-              <a:latin typeface="Cantarell"/>
+              <a:latin typeface="Arial"/>
             </a:endParaRPr>
           </a:p>
           <a:p>
@@ -35176,7 +36051,7 @@
               </a:solidFill>
               <a:effectLst/>
               <a:uFillTx/>
-              <a:latin typeface="Cantarell"/>
+              <a:latin typeface="Arial"/>
             </a:endParaRPr>
           </a:p>
           <a:p>
@@ -35206,7 +36081,7 @@
               </a:solidFill>
               <a:effectLst/>
               <a:uFillTx/>
-              <a:latin typeface="Cantarell"/>
+              <a:latin typeface="Arial"/>
             </a:endParaRPr>
           </a:p>
           <a:p>
@@ -35236,7 +36111,7 @@
               </a:solidFill>
               <a:effectLst/>
               <a:uFillTx/>
-              <a:latin typeface="Cantarell"/>
+              <a:latin typeface="Arial"/>
             </a:endParaRPr>
           </a:p>
           <a:p>
@@ -35266,7 +36141,7 @@
               </a:solidFill>
               <a:effectLst/>
               <a:uFillTx/>
-              <a:latin typeface="Cantarell"/>
+              <a:latin typeface="Arial"/>
             </a:endParaRPr>
           </a:p>
           <a:p>
@@ -35296,7 +36171,7 @@
               </a:solidFill>
               <a:effectLst/>
               <a:uFillTx/>
-              <a:latin typeface="Cantarell"/>
+              <a:latin typeface="Arial"/>
             </a:endParaRPr>
           </a:p>
           <a:p>
@@ -35326,7 +36201,7 @@
               </a:solidFill>
               <a:effectLst/>
               <a:uFillTx/>
-              <a:latin typeface="Cantarell"/>
+              <a:latin typeface="Arial"/>
             </a:endParaRPr>
           </a:p>
           <a:p>
@@ -35356,7 +36231,7 @@
               </a:solidFill>
               <a:effectLst/>
               <a:uFillTx/>
-              <a:latin typeface="Cantarell"/>
+              <a:latin typeface="Arial"/>
             </a:endParaRPr>
           </a:p>
           <a:p>
@@ -35386,7 +36261,7 @@
               </a:solidFill>
               <a:effectLst/>
               <a:uFillTx/>
-              <a:latin typeface="Cantarell"/>
+              <a:latin typeface="Arial"/>
             </a:endParaRPr>
           </a:p>
         </p:txBody>
@@ -35400,7 +36275,7 @@
         <p:spPr>
           <a:xfrm>
             <a:off x="457200" y="6446520"/>
-            <a:ext cx="6400440" cy="273960"/>
+            <a:ext cx="6400080" cy="273600"/>
           </a:xfrm>
           <a:prstGeom prst="rect">
             <a:avLst/>
@@ -35461,7 +36336,7 @@
         <p:spPr>
           <a:xfrm>
             <a:off x="11521440" y="6446520"/>
-            <a:ext cx="456840" cy="273960"/>
+            <a:ext cx="456480" cy="273600"/>
           </a:xfrm>
           <a:prstGeom prst="rect">
             <a:avLst/>
@@ -35559,7 +36434,7 @@
         <p:spPr>
           <a:xfrm>
             <a:off x="-1828800" y="5120640"/>
-            <a:ext cx="3657240" cy="3657240"/>
+            <a:ext cx="3656880" cy="3656880"/>
           </a:xfrm>
           <a:prstGeom prst="ellipse">
             <a:avLst/>
@@ -35602,7 +36477,7 @@
         <p:spPr>
           <a:xfrm>
             <a:off x="457200" y="457200"/>
-            <a:ext cx="639720" cy="639720"/>
+            <a:ext cx="639360" cy="639360"/>
           </a:xfrm>
           <a:prstGeom prst="ellipse">
             <a:avLst/>
@@ -35649,7 +36524,7 @@
         <p:spPr>
           <a:xfrm>
             <a:off x="553320" y="553320"/>
-            <a:ext cx="447840" cy="447840"/>
+            <a:ext cx="447480" cy="447480"/>
           </a:xfrm>
           <a:prstGeom prst="rect">
             <a:avLst/>
@@ -35669,7 +36544,7 @@
         <p:spPr>
           <a:xfrm>
             <a:off x="1280160" y="457200"/>
-            <a:ext cx="10423800" cy="639720"/>
+            <a:ext cx="10423440" cy="639360"/>
           </a:xfrm>
           <a:prstGeom prst="rect">
             <a:avLst/>
@@ -35730,7 +36605,7 @@
         <p:spPr>
           <a:xfrm>
             <a:off x="548640" y="1828800"/>
-            <a:ext cx="4754520" cy="4023000"/>
+            <a:ext cx="4754160" cy="4022640"/>
           </a:xfrm>
           <a:prstGeom prst="rect">
             <a:avLst/>
@@ -35866,7 +36741,7 @@
         <p:spPr>
           <a:xfrm>
             <a:off x="5486400" y="1691640"/>
-            <a:ext cx="6217560" cy="4343040"/>
+            <a:ext cx="6217200" cy="4342680"/>
           </a:xfrm>
           <a:prstGeom prst="roundRect">
             <a:avLst>
@@ -35911,7 +36786,7 @@
         <p:spPr>
           <a:xfrm>
             <a:off x="5806440" y="1965960"/>
-            <a:ext cx="5577480" cy="3794400"/>
+            <a:ext cx="5577120" cy="3794040"/>
           </a:xfrm>
           <a:prstGeom prst="rect">
             <a:avLst/>
@@ -35958,7 +36833,7 @@
               </a:solidFill>
               <a:effectLst/>
               <a:uFillTx/>
-              <a:latin typeface="Cantarell"/>
+              <a:latin typeface="Arial"/>
             </a:endParaRPr>
           </a:p>
           <a:p>
@@ -35988,7 +36863,7 @@
               </a:solidFill>
               <a:effectLst/>
               <a:uFillTx/>
-              <a:latin typeface="Cantarell"/>
+              <a:latin typeface="Arial"/>
             </a:endParaRPr>
           </a:p>
           <a:p>
@@ -36018,7 +36893,7 @@
               </a:solidFill>
               <a:effectLst/>
               <a:uFillTx/>
-              <a:latin typeface="Cantarell"/>
+              <a:latin typeface="Arial"/>
             </a:endParaRPr>
           </a:p>
           <a:p>
@@ -36048,7 +36923,7 @@
               </a:solidFill>
               <a:effectLst/>
               <a:uFillTx/>
-              <a:latin typeface="Cantarell"/>
+              <a:latin typeface="Arial"/>
             </a:endParaRPr>
           </a:p>
           <a:p>
@@ -36078,7 +36953,7 @@
               </a:solidFill>
               <a:effectLst/>
               <a:uFillTx/>
-              <a:latin typeface="Cantarell"/>
+              <a:latin typeface="Arial"/>
             </a:endParaRPr>
           </a:p>
           <a:p>
@@ -36108,7 +36983,7 @@
               </a:solidFill>
               <a:effectLst/>
               <a:uFillTx/>
-              <a:latin typeface="Cantarell"/>
+              <a:latin typeface="Arial"/>
             </a:endParaRPr>
           </a:p>
           <a:p>
@@ -36138,7 +37013,7 @@
               </a:solidFill>
               <a:effectLst/>
               <a:uFillTx/>
-              <a:latin typeface="Cantarell"/>
+              <a:latin typeface="Arial"/>
             </a:endParaRPr>
           </a:p>
           <a:p>
@@ -36168,7 +37043,7 @@
               </a:solidFill>
               <a:effectLst/>
               <a:uFillTx/>
-              <a:latin typeface="Cantarell"/>
+              <a:latin typeface="Arial"/>
             </a:endParaRPr>
           </a:p>
         </p:txBody>
@@ -36182,7 +37057,7 @@
         <p:spPr>
           <a:xfrm>
             <a:off x="457200" y="6446520"/>
-            <a:ext cx="6400440" cy="273960"/>
+            <a:ext cx="6400080" cy="273600"/>
           </a:xfrm>
           <a:prstGeom prst="rect">
             <a:avLst/>
@@ -36243,7 +37118,7 @@
         <p:spPr>
           <a:xfrm>
             <a:off x="11521440" y="6446520"/>
-            <a:ext cx="456840" cy="273960"/>
+            <a:ext cx="456480" cy="273600"/>
           </a:xfrm>
           <a:prstGeom prst="rect">
             <a:avLst/>
@@ -36341,7 +37216,7 @@
         <p:spPr>
           <a:xfrm>
             <a:off x="-1828800" y="5120640"/>
-            <a:ext cx="3657240" cy="3657240"/>
+            <a:ext cx="3656880" cy="3656880"/>
           </a:xfrm>
           <a:prstGeom prst="ellipse">
             <a:avLst/>
@@ -36384,7 +37259,7 @@
         <p:spPr>
           <a:xfrm>
             <a:off x="457200" y="457200"/>
-            <a:ext cx="639720" cy="639720"/>
+            <a:ext cx="639360" cy="639360"/>
           </a:xfrm>
           <a:prstGeom prst="ellipse">
             <a:avLst/>
@@ -36431,7 +37306,7 @@
         <p:spPr>
           <a:xfrm>
             <a:off x="553320" y="553320"/>
-            <a:ext cx="447840" cy="447840"/>
+            <a:ext cx="447480" cy="447480"/>
           </a:xfrm>
           <a:prstGeom prst="rect">
             <a:avLst/>
@@ -36451,7 +37326,7 @@
         <p:spPr>
           <a:xfrm>
             <a:off x="1280160" y="457200"/>
-            <a:ext cx="10423800" cy="639720"/>
+            <a:ext cx="10423440" cy="639360"/>
           </a:xfrm>
           <a:prstGeom prst="rect">
             <a:avLst/>
@@ -36512,7 +37387,7 @@
         <p:spPr>
           <a:xfrm>
             <a:off x="548640" y="1828800"/>
-            <a:ext cx="4754520" cy="4023000"/>
+            <a:ext cx="4754160" cy="4022640"/>
           </a:xfrm>
           <a:prstGeom prst="rect">
             <a:avLst/>
@@ -36648,7 +37523,7 @@
         <p:spPr>
           <a:xfrm>
             <a:off x="5486400" y="1691640"/>
-            <a:ext cx="6217560" cy="4343040"/>
+            <a:ext cx="6217200" cy="4342680"/>
           </a:xfrm>
           <a:prstGeom prst="roundRect">
             <a:avLst>
@@ -36693,7 +37568,7 @@
         <p:spPr>
           <a:xfrm>
             <a:off x="5806440" y="1965960"/>
-            <a:ext cx="5577480" cy="3794400"/>
+            <a:ext cx="5577120" cy="3794040"/>
           </a:xfrm>
           <a:prstGeom prst="rect">
             <a:avLst/>
@@ -36740,7 +37615,7 @@
               </a:solidFill>
               <a:effectLst/>
               <a:uFillTx/>
-              <a:latin typeface="Cantarell"/>
+              <a:latin typeface="Arial"/>
             </a:endParaRPr>
           </a:p>
           <a:p>
@@ -36770,7 +37645,7 @@
               </a:solidFill>
               <a:effectLst/>
               <a:uFillTx/>
-              <a:latin typeface="Cantarell"/>
+              <a:latin typeface="Arial"/>
             </a:endParaRPr>
           </a:p>
           <a:p>
@@ -36800,7 +37675,7 @@
               </a:solidFill>
               <a:effectLst/>
               <a:uFillTx/>
-              <a:latin typeface="Cantarell"/>
+              <a:latin typeface="Arial"/>
             </a:endParaRPr>
           </a:p>
           <a:p>
@@ -36830,7 +37705,7 @@
               </a:solidFill>
               <a:effectLst/>
               <a:uFillTx/>
-              <a:latin typeface="Cantarell"/>
+              <a:latin typeface="Arial"/>
             </a:endParaRPr>
           </a:p>
           <a:p>
@@ -36860,7 +37735,7 @@
               </a:solidFill>
               <a:effectLst/>
               <a:uFillTx/>
-              <a:latin typeface="Cantarell"/>
+              <a:latin typeface="Arial"/>
             </a:endParaRPr>
           </a:p>
           <a:p>
@@ -36890,7 +37765,7 @@
               </a:solidFill>
               <a:effectLst/>
               <a:uFillTx/>
-              <a:latin typeface="Cantarell"/>
+              <a:latin typeface="Arial"/>
             </a:endParaRPr>
           </a:p>
           <a:p>
@@ -36920,7 +37795,7 @@
               </a:solidFill>
               <a:effectLst/>
               <a:uFillTx/>
-              <a:latin typeface="Cantarell"/>
+              <a:latin typeface="Arial"/>
             </a:endParaRPr>
           </a:p>
           <a:p>
@@ -36950,7 +37825,7 @@
               </a:solidFill>
               <a:effectLst/>
               <a:uFillTx/>
-              <a:latin typeface="Cantarell"/>
+              <a:latin typeface="Arial"/>
             </a:endParaRPr>
           </a:p>
         </p:txBody>
@@ -36964,7 +37839,7 @@
         <p:spPr>
           <a:xfrm>
             <a:off x="457200" y="6446520"/>
-            <a:ext cx="6400440" cy="273960"/>
+            <a:ext cx="6400080" cy="273600"/>
           </a:xfrm>
           <a:prstGeom prst="rect">
             <a:avLst/>
@@ -37025,7 +37900,7 @@
         <p:spPr>
           <a:xfrm>
             <a:off x="11521440" y="6446520"/>
-            <a:ext cx="456840" cy="273960"/>
+            <a:ext cx="456480" cy="273600"/>
           </a:xfrm>
           <a:prstGeom prst="rect">
             <a:avLst/>

--- a/slides/1_python_slides/5_loops.pptx
+++ b/slides/1_python_slides/5_loops.pptx
@@ -400,7 +400,7 @@
             <a:pPr indent="0" algn="r">
               <a:buNone/>
             </a:pPr>
-            <a:fld id="{B6966954-3E87-4912-8EF7-76AB637AB8E3}" type="slidenum">
+            <a:fld id="{78CD5037-CE89-46F3-958E-60D8402BB1EC}" type="slidenum">
               <a:rPr lang="en-US" sz="1400" b="0" u="none" strike="noStrike">
                 <a:solidFill>
                   <a:srgbClr val="000000"/>
@@ -447,7 +447,7 @@
       </p:grpSpPr>
       <p:sp>
         <p:nvSpPr>
-          <p:cNvPr id="472" name="PlaceHolder 1"/>
+          <p:cNvPr id="473" name="PlaceHolder 1"/>
           <p:cNvSpPr>
             <a:spLocks noGrp="1"/>
           </p:cNvSpPr>
@@ -458,19 +458,19 @@
         <p:spPr>
           <a:xfrm>
             <a:off x="685800" y="1143000"/>
-            <a:ext cx="5485680" cy="3085560"/>
-          </a:xfrm>
-          <a:prstGeom prst="rect">
-            <a:avLst/>
-          </a:prstGeom>
-          <a:ln w="0">
-            <a:noFill/>
-          </a:ln>
-        </p:spPr>
-      </p:sp>
-      <p:sp>
-        <p:nvSpPr>
-          <p:cNvPr id="473" name="PlaceHolder 2"/>
+            <a:ext cx="5484960" cy="3084840"/>
+          </a:xfrm>
+          <a:prstGeom prst="rect">
+            <a:avLst/>
+          </a:prstGeom>
+          <a:ln w="0">
+            <a:noFill/>
+          </a:ln>
+        </p:spPr>
+      </p:sp>
+      <p:sp>
+        <p:nvSpPr>
+          <p:cNvPr id="474" name="PlaceHolder 2"/>
           <p:cNvSpPr>
             <a:spLocks noGrp="1"/>
           </p:cNvSpPr>
@@ -481,7 +481,7 @@
         <p:spPr>
           <a:xfrm>
             <a:off x="685800" y="4400640"/>
-            <a:ext cx="5485680" cy="3599640"/>
+            <a:ext cx="5484960" cy="3598920"/>
           </a:xfrm>
           <a:prstGeom prst="rect">
             <a:avLst/>
@@ -514,370 +514,7 @@
                 <a:uFillTx/>
                 <a:latin typeface="Arial"/>
               </a:rPr>
-              <a:t>Titl</a:t>
-            </a:r>
-            <a:r>
-              <a:rPr lang="en-US" sz="2000" b="0" u="none" strike="noStrike">
-                <a:solidFill>
-                  <a:srgbClr val="000000"/>
-                </a:solidFill>
-                <a:effectLst/>
-                <a:uFillTx/>
-                <a:latin typeface="Arial"/>
-              </a:rPr>
-              <a:t>e </a:t>
-            </a:r>
-            <a:r>
-              <a:rPr lang="en-US" sz="2000" b="0" u="none" strike="noStrike">
-                <a:solidFill>
-                  <a:srgbClr val="000000"/>
-                </a:solidFill>
-                <a:effectLst/>
-                <a:uFillTx/>
-                <a:latin typeface="Arial"/>
-              </a:rPr>
-              <a:t>sli</a:t>
-            </a:r>
-            <a:r>
-              <a:rPr lang="en-US" sz="2000" b="0" u="none" strike="noStrike">
-                <a:solidFill>
-                  <a:srgbClr val="000000"/>
-                </a:solidFill>
-                <a:effectLst/>
-                <a:uFillTx/>
-                <a:latin typeface="Arial"/>
-              </a:rPr>
-              <a:t>de. </a:t>
-            </a:r>
-            <a:r>
-              <a:rPr lang="en-US" sz="2000" b="0" u="none" strike="noStrike">
-                <a:solidFill>
-                  <a:srgbClr val="000000"/>
-                </a:solidFill>
-                <a:effectLst/>
-                <a:uFillTx/>
-                <a:latin typeface="Arial"/>
-              </a:rPr>
-              <a:t>Thi</a:t>
-            </a:r>
-            <a:r>
-              <a:rPr lang="en-US" sz="2000" b="0" u="none" strike="noStrike">
-                <a:solidFill>
-                  <a:srgbClr val="000000"/>
-                </a:solidFill>
-                <a:effectLst/>
-                <a:uFillTx/>
-                <a:latin typeface="Arial"/>
-              </a:rPr>
-              <a:t>s </a:t>
-            </a:r>
-            <a:r>
-              <a:rPr lang="en-US" sz="2000" b="0" u="none" strike="noStrike">
-                <a:solidFill>
-                  <a:srgbClr val="000000"/>
-                </a:solidFill>
-                <a:effectLst/>
-                <a:uFillTx/>
-                <a:latin typeface="Arial"/>
-              </a:rPr>
-              <a:t>is </a:t>
-            </a:r>
-            <a:r>
-              <a:rPr lang="en-US" sz="2000" b="0" u="none" strike="noStrike">
-                <a:solidFill>
-                  <a:srgbClr val="000000"/>
-                </a:solidFill>
-                <a:effectLst/>
-                <a:uFillTx/>
-                <a:latin typeface="Arial"/>
-              </a:rPr>
-              <a:t>the </a:t>
-            </a:r>
-            <a:r>
-              <a:rPr lang="en-US" sz="2000" b="0" u="none" strike="noStrike">
-                <a:solidFill>
-                  <a:srgbClr val="000000"/>
-                </a:solidFill>
-                <a:effectLst/>
-                <a:uFillTx/>
-                <a:latin typeface="Arial"/>
-              </a:rPr>
-              <a:t>pa</a:t>
-            </a:r>
-            <a:r>
-              <a:rPr lang="en-US" sz="2000" b="0" u="none" strike="noStrike">
-                <a:solidFill>
-                  <a:srgbClr val="000000"/>
-                </a:solidFill>
-                <a:effectLst/>
-                <a:uFillTx/>
-                <a:latin typeface="Arial"/>
-              </a:rPr>
-              <a:t>yof</a:t>
-            </a:r>
-            <a:r>
-              <a:rPr lang="en-US" sz="2000" b="0" u="none" strike="noStrike">
-                <a:solidFill>
-                  <a:srgbClr val="000000"/>
-                </a:solidFill>
-                <a:effectLst/>
-                <a:uFillTx/>
-                <a:latin typeface="Arial"/>
-              </a:rPr>
-              <a:t>f </a:t>
-            </a:r>
-            <a:r>
-              <a:rPr lang="en-US" sz="2000" b="0" u="none" strike="noStrike">
-                <a:solidFill>
-                  <a:srgbClr val="000000"/>
-                </a:solidFill>
-                <a:effectLst/>
-                <a:uFillTx/>
-                <a:latin typeface="Arial"/>
-              </a:rPr>
-              <a:t>se</a:t>
-            </a:r>
-            <a:r>
-              <a:rPr lang="en-US" sz="2000" b="0" u="none" strike="noStrike">
-                <a:solidFill>
-                  <a:srgbClr val="000000"/>
-                </a:solidFill>
-                <a:effectLst/>
-                <a:uFillTx/>
-                <a:latin typeface="Arial"/>
-              </a:rPr>
-              <a:t>ssi</a:t>
-            </a:r>
-            <a:r>
-              <a:rPr lang="en-US" sz="2000" b="0" u="none" strike="noStrike">
-                <a:solidFill>
-                  <a:srgbClr val="000000"/>
-                </a:solidFill>
-                <a:effectLst/>
-                <a:uFillTx/>
-                <a:latin typeface="Arial"/>
-              </a:rPr>
-              <a:t>on </a:t>
-            </a:r>
-            <a:r>
-              <a:rPr lang="en-US" sz="2000" b="0" u="none" strike="noStrike">
-                <a:solidFill>
-                  <a:srgbClr val="000000"/>
-                </a:solidFill>
-                <a:effectLst/>
-                <a:uFillTx/>
-                <a:latin typeface="Arial"/>
-              </a:rPr>
-              <a:t>— </a:t>
-            </a:r>
-            <a:r>
-              <a:rPr lang="en-US" sz="2000" b="0" u="none" strike="noStrike">
-                <a:solidFill>
-                  <a:srgbClr val="000000"/>
-                </a:solidFill>
-                <a:effectLst/>
-                <a:uFillTx/>
-                <a:latin typeface="Arial"/>
-              </a:rPr>
-              <a:t>list</a:t>
-            </a:r>
-            <a:r>
-              <a:rPr lang="en-US" sz="2000" b="0" u="none" strike="noStrike">
-                <a:solidFill>
-                  <a:srgbClr val="000000"/>
-                </a:solidFill>
-                <a:effectLst/>
-                <a:uFillTx/>
-                <a:latin typeface="Arial"/>
-              </a:rPr>
-              <a:t>s/t</a:t>
-            </a:r>
-            <a:r>
-              <a:rPr lang="en-US" sz="2000" b="0" u="none" strike="noStrike">
-                <a:solidFill>
-                  <a:srgbClr val="000000"/>
-                </a:solidFill>
-                <a:effectLst/>
-                <a:uFillTx/>
-                <a:latin typeface="Arial"/>
-              </a:rPr>
-              <a:t>upl</a:t>
-            </a:r>
-            <a:r>
-              <a:rPr lang="en-US" sz="2000" b="0" u="none" strike="noStrike">
-                <a:solidFill>
-                  <a:srgbClr val="000000"/>
-                </a:solidFill>
-                <a:effectLst/>
-                <a:uFillTx/>
-                <a:latin typeface="Arial"/>
-              </a:rPr>
-              <a:t>es </a:t>
-            </a:r>
-            <a:r>
-              <a:rPr lang="en-US" sz="2000" b="0" u="none" strike="noStrike">
-                <a:solidFill>
-                  <a:srgbClr val="000000"/>
-                </a:solidFill>
-                <a:effectLst/>
-                <a:uFillTx/>
-                <a:latin typeface="Arial"/>
-              </a:rPr>
-              <a:t>fro</a:t>
-            </a:r>
-            <a:r>
-              <a:rPr lang="en-US" sz="2000" b="0" u="none" strike="noStrike">
-                <a:solidFill>
-                  <a:srgbClr val="000000"/>
-                </a:solidFill>
-                <a:effectLst/>
-                <a:uFillTx/>
-                <a:latin typeface="Arial"/>
-              </a:rPr>
-              <a:t>m </a:t>
-            </a:r>
-            <a:r>
-              <a:rPr lang="en-US" sz="2000" b="0" u="none" strike="noStrike">
-                <a:solidFill>
-                  <a:srgbClr val="000000"/>
-                </a:solidFill>
-                <a:effectLst/>
-                <a:uFillTx/>
-                <a:latin typeface="Arial"/>
-              </a:rPr>
-              <a:t>las</a:t>
-            </a:r>
-            <a:r>
-              <a:rPr lang="en-US" sz="2000" b="0" u="none" strike="noStrike">
-                <a:solidFill>
-                  <a:srgbClr val="000000"/>
-                </a:solidFill>
-                <a:effectLst/>
-                <a:uFillTx/>
-                <a:latin typeface="Arial"/>
-              </a:rPr>
-              <a:t>t </a:t>
-            </a:r>
-            <a:r>
-              <a:rPr lang="en-US" sz="2000" b="0" u="none" strike="noStrike">
-                <a:solidFill>
-                  <a:srgbClr val="000000"/>
-                </a:solidFill>
-                <a:effectLst/>
-                <a:uFillTx/>
-                <a:latin typeface="Arial"/>
-              </a:rPr>
-              <a:t>tim</a:t>
-            </a:r>
-            <a:r>
-              <a:rPr lang="en-US" sz="2000" b="0" u="none" strike="noStrike">
-                <a:solidFill>
-                  <a:srgbClr val="000000"/>
-                </a:solidFill>
-                <a:effectLst/>
-                <a:uFillTx/>
-                <a:latin typeface="Arial"/>
-              </a:rPr>
-              <a:t>e </a:t>
-            </a:r>
-            <a:r>
-              <a:rPr lang="en-US" sz="2000" b="0" u="none" strike="noStrike">
-                <a:solidFill>
-                  <a:srgbClr val="000000"/>
-                </a:solidFill>
-                <a:effectLst/>
-                <a:uFillTx/>
-                <a:latin typeface="Arial"/>
-              </a:rPr>
-              <a:t>fin</a:t>
-            </a:r>
-            <a:r>
-              <a:rPr lang="en-US" sz="2000" b="0" u="none" strike="noStrike">
-                <a:solidFill>
-                  <a:srgbClr val="000000"/>
-                </a:solidFill>
-                <a:effectLst/>
-                <a:uFillTx/>
-                <a:latin typeface="Arial"/>
-              </a:rPr>
-              <a:t>all</a:t>
-            </a:r>
-            <a:r>
-              <a:rPr lang="en-US" sz="2000" b="0" u="none" strike="noStrike">
-                <a:solidFill>
-                  <a:srgbClr val="000000"/>
-                </a:solidFill>
-                <a:effectLst/>
-                <a:uFillTx/>
-                <a:latin typeface="Arial"/>
-              </a:rPr>
-              <a:t>y </a:t>
-            </a:r>
-            <a:r>
-              <a:rPr lang="en-US" sz="2000" b="0" u="none" strike="noStrike">
-                <a:solidFill>
-                  <a:srgbClr val="000000"/>
-                </a:solidFill>
-                <a:effectLst/>
-                <a:uFillTx/>
-                <a:latin typeface="Arial"/>
-              </a:rPr>
-              <a:t>get </a:t>
-            </a:r>
-            <a:r>
-              <a:rPr lang="en-US" sz="2000" b="0" u="none" strike="noStrike">
-                <a:solidFill>
-                  <a:srgbClr val="000000"/>
-                </a:solidFill>
-                <a:effectLst/>
-                <a:uFillTx/>
-                <a:latin typeface="Arial"/>
-              </a:rPr>
-              <a:t>us</a:t>
-            </a:r>
-            <a:r>
-              <a:rPr lang="en-US" sz="2000" b="0" u="none" strike="noStrike">
-                <a:solidFill>
-                  <a:srgbClr val="000000"/>
-                </a:solidFill>
-                <a:effectLst/>
-                <a:uFillTx/>
-                <a:latin typeface="Arial"/>
-              </a:rPr>
-              <a:t>ed </a:t>
-            </a:r>
-            <a:r>
-              <a:rPr lang="en-US" sz="2000" b="0" u="none" strike="noStrike">
-                <a:solidFill>
-                  <a:srgbClr val="000000"/>
-                </a:solidFill>
-                <a:effectLst/>
-                <a:uFillTx/>
-                <a:latin typeface="Arial"/>
-              </a:rPr>
-              <a:t>pro</a:t>
-            </a:r>
-            <a:r>
-              <a:rPr lang="en-US" sz="2000" b="0" u="none" strike="noStrike">
-                <a:solidFill>
-                  <a:srgbClr val="000000"/>
-                </a:solidFill>
-                <a:effectLst/>
-                <a:uFillTx/>
-                <a:latin typeface="Arial"/>
-              </a:rPr>
-              <a:t>per</a:t>
-            </a:r>
-            <a:r>
-              <a:rPr lang="en-US" sz="2000" b="0" u="none" strike="noStrike">
-                <a:solidFill>
-                  <a:srgbClr val="000000"/>
-                </a:solidFill>
-                <a:effectLst/>
-                <a:uFillTx/>
-                <a:latin typeface="Arial"/>
-              </a:rPr>
-              <a:t>ly.</a:t>
+              <a:t>Title slide. This is the payoff session — lists/tuples from last time finally get used properly.</a:t>
             </a:r>
             <a:endParaRPr lang="en-US" sz="2000" b="0" u="none" strike="noStrike">
               <a:solidFill>
@@ -892,7 +529,7 @@
       </p:sp>
       <p:sp>
         <p:nvSpPr>
-          <p:cNvPr id="474" name="PlaceHolder 3"/>
+          <p:cNvPr id="475" name="PlaceHolder 3"/>
           <p:cNvSpPr>
             <a:spLocks noGrp="1"/>
           </p:cNvSpPr>
@@ -903,7 +540,7 @@
         <p:spPr>
           <a:xfrm>
             <a:off x="3884760" y="8685360"/>
-            <a:ext cx="2971080" cy="457920"/>
+            <a:ext cx="2970360" cy="457200"/>
           </a:xfrm>
           <a:prstGeom prst="rect">
             <a:avLst/>
@@ -947,7 +584,7 @@
                 <a:tab pos="0" algn="l"/>
               </a:tabLst>
             </a:pPr>
-            <a:fld id="{928C667A-C6C7-4E65-804A-9C2BF13ECE1E}" type="slidenum">
+            <a:fld id="{C76B02D1-4F5F-4661-92AE-A1A2689DF263}" type="slidenum">
               <a:rPr lang="en-US" sz="1200" b="0" u="none" strike="noStrike">
                 <a:solidFill>
                   <a:schemeClr val="dk1"/>
@@ -994,7 +631,7 @@
       </p:grpSpPr>
       <p:sp>
         <p:nvSpPr>
-          <p:cNvPr id="499" name="PlaceHolder 1"/>
+          <p:cNvPr id="500" name="PlaceHolder 1"/>
           <p:cNvSpPr>
             <a:spLocks noGrp="1"/>
           </p:cNvSpPr>
@@ -1005,19 +642,19 @@
         <p:spPr>
           <a:xfrm>
             <a:off x="685800" y="1143000"/>
-            <a:ext cx="5485680" cy="3085560"/>
-          </a:xfrm>
-          <a:prstGeom prst="rect">
-            <a:avLst/>
-          </a:prstGeom>
-          <a:ln w="0">
-            <a:noFill/>
-          </a:ln>
-        </p:spPr>
-      </p:sp>
-      <p:sp>
-        <p:nvSpPr>
-          <p:cNvPr id="500" name="PlaceHolder 2"/>
+            <a:ext cx="5484960" cy="3084840"/>
+          </a:xfrm>
+          <a:prstGeom prst="rect">
+            <a:avLst/>
+          </a:prstGeom>
+          <a:ln w="0">
+            <a:noFill/>
+          </a:ln>
+        </p:spPr>
+      </p:sp>
+      <p:sp>
+        <p:nvSpPr>
+          <p:cNvPr id="501" name="PlaceHolder 2"/>
           <p:cNvSpPr>
             <a:spLocks noGrp="1"/>
           </p:cNvSpPr>
@@ -1028,7 +665,7 @@
         <p:spPr>
           <a:xfrm>
             <a:off x="685800" y="4400640"/>
-            <a:ext cx="5485680" cy="3599640"/>
+            <a:ext cx="5484960" cy="3598920"/>
           </a:xfrm>
           <a:prstGeom prst="rect">
             <a:avLst/>
@@ -1076,7 +713,7 @@
       </p:sp>
       <p:sp>
         <p:nvSpPr>
-          <p:cNvPr id="501" name="PlaceHolder 3"/>
+          <p:cNvPr id="502" name="PlaceHolder 3"/>
           <p:cNvSpPr>
             <a:spLocks noGrp="1"/>
           </p:cNvSpPr>
@@ -1087,7 +724,7 @@
         <p:spPr>
           <a:xfrm>
             <a:off x="3884760" y="8685360"/>
-            <a:ext cx="2971080" cy="457920"/>
+            <a:ext cx="2970360" cy="457200"/>
           </a:xfrm>
           <a:prstGeom prst="rect">
             <a:avLst/>
@@ -1131,7 +768,7 @@
                 <a:tab pos="0" algn="l"/>
               </a:tabLst>
             </a:pPr>
-            <a:fld id="{493BDB76-6867-4746-839C-A6444EDF94A1}" type="slidenum">
+            <a:fld id="{7E623D86-40E8-40F3-8F46-1C9E65768E91}" type="slidenum">
               <a:rPr lang="en-US" sz="1200" b="0" u="none" strike="noStrike">
                 <a:solidFill>
                   <a:schemeClr val="dk1"/>
@@ -1178,7 +815,7 @@
       </p:grpSpPr>
       <p:sp>
         <p:nvSpPr>
-          <p:cNvPr id="502" name="PlaceHolder 1"/>
+          <p:cNvPr id="503" name="PlaceHolder 1"/>
           <p:cNvSpPr>
             <a:spLocks noGrp="1"/>
           </p:cNvSpPr>
@@ -1189,19 +826,19 @@
         <p:spPr>
           <a:xfrm>
             <a:off x="685800" y="1143000"/>
-            <a:ext cx="5485680" cy="3085560"/>
-          </a:xfrm>
-          <a:prstGeom prst="rect">
-            <a:avLst/>
-          </a:prstGeom>
-          <a:ln w="0">
-            <a:noFill/>
-          </a:ln>
-        </p:spPr>
-      </p:sp>
-      <p:sp>
-        <p:nvSpPr>
-          <p:cNvPr id="503" name="PlaceHolder 2"/>
+            <a:ext cx="5484960" cy="3084840"/>
+          </a:xfrm>
+          <a:prstGeom prst="rect">
+            <a:avLst/>
+          </a:prstGeom>
+          <a:ln w="0">
+            <a:noFill/>
+          </a:ln>
+        </p:spPr>
+      </p:sp>
+      <p:sp>
+        <p:nvSpPr>
+          <p:cNvPr id="504" name="PlaceHolder 2"/>
           <p:cNvSpPr>
             <a:spLocks noGrp="1"/>
           </p:cNvSpPr>
@@ -1212,7 +849,7 @@
         <p:spPr>
           <a:xfrm>
             <a:off x="685800" y="4400640"/>
-            <a:ext cx="5485680" cy="3599640"/>
+            <a:ext cx="5484960" cy="3598920"/>
           </a:xfrm>
           <a:prstGeom prst="rect">
             <a:avLst/>
@@ -1260,7 +897,7 @@
       </p:sp>
       <p:sp>
         <p:nvSpPr>
-          <p:cNvPr id="504" name="PlaceHolder 3"/>
+          <p:cNvPr id="505" name="PlaceHolder 3"/>
           <p:cNvSpPr>
             <a:spLocks noGrp="1"/>
           </p:cNvSpPr>
@@ -1271,7 +908,7 @@
         <p:spPr>
           <a:xfrm>
             <a:off x="3884760" y="8685360"/>
-            <a:ext cx="2971080" cy="457920"/>
+            <a:ext cx="2970360" cy="457200"/>
           </a:xfrm>
           <a:prstGeom prst="rect">
             <a:avLst/>
@@ -1315,7 +952,7 @@
                 <a:tab pos="0" algn="l"/>
               </a:tabLst>
             </a:pPr>
-            <a:fld id="{D7C00544-FC23-41C2-AE90-7176FC6B69A7}" type="slidenum">
+            <a:fld id="{92DB00FD-DFF1-4EAB-8C62-ECBD9CBCBEEA}" type="slidenum">
               <a:rPr lang="en-US" sz="1200" b="0" u="none" strike="noStrike">
                 <a:solidFill>
                   <a:schemeClr val="dk1"/>
@@ -1362,7 +999,7 @@
       </p:grpSpPr>
       <p:sp>
         <p:nvSpPr>
-          <p:cNvPr id="505" name="PlaceHolder 1"/>
+          <p:cNvPr id="506" name="PlaceHolder 1"/>
           <p:cNvSpPr>
             <a:spLocks noGrp="1"/>
           </p:cNvSpPr>
@@ -1373,19 +1010,19 @@
         <p:spPr>
           <a:xfrm>
             <a:off x="685800" y="1143000"/>
-            <a:ext cx="5485680" cy="3085560"/>
-          </a:xfrm>
-          <a:prstGeom prst="rect">
-            <a:avLst/>
-          </a:prstGeom>
-          <a:ln w="0">
-            <a:noFill/>
-          </a:ln>
-        </p:spPr>
-      </p:sp>
-      <p:sp>
-        <p:nvSpPr>
-          <p:cNvPr id="506" name="PlaceHolder 2"/>
+            <a:ext cx="5484960" cy="3084840"/>
+          </a:xfrm>
+          <a:prstGeom prst="rect">
+            <a:avLst/>
+          </a:prstGeom>
+          <a:ln w="0">
+            <a:noFill/>
+          </a:ln>
+        </p:spPr>
+      </p:sp>
+      <p:sp>
+        <p:nvSpPr>
+          <p:cNvPr id="507" name="PlaceHolder 2"/>
           <p:cNvSpPr>
             <a:spLocks noGrp="1"/>
           </p:cNvSpPr>
@@ -1396,7 +1033,7 @@
         <p:spPr>
           <a:xfrm>
             <a:off x="685800" y="4400640"/>
-            <a:ext cx="5485680" cy="3599640"/>
+            <a:ext cx="5484960" cy="3598920"/>
           </a:xfrm>
           <a:prstGeom prst="rect">
             <a:avLst/>
@@ -1427,7 +1064,7 @@
       </p:sp>
       <p:sp>
         <p:nvSpPr>
-          <p:cNvPr id="507" name="PlaceHolder 3"/>
+          <p:cNvPr id="508" name="PlaceHolder 3"/>
           <p:cNvSpPr>
             <a:spLocks noGrp="1"/>
           </p:cNvSpPr>
@@ -1438,7 +1075,7 @@
         <p:spPr>
           <a:xfrm>
             <a:off x="3884760" y="8685360"/>
-            <a:ext cx="2971080" cy="457920"/>
+            <a:ext cx="2970360" cy="457200"/>
           </a:xfrm>
           <a:prstGeom prst="rect">
             <a:avLst/>
@@ -1482,7 +1119,7 @@
                 <a:tab pos="0" algn="l"/>
               </a:tabLst>
             </a:pPr>
-            <a:fld id="{75CAFADA-89EC-40E3-BD31-E50F66C6288A}" type="slidenum">
+            <a:fld id="{4EE19829-5739-4FD3-B3B9-FF0C92F5857F}" type="slidenum">
               <a:rPr lang="en-US" sz="1200" b="0" u="none" strike="noStrike">
                 <a:solidFill>
                   <a:schemeClr val="dk1"/>
@@ -1529,7 +1166,7 @@
       </p:grpSpPr>
       <p:sp>
         <p:nvSpPr>
-          <p:cNvPr id="508" name="PlaceHolder 1"/>
+          <p:cNvPr id="509" name="PlaceHolder 1"/>
           <p:cNvSpPr>
             <a:spLocks noGrp="1"/>
           </p:cNvSpPr>
@@ -1540,19 +1177,19 @@
         <p:spPr>
           <a:xfrm>
             <a:off x="685800" y="1143000"/>
-            <a:ext cx="5485680" cy="3085560"/>
-          </a:xfrm>
-          <a:prstGeom prst="rect">
-            <a:avLst/>
-          </a:prstGeom>
-          <a:ln w="0">
-            <a:noFill/>
-          </a:ln>
-        </p:spPr>
-      </p:sp>
-      <p:sp>
-        <p:nvSpPr>
-          <p:cNvPr id="509" name="PlaceHolder 2"/>
+            <a:ext cx="5484960" cy="3084840"/>
+          </a:xfrm>
+          <a:prstGeom prst="rect">
+            <a:avLst/>
+          </a:prstGeom>
+          <a:ln w="0">
+            <a:noFill/>
+          </a:ln>
+        </p:spPr>
+      </p:sp>
+      <p:sp>
+        <p:nvSpPr>
+          <p:cNvPr id="510" name="PlaceHolder 2"/>
           <p:cNvSpPr>
             <a:spLocks noGrp="1"/>
           </p:cNvSpPr>
@@ -1563,7 +1200,7 @@
         <p:spPr>
           <a:xfrm>
             <a:off x="685800" y="4400640"/>
-            <a:ext cx="5485680" cy="3599640"/>
+            <a:ext cx="5484960" cy="3598920"/>
           </a:xfrm>
           <a:prstGeom prst="rect">
             <a:avLst/>
@@ -1594,7 +1231,7 @@
       </p:sp>
       <p:sp>
         <p:nvSpPr>
-          <p:cNvPr id="510" name="PlaceHolder 3"/>
+          <p:cNvPr id="511" name="PlaceHolder 3"/>
           <p:cNvSpPr>
             <a:spLocks noGrp="1"/>
           </p:cNvSpPr>
@@ -1605,7 +1242,7 @@
         <p:spPr>
           <a:xfrm>
             <a:off x="3884760" y="8685360"/>
-            <a:ext cx="2971080" cy="457920"/>
+            <a:ext cx="2970360" cy="457200"/>
           </a:xfrm>
           <a:prstGeom prst="rect">
             <a:avLst/>
@@ -1649,7 +1286,7 @@
                 <a:tab pos="0" algn="l"/>
               </a:tabLst>
             </a:pPr>
-            <a:fld id="{80BCFEDC-8B53-40ED-81B5-4DBBB576E96C}" type="slidenum">
+            <a:fld id="{4050DA91-7FB6-455F-9C13-1C88619EBC8A}" type="slidenum">
               <a:rPr lang="en-US" sz="1200" b="0" u="none" strike="noStrike">
                 <a:solidFill>
                   <a:schemeClr val="dk1"/>
@@ -1696,7 +1333,7 @@
       </p:grpSpPr>
       <p:sp>
         <p:nvSpPr>
-          <p:cNvPr id="511" name="PlaceHolder 1"/>
+          <p:cNvPr id="512" name="PlaceHolder 1"/>
           <p:cNvSpPr>
             <a:spLocks noGrp="1"/>
           </p:cNvSpPr>
@@ -1707,19 +1344,19 @@
         <p:spPr>
           <a:xfrm>
             <a:off x="685800" y="1143000"/>
-            <a:ext cx="5485680" cy="3085560"/>
-          </a:xfrm>
-          <a:prstGeom prst="rect">
-            <a:avLst/>
-          </a:prstGeom>
-          <a:ln w="0">
-            <a:noFill/>
-          </a:ln>
-        </p:spPr>
-      </p:sp>
-      <p:sp>
-        <p:nvSpPr>
-          <p:cNvPr id="512" name="PlaceHolder 2"/>
+            <a:ext cx="5484960" cy="3084840"/>
+          </a:xfrm>
+          <a:prstGeom prst="rect">
+            <a:avLst/>
+          </a:prstGeom>
+          <a:ln w="0">
+            <a:noFill/>
+          </a:ln>
+        </p:spPr>
+      </p:sp>
+      <p:sp>
+        <p:nvSpPr>
+          <p:cNvPr id="513" name="PlaceHolder 2"/>
           <p:cNvSpPr>
             <a:spLocks noGrp="1"/>
           </p:cNvSpPr>
@@ -1730,7 +1367,7 @@
         <p:spPr>
           <a:xfrm>
             <a:off x="685800" y="4400640"/>
-            <a:ext cx="5485680" cy="3599640"/>
+            <a:ext cx="5484960" cy="3598920"/>
           </a:xfrm>
           <a:prstGeom prst="rect">
             <a:avLst/>
@@ -1761,7 +1398,7 @@
       </p:sp>
       <p:sp>
         <p:nvSpPr>
-          <p:cNvPr id="513" name="PlaceHolder 3"/>
+          <p:cNvPr id="514" name="PlaceHolder 3"/>
           <p:cNvSpPr>
             <a:spLocks noGrp="1"/>
           </p:cNvSpPr>
@@ -1772,7 +1409,7 @@
         <p:spPr>
           <a:xfrm>
             <a:off x="3884760" y="8685360"/>
-            <a:ext cx="2971080" cy="457920"/>
+            <a:ext cx="2970360" cy="457200"/>
           </a:xfrm>
           <a:prstGeom prst="rect">
             <a:avLst/>
@@ -1816,7 +1453,7 @@
                 <a:tab pos="0" algn="l"/>
               </a:tabLst>
             </a:pPr>
-            <a:fld id="{1684E8D1-2060-4855-941B-400C1C58B2EA}" type="slidenum">
+            <a:fld id="{47092CFC-3E3A-43A5-8EEF-4BCA15E0E64E}" type="slidenum">
               <a:rPr lang="en-US" sz="1200" b="0" u="none" strike="noStrike">
                 <a:solidFill>
                   <a:schemeClr val="dk1"/>
@@ -1863,7 +1500,7 @@
       </p:grpSpPr>
       <p:sp>
         <p:nvSpPr>
-          <p:cNvPr id="514" name="PlaceHolder 1"/>
+          <p:cNvPr id="515" name="PlaceHolder 1"/>
           <p:cNvSpPr>
             <a:spLocks noGrp="1"/>
           </p:cNvSpPr>
@@ -1874,19 +1511,19 @@
         <p:spPr>
           <a:xfrm>
             <a:off x="685800" y="1143000"/>
-            <a:ext cx="5485680" cy="3085560"/>
-          </a:xfrm>
-          <a:prstGeom prst="rect">
-            <a:avLst/>
-          </a:prstGeom>
-          <a:ln w="0">
-            <a:noFill/>
-          </a:ln>
-        </p:spPr>
-      </p:sp>
-      <p:sp>
-        <p:nvSpPr>
-          <p:cNvPr id="515" name="PlaceHolder 2"/>
+            <a:ext cx="5484960" cy="3084840"/>
+          </a:xfrm>
+          <a:prstGeom prst="rect">
+            <a:avLst/>
+          </a:prstGeom>
+          <a:ln w="0">
+            <a:noFill/>
+          </a:ln>
+        </p:spPr>
+      </p:sp>
+      <p:sp>
+        <p:nvSpPr>
+          <p:cNvPr id="516" name="PlaceHolder 2"/>
           <p:cNvSpPr>
             <a:spLocks noGrp="1"/>
           </p:cNvSpPr>
@@ -1897,7 +1534,7 @@
         <p:spPr>
           <a:xfrm>
             <a:off x="685800" y="4400640"/>
-            <a:ext cx="5485680" cy="3599640"/>
+            <a:ext cx="5484960" cy="3598920"/>
           </a:xfrm>
           <a:prstGeom prst="rect">
             <a:avLst/>
@@ -1928,7 +1565,7 @@
       </p:sp>
       <p:sp>
         <p:nvSpPr>
-          <p:cNvPr id="516" name="PlaceHolder 3"/>
+          <p:cNvPr id="517" name="PlaceHolder 3"/>
           <p:cNvSpPr>
             <a:spLocks noGrp="1"/>
           </p:cNvSpPr>
@@ -1939,7 +1576,7 @@
         <p:spPr>
           <a:xfrm>
             <a:off x="3884760" y="8685360"/>
-            <a:ext cx="2971080" cy="457920"/>
+            <a:ext cx="2970360" cy="457200"/>
           </a:xfrm>
           <a:prstGeom prst="rect">
             <a:avLst/>
@@ -1983,7 +1620,7 @@
                 <a:tab pos="0" algn="l"/>
               </a:tabLst>
             </a:pPr>
-            <a:fld id="{D96DD151-DE2C-4700-A383-4914F7410635}" type="slidenum">
+            <a:fld id="{A9B8C7FB-262A-4A70-AEB1-B30D82E75E28}" type="slidenum">
               <a:rPr lang="en-US" sz="1200" b="0" u="none" strike="noStrike">
                 <a:solidFill>
                   <a:schemeClr val="dk1"/>
@@ -2030,7 +1667,7 @@
       </p:grpSpPr>
       <p:sp>
         <p:nvSpPr>
-          <p:cNvPr id="517" name="PlaceHolder 1"/>
+          <p:cNvPr id="518" name="PlaceHolder 1"/>
           <p:cNvSpPr>
             <a:spLocks noGrp="1"/>
           </p:cNvSpPr>
@@ -2041,19 +1678,19 @@
         <p:spPr>
           <a:xfrm>
             <a:off x="685800" y="1143000"/>
-            <a:ext cx="5485680" cy="3085560"/>
-          </a:xfrm>
-          <a:prstGeom prst="rect">
-            <a:avLst/>
-          </a:prstGeom>
-          <a:ln w="0">
-            <a:noFill/>
-          </a:ln>
-        </p:spPr>
-      </p:sp>
-      <p:sp>
-        <p:nvSpPr>
-          <p:cNvPr id="518" name="PlaceHolder 2"/>
+            <a:ext cx="5484960" cy="3084840"/>
+          </a:xfrm>
+          <a:prstGeom prst="rect">
+            <a:avLst/>
+          </a:prstGeom>
+          <a:ln w="0">
+            <a:noFill/>
+          </a:ln>
+        </p:spPr>
+      </p:sp>
+      <p:sp>
+        <p:nvSpPr>
+          <p:cNvPr id="519" name="PlaceHolder 2"/>
           <p:cNvSpPr>
             <a:spLocks noGrp="1"/>
           </p:cNvSpPr>
@@ -2064,7 +1701,7 @@
         <p:spPr>
           <a:xfrm>
             <a:off x="685800" y="4400640"/>
-            <a:ext cx="5485680" cy="3599640"/>
+            <a:ext cx="5484960" cy="3598920"/>
           </a:xfrm>
           <a:prstGeom prst="rect">
             <a:avLst/>
@@ -2112,7 +1749,7 @@
       </p:sp>
       <p:sp>
         <p:nvSpPr>
-          <p:cNvPr id="519" name="PlaceHolder 3"/>
+          <p:cNvPr id="520" name="PlaceHolder 3"/>
           <p:cNvSpPr>
             <a:spLocks noGrp="1"/>
           </p:cNvSpPr>
@@ -2123,7 +1760,7 @@
         <p:spPr>
           <a:xfrm>
             <a:off x="3884760" y="8685360"/>
-            <a:ext cx="2971080" cy="457920"/>
+            <a:ext cx="2970360" cy="457200"/>
           </a:xfrm>
           <a:prstGeom prst="rect">
             <a:avLst/>
@@ -2167,7 +1804,7 @@
                 <a:tab pos="0" algn="l"/>
               </a:tabLst>
             </a:pPr>
-            <a:fld id="{EA3780FF-D4BD-44F8-B7C5-A692DA888E62}" type="slidenum">
+            <a:fld id="{2A81BA3C-97C9-4459-8FE8-28466AB6DC7B}" type="slidenum">
               <a:rPr lang="en-US" sz="1200" b="0" u="none" strike="noStrike">
                 <a:solidFill>
                   <a:schemeClr val="dk1"/>
@@ -2214,7 +1851,7 @@
       </p:grpSpPr>
       <p:sp>
         <p:nvSpPr>
-          <p:cNvPr id="520" name="PlaceHolder 1"/>
+          <p:cNvPr id="521" name="PlaceHolder 1"/>
           <p:cNvSpPr>
             <a:spLocks noGrp="1"/>
           </p:cNvSpPr>
@@ -2225,19 +1862,19 @@
         <p:spPr>
           <a:xfrm>
             <a:off x="685800" y="1143000"/>
-            <a:ext cx="5485680" cy="3085560"/>
-          </a:xfrm>
-          <a:prstGeom prst="rect">
-            <a:avLst/>
-          </a:prstGeom>
-          <a:ln w="0">
-            <a:noFill/>
-          </a:ln>
-        </p:spPr>
-      </p:sp>
-      <p:sp>
-        <p:nvSpPr>
-          <p:cNvPr id="521" name="PlaceHolder 2"/>
+            <a:ext cx="5484960" cy="3084840"/>
+          </a:xfrm>
+          <a:prstGeom prst="rect">
+            <a:avLst/>
+          </a:prstGeom>
+          <a:ln w="0">
+            <a:noFill/>
+          </a:ln>
+        </p:spPr>
+      </p:sp>
+      <p:sp>
+        <p:nvSpPr>
+          <p:cNvPr id="522" name="PlaceHolder 2"/>
           <p:cNvSpPr>
             <a:spLocks noGrp="1"/>
           </p:cNvSpPr>
@@ -2248,7 +1885,7 @@
         <p:spPr>
           <a:xfrm>
             <a:off x="685800" y="4400640"/>
-            <a:ext cx="5485680" cy="3599640"/>
+            <a:ext cx="5484960" cy="3598920"/>
           </a:xfrm>
           <a:prstGeom prst="rect">
             <a:avLst/>
@@ -2279,7 +1916,7 @@
       </p:sp>
       <p:sp>
         <p:nvSpPr>
-          <p:cNvPr id="522" name="PlaceHolder 3"/>
+          <p:cNvPr id="523" name="PlaceHolder 3"/>
           <p:cNvSpPr>
             <a:spLocks noGrp="1"/>
           </p:cNvSpPr>
@@ -2290,7 +1927,7 @@
         <p:spPr>
           <a:xfrm>
             <a:off x="3884760" y="8685360"/>
-            <a:ext cx="2971080" cy="457920"/>
+            <a:ext cx="2970360" cy="457200"/>
           </a:xfrm>
           <a:prstGeom prst="rect">
             <a:avLst/>
@@ -2334,7 +1971,7 @@
                 <a:tab pos="0" algn="l"/>
               </a:tabLst>
             </a:pPr>
-            <a:fld id="{C0D20F9B-1DDF-4A1F-9498-2322EA138AA2}" type="slidenum">
+            <a:fld id="{49B1DBB8-D262-40DB-B0A4-EDAC126AC159}" type="slidenum">
               <a:rPr lang="en-US" sz="1200" b="0" u="none" strike="noStrike">
                 <a:solidFill>
                   <a:schemeClr val="dk1"/>
@@ -2381,7 +2018,7 @@
       </p:grpSpPr>
       <p:sp>
         <p:nvSpPr>
-          <p:cNvPr id="523" name="PlaceHolder 1"/>
+          <p:cNvPr id="524" name="PlaceHolder 1"/>
           <p:cNvSpPr>
             <a:spLocks noGrp="1"/>
           </p:cNvSpPr>
@@ -2392,19 +2029,19 @@
         <p:spPr>
           <a:xfrm>
             <a:off x="685800" y="1143000"/>
-            <a:ext cx="5485680" cy="3085560"/>
-          </a:xfrm>
-          <a:prstGeom prst="rect">
-            <a:avLst/>
-          </a:prstGeom>
-          <a:ln w="0">
-            <a:noFill/>
-          </a:ln>
-        </p:spPr>
-      </p:sp>
-      <p:sp>
-        <p:nvSpPr>
-          <p:cNvPr id="524" name="PlaceHolder 2"/>
+            <a:ext cx="5484960" cy="3084840"/>
+          </a:xfrm>
+          <a:prstGeom prst="rect">
+            <a:avLst/>
+          </a:prstGeom>
+          <a:ln w="0">
+            <a:noFill/>
+          </a:ln>
+        </p:spPr>
+      </p:sp>
+      <p:sp>
+        <p:nvSpPr>
+          <p:cNvPr id="525" name="PlaceHolder 2"/>
           <p:cNvSpPr>
             <a:spLocks noGrp="1"/>
           </p:cNvSpPr>
@@ -2415,7 +2052,7 @@
         <p:spPr>
           <a:xfrm>
             <a:off x="685800" y="4400640"/>
-            <a:ext cx="5485680" cy="3599640"/>
+            <a:ext cx="5484960" cy="3598920"/>
           </a:xfrm>
           <a:prstGeom prst="rect">
             <a:avLst/>
@@ -2446,7 +2083,7 @@
       </p:sp>
       <p:sp>
         <p:nvSpPr>
-          <p:cNvPr id="525" name="PlaceHolder 3"/>
+          <p:cNvPr id="526" name="PlaceHolder 3"/>
           <p:cNvSpPr>
             <a:spLocks noGrp="1"/>
           </p:cNvSpPr>
@@ -2457,7 +2094,7 @@
         <p:spPr>
           <a:xfrm>
             <a:off x="3884760" y="8685360"/>
-            <a:ext cx="2971080" cy="457920"/>
+            <a:ext cx="2970360" cy="457200"/>
           </a:xfrm>
           <a:prstGeom prst="rect">
             <a:avLst/>
@@ -2501,7 +2138,7 @@
                 <a:tab pos="0" algn="l"/>
               </a:tabLst>
             </a:pPr>
-            <a:fld id="{C992903B-9B48-49E0-BDAF-91738445A667}" type="slidenum">
+            <a:fld id="{65ECC5BF-0BE5-44C1-8BEC-E186B9BF18FD}" type="slidenum">
               <a:rPr lang="en-US" sz="1200" b="0" u="none" strike="noStrike">
                 <a:solidFill>
                   <a:schemeClr val="dk1"/>
@@ -2548,7 +2185,7 @@
       </p:grpSpPr>
       <p:sp>
         <p:nvSpPr>
-          <p:cNvPr id="526" name="PlaceHolder 1"/>
+          <p:cNvPr id="527" name="PlaceHolder 1"/>
           <p:cNvSpPr>
             <a:spLocks noGrp="1"/>
           </p:cNvSpPr>
@@ -2559,19 +2196,19 @@
         <p:spPr>
           <a:xfrm>
             <a:off x="685800" y="1143000"/>
-            <a:ext cx="5485680" cy="3085560"/>
-          </a:xfrm>
-          <a:prstGeom prst="rect">
-            <a:avLst/>
-          </a:prstGeom>
-          <a:ln w="0">
-            <a:noFill/>
-          </a:ln>
-        </p:spPr>
-      </p:sp>
-      <p:sp>
-        <p:nvSpPr>
-          <p:cNvPr id="527" name="PlaceHolder 2"/>
+            <a:ext cx="5484960" cy="3084840"/>
+          </a:xfrm>
+          <a:prstGeom prst="rect">
+            <a:avLst/>
+          </a:prstGeom>
+          <a:ln w="0">
+            <a:noFill/>
+          </a:ln>
+        </p:spPr>
+      </p:sp>
+      <p:sp>
+        <p:nvSpPr>
+          <p:cNvPr id="528" name="PlaceHolder 2"/>
           <p:cNvSpPr>
             <a:spLocks noGrp="1"/>
           </p:cNvSpPr>
@@ -2582,7 +2219,7 @@
         <p:spPr>
           <a:xfrm>
             <a:off x="685800" y="4400640"/>
-            <a:ext cx="5485680" cy="3599640"/>
+            <a:ext cx="5484960" cy="3598920"/>
           </a:xfrm>
           <a:prstGeom prst="rect">
             <a:avLst/>
@@ -2613,7 +2250,7 @@
       </p:sp>
       <p:sp>
         <p:nvSpPr>
-          <p:cNvPr id="528" name="PlaceHolder 3"/>
+          <p:cNvPr id="529" name="PlaceHolder 3"/>
           <p:cNvSpPr>
             <a:spLocks noGrp="1"/>
           </p:cNvSpPr>
@@ -2624,7 +2261,7 @@
         <p:spPr>
           <a:xfrm>
             <a:off x="3884760" y="8685360"/>
-            <a:ext cx="2971080" cy="457920"/>
+            <a:ext cx="2970360" cy="457200"/>
           </a:xfrm>
           <a:prstGeom prst="rect">
             <a:avLst/>
@@ -2668,7 +2305,7 @@
                 <a:tab pos="0" algn="l"/>
               </a:tabLst>
             </a:pPr>
-            <a:fld id="{AF8B9274-948B-4FD2-A320-122BE9951523}" type="slidenum">
+            <a:fld id="{707B41BD-96CA-4989-AE4E-2F53D4F31240}" type="slidenum">
               <a:rPr lang="en-US" sz="1200" b="0" u="none" strike="noStrike">
                 <a:solidFill>
                   <a:schemeClr val="dk1"/>
@@ -2715,7 +2352,7 @@
       </p:grpSpPr>
       <p:sp>
         <p:nvSpPr>
-          <p:cNvPr id="475" name="PlaceHolder 1"/>
+          <p:cNvPr id="476" name="PlaceHolder 1"/>
           <p:cNvSpPr>
             <a:spLocks noGrp="1"/>
           </p:cNvSpPr>
@@ -2726,19 +2363,19 @@
         <p:spPr>
           <a:xfrm>
             <a:off x="685800" y="1143000"/>
-            <a:ext cx="5485680" cy="3085560"/>
-          </a:xfrm>
-          <a:prstGeom prst="rect">
-            <a:avLst/>
-          </a:prstGeom>
-          <a:ln w="0">
-            <a:noFill/>
-          </a:ln>
-        </p:spPr>
-      </p:sp>
-      <p:sp>
-        <p:nvSpPr>
-          <p:cNvPr id="476" name="PlaceHolder 2"/>
+            <a:ext cx="5484960" cy="3084840"/>
+          </a:xfrm>
+          <a:prstGeom prst="rect">
+            <a:avLst/>
+          </a:prstGeom>
+          <a:ln w="0">
+            <a:noFill/>
+          </a:ln>
+        </p:spPr>
+      </p:sp>
+      <p:sp>
+        <p:nvSpPr>
+          <p:cNvPr id="477" name="PlaceHolder 2"/>
           <p:cNvSpPr>
             <a:spLocks noGrp="1"/>
           </p:cNvSpPr>
@@ -2749,7 +2386,7 @@
         <p:spPr>
           <a:xfrm>
             <a:off x="685800" y="4400640"/>
-            <a:ext cx="5485680" cy="3599640"/>
+            <a:ext cx="5484960" cy="3598920"/>
           </a:xfrm>
           <a:prstGeom prst="rect">
             <a:avLst/>
@@ -2780,7 +2417,7 @@
       </p:sp>
       <p:sp>
         <p:nvSpPr>
-          <p:cNvPr id="477" name="PlaceHolder 3"/>
+          <p:cNvPr id="478" name="PlaceHolder 3"/>
           <p:cNvSpPr>
             <a:spLocks noGrp="1"/>
           </p:cNvSpPr>
@@ -2791,7 +2428,7 @@
         <p:spPr>
           <a:xfrm>
             <a:off x="3884760" y="8685360"/>
-            <a:ext cx="2971080" cy="457920"/>
+            <a:ext cx="2970360" cy="457200"/>
           </a:xfrm>
           <a:prstGeom prst="rect">
             <a:avLst/>
@@ -2835,7 +2472,7 @@
                 <a:tab pos="0" algn="l"/>
               </a:tabLst>
             </a:pPr>
-            <a:fld id="{FC7531C1-B671-491E-90E7-1A5F974ECEFF}" type="slidenum">
+            <a:fld id="{C3E30899-DFC3-4505-9A4B-73FDDE129912}" type="slidenum">
               <a:rPr lang="en-US" sz="1200" b="0" u="none" strike="noStrike">
                 <a:solidFill>
                   <a:schemeClr val="dk1"/>
@@ -2882,7 +2519,7 @@
       </p:grpSpPr>
       <p:sp>
         <p:nvSpPr>
-          <p:cNvPr id="529" name="PlaceHolder 1"/>
+          <p:cNvPr id="530" name="PlaceHolder 1"/>
           <p:cNvSpPr>
             <a:spLocks noGrp="1"/>
           </p:cNvSpPr>
@@ -2893,19 +2530,19 @@
         <p:spPr>
           <a:xfrm>
             <a:off x="685800" y="1143000"/>
-            <a:ext cx="5485680" cy="3085560"/>
-          </a:xfrm>
-          <a:prstGeom prst="rect">
-            <a:avLst/>
-          </a:prstGeom>
-          <a:ln w="0">
-            <a:noFill/>
-          </a:ln>
-        </p:spPr>
-      </p:sp>
-      <p:sp>
-        <p:nvSpPr>
-          <p:cNvPr id="530" name="PlaceHolder 2"/>
+            <a:ext cx="5484960" cy="3084840"/>
+          </a:xfrm>
+          <a:prstGeom prst="rect">
+            <a:avLst/>
+          </a:prstGeom>
+          <a:ln w="0">
+            <a:noFill/>
+          </a:ln>
+        </p:spPr>
+      </p:sp>
+      <p:sp>
+        <p:nvSpPr>
+          <p:cNvPr id="531" name="PlaceHolder 2"/>
           <p:cNvSpPr>
             <a:spLocks noGrp="1"/>
           </p:cNvSpPr>
@@ -2916,7 +2553,7 @@
         <p:spPr>
           <a:xfrm>
             <a:off x="685800" y="4400640"/>
-            <a:ext cx="5485680" cy="3599640"/>
+            <a:ext cx="5484960" cy="3598920"/>
           </a:xfrm>
           <a:prstGeom prst="rect">
             <a:avLst/>
@@ -2947,7 +2584,7 @@
       </p:sp>
       <p:sp>
         <p:nvSpPr>
-          <p:cNvPr id="531" name="PlaceHolder 3"/>
+          <p:cNvPr id="532" name="PlaceHolder 3"/>
           <p:cNvSpPr>
             <a:spLocks noGrp="1"/>
           </p:cNvSpPr>
@@ -2958,7 +2595,7 @@
         <p:spPr>
           <a:xfrm>
             <a:off x="3884760" y="8685360"/>
-            <a:ext cx="2971080" cy="457920"/>
+            <a:ext cx="2970360" cy="457200"/>
           </a:xfrm>
           <a:prstGeom prst="rect">
             <a:avLst/>
@@ -3002,7 +2639,7 @@
                 <a:tab pos="0" algn="l"/>
               </a:tabLst>
             </a:pPr>
-            <a:fld id="{32819B08-CF52-4B75-9072-6CD21DE5066C}" type="slidenum">
+            <a:fld id="{3FF48C59-7798-409F-8292-B6D2DE13AB00}" type="slidenum">
               <a:rPr lang="en-US" sz="1200" b="0" u="none" strike="noStrike">
                 <a:solidFill>
                   <a:schemeClr val="dk1"/>
@@ -3049,7 +2686,7 @@
       </p:grpSpPr>
       <p:sp>
         <p:nvSpPr>
-          <p:cNvPr id="532" name="PlaceHolder 1"/>
+          <p:cNvPr id="533" name="PlaceHolder 1"/>
           <p:cNvSpPr>
             <a:spLocks noGrp="1"/>
           </p:cNvSpPr>
@@ -3060,19 +2697,19 @@
         <p:spPr>
           <a:xfrm>
             <a:off x="685800" y="1143000"/>
-            <a:ext cx="5485680" cy="3085560"/>
-          </a:xfrm>
-          <a:prstGeom prst="rect">
-            <a:avLst/>
-          </a:prstGeom>
-          <a:ln w="0">
-            <a:noFill/>
-          </a:ln>
-        </p:spPr>
-      </p:sp>
-      <p:sp>
-        <p:nvSpPr>
-          <p:cNvPr id="533" name="PlaceHolder 2"/>
+            <a:ext cx="5484960" cy="3084840"/>
+          </a:xfrm>
+          <a:prstGeom prst="rect">
+            <a:avLst/>
+          </a:prstGeom>
+          <a:ln w="0">
+            <a:noFill/>
+          </a:ln>
+        </p:spPr>
+      </p:sp>
+      <p:sp>
+        <p:nvSpPr>
+          <p:cNvPr id="534" name="PlaceHolder 2"/>
           <p:cNvSpPr>
             <a:spLocks noGrp="1"/>
           </p:cNvSpPr>
@@ -3083,7 +2720,7 @@
         <p:spPr>
           <a:xfrm>
             <a:off x="685800" y="4400640"/>
-            <a:ext cx="5485680" cy="3599640"/>
+            <a:ext cx="5484960" cy="3598920"/>
           </a:xfrm>
           <a:prstGeom prst="rect">
             <a:avLst/>
@@ -3114,7 +2751,7 @@
       </p:sp>
       <p:sp>
         <p:nvSpPr>
-          <p:cNvPr id="534" name="PlaceHolder 3"/>
+          <p:cNvPr id="535" name="PlaceHolder 3"/>
           <p:cNvSpPr>
             <a:spLocks noGrp="1"/>
           </p:cNvSpPr>
@@ -3125,7 +2762,7 @@
         <p:spPr>
           <a:xfrm>
             <a:off x="3884760" y="8685360"/>
-            <a:ext cx="2971080" cy="457920"/>
+            <a:ext cx="2970360" cy="457200"/>
           </a:xfrm>
           <a:prstGeom prst="rect">
             <a:avLst/>
@@ -3169,7 +2806,7 @@
                 <a:tab pos="0" algn="l"/>
               </a:tabLst>
             </a:pPr>
-            <a:fld id="{B16F0082-07FF-4CE4-8E7C-33C9DCF046A7}" type="slidenum">
+            <a:fld id="{23AF1B4E-7DA4-4149-8050-4BB47AAA8F8C}" type="slidenum">
               <a:rPr lang="en-US" sz="1200" b="0" u="none" strike="noStrike">
                 <a:solidFill>
                   <a:schemeClr val="dk1"/>
@@ -3216,7 +2853,7 @@
       </p:grpSpPr>
       <p:sp>
         <p:nvSpPr>
-          <p:cNvPr id="535" name="PlaceHolder 1"/>
+          <p:cNvPr id="536" name="PlaceHolder 1"/>
           <p:cNvSpPr>
             <a:spLocks noGrp="1"/>
           </p:cNvSpPr>
@@ -3227,19 +2864,19 @@
         <p:spPr>
           <a:xfrm>
             <a:off x="685800" y="1143000"/>
-            <a:ext cx="5485680" cy="3085560"/>
-          </a:xfrm>
-          <a:prstGeom prst="rect">
-            <a:avLst/>
-          </a:prstGeom>
-          <a:ln w="0">
-            <a:noFill/>
-          </a:ln>
-        </p:spPr>
-      </p:sp>
-      <p:sp>
-        <p:nvSpPr>
-          <p:cNvPr id="536" name="PlaceHolder 2"/>
+            <a:ext cx="5484960" cy="3084840"/>
+          </a:xfrm>
+          <a:prstGeom prst="rect">
+            <a:avLst/>
+          </a:prstGeom>
+          <a:ln w="0">
+            <a:noFill/>
+          </a:ln>
+        </p:spPr>
+      </p:sp>
+      <p:sp>
+        <p:nvSpPr>
+          <p:cNvPr id="537" name="PlaceHolder 2"/>
           <p:cNvSpPr>
             <a:spLocks noGrp="1"/>
           </p:cNvSpPr>
@@ -3250,7 +2887,7 @@
         <p:spPr>
           <a:xfrm>
             <a:off x="685800" y="4400640"/>
-            <a:ext cx="5485680" cy="3599640"/>
+            <a:ext cx="5484960" cy="3598920"/>
           </a:xfrm>
           <a:prstGeom prst="rect">
             <a:avLst/>
@@ -3281,7 +2918,7 @@
       </p:sp>
       <p:sp>
         <p:nvSpPr>
-          <p:cNvPr id="537" name="PlaceHolder 3"/>
+          <p:cNvPr id="538" name="PlaceHolder 3"/>
           <p:cNvSpPr>
             <a:spLocks noGrp="1"/>
           </p:cNvSpPr>
@@ -3292,7 +2929,7 @@
         <p:spPr>
           <a:xfrm>
             <a:off x="3884760" y="8685360"/>
-            <a:ext cx="2971080" cy="457920"/>
+            <a:ext cx="2970360" cy="457200"/>
           </a:xfrm>
           <a:prstGeom prst="rect">
             <a:avLst/>
@@ -3336,7 +2973,7 @@
                 <a:tab pos="0" algn="l"/>
               </a:tabLst>
             </a:pPr>
-            <a:fld id="{63B78786-0B25-4190-AA99-17A47E96B146}" type="slidenum">
+            <a:fld id="{0CEA901D-F8EB-4A26-927D-4FCF8B3A4E9E}" type="slidenum">
               <a:rPr lang="en-US" sz="1200" b="0" u="none" strike="noStrike">
                 <a:solidFill>
                   <a:schemeClr val="dk1"/>
@@ -3383,7 +3020,7 @@
       </p:grpSpPr>
       <p:sp>
         <p:nvSpPr>
-          <p:cNvPr id="538" name="PlaceHolder 1"/>
+          <p:cNvPr id="539" name="PlaceHolder 1"/>
           <p:cNvSpPr>
             <a:spLocks noGrp="1"/>
           </p:cNvSpPr>
@@ -3394,19 +3031,19 @@
         <p:spPr>
           <a:xfrm>
             <a:off x="685800" y="1143000"/>
-            <a:ext cx="5485680" cy="3085560"/>
-          </a:xfrm>
-          <a:prstGeom prst="rect">
-            <a:avLst/>
-          </a:prstGeom>
-          <a:ln w="0">
-            <a:noFill/>
-          </a:ln>
-        </p:spPr>
-      </p:sp>
-      <p:sp>
-        <p:nvSpPr>
-          <p:cNvPr id="539" name="PlaceHolder 2"/>
+            <a:ext cx="5484960" cy="3084840"/>
+          </a:xfrm>
+          <a:prstGeom prst="rect">
+            <a:avLst/>
+          </a:prstGeom>
+          <a:ln w="0">
+            <a:noFill/>
+          </a:ln>
+        </p:spPr>
+      </p:sp>
+      <p:sp>
+        <p:nvSpPr>
+          <p:cNvPr id="540" name="PlaceHolder 2"/>
           <p:cNvSpPr>
             <a:spLocks noGrp="1"/>
           </p:cNvSpPr>
@@ -3417,7 +3054,7 @@
         <p:spPr>
           <a:xfrm>
             <a:off x="685800" y="4400640"/>
-            <a:ext cx="5485680" cy="3599640"/>
+            <a:ext cx="5484960" cy="3598920"/>
           </a:xfrm>
           <a:prstGeom prst="rect">
             <a:avLst/>
@@ -3450,18 +3087,7 @@
                 <a:uFillTx/>
                 <a:latin typeface="Arial"/>
               </a:rPr>
-              <a:t>Worth flagging explicitly as a Python quirk — most other languages don't have this </a:t>
-            </a:r>
-            <a:r>
-              <a:rPr lang="en-US" sz="2000" b="0" u="none" strike="noStrike">
-                <a:solidFill>
-                  <a:srgbClr val="000000"/>
-                </a:solidFill>
-                <a:effectLst/>
-                <a:uFillTx/>
-                <a:latin typeface="Arial"/>
-              </a:rPr>
-              <a:t>at all.</a:t>
+              <a:t>Worth flagging explicitly as a Python quirk — most other languages don't have this at all.</a:t>
             </a:r>
             <a:endParaRPr lang="en-US" sz="2000" b="0" u="none" strike="noStrike">
               <a:solidFill>
@@ -3476,7 +3102,7 @@
       </p:sp>
       <p:sp>
         <p:nvSpPr>
-          <p:cNvPr id="540" name="PlaceHolder 3"/>
+          <p:cNvPr id="541" name="PlaceHolder 3"/>
           <p:cNvSpPr>
             <a:spLocks noGrp="1"/>
           </p:cNvSpPr>
@@ -3487,7 +3113,7 @@
         <p:spPr>
           <a:xfrm>
             <a:off x="3884760" y="8685360"/>
-            <a:ext cx="2971080" cy="457920"/>
+            <a:ext cx="2970360" cy="457200"/>
           </a:xfrm>
           <a:prstGeom prst="rect">
             <a:avLst/>
@@ -3531,7 +3157,7 @@
                 <a:tab pos="0" algn="l"/>
               </a:tabLst>
             </a:pPr>
-            <a:fld id="{70674137-3A7F-4564-B81B-9198DAB9875C}" type="slidenum">
+            <a:fld id="{79FEA715-06CB-46D3-B43D-1E1C2F7A46CE}" type="slidenum">
               <a:rPr lang="en-US" sz="1200" b="0" u="none" strike="noStrike">
                 <a:solidFill>
                   <a:schemeClr val="dk1"/>
@@ -3578,7 +3204,7 @@
       </p:grpSpPr>
       <p:sp>
         <p:nvSpPr>
-          <p:cNvPr id="541" name="PlaceHolder 1"/>
+          <p:cNvPr id="542" name="PlaceHolder 1"/>
           <p:cNvSpPr>
             <a:spLocks noGrp="1"/>
           </p:cNvSpPr>
@@ -3589,19 +3215,19 @@
         <p:spPr>
           <a:xfrm>
             <a:off x="685800" y="1143000"/>
-            <a:ext cx="5485680" cy="3085560"/>
-          </a:xfrm>
-          <a:prstGeom prst="rect">
-            <a:avLst/>
-          </a:prstGeom>
-          <a:ln w="0">
-            <a:noFill/>
-          </a:ln>
-        </p:spPr>
-      </p:sp>
-      <p:sp>
-        <p:nvSpPr>
-          <p:cNvPr id="542" name="PlaceHolder 2"/>
+            <a:ext cx="5484960" cy="3084840"/>
+          </a:xfrm>
+          <a:prstGeom prst="rect">
+            <a:avLst/>
+          </a:prstGeom>
+          <a:ln w="0">
+            <a:noFill/>
+          </a:ln>
+        </p:spPr>
+      </p:sp>
+      <p:sp>
+        <p:nvSpPr>
+          <p:cNvPr id="543" name="PlaceHolder 2"/>
           <p:cNvSpPr>
             <a:spLocks noGrp="1"/>
           </p:cNvSpPr>
@@ -3612,7 +3238,7 @@
         <p:spPr>
           <a:xfrm>
             <a:off x="685800" y="4400640"/>
-            <a:ext cx="5485680" cy="3599640"/>
+            <a:ext cx="5484960" cy="3598920"/>
           </a:xfrm>
           <a:prstGeom prst="rect">
             <a:avLst/>
@@ -3660,7 +3286,7 @@
       </p:sp>
       <p:sp>
         <p:nvSpPr>
-          <p:cNvPr id="543" name="PlaceHolder 3"/>
+          <p:cNvPr id="544" name="PlaceHolder 3"/>
           <p:cNvSpPr>
             <a:spLocks noGrp="1"/>
           </p:cNvSpPr>
@@ -3671,7 +3297,7 @@
         <p:spPr>
           <a:xfrm>
             <a:off x="3884760" y="8685360"/>
-            <a:ext cx="2971080" cy="457920"/>
+            <a:ext cx="2970360" cy="457200"/>
           </a:xfrm>
           <a:prstGeom prst="rect">
             <a:avLst/>
@@ -3715,7 +3341,7 @@
                 <a:tab pos="0" algn="l"/>
               </a:tabLst>
             </a:pPr>
-            <a:fld id="{6E0F846B-B1F2-4F96-91C4-A14E70798CE0}" type="slidenum">
+            <a:fld id="{6DBB2CCD-0769-4A09-A56B-EC5FE68FF112}" type="slidenum">
               <a:rPr lang="en-US" sz="1200" b="0" u="none" strike="noStrike">
                 <a:solidFill>
                   <a:schemeClr val="dk1"/>
@@ -3762,7 +3388,7 @@
       </p:grpSpPr>
       <p:sp>
         <p:nvSpPr>
-          <p:cNvPr id="544" name="PlaceHolder 1"/>
+          <p:cNvPr id="545" name="PlaceHolder 1"/>
           <p:cNvSpPr>
             <a:spLocks noGrp="1"/>
           </p:cNvSpPr>
@@ -3773,19 +3399,19 @@
         <p:spPr>
           <a:xfrm>
             <a:off x="685800" y="1143000"/>
-            <a:ext cx="5485680" cy="3085560"/>
-          </a:xfrm>
-          <a:prstGeom prst="rect">
-            <a:avLst/>
-          </a:prstGeom>
-          <a:ln w="0">
-            <a:noFill/>
-          </a:ln>
-        </p:spPr>
-      </p:sp>
-      <p:sp>
-        <p:nvSpPr>
-          <p:cNvPr id="545" name="PlaceHolder 2"/>
+            <a:ext cx="5484960" cy="3084840"/>
+          </a:xfrm>
+          <a:prstGeom prst="rect">
+            <a:avLst/>
+          </a:prstGeom>
+          <a:ln w="0">
+            <a:noFill/>
+          </a:ln>
+        </p:spPr>
+      </p:sp>
+      <p:sp>
+        <p:nvSpPr>
+          <p:cNvPr id="546" name="PlaceHolder 2"/>
           <p:cNvSpPr>
             <a:spLocks noGrp="1"/>
           </p:cNvSpPr>
@@ -3796,7 +3422,7 @@
         <p:spPr>
           <a:xfrm>
             <a:off x="685800" y="4400640"/>
-            <a:ext cx="5485680" cy="3599640"/>
+            <a:ext cx="5484960" cy="3598920"/>
           </a:xfrm>
           <a:prstGeom prst="rect">
             <a:avLst/>
@@ -3827,7 +3453,7 @@
       </p:sp>
       <p:sp>
         <p:nvSpPr>
-          <p:cNvPr id="546" name="PlaceHolder 3"/>
+          <p:cNvPr id="547" name="PlaceHolder 3"/>
           <p:cNvSpPr>
             <a:spLocks noGrp="1"/>
           </p:cNvSpPr>
@@ -3838,7 +3464,7 @@
         <p:spPr>
           <a:xfrm>
             <a:off x="3884760" y="8685360"/>
-            <a:ext cx="2971080" cy="457920"/>
+            <a:ext cx="2970360" cy="457200"/>
           </a:xfrm>
           <a:prstGeom prst="rect">
             <a:avLst/>
@@ -3882,7 +3508,7 @@
                 <a:tab pos="0" algn="l"/>
               </a:tabLst>
             </a:pPr>
-            <a:fld id="{6FD2B850-53BF-40B6-9A2D-AF20E877637E}" type="slidenum">
+            <a:fld id="{D15B45CB-FA18-4124-9E35-943AA4EF8789}" type="slidenum">
               <a:rPr lang="en-US" sz="1200" b="0" u="none" strike="noStrike">
                 <a:solidFill>
                   <a:schemeClr val="dk1"/>
@@ -3929,7 +3555,7 @@
       </p:grpSpPr>
       <p:sp>
         <p:nvSpPr>
-          <p:cNvPr id="547" name="PlaceHolder 1"/>
+          <p:cNvPr id="548" name="PlaceHolder 1"/>
           <p:cNvSpPr>
             <a:spLocks noGrp="1"/>
           </p:cNvSpPr>
@@ -3940,19 +3566,19 @@
         <p:spPr>
           <a:xfrm>
             <a:off x="685800" y="1143000"/>
-            <a:ext cx="5485680" cy="3085560"/>
-          </a:xfrm>
-          <a:prstGeom prst="rect">
-            <a:avLst/>
-          </a:prstGeom>
-          <a:ln w="0">
-            <a:noFill/>
-          </a:ln>
-        </p:spPr>
-      </p:sp>
-      <p:sp>
-        <p:nvSpPr>
-          <p:cNvPr id="548" name="PlaceHolder 2"/>
+            <a:ext cx="5484960" cy="3084840"/>
+          </a:xfrm>
+          <a:prstGeom prst="rect">
+            <a:avLst/>
+          </a:prstGeom>
+          <a:ln w="0">
+            <a:noFill/>
+          </a:ln>
+        </p:spPr>
+      </p:sp>
+      <p:sp>
+        <p:nvSpPr>
+          <p:cNvPr id="549" name="PlaceHolder 2"/>
           <p:cNvSpPr>
             <a:spLocks noGrp="1"/>
           </p:cNvSpPr>
@@ -3963,7 +3589,7 @@
         <p:spPr>
           <a:xfrm>
             <a:off x="685800" y="4400640"/>
-            <a:ext cx="5485680" cy="3599640"/>
+            <a:ext cx="5484960" cy="3598920"/>
           </a:xfrm>
           <a:prstGeom prst="rect">
             <a:avLst/>
@@ -3994,7 +3620,7 @@
       </p:sp>
       <p:sp>
         <p:nvSpPr>
-          <p:cNvPr id="549" name="PlaceHolder 3"/>
+          <p:cNvPr id="550" name="PlaceHolder 3"/>
           <p:cNvSpPr>
             <a:spLocks noGrp="1"/>
           </p:cNvSpPr>
@@ -4005,7 +3631,7 @@
         <p:spPr>
           <a:xfrm>
             <a:off x="3884760" y="8685360"/>
-            <a:ext cx="2971080" cy="457920"/>
+            <a:ext cx="2970360" cy="457200"/>
           </a:xfrm>
           <a:prstGeom prst="rect">
             <a:avLst/>
@@ -4049,7 +3675,7 @@
                 <a:tab pos="0" algn="l"/>
               </a:tabLst>
             </a:pPr>
-            <a:fld id="{3FC94CC8-4D47-4DCC-A813-0ADADF1E1DF2}" type="slidenum">
+            <a:fld id="{2BFEC303-E6A6-49D9-948D-7A3E83DE6AC4}" type="slidenum">
               <a:rPr lang="en-US" sz="1200" b="0" u="none" strike="noStrike">
                 <a:solidFill>
                   <a:schemeClr val="dk1"/>
@@ -4096,7 +3722,7 @@
       </p:grpSpPr>
       <p:sp>
         <p:nvSpPr>
-          <p:cNvPr id="550" name="PlaceHolder 1"/>
+          <p:cNvPr id="551" name="PlaceHolder 1"/>
           <p:cNvSpPr>
             <a:spLocks noGrp="1"/>
           </p:cNvSpPr>
@@ -4107,19 +3733,19 @@
         <p:spPr>
           <a:xfrm>
             <a:off x="685800" y="1143000"/>
-            <a:ext cx="5485680" cy="3085560"/>
-          </a:xfrm>
-          <a:prstGeom prst="rect">
-            <a:avLst/>
-          </a:prstGeom>
-          <a:ln w="0">
-            <a:noFill/>
-          </a:ln>
-        </p:spPr>
-      </p:sp>
-      <p:sp>
-        <p:nvSpPr>
-          <p:cNvPr id="551" name="PlaceHolder 2"/>
+            <a:ext cx="5484960" cy="3084840"/>
+          </a:xfrm>
+          <a:prstGeom prst="rect">
+            <a:avLst/>
+          </a:prstGeom>
+          <a:ln w="0">
+            <a:noFill/>
+          </a:ln>
+        </p:spPr>
+      </p:sp>
+      <p:sp>
+        <p:nvSpPr>
+          <p:cNvPr id="552" name="PlaceHolder 2"/>
           <p:cNvSpPr>
             <a:spLocks noGrp="1"/>
           </p:cNvSpPr>
@@ -4130,7 +3756,7 @@
         <p:spPr>
           <a:xfrm>
             <a:off x="685800" y="4400640"/>
-            <a:ext cx="5485680" cy="3599640"/>
+            <a:ext cx="5484960" cy="3598920"/>
           </a:xfrm>
           <a:prstGeom prst="rect">
             <a:avLst/>
@@ -4161,7 +3787,7 @@
       </p:sp>
       <p:sp>
         <p:nvSpPr>
-          <p:cNvPr id="552" name="PlaceHolder 3"/>
+          <p:cNvPr id="553" name="PlaceHolder 3"/>
           <p:cNvSpPr>
             <a:spLocks noGrp="1"/>
           </p:cNvSpPr>
@@ -4172,7 +3798,7 @@
         <p:spPr>
           <a:xfrm>
             <a:off x="3884760" y="8685360"/>
-            <a:ext cx="2971080" cy="457920"/>
+            <a:ext cx="2970360" cy="457200"/>
           </a:xfrm>
           <a:prstGeom prst="rect">
             <a:avLst/>
@@ -4216,7 +3842,7 @@
                 <a:tab pos="0" algn="l"/>
               </a:tabLst>
             </a:pPr>
-            <a:fld id="{66C28EE8-DB69-468F-9871-737B771CD663}" type="slidenum">
+            <a:fld id="{293166F9-D625-43BE-9862-4B2D2392A265}" type="slidenum">
               <a:rPr lang="en-US" sz="1200" b="0" u="none" strike="noStrike">
                 <a:solidFill>
                   <a:schemeClr val="dk1"/>
@@ -4263,7 +3889,7 @@
       </p:grpSpPr>
       <p:sp>
         <p:nvSpPr>
-          <p:cNvPr id="553" name="PlaceHolder 1"/>
+          <p:cNvPr id="554" name="PlaceHolder 1"/>
           <p:cNvSpPr>
             <a:spLocks noGrp="1"/>
           </p:cNvSpPr>
@@ -4274,19 +3900,19 @@
         <p:spPr>
           <a:xfrm>
             <a:off x="685800" y="1143000"/>
-            <a:ext cx="5485680" cy="3085560"/>
-          </a:xfrm>
-          <a:prstGeom prst="rect">
-            <a:avLst/>
-          </a:prstGeom>
-          <a:ln w="0">
-            <a:noFill/>
-          </a:ln>
-        </p:spPr>
-      </p:sp>
-      <p:sp>
-        <p:nvSpPr>
-          <p:cNvPr id="554" name="PlaceHolder 2"/>
+            <a:ext cx="5484960" cy="3084840"/>
+          </a:xfrm>
+          <a:prstGeom prst="rect">
+            <a:avLst/>
+          </a:prstGeom>
+          <a:ln w="0">
+            <a:noFill/>
+          </a:ln>
+        </p:spPr>
+      </p:sp>
+      <p:sp>
+        <p:nvSpPr>
+          <p:cNvPr id="555" name="PlaceHolder 2"/>
           <p:cNvSpPr>
             <a:spLocks noGrp="1"/>
           </p:cNvSpPr>
@@ -4297,7 +3923,7 @@
         <p:spPr>
           <a:xfrm>
             <a:off x="685800" y="4400640"/>
-            <a:ext cx="5485680" cy="3599640"/>
+            <a:ext cx="5484960" cy="3598920"/>
           </a:xfrm>
           <a:prstGeom prst="rect">
             <a:avLst/>
@@ -4328,7 +3954,7 @@
       </p:sp>
       <p:sp>
         <p:nvSpPr>
-          <p:cNvPr id="555" name="PlaceHolder 3"/>
+          <p:cNvPr id="556" name="PlaceHolder 3"/>
           <p:cNvSpPr>
             <a:spLocks noGrp="1"/>
           </p:cNvSpPr>
@@ -4339,7 +3965,7 @@
         <p:spPr>
           <a:xfrm>
             <a:off x="3884760" y="8685360"/>
-            <a:ext cx="2971080" cy="457920"/>
+            <a:ext cx="2970360" cy="457200"/>
           </a:xfrm>
           <a:prstGeom prst="rect">
             <a:avLst/>
@@ -4383,7 +4009,7 @@
                 <a:tab pos="0" algn="l"/>
               </a:tabLst>
             </a:pPr>
-            <a:fld id="{87E94C4C-3E23-4976-97D7-05EA66C01055}" type="slidenum">
+            <a:fld id="{564BE4B6-E325-4D1E-9916-5A703B75B317}" type="slidenum">
               <a:rPr lang="en-US" sz="1200" b="0" u="none" strike="noStrike">
                 <a:solidFill>
                   <a:schemeClr val="dk1"/>
@@ -4430,7 +4056,7 @@
       </p:grpSpPr>
       <p:sp>
         <p:nvSpPr>
-          <p:cNvPr id="556" name="PlaceHolder 1"/>
+          <p:cNvPr id="557" name="PlaceHolder 1"/>
           <p:cNvSpPr>
             <a:spLocks noGrp="1"/>
           </p:cNvSpPr>
@@ -4441,19 +4067,19 @@
         <p:spPr>
           <a:xfrm>
             <a:off x="685800" y="1143000"/>
-            <a:ext cx="5485680" cy="3085560"/>
-          </a:xfrm>
-          <a:prstGeom prst="rect">
-            <a:avLst/>
-          </a:prstGeom>
-          <a:ln w="0">
-            <a:noFill/>
-          </a:ln>
-        </p:spPr>
-      </p:sp>
-      <p:sp>
-        <p:nvSpPr>
-          <p:cNvPr id="557" name="PlaceHolder 2"/>
+            <a:ext cx="5484960" cy="3084840"/>
+          </a:xfrm>
+          <a:prstGeom prst="rect">
+            <a:avLst/>
+          </a:prstGeom>
+          <a:ln w="0">
+            <a:noFill/>
+          </a:ln>
+        </p:spPr>
+      </p:sp>
+      <p:sp>
+        <p:nvSpPr>
+          <p:cNvPr id="558" name="PlaceHolder 2"/>
           <p:cNvSpPr>
             <a:spLocks noGrp="1"/>
           </p:cNvSpPr>
@@ -4464,7 +4090,7 @@
         <p:spPr>
           <a:xfrm>
             <a:off x="685800" y="4400640"/>
-            <a:ext cx="5485680" cy="3599640"/>
+            <a:ext cx="5484960" cy="3598920"/>
           </a:xfrm>
           <a:prstGeom prst="rect">
             <a:avLst/>
@@ -4512,7 +4138,7 @@
       </p:sp>
       <p:sp>
         <p:nvSpPr>
-          <p:cNvPr id="558" name="PlaceHolder 3"/>
+          <p:cNvPr id="559" name="PlaceHolder 3"/>
           <p:cNvSpPr>
             <a:spLocks noGrp="1"/>
           </p:cNvSpPr>
@@ -4523,7 +4149,7 @@
         <p:spPr>
           <a:xfrm>
             <a:off x="3884760" y="8685360"/>
-            <a:ext cx="2971080" cy="457920"/>
+            <a:ext cx="2970360" cy="457200"/>
           </a:xfrm>
           <a:prstGeom prst="rect">
             <a:avLst/>
@@ -4567,7 +4193,7 @@
                 <a:tab pos="0" algn="l"/>
               </a:tabLst>
             </a:pPr>
-            <a:fld id="{8B287C43-BC9D-4383-AA2B-AE7E03D97CD7}" type="slidenum">
+            <a:fld id="{AA110A6F-1369-44BA-9255-0956D8D2D27B}" type="slidenum">
               <a:rPr lang="en-US" sz="1200" b="0" u="none" strike="noStrike">
                 <a:solidFill>
                   <a:schemeClr val="dk1"/>
@@ -4614,7 +4240,7 @@
       </p:grpSpPr>
       <p:sp>
         <p:nvSpPr>
-          <p:cNvPr id="478" name="PlaceHolder 1"/>
+          <p:cNvPr id="479" name="PlaceHolder 1"/>
           <p:cNvSpPr>
             <a:spLocks noGrp="1"/>
           </p:cNvSpPr>
@@ -4625,19 +4251,19 @@
         <p:spPr>
           <a:xfrm>
             <a:off x="685800" y="1143000"/>
-            <a:ext cx="5485680" cy="3085560"/>
-          </a:xfrm>
-          <a:prstGeom prst="rect">
-            <a:avLst/>
-          </a:prstGeom>
-          <a:ln w="0">
-            <a:noFill/>
-          </a:ln>
-        </p:spPr>
-      </p:sp>
-      <p:sp>
-        <p:nvSpPr>
-          <p:cNvPr id="479" name="PlaceHolder 2"/>
+            <a:ext cx="5484960" cy="3084840"/>
+          </a:xfrm>
+          <a:prstGeom prst="rect">
+            <a:avLst/>
+          </a:prstGeom>
+          <a:ln w="0">
+            <a:noFill/>
+          </a:ln>
+        </p:spPr>
+      </p:sp>
+      <p:sp>
+        <p:nvSpPr>
+          <p:cNvPr id="480" name="PlaceHolder 2"/>
           <p:cNvSpPr>
             <a:spLocks noGrp="1"/>
           </p:cNvSpPr>
@@ -4648,7 +4274,7 @@
         <p:spPr>
           <a:xfrm>
             <a:off x="685800" y="4400640"/>
-            <a:ext cx="5485680" cy="3599640"/>
+            <a:ext cx="5484960" cy="3598920"/>
           </a:xfrm>
           <a:prstGeom prst="rect">
             <a:avLst/>
@@ -4679,7 +4305,7 @@
       </p:sp>
       <p:sp>
         <p:nvSpPr>
-          <p:cNvPr id="480" name="PlaceHolder 3"/>
+          <p:cNvPr id="481" name="PlaceHolder 3"/>
           <p:cNvSpPr>
             <a:spLocks noGrp="1"/>
           </p:cNvSpPr>
@@ -4690,7 +4316,7 @@
         <p:spPr>
           <a:xfrm>
             <a:off x="3884760" y="8685360"/>
-            <a:ext cx="2971080" cy="457920"/>
+            <a:ext cx="2970360" cy="457200"/>
           </a:xfrm>
           <a:prstGeom prst="rect">
             <a:avLst/>
@@ -4734,7 +4360,7 @@
                 <a:tab pos="0" algn="l"/>
               </a:tabLst>
             </a:pPr>
-            <a:fld id="{84283502-F702-4BB0-9898-432906411777}" type="slidenum">
+            <a:fld id="{5F29BA1D-2E8A-4090-B3C4-077F7AA11041}" type="slidenum">
               <a:rPr lang="en-US" sz="1200" b="0" u="none" strike="noStrike">
                 <a:solidFill>
                   <a:schemeClr val="dk1"/>
@@ -4781,7 +4407,7 @@
       </p:grpSpPr>
       <p:sp>
         <p:nvSpPr>
-          <p:cNvPr id="559" name="PlaceHolder 1"/>
+          <p:cNvPr id="560" name="PlaceHolder 1"/>
           <p:cNvSpPr>
             <a:spLocks noGrp="1"/>
           </p:cNvSpPr>
@@ -4792,19 +4418,19 @@
         <p:spPr>
           <a:xfrm>
             <a:off x="685800" y="1143000"/>
-            <a:ext cx="5485680" cy="3085560"/>
-          </a:xfrm>
-          <a:prstGeom prst="rect">
-            <a:avLst/>
-          </a:prstGeom>
-          <a:ln w="0">
-            <a:noFill/>
-          </a:ln>
-        </p:spPr>
-      </p:sp>
-      <p:sp>
-        <p:nvSpPr>
-          <p:cNvPr id="560" name="PlaceHolder 2"/>
+            <a:ext cx="5484960" cy="3084840"/>
+          </a:xfrm>
+          <a:prstGeom prst="rect">
+            <a:avLst/>
+          </a:prstGeom>
+          <a:ln w="0">
+            <a:noFill/>
+          </a:ln>
+        </p:spPr>
+      </p:sp>
+      <p:sp>
+        <p:nvSpPr>
+          <p:cNvPr id="561" name="PlaceHolder 2"/>
           <p:cNvSpPr>
             <a:spLocks noGrp="1"/>
           </p:cNvSpPr>
@@ -4815,7 +4441,7 @@
         <p:spPr>
           <a:xfrm>
             <a:off x="685800" y="4400640"/>
-            <a:ext cx="5485680" cy="3599640"/>
+            <a:ext cx="5484960" cy="3598920"/>
           </a:xfrm>
           <a:prstGeom prst="rect">
             <a:avLst/>
@@ -4863,7 +4489,7 @@
       </p:sp>
       <p:sp>
         <p:nvSpPr>
-          <p:cNvPr id="561" name="PlaceHolder 3"/>
+          <p:cNvPr id="562" name="PlaceHolder 3"/>
           <p:cNvSpPr>
             <a:spLocks noGrp="1"/>
           </p:cNvSpPr>
@@ -4874,7 +4500,7 @@
         <p:spPr>
           <a:xfrm>
             <a:off x="3884760" y="8685360"/>
-            <a:ext cx="2971080" cy="457920"/>
+            <a:ext cx="2970360" cy="457200"/>
           </a:xfrm>
           <a:prstGeom prst="rect">
             <a:avLst/>
@@ -4918,7 +4544,7 @@
                 <a:tab pos="0" algn="l"/>
               </a:tabLst>
             </a:pPr>
-            <a:fld id="{FD92A284-3DF8-4EFF-94C1-ED30A7E2C610}" type="slidenum">
+            <a:fld id="{D11CC41C-6AFC-465B-8BFE-DF44C00B29FF}" type="slidenum">
               <a:rPr lang="en-US" sz="1200" b="0" u="none" strike="noStrike">
                 <a:solidFill>
                   <a:schemeClr val="dk1"/>
@@ -4965,7 +4591,7 @@
       </p:grpSpPr>
       <p:sp>
         <p:nvSpPr>
-          <p:cNvPr id="562" name="PlaceHolder 1"/>
+          <p:cNvPr id="563" name="PlaceHolder 1"/>
           <p:cNvSpPr>
             <a:spLocks noGrp="1"/>
           </p:cNvSpPr>
@@ -4976,19 +4602,19 @@
         <p:spPr>
           <a:xfrm>
             <a:off x="685800" y="1143000"/>
-            <a:ext cx="5485680" cy="3085560"/>
-          </a:xfrm>
-          <a:prstGeom prst="rect">
-            <a:avLst/>
-          </a:prstGeom>
-          <a:ln w="0">
-            <a:noFill/>
-          </a:ln>
-        </p:spPr>
-      </p:sp>
-      <p:sp>
-        <p:nvSpPr>
-          <p:cNvPr id="563" name="PlaceHolder 2"/>
+            <a:ext cx="5484960" cy="3084840"/>
+          </a:xfrm>
+          <a:prstGeom prst="rect">
+            <a:avLst/>
+          </a:prstGeom>
+          <a:ln w="0">
+            <a:noFill/>
+          </a:ln>
+        </p:spPr>
+      </p:sp>
+      <p:sp>
+        <p:nvSpPr>
+          <p:cNvPr id="564" name="PlaceHolder 2"/>
           <p:cNvSpPr>
             <a:spLocks noGrp="1"/>
           </p:cNvSpPr>
@@ -4999,7 +4625,7 @@
         <p:spPr>
           <a:xfrm>
             <a:off x="685800" y="4400640"/>
-            <a:ext cx="5485680" cy="3599640"/>
+            <a:ext cx="5484960" cy="3598920"/>
           </a:xfrm>
           <a:prstGeom prst="rect">
             <a:avLst/>
@@ -5047,7 +4673,7 @@
       </p:sp>
       <p:sp>
         <p:nvSpPr>
-          <p:cNvPr id="564" name="PlaceHolder 3"/>
+          <p:cNvPr id="565" name="PlaceHolder 3"/>
           <p:cNvSpPr>
             <a:spLocks noGrp="1"/>
           </p:cNvSpPr>
@@ -5058,7 +4684,7 @@
         <p:spPr>
           <a:xfrm>
             <a:off x="3884760" y="8685360"/>
-            <a:ext cx="2971080" cy="457920"/>
+            <a:ext cx="2970360" cy="457200"/>
           </a:xfrm>
           <a:prstGeom prst="rect">
             <a:avLst/>
@@ -5102,7 +4728,7 @@
                 <a:tab pos="0" algn="l"/>
               </a:tabLst>
             </a:pPr>
-            <a:fld id="{8C9289E6-C943-4DC0-B723-E84D09271402}" type="slidenum">
+            <a:fld id="{57DD6A1C-F193-4C3B-87D2-78EE1CE1EA20}" type="slidenum">
               <a:rPr lang="en-US" sz="1200" b="0" u="none" strike="noStrike">
                 <a:solidFill>
                   <a:schemeClr val="dk1"/>
@@ -5149,7 +4775,7 @@
       </p:grpSpPr>
       <p:sp>
         <p:nvSpPr>
-          <p:cNvPr id="565" name="PlaceHolder 1"/>
+          <p:cNvPr id="566" name="PlaceHolder 1"/>
           <p:cNvSpPr>
             <a:spLocks noGrp="1"/>
           </p:cNvSpPr>
@@ -5160,19 +4786,19 @@
         <p:spPr>
           <a:xfrm>
             <a:off x="685800" y="1143000"/>
-            <a:ext cx="5485680" cy="3085560"/>
-          </a:xfrm>
-          <a:prstGeom prst="rect">
-            <a:avLst/>
-          </a:prstGeom>
-          <a:ln w="0">
-            <a:noFill/>
-          </a:ln>
-        </p:spPr>
-      </p:sp>
-      <p:sp>
-        <p:nvSpPr>
-          <p:cNvPr id="566" name="PlaceHolder 2"/>
+            <a:ext cx="5484960" cy="3084840"/>
+          </a:xfrm>
+          <a:prstGeom prst="rect">
+            <a:avLst/>
+          </a:prstGeom>
+          <a:ln w="0">
+            <a:noFill/>
+          </a:ln>
+        </p:spPr>
+      </p:sp>
+      <p:sp>
+        <p:nvSpPr>
+          <p:cNvPr id="567" name="PlaceHolder 2"/>
           <p:cNvSpPr>
             <a:spLocks noGrp="1"/>
           </p:cNvSpPr>
@@ -5183,7 +4809,7 @@
         <p:spPr>
           <a:xfrm>
             <a:off x="685800" y="4400640"/>
-            <a:ext cx="5485680" cy="3599640"/>
+            <a:ext cx="5484960" cy="3598920"/>
           </a:xfrm>
           <a:prstGeom prst="rect">
             <a:avLst/>
@@ -5214,7 +4840,7 @@
       </p:sp>
       <p:sp>
         <p:nvSpPr>
-          <p:cNvPr id="567" name="PlaceHolder 3"/>
+          <p:cNvPr id="568" name="PlaceHolder 3"/>
           <p:cNvSpPr>
             <a:spLocks noGrp="1"/>
           </p:cNvSpPr>
@@ -5225,7 +4851,7 @@
         <p:spPr>
           <a:xfrm>
             <a:off x="3884760" y="8685360"/>
-            <a:ext cx="2971080" cy="457920"/>
+            <a:ext cx="2970360" cy="457200"/>
           </a:xfrm>
           <a:prstGeom prst="rect">
             <a:avLst/>
@@ -5269,7 +4895,7 @@
                 <a:tab pos="0" algn="l"/>
               </a:tabLst>
             </a:pPr>
-            <a:fld id="{73553586-82BF-4B75-9E58-B9D8859EF37B}" type="slidenum">
+            <a:fld id="{AC98530E-D0A0-47AC-B708-C0B2A6A4728B}" type="slidenum">
               <a:rPr lang="en-US" sz="1200" b="0" u="none" strike="noStrike">
                 <a:solidFill>
                   <a:schemeClr val="dk1"/>
@@ -5316,7 +4942,7 @@
       </p:grpSpPr>
       <p:sp>
         <p:nvSpPr>
-          <p:cNvPr id="568" name="PlaceHolder 1"/>
+          <p:cNvPr id="569" name="PlaceHolder 1"/>
           <p:cNvSpPr>
             <a:spLocks noGrp="1"/>
           </p:cNvSpPr>
@@ -5327,19 +4953,19 @@
         <p:spPr>
           <a:xfrm>
             <a:off x="685800" y="1143000"/>
-            <a:ext cx="5485680" cy="3085560"/>
-          </a:xfrm>
-          <a:prstGeom prst="rect">
-            <a:avLst/>
-          </a:prstGeom>
-          <a:ln w="0">
-            <a:noFill/>
-          </a:ln>
-        </p:spPr>
-      </p:sp>
-      <p:sp>
-        <p:nvSpPr>
-          <p:cNvPr id="569" name="PlaceHolder 2"/>
+            <a:ext cx="5484960" cy="3084840"/>
+          </a:xfrm>
+          <a:prstGeom prst="rect">
+            <a:avLst/>
+          </a:prstGeom>
+          <a:ln w="0">
+            <a:noFill/>
+          </a:ln>
+        </p:spPr>
+      </p:sp>
+      <p:sp>
+        <p:nvSpPr>
+          <p:cNvPr id="570" name="PlaceHolder 2"/>
           <p:cNvSpPr>
             <a:spLocks noGrp="1"/>
           </p:cNvSpPr>
@@ -5350,7 +4976,7 @@
         <p:spPr>
           <a:xfrm>
             <a:off x="685800" y="4400640"/>
-            <a:ext cx="5485680" cy="3599640"/>
+            <a:ext cx="5484960" cy="3598920"/>
           </a:xfrm>
           <a:prstGeom prst="rect">
             <a:avLst/>
@@ -5381,7 +5007,7 @@
       </p:sp>
       <p:sp>
         <p:nvSpPr>
-          <p:cNvPr id="570" name="PlaceHolder 3"/>
+          <p:cNvPr id="571" name="PlaceHolder 3"/>
           <p:cNvSpPr>
             <a:spLocks noGrp="1"/>
           </p:cNvSpPr>
@@ -5392,7 +5018,7 @@
         <p:spPr>
           <a:xfrm>
             <a:off x="3884760" y="8685360"/>
-            <a:ext cx="2971080" cy="457920"/>
+            <a:ext cx="2970360" cy="457200"/>
           </a:xfrm>
           <a:prstGeom prst="rect">
             <a:avLst/>
@@ -5436,7 +5062,7 @@
                 <a:tab pos="0" algn="l"/>
               </a:tabLst>
             </a:pPr>
-            <a:fld id="{8CDF2A16-338A-40A7-95FC-96EC6CB5F467}" type="slidenum">
+            <a:fld id="{20C1A6C2-4CC8-4DA3-B4DE-D073743FB420}" type="slidenum">
               <a:rPr lang="en-US" sz="1200" b="0" u="none" strike="noStrike">
                 <a:solidFill>
                   <a:schemeClr val="dk1"/>
@@ -5483,7 +5109,7 @@
       </p:grpSpPr>
       <p:sp>
         <p:nvSpPr>
-          <p:cNvPr id="571" name="PlaceHolder 1"/>
+          <p:cNvPr id="572" name="PlaceHolder 1"/>
           <p:cNvSpPr>
             <a:spLocks noGrp="1"/>
           </p:cNvSpPr>
@@ -5494,19 +5120,19 @@
         <p:spPr>
           <a:xfrm>
             <a:off x="685800" y="1143000"/>
-            <a:ext cx="5485680" cy="3085560"/>
-          </a:xfrm>
-          <a:prstGeom prst="rect">
-            <a:avLst/>
-          </a:prstGeom>
-          <a:ln w="0">
-            <a:noFill/>
-          </a:ln>
-        </p:spPr>
-      </p:sp>
-      <p:sp>
-        <p:nvSpPr>
-          <p:cNvPr id="572" name="PlaceHolder 2"/>
+            <a:ext cx="5484960" cy="3084840"/>
+          </a:xfrm>
+          <a:prstGeom prst="rect">
+            <a:avLst/>
+          </a:prstGeom>
+          <a:ln w="0">
+            <a:noFill/>
+          </a:ln>
+        </p:spPr>
+      </p:sp>
+      <p:sp>
+        <p:nvSpPr>
+          <p:cNvPr id="573" name="PlaceHolder 2"/>
           <p:cNvSpPr>
             <a:spLocks noGrp="1"/>
           </p:cNvSpPr>
@@ -5517,7 +5143,7 @@
         <p:spPr>
           <a:xfrm>
             <a:off x="685800" y="4400640"/>
-            <a:ext cx="5485680" cy="3599640"/>
+            <a:ext cx="5484960" cy="3598920"/>
           </a:xfrm>
           <a:prstGeom prst="rect">
             <a:avLst/>
@@ -5548,7 +5174,7 @@
       </p:sp>
       <p:sp>
         <p:nvSpPr>
-          <p:cNvPr id="573" name="PlaceHolder 3"/>
+          <p:cNvPr id="574" name="PlaceHolder 3"/>
           <p:cNvSpPr>
             <a:spLocks noGrp="1"/>
           </p:cNvSpPr>
@@ -5559,7 +5185,7 @@
         <p:spPr>
           <a:xfrm>
             <a:off x="3884760" y="8685360"/>
-            <a:ext cx="2971080" cy="457920"/>
+            <a:ext cx="2970360" cy="457200"/>
           </a:xfrm>
           <a:prstGeom prst="rect">
             <a:avLst/>
@@ -5603,7 +5229,7 @@
                 <a:tab pos="0" algn="l"/>
               </a:tabLst>
             </a:pPr>
-            <a:fld id="{31C27743-8E26-4DC2-8FB5-4487B166F595}" type="slidenum">
+            <a:fld id="{0CEB0B7D-1DDE-4644-9367-350F8DD5B5A9}" type="slidenum">
               <a:rPr lang="en-US" sz="1200" b="0" u="none" strike="noStrike">
                 <a:solidFill>
                   <a:schemeClr val="dk1"/>
@@ -5650,7 +5276,7 @@
       </p:grpSpPr>
       <p:sp>
         <p:nvSpPr>
-          <p:cNvPr id="574" name="PlaceHolder 1"/>
+          <p:cNvPr id="575" name="PlaceHolder 1"/>
           <p:cNvSpPr>
             <a:spLocks noGrp="1"/>
           </p:cNvSpPr>
@@ -5661,19 +5287,19 @@
         <p:spPr>
           <a:xfrm>
             <a:off x="685800" y="1143000"/>
-            <a:ext cx="5485680" cy="3085560"/>
-          </a:xfrm>
-          <a:prstGeom prst="rect">
-            <a:avLst/>
-          </a:prstGeom>
-          <a:ln w="0">
-            <a:noFill/>
-          </a:ln>
-        </p:spPr>
-      </p:sp>
-      <p:sp>
-        <p:nvSpPr>
-          <p:cNvPr id="575" name="PlaceHolder 2"/>
+            <a:ext cx="5484960" cy="3084840"/>
+          </a:xfrm>
+          <a:prstGeom prst="rect">
+            <a:avLst/>
+          </a:prstGeom>
+          <a:ln w="0">
+            <a:noFill/>
+          </a:ln>
+        </p:spPr>
+      </p:sp>
+      <p:sp>
+        <p:nvSpPr>
+          <p:cNvPr id="576" name="PlaceHolder 2"/>
           <p:cNvSpPr>
             <a:spLocks noGrp="1"/>
           </p:cNvSpPr>
@@ -5684,7 +5310,7 @@
         <p:spPr>
           <a:xfrm>
             <a:off x="685800" y="4400640"/>
-            <a:ext cx="5485680" cy="3599640"/>
+            <a:ext cx="5484960" cy="3598920"/>
           </a:xfrm>
           <a:prstGeom prst="rect">
             <a:avLst/>
@@ -5715,7 +5341,7 @@
       </p:sp>
       <p:sp>
         <p:nvSpPr>
-          <p:cNvPr id="576" name="PlaceHolder 3"/>
+          <p:cNvPr id="577" name="PlaceHolder 3"/>
           <p:cNvSpPr>
             <a:spLocks noGrp="1"/>
           </p:cNvSpPr>
@@ -5726,7 +5352,7 @@
         <p:spPr>
           <a:xfrm>
             <a:off x="3884760" y="8685360"/>
-            <a:ext cx="2971080" cy="457920"/>
+            <a:ext cx="2970360" cy="457200"/>
           </a:xfrm>
           <a:prstGeom prst="rect">
             <a:avLst/>
@@ -5770,7 +5396,7 @@
                 <a:tab pos="0" algn="l"/>
               </a:tabLst>
             </a:pPr>
-            <a:fld id="{F9C8D9DC-0778-4CA1-BC26-6D5F3AE04AAB}" type="slidenum">
+            <a:fld id="{D54ECA89-5319-40C5-858A-F68045A28CE8}" type="slidenum">
               <a:rPr lang="en-US" sz="1200" b="0" u="none" strike="noStrike">
                 <a:solidFill>
                   <a:schemeClr val="dk1"/>
@@ -5817,7 +5443,7 @@
       </p:grpSpPr>
       <p:sp>
         <p:nvSpPr>
-          <p:cNvPr id="577" name="PlaceHolder 1"/>
+          <p:cNvPr id="578" name="PlaceHolder 1"/>
           <p:cNvSpPr>
             <a:spLocks noGrp="1"/>
           </p:cNvSpPr>
@@ -5828,19 +5454,19 @@
         <p:spPr>
           <a:xfrm>
             <a:off x="685800" y="1143000"/>
-            <a:ext cx="5485680" cy="3085560"/>
-          </a:xfrm>
-          <a:prstGeom prst="rect">
-            <a:avLst/>
-          </a:prstGeom>
-          <a:ln w="0">
-            <a:noFill/>
-          </a:ln>
-        </p:spPr>
-      </p:sp>
-      <p:sp>
-        <p:nvSpPr>
-          <p:cNvPr id="578" name="PlaceHolder 2"/>
+            <a:ext cx="5484960" cy="3084840"/>
+          </a:xfrm>
+          <a:prstGeom prst="rect">
+            <a:avLst/>
+          </a:prstGeom>
+          <a:ln w="0">
+            <a:noFill/>
+          </a:ln>
+        </p:spPr>
+      </p:sp>
+      <p:sp>
+        <p:nvSpPr>
+          <p:cNvPr id="579" name="PlaceHolder 2"/>
           <p:cNvSpPr>
             <a:spLocks noGrp="1"/>
           </p:cNvSpPr>
@@ -5851,7 +5477,7 @@
         <p:spPr>
           <a:xfrm>
             <a:off x="685800" y="4400640"/>
-            <a:ext cx="5485680" cy="3599640"/>
+            <a:ext cx="5484960" cy="3598920"/>
           </a:xfrm>
           <a:prstGeom prst="rect">
             <a:avLst/>
@@ -5882,7 +5508,7 @@
       </p:sp>
       <p:sp>
         <p:nvSpPr>
-          <p:cNvPr id="579" name="PlaceHolder 3"/>
+          <p:cNvPr id="580" name="PlaceHolder 3"/>
           <p:cNvSpPr>
             <a:spLocks noGrp="1"/>
           </p:cNvSpPr>
@@ -5893,7 +5519,7 @@
         <p:spPr>
           <a:xfrm>
             <a:off x="3884760" y="8685360"/>
-            <a:ext cx="2971080" cy="457920"/>
+            <a:ext cx="2970360" cy="457200"/>
           </a:xfrm>
           <a:prstGeom prst="rect">
             <a:avLst/>
@@ -5937,7 +5563,7 @@
                 <a:tab pos="0" algn="l"/>
               </a:tabLst>
             </a:pPr>
-            <a:fld id="{671D6208-1D54-4A48-A04D-B127101F68DF}" type="slidenum">
+            <a:fld id="{E73BF910-8D9A-4DEA-ACD1-D8FA14F2302C}" type="slidenum">
               <a:rPr lang="en-US" sz="1200" b="0" u="none" strike="noStrike">
                 <a:solidFill>
                   <a:schemeClr val="dk1"/>
@@ -5984,7 +5610,7 @@
       </p:grpSpPr>
       <p:sp>
         <p:nvSpPr>
-          <p:cNvPr id="580" name="PlaceHolder 1"/>
+          <p:cNvPr id="581" name="PlaceHolder 1"/>
           <p:cNvSpPr>
             <a:spLocks noGrp="1"/>
           </p:cNvSpPr>
@@ -5995,19 +5621,19 @@
         <p:spPr>
           <a:xfrm>
             <a:off x="685800" y="1143000"/>
-            <a:ext cx="5485680" cy="3085560"/>
-          </a:xfrm>
-          <a:prstGeom prst="rect">
-            <a:avLst/>
-          </a:prstGeom>
-          <a:ln w="0">
-            <a:noFill/>
-          </a:ln>
-        </p:spPr>
-      </p:sp>
-      <p:sp>
-        <p:nvSpPr>
-          <p:cNvPr id="581" name="PlaceHolder 2"/>
+            <a:ext cx="5484960" cy="3084840"/>
+          </a:xfrm>
+          <a:prstGeom prst="rect">
+            <a:avLst/>
+          </a:prstGeom>
+          <a:ln w="0">
+            <a:noFill/>
+          </a:ln>
+        </p:spPr>
+      </p:sp>
+      <p:sp>
+        <p:nvSpPr>
+          <p:cNvPr id="582" name="PlaceHolder 2"/>
           <p:cNvSpPr>
             <a:spLocks noGrp="1"/>
           </p:cNvSpPr>
@@ -6018,7 +5644,7 @@
         <p:spPr>
           <a:xfrm>
             <a:off x="685800" y="4400640"/>
-            <a:ext cx="5485680" cy="3599640"/>
+            <a:ext cx="5484960" cy="3598920"/>
           </a:xfrm>
           <a:prstGeom prst="rect">
             <a:avLst/>
@@ -6066,7 +5692,7 @@
       </p:sp>
       <p:sp>
         <p:nvSpPr>
-          <p:cNvPr id="582" name="PlaceHolder 3"/>
+          <p:cNvPr id="583" name="PlaceHolder 3"/>
           <p:cNvSpPr>
             <a:spLocks noGrp="1"/>
           </p:cNvSpPr>
@@ -6077,7 +5703,7 @@
         <p:spPr>
           <a:xfrm>
             <a:off x="3884760" y="8685360"/>
-            <a:ext cx="2971080" cy="457920"/>
+            <a:ext cx="2970360" cy="457200"/>
           </a:xfrm>
           <a:prstGeom prst="rect">
             <a:avLst/>
@@ -6121,7 +5747,7 @@
                 <a:tab pos="0" algn="l"/>
               </a:tabLst>
             </a:pPr>
-            <a:fld id="{BB1D50A6-7D1D-4AB0-B1C8-686C1444AD0E}" type="slidenum">
+            <a:fld id="{C4779AF9-5295-42EA-B28B-2810E33B1FC2}" type="slidenum">
               <a:rPr lang="en-US" sz="1200" b="0" u="none" strike="noStrike">
                 <a:solidFill>
                   <a:schemeClr val="dk1"/>
@@ -6168,7 +5794,7 @@
       </p:grpSpPr>
       <p:sp>
         <p:nvSpPr>
-          <p:cNvPr id="481" name="PlaceHolder 1"/>
+          <p:cNvPr id="482" name="PlaceHolder 1"/>
           <p:cNvSpPr>
             <a:spLocks noGrp="1"/>
           </p:cNvSpPr>
@@ -6179,19 +5805,19 @@
         <p:spPr>
           <a:xfrm>
             <a:off x="685800" y="1143000"/>
-            <a:ext cx="5485680" cy="3085560"/>
-          </a:xfrm>
-          <a:prstGeom prst="rect">
-            <a:avLst/>
-          </a:prstGeom>
-          <a:ln w="0">
-            <a:noFill/>
-          </a:ln>
-        </p:spPr>
-      </p:sp>
-      <p:sp>
-        <p:nvSpPr>
-          <p:cNvPr id="482" name="PlaceHolder 2"/>
+            <a:ext cx="5484960" cy="3084840"/>
+          </a:xfrm>
+          <a:prstGeom prst="rect">
+            <a:avLst/>
+          </a:prstGeom>
+          <a:ln w="0">
+            <a:noFill/>
+          </a:ln>
+        </p:spPr>
+      </p:sp>
+      <p:sp>
+        <p:nvSpPr>
+          <p:cNvPr id="483" name="PlaceHolder 2"/>
           <p:cNvSpPr>
             <a:spLocks noGrp="1"/>
           </p:cNvSpPr>
@@ -6202,7 +5828,7 @@
         <p:spPr>
           <a:xfrm>
             <a:off x="685800" y="4400640"/>
-            <a:ext cx="5485680" cy="3599640"/>
+            <a:ext cx="5484960" cy="3598920"/>
           </a:xfrm>
           <a:prstGeom prst="rect">
             <a:avLst/>
@@ -6233,7 +5859,7 @@
       </p:sp>
       <p:sp>
         <p:nvSpPr>
-          <p:cNvPr id="483" name="PlaceHolder 3"/>
+          <p:cNvPr id="484" name="PlaceHolder 3"/>
           <p:cNvSpPr>
             <a:spLocks noGrp="1"/>
           </p:cNvSpPr>
@@ -6244,7 +5870,7 @@
         <p:spPr>
           <a:xfrm>
             <a:off x="3884760" y="8685360"/>
-            <a:ext cx="2971080" cy="457920"/>
+            <a:ext cx="2970360" cy="457200"/>
           </a:xfrm>
           <a:prstGeom prst="rect">
             <a:avLst/>
@@ -6288,7 +5914,7 @@
                 <a:tab pos="0" algn="l"/>
               </a:tabLst>
             </a:pPr>
-            <a:fld id="{748B6CE8-B91D-45C4-98AE-72CD4176D265}" type="slidenum">
+            <a:fld id="{2FA7E825-FF23-4C18-B2F9-ACFBAB29FBA2}" type="slidenum">
               <a:rPr lang="en-US" sz="1200" b="0" u="none" strike="noStrike">
                 <a:solidFill>
                   <a:schemeClr val="dk1"/>
@@ -6335,7 +5961,7 @@
       </p:grpSpPr>
       <p:sp>
         <p:nvSpPr>
-          <p:cNvPr id="484" name="PlaceHolder 1"/>
+          <p:cNvPr id="485" name="PlaceHolder 1"/>
           <p:cNvSpPr>
             <a:spLocks noGrp="1"/>
           </p:cNvSpPr>
@@ -6346,19 +5972,19 @@
         <p:spPr>
           <a:xfrm>
             <a:off x="685800" y="1143000"/>
-            <a:ext cx="5485680" cy="3085560"/>
-          </a:xfrm>
-          <a:prstGeom prst="rect">
-            <a:avLst/>
-          </a:prstGeom>
-          <a:ln w="0">
-            <a:noFill/>
-          </a:ln>
-        </p:spPr>
-      </p:sp>
-      <p:sp>
-        <p:nvSpPr>
-          <p:cNvPr id="485" name="PlaceHolder 2"/>
+            <a:ext cx="5484960" cy="3084840"/>
+          </a:xfrm>
+          <a:prstGeom prst="rect">
+            <a:avLst/>
+          </a:prstGeom>
+          <a:ln w="0">
+            <a:noFill/>
+          </a:ln>
+        </p:spPr>
+      </p:sp>
+      <p:sp>
+        <p:nvSpPr>
+          <p:cNvPr id="486" name="PlaceHolder 2"/>
           <p:cNvSpPr>
             <a:spLocks noGrp="1"/>
           </p:cNvSpPr>
@@ -6369,7 +5995,7 @@
         <p:spPr>
           <a:xfrm>
             <a:off x="685800" y="4400640"/>
-            <a:ext cx="5485680" cy="3599640"/>
+            <a:ext cx="5484960" cy="3598920"/>
           </a:xfrm>
           <a:prstGeom prst="rect">
             <a:avLst/>
@@ -6400,7 +6026,7 @@
       </p:sp>
       <p:sp>
         <p:nvSpPr>
-          <p:cNvPr id="486" name="PlaceHolder 3"/>
+          <p:cNvPr id="487" name="PlaceHolder 3"/>
           <p:cNvSpPr>
             <a:spLocks noGrp="1"/>
           </p:cNvSpPr>
@@ -6411,7 +6037,7 @@
         <p:spPr>
           <a:xfrm>
             <a:off x="3884760" y="8685360"/>
-            <a:ext cx="2971080" cy="457920"/>
+            <a:ext cx="2970360" cy="457200"/>
           </a:xfrm>
           <a:prstGeom prst="rect">
             <a:avLst/>
@@ -6455,7 +6081,7 @@
                 <a:tab pos="0" algn="l"/>
               </a:tabLst>
             </a:pPr>
-            <a:fld id="{FEC04D4C-79ED-4F20-B33D-84C17A3CEEE1}" type="slidenum">
+            <a:fld id="{4F150AD4-A582-4503-A178-382FFA8D5DE5}" type="slidenum">
               <a:rPr lang="en-US" sz="1200" b="0" u="none" strike="noStrike">
                 <a:solidFill>
                   <a:schemeClr val="dk1"/>
@@ -6502,7 +6128,7 @@
       </p:grpSpPr>
       <p:sp>
         <p:nvSpPr>
-          <p:cNvPr id="487" name="PlaceHolder 1"/>
+          <p:cNvPr id="488" name="PlaceHolder 1"/>
           <p:cNvSpPr>
             <a:spLocks noGrp="1"/>
           </p:cNvSpPr>
@@ -6513,19 +6139,19 @@
         <p:spPr>
           <a:xfrm>
             <a:off x="685800" y="1143000"/>
-            <a:ext cx="5485680" cy="3085560"/>
-          </a:xfrm>
-          <a:prstGeom prst="rect">
-            <a:avLst/>
-          </a:prstGeom>
-          <a:ln w="0">
-            <a:noFill/>
-          </a:ln>
-        </p:spPr>
-      </p:sp>
-      <p:sp>
-        <p:nvSpPr>
-          <p:cNvPr id="488" name="PlaceHolder 2"/>
+            <a:ext cx="5484960" cy="3084840"/>
+          </a:xfrm>
+          <a:prstGeom prst="rect">
+            <a:avLst/>
+          </a:prstGeom>
+          <a:ln w="0">
+            <a:noFill/>
+          </a:ln>
+        </p:spPr>
+      </p:sp>
+      <p:sp>
+        <p:nvSpPr>
+          <p:cNvPr id="489" name="PlaceHolder 2"/>
           <p:cNvSpPr>
             <a:spLocks noGrp="1"/>
           </p:cNvSpPr>
@@ -6536,7 +6162,7 @@
         <p:spPr>
           <a:xfrm>
             <a:off x="685800" y="4400640"/>
-            <a:ext cx="5485680" cy="3599640"/>
+            <a:ext cx="5484960" cy="3598920"/>
           </a:xfrm>
           <a:prstGeom prst="rect">
             <a:avLst/>
@@ -6584,7 +6210,7 @@
       </p:sp>
       <p:sp>
         <p:nvSpPr>
-          <p:cNvPr id="489" name="PlaceHolder 3"/>
+          <p:cNvPr id="490" name="PlaceHolder 3"/>
           <p:cNvSpPr>
             <a:spLocks noGrp="1"/>
           </p:cNvSpPr>
@@ -6595,7 +6221,7 @@
         <p:spPr>
           <a:xfrm>
             <a:off x="3884760" y="8685360"/>
-            <a:ext cx="2971080" cy="457920"/>
+            <a:ext cx="2970360" cy="457200"/>
           </a:xfrm>
           <a:prstGeom prst="rect">
             <a:avLst/>
@@ -6639,7 +6265,7 @@
                 <a:tab pos="0" algn="l"/>
               </a:tabLst>
             </a:pPr>
-            <a:fld id="{524DED91-E94C-4537-84C8-F480FDA6DC0E}" type="slidenum">
+            <a:fld id="{C7773500-57E6-491B-8A26-1A924A2D22EF}" type="slidenum">
               <a:rPr lang="en-US" sz="1200" b="0" u="none" strike="noStrike">
                 <a:solidFill>
                   <a:schemeClr val="dk1"/>
@@ -6686,7 +6312,7 @@
       </p:grpSpPr>
       <p:sp>
         <p:nvSpPr>
-          <p:cNvPr id="490" name="PlaceHolder 1"/>
+          <p:cNvPr id="491" name="PlaceHolder 1"/>
           <p:cNvSpPr>
             <a:spLocks noGrp="1"/>
           </p:cNvSpPr>
@@ -6697,19 +6323,19 @@
         <p:spPr>
           <a:xfrm>
             <a:off x="685800" y="1143000"/>
-            <a:ext cx="5485680" cy="3085560"/>
-          </a:xfrm>
-          <a:prstGeom prst="rect">
-            <a:avLst/>
-          </a:prstGeom>
-          <a:ln w="0">
-            <a:noFill/>
-          </a:ln>
-        </p:spPr>
-      </p:sp>
-      <p:sp>
-        <p:nvSpPr>
-          <p:cNvPr id="491" name="PlaceHolder 2"/>
+            <a:ext cx="5484960" cy="3084840"/>
+          </a:xfrm>
+          <a:prstGeom prst="rect">
+            <a:avLst/>
+          </a:prstGeom>
+          <a:ln w="0">
+            <a:noFill/>
+          </a:ln>
+        </p:spPr>
+      </p:sp>
+      <p:sp>
+        <p:nvSpPr>
+          <p:cNvPr id="492" name="PlaceHolder 2"/>
           <p:cNvSpPr>
             <a:spLocks noGrp="1"/>
           </p:cNvSpPr>
@@ -6720,7 +6346,7 @@
         <p:spPr>
           <a:xfrm>
             <a:off x="685800" y="4400640"/>
-            <a:ext cx="5485680" cy="3599640"/>
+            <a:ext cx="5484960" cy="3598920"/>
           </a:xfrm>
           <a:prstGeom prst="rect">
             <a:avLst/>
@@ -6751,7 +6377,7 @@
       </p:sp>
       <p:sp>
         <p:nvSpPr>
-          <p:cNvPr id="492" name="PlaceHolder 3"/>
+          <p:cNvPr id="493" name="PlaceHolder 3"/>
           <p:cNvSpPr>
             <a:spLocks noGrp="1"/>
           </p:cNvSpPr>
@@ -6762,7 +6388,7 @@
         <p:spPr>
           <a:xfrm>
             <a:off x="3884760" y="8685360"/>
-            <a:ext cx="2971080" cy="457920"/>
+            <a:ext cx="2970360" cy="457200"/>
           </a:xfrm>
           <a:prstGeom prst="rect">
             <a:avLst/>
@@ -6806,7 +6432,7 @@
                 <a:tab pos="0" algn="l"/>
               </a:tabLst>
             </a:pPr>
-            <a:fld id="{90427D43-0E9A-45AA-840A-3D1DB56E9499}" type="slidenum">
+            <a:fld id="{380F03E7-9932-426A-98DA-F5BFB8FCDA1E}" type="slidenum">
               <a:rPr lang="en-US" sz="1200" b="0" u="none" strike="noStrike">
                 <a:solidFill>
                   <a:schemeClr val="dk1"/>
@@ -6853,7 +6479,7 @@
       </p:grpSpPr>
       <p:sp>
         <p:nvSpPr>
-          <p:cNvPr id="493" name="PlaceHolder 1"/>
+          <p:cNvPr id="494" name="PlaceHolder 1"/>
           <p:cNvSpPr>
             <a:spLocks noGrp="1"/>
           </p:cNvSpPr>
@@ -6864,19 +6490,19 @@
         <p:spPr>
           <a:xfrm>
             <a:off x="685800" y="1143000"/>
-            <a:ext cx="5485680" cy="3085560"/>
-          </a:xfrm>
-          <a:prstGeom prst="rect">
-            <a:avLst/>
-          </a:prstGeom>
-          <a:ln w="0">
-            <a:noFill/>
-          </a:ln>
-        </p:spPr>
-      </p:sp>
-      <p:sp>
-        <p:nvSpPr>
-          <p:cNvPr id="494" name="PlaceHolder 2"/>
+            <a:ext cx="5484960" cy="3084840"/>
+          </a:xfrm>
+          <a:prstGeom prst="rect">
+            <a:avLst/>
+          </a:prstGeom>
+          <a:ln w="0">
+            <a:noFill/>
+          </a:ln>
+        </p:spPr>
+      </p:sp>
+      <p:sp>
+        <p:nvSpPr>
+          <p:cNvPr id="495" name="PlaceHolder 2"/>
           <p:cNvSpPr>
             <a:spLocks noGrp="1"/>
           </p:cNvSpPr>
@@ -6887,7 +6513,7 @@
         <p:spPr>
           <a:xfrm>
             <a:off x="685800" y="4400640"/>
-            <a:ext cx="5485680" cy="3599640"/>
+            <a:ext cx="5484960" cy="3598920"/>
           </a:xfrm>
           <a:prstGeom prst="rect">
             <a:avLst/>
@@ -6935,7 +6561,7 @@
       </p:sp>
       <p:sp>
         <p:nvSpPr>
-          <p:cNvPr id="495" name="PlaceHolder 3"/>
+          <p:cNvPr id="496" name="PlaceHolder 3"/>
           <p:cNvSpPr>
             <a:spLocks noGrp="1"/>
           </p:cNvSpPr>
@@ -6946,7 +6572,7 @@
         <p:spPr>
           <a:xfrm>
             <a:off x="3884760" y="8685360"/>
-            <a:ext cx="2971080" cy="457920"/>
+            <a:ext cx="2970360" cy="457200"/>
           </a:xfrm>
           <a:prstGeom prst="rect">
             <a:avLst/>
@@ -6990,7 +6616,7 @@
                 <a:tab pos="0" algn="l"/>
               </a:tabLst>
             </a:pPr>
-            <a:fld id="{78408543-6ABC-42AE-ACB4-CEE5C8AFE479}" type="slidenum">
+            <a:fld id="{F064AEF3-384A-4953-9B91-793547FFFD64}" type="slidenum">
               <a:rPr lang="en-US" sz="1200" b="0" u="none" strike="noStrike">
                 <a:solidFill>
                   <a:schemeClr val="dk1"/>
@@ -7037,7 +6663,7 @@
       </p:grpSpPr>
       <p:sp>
         <p:nvSpPr>
-          <p:cNvPr id="496" name="PlaceHolder 1"/>
+          <p:cNvPr id="497" name="PlaceHolder 1"/>
           <p:cNvSpPr>
             <a:spLocks noGrp="1"/>
           </p:cNvSpPr>
@@ -7048,19 +6674,19 @@
         <p:spPr>
           <a:xfrm>
             <a:off x="685800" y="1143000"/>
-            <a:ext cx="5485680" cy="3085560"/>
-          </a:xfrm>
-          <a:prstGeom prst="rect">
-            <a:avLst/>
-          </a:prstGeom>
-          <a:ln w="0">
-            <a:noFill/>
-          </a:ln>
-        </p:spPr>
-      </p:sp>
-      <p:sp>
-        <p:nvSpPr>
-          <p:cNvPr id="497" name="PlaceHolder 2"/>
+            <a:ext cx="5484960" cy="3084840"/>
+          </a:xfrm>
+          <a:prstGeom prst="rect">
+            <a:avLst/>
+          </a:prstGeom>
+          <a:ln w="0">
+            <a:noFill/>
+          </a:ln>
+        </p:spPr>
+      </p:sp>
+      <p:sp>
+        <p:nvSpPr>
+          <p:cNvPr id="498" name="PlaceHolder 2"/>
           <p:cNvSpPr>
             <a:spLocks noGrp="1"/>
           </p:cNvSpPr>
@@ -7071,7 +6697,7 @@
         <p:spPr>
           <a:xfrm>
             <a:off x="685800" y="4400640"/>
-            <a:ext cx="5485680" cy="3599640"/>
+            <a:ext cx="5484960" cy="3598920"/>
           </a:xfrm>
           <a:prstGeom prst="rect">
             <a:avLst/>
@@ -7102,7 +6728,7 @@
       </p:sp>
       <p:sp>
         <p:nvSpPr>
-          <p:cNvPr id="498" name="PlaceHolder 3"/>
+          <p:cNvPr id="499" name="PlaceHolder 3"/>
           <p:cNvSpPr>
             <a:spLocks noGrp="1"/>
           </p:cNvSpPr>
@@ -7113,7 +6739,7 @@
         <p:spPr>
           <a:xfrm>
             <a:off x="3884760" y="8685360"/>
-            <a:ext cx="2971080" cy="457920"/>
+            <a:ext cx="2970360" cy="457200"/>
           </a:xfrm>
           <a:prstGeom prst="rect">
             <a:avLst/>
@@ -7157,7 +6783,7 @@
                 <a:tab pos="0" algn="l"/>
               </a:tabLst>
             </a:pPr>
-            <a:fld id="{85520EB9-7374-40E7-B7B4-9EDCF4D25DDC}" type="slidenum">
+            <a:fld id="{4AAFDCCB-9B31-4CC9-97CF-6495C62AB151}" type="slidenum">
               <a:rPr lang="en-US" sz="1200" b="0" u="none" strike="noStrike">
                 <a:solidFill>
                   <a:schemeClr val="dk1"/>
@@ -7733,7 +7359,7 @@
         <p:spPr>
           <a:xfrm>
             <a:off x="-2286000" y="3657600"/>
-            <a:ext cx="6400080" cy="6400080"/>
+            <a:ext cx="6399360" cy="6399360"/>
           </a:xfrm>
           <a:prstGeom prst="ellipse">
             <a:avLst/>
@@ -7776,7 +7402,7 @@
         <p:spPr>
           <a:xfrm>
             <a:off x="8229600" y="-2743200"/>
-            <a:ext cx="6400080" cy="6400080"/>
+            <a:ext cx="6399360" cy="6399360"/>
           </a:xfrm>
           <a:prstGeom prst="ellipse">
             <a:avLst/>
@@ -7819,7 +7445,7 @@
         <p:spPr>
           <a:xfrm>
             <a:off x="5500080" y="914400"/>
-            <a:ext cx="1188000" cy="1188000"/>
+            <a:ext cx="1187280" cy="1187280"/>
           </a:xfrm>
           <a:prstGeom prst="ellipse">
             <a:avLst/>
@@ -7866,7 +7492,7 @@
         <p:spPr>
           <a:xfrm>
             <a:off x="5678280" y="1092600"/>
-            <a:ext cx="831240" cy="831240"/>
+            <a:ext cx="830520" cy="830520"/>
           </a:xfrm>
           <a:prstGeom prst="rect">
             <a:avLst/>
@@ -7886,7 +7512,7 @@
         <p:spPr>
           <a:xfrm>
             <a:off x="914400" y="2377440"/>
-            <a:ext cx="10359360" cy="1005120"/>
+            <a:ext cx="10358640" cy="1004400"/>
           </a:xfrm>
           <a:prstGeom prst="rect">
             <a:avLst/>
@@ -7947,7 +7573,7 @@
         <p:spPr>
           <a:xfrm>
             <a:off x="914400" y="3383280"/>
-            <a:ext cx="10359360" cy="547920"/>
+            <a:ext cx="10358640" cy="547200"/>
           </a:xfrm>
           <a:prstGeom prst="rect">
             <a:avLst/>
@@ -8008,7 +7634,7 @@
         <p:spPr>
           <a:xfrm>
             <a:off x="914400" y="3977640"/>
-            <a:ext cx="10359360" cy="456480"/>
+            <a:ext cx="10358640" cy="455760"/>
           </a:xfrm>
           <a:prstGeom prst="rect">
             <a:avLst/>
@@ -8069,7 +7695,7 @@
         <p:spPr>
           <a:xfrm>
             <a:off x="11521440" y="6446520"/>
-            <a:ext cx="456480" cy="273600"/>
+            <a:ext cx="455760" cy="272880"/>
           </a:xfrm>
           <a:prstGeom prst="rect">
             <a:avLst/>
@@ -8167,7 +7793,7 @@
         <p:spPr>
           <a:xfrm>
             <a:off x="-1828800" y="5120640"/>
-            <a:ext cx="3656880" cy="3656880"/>
+            <a:ext cx="3656160" cy="3656160"/>
           </a:xfrm>
           <a:prstGeom prst="ellipse">
             <a:avLst/>
@@ -8210,7 +7836,7 @@
         <p:spPr>
           <a:xfrm>
             <a:off x="457200" y="457200"/>
-            <a:ext cx="639360" cy="639360"/>
+            <a:ext cx="638640" cy="638640"/>
           </a:xfrm>
           <a:prstGeom prst="ellipse">
             <a:avLst/>
@@ -8257,7 +7883,7 @@
         <p:spPr>
           <a:xfrm>
             <a:off x="553320" y="553320"/>
-            <a:ext cx="447480" cy="447480"/>
+            <a:ext cx="446760" cy="446760"/>
           </a:xfrm>
           <a:prstGeom prst="rect">
             <a:avLst/>
@@ -8277,7 +7903,7 @@
         <p:spPr>
           <a:xfrm>
             <a:off x="1280160" y="457200"/>
-            <a:ext cx="10423440" cy="639360"/>
+            <a:ext cx="10422720" cy="638640"/>
           </a:xfrm>
           <a:prstGeom prst="rect">
             <a:avLst/>
@@ -8338,7 +7964,7 @@
         <p:spPr>
           <a:xfrm>
             <a:off x="548640" y="1828800"/>
-            <a:ext cx="4754160" cy="4022640"/>
+            <a:ext cx="4753440" cy="4021920"/>
           </a:xfrm>
           <a:prstGeom prst="rect">
             <a:avLst/>
@@ -8439,7 +8065,7 @@
         <p:spPr>
           <a:xfrm>
             <a:off x="5486400" y="1691640"/>
-            <a:ext cx="6217200" cy="4342680"/>
+            <a:ext cx="6216480" cy="4341960"/>
           </a:xfrm>
           <a:prstGeom prst="roundRect">
             <a:avLst>
@@ -8484,7 +8110,7 @@
         <p:spPr>
           <a:xfrm>
             <a:off x="5806440" y="1965960"/>
-            <a:ext cx="5577120" cy="3794040"/>
+            <a:ext cx="5576400" cy="3793320"/>
           </a:xfrm>
           <a:prstGeom prst="rect">
             <a:avLst/>
@@ -8755,7 +8381,7 @@
         <p:spPr>
           <a:xfrm>
             <a:off x="457200" y="6446520"/>
-            <a:ext cx="6400080" cy="273600"/>
+            <a:ext cx="6399360" cy="272880"/>
           </a:xfrm>
           <a:prstGeom prst="rect">
             <a:avLst/>
@@ -8816,7 +8442,7 @@
         <p:spPr>
           <a:xfrm>
             <a:off x="11521440" y="6446520"/>
-            <a:ext cx="456480" cy="273600"/>
+            <a:ext cx="455760" cy="272880"/>
           </a:xfrm>
           <a:prstGeom prst="rect">
             <a:avLst/>
@@ -8914,7 +8540,7 @@
         <p:spPr>
           <a:xfrm>
             <a:off x="-1828800" y="5120640"/>
-            <a:ext cx="3656880" cy="3656880"/>
+            <a:ext cx="3656160" cy="3656160"/>
           </a:xfrm>
           <a:prstGeom prst="ellipse">
             <a:avLst/>
@@ -8957,7 +8583,7 @@
         <p:spPr>
           <a:xfrm>
             <a:off x="457200" y="457200"/>
-            <a:ext cx="639360" cy="639360"/>
+            <a:ext cx="638640" cy="638640"/>
           </a:xfrm>
           <a:prstGeom prst="ellipse">
             <a:avLst/>
@@ -9004,7 +8630,7 @@
         <p:spPr>
           <a:xfrm>
             <a:off x="553320" y="553320"/>
-            <a:ext cx="447480" cy="447480"/>
+            <a:ext cx="446760" cy="446760"/>
           </a:xfrm>
           <a:prstGeom prst="rect">
             <a:avLst/>
@@ -9024,7 +8650,7 @@
         <p:spPr>
           <a:xfrm>
             <a:off x="1280160" y="457200"/>
-            <a:ext cx="10423440" cy="639360"/>
+            <a:ext cx="10422720" cy="638640"/>
           </a:xfrm>
           <a:prstGeom prst="rect">
             <a:avLst/>
@@ -9085,7 +8711,7 @@
         <p:spPr>
           <a:xfrm>
             <a:off x="548640" y="1828800"/>
-            <a:ext cx="4754160" cy="4022640"/>
+            <a:ext cx="4753440" cy="4021920"/>
           </a:xfrm>
           <a:prstGeom prst="rect">
             <a:avLst/>
@@ -9221,7 +8847,7 @@
         <p:spPr>
           <a:xfrm>
             <a:off x="5486400" y="1691640"/>
-            <a:ext cx="6217200" cy="4342680"/>
+            <a:ext cx="6216480" cy="4341960"/>
           </a:xfrm>
           <a:prstGeom prst="roundRect">
             <a:avLst>
@@ -9266,7 +8892,7 @@
         <p:spPr>
           <a:xfrm>
             <a:off x="5806440" y="1965960"/>
-            <a:ext cx="5577120" cy="3794040"/>
+            <a:ext cx="5576400" cy="3793320"/>
           </a:xfrm>
           <a:prstGeom prst="rect">
             <a:avLst/>
@@ -9567,7 +9193,7 @@
         <p:spPr>
           <a:xfrm>
             <a:off x="457200" y="6446520"/>
-            <a:ext cx="6400080" cy="273600"/>
+            <a:ext cx="6399360" cy="272880"/>
           </a:xfrm>
           <a:prstGeom prst="rect">
             <a:avLst/>
@@ -9628,7 +9254,7 @@
         <p:spPr>
           <a:xfrm>
             <a:off x="11521440" y="6446520"/>
-            <a:ext cx="456480" cy="273600"/>
+            <a:ext cx="455760" cy="272880"/>
           </a:xfrm>
           <a:prstGeom prst="rect">
             <a:avLst/>
@@ -9726,7 +9352,7 @@
         <p:spPr>
           <a:xfrm>
             <a:off x="-1828800" y="5029200"/>
-            <a:ext cx="3656880" cy="3656880"/>
+            <a:ext cx="3656160" cy="3656160"/>
           </a:xfrm>
           <a:prstGeom prst="ellipse">
             <a:avLst/>
@@ -9769,7 +9395,7 @@
         <p:spPr>
           <a:xfrm>
             <a:off x="457200" y="457200"/>
-            <a:ext cx="639360" cy="639360"/>
+            <a:ext cx="638640" cy="638640"/>
           </a:xfrm>
           <a:prstGeom prst="ellipse">
             <a:avLst/>
@@ -9816,7 +9442,7 @@
         <p:spPr>
           <a:xfrm>
             <a:off x="553320" y="553320"/>
-            <a:ext cx="447480" cy="447480"/>
+            <a:ext cx="446760" cy="446760"/>
           </a:xfrm>
           <a:prstGeom prst="rect">
             <a:avLst/>
@@ -9836,7 +9462,7 @@
         <p:spPr>
           <a:xfrm>
             <a:off x="1280160" y="457200"/>
-            <a:ext cx="10423440" cy="639360"/>
+            <a:ext cx="10422720" cy="638640"/>
           </a:xfrm>
           <a:prstGeom prst="rect">
             <a:avLst/>
@@ -9897,7 +9523,7 @@
         <p:spPr>
           <a:xfrm>
             <a:off x="457200" y="1600200"/>
-            <a:ext cx="11273760" cy="4479840"/>
+            <a:ext cx="11273040" cy="4479120"/>
           </a:xfrm>
           <a:prstGeom prst="roundRect">
             <a:avLst>
@@ -9942,7 +9568,7 @@
         <p:spPr>
           <a:xfrm>
             <a:off x="822960" y="1828800"/>
-            <a:ext cx="10514880" cy="456480"/>
+            <a:ext cx="10514160" cy="455760"/>
           </a:xfrm>
           <a:prstGeom prst="rect">
             <a:avLst/>
@@ -10003,7 +9629,7 @@
         <p:spPr>
           <a:xfrm>
             <a:off x="822960" y="2423160"/>
-            <a:ext cx="383400" cy="383400"/>
+            <a:ext cx="382680" cy="382680"/>
           </a:xfrm>
           <a:prstGeom prst="ellipse">
             <a:avLst/>
@@ -10046,7 +9672,7 @@
         <p:spPr>
           <a:xfrm>
             <a:off x="822960" y="2423160"/>
-            <a:ext cx="383400" cy="383400"/>
+            <a:ext cx="382680" cy="382680"/>
           </a:xfrm>
           <a:prstGeom prst="rect">
             <a:avLst/>
@@ -10107,7 +9733,7 @@
         <p:spPr>
           <a:xfrm>
             <a:off x="1435680" y="2423160"/>
-            <a:ext cx="9582120" cy="383400"/>
+            <a:ext cx="9581400" cy="382680"/>
           </a:xfrm>
           <a:prstGeom prst="rect">
             <a:avLst/>
@@ -10168,7 +9794,7 @@
         <p:spPr>
           <a:xfrm>
             <a:off x="822960" y="3009960"/>
-            <a:ext cx="383400" cy="383400"/>
+            <a:ext cx="382680" cy="382680"/>
           </a:xfrm>
           <a:prstGeom prst="ellipse">
             <a:avLst/>
@@ -10211,7 +9837,7 @@
         <p:spPr>
           <a:xfrm>
             <a:off x="822960" y="3009960"/>
-            <a:ext cx="383400" cy="383400"/>
+            <a:ext cx="382680" cy="382680"/>
           </a:xfrm>
           <a:prstGeom prst="rect">
             <a:avLst/>
@@ -10272,7 +9898,7 @@
         <p:spPr>
           <a:xfrm>
             <a:off x="1435680" y="3009960"/>
-            <a:ext cx="9582120" cy="383400"/>
+            <a:ext cx="9581400" cy="382680"/>
           </a:xfrm>
           <a:prstGeom prst="rect">
             <a:avLst/>
@@ -10333,7 +9959,7 @@
         <p:spPr>
           <a:xfrm>
             <a:off x="822960" y="3596760"/>
-            <a:ext cx="383400" cy="383400"/>
+            <a:ext cx="382680" cy="382680"/>
           </a:xfrm>
           <a:prstGeom prst="ellipse">
             <a:avLst/>
@@ -10376,7 +10002,7 @@
         <p:spPr>
           <a:xfrm>
             <a:off x="822960" y="3596760"/>
-            <a:ext cx="383400" cy="383400"/>
+            <a:ext cx="382680" cy="382680"/>
           </a:xfrm>
           <a:prstGeom prst="rect">
             <a:avLst/>
@@ -10437,7 +10063,7 @@
         <p:spPr>
           <a:xfrm>
             <a:off x="1435680" y="3596760"/>
-            <a:ext cx="9582120" cy="383400"/>
+            <a:ext cx="9581400" cy="382680"/>
           </a:xfrm>
           <a:prstGeom prst="rect">
             <a:avLst/>
@@ -10498,7 +10124,7 @@
         <p:spPr>
           <a:xfrm>
             <a:off x="822960" y="4183560"/>
-            <a:ext cx="383400" cy="383400"/>
+            <a:ext cx="382680" cy="382680"/>
           </a:xfrm>
           <a:prstGeom prst="ellipse">
             <a:avLst/>
@@ -10541,7 +10167,7 @@
         <p:spPr>
           <a:xfrm>
             <a:off x="822960" y="4183560"/>
-            <a:ext cx="383400" cy="383400"/>
+            <a:ext cx="382680" cy="382680"/>
           </a:xfrm>
           <a:prstGeom prst="rect">
             <a:avLst/>
@@ -10602,7 +10228,7 @@
         <p:spPr>
           <a:xfrm>
             <a:off x="1435680" y="4183560"/>
-            <a:ext cx="9582120" cy="383400"/>
+            <a:ext cx="9581400" cy="382680"/>
           </a:xfrm>
           <a:prstGeom prst="rect">
             <a:avLst/>
@@ -10663,7 +10289,7 @@
         <p:spPr>
           <a:xfrm>
             <a:off x="822960" y="4770000"/>
-            <a:ext cx="383400" cy="383400"/>
+            <a:ext cx="382680" cy="382680"/>
           </a:xfrm>
           <a:prstGeom prst="ellipse">
             <a:avLst/>
@@ -10706,7 +10332,7 @@
         <p:spPr>
           <a:xfrm>
             <a:off x="822960" y="4770000"/>
-            <a:ext cx="383400" cy="383400"/>
+            <a:ext cx="382680" cy="382680"/>
           </a:xfrm>
           <a:prstGeom prst="rect">
             <a:avLst/>
@@ -10767,7 +10393,7 @@
         <p:spPr>
           <a:xfrm>
             <a:off x="1435680" y="4770000"/>
-            <a:ext cx="9582120" cy="383400"/>
+            <a:ext cx="9581400" cy="382680"/>
           </a:xfrm>
           <a:prstGeom prst="rect">
             <a:avLst/>
@@ -10828,7 +10454,7 @@
         <p:spPr>
           <a:xfrm>
             <a:off x="822960" y="5356800"/>
-            <a:ext cx="383400" cy="383400"/>
+            <a:ext cx="382680" cy="382680"/>
           </a:xfrm>
           <a:prstGeom prst="ellipse">
             <a:avLst/>
@@ -10871,7 +10497,7 @@
         <p:spPr>
           <a:xfrm>
             <a:off x="822960" y="5356800"/>
-            <a:ext cx="383400" cy="383400"/>
+            <a:ext cx="382680" cy="382680"/>
           </a:xfrm>
           <a:prstGeom prst="rect">
             <a:avLst/>
@@ -10932,7 +10558,7 @@
         <p:spPr>
           <a:xfrm>
             <a:off x="1435680" y="5356800"/>
-            <a:ext cx="9582120" cy="383400"/>
+            <a:ext cx="9581400" cy="382680"/>
           </a:xfrm>
           <a:prstGeom prst="rect">
             <a:avLst/>
@@ -10993,7 +10619,7 @@
         <p:spPr>
           <a:xfrm>
             <a:off x="457200" y="6446520"/>
-            <a:ext cx="6400080" cy="273600"/>
+            <a:ext cx="6399360" cy="272880"/>
           </a:xfrm>
           <a:prstGeom prst="rect">
             <a:avLst/>
@@ -11054,7 +10680,7 @@
         <p:spPr>
           <a:xfrm>
             <a:off x="11521440" y="6446520"/>
-            <a:ext cx="456480" cy="273600"/>
+            <a:ext cx="455760" cy="272880"/>
           </a:xfrm>
           <a:prstGeom prst="rect">
             <a:avLst/>
@@ -11152,7 +10778,7 @@
         <p:spPr>
           <a:xfrm>
             <a:off x="-1828800" y="4114800"/>
-            <a:ext cx="5485680" cy="5485680"/>
+            <a:ext cx="5484960" cy="5484960"/>
           </a:xfrm>
           <a:prstGeom prst="ellipse">
             <a:avLst/>
@@ -11195,7 +10821,7 @@
         <p:spPr>
           <a:xfrm>
             <a:off x="9601200" y="-2286000"/>
-            <a:ext cx="5485680" cy="5485680"/>
+            <a:ext cx="5484960" cy="5484960"/>
           </a:xfrm>
           <a:prstGeom prst="ellipse">
             <a:avLst/>
@@ -11238,7 +10864,7 @@
         <p:spPr>
           <a:xfrm>
             <a:off x="5591520" y="731520"/>
-            <a:ext cx="1005120" cy="1005120"/>
+            <a:ext cx="1004400" cy="1004400"/>
           </a:xfrm>
           <a:prstGeom prst="ellipse">
             <a:avLst/>
@@ -11285,7 +10911,7 @@
         <p:spPr>
           <a:xfrm>
             <a:off x="5742360" y="882360"/>
-            <a:ext cx="703440" cy="703440"/>
+            <a:ext cx="702720" cy="702720"/>
           </a:xfrm>
           <a:prstGeom prst="rect">
             <a:avLst/>
@@ -11305,7 +10931,7 @@
         <p:spPr>
           <a:xfrm>
             <a:off x="914400" y="1965960"/>
-            <a:ext cx="10359360" cy="365040"/>
+            <a:ext cx="10358640" cy="364320"/>
           </a:xfrm>
           <a:prstGeom prst="rect">
             <a:avLst/>
@@ -11366,7 +10992,7 @@
         <p:spPr>
           <a:xfrm>
             <a:off x="914400" y="2377440"/>
-            <a:ext cx="10359360" cy="2010960"/>
+            <a:ext cx="10358640" cy="2010240"/>
           </a:xfrm>
           <a:prstGeom prst="rect">
             <a:avLst/>
@@ -11427,7 +11053,7 @@
         <p:spPr>
           <a:xfrm>
             <a:off x="11521440" y="6446520"/>
-            <a:ext cx="456480" cy="273600"/>
+            <a:ext cx="455760" cy="272880"/>
           </a:xfrm>
           <a:prstGeom prst="rect">
             <a:avLst/>
@@ -11525,7 +11151,7 @@
         <p:spPr>
           <a:xfrm>
             <a:off x="-1828800" y="5120640"/>
-            <a:ext cx="3656880" cy="3656880"/>
+            <a:ext cx="3656160" cy="3656160"/>
           </a:xfrm>
           <a:prstGeom prst="ellipse">
             <a:avLst/>
@@ -11568,7 +11194,7 @@
         <p:spPr>
           <a:xfrm>
             <a:off x="457200" y="457200"/>
-            <a:ext cx="639360" cy="639360"/>
+            <a:ext cx="638640" cy="638640"/>
           </a:xfrm>
           <a:prstGeom prst="ellipse">
             <a:avLst/>
@@ -11615,7 +11241,7 @@
         <p:spPr>
           <a:xfrm>
             <a:off x="553320" y="553320"/>
-            <a:ext cx="447480" cy="447480"/>
+            <a:ext cx="446760" cy="446760"/>
           </a:xfrm>
           <a:prstGeom prst="rect">
             <a:avLst/>
@@ -11635,7 +11261,7 @@
         <p:spPr>
           <a:xfrm>
             <a:off x="1280160" y="457200"/>
-            <a:ext cx="10423440" cy="639360"/>
+            <a:ext cx="10422720" cy="638640"/>
           </a:xfrm>
           <a:prstGeom prst="rect">
             <a:avLst/>
@@ -11696,7 +11322,7 @@
         <p:spPr>
           <a:xfrm>
             <a:off x="548640" y="1828800"/>
-            <a:ext cx="4754160" cy="4022640"/>
+            <a:ext cx="4753440" cy="4021920"/>
           </a:xfrm>
           <a:prstGeom prst="rect">
             <a:avLst/>
@@ -11832,7 +11458,7 @@
         <p:spPr>
           <a:xfrm>
             <a:off x="5486400" y="1691640"/>
-            <a:ext cx="6217200" cy="4342680"/>
+            <a:ext cx="6216480" cy="4341960"/>
           </a:xfrm>
           <a:prstGeom prst="roundRect">
             <a:avLst>
@@ -11877,7 +11503,7 @@
         <p:spPr>
           <a:xfrm>
             <a:off x="5806440" y="1965960"/>
-            <a:ext cx="5577120" cy="3794040"/>
+            <a:ext cx="5576400" cy="3793320"/>
           </a:xfrm>
           <a:prstGeom prst="rect">
             <a:avLst/>
@@ -12118,7 +11744,7 @@
         <p:spPr>
           <a:xfrm>
             <a:off x="457200" y="6446520"/>
-            <a:ext cx="6400080" cy="273600"/>
+            <a:ext cx="6399360" cy="272880"/>
           </a:xfrm>
           <a:prstGeom prst="rect">
             <a:avLst/>
@@ -12179,7 +11805,7 @@
         <p:spPr>
           <a:xfrm>
             <a:off x="11521440" y="6446520"/>
-            <a:ext cx="456480" cy="273600"/>
+            <a:ext cx="455760" cy="272880"/>
           </a:xfrm>
           <a:prstGeom prst="rect">
             <a:avLst/>
@@ -12277,7 +11903,7 @@
         <p:spPr>
           <a:xfrm>
             <a:off x="457200" y="457200"/>
-            <a:ext cx="639360" cy="639360"/>
+            <a:ext cx="638640" cy="638640"/>
           </a:xfrm>
           <a:prstGeom prst="ellipse">
             <a:avLst/>
@@ -12324,7 +11950,7 @@
         <p:spPr>
           <a:xfrm>
             <a:off x="553320" y="553320"/>
-            <a:ext cx="447480" cy="447480"/>
+            <a:ext cx="446760" cy="446760"/>
           </a:xfrm>
           <a:prstGeom prst="rect">
             <a:avLst/>
@@ -12344,7 +11970,7 @@
         <p:spPr>
           <a:xfrm>
             <a:off x="1280160" y="457200"/>
-            <a:ext cx="10423440" cy="639360"/>
+            <a:ext cx="10422720" cy="638640"/>
           </a:xfrm>
           <a:prstGeom prst="rect">
             <a:avLst/>
@@ -12405,7 +12031,7 @@
         <p:spPr>
           <a:xfrm>
             <a:off x="457200" y="1645920"/>
-            <a:ext cx="5348520" cy="4479840"/>
+            <a:ext cx="5347800" cy="4479120"/>
           </a:xfrm>
           <a:prstGeom prst="roundRect">
             <a:avLst>
@@ -12450,7 +12076,7 @@
         <p:spPr>
           <a:xfrm>
             <a:off x="731520" y="1874520"/>
-            <a:ext cx="456480" cy="456480"/>
+            <a:ext cx="455760" cy="455760"/>
           </a:xfrm>
           <a:prstGeom prst="ellipse">
             <a:avLst/>
@@ -12497,7 +12123,7 @@
         <p:spPr>
           <a:xfrm>
             <a:off x="800280" y="1943280"/>
-            <a:ext cx="319320" cy="319320"/>
+            <a:ext cx="318600" cy="318600"/>
           </a:xfrm>
           <a:prstGeom prst="rect">
             <a:avLst/>
@@ -12517,7 +12143,7 @@
         <p:spPr>
           <a:xfrm>
             <a:off x="1325880" y="1874520"/>
-            <a:ext cx="4342680" cy="456480"/>
+            <a:ext cx="4341960" cy="455760"/>
           </a:xfrm>
           <a:prstGeom prst="rect">
             <a:avLst/>
@@ -12578,7 +12204,7 @@
         <p:spPr>
           <a:xfrm>
             <a:off x="731520" y="2514600"/>
-            <a:ext cx="4799880" cy="3382560"/>
+            <a:ext cx="4799160" cy="3381840"/>
           </a:xfrm>
           <a:prstGeom prst="rect">
             <a:avLst/>
@@ -12714,7 +12340,7 @@
         <p:spPr>
           <a:xfrm>
             <a:off x="6172200" y="1645920"/>
-            <a:ext cx="5348520" cy="4479840"/>
+            <a:ext cx="5347800" cy="4479120"/>
           </a:xfrm>
           <a:prstGeom prst="roundRect">
             <a:avLst>
@@ -12759,7 +12385,7 @@
         <p:spPr>
           <a:xfrm>
             <a:off x="6446520" y="1874520"/>
-            <a:ext cx="456480" cy="456480"/>
+            <a:ext cx="455760" cy="455760"/>
           </a:xfrm>
           <a:prstGeom prst="ellipse">
             <a:avLst/>
@@ -12806,7 +12432,7 @@
         <p:spPr>
           <a:xfrm>
             <a:off x="6515280" y="1943280"/>
-            <a:ext cx="319320" cy="319320"/>
+            <a:ext cx="318600" cy="318600"/>
           </a:xfrm>
           <a:prstGeom prst="rect">
             <a:avLst/>
@@ -12826,7 +12452,7 @@
         <p:spPr>
           <a:xfrm>
             <a:off x="7040880" y="1874520"/>
-            <a:ext cx="4342680" cy="456480"/>
+            <a:ext cx="4341960" cy="455760"/>
           </a:xfrm>
           <a:prstGeom prst="rect">
             <a:avLst/>
@@ -12887,7 +12513,7 @@
         <p:spPr>
           <a:xfrm>
             <a:off x="6446520" y="2514600"/>
-            <a:ext cx="4799880" cy="3382560"/>
+            <a:ext cx="4799160" cy="3381840"/>
           </a:xfrm>
           <a:prstGeom prst="rect">
             <a:avLst/>
@@ -13023,7 +12649,7 @@
         <p:spPr>
           <a:xfrm>
             <a:off x="457200" y="6446520"/>
-            <a:ext cx="6400080" cy="273600"/>
+            <a:ext cx="6399360" cy="272880"/>
           </a:xfrm>
           <a:prstGeom prst="rect">
             <a:avLst/>
@@ -13084,7 +12710,7 @@
         <p:spPr>
           <a:xfrm>
             <a:off x="11521440" y="6446520"/>
-            <a:ext cx="456480" cy="273600"/>
+            <a:ext cx="455760" cy="272880"/>
           </a:xfrm>
           <a:prstGeom prst="rect">
             <a:avLst/>
@@ -13182,7 +12808,7 @@
         <p:spPr>
           <a:xfrm>
             <a:off x="-1828800" y="5120640"/>
-            <a:ext cx="3656880" cy="3656880"/>
+            <a:ext cx="3656160" cy="3656160"/>
           </a:xfrm>
           <a:prstGeom prst="ellipse">
             <a:avLst/>
@@ -13225,7 +12851,7 @@
         <p:spPr>
           <a:xfrm>
             <a:off x="457200" y="457200"/>
-            <a:ext cx="639360" cy="639360"/>
+            <a:ext cx="638640" cy="638640"/>
           </a:xfrm>
           <a:prstGeom prst="ellipse">
             <a:avLst/>
@@ -13272,7 +12898,7 @@
         <p:spPr>
           <a:xfrm>
             <a:off x="553320" y="553320"/>
-            <a:ext cx="447480" cy="447480"/>
+            <a:ext cx="446760" cy="446760"/>
           </a:xfrm>
           <a:prstGeom prst="rect">
             <a:avLst/>
@@ -13292,7 +12918,7 @@
         <p:spPr>
           <a:xfrm>
             <a:off x="1280160" y="457200"/>
-            <a:ext cx="10423440" cy="639360"/>
+            <a:ext cx="10422720" cy="638640"/>
           </a:xfrm>
           <a:prstGeom prst="rect">
             <a:avLst/>
@@ -13353,7 +12979,7 @@
         <p:spPr>
           <a:xfrm>
             <a:off x="548640" y="1828800"/>
-            <a:ext cx="4754160" cy="4022640"/>
+            <a:ext cx="4753440" cy="4021920"/>
           </a:xfrm>
           <a:prstGeom prst="rect">
             <a:avLst/>
@@ -13489,7 +13115,7 @@
         <p:spPr>
           <a:xfrm>
             <a:off x="5486400" y="1691640"/>
-            <a:ext cx="6217200" cy="4342680"/>
+            <a:ext cx="6216480" cy="4341960"/>
           </a:xfrm>
           <a:prstGeom prst="roundRect">
             <a:avLst>
@@ -13534,7 +13160,7 @@
         <p:spPr>
           <a:xfrm>
             <a:off x="5806440" y="1965960"/>
-            <a:ext cx="5577120" cy="3794040"/>
+            <a:ext cx="5576400" cy="3793320"/>
           </a:xfrm>
           <a:prstGeom prst="rect">
             <a:avLst/>
@@ -13865,7 +13491,7 @@
         <p:spPr>
           <a:xfrm>
             <a:off x="457200" y="6446520"/>
-            <a:ext cx="6400080" cy="273600"/>
+            <a:ext cx="6399360" cy="272880"/>
           </a:xfrm>
           <a:prstGeom prst="rect">
             <a:avLst/>
@@ -13926,7 +13552,7 @@
         <p:spPr>
           <a:xfrm>
             <a:off x="11521440" y="6446520"/>
-            <a:ext cx="456480" cy="273600"/>
+            <a:ext cx="455760" cy="272880"/>
           </a:xfrm>
           <a:prstGeom prst="rect">
             <a:avLst/>
@@ -14024,7 +13650,7 @@
         <p:spPr>
           <a:xfrm>
             <a:off x="-1828800" y="5120640"/>
-            <a:ext cx="3656880" cy="3656880"/>
+            <a:ext cx="3656160" cy="3656160"/>
           </a:xfrm>
           <a:prstGeom prst="ellipse">
             <a:avLst/>
@@ -14067,7 +13693,7 @@
         <p:spPr>
           <a:xfrm>
             <a:off x="457200" y="457200"/>
-            <a:ext cx="639360" cy="639360"/>
+            <a:ext cx="638640" cy="638640"/>
           </a:xfrm>
           <a:prstGeom prst="ellipse">
             <a:avLst/>
@@ -14114,7 +13740,7 @@
         <p:spPr>
           <a:xfrm>
             <a:off x="553320" y="553320"/>
-            <a:ext cx="447480" cy="447480"/>
+            <a:ext cx="446760" cy="446760"/>
           </a:xfrm>
           <a:prstGeom prst="rect">
             <a:avLst/>
@@ -14134,7 +13760,7 @@
         <p:spPr>
           <a:xfrm>
             <a:off x="1280160" y="457200"/>
-            <a:ext cx="10423440" cy="639360"/>
+            <a:ext cx="10422720" cy="638640"/>
           </a:xfrm>
           <a:prstGeom prst="rect">
             <a:avLst/>
@@ -14195,7 +13821,7 @@
         <p:spPr>
           <a:xfrm>
             <a:off x="548640" y="1828800"/>
-            <a:ext cx="4754160" cy="4022640"/>
+            <a:ext cx="4753440" cy="4021920"/>
           </a:xfrm>
           <a:prstGeom prst="rect">
             <a:avLst/>
@@ -14296,7 +13922,7 @@
         <p:spPr>
           <a:xfrm>
             <a:off x="5486400" y="1691640"/>
-            <a:ext cx="6217200" cy="4342680"/>
+            <a:ext cx="6216480" cy="4341960"/>
           </a:xfrm>
           <a:prstGeom prst="roundRect">
             <a:avLst>
@@ -14341,7 +13967,7 @@
         <p:spPr>
           <a:xfrm>
             <a:off x="5806440" y="1965960"/>
-            <a:ext cx="5577120" cy="3794040"/>
+            <a:ext cx="5576400" cy="3793320"/>
           </a:xfrm>
           <a:prstGeom prst="rect">
             <a:avLst/>
@@ -14582,7 +14208,7 @@
         <p:spPr>
           <a:xfrm>
             <a:off x="457200" y="6446520"/>
-            <a:ext cx="6400080" cy="273600"/>
+            <a:ext cx="6399360" cy="272880"/>
           </a:xfrm>
           <a:prstGeom prst="rect">
             <a:avLst/>
@@ -14643,7 +14269,7 @@
         <p:spPr>
           <a:xfrm>
             <a:off x="11521440" y="6446520"/>
-            <a:ext cx="456480" cy="273600"/>
+            <a:ext cx="455760" cy="272880"/>
           </a:xfrm>
           <a:prstGeom prst="rect">
             <a:avLst/>
@@ -14741,7 +14367,7 @@
         <p:spPr>
           <a:xfrm>
             <a:off x="-1828800" y="5120640"/>
-            <a:ext cx="3656880" cy="3656880"/>
+            <a:ext cx="3656160" cy="3656160"/>
           </a:xfrm>
           <a:prstGeom prst="ellipse">
             <a:avLst/>
@@ -14784,7 +14410,7 @@
         <p:spPr>
           <a:xfrm>
             <a:off x="457200" y="457200"/>
-            <a:ext cx="639360" cy="639360"/>
+            <a:ext cx="638640" cy="638640"/>
           </a:xfrm>
           <a:prstGeom prst="ellipse">
             <a:avLst/>
@@ -14831,7 +14457,7 @@
         <p:spPr>
           <a:xfrm>
             <a:off x="553320" y="553320"/>
-            <a:ext cx="447480" cy="447480"/>
+            <a:ext cx="446760" cy="446760"/>
           </a:xfrm>
           <a:prstGeom prst="rect">
             <a:avLst/>
@@ -14851,7 +14477,7 @@
         <p:spPr>
           <a:xfrm>
             <a:off x="1280160" y="457200"/>
-            <a:ext cx="10423440" cy="639360"/>
+            <a:ext cx="10422720" cy="638640"/>
           </a:xfrm>
           <a:prstGeom prst="rect">
             <a:avLst/>
@@ -14912,7 +14538,7 @@
         <p:spPr>
           <a:xfrm>
             <a:off x="548640" y="1828800"/>
-            <a:ext cx="4754160" cy="4022640"/>
+            <a:ext cx="4753440" cy="4021920"/>
           </a:xfrm>
           <a:prstGeom prst="rect">
             <a:avLst/>
@@ -15013,7 +14639,7 @@
         <p:spPr>
           <a:xfrm>
             <a:off x="5486400" y="1691640"/>
-            <a:ext cx="6217200" cy="4342680"/>
+            <a:ext cx="6216480" cy="4341960"/>
           </a:xfrm>
           <a:prstGeom prst="roundRect">
             <a:avLst>
@@ -15058,7 +14684,7 @@
         <p:spPr>
           <a:xfrm>
             <a:off x="5806440" y="1965960"/>
-            <a:ext cx="5577120" cy="3794040"/>
+            <a:ext cx="5576400" cy="3793320"/>
           </a:xfrm>
           <a:prstGeom prst="rect">
             <a:avLst/>
@@ -15299,7 +14925,7 @@
         <p:spPr>
           <a:xfrm>
             <a:off x="457200" y="6446520"/>
-            <a:ext cx="6400080" cy="273600"/>
+            <a:ext cx="6399360" cy="272880"/>
           </a:xfrm>
           <a:prstGeom prst="rect">
             <a:avLst/>
@@ -15360,7 +14986,7 @@
         <p:spPr>
           <a:xfrm>
             <a:off x="11521440" y="6446520"/>
-            <a:ext cx="456480" cy="273600"/>
+            <a:ext cx="455760" cy="272880"/>
           </a:xfrm>
           <a:prstGeom prst="rect">
             <a:avLst/>
@@ -15458,7 +15084,7 @@
         <p:spPr>
           <a:xfrm>
             <a:off x="-1828800" y="5029200"/>
-            <a:ext cx="3656880" cy="3656880"/>
+            <a:ext cx="3656160" cy="3656160"/>
           </a:xfrm>
           <a:prstGeom prst="ellipse">
             <a:avLst/>
@@ -15501,7 +15127,7 @@
         <p:spPr>
           <a:xfrm>
             <a:off x="457200" y="457200"/>
-            <a:ext cx="639360" cy="639360"/>
+            <a:ext cx="638640" cy="638640"/>
           </a:xfrm>
           <a:prstGeom prst="ellipse">
             <a:avLst/>
@@ -15548,7 +15174,7 @@
         <p:spPr>
           <a:xfrm>
             <a:off x="553320" y="553320"/>
-            <a:ext cx="447480" cy="447480"/>
+            <a:ext cx="446760" cy="446760"/>
           </a:xfrm>
           <a:prstGeom prst="rect">
             <a:avLst/>
@@ -15568,7 +15194,7 @@
         <p:spPr>
           <a:xfrm>
             <a:off x="1280160" y="457200"/>
-            <a:ext cx="10423440" cy="639360"/>
+            <a:ext cx="10422720" cy="638640"/>
           </a:xfrm>
           <a:prstGeom prst="rect">
             <a:avLst/>
@@ -15629,7 +15255,7 @@
         <p:spPr>
           <a:xfrm>
             <a:off x="457200" y="1600200"/>
-            <a:ext cx="11273760" cy="4479840"/>
+            <a:ext cx="11273040" cy="4479120"/>
           </a:xfrm>
           <a:prstGeom prst="roundRect">
             <a:avLst>
@@ -15674,7 +15300,7 @@
         <p:spPr>
           <a:xfrm>
             <a:off x="822960" y="1828800"/>
-            <a:ext cx="10514880" cy="456480"/>
+            <a:ext cx="10514160" cy="455760"/>
           </a:xfrm>
           <a:prstGeom prst="rect">
             <a:avLst/>
@@ -15735,7 +15361,7 @@
         <p:spPr>
           <a:xfrm>
             <a:off x="822960" y="2423160"/>
-            <a:ext cx="383400" cy="383400"/>
+            <a:ext cx="382680" cy="382680"/>
           </a:xfrm>
           <a:prstGeom prst="ellipse">
             <a:avLst/>
@@ -15778,7 +15404,7 @@
         <p:spPr>
           <a:xfrm>
             <a:off x="822960" y="2423160"/>
-            <a:ext cx="383400" cy="383400"/>
+            <a:ext cx="382680" cy="382680"/>
           </a:xfrm>
           <a:prstGeom prst="rect">
             <a:avLst/>
@@ -15839,7 +15465,7 @@
         <p:spPr>
           <a:xfrm>
             <a:off x="1435680" y="2423160"/>
-            <a:ext cx="9582120" cy="383400"/>
+            <a:ext cx="9581400" cy="382680"/>
           </a:xfrm>
           <a:prstGeom prst="rect">
             <a:avLst/>
@@ -15900,7 +15526,7 @@
         <p:spPr>
           <a:xfrm>
             <a:off x="822960" y="3303360"/>
-            <a:ext cx="383400" cy="383400"/>
+            <a:ext cx="382680" cy="382680"/>
           </a:xfrm>
           <a:prstGeom prst="ellipse">
             <a:avLst/>
@@ -15943,7 +15569,7 @@
         <p:spPr>
           <a:xfrm>
             <a:off x="822960" y="3303360"/>
-            <a:ext cx="383400" cy="383400"/>
+            <a:ext cx="382680" cy="382680"/>
           </a:xfrm>
           <a:prstGeom prst="rect">
             <a:avLst/>
@@ -16004,7 +15630,7 @@
         <p:spPr>
           <a:xfrm>
             <a:off x="1435680" y="3303360"/>
-            <a:ext cx="9582120" cy="383400"/>
+            <a:ext cx="9581400" cy="382680"/>
           </a:xfrm>
           <a:prstGeom prst="rect">
             <a:avLst/>
@@ -16065,7 +15691,7 @@
         <p:spPr>
           <a:xfrm>
             <a:off x="822960" y="4183560"/>
-            <a:ext cx="383400" cy="383400"/>
+            <a:ext cx="382680" cy="382680"/>
           </a:xfrm>
           <a:prstGeom prst="ellipse">
             <a:avLst/>
@@ -16108,7 +15734,7 @@
         <p:spPr>
           <a:xfrm>
             <a:off x="822960" y="4183560"/>
-            <a:ext cx="383400" cy="383400"/>
+            <a:ext cx="382680" cy="382680"/>
           </a:xfrm>
           <a:prstGeom prst="rect">
             <a:avLst/>
@@ -16169,7 +15795,7 @@
         <p:spPr>
           <a:xfrm>
             <a:off x="1435680" y="4183560"/>
-            <a:ext cx="9582120" cy="383400"/>
+            <a:ext cx="9581400" cy="382680"/>
           </a:xfrm>
           <a:prstGeom prst="rect">
             <a:avLst/>
@@ -16230,7 +15856,7 @@
         <p:spPr>
           <a:xfrm>
             <a:off x="822960" y="5063400"/>
-            <a:ext cx="383400" cy="383400"/>
+            <a:ext cx="382680" cy="382680"/>
           </a:xfrm>
           <a:prstGeom prst="ellipse">
             <a:avLst/>
@@ -16273,7 +15899,7 @@
         <p:spPr>
           <a:xfrm>
             <a:off x="822960" y="5063400"/>
-            <a:ext cx="383400" cy="383400"/>
+            <a:ext cx="382680" cy="382680"/>
           </a:xfrm>
           <a:prstGeom prst="rect">
             <a:avLst/>
@@ -16334,7 +15960,7 @@
         <p:spPr>
           <a:xfrm>
             <a:off x="1435680" y="5063400"/>
-            <a:ext cx="9582120" cy="383400"/>
+            <a:ext cx="9581400" cy="382680"/>
           </a:xfrm>
           <a:prstGeom prst="rect">
             <a:avLst/>
@@ -16395,7 +16021,7 @@
         <p:spPr>
           <a:xfrm>
             <a:off x="457200" y="6446520"/>
-            <a:ext cx="6400080" cy="273600"/>
+            <a:ext cx="6399360" cy="272880"/>
           </a:xfrm>
           <a:prstGeom prst="rect">
             <a:avLst/>
@@ -16456,7 +16082,7 @@
         <p:spPr>
           <a:xfrm>
             <a:off x="11521440" y="6446520"/>
-            <a:ext cx="456480" cy="273600"/>
+            <a:ext cx="455760" cy="272880"/>
           </a:xfrm>
           <a:prstGeom prst="rect">
             <a:avLst/>
@@ -16554,7 +16180,7 @@
         <p:spPr>
           <a:xfrm>
             <a:off x="10515600" y="-1371600"/>
-            <a:ext cx="3656880" cy="3656880"/>
+            <a:ext cx="3656160" cy="3656160"/>
           </a:xfrm>
           <a:prstGeom prst="ellipse">
             <a:avLst/>
@@ -16597,7 +16223,7 @@
         <p:spPr>
           <a:xfrm>
             <a:off x="457200" y="457200"/>
-            <a:ext cx="639360" cy="639360"/>
+            <a:ext cx="638640" cy="638640"/>
           </a:xfrm>
           <a:prstGeom prst="ellipse">
             <a:avLst/>
@@ -16644,7 +16270,7 @@
         <p:spPr>
           <a:xfrm>
             <a:off x="553320" y="553320"/>
-            <a:ext cx="447480" cy="447480"/>
+            <a:ext cx="446760" cy="446760"/>
           </a:xfrm>
           <a:prstGeom prst="rect">
             <a:avLst/>
@@ -16664,7 +16290,7 @@
         <p:spPr>
           <a:xfrm>
             <a:off x="1280160" y="457200"/>
-            <a:ext cx="10423440" cy="639360"/>
+            <a:ext cx="10422720" cy="638640"/>
           </a:xfrm>
           <a:prstGeom prst="rect">
             <a:avLst/>
@@ -16725,7 +16351,7 @@
         <p:spPr>
           <a:xfrm>
             <a:off x="457200" y="1600200"/>
-            <a:ext cx="11273760" cy="446400"/>
+            <a:ext cx="11273040" cy="445680"/>
           </a:xfrm>
           <a:prstGeom prst="roundRect">
             <a:avLst>
@@ -16770,7 +16396,7 @@
         <p:spPr>
           <a:xfrm>
             <a:off x="621720" y="1662840"/>
-            <a:ext cx="321120" cy="321120"/>
+            <a:ext cx="320400" cy="320400"/>
           </a:xfrm>
           <a:prstGeom prst="ellipse">
             <a:avLst/>
@@ -16817,7 +16443,7 @@
         <p:spPr>
           <a:xfrm>
             <a:off x="669960" y="1711080"/>
-            <a:ext cx="224640" cy="224640"/>
+            <a:ext cx="223920" cy="223920"/>
           </a:xfrm>
           <a:prstGeom prst="rect">
             <a:avLst/>
@@ -16837,7 +16463,7 @@
         <p:spPr>
           <a:xfrm>
             <a:off x="1325880" y="1600200"/>
-            <a:ext cx="10057680" cy="446400"/>
+            <a:ext cx="10056960" cy="445680"/>
           </a:xfrm>
           <a:prstGeom prst="rect">
             <a:avLst/>
@@ -16898,7 +16524,7 @@
         <p:spPr>
           <a:xfrm>
             <a:off x="457200" y="2138760"/>
-            <a:ext cx="11273760" cy="446400"/>
+            <a:ext cx="11273040" cy="445680"/>
           </a:xfrm>
           <a:prstGeom prst="roundRect">
             <a:avLst>
@@ -16943,7 +16569,7 @@
         <p:spPr>
           <a:xfrm>
             <a:off x="621720" y="2201400"/>
-            <a:ext cx="321120" cy="321120"/>
+            <a:ext cx="320400" cy="320400"/>
           </a:xfrm>
           <a:prstGeom prst="ellipse">
             <a:avLst/>
@@ -16990,7 +16616,7 @@
         <p:spPr>
           <a:xfrm>
             <a:off x="669960" y="2249640"/>
-            <a:ext cx="224640" cy="224640"/>
+            <a:ext cx="223920" cy="223920"/>
           </a:xfrm>
           <a:prstGeom prst="rect">
             <a:avLst/>
@@ -17010,7 +16636,7 @@
         <p:spPr>
           <a:xfrm>
             <a:off x="1325880" y="2138760"/>
-            <a:ext cx="10057680" cy="446400"/>
+            <a:ext cx="10056960" cy="445680"/>
           </a:xfrm>
           <a:prstGeom prst="rect">
             <a:avLst/>
@@ -17071,7 +16697,7 @@
         <p:spPr>
           <a:xfrm>
             <a:off x="457200" y="2677320"/>
-            <a:ext cx="11273760" cy="446400"/>
+            <a:ext cx="11273040" cy="445680"/>
           </a:xfrm>
           <a:prstGeom prst="roundRect">
             <a:avLst>
@@ -17116,7 +16742,7 @@
         <p:spPr>
           <a:xfrm>
             <a:off x="621720" y="2739600"/>
-            <a:ext cx="321120" cy="321120"/>
+            <a:ext cx="320400" cy="320400"/>
           </a:xfrm>
           <a:prstGeom prst="ellipse">
             <a:avLst/>
@@ -17163,7 +16789,7 @@
         <p:spPr>
           <a:xfrm>
             <a:off x="669960" y="2788200"/>
-            <a:ext cx="224640" cy="224640"/>
+            <a:ext cx="223920" cy="223920"/>
           </a:xfrm>
           <a:prstGeom prst="rect">
             <a:avLst/>
@@ -17183,7 +16809,7 @@
         <p:spPr>
           <a:xfrm>
             <a:off x="1325880" y="2677320"/>
-            <a:ext cx="10057680" cy="446400"/>
+            <a:ext cx="10056960" cy="445680"/>
           </a:xfrm>
           <a:prstGeom prst="rect">
             <a:avLst/>
@@ -17244,7 +16870,7 @@
         <p:spPr>
           <a:xfrm>
             <a:off x="457200" y="3215520"/>
-            <a:ext cx="11273760" cy="446400"/>
+            <a:ext cx="11273040" cy="445680"/>
           </a:xfrm>
           <a:prstGeom prst="roundRect">
             <a:avLst>
@@ -17289,7 +16915,7 @@
         <p:spPr>
           <a:xfrm>
             <a:off x="621720" y="3278160"/>
-            <a:ext cx="321120" cy="321120"/>
+            <a:ext cx="320400" cy="320400"/>
           </a:xfrm>
           <a:prstGeom prst="ellipse">
             <a:avLst/>
@@ -17336,7 +16962,7 @@
         <p:spPr>
           <a:xfrm>
             <a:off x="669960" y="3326400"/>
-            <a:ext cx="224640" cy="224640"/>
+            <a:ext cx="223920" cy="223920"/>
           </a:xfrm>
           <a:prstGeom prst="rect">
             <a:avLst/>
@@ -17356,7 +16982,7 @@
         <p:spPr>
           <a:xfrm>
             <a:off x="1325880" y="3215520"/>
-            <a:ext cx="10057680" cy="446400"/>
+            <a:ext cx="10056960" cy="445680"/>
           </a:xfrm>
           <a:prstGeom prst="rect">
             <a:avLst/>
@@ -17417,7 +17043,7 @@
         <p:spPr>
           <a:xfrm>
             <a:off x="457200" y="3754080"/>
-            <a:ext cx="11273760" cy="446400"/>
+            <a:ext cx="11273040" cy="445680"/>
           </a:xfrm>
           <a:prstGeom prst="roundRect">
             <a:avLst>
@@ -17462,7 +17088,7 @@
         <p:spPr>
           <a:xfrm>
             <a:off x="621720" y="3816720"/>
-            <a:ext cx="321120" cy="321120"/>
+            <a:ext cx="320400" cy="320400"/>
           </a:xfrm>
           <a:prstGeom prst="ellipse">
             <a:avLst/>
@@ -17509,7 +17135,7 @@
         <p:spPr>
           <a:xfrm>
             <a:off x="669960" y="3864960"/>
-            <a:ext cx="224640" cy="224640"/>
+            <a:ext cx="223920" cy="223920"/>
           </a:xfrm>
           <a:prstGeom prst="rect">
             <a:avLst/>
@@ -17529,7 +17155,7 @@
         <p:spPr>
           <a:xfrm>
             <a:off x="1325880" y="3754080"/>
-            <a:ext cx="10057680" cy="446400"/>
+            <a:ext cx="10056960" cy="445680"/>
           </a:xfrm>
           <a:prstGeom prst="rect">
             <a:avLst/>
@@ -17590,7 +17216,7 @@
         <p:spPr>
           <a:xfrm>
             <a:off x="457200" y="4292640"/>
-            <a:ext cx="11273760" cy="446400"/>
+            <a:ext cx="11273040" cy="445680"/>
           </a:xfrm>
           <a:prstGeom prst="roundRect">
             <a:avLst>
@@ -17635,7 +17261,7 @@
         <p:spPr>
           <a:xfrm>
             <a:off x="621720" y="4355280"/>
-            <a:ext cx="321120" cy="321120"/>
+            <a:ext cx="320400" cy="320400"/>
           </a:xfrm>
           <a:prstGeom prst="ellipse">
             <a:avLst/>
@@ -17682,7 +17308,7 @@
         <p:spPr>
           <a:xfrm>
             <a:off x="669960" y="4403520"/>
-            <a:ext cx="224640" cy="224640"/>
+            <a:ext cx="223920" cy="223920"/>
           </a:xfrm>
           <a:prstGeom prst="rect">
             <a:avLst/>
@@ -17702,7 +17328,7 @@
         <p:spPr>
           <a:xfrm>
             <a:off x="1325880" y="4292640"/>
-            <a:ext cx="10057680" cy="446400"/>
+            <a:ext cx="10056960" cy="445680"/>
           </a:xfrm>
           <a:prstGeom prst="rect">
             <a:avLst/>
@@ -17763,7 +17389,7 @@
         <p:spPr>
           <a:xfrm>
             <a:off x="457200" y="4831200"/>
-            <a:ext cx="11273760" cy="446400"/>
+            <a:ext cx="11273040" cy="445680"/>
           </a:xfrm>
           <a:prstGeom prst="roundRect">
             <a:avLst>
@@ -17808,7 +17434,7 @@
         <p:spPr>
           <a:xfrm>
             <a:off x="621720" y="4893840"/>
-            <a:ext cx="321120" cy="321120"/>
+            <a:ext cx="320400" cy="320400"/>
           </a:xfrm>
           <a:prstGeom prst="ellipse">
             <a:avLst/>
@@ -17855,7 +17481,7 @@
         <p:spPr>
           <a:xfrm>
             <a:off x="669960" y="4942080"/>
-            <a:ext cx="224640" cy="224640"/>
+            <a:ext cx="223920" cy="223920"/>
           </a:xfrm>
           <a:prstGeom prst="rect">
             <a:avLst/>
@@ -17875,7 +17501,7 @@
         <p:spPr>
           <a:xfrm>
             <a:off x="1325880" y="4831200"/>
-            <a:ext cx="10057680" cy="446400"/>
+            <a:ext cx="10056960" cy="445680"/>
           </a:xfrm>
           <a:prstGeom prst="rect">
             <a:avLst/>
@@ -17936,7 +17562,7 @@
         <p:spPr>
           <a:xfrm>
             <a:off x="457200" y="5369400"/>
-            <a:ext cx="11273760" cy="446400"/>
+            <a:ext cx="11273040" cy="445680"/>
           </a:xfrm>
           <a:prstGeom prst="roundRect">
             <a:avLst>
@@ -17981,7 +17607,7 @@
         <p:spPr>
           <a:xfrm>
             <a:off x="621720" y="5432040"/>
-            <a:ext cx="321120" cy="321120"/>
+            <a:ext cx="320400" cy="320400"/>
           </a:xfrm>
           <a:prstGeom prst="ellipse">
             <a:avLst/>
@@ -18028,7 +17654,7 @@
         <p:spPr>
           <a:xfrm>
             <a:off x="669960" y="5480280"/>
-            <a:ext cx="224640" cy="224640"/>
+            <a:ext cx="223920" cy="223920"/>
           </a:xfrm>
           <a:prstGeom prst="rect">
             <a:avLst/>
@@ -18048,7 +17674,7 @@
         <p:spPr>
           <a:xfrm>
             <a:off x="1325880" y="5369400"/>
-            <a:ext cx="10057680" cy="446400"/>
+            <a:ext cx="10056960" cy="445680"/>
           </a:xfrm>
           <a:prstGeom prst="rect">
             <a:avLst/>
@@ -18109,7 +17735,7 @@
         <p:spPr>
           <a:xfrm>
             <a:off x="457200" y="5907960"/>
-            <a:ext cx="11273760" cy="446400"/>
+            <a:ext cx="11273040" cy="445680"/>
           </a:xfrm>
           <a:prstGeom prst="roundRect">
             <a:avLst>
@@ -18154,7 +17780,7 @@
         <p:spPr>
           <a:xfrm>
             <a:off x="621720" y="5970600"/>
-            <a:ext cx="321120" cy="321120"/>
+            <a:ext cx="320400" cy="320400"/>
           </a:xfrm>
           <a:prstGeom prst="ellipse">
             <a:avLst/>
@@ -18201,7 +17827,7 @@
         <p:spPr>
           <a:xfrm>
             <a:off x="669960" y="6018840"/>
-            <a:ext cx="224640" cy="224640"/>
+            <a:ext cx="223920" cy="223920"/>
           </a:xfrm>
           <a:prstGeom prst="rect">
             <a:avLst/>
@@ -18221,7 +17847,7 @@
         <p:spPr>
           <a:xfrm>
             <a:off x="1325880" y="5907960"/>
-            <a:ext cx="10057680" cy="446400"/>
+            <a:ext cx="10056960" cy="445680"/>
           </a:xfrm>
           <a:prstGeom prst="rect">
             <a:avLst/>
@@ -18260,163 +17886,67 @@
                 <a:latin typeface="Calibri"/>
                 <a:ea typeface="Calibri"/>
               </a:rPr>
-              <a:t>Mini </a:t>
-            </a:r>
-            <a:r>
-              <a:rPr lang="en-US" sz="1350" b="0" u="none" strike="noStrike">
-                <a:solidFill>
-                  <a:srgbClr val="1B2420"/>
+              <a:t>Mini projects tying everything together</a:t>
+            </a:r>
+            <a:endParaRPr lang="en-US" sz="1350" b="0" u="none" strike="noStrike">
+              <a:solidFill>
+                <a:srgbClr val="000000"/>
+              </a:solidFill>
+              <a:effectLst/>
+              <a:uFillTx/>
+              <a:latin typeface="Arial"/>
+            </a:endParaRPr>
+          </a:p>
+        </p:txBody>
+      </p:sp>
+      <p:sp>
+        <p:nvSpPr>
+          <p:cNvPr id="58" name="Text 30"/>
+          <p:cNvSpPr/>
+          <p:nvPr/>
+        </p:nvSpPr>
+        <p:spPr>
+          <a:xfrm>
+            <a:off x="457200" y="6446520"/>
+            <a:ext cx="6399360" cy="272880"/>
+          </a:xfrm>
+          <a:prstGeom prst="rect">
+            <a:avLst/>
+          </a:prstGeom>
+          <a:noFill/>
+          <a:ln w="0">
+            <a:noFill/>
+          </a:ln>
+        </p:spPr>
+        <p:style>
+          <a:lnRef idx="0"/>
+          <a:fillRef idx="0"/>
+          <a:effectRef idx="0"/>
+          <a:fontRef idx="minor"/>
+        </p:style>
+        <p:txBody>
+          <a:bodyPr lIns="0" tIns="0" rIns="0" bIns="0" anchor="ctr">
+            <a:noAutofit/>
+          </a:bodyPr>
+          <a:p>
+            <a:pPr defTabSz="914400">
+              <a:lnSpc>
+                <a:spcPct val="100000"/>
+              </a:lnSpc>
+              <a:tabLst>
+                <a:tab pos="0" algn="l"/>
+              </a:tabLst>
+            </a:pPr>
+            <a:r>
+              <a:rPr lang="en-US" sz="1000" b="0" u="none" strike="noStrike">
+                <a:solidFill>
+                  <a:srgbClr val="A9B0A7"/>
                 </a:solidFill>
                 <a:effectLst/>
                 <a:uFillTx/>
                 <a:latin typeface="Calibri"/>
                 <a:ea typeface="Calibri"/>
               </a:rPr>
-              <a:t>proje</a:t>
-            </a:r>
-            <a:r>
-              <a:rPr lang="en-US" sz="1350" b="0" u="none" strike="noStrike">
-                <a:solidFill>
-                  <a:srgbClr val="1B2420"/>
-                </a:solidFill>
-                <a:effectLst/>
-                <a:uFillTx/>
-                <a:latin typeface="Calibri"/>
-                <a:ea typeface="Calibri"/>
-              </a:rPr>
-              <a:t>cts </a:t>
-            </a:r>
-            <a:r>
-              <a:rPr lang="en-US" sz="1350" b="0" u="none" strike="noStrike">
-                <a:solidFill>
-                  <a:srgbClr val="1B2420"/>
-                </a:solidFill>
-                <a:effectLst/>
-                <a:uFillTx/>
-                <a:latin typeface="Calibri"/>
-                <a:ea typeface="Calibri"/>
-              </a:rPr>
-              <a:t>tying </a:t>
-            </a:r>
-            <a:r>
-              <a:rPr lang="en-US" sz="1350" b="0" u="none" strike="noStrike">
-                <a:solidFill>
-                  <a:srgbClr val="1B2420"/>
-                </a:solidFill>
-                <a:effectLst/>
-                <a:uFillTx/>
-                <a:latin typeface="Calibri"/>
-                <a:ea typeface="Calibri"/>
-              </a:rPr>
-              <a:t>ever</a:t>
-            </a:r>
-            <a:r>
-              <a:rPr lang="en-US" sz="1350" b="0" u="none" strike="noStrike">
-                <a:solidFill>
-                  <a:srgbClr val="1B2420"/>
-                </a:solidFill>
-                <a:effectLst/>
-                <a:uFillTx/>
-                <a:latin typeface="Calibri"/>
-                <a:ea typeface="Calibri"/>
-              </a:rPr>
-              <a:t>ythin</a:t>
-            </a:r>
-            <a:r>
-              <a:rPr lang="en-US" sz="1350" b="0" u="none" strike="noStrike">
-                <a:solidFill>
-                  <a:srgbClr val="1B2420"/>
-                </a:solidFill>
-                <a:effectLst/>
-                <a:uFillTx/>
-                <a:latin typeface="Calibri"/>
-                <a:ea typeface="Calibri"/>
-              </a:rPr>
-              <a:t>g </a:t>
-            </a:r>
-            <a:r>
-              <a:rPr lang="en-US" sz="1350" b="0" u="none" strike="noStrike">
-                <a:solidFill>
-                  <a:srgbClr val="1B2420"/>
-                </a:solidFill>
-                <a:effectLst/>
-                <a:uFillTx/>
-                <a:latin typeface="Calibri"/>
-                <a:ea typeface="Calibri"/>
-              </a:rPr>
-              <a:t>toget</a:t>
-            </a:r>
-            <a:r>
-              <a:rPr lang="en-US" sz="1350" b="0" u="none" strike="noStrike">
-                <a:solidFill>
-                  <a:srgbClr val="1B2420"/>
-                </a:solidFill>
-                <a:effectLst/>
-                <a:uFillTx/>
-                <a:latin typeface="Calibri"/>
-                <a:ea typeface="Calibri"/>
-              </a:rPr>
-              <a:t>her</a:t>
-            </a:r>
-            <a:endParaRPr lang="en-US" sz="1350" b="0" u="none" strike="noStrike">
-              <a:solidFill>
-                <a:srgbClr val="000000"/>
-              </a:solidFill>
-              <a:effectLst/>
-              <a:uFillTx/>
-              <a:latin typeface="Arial"/>
-            </a:endParaRPr>
-          </a:p>
-        </p:txBody>
-      </p:sp>
-      <p:sp>
-        <p:nvSpPr>
-          <p:cNvPr id="58" name="Text 30"/>
-          <p:cNvSpPr/>
-          <p:nvPr/>
-        </p:nvSpPr>
-        <p:spPr>
-          <a:xfrm>
-            <a:off x="457200" y="6446520"/>
-            <a:ext cx="6400080" cy="273600"/>
-          </a:xfrm>
-          <a:prstGeom prst="rect">
-            <a:avLst/>
-          </a:prstGeom>
-          <a:noFill/>
-          <a:ln w="0">
-            <a:noFill/>
-          </a:ln>
-        </p:spPr>
-        <p:style>
-          <a:lnRef idx="0"/>
-          <a:fillRef idx="0"/>
-          <a:effectRef idx="0"/>
-          <a:fontRef idx="minor"/>
-        </p:style>
-        <p:txBody>
-          <a:bodyPr lIns="0" tIns="0" rIns="0" bIns="0" anchor="ctr">
-            <a:noAutofit/>
-          </a:bodyPr>
-          <a:p>
-            <a:pPr defTabSz="914400">
-              <a:lnSpc>
-                <a:spcPct val="100000"/>
-              </a:lnSpc>
-              <a:tabLst>
-                <a:tab pos="0" algn="l"/>
-              </a:tabLst>
-            </a:pPr>
-            <a:r>
-              <a:rPr lang="en-US" sz="1000" b="0" u="none" strike="noStrike">
-                <a:solidFill>
-                  <a:srgbClr val="A9B0A7"/>
-                </a:solidFill>
-                <a:effectLst/>
-                <a:uFillTx/>
-                <a:latin typeface="Calibri"/>
-                <a:ea typeface="Calibri"/>
-              </a:rPr>
               <a:t>Loops  ·  Session 6</a:t>
             </a:r>
             <a:endParaRPr lang="en-US" sz="1000" b="0" u="none" strike="noStrike">
@@ -18439,7 +17969,7 @@
         <p:spPr>
           <a:xfrm>
             <a:off x="11521440" y="6446520"/>
-            <a:ext cx="456480" cy="273600"/>
+            <a:ext cx="455760" cy="272880"/>
           </a:xfrm>
           <a:prstGeom prst="rect">
             <a:avLst/>
@@ -18537,7 +18067,7 @@
         <p:spPr>
           <a:xfrm>
             <a:off x="-1828800" y="4114800"/>
-            <a:ext cx="5485680" cy="5485680"/>
+            <a:ext cx="5484960" cy="5484960"/>
           </a:xfrm>
           <a:prstGeom prst="ellipse">
             <a:avLst/>
@@ -18580,7 +18110,7 @@
         <p:spPr>
           <a:xfrm>
             <a:off x="9601200" y="-2286000"/>
-            <a:ext cx="5485680" cy="5485680"/>
+            <a:ext cx="5484960" cy="5484960"/>
           </a:xfrm>
           <a:prstGeom prst="ellipse">
             <a:avLst/>
@@ -18623,7 +18153,7 @@
         <p:spPr>
           <a:xfrm>
             <a:off x="5591520" y="731520"/>
-            <a:ext cx="1005120" cy="1005120"/>
+            <a:ext cx="1004400" cy="1004400"/>
           </a:xfrm>
           <a:prstGeom prst="ellipse">
             <a:avLst/>
@@ -18670,7 +18200,7 @@
         <p:spPr>
           <a:xfrm>
             <a:off x="5742360" y="882360"/>
-            <a:ext cx="703440" cy="703440"/>
+            <a:ext cx="702720" cy="702720"/>
           </a:xfrm>
           <a:prstGeom prst="rect">
             <a:avLst/>
@@ -18690,7 +18220,7 @@
         <p:spPr>
           <a:xfrm>
             <a:off x="914400" y="1965960"/>
-            <a:ext cx="10359360" cy="365040"/>
+            <a:ext cx="10358640" cy="364320"/>
           </a:xfrm>
           <a:prstGeom prst="rect">
             <a:avLst/>
@@ -18751,7 +18281,7 @@
         <p:spPr>
           <a:xfrm>
             <a:off x="914400" y="2377440"/>
-            <a:ext cx="10359360" cy="2010960"/>
+            <a:ext cx="10358640" cy="2010240"/>
           </a:xfrm>
           <a:prstGeom prst="rect">
             <a:avLst/>
@@ -18812,7 +18342,7 @@
         <p:spPr>
           <a:xfrm>
             <a:off x="11521440" y="6446520"/>
-            <a:ext cx="456480" cy="273600"/>
+            <a:ext cx="455760" cy="272880"/>
           </a:xfrm>
           <a:prstGeom prst="rect">
             <a:avLst/>
@@ -18910,7 +18440,7 @@
         <p:spPr>
           <a:xfrm>
             <a:off x="-1828800" y="5120640"/>
-            <a:ext cx="3656880" cy="3656880"/>
+            <a:ext cx="3656160" cy="3656160"/>
           </a:xfrm>
           <a:prstGeom prst="ellipse">
             <a:avLst/>
@@ -18953,7 +18483,7 @@
         <p:spPr>
           <a:xfrm>
             <a:off x="457200" y="457200"/>
-            <a:ext cx="639360" cy="639360"/>
+            <a:ext cx="638640" cy="638640"/>
           </a:xfrm>
           <a:prstGeom prst="ellipse">
             <a:avLst/>
@@ -19000,7 +18530,7 @@
         <p:spPr>
           <a:xfrm>
             <a:off x="553320" y="553320"/>
-            <a:ext cx="447480" cy="447480"/>
+            <a:ext cx="446760" cy="446760"/>
           </a:xfrm>
           <a:prstGeom prst="rect">
             <a:avLst/>
@@ -19020,7 +18550,7 @@
         <p:spPr>
           <a:xfrm>
             <a:off x="1280160" y="457200"/>
-            <a:ext cx="10423440" cy="639360"/>
+            <a:ext cx="10422720" cy="638640"/>
           </a:xfrm>
           <a:prstGeom prst="rect">
             <a:avLst/>
@@ -19081,7 +18611,7 @@
         <p:spPr>
           <a:xfrm>
             <a:off x="548640" y="1828800"/>
-            <a:ext cx="4754160" cy="4022640"/>
+            <a:ext cx="4753440" cy="4021920"/>
           </a:xfrm>
           <a:prstGeom prst="rect">
             <a:avLst/>
@@ -19182,7 +18712,7 @@
         <p:spPr>
           <a:xfrm>
             <a:off x="5486400" y="1691640"/>
-            <a:ext cx="6217200" cy="4342680"/>
+            <a:ext cx="6216480" cy="4341960"/>
           </a:xfrm>
           <a:prstGeom prst="roundRect">
             <a:avLst>
@@ -19227,7 +18757,7 @@
         <p:spPr>
           <a:xfrm>
             <a:off x="5806440" y="1965960"/>
-            <a:ext cx="5577120" cy="3794040"/>
+            <a:ext cx="5576400" cy="3793320"/>
           </a:xfrm>
           <a:prstGeom prst="rect">
             <a:avLst/>
@@ -19468,7 +18998,7 @@
         <p:spPr>
           <a:xfrm>
             <a:off x="457200" y="6446520"/>
-            <a:ext cx="6400080" cy="273600"/>
+            <a:ext cx="6399360" cy="272880"/>
           </a:xfrm>
           <a:prstGeom prst="rect">
             <a:avLst/>
@@ -19529,7 +19059,7 @@
         <p:spPr>
           <a:xfrm>
             <a:off x="11521440" y="6446520"/>
-            <a:ext cx="456480" cy="273600"/>
+            <a:ext cx="455760" cy="272880"/>
           </a:xfrm>
           <a:prstGeom prst="rect">
             <a:avLst/>
@@ -19627,7 +19157,7 @@
         <p:spPr>
           <a:xfrm>
             <a:off x="-1828800" y="5120640"/>
-            <a:ext cx="3656880" cy="3656880"/>
+            <a:ext cx="3656160" cy="3656160"/>
           </a:xfrm>
           <a:prstGeom prst="ellipse">
             <a:avLst/>
@@ -19670,7 +19200,7 @@
         <p:spPr>
           <a:xfrm>
             <a:off x="457200" y="457200"/>
-            <a:ext cx="639360" cy="639360"/>
+            <a:ext cx="638640" cy="638640"/>
           </a:xfrm>
           <a:prstGeom prst="ellipse">
             <a:avLst/>
@@ -19717,7 +19247,7 @@
         <p:spPr>
           <a:xfrm>
             <a:off x="553320" y="553320"/>
-            <a:ext cx="447480" cy="447480"/>
+            <a:ext cx="446760" cy="446760"/>
           </a:xfrm>
           <a:prstGeom prst="rect">
             <a:avLst/>
@@ -19737,7 +19267,7 @@
         <p:spPr>
           <a:xfrm>
             <a:off x="1280160" y="457200"/>
-            <a:ext cx="10423440" cy="639360"/>
+            <a:ext cx="10422720" cy="638640"/>
           </a:xfrm>
           <a:prstGeom prst="rect">
             <a:avLst/>
@@ -19798,7 +19328,7 @@
         <p:spPr>
           <a:xfrm>
             <a:off x="548640" y="1828800"/>
-            <a:ext cx="4754160" cy="4022640"/>
+            <a:ext cx="4753440" cy="4021920"/>
           </a:xfrm>
           <a:prstGeom prst="rect">
             <a:avLst/>
@@ -19899,7 +19429,7 @@
         <p:spPr>
           <a:xfrm>
             <a:off x="5486400" y="1691640"/>
-            <a:ext cx="6217200" cy="4342680"/>
+            <a:ext cx="6216480" cy="4341960"/>
           </a:xfrm>
           <a:prstGeom prst="roundRect">
             <a:avLst>
@@ -19944,7 +19474,7 @@
         <p:spPr>
           <a:xfrm>
             <a:off x="5806440" y="1965960"/>
-            <a:ext cx="5577120" cy="3794040"/>
+            <a:ext cx="5576400" cy="3793320"/>
           </a:xfrm>
           <a:prstGeom prst="rect">
             <a:avLst/>
@@ -20215,7 +19745,7 @@
         <p:spPr>
           <a:xfrm>
             <a:off x="457200" y="6446520"/>
-            <a:ext cx="6400080" cy="273600"/>
+            <a:ext cx="6399360" cy="272880"/>
           </a:xfrm>
           <a:prstGeom prst="rect">
             <a:avLst/>
@@ -20276,7 +19806,7 @@
         <p:spPr>
           <a:xfrm>
             <a:off x="11521440" y="6446520"/>
-            <a:ext cx="456480" cy="273600"/>
+            <a:ext cx="455760" cy="272880"/>
           </a:xfrm>
           <a:prstGeom prst="rect">
             <a:avLst/>
@@ -20374,7 +19904,7 @@
         <p:spPr>
           <a:xfrm>
             <a:off x="-1828800" y="5120640"/>
-            <a:ext cx="3656880" cy="3656880"/>
+            <a:ext cx="3656160" cy="3656160"/>
           </a:xfrm>
           <a:prstGeom prst="ellipse">
             <a:avLst/>
@@ -20417,7 +19947,7 @@
         <p:spPr>
           <a:xfrm>
             <a:off x="457200" y="457200"/>
-            <a:ext cx="639360" cy="639360"/>
+            <a:ext cx="638640" cy="638640"/>
           </a:xfrm>
           <a:prstGeom prst="ellipse">
             <a:avLst/>
@@ -20464,7 +19994,7 @@
         <p:spPr>
           <a:xfrm>
             <a:off x="553320" y="553320"/>
-            <a:ext cx="447480" cy="447480"/>
+            <a:ext cx="446760" cy="446760"/>
           </a:xfrm>
           <a:prstGeom prst="rect">
             <a:avLst/>
@@ -20484,7 +20014,7 @@
         <p:spPr>
           <a:xfrm>
             <a:off x="1280160" y="457200"/>
-            <a:ext cx="10423440" cy="639360"/>
+            <a:ext cx="10422720" cy="638640"/>
           </a:xfrm>
           <a:prstGeom prst="rect">
             <a:avLst/>
@@ -20545,7 +20075,7 @@
         <p:spPr>
           <a:xfrm>
             <a:off x="548640" y="1828800"/>
-            <a:ext cx="4754160" cy="4022640"/>
+            <a:ext cx="4753440" cy="4021920"/>
           </a:xfrm>
           <a:prstGeom prst="rect">
             <a:avLst/>
@@ -20681,7 +20211,7 @@
         <p:spPr>
           <a:xfrm>
             <a:off x="5486400" y="1691640"/>
-            <a:ext cx="6217200" cy="4342680"/>
+            <a:ext cx="6216480" cy="4341960"/>
           </a:xfrm>
           <a:prstGeom prst="roundRect">
             <a:avLst>
@@ -20726,7 +20256,7 @@
         <p:spPr>
           <a:xfrm>
             <a:off x="5806440" y="1965960"/>
-            <a:ext cx="5577120" cy="3794040"/>
+            <a:ext cx="5576400" cy="3793320"/>
           </a:xfrm>
           <a:prstGeom prst="rect">
             <a:avLst/>
@@ -20997,7 +20527,7 @@
         <p:spPr>
           <a:xfrm>
             <a:off x="457200" y="6446520"/>
-            <a:ext cx="6400080" cy="273600"/>
+            <a:ext cx="6399360" cy="272880"/>
           </a:xfrm>
           <a:prstGeom prst="rect">
             <a:avLst/>
@@ -21058,7 +20588,7 @@
         <p:spPr>
           <a:xfrm>
             <a:off x="11521440" y="6446520"/>
-            <a:ext cx="456480" cy="273600"/>
+            <a:ext cx="455760" cy="272880"/>
           </a:xfrm>
           <a:prstGeom prst="rect">
             <a:avLst/>
@@ -21156,7 +20686,7 @@
         <p:spPr>
           <a:xfrm>
             <a:off x="-1828800" y="5120640"/>
-            <a:ext cx="3656880" cy="3656880"/>
+            <a:ext cx="3656160" cy="3656160"/>
           </a:xfrm>
           <a:prstGeom prst="ellipse">
             <a:avLst/>
@@ -21199,7 +20729,7 @@
         <p:spPr>
           <a:xfrm>
             <a:off x="457200" y="457200"/>
-            <a:ext cx="639360" cy="639360"/>
+            <a:ext cx="638640" cy="638640"/>
           </a:xfrm>
           <a:prstGeom prst="ellipse">
             <a:avLst/>
@@ -21246,7 +20776,7 @@
         <p:spPr>
           <a:xfrm>
             <a:off x="553320" y="553320"/>
-            <a:ext cx="447480" cy="447480"/>
+            <a:ext cx="446760" cy="446760"/>
           </a:xfrm>
           <a:prstGeom prst="rect">
             <a:avLst/>
@@ -21266,7 +20796,7 @@
         <p:spPr>
           <a:xfrm>
             <a:off x="1280160" y="457200"/>
-            <a:ext cx="10423440" cy="639360"/>
+            <a:ext cx="10422720" cy="638640"/>
           </a:xfrm>
           <a:prstGeom prst="rect">
             <a:avLst/>
@@ -21327,7 +20857,7 @@
         <p:spPr>
           <a:xfrm>
             <a:off x="548640" y="1828800"/>
-            <a:ext cx="4754160" cy="4022640"/>
+            <a:ext cx="4753440" cy="4021920"/>
           </a:xfrm>
           <a:prstGeom prst="rect">
             <a:avLst/>
@@ -21428,7 +20958,7 @@
         <p:spPr>
           <a:xfrm>
             <a:off x="5486400" y="1691640"/>
-            <a:ext cx="6217200" cy="4342680"/>
+            <a:ext cx="6216480" cy="4341960"/>
           </a:xfrm>
           <a:prstGeom prst="roundRect">
             <a:avLst>
@@ -21473,7 +21003,7 @@
         <p:spPr>
           <a:xfrm>
             <a:off x="5806440" y="1965960"/>
-            <a:ext cx="5577120" cy="3794040"/>
+            <a:ext cx="5576400" cy="3793320"/>
           </a:xfrm>
           <a:prstGeom prst="rect">
             <a:avLst/>
@@ -21714,7 +21244,7 @@
         <p:spPr>
           <a:xfrm>
             <a:off x="457200" y="6446520"/>
-            <a:ext cx="6400080" cy="273600"/>
+            <a:ext cx="6399360" cy="272880"/>
           </a:xfrm>
           <a:prstGeom prst="rect">
             <a:avLst/>
@@ -21775,7 +21305,7 @@
         <p:spPr>
           <a:xfrm>
             <a:off x="11521440" y="6446520"/>
-            <a:ext cx="456480" cy="273600"/>
+            <a:ext cx="455760" cy="272880"/>
           </a:xfrm>
           <a:prstGeom prst="rect">
             <a:avLst/>
@@ -21873,7 +21403,7 @@
         <p:spPr>
           <a:xfrm>
             <a:off x="-1828800" y="5029200"/>
-            <a:ext cx="3656880" cy="3656880"/>
+            <a:ext cx="3656160" cy="3656160"/>
           </a:xfrm>
           <a:prstGeom prst="ellipse">
             <a:avLst/>
@@ -21916,7 +21446,7 @@
         <p:spPr>
           <a:xfrm>
             <a:off x="457200" y="457200"/>
-            <a:ext cx="639360" cy="639360"/>
+            <a:ext cx="638640" cy="638640"/>
           </a:xfrm>
           <a:prstGeom prst="ellipse">
             <a:avLst/>
@@ -21963,7 +21493,7 @@
         <p:spPr>
           <a:xfrm>
             <a:off x="553320" y="553320"/>
-            <a:ext cx="447480" cy="447480"/>
+            <a:ext cx="446760" cy="446760"/>
           </a:xfrm>
           <a:prstGeom prst="rect">
             <a:avLst/>
@@ -21983,7 +21513,7 @@
         <p:spPr>
           <a:xfrm>
             <a:off x="1280160" y="457200"/>
-            <a:ext cx="10423440" cy="639360"/>
+            <a:ext cx="10422720" cy="638640"/>
           </a:xfrm>
           <a:prstGeom prst="rect">
             <a:avLst/>
@@ -22044,7 +21574,7 @@
         <p:spPr>
           <a:xfrm>
             <a:off x="457200" y="1600200"/>
-            <a:ext cx="11273760" cy="4479840"/>
+            <a:ext cx="11273040" cy="4479120"/>
           </a:xfrm>
           <a:prstGeom prst="roundRect">
             <a:avLst>
@@ -22089,7 +21619,7 @@
         <p:spPr>
           <a:xfrm>
             <a:off x="822960" y="1828800"/>
-            <a:ext cx="10514880" cy="456480"/>
+            <a:ext cx="10514160" cy="455760"/>
           </a:xfrm>
           <a:prstGeom prst="rect">
             <a:avLst/>
@@ -22150,7 +21680,7 @@
         <p:spPr>
           <a:xfrm>
             <a:off x="822960" y="2423160"/>
-            <a:ext cx="383400" cy="383400"/>
+            <a:ext cx="382680" cy="382680"/>
           </a:xfrm>
           <a:prstGeom prst="ellipse">
             <a:avLst/>
@@ -22193,7 +21723,7 @@
         <p:spPr>
           <a:xfrm>
             <a:off x="822960" y="2423160"/>
-            <a:ext cx="383400" cy="383400"/>
+            <a:ext cx="382680" cy="382680"/>
           </a:xfrm>
           <a:prstGeom prst="rect">
             <a:avLst/>
@@ -22254,7 +21784,7 @@
         <p:spPr>
           <a:xfrm>
             <a:off x="1435680" y="2423160"/>
-            <a:ext cx="9582120" cy="383400"/>
+            <a:ext cx="9581400" cy="382680"/>
           </a:xfrm>
           <a:prstGeom prst="rect">
             <a:avLst/>
@@ -22315,7 +21845,7 @@
         <p:spPr>
           <a:xfrm>
             <a:off x="822960" y="3303360"/>
-            <a:ext cx="383400" cy="383400"/>
+            <a:ext cx="382680" cy="382680"/>
           </a:xfrm>
           <a:prstGeom prst="ellipse">
             <a:avLst/>
@@ -22358,7 +21888,7 @@
         <p:spPr>
           <a:xfrm>
             <a:off x="822960" y="3303360"/>
-            <a:ext cx="383400" cy="383400"/>
+            <a:ext cx="382680" cy="382680"/>
           </a:xfrm>
           <a:prstGeom prst="rect">
             <a:avLst/>
@@ -22419,7 +21949,7 @@
         <p:spPr>
           <a:xfrm>
             <a:off x="1435680" y="3303360"/>
-            <a:ext cx="9582120" cy="383400"/>
+            <a:ext cx="9581400" cy="382680"/>
           </a:xfrm>
           <a:prstGeom prst="rect">
             <a:avLst/>
@@ -22480,7 +22010,7 @@
         <p:spPr>
           <a:xfrm>
             <a:off x="822960" y="4183560"/>
-            <a:ext cx="383400" cy="383400"/>
+            <a:ext cx="382680" cy="382680"/>
           </a:xfrm>
           <a:prstGeom prst="ellipse">
             <a:avLst/>
@@ -22523,7 +22053,7 @@
         <p:spPr>
           <a:xfrm>
             <a:off x="822960" y="4183560"/>
-            <a:ext cx="383400" cy="383400"/>
+            <a:ext cx="382680" cy="382680"/>
           </a:xfrm>
           <a:prstGeom prst="rect">
             <a:avLst/>
@@ -22584,7 +22114,7 @@
         <p:spPr>
           <a:xfrm>
             <a:off x="1435680" y="4183560"/>
-            <a:ext cx="9582120" cy="383400"/>
+            <a:ext cx="9581400" cy="382680"/>
           </a:xfrm>
           <a:prstGeom prst="rect">
             <a:avLst/>
@@ -22645,7 +22175,7 @@
         <p:spPr>
           <a:xfrm>
             <a:off x="822960" y="5063400"/>
-            <a:ext cx="383400" cy="383400"/>
+            <a:ext cx="382680" cy="382680"/>
           </a:xfrm>
           <a:prstGeom prst="ellipse">
             <a:avLst/>
@@ -22688,7 +22218,7 @@
         <p:spPr>
           <a:xfrm>
             <a:off x="822960" y="5063400"/>
-            <a:ext cx="383400" cy="383400"/>
+            <a:ext cx="382680" cy="382680"/>
           </a:xfrm>
           <a:prstGeom prst="rect">
             <a:avLst/>
@@ -22749,7 +22279,7 @@
         <p:spPr>
           <a:xfrm>
             <a:off x="1435680" y="5063400"/>
-            <a:ext cx="9582120" cy="383400"/>
+            <a:ext cx="9581400" cy="382680"/>
           </a:xfrm>
           <a:prstGeom prst="rect">
             <a:avLst/>
@@ -22810,7 +22340,7 @@
         <p:spPr>
           <a:xfrm>
             <a:off x="457200" y="6446520"/>
-            <a:ext cx="6400080" cy="273600"/>
+            <a:ext cx="6399360" cy="272880"/>
           </a:xfrm>
           <a:prstGeom prst="rect">
             <a:avLst/>
@@ -22871,7 +22401,7 @@
         <p:spPr>
           <a:xfrm>
             <a:off x="11521440" y="6446520"/>
-            <a:ext cx="456480" cy="273600"/>
+            <a:ext cx="455760" cy="272880"/>
           </a:xfrm>
           <a:prstGeom prst="rect">
             <a:avLst/>
@@ -22969,7 +22499,7 @@
         <p:spPr>
           <a:xfrm>
             <a:off x="-1828800" y="4114800"/>
-            <a:ext cx="5485680" cy="5485680"/>
+            <a:ext cx="5484960" cy="5484960"/>
           </a:xfrm>
           <a:prstGeom prst="ellipse">
             <a:avLst/>
@@ -23012,7 +22542,7 @@
         <p:spPr>
           <a:xfrm>
             <a:off x="9601200" y="-2286000"/>
-            <a:ext cx="5485680" cy="5485680"/>
+            <a:ext cx="5484960" cy="5484960"/>
           </a:xfrm>
           <a:prstGeom prst="ellipse">
             <a:avLst/>
@@ -23055,7 +22585,7 @@
         <p:spPr>
           <a:xfrm>
             <a:off x="5591520" y="731520"/>
-            <a:ext cx="1005120" cy="1005120"/>
+            <a:ext cx="1004400" cy="1004400"/>
           </a:xfrm>
           <a:prstGeom prst="ellipse">
             <a:avLst/>
@@ -23102,7 +22632,7 @@
         <p:spPr>
           <a:xfrm>
             <a:off x="5742360" y="882360"/>
-            <a:ext cx="703440" cy="703440"/>
+            <a:ext cx="702720" cy="702720"/>
           </a:xfrm>
           <a:prstGeom prst="rect">
             <a:avLst/>
@@ -23122,7 +22652,7 @@
         <p:spPr>
           <a:xfrm>
             <a:off x="914400" y="1965960"/>
-            <a:ext cx="10359360" cy="365040"/>
+            <a:ext cx="10358640" cy="364320"/>
           </a:xfrm>
           <a:prstGeom prst="rect">
             <a:avLst/>
@@ -23183,7 +22713,7 @@
         <p:spPr>
           <a:xfrm>
             <a:off x="914400" y="2377440"/>
-            <a:ext cx="10359360" cy="2010960"/>
+            <a:ext cx="10358640" cy="2010240"/>
           </a:xfrm>
           <a:prstGeom prst="rect">
             <a:avLst/>
@@ -23244,7 +22774,7 @@
         <p:spPr>
           <a:xfrm>
             <a:off x="1463040" y="4572000"/>
-            <a:ext cx="9262080" cy="1096560"/>
+            <a:ext cx="9261360" cy="1095840"/>
           </a:xfrm>
           <a:prstGeom prst="rect">
             <a:avLst/>
@@ -23305,7 +22835,7 @@
         <p:spPr>
           <a:xfrm>
             <a:off x="11521440" y="6446520"/>
-            <a:ext cx="456480" cy="273600"/>
+            <a:ext cx="455760" cy="272880"/>
           </a:xfrm>
           <a:prstGeom prst="rect">
             <a:avLst/>
@@ -23403,7 +22933,7 @@
         <p:spPr>
           <a:xfrm>
             <a:off x="-1828800" y="5120640"/>
-            <a:ext cx="3656880" cy="3656880"/>
+            <a:ext cx="3656160" cy="3656160"/>
           </a:xfrm>
           <a:prstGeom prst="ellipse">
             <a:avLst/>
@@ -23445,8 +22975,8 @@
         </p:nvSpPr>
         <p:spPr>
           <a:xfrm>
-            <a:off x="457200" y="457200"/>
-            <a:ext cx="639360" cy="639360"/>
+            <a:off x="457200" y="277200"/>
+            <a:ext cx="638640" cy="638640"/>
           </a:xfrm>
           <a:prstGeom prst="ellipse">
             <a:avLst/>
@@ -23492,8 +23022,8 @@
         </p:blipFill>
         <p:spPr>
           <a:xfrm>
-            <a:off x="553320" y="553320"/>
-            <a:ext cx="447480" cy="447480"/>
+            <a:off x="553320" y="409320"/>
+            <a:ext cx="446760" cy="446760"/>
           </a:xfrm>
           <a:prstGeom prst="rect">
             <a:avLst/>
@@ -23512,8 +23042,8 @@
         </p:nvSpPr>
         <p:spPr>
           <a:xfrm>
-            <a:off x="1280160" y="457200"/>
-            <a:ext cx="10423440" cy="639360"/>
+            <a:off x="1235520" y="228600"/>
+            <a:ext cx="10422720" cy="638640"/>
           </a:xfrm>
           <a:prstGeom prst="rect">
             <a:avLst/>
@@ -23573,8 +23103,8 @@
         </p:nvSpPr>
         <p:spPr>
           <a:xfrm>
-            <a:off x="548640" y="1828800"/>
-            <a:ext cx="4754160" cy="4022640"/>
+            <a:off x="1875960" y="867240"/>
+            <a:ext cx="4753440" cy="4021920"/>
           </a:xfrm>
           <a:prstGeom prst="rect">
             <a:avLst/>
@@ -23609,7 +23139,7 @@
               <a:buChar char=""/>
             </a:pPr>
             <a:r>
-              <a:rPr lang="en-US" sz="1450" b="0" u="none" strike="noStrike">
+              <a:rPr lang="en-US" sz="1200" b="0" u="none" strike="noStrike">
                 <a:solidFill>
                   <a:srgbClr val="1B2420"/>
                 </a:solidFill>
@@ -23620,7 +23150,7 @@
               </a:rPr>
               <a:t>Start with an empty value (0, "", or []), then build it up one step at a time inside the loop</a:t>
             </a:r>
-            <a:endParaRPr lang="en-US" sz="1450" b="0" u="none" strike="noStrike">
+            <a:endParaRPr lang="en-US" sz="1200" b="0" u="none" strike="noStrike">
               <a:solidFill>
                 <a:srgbClr val="000000"/>
               </a:solidFill>
@@ -23644,7 +23174,7 @@
               <a:buChar char=""/>
             </a:pPr>
             <a:r>
-              <a:rPr lang="en-US" sz="1450" b="0" u="none" strike="noStrike">
+              <a:rPr lang="en-US" sz="1200" b="0" u="none" strike="noStrike">
                 <a:solidFill>
                   <a:srgbClr val="1B2420"/>
                 </a:solidFill>
@@ -23655,7 +23185,397 @@
               </a:rPr>
               <a:t>This is how sum(), and many things sum() can't do alone, actually work under the hood</a:t>
             </a:r>
-            <a:endParaRPr lang="en-US" sz="1450" b="0" u="none" strike="noStrike">
+            <a:endParaRPr lang="en-US" sz="1200" b="0" u="none" strike="noStrike">
+              <a:solidFill>
+                <a:srgbClr val="000000"/>
+              </a:solidFill>
+              <a:effectLst/>
+              <a:uFillTx/>
+              <a:latin typeface="Arial"/>
+            </a:endParaRPr>
+          </a:p>
+          <a:p>
+            <a:pPr defTabSz="914400">
+              <a:lnSpc>
+                <a:spcPct val="100000"/>
+              </a:lnSpc>
+              <a:spcAft>
+                <a:spcPts val="1400"/>
+              </a:spcAft>
+            </a:pPr>
+            <a:r>
+              <a:rPr lang="en-US" sz="1200" b="0" u="none" strike="noStrike">
+                <a:solidFill>
+                  <a:srgbClr val="1B2420"/>
+                </a:solidFill>
+                <a:effectLst/>
+                <a:uFillTx/>
+                <a:latin typeface="Calibri"/>
+                <a:ea typeface="Calibri"/>
+              </a:rPr>
+              <a:t>Start with something</a:t>
+            </a:r>
+            <a:endParaRPr lang="en-US" sz="1200" b="0" u="none" strike="noStrike">
+              <a:solidFill>
+                <a:srgbClr val="000000"/>
+              </a:solidFill>
+              <a:effectLst/>
+              <a:uFillTx/>
+              <a:latin typeface="Arial"/>
+            </a:endParaRPr>
+          </a:p>
+          <a:p>
+            <a:pPr defTabSz="914400">
+              <a:lnSpc>
+                <a:spcPct val="100000"/>
+              </a:lnSpc>
+              <a:spcAft>
+                <a:spcPts val="1400"/>
+              </a:spcAft>
+            </a:pPr>
+            <a:r>
+              <a:rPr lang="en-US" sz="1200" b="0" u="none" strike="noStrike">
+                <a:solidFill>
+                  <a:srgbClr val="1B2420"/>
+                </a:solidFill>
+                <a:effectLst/>
+                <a:uFillTx/>
+                <a:latin typeface="Calibri"/>
+                <a:ea typeface="Calibri"/>
+              </a:rPr>
+              <a:t>       ↓</a:t>
+            </a:r>
+            <a:endParaRPr lang="en-US" sz="1200" b="0" u="none" strike="noStrike">
+              <a:solidFill>
+                <a:srgbClr val="000000"/>
+              </a:solidFill>
+              <a:effectLst/>
+              <a:uFillTx/>
+              <a:latin typeface="Arial"/>
+            </a:endParaRPr>
+          </a:p>
+          <a:p>
+            <a:pPr defTabSz="914400">
+              <a:lnSpc>
+                <a:spcPct val="100000"/>
+              </a:lnSpc>
+              <a:spcAft>
+                <a:spcPts val="1400"/>
+              </a:spcAft>
+            </a:pPr>
+            <a:r>
+              <a:rPr lang="en-US" sz="1200" b="0" u="none" strike="noStrike">
+                <a:solidFill>
+                  <a:srgbClr val="1B2420"/>
+                </a:solidFill>
+                <a:effectLst/>
+                <a:uFillTx/>
+                <a:latin typeface="Calibri"/>
+                <a:ea typeface="Calibri"/>
+              </a:rPr>
+              <a:t>Process one item</a:t>
+            </a:r>
+            <a:endParaRPr lang="en-US" sz="1200" b="0" u="none" strike="noStrike">
+              <a:solidFill>
+                <a:srgbClr val="000000"/>
+              </a:solidFill>
+              <a:effectLst/>
+              <a:uFillTx/>
+              <a:latin typeface="Arial"/>
+            </a:endParaRPr>
+          </a:p>
+          <a:p>
+            <a:pPr defTabSz="914400">
+              <a:lnSpc>
+                <a:spcPct val="100000"/>
+              </a:lnSpc>
+              <a:spcAft>
+                <a:spcPts val="1400"/>
+              </a:spcAft>
+            </a:pPr>
+            <a:r>
+              <a:rPr lang="en-US" sz="1200" b="0" u="none" strike="noStrike">
+                <a:solidFill>
+                  <a:srgbClr val="1B2420"/>
+                </a:solidFill>
+                <a:effectLst/>
+                <a:uFillTx/>
+                <a:latin typeface="Calibri"/>
+                <a:ea typeface="Calibri"/>
+              </a:rPr>
+              <a:t>       ↓</a:t>
+            </a:r>
+            <a:endParaRPr lang="en-US" sz="1200" b="0" u="none" strike="noStrike">
+              <a:solidFill>
+                <a:srgbClr val="000000"/>
+              </a:solidFill>
+              <a:effectLst/>
+              <a:uFillTx/>
+              <a:latin typeface="Arial"/>
+            </a:endParaRPr>
+          </a:p>
+          <a:p>
+            <a:pPr defTabSz="914400">
+              <a:lnSpc>
+                <a:spcPct val="100000"/>
+              </a:lnSpc>
+              <a:spcAft>
+                <a:spcPts val="1400"/>
+              </a:spcAft>
+            </a:pPr>
+            <a:r>
+              <a:rPr lang="en-US" sz="1200" b="0" u="none" strike="noStrike">
+                <a:solidFill>
+                  <a:srgbClr val="1B2420"/>
+                </a:solidFill>
+                <a:effectLst/>
+                <a:uFillTx/>
+                <a:latin typeface="Calibri"/>
+                <a:ea typeface="Calibri"/>
+              </a:rPr>
+              <a:t>Update the result</a:t>
+            </a:r>
+            <a:endParaRPr lang="en-US" sz="1200" b="0" u="none" strike="noStrike">
+              <a:solidFill>
+                <a:srgbClr val="000000"/>
+              </a:solidFill>
+              <a:effectLst/>
+              <a:uFillTx/>
+              <a:latin typeface="Arial"/>
+            </a:endParaRPr>
+          </a:p>
+          <a:p>
+            <a:pPr defTabSz="914400">
+              <a:lnSpc>
+                <a:spcPct val="100000"/>
+              </a:lnSpc>
+              <a:spcAft>
+                <a:spcPts val="1400"/>
+              </a:spcAft>
+            </a:pPr>
+            <a:r>
+              <a:rPr lang="en-US" sz="1200" b="0" u="none" strike="noStrike">
+                <a:solidFill>
+                  <a:srgbClr val="1B2420"/>
+                </a:solidFill>
+                <a:effectLst/>
+                <a:uFillTx/>
+                <a:latin typeface="Calibri"/>
+                <a:ea typeface="Calibri"/>
+              </a:rPr>
+              <a:t>       ↓</a:t>
+            </a:r>
+            <a:endParaRPr lang="en-US" sz="1200" b="0" u="none" strike="noStrike">
+              <a:solidFill>
+                <a:srgbClr val="000000"/>
+              </a:solidFill>
+              <a:effectLst/>
+              <a:uFillTx/>
+              <a:latin typeface="Arial"/>
+            </a:endParaRPr>
+          </a:p>
+          <a:p>
+            <a:pPr defTabSz="914400">
+              <a:lnSpc>
+                <a:spcPct val="100000"/>
+              </a:lnSpc>
+              <a:spcAft>
+                <a:spcPts val="1400"/>
+              </a:spcAft>
+            </a:pPr>
+            <a:r>
+              <a:rPr lang="en-US" sz="1200" b="0" u="none" strike="noStrike">
+                <a:solidFill>
+                  <a:srgbClr val="1B2420"/>
+                </a:solidFill>
+                <a:effectLst/>
+                <a:uFillTx/>
+                <a:latin typeface="Calibri"/>
+                <a:ea typeface="Calibri"/>
+              </a:rPr>
+              <a:t>Process next item</a:t>
+            </a:r>
+            <a:endParaRPr lang="en-US" sz="1200" b="0" u="none" strike="noStrike">
+              <a:solidFill>
+                <a:srgbClr val="000000"/>
+              </a:solidFill>
+              <a:effectLst/>
+              <a:uFillTx/>
+              <a:latin typeface="Arial"/>
+            </a:endParaRPr>
+          </a:p>
+          <a:p>
+            <a:pPr defTabSz="914400">
+              <a:lnSpc>
+                <a:spcPct val="100000"/>
+              </a:lnSpc>
+              <a:spcAft>
+                <a:spcPts val="1400"/>
+              </a:spcAft>
+            </a:pPr>
+            <a:r>
+              <a:rPr lang="en-US" sz="1200" b="0" u="none" strike="noStrike">
+                <a:solidFill>
+                  <a:srgbClr val="1B2420"/>
+                </a:solidFill>
+                <a:effectLst/>
+                <a:uFillTx/>
+                <a:latin typeface="Calibri"/>
+                <a:ea typeface="Calibri"/>
+              </a:rPr>
+              <a:t>       ↓</a:t>
+            </a:r>
+            <a:endParaRPr lang="en-US" sz="1200" b="0" u="none" strike="noStrike">
+              <a:solidFill>
+                <a:srgbClr val="000000"/>
+              </a:solidFill>
+              <a:effectLst/>
+              <a:uFillTx/>
+              <a:latin typeface="Arial"/>
+            </a:endParaRPr>
+          </a:p>
+          <a:p>
+            <a:pPr defTabSz="914400">
+              <a:lnSpc>
+                <a:spcPct val="100000"/>
+              </a:lnSpc>
+              <a:spcAft>
+                <a:spcPts val="1400"/>
+              </a:spcAft>
+            </a:pPr>
+            <a:r>
+              <a:rPr lang="en-US" sz="1200" b="0" u="none" strike="noStrike">
+                <a:solidFill>
+                  <a:srgbClr val="1B2420"/>
+                </a:solidFill>
+                <a:effectLst/>
+                <a:uFillTx/>
+                <a:latin typeface="Calibri"/>
+                <a:ea typeface="Calibri"/>
+              </a:rPr>
+              <a:t>Update the result</a:t>
+            </a:r>
+            <a:endParaRPr lang="en-US" sz="1200" b="0" u="none" strike="noStrike">
+              <a:solidFill>
+                <a:srgbClr val="000000"/>
+              </a:solidFill>
+              <a:effectLst/>
+              <a:uFillTx/>
+              <a:latin typeface="Arial"/>
+            </a:endParaRPr>
+          </a:p>
+          <a:p>
+            <a:pPr defTabSz="914400">
+              <a:lnSpc>
+                <a:spcPct val="100000"/>
+              </a:lnSpc>
+              <a:spcAft>
+                <a:spcPts val="1400"/>
+              </a:spcAft>
+            </a:pPr>
+            <a:r>
+              <a:rPr lang="en-US" sz="1200" b="0" u="none" strike="noStrike">
+                <a:solidFill>
+                  <a:srgbClr val="1B2420"/>
+                </a:solidFill>
+                <a:effectLst/>
+                <a:uFillTx/>
+                <a:latin typeface="Calibri"/>
+                <a:ea typeface="Calibri"/>
+              </a:rPr>
+              <a:t>       ↓</a:t>
+            </a:r>
+            <a:endParaRPr lang="en-US" sz="1200" b="0" u="none" strike="noStrike">
+              <a:solidFill>
+                <a:srgbClr val="000000"/>
+              </a:solidFill>
+              <a:effectLst/>
+              <a:uFillTx/>
+              <a:latin typeface="Arial"/>
+            </a:endParaRPr>
+          </a:p>
+          <a:p>
+            <a:pPr defTabSz="914400">
+              <a:lnSpc>
+                <a:spcPct val="100000"/>
+              </a:lnSpc>
+              <a:spcAft>
+                <a:spcPts val="1400"/>
+              </a:spcAft>
+            </a:pPr>
+            <a:r>
+              <a:rPr lang="en-US" sz="1200" b="0" u="none" strike="noStrike">
+                <a:solidFill>
+                  <a:srgbClr val="1B2420"/>
+                </a:solidFill>
+                <a:effectLst/>
+                <a:uFillTx/>
+                <a:latin typeface="Calibri"/>
+                <a:ea typeface="Calibri"/>
+              </a:rPr>
+              <a:t>...</a:t>
+            </a:r>
+            <a:endParaRPr lang="en-US" sz="1200" b="0" u="none" strike="noStrike">
+              <a:solidFill>
+                <a:srgbClr val="000000"/>
+              </a:solidFill>
+              <a:effectLst/>
+              <a:uFillTx/>
+              <a:latin typeface="Arial"/>
+            </a:endParaRPr>
+          </a:p>
+          <a:p>
+            <a:pPr defTabSz="914400">
+              <a:lnSpc>
+                <a:spcPct val="100000"/>
+              </a:lnSpc>
+              <a:spcAft>
+                <a:spcPts val="1400"/>
+              </a:spcAft>
+            </a:pPr>
+            <a:r>
+              <a:rPr lang="en-US" sz="1200" b="0" u="none" strike="noStrike">
+                <a:solidFill>
+                  <a:srgbClr val="1B2420"/>
+                </a:solidFill>
+                <a:effectLst/>
+                <a:uFillTx/>
+                <a:latin typeface="Calibri"/>
+                <a:ea typeface="Calibri"/>
+              </a:rPr>
+              <a:t>       ↓</a:t>
+            </a:r>
+            <a:endParaRPr lang="en-US" sz="1200" b="0" u="none" strike="noStrike">
+              <a:solidFill>
+                <a:srgbClr val="000000"/>
+              </a:solidFill>
+              <a:effectLst/>
+              <a:uFillTx/>
+              <a:latin typeface="Arial"/>
+            </a:endParaRPr>
+          </a:p>
+          <a:p>
+            <a:pPr defTabSz="914400">
+              <a:lnSpc>
+                <a:spcPct val="100000"/>
+              </a:lnSpc>
+              <a:spcAft>
+                <a:spcPts val="1400"/>
+              </a:spcAft>
+            </a:pPr>
+            <a:r>
+              <a:rPr lang="en-US" sz="1200" b="0" u="none" strike="noStrike">
+                <a:solidFill>
+                  <a:srgbClr val="1B2420"/>
+                </a:solidFill>
+                <a:effectLst/>
+                <a:uFillTx/>
+                <a:latin typeface="Calibri"/>
+                <a:ea typeface="Calibri"/>
+              </a:rPr>
+              <a:t>Final result</a:t>
+            </a:r>
+            <a:endParaRPr lang="en-US" sz="1200" b="0" u="none" strike="noStrike">
               <a:solidFill>
                 <a:srgbClr val="000000"/>
               </a:solidFill>
@@ -23674,8 +23594,8 @@
         </p:nvSpPr>
         <p:spPr>
           <a:xfrm>
-            <a:off x="5486400" y="1691640"/>
-            <a:ext cx="6217200" cy="4342680"/>
+            <a:off x="6674400" y="1691640"/>
+            <a:ext cx="5523840" cy="4341960"/>
           </a:xfrm>
           <a:prstGeom prst="roundRect">
             <a:avLst>
@@ -23719,8 +23639,8 @@
         </p:nvSpPr>
         <p:spPr>
           <a:xfrm>
-            <a:off x="5806440" y="1965960"/>
-            <a:ext cx="5577120" cy="3794040"/>
+            <a:off x="7086600" y="1965960"/>
+            <a:ext cx="2422800" cy="3793320"/>
           </a:xfrm>
           <a:prstGeom prst="rect">
             <a:avLst/>
@@ -23789,7 +23709,7 @@
                 <a:latin typeface="Cantarell"/>
                 <a:ea typeface="Consolas"/>
               </a:rPr>
-              <a:t> </a:t>
+              <a:t>total = 0</a:t>
             </a:r>
             <a:endParaRPr lang="en-US" sz="1300" b="0" u="none" strike="noStrike">
               <a:solidFill>
@@ -23819,7 +23739,7 @@
                 <a:latin typeface="Cantarell"/>
                 <a:ea typeface="Consolas"/>
               </a:rPr>
-              <a:t>total = 0</a:t>
+              <a:t>for n in numbers:</a:t>
             </a:r>
             <a:endParaRPr lang="en-US" sz="1300" b="0" u="none" strike="noStrike">
               <a:solidFill>
@@ -23849,7 +23769,7 @@
                 <a:latin typeface="Cantarell"/>
                 <a:ea typeface="Consolas"/>
               </a:rPr>
-              <a:t>for n in numbers:</a:t>
+              <a:t>    total += n</a:t>
             </a:r>
             <a:endParaRPr lang="en-US" sz="1300" b="0" u="none" strike="noStrike">
               <a:solidFill>
@@ -23879,26 +23799,11 @@
                 <a:latin typeface="Cantarell"/>
                 <a:ea typeface="Consolas"/>
               </a:rPr>
-              <a:t>    total += n</a:t>
-            </a:r>
-            <a:endParaRPr lang="en-US" sz="1300" b="0" u="none" strike="noStrike">
-              <a:solidFill>
-                <a:srgbClr val="000000"/>
-              </a:solidFill>
-              <a:effectLst/>
-              <a:uFillTx/>
-              <a:latin typeface="Arial"/>
-            </a:endParaRPr>
-          </a:p>
-          <a:p>
-            <a:pPr defTabSz="914400">
-              <a:lnSpc>
-                <a:spcPct val="140000"/>
-              </a:lnSpc>
-              <a:tabLst>
-                <a:tab pos="0" algn="l"/>
-              </a:tabLst>
-            </a:pPr>
+              <a:t>print(total)   # 108 </a:t>
+            </a:r>
+            <a:br>
+              <a:rPr sz="1300"/>
+            </a:br>
             <a:r>
               <a:rPr lang="en-US" sz="1300" b="0" u="none" strike="noStrike">
                 <a:solidFill>
@@ -23909,7 +23814,7 @@
                 <a:latin typeface="Cantarell"/>
                 <a:ea typeface="Consolas"/>
               </a:rPr>
-              <a:t> </a:t>
+              <a:t>____________________________</a:t>
             </a:r>
             <a:endParaRPr lang="en-US" sz="1300" b="0" u="none" strike="noStrike">
               <a:solidFill>
@@ -23939,7 +23844,7 @@
                 <a:latin typeface="Cantarell"/>
                 <a:ea typeface="Consolas"/>
               </a:rPr>
-              <a:t>print(total)   # 108</a:t>
+              <a:t>words = ["I", "love", "Python"]</a:t>
             </a:r>
             <a:endParaRPr lang="en-US" sz="1300" b="0" u="none" strike="noStrike">
               <a:solidFill>
@@ -23950,6 +23855,126 @@
               <a:latin typeface="Arial"/>
             </a:endParaRPr>
           </a:p>
+          <a:p>
+            <a:pPr defTabSz="914400">
+              <a:lnSpc>
+                <a:spcPct val="140000"/>
+              </a:lnSpc>
+              <a:tabLst>
+                <a:tab pos="0" algn="l"/>
+              </a:tabLst>
+            </a:pPr>
+            <a:r>
+              <a:rPr lang="en-US" sz="1300" b="0" u="none" strike="noStrike">
+                <a:solidFill>
+                  <a:srgbClr val="C9D3CC"/>
+                </a:solidFill>
+                <a:effectLst/>
+                <a:uFillTx/>
+                <a:latin typeface="Cantarell"/>
+                <a:ea typeface="Consolas"/>
+              </a:rPr>
+              <a:t>result = ""</a:t>
+            </a:r>
+            <a:endParaRPr lang="en-US" sz="1300" b="0" u="none" strike="noStrike">
+              <a:solidFill>
+                <a:srgbClr val="000000"/>
+              </a:solidFill>
+              <a:effectLst/>
+              <a:uFillTx/>
+              <a:latin typeface="Arial"/>
+            </a:endParaRPr>
+          </a:p>
+          <a:p>
+            <a:pPr defTabSz="914400">
+              <a:lnSpc>
+                <a:spcPct val="140000"/>
+              </a:lnSpc>
+              <a:tabLst>
+                <a:tab pos="0" algn="l"/>
+              </a:tabLst>
+            </a:pPr>
+            <a:r>
+              <a:rPr lang="en-US" sz="1300" b="0" u="none" strike="noStrike">
+                <a:solidFill>
+                  <a:srgbClr val="C9D3CC"/>
+                </a:solidFill>
+                <a:effectLst/>
+                <a:uFillTx/>
+                <a:latin typeface="Cantarell"/>
+                <a:ea typeface="Consolas"/>
+              </a:rPr>
+              <a:t>for word in words:</a:t>
+            </a:r>
+            <a:endParaRPr lang="en-US" sz="1300" b="0" u="none" strike="noStrike">
+              <a:solidFill>
+                <a:srgbClr val="000000"/>
+              </a:solidFill>
+              <a:effectLst/>
+              <a:uFillTx/>
+              <a:latin typeface="Arial"/>
+            </a:endParaRPr>
+          </a:p>
+          <a:p>
+            <a:pPr defTabSz="914400">
+              <a:lnSpc>
+                <a:spcPct val="140000"/>
+              </a:lnSpc>
+              <a:tabLst>
+                <a:tab pos="0" algn="l"/>
+              </a:tabLst>
+            </a:pPr>
+            <a:r>
+              <a:rPr lang="en-US" sz="1300" b="0" u="none" strike="noStrike">
+                <a:solidFill>
+                  <a:srgbClr val="C9D3CC"/>
+                </a:solidFill>
+                <a:effectLst/>
+                <a:uFillTx/>
+                <a:latin typeface="Cantarell"/>
+                <a:ea typeface="Consolas"/>
+              </a:rPr>
+              <a:t>    result += word + " "</a:t>
+            </a:r>
+            <a:endParaRPr lang="en-US" sz="1300" b="0" u="none" strike="noStrike">
+              <a:solidFill>
+                <a:srgbClr val="000000"/>
+              </a:solidFill>
+              <a:effectLst/>
+              <a:uFillTx/>
+              <a:latin typeface="Arial"/>
+            </a:endParaRPr>
+          </a:p>
+          <a:p>
+            <a:pPr defTabSz="914400">
+              <a:lnSpc>
+                <a:spcPct val="140000"/>
+              </a:lnSpc>
+              <a:tabLst>
+                <a:tab pos="0" algn="l"/>
+              </a:tabLst>
+            </a:pPr>
+            <a:r>
+              <a:rPr lang="en-US" sz="1300" b="0" u="none" strike="noStrike">
+                <a:solidFill>
+                  <a:srgbClr val="C9D3CC"/>
+                </a:solidFill>
+                <a:effectLst/>
+                <a:uFillTx/>
+                <a:latin typeface="Cantarell"/>
+                <a:ea typeface="Consolas"/>
+              </a:rPr>
+              <a:t>print(result)</a:t>
+            </a:r>
+            <a:endParaRPr lang="en-US" sz="1300" b="0" u="none" strike="noStrike">
+              <a:solidFill>
+                <a:srgbClr val="000000"/>
+              </a:solidFill>
+              <a:effectLst/>
+              <a:uFillTx/>
+              <a:latin typeface="Arial"/>
+            </a:endParaRPr>
+          </a:p>
         </p:txBody>
       </p:sp>
       <p:sp>
@@ -23961,7 +23986,7 @@
         <p:spPr>
           <a:xfrm>
             <a:off x="457200" y="6446520"/>
-            <a:ext cx="6400080" cy="273600"/>
+            <a:ext cx="6399360" cy="272880"/>
           </a:xfrm>
           <a:prstGeom prst="rect">
             <a:avLst/>
@@ -24022,7 +24047,7 @@
         <p:spPr>
           <a:xfrm>
             <a:off x="11521440" y="6446520"/>
-            <a:ext cx="456480" cy="273600"/>
+            <a:ext cx="455760" cy="272880"/>
           </a:xfrm>
           <a:prstGeom prst="rect">
             <a:avLst/>
@@ -24064,6 +24089,205 @@
               <a:t>27</a:t>
             </a:r>
             <a:endParaRPr lang="en-US" sz="1000" b="0" u="none" strike="noStrike">
+              <a:solidFill>
+                <a:srgbClr val="000000"/>
+              </a:solidFill>
+              <a:effectLst/>
+              <a:uFillTx/>
+              <a:latin typeface="Arial"/>
+            </a:endParaRPr>
+          </a:p>
+        </p:txBody>
+      </p:sp>
+      <p:sp>
+        <p:nvSpPr>
+          <p:cNvPr id="332" name="Text 25"/>
+          <p:cNvSpPr/>
+          <p:nvPr/>
+        </p:nvSpPr>
+        <p:spPr>
+          <a:xfrm>
+            <a:off x="10150200" y="1965960"/>
+            <a:ext cx="2422800" cy="3793320"/>
+          </a:xfrm>
+          <a:prstGeom prst="rect">
+            <a:avLst/>
+          </a:prstGeom>
+          <a:noFill/>
+          <a:ln w="0">
+            <a:noFill/>
+          </a:ln>
+        </p:spPr>
+        <p:style>
+          <a:lnRef idx="0"/>
+          <a:fillRef idx="0"/>
+          <a:effectRef idx="0"/>
+          <a:fontRef idx="minor"/>
+        </p:style>
+        <p:txBody>
+          <a:bodyPr lIns="0" tIns="0" rIns="0" bIns="0" anchor="t">
+            <a:noAutofit/>
+          </a:bodyPr>
+          <a:p>
+            <a:pPr defTabSz="914400">
+              <a:lnSpc>
+                <a:spcPct val="140000"/>
+              </a:lnSpc>
+              <a:tabLst>
+                <a:tab pos="0" algn="l"/>
+              </a:tabLst>
+            </a:pPr>
+            <a:r>
+              <a:rPr lang="en-US" sz="1300" b="0" u="none" strike="noStrike">
+                <a:solidFill>
+                  <a:srgbClr val="C9D3CC"/>
+                </a:solidFill>
+                <a:effectLst/>
+                <a:uFillTx/>
+                <a:latin typeface="Cantarell"/>
+                <a:ea typeface="Consolas"/>
+              </a:rPr>
+              <a:t>numbers = [4, 8, 15]</a:t>
+            </a:r>
+            <a:endParaRPr lang="en-US" sz="1300" b="0" u="none" strike="noStrike">
+              <a:solidFill>
+                <a:srgbClr val="000000"/>
+              </a:solidFill>
+              <a:effectLst/>
+              <a:uFillTx/>
+              <a:latin typeface="Arial"/>
+            </a:endParaRPr>
+          </a:p>
+          <a:p>
+            <a:pPr defTabSz="914400">
+              <a:lnSpc>
+                <a:spcPct val="140000"/>
+              </a:lnSpc>
+              <a:tabLst>
+                <a:tab pos="0" algn="l"/>
+              </a:tabLst>
+            </a:pPr>
+            <a:r>
+              <a:rPr lang="en-US" sz="1300" b="0" u="none" strike="noStrike">
+                <a:solidFill>
+                  <a:srgbClr val="C9D3CC"/>
+                </a:solidFill>
+                <a:effectLst/>
+                <a:uFillTx/>
+                <a:latin typeface="Cantarell"/>
+                <a:ea typeface="Consolas"/>
+              </a:rPr>
+              <a:t>result = []</a:t>
+            </a:r>
+            <a:endParaRPr lang="en-US" sz="1300" b="0" u="none" strike="noStrike">
+              <a:solidFill>
+                <a:srgbClr val="000000"/>
+              </a:solidFill>
+              <a:effectLst/>
+              <a:uFillTx/>
+              <a:latin typeface="Arial"/>
+            </a:endParaRPr>
+          </a:p>
+          <a:p>
+            <a:pPr defTabSz="914400">
+              <a:lnSpc>
+                <a:spcPct val="140000"/>
+              </a:lnSpc>
+              <a:tabLst>
+                <a:tab pos="0" algn="l"/>
+              </a:tabLst>
+            </a:pPr>
+            <a:r>
+              <a:rPr lang="en-US" sz="1300" b="0" u="none" strike="noStrike">
+                <a:solidFill>
+                  <a:srgbClr val="C9D3CC"/>
+                </a:solidFill>
+                <a:effectLst/>
+                <a:uFillTx/>
+                <a:latin typeface="Cantarell"/>
+                <a:ea typeface="Consolas"/>
+              </a:rPr>
+              <a:t>for n in numbers:</a:t>
+            </a:r>
+            <a:endParaRPr lang="en-US" sz="1300" b="0" u="none" strike="noStrike">
+              <a:solidFill>
+                <a:srgbClr val="000000"/>
+              </a:solidFill>
+              <a:effectLst/>
+              <a:uFillTx/>
+              <a:latin typeface="Arial"/>
+            </a:endParaRPr>
+          </a:p>
+          <a:p>
+            <a:pPr defTabSz="914400">
+              <a:lnSpc>
+                <a:spcPct val="140000"/>
+              </a:lnSpc>
+              <a:tabLst>
+                <a:tab pos="0" algn="l"/>
+              </a:tabLst>
+            </a:pPr>
+            <a:r>
+              <a:rPr lang="en-US" sz="1300" b="0" u="none" strike="noStrike">
+                <a:solidFill>
+                  <a:srgbClr val="C9D3CC"/>
+                </a:solidFill>
+                <a:effectLst/>
+                <a:uFillTx/>
+                <a:latin typeface="Cantarell"/>
+                <a:ea typeface="Consolas"/>
+              </a:rPr>
+              <a:t>    result.append(n * 2)</a:t>
+            </a:r>
+            <a:endParaRPr lang="en-US" sz="1300" b="0" u="none" strike="noStrike">
+              <a:solidFill>
+                <a:srgbClr val="000000"/>
+              </a:solidFill>
+              <a:effectLst/>
+              <a:uFillTx/>
+              <a:latin typeface="Arial"/>
+            </a:endParaRPr>
+          </a:p>
+          <a:p>
+            <a:pPr defTabSz="914400">
+              <a:lnSpc>
+                <a:spcPct val="140000"/>
+              </a:lnSpc>
+              <a:tabLst>
+                <a:tab pos="0" algn="l"/>
+              </a:tabLst>
+            </a:pPr>
+            <a:r>
+              <a:rPr lang="en-US" sz="1300" b="0" u="none" strike="noStrike">
+                <a:solidFill>
+                  <a:srgbClr val="C9D3CC"/>
+                </a:solidFill>
+                <a:effectLst/>
+                <a:uFillTx/>
+                <a:latin typeface="Cantarell"/>
+                <a:ea typeface="Consolas"/>
+              </a:rPr>
+              <a:t>print(result)</a:t>
+            </a:r>
+            <a:endParaRPr lang="en-US" sz="1300" b="0" u="none" strike="noStrike">
+              <a:solidFill>
+                <a:srgbClr val="000000"/>
+              </a:solidFill>
+              <a:effectLst/>
+              <a:uFillTx/>
+              <a:latin typeface="Arial"/>
+            </a:endParaRPr>
+          </a:p>
+          <a:p>
+            <a:pPr defTabSz="914400">
+              <a:lnSpc>
+                <a:spcPct val="140000"/>
+              </a:lnSpc>
+              <a:tabLst>
+                <a:tab pos="0" algn="l"/>
+              </a:tabLst>
+            </a:pPr>
+            <a:endParaRPr lang="en-US" sz="1300" b="0" u="none" strike="noStrike">
               <a:solidFill>
                 <a:srgbClr val="000000"/>
               </a:solidFill>
@@ -24113,14 +24337,14 @@
       </p:grpSpPr>
       <p:sp>
         <p:nvSpPr>
-          <p:cNvPr id="332" name="Shape 0"/>
+          <p:cNvPr id="333" name="Shape 0"/>
           <p:cNvSpPr/>
           <p:nvPr/>
         </p:nvSpPr>
         <p:spPr>
           <a:xfrm>
             <a:off x="-1828800" y="5120640"/>
-            <a:ext cx="3656880" cy="3656880"/>
+            <a:ext cx="3656160" cy="3656160"/>
           </a:xfrm>
           <a:prstGeom prst="ellipse">
             <a:avLst/>
@@ -24156,14 +24380,14 @@
       </p:sp>
       <p:sp>
         <p:nvSpPr>
-          <p:cNvPr id="333" name="Shape 1"/>
+          <p:cNvPr id="334" name="Shape 1"/>
           <p:cNvSpPr/>
           <p:nvPr/>
         </p:nvSpPr>
         <p:spPr>
           <a:xfrm>
             <a:off x="457200" y="457200"/>
-            <a:ext cx="639360" cy="639360"/>
+            <a:ext cx="638640" cy="638640"/>
           </a:xfrm>
           <a:prstGeom prst="ellipse">
             <a:avLst/>
@@ -24199,7 +24423,7 @@
       </p:sp>
       <p:pic>
         <p:nvPicPr>
-          <p:cNvPr id="334" name="Image 0" descr="icons/search.png"/>
+          <p:cNvPr id="335" name="Image 0" descr="icons/search.png"/>
           <p:cNvPicPr/>
           <p:nvPr/>
         </p:nvPicPr>
@@ -24210,7 +24434,7 @@
         <p:spPr>
           <a:xfrm>
             <a:off x="553320" y="553320"/>
-            <a:ext cx="447480" cy="447480"/>
+            <a:ext cx="446760" cy="446760"/>
           </a:xfrm>
           <a:prstGeom prst="rect">
             <a:avLst/>
@@ -24223,14 +24447,14 @@
       </p:pic>
       <p:sp>
         <p:nvSpPr>
-          <p:cNvPr id="335" name="Text 2"/>
+          <p:cNvPr id="336" name="Text 2"/>
           <p:cNvSpPr/>
           <p:nvPr/>
         </p:nvSpPr>
         <p:spPr>
           <a:xfrm>
             <a:off x="1280160" y="457200"/>
-            <a:ext cx="10423440" cy="639360"/>
+            <a:ext cx="10422720" cy="638640"/>
           </a:xfrm>
           <a:prstGeom prst="rect">
             <a:avLst/>
@@ -24284,14 +24508,14 @@
       </p:sp>
       <p:sp>
         <p:nvSpPr>
-          <p:cNvPr id="336" name="Text 3"/>
+          <p:cNvPr id="337" name="Text 3"/>
           <p:cNvSpPr/>
           <p:nvPr/>
         </p:nvSpPr>
         <p:spPr>
           <a:xfrm>
             <a:off x="548640" y="1828800"/>
-            <a:ext cx="4754160" cy="4022640"/>
+            <a:ext cx="4753440" cy="4021920"/>
           </a:xfrm>
           <a:prstGeom prst="rect">
             <a:avLst/>
@@ -24385,14 +24609,14 @@
       </p:sp>
       <p:sp>
         <p:nvSpPr>
-          <p:cNvPr id="337" name="Shape 4"/>
+          <p:cNvPr id="338" name="Shape 4"/>
           <p:cNvSpPr/>
           <p:nvPr/>
         </p:nvSpPr>
         <p:spPr>
           <a:xfrm>
             <a:off x="5486400" y="1691640"/>
-            <a:ext cx="6217200" cy="4342680"/>
+            <a:ext cx="6216480" cy="4341960"/>
           </a:xfrm>
           <a:prstGeom prst="roundRect">
             <a:avLst>
@@ -24430,14 +24654,14 @@
       </p:sp>
       <p:sp>
         <p:nvSpPr>
-          <p:cNvPr id="338" name="Text 5"/>
+          <p:cNvPr id="339" name="Text 5"/>
           <p:cNvSpPr/>
           <p:nvPr/>
         </p:nvSpPr>
         <p:spPr>
           <a:xfrm>
             <a:off x="5806440" y="1965960"/>
-            <a:ext cx="5577120" cy="3794040"/>
+            <a:ext cx="5576400" cy="3793320"/>
           </a:xfrm>
           <a:prstGeom prst="rect">
             <a:avLst/>
@@ -24671,14 +24895,14 @@
       </p:sp>
       <p:sp>
         <p:nvSpPr>
-          <p:cNvPr id="339" name="Text 6"/>
+          <p:cNvPr id="340" name="Text 6"/>
           <p:cNvSpPr/>
           <p:nvPr/>
         </p:nvSpPr>
         <p:spPr>
           <a:xfrm>
             <a:off x="457200" y="6446520"/>
-            <a:ext cx="6400080" cy="273600"/>
+            <a:ext cx="6399360" cy="272880"/>
           </a:xfrm>
           <a:prstGeom prst="rect">
             <a:avLst/>
@@ -24732,14 +24956,14 @@
       </p:sp>
       <p:sp>
         <p:nvSpPr>
-          <p:cNvPr id="340" name="Text 7"/>
+          <p:cNvPr id="341" name="Text 7"/>
           <p:cNvSpPr/>
           <p:nvPr/>
         </p:nvSpPr>
         <p:spPr>
           <a:xfrm>
             <a:off x="11521440" y="6446520"/>
-            <a:ext cx="456480" cy="273600"/>
+            <a:ext cx="455760" cy="272880"/>
           </a:xfrm>
           <a:prstGeom prst="rect">
             <a:avLst/>
@@ -24830,14 +25054,14 @@
       </p:grpSpPr>
       <p:sp>
         <p:nvSpPr>
-          <p:cNvPr id="341" name="Shape 0"/>
+          <p:cNvPr id="342" name="Shape 0"/>
           <p:cNvSpPr/>
           <p:nvPr/>
         </p:nvSpPr>
         <p:spPr>
           <a:xfrm>
             <a:off x="-1828800" y="5120640"/>
-            <a:ext cx="3656880" cy="3656880"/>
+            <a:ext cx="3656160" cy="3656160"/>
           </a:xfrm>
           <a:prstGeom prst="ellipse">
             <a:avLst/>
@@ -24873,14 +25097,14 @@
       </p:sp>
       <p:sp>
         <p:nvSpPr>
-          <p:cNvPr id="342" name="Shape 1"/>
+          <p:cNvPr id="343" name="Shape 1"/>
           <p:cNvSpPr/>
           <p:nvPr/>
         </p:nvSpPr>
         <p:spPr>
           <a:xfrm>
             <a:off x="457200" y="457200"/>
-            <a:ext cx="639360" cy="639360"/>
+            <a:ext cx="638640" cy="638640"/>
           </a:xfrm>
           <a:prstGeom prst="ellipse">
             <a:avLst/>
@@ -24916,7 +25140,7 @@
       </p:sp>
       <p:pic>
         <p:nvPicPr>
-          <p:cNvPr id="343" name="Image 0" descr="icons/boxopen.png"/>
+          <p:cNvPr id="344" name="Image 0" descr="icons/boxopen.png"/>
           <p:cNvPicPr/>
           <p:nvPr/>
         </p:nvPicPr>
@@ -24927,7 +25151,7 @@
         <p:spPr>
           <a:xfrm>
             <a:off x="553320" y="553320"/>
-            <a:ext cx="447480" cy="447480"/>
+            <a:ext cx="446760" cy="446760"/>
           </a:xfrm>
           <a:prstGeom prst="rect">
             <a:avLst/>
@@ -24940,14 +25164,14 @@
       </p:pic>
       <p:sp>
         <p:nvSpPr>
-          <p:cNvPr id="344" name="Text 2"/>
+          <p:cNvPr id="345" name="Text 2"/>
           <p:cNvSpPr/>
           <p:nvPr/>
         </p:nvSpPr>
         <p:spPr>
           <a:xfrm>
             <a:off x="1280160" y="457200"/>
-            <a:ext cx="10423440" cy="639360"/>
+            <a:ext cx="10422720" cy="638640"/>
           </a:xfrm>
           <a:prstGeom prst="rect">
             <a:avLst/>
@@ -25001,14 +25225,14 @@
       </p:sp>
       <p:sp>
         <p:nvSpPr>
-          <p:cNvPr id="345" name="Text 3"/>
+          <p:cNvPr id="346" name="Text 3"/>
           <p:cNvSpPr/>
           <p:nvPr/>
         </p:nvSpPr>
         <p:spPr>
           <a:xfrm>
             <a:off x="548640" y="1828800"/>
-            <a:ext cx="4754160" cy="4022640"/>
+            <a:ext cx="4753440" cy="4021920"/>
           </a:xfrm>
           <a:prstGeom prst="rect">
             <a:avLst/>
@@ -25137,14 +25361,14 @@
       </p:sp>
       <p:sp>
         <p:nvSpPr>
-          <p:cNvPr id="346" name="Shape 4"/>
+          <p:cNvPr id="347" name="Shape 4"/>
           <p:cNvSpPr/>
           <p:nvPr/>
         </p:nvSpPr>
         <p:spPr>
           <a:xfrm>
             <a:off x="5486400" y="1691640"/>
-            <a:ext cx="6217200" cy="4342680"/>
+            <a:ext cx="6216480" cy="4341960"/>
           </a:xfrm>
           <a:prstGeom prst="roundRect">
             <a:avLst>
@@ -25182,14 +25406,14 @@
       </p:sp>
       <p:sp>
         <p:nvSpPr>
-          <p:cNvPr id="347" name="Text 5"/>
+          <p:cNvPr id="348" name="Text 5"/>
           <p:cNvSpPr/>
           <p:nvPr/>
         </p:nvSpPr>
         <p:spPr>
           <a:xfrm>
             <a:off x="5806440" y="1965960"/>
-            <a:ext cx="5577120" cy="3794040"/>
+            <a:ext cx="5576400" cy="3793320"/>
           </a:xfrm>
           <a:prstGeom prst="rect">
             <a:avLst/>
@@ -25453,14 +25677,14 @@
       </p:sp>
       <p:sp>
         <p:nvSpPr>
-          <p:cNvPr id="348" name="Text 6"/>
+          <p:cNvPr id="349" name="Text 6"/>
           <p:cNvSpPr/>
           <p:nvPr/>
         </p:nvSpPr>
         <p:spPr>
           <a:xfrm>
             <a:off x="457200" y="6446520"/>
-            <a:ext cx="6400080" cy="273600"/>
+            <a:ext cx="6399360" cy="272880"/>
           </a:xfrm>
           <a:prstGeom prst="rect">
             <a:avLst/>
@@ -25514,14 +25738,14 @@
       </p:sp>
       <p:sp>
         <p:nvSpPr>
-          <p:cNvPr id="349" name="Text 7"/>
+          <p:cNvPr id="350" name="Text 7"/>
           <p:cNvSpPr/>
           <p:nvPr/>
         </p:nvSpPr>
         <p:spPr>
           <a:xfrm>
             <a:off x="11521440" y="6446520"/>
-            <a:ext cx="456480" cy="273600"/>
+            <a:ext cx="455760" cy="272880"/>
           </a:xfrm>
           <a:prstGeom prst="rect">
             <a:avLst/>
@@ -25619,7 +25843,7 @@
         <p:spPr>
           <a:xfrm>
             <a:off x="-1828800" y="4114800"/>
-            <a:ext cx="5485680" cy="5485680"/>
+            <a:ext cx="5484960" cy="5484960"/>
           </a:xfrm>
           <a:prstGeom prst="ellipse">
             <a:avLst/>
@@ -25662,7 +25886,7 @@
         <p:spPr>
           <a:xfrm>
             <a:off x="9601200" y="-2286000"/>
-            <a:ext cx="5485680" cy="5485680"/>
+            <a:ext cx="5484960" cy="5484960"/>
           </a:xfrm>
           <a:prstGeom prst="ellipse">
             <a:avLst/>
@@ -25705,7 +25929,7 @@
         <p:spPr>
           <a:xfrm>
             <a:off x="5591520" y="731520"/>
-            <a:ext cx="1005120" cy="1005120"/>
+            <a:ext cx="1004400" cy="1004400"/>
           </a:xfrm>
           <a:prstGeom prst="ellipse">
             <a:avLst/>
@@ -25752,7 +25976,7 @@
         <p:spPr>
           <a:xfrm>
             <a:off x="5742360" y="882360"/>
-            <a:ext cx="703440" cy="703440"/>
+            <a:ext cx="702720" cy="702720"/>
           </a:xfrm>
           <a:prstGeom prst="rect">
             <a:avLst/>
@@ -25772,7 +25996,7 @@
         <p:spPr>
           <a:xfrm>
             <a:off x="914400" y="1965960"/>
-            <a:ext cx="10359360" cy="365040"/>
+            <a:ext cx="10358640" cy="364320"/>
           </a:xfrm>
           <a:prstGeom prst="rect">
             <a:avLst/>
@@ -25833,7 +26057,7 @@
         <p:spPr>
           <a:xfrm>
             <a:off x="914400" y="2377440"/>
-            <a:ext cx="10359360" cy="2010960"/>
+            <a:ext cx="10358640" cy="2010240"/>
           </a:xfrm>
           <a:prstGeom prst="rect">
             <a:avLst/>
@@ -25894,7 +26118,7 @@
         <p:spPr>
           <a:xfrm>
             <a:off x="1463040" y="4572000"/>
-            <a:ext cx="9262080" cy="1096560"/>
+            <a:ext cx="9261360" cy="1095840"/>
           </a:xfrm>
           <a:prstGeom prst="rect">
             <a:avLst/>
@@ -25955,7 +26179,7 @@
         <p:spPr>
           <a:xfrm>
             <a:off x="11521440" y="6446520"/>
-            <a:ext cx="456480" cy="273600"/>
+            <a:ext cx="455760" cy="272880"/>
           </a:xfrm>
           <a:prstGeom prst="rect">
             <a:avLst/>
@@ -26046,14 +26270,14 @@
       </p:grpSpPr>
       <p:sp>
         <p:nvSpPr>
-          <p:cNvPr id="350" name="Shape 0"/>
+          <p:cNvPr id="351" name="Shape 0"/>
           <p:cNvSpPr/>
           <p:nvPr/>
         </p:nvSpPr>
         <p:spPr>
           <a:xfrm>
             <a:off x="-1828800" y="5120640"/>
-            <a:ext cx="3656880" cy="3656880"/>
+            <a:ext cx="3656160" cy="3656160"/>
           </a:xfrm>
           <a:prstGeom prst="ellipse">
             <a:avLst/>
@@ -26089,14 +26313,14 @@
       </p:sp>
       <p:sp>
         <p:nvSpPr>
-          <p:cNvPr id="351" name="Shape 1"/>
+          <p:cNvPr id="352" name="Shape 1"/>
           <p:cNvSpPr/>
           <p:nvPr/>
         </p:nvSpPr>
         <p:spPr>
           <a:xfrm>
             <a:off x="457200" y="457200"/>
-            <a:ext cx="639360" cy="639360"/>
+            <a:ext cx="638640" cy="638640"/>
           </a:xfrm>
           <a:prstGeom prst="ellipse">
             <a:avLst/>
@@ -26132,7 +26356,7 @@
       </p:sp>
       <p:pic>
         <p:nvPicPr>
-          <p:cNvPr id="352" name="Image 0" descr="icons/warning.png"/>
+          <p:cNvPr id="353" name="Image 0" descr="icons/warning.png"/>
           <p:cNvPicPr/>
           <p:nvPr/>
         </p:nvPicPr>
@@ -26143,7 +26367,7 @@
         <p:spPr>
           <a:xfrm>
             <a:off x="553320" y="553320"/>
-            <a:ext cx="447480" cy="447480"/>
+            <a:ext cx="446760" cy="446760"/>
           </a:xfrm>
           <a:prstGeom prst="rect">
             <a:avLst/>
@@ -26156,14 +26380,14 @@
       </p:pic>
       <p:sp>
         <p:nvSpPr>
-          <p:cNvPr id="353" name="Text 2"/>
+          <p:cNvPr id="354" name="Text 2"/>
           <p:cNvSpPr/>
           <p:nvPr/>
         </p:nvSpPr>
         <p:spPr>
           <a:xfrm>
             <a:off x="1280160" y="457200"/>
-            <a:ext cx="10423440" cy="639360"/>
+            <a:ext cx="10422720" cy="638640"/>
           </a:xfrm>
           <a:prstGeom prst="rect">
             <a:avLst/>
@@ -26217,14 +26441,14 @@
       </p:sp>
       <p:sp>
         <p:nvSpPr>
-          <p:cNvPr id="354" name="Text 3"/>
+          <p:cNvPr id="355" name="Text 3"/>
           <p:cNvSpPr/>
           <p:nvPr/>
         </p:nvSpPr>
         <p:spPr>
           <a:xfrm>
             <a:off x="548640" y="1828800"/>
-            <a:ext cx="4754160" cy="4022640"/>
+            <a:ext cx="4753440" cy="4021920"/>
           </a:xfrm>
           <a:prstGeom prst="rect">
             <a:avLst/>
@@ -26353,14 +26577,14 @@
       </p:sp>
       <p:sp>
         <p:nvSpPr>
-          <p:cNvPr id="355" name="Shape 4"/>
+          <p:cNvPr id="356" name="Shape 4"/>
           <p:cNvSpPr/>
           <p:nvPr/>
         </p:nvSpPr>
         <p:spPr>
           <a:xfrm>
             <a:off x="5486400" y="1691640"/>
-            <a:ext cx="6217200" cy="4342680"/>
+            <a:ext cx="6216480" cy="4341960"/>
           </a:xfrm>
           <a:prstGeom prst="roundRect">
             <a:avLst>
@@ -26398,14 +26622,14 @@
       </p:sp>
       <p:sp>
         <p:nvSpPr>
-          <p:cNvPr id="356" name="Text 5"/>
+          <p:cNvPr id="357" name="Text 5"/>
           <p:cNvSpPr/>
           <p:nvPr/>
         </p:nvSpPr>
         <p:spPr>
           <a:xfrm>
             <a:off x="5806440" y="1965960"/>
-            <a:ext cx="5577120" cy="3794040"/>
+            <a:ext cx="5576400" cy="3793320"/>
           </a:xfrm>
           <a:prstGeom prst="rect">
             <a:avLst/>
@@ -26807,14 +27031,14 @@
       </p:sp>
       <p:sp>
         <p:nvSpPr>
-          <p:cNvPr id="357" name="Text 6"/>
+          <p:cNvPr id="358" name="Text 6"/>
           <p:cNvSpPr/>
           <p:nvPr/>
         </p:nvSpPr>
         <p:spPr>
           <a:xfrm>
             <a:off x="457200" y="6446520"/>
-            <a:ext cx="6400080" cy="273600"/>
+            <a:ext cx="6399360" cy="272880"/>
           </a:xfrm>
           <a:prstGeom prst="rect">
             <a:avLst/>
@@ -26868,14 +27092,14 @@
       </p:sp>
       <p:sp>
         <p:nvSpPr>
-          <p:cNvPr id="358" name="Text 7"/>
+          <p:cNvPr id="359" name="Text 7"/>
           <p:cNvSpPr/>
           <p:nvPr/>
         </p:nvSpPr>
         <p:spPr>
           <a:xfrm>
             <a:off x="11521440" y="6446520"/>
-            <a:ext cx="456480" cy="273600"/>
+            <a:ext cx="455760" cy="272880"/>
           </a:xfrm>
           <a:prstGeom prst="rect">
             <a:avLst/>
@@ -26966,14 +27190,14 @@
       </p:grpSpPr>
       <p:sp>
         <p:nvSpPr>
-          <p:cNvPr id="359" name="Shape 0"/>
+          <p:cNvPr id="360" name="Shape 0"/>
           <p:cNvSpPr/>
           <p:nvPr/>
         </p:nvSpPr>
         <p:spPr>
           <a:xfrm>
             <a:off x="457200" y="457200"/>
-            <a:ext cx="639360" cy="639360"/>
+            <a:ext cx="638640" cy="638640"/>
           </a:xfrm>
           <a:prstGeom prst="ellipse">
             <a:avLst/>
@@ -27009,7 +27233,7 @@
       </p:sp>
       <p:pic>
         <p:nvPicPr>
-          <p:cNvPr id="360" name="Image 0" descr="icons/bolt.png"/>
+          <p:cNvPr id="361" name="Image 0" descr="icons/bolt.png"/>
           <p:cNvPicPr/>
           <p:nvPr/>
         </p:nvPicPr>
@@ -27020,7 +27244,7 @@
         <p:spPr>
           <a:xfrm>
             <a:off x="553320" y="553320"/>
-            <a:ext cx="447480" cy="447480"/>
+            <a:ext cx="446760" cy="446760"/>
           </a:xfrm>
           <a:prstGeom prst="rect">
             <a:avLst/>
@@ -27033,14 +27257,14 @@
       </p:pic>
       <p:sp>
         <p:nvSpPr>
-          <p:cNvPr id="361" name="Text 1"/>
+          <p:cNvPr id="362" name="Text 1"/>
           <p:cNvSpPr/>
           <p:nvPr/>
         </p:nvSpPr>
         <p:spPr>
           <a:xfrm>
             <a:off x="1280160" y="457200"/>
-            <a:ext cx="10423440" cy="639360"/>
+            <a:ext cx="10422720" cy="638640"/>
           </a:xfrm>
           <a:prstGeom prst="rect">
             <a:avLst/>
@@ -27094,14 +27318,14 @@
       </p:sp>
       <p:sp>
         <p:nvSpPr>
-          <p:cNvPr id="362" name="Shape 2"/>
+          <p:cNvPr id="363" name="Shape 2"/>
           <p:cNvSpPr/>
           <p:nvPr/>
         </p:nvSpPr>
         <p:spPr>
           <a:xfrm>
             <a:off x="457200" y="1508760"/>
-            <a:ext cx="5522400" cy="4891320"/>
+            <a:ext cx="5521680" cy="4890600"/>
           </a:xfrm>
           <a:prstGeom prst="roundRect">
             <a:avLst>
@@ -27146,14 +27370,14 @@
       </p:sp>
       <p:sp>
         <p:nvSpPr>
-          <p:cNvPr id="363" name="Shape 3"/>
+          <p:cNvPr id="364" name="Shape 3"/>
           <p:cNvSpPr/>
           <p:nvPr/>
         </p:nvSpPr>
         <p:spPr>
           <a:xfrm>
             <a:off x="2944440" y="2095920"/>
-            <a:ext cx="547920" cy="547920"/>
+            <a:ext cx="547200" cy="547200"/>
           </a:xfrm>
           <a:prstGeom prst="ellipse">
             <a:avLst/>
@@ -27189,7 +27413,7 @@
       </p:sp>
       <p:pic>
         <p:nvPicPr>
-          <p:cNvPr id="364" name="Image 1" descr="icons/sync.png"/>
+          <p:cNvPr id="365" name="Image 1" descr="icons/sync.png"/>
           <p:cNvPicPr/>
           <p:nvPr/>
         </p:nvPicPr>
@@ -27200,7 +27424,7 @@
         <p:spPr>
           <a:xfrm>
             <a:off x="3026520" y="2178000"/>
-            <a:ext cx="383400" cy="383400"/>
+            <a:ext cx="382680" cy="382680"/>
           </a:xfrm>
           <a:prstGeom prst="rect">
             <a:avLst/>
@@ -27213,14 +27437,14 @@
       </p:pic>
       <p:sp>
         <p:nvSpPr>
-          <p:cNvPr id="365" name="Text 4"/>
+          <p:cNvPr id="366" name="Text 4"/>
           <p:cNvSpPr/>
           <p:nvPr/>
         </p:nvSpPr>
         <p:spPr>
           <a:xfrm>
             <a:off x="548640" y="2717640"/>
-            <a:ext cx="5339520" cy="365040"/>
+            <a:ext cx="5338800" cy="364320"/>
           </a:xfrm>
           <a:prstGeom prst="rect">
             <a:avLst/>
@@ -27274,14 +27498,14 @@
       </p:sp>
       <p:sp>
         <p:nvSpPr>
-          <p:cNvPr id="366" name="Text 5"/>
+          <p:cNvPr id="367" name="Text 5"/>
           <p:cNvSpPr/>
           <p:nvPr/>
         </p:nvSpPr>
         <p:spPr>
           <a:xfrm>
             <a:off x="603360" y="3101760"/>
-            <a:ext cx="5229720" cy="3252600"/>
+            <a:ext cx="5229000" cy="3251880"/>
           </a:xfrm>
           <a:prstGeom prst="rect">
             <a:avLst/>
@@ -27335,14 +27559,14 @@
       </p:sp>
       <p:sp>
         <p:nvSpPr>
-          <p:cNvPr id="367" name="Shape 6"/>
+          <p:cNvPr id="368" name="Shape 6"/>
           <p:cNvSpPr/>
           <p:nvPr/>
         </p:nvSpPr>
         <p:spPr>
           <a:xfrm>
             <a:off x="6208920" y="1508760"/>
-            <a:ext cx="5522400" cy="4891320"/>
+            <a:ext cx="5521680" cy="4890600"/>
           </a:xfrm>
           <a:prstGeom prst="roundRect">
             <a:avLst>
@@ -27387,14 +27611,14 @@
       </p:sp>
       <p:sp>
         <p:nvSpPr>
-          <p:cNvPr id="368" name="Shape 7"/>
+          <p:cNvPr id="369" name="Shape 7"/>
           <p:cNvSpPr/>
           <p:nvPr/>
         </p:nvSpPr>
         <p:spPr>
           <a:xfrm>
             <a:off x="8695800" y="2095920"/>
-            <a:ext cx="547920" cy="547920"/>
+            <a:ext cx="547200" cy="547200"/>
           </a:xfrm>
           <a:prstGeom prst="ellipse">
             <a:avLst/>
@@ -27430,7 +27654,7 @@
       </p:sp>
       <p:pic>
         <p:nvPicPr>
-          <p:cNvPr id="369" name="Image 2" descr="icons/layergroup.png"/>
+          <p:cNvPr id="370" name="Image 2" descr="icons/layergroup.png"/>
           <p:cNvPicPr/>
           <p:nvPr/>
         </p:nvPicPr>
@@ -27441,7 +27665,7 @@
         <p:spPr>
           <a:xfrm>
             <a:off x="8778240" y="2178000"/>
-            <a:ext cx="383400" cy="383400"/>
+            <a:ext cx="382680" cy="382680"/>
           </a:xfrm>
           <a:prstGeom prst="rect">
             <a:avLst/>
@@ -27454,14 +27678,14 @@
       </p:pic>
       <p:sp>
         <p:nvSpPr>
-          <p:cNvPr id="370" name="Text 8"/>
+          <p:cNvPr id="371" name="Text 8"/>
           <p:cNvSpPr/>
           <p:nvPr/>
         </p:nvSpPr>
         <p:spPr>
           <a:xfrm>
             <a:off x="6300360" y="2717640"/>
-            <a:ext cx="5339520" cy="365040"/>
+            <a:ext cx="5338800" cy="364320"/>
           </a:xfrm>
           <a:prstGeom prst="rect">
             <a:avLst/>
@@ -27515,14 +27739,14 @@
       </p:sp>
       <p:sp>
         <p:nvSpPr>
-          <p:cNvPr id="371" name="Text 9"/>
+          <p:cNvPr id="372" name="Text 9"/>
           <p:cNvSpPr/>
           <p:nvPr/>
         </p:nvSpPr>
         <p:spPr>
           <a:xfrm>
             <a:off x="6355080" y="3101760"/>
-            <a:ext cx="5229720" cy="3252600"/>
+            <a:ext cx="5229000" cy="3251880"/>
           </a:xfrm>
           <a:prstGeom prst="rect">
             <a:avLst/>
@@ -27576,14 +27800,14 @@
       </p:sp>
       <p:sp>
         <p:nvSpPr>
-          <p:cNvPr id="372" name="Text 10"/>
+          <p:cNvPr id="373" name="Text 10"/>
           <p:cNvSpPr/>
           <p:nvPr/>
         </p:nvSpPr>
         <p:spPr>
           <a:xfrm>
             <a:off x="457200" y="6446520"/>
-            <a:ext cx="6400080" cy="273600"/>
+            <a:ext cx="6399360" cy="272880"/>
           </a:xfrm>
           <a:prstGeom prst="rect">
             <a:avLst/>
@@ -27637,14 +27861,14 @@
       </p:sp>
       <p:sp>
         <p:nvSpPr>
-          <p:cNvPr id="373" name="Text 11"/>
+          <p:cNvPr id="374" name="Text 11"/>
           <p:cNvSpPr/>
           <p:nvPr/>
         </p:nvSpPr>
         <p:spPr>
           <a:xfrm>
             <a:off x="11521440" y="6446520"/>
-            <a:ext cx="456480" cy="273600"/>
+            <a:ext cx="455760" cy="272880"/>
           </a:xfrm>
           <a:prstGeom prst="rect">
             <a:avLst/>
@@ -27735,14 +27959,14 @@
       </p:grpSpPr>
       <p:sp>
         <p:nvSpPr>
-          <p:cNvPr id="374" name="Shape 0"/>
+          <p:cNvPr id="375" name="Shape 0"/>
           <p:cNvSpPr/>
           <p:nvPr/>
         </p:nvSpPr>
         <p:spPr>
           <a:xfrm>
             <a:off x="-1828800" y="5029200"/>
-            <a:ext cx="3656880" cy="3656880"/>
+            <a:ext cx="3656160" cy="3656160"/>
           </a:xfrm>
           <a:prstGeom prst="ellipse">
             <a:avLst/>
@@ -27778,14 +28002,14 @@
       </p:sp>
       <p:sp>
         <p:nvSpPr>
-          <p:cNvPr id="375" name="Shape 1"/>
+          <p:cNvPr id="376" name="Shape 1"/>
           <p:cNvSpPr/>
           <p:nvPr/>
         </p:nvSpPr>
         <p:spPr>
           <a:xfrm>
             <a:off x="457200" y="457200"/>
-            <a:ext cx="639360" cy="639360"/>
+            <a:ext cx="638640" cy="638640"/>
           </a:xfrm>
           <a:prstGeom prst="ellipse">
             <a:avLst/>
@@ -27821,7 +28045,7 @@
       </p:sp>
       <p:pic>
         <p:nvPicPr>
-          <p:cNvPr id="376" name="Image 0" descr="icons/chart.png"/>
+          <p:cNvPr id="377" name="Image 0" descr="icons/chart.png"/>
           <p:cNvPicPr/>
           <p:nvPr/>
         </p:nvPicPr>
@@ -27832,7 +28056,7 @@
         <p:spPr>
           <a:xfrm>
             <a:off x="553320" y="553320"/>
-            <a:ext cx="447480" cy="447480"/>
+            <a:ext cx="446760" cy="446760"/>
           </a:xfrm>
           <a:prstGeom prst="rect">
             <a:avLst/>
@@ -27845,14 +28069,14 @@
       </p:pic>
       <p:sp>
         <p:nvSpPr>
-          <p:cNvPr id="377" name="Text 2"/>
+          <p:cNvPr id="378" name="Text 2"/>
           <p:cNvSpPr/>
           <p:nvPr/>
         </p:nvSpPr>
         <p:spPr>
           <a:xfrm>
             <a:off x="1280160" y="457200"/>
-            <a:ext cx="10423440" cy="639360"/>
+            <a:ext cx="10422720" cy="638640"/>
           </a:xfrm>
           <a:prstGeom prst="rect">
             <a:avLst/>
@@ -27906,14 +28130,14 @@
       </p:sp>
       <p:sp>
         <p:nvSpPr>
-          <p:cNvPr id="378" name="Shape 3"/>
+          <p:cNvPr id="379" name="Shape 3"/>
           <p:cNvSpPr/>
           <p:nvPr/>
         </p:nvSpPr>
         <p:spPr>
           <a:xfrm>
             <a:off x="457200" y="1600200"/>
-            <a:ext cx="11273760" cy="4479840"/>
+            <a:ext cx="11273040" cy="4479120"/>
           </a:xfrm>
           <a:prstGeom prst="roundRect">
             <a:avLst>
@@ -27951,14 +28175,14 @@
       </p:sp>
       <p:sp>
         <p:nvSpPr>
-          <p:cNvPr id="379" name="Text 4"/>
+          <p:cNvPr id="380" name="Text 4"/>
           <p:cNvSpPr/>
           <p:nvPr/>
         </p:nvSpPr>
         <p:spPr>
           <a:xfrm>
             <a:off x="822960" y="1828800"/>
-            <a:ext cx="10514880" cy="456480"/>
+            <a:ext cx="10514160" cy="455760"/>
           </a:xfrm>
           <a:prstGeom prst="rect">
             <a:avLst/>
@@ -28012,14 +28236,14 @@
       </p:sp>
       <p:sp>
         <p:nvSpPr>
-          <p:cNvPr id="380" name="Shape 5"/>
+          <p:cNvPr id="381" name="Shape 5"/>
           <p:cNvSpPr/>
           <p:nvPr/>
         </p:nvSpPr>
         <p:spPr>
           <a:xfrm>
             <a:off x="822960" y="2423160"/>
-            <a:ext cx="383400" cy="383400"/>
+            <a:ext cx="382680" cy="382680"/>
           </a:xfrm>
           <a:prstGeom prst="ellipse">
             <a:avLst/>
@@ -28055,14 +28279,14 @@
       </p:sp>
       <p:sp>
         <p:nvSpPr>
-          <p:cNvPr id="381" name="Text 6"/>
+          <p:cNvPr id="382" name="Text 6"/>
           <p:cNvSpPr/>
           <p:nvPr/>
         </p:nvSpPr>
         <p:spPr>
           <a:xfrm>
             <a:off x="822960" y="2423160"/>
-            <a:ext cx="383400" cy="383400"/>
+            <a:ext cx="382680" cy="382680"/>
           </a:xfrm>
           <a:prstGeom prst="rect">
             <a:avLst/>
@@ -28116,14 +28340,14 @@
       </p:sp>
       <p:sp>
         <p:nvSpPr>
-          <p:cNvPr id="382" name="Text 7"/>
+          <p:cNvPr id="383" name="Text 7"/>
           <p:cNvSpPr/>
           <p:nvPr/>
         </p:nvSpPr>
         <p:spPr>
           <a:xfrm>
             <a:off x="1435680" y="2423160"/>
-            <a:ext cx="9582120" cy="383400"/>
+            <a:ext cx="9581400" cy="382680"/>
           </a:xfrm>
           <a:prstGeom prst="rect">
             <a:avLst/>
@@ -28177,14 +28401,14 @@
       </p:sp>
       <p:sp>
         <p:nvSpPr>
-          <p:cNvPr id="383" name="Shape 8"/>
+          <p:cNvPr id="384" name="Shape 8"/>
           <p:cNvSpPr/>
           <p:nvPr/>
         </p:nvSpPr>
         <p:spPr>
           <a:xfrm>
             <a:off x="822960" y="3303360"/>
-            <a:ext cx="383400" cy="383400"/>
+            <a:ext cx="382680" cy="382680"/>
           </a:xfrm>
           <a:prstGeom prst="ellipse">
             <a:avLst/>
@@ -28220,14 +28444,14 @@
       </p:sp>
       <p:sp>
         <p:nvSpPr>
-          <p:cNvPr id="384" name="Text 9"/>
+          <p:cNvPr id="385" name="Text 9"/>
           <p:cNvSpPr/>
           <p:nvPr/>
         </p:nvSpPr>
         <p:spPr>
           <a:xfrm>
             <a:off x="822960" y="3303360"/>
-            <a:ext cx="383400" cy="383400"/>
+            <a:ext cx="382680" cy="382680"/>
           </a:xfrm>
           <a:prstGeom prst="rect">
             <a:avLst/>
@@ -28281,14 +28505,14 @@
       </p:sp>
       <p:sp>
         <p:nvSpPr>
-          <p:cNvPr id="385" name="Text 10"/>
+          <p:cNvPr id="386" name="Text 10"/>
           <p:cNvSpPr/>
           <p:nvPr/>
         </p:nvSpPr>
         <p:spPr>
           <a:xfrm>
             <a:off x="1435680" y="3303360"/>
-            <a:ext cx="9582120" cy="383400"/>
+            <a:ext cx="9581400" cy="382680"/>
           </a:xfrm>
           <a:prstGeom prst="rect">
             <a:avLst/>
@@ -28327,187 +28551,7 @@
                 <a:latin typeface="Calibri"/>
                 <a:ea typeface="Calibri"/>
               </a:rPr>
-              <a:t>Use </a:t>
-            </a:r>
-            <a:r>
-              <a:rPr lang="en-US" sz="1300" b="0" u="none" strike="noStrike">
-                <a:solidFill>
-                  <a:srgbClr val="1B2420"/>
-                </a:solidFill>
-                <a:effectLst/>
-                <a:uFillTx/>
-                <a:latin typeface="Calibri"/>
-                <a:ea typeface="Calibri"/>
-              </a:rPr>
-              <a:t>the </a:t>
-            </a:r>
-            <a:r>
-              <a:rPr lang="en-US" sz="1300" b="0" u="none" strike="noStrike">
-                <a:solidFill>
-                  <a:srgbClr val="1B2420"/>
-                </a:solidFill>
-                <a:effectLst/>
-                <a:uFillTx/>
-                <a:latin typeface="Calibri"/>
-                <a:ea typeface="Calibri"/>
-              </a:rPr>
-              <a:t>searc</a:t>
-            </a:r>
-            <a:r>
-              <a:rPr lang="en-US" sz="1300" b="0" u="none" strike="noStrike">
-                <a:solidFill>
-                  <a:srgbClr val="1B2420"/>
-                </a:solidFill>
-                <a:effectLst/>
-                <a:uFillTx/>
-                <a:latin typeface="Calibri"/>
-                <a:ea typeface="Calibri"/>
-              </a:rPr>
-              <a:t>h </a:t>
-            </a:r>
-            <a:r>
-              <a:rPr lang="en-US" sz="1300" b="0" u="none" strike="noStrike">
-                <a:solidFill>
-                  <a:srgbClr val="1B2420"/>
-                </a:solidFill>
-                <a:effectLst/>
-                <a:uFillTx/>
-                <a:latin typeface="Calibri"/>
-                <a:ea typeface="Calibri"/>
-              </a:rPr>
-              <a:t>patte</a:t>
-            </a:r>
-            <a:r>
-              <a:rPr lang="en-US" sz="1300" b="0" u="none" strike="noStrike">
-                <a:solidFill>
-                  <a:srgbClr val="1B2420"/>
-                </a:solidFill>
-                <a:effectLst/>
-                <a:uFillTx/>
-                <a:latin typeface="Calibri"/>
-                <a:ea typeface="Calibri"/>
-              </a:rPr>
-              <a:t>rn to </a:t>
-            </a:r>
-            <a:r>
-              <a:rPr lang="en-US" sz="1300" b="0" u="none" strike="noStrike">
-                <a:solidFill>
-                  <a:srgbClr val="1B2420"/>
-                </a:solidFill>
-                <a:effectLst/>
-                <a:uFillTx/>
-                <a:latin typeface="Calibri"/>
-                <a:ea typeface="Calibri"/>
-              </a:rPr>
-              <a:t>check </a:t>
-            </a:r>
-            <a:r>
-              <a:rPr lang="en-US" sz="1300" b="0" u="none" strike="noStrike">
-                <a:solidFill>
-                  <a:srgbClr val="1B2420"/>
-                </a:solidFill>
-                <a:effectLst/>
-                <a:uFillTx/>
-                <a:latin typeface="Calibri"/>
-                <a:ea typeface="Calibri"/>
-              </a:rPr>
-              <a:t>if a </a:t>
-            </a:r>
-            <a:r>
-              <a:rPr lang="en-US" sz="1300" b="0" u="none" strike="noStrike">
-                <a:solidFill>
-                  <a:srgbClr val="1B2420"/>
-                </a:solidFill>
-                <a:effectLst/>
-                <a:uFillTx/>
-                <a:latin typeface="Calibri"/>
-                <a:ea typeface="Calibri"/>
-              </a:rPr>
-              <a:t>specif</a:t>
-            </a:r>
-            <a:r>
-              <a:rPr lang="en-US" sz="1300" b="0" u="none" strike="noStrike">
-                <a:solidFill>
-                  <a:srgbClr val="1B2420"/>
-                </a:solidFill>
-                <a:effectLst/>
-                <a:uFillTx/>
-                <a:latin typeface="Calibri"/>
-                <a:ea typeface="Calibri"/>
-              </a:rPr>
-              <a:t>ic </a:t>
-            </a:r>
-            <a:r>
-              <a:rPr lang="en-US" sz="1300" b="0" u="none" strike="noStrike">
-                <a:solidFill>
-                  <a:srgbClr val="1B2420"/>
-                </a:solidFill>
-                <a:effectLst/>
-                <a:uFillTx/>
-                <a:latin typeface="Calibri"/>
-                <a:ea typeface="Calibri"/>
-              </a:rPr>
-              <a:t>word </a:t>
-            </a:r>
-            <a:r>
-              <a:rPr lang="en-US" sz="1300" b="0" u="none" strike="noStrike">
-                <a:solidFill>
-                  <a:srgbClr val="1B2420"/>
-                </a:solidFill>
-                <a:effectLst/>
-                <a:uFillTx/>
-                <a:latin typeface="Calibri"/>
-                <a:ea typeface="Calibri"/>
-              </a:rPr>
-              <a:t>exists </a:t>
-            </a:r>
-            <a:r>
-              <a:rPr lang="en-US" sz="1300" b="0" u="none" strike="noStrike">
-                <a:solidFill>
-                  <a:srgbClr val="1B2420"/>
-                </a:solidFill>
-                <a:effectLst/>
-                <a:uFillTx/>
-                <a:latin typeface="Calibri"/>
-                <a:ea typeface="Calibri"/>
-              </a:rPr>
-              <a:t>in a </a:t>
-            </a:r>
-            <a:r>
-              <a:rPr lang="en-US" sz="1300" b="0" u="none" strike="noStrike">
-                <a:solidFill>
-                  <a:srgbClr val="1B2420"/>
-                </a:solidFill>
-                <a:effectLst/>
-                <a:uFillTx/>
-                <a:latin typeface="Calibri"/>
-                <a:ea typeface="Calibri"/>
-              </a:rPr>
-              <a:t>list of </a:t>
-            </a:r>
-            <a:r>
-              <a:rPr lang="en-US" sz="1300" b="0" u="none" strike="noStrike">
-                <a:solidFill>
-                  <a:srgbClr val="1B2420"/>
-                </a:solidFill>
-                <a:effectLst/>
-                <a:uFillTx/>
-                <a:latin typeface="Calibri"/>
-                <a:ea typeface="Calibri"/>
-              </a:rPr>
-              <a:t>word</a:t>
-            </a:r>
-            <a:r>
-              <a:rPr lang="en-US" sz="1300" b="0" u="none" strike="noStrike">
-                <a:solidFill>
-                  <a:srgbClr val="1B2420"/>
-                </a:solidFill>
-                <a:effectLst/>
-                <a:uFillTx/>
-                <a:latin typeface="Calibri"/>
-                <a:ea typeface="Calibri"/>
-              </a:rPr>
-              <a:t>s</a:t>
+              <a:t>Use the search pattern to check if a specific word exists in a list of words</a:t>
             </a:r>
             <a:endParaRPr lang="en-US" sz="1300" b="0" u="none" strike="noStrike">
               <a:solidFill>
@@ -28522,14 +28566,14 @@
       </p:sp>
       <p:sp>
         <p:nvSpPr>
-          <p:cNvPr id="386" name="Shape 11"/>
+          <p:cNvPr id="387" name="Shape 11"/>
           <p:cNvSpPr/>
           <p:nvPr/>
         </p:nvSpPr>
         <p:spPr>
           <a:xfrm>
             <a:off x="822960" y="4183560"/>
-            <a:ext cx="383400" cy="383400"/>
+            <a:ext cx="382680" cy="382680"/>
           </a:xfrm>
           <a:prstGeom prst="ellipse">
             <a:avLst/>
@@ -28565,14 +28609,14 @@
       </p:sp>
       <p:sp>
         <p:nvSpPr>
-          <p:cNvPr id="387" name="Text 12"/>
+          <p:cNvPr id="388" name="Text 12"/>
           <p:cNvSpPr/>
           <p:nvPr/>
         </p:nvSpPr>
         <p:spPr>
           <a:xfrm>
             <a:off x="822960" y="4183560"/>
-            <a:ext cx="383400" cy="383400"/>
+            <a:ext cx="382680" cy="382680"/>
           </a:xfrm>
           <a:prstGeom prst="rect">
             <a:avLst/>
@@ -28626,14 +28670,14 @@
       </p:sp>
       <p:sp>
         <p:nvSpPr>
-          <p:cNvPr id="388" name="Text 13"/>
+          <p:cNvPr id="389" name="Text 13"/>
           <p:cNvSpPr/>
           <p:nvPr/>
         </p:nvSpPr>
         <p:spPr>
           <a:xfrm>
             <a:off x="1435680" y="4183560"/>
-            <a:ext cx="9582120" cy="383400"/>
+            <a:ext cx="9581400" cy="382680"/>
           </a:xfrm>
           <a:prstGeom prst="rect">
             <a:avLst/>
@@ -28687,14 +28731,14 @@
       </p:sp>
       <p:sp>
         <p:nvSpPr>
-          <p:cNvPr id="389" name="Shape 14"/>
+          <p:cNvPr id="390" name="Shape 14"/>
           <p:cNvSpPr/>
           <p:nvPr/>
         </p:nvSpPr>
         <p:spPr>
           <a:xfrm>
             <a:off x="822960" y="5063400"/>
-            <a:ext cx="383400" cy="383400"/>
+            <a:ext cx="382680" cy="382680"/>
           </a:xfrm>
           <a:prstGeom prst="ellipse">
             <a:avLst/>
@@ -28730,14 +28774,14 @@
       </p:sp>
       <p:sp>
         <p:nvSpPr>
-          <p:cNvPr id="390" name="Text 15"/>
+          <p:cNvPr id="391" name="Text 15"/>
           <p:cNvSpPr/>
           <p:nvPr/>
         </p:nvSpPr>
         <p:spPr>
           <a:xfrm>
             <a:off x="822960" y="5063400"/>
-            <a:ext cx="383400" cy="383400"/>
+            <a:ext cx="382680" cy="382680"/>
           </a:xfrm>
           <a:prstGeom prst="rect">
             <a:avLst/>
@@ -28791,14 +28835,14 @@
       </p:sp>
       <p:sp>
         <p:nvSpPr>
-          <p:cNvPr id="391" name="Text 16"/>
+          <p:cNvPr id="392" name="Text 16"/>
           <p:cNvSpPr/>
           <p:nvPr/>
         </p:nvSpPr>
         <p:spPr>
           <a:xfrm>
             <a:off x="1435680" y="5063400"/>
-            <a:ext cx="9582120" cy="383400"/>
+            <a:ext cx="9581400" cy="382680"/>
           </a:xfrm>
           <a:prstGeom prst="rect">
             <a:avLst/>
@@ -28852,14 +28896,14 @@
       </p:sp>
       <p:sp>
         <p:nvSpPr>
-          <p:cNvPr id="392" name="Text 17"/>
+          <p:cNvPr id="393" name="Text 17"/>
           <p:cNvSpPr/>
           <p:nvPr/>
         </p:nvSpPr>
         <p:spPr>
           <a:xfrm>
             <a:off x="457200" y="6446520"/>
-            <a:ext cx="6400080" cy="273600"/>
+            <a:ext cx="6399360" cy="272880"/>
           </a:xfrm>
           <a:prstGeom prst="rect">
             <a:avLst/>
@@ -28913,14 +28957,14 @@
       </p:sp>
       <p:sp>
         <p:nvSpPr>
-          <p:cNvPr id="393" name="Text 18"/>
+          <p:cNvPr id="394" name="Text 18"/>
           <p:cNvSpPr/>
           <p:nvPr/>
         </p:nvSpPr>
         <p:spPr>
           <a:xfrm>
             <a:off x="11521440" y="6446520"/>
-            <a:ext cx="456480" cy="273600"/>
+            <a:ext cx="455760" cy="272880"/>
           </a:xfrm>
           <a:prstGeom prst="rect">
             <a:avLst/>
@@ -29011,14 +29055,14 @@
       </p:grpSpPr>
       <p:sp>
         <p:nvSpPr>
-          <p:cNvPr id="394" name="Shape 0"/>
+          <p:cNvPr id="395" name="Shape 0"/>
           <p:cNvSpPr/>
           <p:nvPr/>
         </p:nvSpPr>
         <p:spPr>
           <a:xfrm>
             <a:off x="-1828800" y="5029200"/>
-            <a:ext cx="3656880" cy="3656880"/>
+            <a:ext cx="3656160" cy="3656160"/>
           </a:xfrm>
           <a:prstGeom prst="ellipse">
             <a:avLst/>
@@ -29054,14 +29098,14 @@
       </p:sp>
       <p:sp>
         <p:nvSpPr>
-          <p:cNvPr id="395" name="Shape 1"/>
+          <p:cNvPr id="396" name="Shape 1"/>
           <p:cNvSpPr/>
           <p:nvPr/>
         </p:nvSpPr>
         <p:spPr>
           <a:xfrm>
             <a:off x="457200" y="457200"/>
-            <a:ext cx="639360" cy="639360"/>
+            <a:ext cx="638640" cy="638640"/>
           </a:xfrm>
           <a:prstGeom prst="ellipse">
             <a:avLst/>
@@ -29097,7 +29141,7 @@
       </p:sp>
       <p:pic>
         <p:nvPicPr>
-          <p:cNvPr id="396" name="Image 0" descr="icons/sync.png"/>
+          <p:cNvPr id="397" name="Image 0" descr="icons/sync.png"/>
           <p:cNvPicPr/>
           <p:nvPr/>
         </p:nvPicPr>
@@ -29108,7 +29152,7 @@
         <p:spPr>
           <a:xfrm>
             <a:off x="553320" y="553320"/>
-            <a:ext cx="447480" cy="447480"/>
+            <a:ext cx="446760" cy="446760"/>
           </a:xfrm>
           <a:prstGeom prst="rect">
             <a:avLst/>
@@ -29121,14 +29165,14 @@
       </p:pic>
       <p:sp>
         <p:nvSpPr>
-          <p:cNvPr id="397" name="Text 2"/>
+          <p:cNvPr id="398" name="Text 2"/>
           <p:cNvSpPr/>
           <p:nvPr/>
         </p:nvSpPr>
         <p:spPr>
           <a:xfrm>
             <a:off x="1280160" y="457200"/>
-            <a:ext cx="10423440" cy="639360"/>
+            <a:ext cx="10422720" cy="638640"/>
           </a:xfrm>
           <a:prstGeom prst="rect">
             <a:avLst/>
@@ -29182,14 +29226,14 @@
       </p:sp>
       <p:sp>
         <p:nvSpPr>
-          <p:cNvPr id="398" name="Shape 3"/>
+          <p:cNvPr id="399" name="Shape 3"/>
           <p:cNvSpPr/>
           <p:nvPr/>
         </p:nvSpPr>
         <p:spPr>
           <a:xfrm>
             <a:off x="457200" y="1600200"/>
-            <a:ext cx="11273760" cy="4479840"/>
+            <a:ext cx="11273040" cy="4479120"/>
           </a:xfrm>
           <a:prstGeom prst="roundRect">
             <a:avLst>
@@ -29227,14 +29271,14 @@
       </p:sp>
       <p:sp>
         <p:nvSpPr>
-          <p:cNvPr id="399" name="Text 4"/>
+          <p:cNvPr id="400" name="Text 4"/>
           <p:cNvSpPr/>
           <p:nvPr/>
         </p:nvSpPr>
         <p:spPr>
           <a:xfrm>
             <a:off x="822960" y="1828800"/>
-            <a:ext cx="10514880" cy="456480"/>
+            <a:ext cx="10514160" cy="455760"/>
           </a:xfrm>
           <a:prstGeom prst="rect">
             <a:avLst/>
@@ -29288,14 +29332,14 @@
       </p:sp>
       <p:sp>
         <p:nvSpPr>
-          <p:cNvPr id="400" name="Shape 5"/>
+          <p:cNvPr id="401" name="Shape 5"/>
           <p:cNvSpPr/>
           <p:nvPr/>
         </p:nvSpPr>
         <p:spPr>
           <a:xfrm>
             <a:off x="822960" y="2423160"/>
-            <a:ext cx="419760" cy="419760"/>
+            <a:ext cx="419040" cy="419040"/>
           </a:xfrm>
           <a:prstGeom prst="ellipse">
             <a:avLst/>
@@ -29331,7 +29375,7 @@
       </p:sp>
       <p:pic>
         <p:nvPicPr>
-          <p:cNvPr id="401" name="Image 1" descr="icons/checkdouble.png"/>
+          <p:cNvPr id="402" name="Image 1" descr="icons/checkdouble.png"/>
           <p:cNvPicPr/>
           <p:nvPr/>
         </p:nvPicPr>
@@ -29342,7 +29386,7 @@
         <p:spPr>
           <a:xfrm>
             <a:off x="885960" y="2486160"/>
-            <a:ext cx="293760" cy="293760"/>
+            <a:ext cx="293040" cy="293040"/>
           </a:xfrm>
           <a:prstGeom prst="rect">
             <a:avLst/>
@@ -29355,14 +29399,14 @@
       </p:pic>
       <p:sp>
         <p:nvSpPr>
-          <p:cNvPr id="402" name="Shape 6"/>
+          <p:cNvPr id="403" name="Shape 6"/>
           <p:cNvSpPr/>
           <p:nvPr/>
         </p:nvSpPr>
         <p:spPr>
           <a:xfrm>
             <a:off x="1417320" y="2441520"/>
-            <a:ext cx="419760" cy="383400"/>
+            <a:ext cx="419040" cy="382680"/>
           </a:xfrm>
           <a:prstGeom prst="roundRect">
             <a:avLst>
@@ -29403,14 +29447,14 @@
       </p:sp>
       <p:sp>
         <p:nvSpPr>
-          <p:cNvPr id="403" name="Text 7"/>
+          <p:cNvPr id="404" name="Text 7"/>
           <p:cNvSpPr/>
           <p:nvPr/>
         </p:nvSpPr>
         <p:spPr>
           <a:xfrm>
             <a:off x="1417320" y="2441520"/>
-            <a:ext cx="419760" cy="383400"/>
+            <a:ext cx="419040" cy="382680"/>
           </a:xfrm>
           <a:prstGeom prst="rect">
             <a:avLst/>
@@ -29464,14 +29508,14 @@
       </p:sp>
       <p:sp>
         <p:nvSpPr>
-          <p:cNvPr id="404" name="Text 8"/>
+          <p:cNvPr id="405" name="Text 8"/>
           <p:cNvSpPr/>
           <p:nvPr/>
         </p:nvSpPr>
         <p:spPr>
           <a:xfrm>
             <a:off x="2011680" y="2423160"/>
-            <a:ext cx="9417600" cy="419760"/>
+            <a:ext cx="9416880" cy="419040"/>
           </a:xfrm>
           <a:prstGeom prst="rect">
             <a:avLst/>
@@ -29510,7 +29554,151 @@
                 <a:latin typeface="Calibri"/>
                 <a:ea typeface="Calibri"/>
               </a:rPr>
-              <a:t>Print every number from 1 to 10 using a for loop and range()</a:t>
+              <a:t>Print </a:t>
+            </a:r>
+            <a:r>
+              <a:rPr lang="en-US" sz="1300" b="0" u="none" strike="noStrike">
+                <a:solidFill>
+                  <a:srgbClr val="1B2420"/>
+                </a:solidFill>
+                <a:effectLst/>
+                <a:uFillTx/>
+                <a:latin typeface="Calibri"/>
+                <a:ea typeface="Calibri"/>
+              </a:rPr>
+              <a:t>every </a:t>
+            </a:r>
+            <a:r>
+              <a:rPr lang="en-US" sz="1300" b="0" u="none" strike="noStrike">
+                <a:solidFill>
+                  <a:srgbClr val="1B2420"/>
+                </a:solidFill>
+                <a:effectLst/>
+                <a:uFillTx/>
+                <a:latin typeface="Calibri"/>
+                <a:ea typeface="Calibri"/>
+              </a:rPr>
+              <a:t>num</a:t>
+            </a:r>
+            <a:r>
+              <a:rPr lang="en-US" sz="1300" b="0" u="none" strike="noStrike">
+                <a:solidFill>
+                  <a:srgbClr val="1B2420"/>
+                </a:solidFill>
+                <a:effectLst/>
+                <a:uFillTx/>
+                <a:latin typeface="Calibri"/>
+                <a:ea typeface="Calibri"/>
+              </a:rPr>
+              <a:t>ber </a:t>
+            </a:r>
+            <a:r>
+              <a:rPr lang="en-US" sz="1300" b="0" u="none" strike="noStrike">
+                <a:solidFill>
+                  <a:srgbClr val="1B2420"/>
+                </a:solidFill>
+                <a:effectLst/>
+                <a:uFillTx/>
+                <a:latin typeface="Calibri"/>
+                <a:ea typeface="Calibri"/>
+              </a:rPr>
+              <a:t>from </a:t>
+            </a:r>
+            <a:r>
+              <a:rPr lang="en-US" sz="1300" b="0" u="none" strike="noStrike">
+                <a:solidFill>
+                  <a:srgbClr val="1B2420"/>
+                </a:solidFill>
+                <a:effectLst/>
+                <a:uFillTx/>
+                <a:latin typeface="Calibri"/>
+                <a:ea typeface="Calibri"/>
+              </a:rPr>
+              <a:t>1 to </a:t>
+            </a:r>
+            <a:r>
+              <a:rPr lang="en-US" sz="1300" b="0" u="none" strike="noStrike">
+                <a:solidFill>
+                  <a:srgbClr val="1B2420"/>
+                </a:solidFill>
+                <a:effectLst/>
+                <a:uFillTx/>
+                <a:latin typeface="Calibri"/>
+                <a:ea typeface="Calibri"/>
+              </a:rPr>
+              <a:t>10 </a:t>
+            </a:r>
+            <a:r>
+              <a:rPr lang="en-US" sz="1300" b="0" u="none" strike="noStrike">
+                <a:solidFill>
+                  <a:srgbClr val="1B2420"/>
+                </a:solidFill>
+                <a:effectLst/>
+                <a:uFillTx/>
+                <a:latin typeface="Calibri"/>
+                <a:ea typeface="Calibri"/>
+              </a:rPr>
+              <a:t>using </a:t>
+            </a:r>
+            <a:r>
+              <a:rPr lang="en-US" sz="1300" b="0" u="none" strike="noStrike">
+                <a:solidFill>
+                  <a:srgbClr val="1B2420"/>
+                </a:solidFill>
+                <a:effectLst/>
+                <a:uFillTx/>
+                <a:latin typeface="Calibri"/>
+                <a:ea typeface="Calibri"/>
+              </a:rPr>
+              <a:t>a for </a:t>
+            </a:r>
+            <a:r>
+              <a:rPr lang="en-US" sz="1300" b="0" u="none" strike="noStrike">
+                <a:solidFill>
+                  <a:srgbClr val="1B2420"/>
+                </a:solidFill>
+                <a:effectLst/>
+                <a:uFillTx/>
+                <a:latin typeface="Calibri"/>
+                <a:ea typeface="Calibri"/>
+              </a:rPr>
+              <a:t>loop </a:t>
+            </a:r>
+            <a:r>
+              <a:rPr lang="en-US" sz="1300" b="0" u="none" strike="noStrike">
+                <a:solidFill>
+                  <a:srgbClr val="1B2420"/>
+                </a:solidFill>
+                <a:effectLst/>
+                <a:uFillTx/>
+                <a:latin typeface="Calibri"/>
+                <a:ea typeface="Calibri"/>
+              </a:rPr>
+              <a:t>and </a:t>
+            </a:r>
+            <a:r>
+              <a:rPr lang="en-US" sz="1300" b="0" u="none" strike="noStrike">
+                <a:solidFill>
+                  <a:srgbClr val="1B2420"/>
+                </a:solidFill>
+                <a:effectLst/>
+                <a:uFillTx/>
+                <a:latin typeface="Calibri"/>
+                <a:ea typeface="Calibri"/>
+              </a:rPr>
+              <a:t>range</a:t>
+            </a:r>
+            <a:r>
+              <a:rPr lang="en-US" sz="1300" b="0" u="none" strike="noStrike">
+                <a:solidFill>
+                  <a:srgbClr val="1B2420"/>
+                </a:solidFill>
+                <a:effectLst/>
+                <a:uFillTx/>
+                <a:latin typeface="Calibri"/>
+                <a:ea typeface="Calibri"/>
+              </a:rPr>
+              <a:t>()</a:t>
             </a:r>
             <a:endParaRPr lang="en-US" sz="1300" b="0" u="none" strike="noStrike">
               <a:solidFill>
@@ -29525,14 +29713,14 @@
       </p:sp>
       <p:sp>
         <p:nvSpPr>
-          <p:cNvPr id="405" name="Shape 9"/>
+          <p:cNvPr id="406" name="Shape 9"/>
           <p:cNvSpPr/>
           <p:nvPr/>
         </p:nvSpPr>
         <p:spPr>
           <a:xfrm>
             <a:off x="822960" y="3303360"/>
-            <a:ext cx="419760" cy="419760"/>
+            <a:ext cx="419040" cy="419040"/>
           </a:xfrm>
           <a:prstGeom prst="ellipse">
             <a:avLst/>
@@ -29568,7 +29756,7 @@
       </p:sp>
       <p:pic>
         <p:nvPicPr>
-          <p:cNvPr id="406" name="Image 2" descr="icons/checkdouble.png"/>
+          <p:cNvPr id="407" name="Image 2" descr="icons/checkdouble.png"/>
           <p:cNvPicPr/>
           <p:nvPr/>
         </p:nvPicPr>
@@ -29579,7 +29767,7 @@
         <p:spPr>
           <a:xfrm>
             <a:off x="885960" y="3366360"/>
-            <a:ext cx="293760" cy="293760"/>
+            <a:ext cx="293040" cy="293040"/>
           </a:xfrm>
           <a:prstGeom prst="rect">
             <a:avLst/>
@@ -29592,14 +29780,14 @@
       </p:pic>
       <p:sp>
         <p:nvSpPr>
-          <p:cNvPr id="407" name="Shape 10"/>
+          <p:cNvPr id="408" name="Shape 10"/>
           <p:cNvSpPr/>
           <p:nvPr/>
         </p:nvSpPr>
         <p:spPr>
           <a:xfrm>
             <a:off x="1417320" y="3321720"/>
-            <a:ext cx="419760" cy="383400"/>
+            <a:ext cx="419040" cy="382680"/>
           </a:xfrm>
           <a:prstGeom prst="roundRect">
             <a:avLst>
@@ -29640,14 +29828,14 @@
       </p:sp>
       <p:sp>
         <p:nvSpPr>
-          <p:cNvPr id="408" name="Text 11"/>
+          <p:cNvPr id="409" name="Text 11"/>
           <p:cNvSpPr/>
           <p:nvPr/>
         </p:nvSpPr>
         <p:spPr>
           <a:xfrm>
             <a:off x="1417320" y="3321720"/>
-            <a:ext cx="419760" cy="383400"/>
+            <a:ext cx="419040" cy="382680"/>
           </a:xfrm>
           <a:prstGeom prst="rect">
             <a:avLst/>
@@ -29701,14 +29889,14 @@
       </p:sp>
       <p:sp>
         <p:nvSpPr>
-          <p:cNvPr id="409" name="Text 12"/>
+          <p:cNvPr id="410" name="Text 12"/>
           <p:cNvSpPr/>
           <p:nvPr/>
         </p:nvSpPr>
         <p:spPr>
           <a:xfrm>
             <a:off x="2011680" y="3303360"/>
-            <a:ext cx="9417600" cy="419760"/>
+            <a:ext cx="9416880" cy="419040"/>
           </a:xfrm>
           <a:prstGeom prst="rect">
             <a:avLst/>
@@ -29762,14 +29950,14 @@
       </p:sp>
       <p:sp>
         <p:nvSpPr>
-          <p:cNvPr id="410" name="Shape 13"/>
+          <p:cNvPr id="411" name="Shape 13"/>
           <p:cNvSpPr/>
           <p:nvPr/>
         </p:nvSpPr>
         <p:spPr>
           <a:xfrm>
             <a:off x="822960" y="4183560"/>
-            <a:ext cx="419760" cy="419760"/>
+            <a:ext cx="419040" cy="419040"/>
           </a:xfrm>
           <a:prstGeom prst="ellipse">
             <a:avLst/>
@@ -29805,7 +29993,7 @@
       </p:sp>
       <p:pic>
         <p:nvPicPr>
-          <p:cNvPr id="411" name="Image 3" descr="icons/checkdouble.png"/>
+          <p:cNvPr id="412" name="Image 3" descr="icons/checkdouble.png"/>
           <p:cNvPicPr/>
           <p:nvPr/>
         </p:nvPicPr>
@@ -29816,7 +30004,7 @@
         <p:spPr>
           <a:xfrm>
             <a:off x="885960" y="4246560"/>
-            <a:ext cx="293760" cy="293760"/>
+            <a:ext cx="293040" cy="293040"/>
           </a:xfrm>
           <a:prstGeom prst="rect">
             <a:avLst/>
@@ -29829,14 +30017,14 @@
       </p:pic>
       <p:sp>
         <p:nvSpPr>
-          <p:cNvPr id="412" name="Shape 14"/>
+          <p:cNvPr id="413" name="Shape 14"/>
           <p:cNvSpPr/>
           <p:nvPr/>
         </p:nvSpPr>
         <p:spPr>
           <a:xfrm>
             <a:off x="1417320" y="4201560"/>
-            <a:ext cx="419760" cy="383400"/>
+            <a:ext cx="419040" cy="382680"/>
           </a:xfrm>
           <a:prstGeom prst="roundRect">
             <a:avLst>
@@ -29877,14 +30065,14 @@
       </p:sp>
       <p:sp>
         <p:nvSpPr>
-          <p:cNvPr id="413" name="Text 15"/>
+          <p:cNvPr id="414" name="Text 15"/>
           <p:cNvSpPr/>
           <p:nvPr/>
         </p:nvSpPr>
         <p:spPr>
           <a:xfrm>
             <a:off x="1417320" y="4201560"/>
-            <a:ext cx="419760" cy="383400"/>
+            <a:ext cx="419040" cy="382680"/>
           </a:xfrm>
           <a:prstGeom prst="rect">
             <a:avLst/>
@@ -29938,14 +30126,14 @@
       </p:sp>
       <p:sp>
         <p:nvSpPr>
-          <p:cNvPr id="414" name="Text 16"/>
+          <p:cNvPr id="415" name="Text 16"/>
           <p:cNvSpPr/>
           <p:nvPr/>
         </p:nvSpPr>
         <p:spPr>
           <a:xfrm>
             <a:off x="2011680" y="4183560"/>
-            <a:ext cx="9417600" cy="419760"/>
+            <a:ext cx="9416880" cy="419040"/>
           </a:xfrm>
           <a:prstGeom prst="rect">
             <a:avLst/>
@@ -29999,14 +30187,14 @@
       </p:sp>
       <p:sp>
         <p:nvSpPr>
-          <p:cNvPr id="415" name="Shape 17"/>
+          <p:cNvPr id="416" name="Shape 17"/>
           <p:cNvSpPr/>
           <p:nvPr/>
         </p:nvSpPr>
         <p:spPr>
           <a:xfrm>
             <a:off x="822960" y="5063400"/>
-            <a:ext cx="419760" cy="419760"/>
+            <a:ext cx="419040" cy="419040"/>
           </a:xfrm>
           <a:prstGeom prst="ellipse">
             <a:avLst/>
@@ -30042,7 +30230,7 @@
       </p:sp>
       <p:pic>
         <p:nvPicPr>
-          <p:cNvPr id="416" name="Image 4" descr="icons/checkdouble.png"/>
+          <p:cNvPr id="417" name="Image 4" descr="icons/checkdouble.png"/>
           <p:cNvPicPr/>
           <p:nvPr/>
         </p:nvPicPr>
@@ -30053,7 +30241,7 @@
         <p:spPr>
           <a:xfrm>
             <a:off x="885960" y="5126760"/>
-            <a:ext cx="293760" cy="293760"/>
+            <a:ext cx="293040" cy="293040"/>
           </a:xfrm>
           <a:prstGeom prst="rect">
             <a:avLst/>
@@ -30066,14 +30254,14 @@
       </p:pic>
       <p:sp>
         <p:nvSpPr>
-          <p:cNvPr id="417" name="Shape 18"/>
+          <p:cNvPr id="418" name="Shape 18"/>
           <p:cNvSpPr/>
           <p:nvPr/>
         </p:nvSpPr>
         <p:spPr>
           <a:xfrm>
             <a:off x="1417320" y="5081760"/>
-            <a:ext cx="419760" cy="383400"/>
+            <a:ext cx="419040" cy="382680"/>
           </a:xfrm>
           <a:prstGeom prst="roundRect">
             <a:avLst>
@@ -30114,14 +30302,14 @@
       </p:sp>
       <p:sp>
         <p:nvSpPr>
-          <p:cNvPr id="418" name="Text 19"/>
+          <p:cNvPr id="419" name="Text 19"/>
           <p:cNvSpPr/>
           <p:nvPr/>
         </p:nvSpPr>
         <p:spPr>
           <a:xfrm>
             <a:off x="1417320" y="5081760"/>
-            <a:ext cx="419760" cy="383400"/>
+            <a:ext cx="419040" cy="382680"/>
           </a:xfrm>
           <a:prstGeom prst="rect">
             <a:avLst/>
@@ -30175,14 +30363,14 @@
       </p:sp>
       <p:sp>
         <p:nvSpPr>
-          <p:cNvPr id="419" name="Text 20"/>
+          <p:cNvPr id="420" name="Text 20"/>
           <p:cNvSpPr/>
           <p:nvPr/>
         </p:nvSpPr>
         <p:spPr>
           <a:xfrm>
             <a:off x="2011680" y="5063400"/>
-            <a:ext cx="9417600" cy="419760"/>
+            <a:ext cx="9416880" cy="419040"/>
           </a:xfrm>
           <a:prstGeom prst="rect">
             <a:avLst/>
@@ -30236,14 +30424,14 @@
       </p:sp>
       <p:sp>
         <p:nvSpPr>
-          <p:cNvPr id="420" name="Text 21"/>
+          <p:cNvPr id="421" name="Text 21"/>
           <p:cNvSpPr/>
           <p:nvPr/>
         </p:nvSpPr>
         <p:spPr>
           <a:xfrm>
             <a:off x="457200" y="6446520"/>
-            <a:ext cx="6400080" cy="273600"/>
+            <a:ext cx="6399360" cy="272880"/>
           </a:xfrm>
           <a:prstGeom prst="rect">
             <a:avLst/>
@@ -30297,14 +30485,14 @@
       </p:sp>
       <p:sp>
         <p:nvSpPr>
-          <p:cNvPr id="421" name="Text 22"/>
+          <p:cNvPr id="422" name="Text 22"/>
           <p:cNvSpPr/>
           <p:nvPr/>
         </p:nvSpPr>
         <p:spPr>
           <a:xfrm>
             <a:off x="11521440" y="6446520"/>
-            <a:ext cx="456480" cy="273600"/>
+            <a:ext cx="455760" cy="272880"/>
           </a:xfrm>
           <a:prstGeom prst="rect">
             <a:avLst/>
@@ -30395,14 +30583,14 @@
       </p:grpSpPr>
       <p:sp>
         <p:nvSpPr>
-          <p:cNvPr id="422" name="Shape 0"/>
+          <p:cNvPr id="423" name="Shape 0"/>
           <p:cNvSpPr/>
           <p:nvPr/>
         </p:nvSpPr>
         <p:spPr>
           <a:xfrm>
             <a:off x="-1828800" y="5029200"/>
-            <a:ext cx="3656880" cy="3656880"/>
+            <a:ext cx="3656160" cy="3656160"/>
           </a:xfrm>
           <a:prstGeom prst="ellipse">
             <a:avLst/>
@@ -30438,14 +30626,14 @@
       </p:sp>
       <p:sp>
         <p:nvSpPr>
-          <p:cNvPr id="423" name="Shape 1"/>
+          <p:cNvPr id="424" name="Shape 1"/>
           <p:cNvSpPr/>
           <p:nvPr/>
         </p:nvSpPr>
         <p:spPr>
           <a:xfrm>
             <a:off x="457200" y="457200"/>
-            <a:ext cx="639360" cy="639360"/>
+            <a:ext cx="638640" cy="638640"/>
           </a:xfrm>
           <a:prstGeom prst="ellipse">
             <a:avLst/>
@@ -30481,7 +30669,7 @@
       </p:sp>
       <p:pic>
         <p:nvPicPr>
-          <p:cNvPr id="424" name="Image 0" descr="icons/infinity.png"/>
+          <p:cNvPr id="425" name="Image 0" descr="icons/infinity.png"/>
           <p:cNvPicPr/>
           <p:nvPr/>
         </p:nvPicPr>
@@ -30492,7 +30680,7 @@
         <p:spPr>
           <a:xfrm>
             <a:off x="553320" y="553320"/>
-            <a:ext cx="447480" cy="447480"/>
+            <a:ext cx="446760" cy="446760"/>
           </a:xfrm>
           <a:prstGeom prst="rect">
             <a:avLst/>
@@ -30505,14 +30693,14 @@
       </p:pic>
       <p:sp>
         <p:nvSpPr>
-          <p:cNvPr id="425" name="Text 2"/>
+          <p:cNvPr id="426" name="Text 2"/>
           <p:cNvSpPr/>
           <p:nvPr/>
         </p:nvSpPr>
         <p:spPr>
           <a:xfrm>
             <a:off x="1280160" y="457200"/>
-            <a:ext cx="10423440" cy="639360"/>
+            <a:ext cx="10422720" cy="638640"/>
           </a:xfrm>
           <a:prstGeom prst="rect">
             <a:avLst/>
@@ -30566,14 +30754,14 @@
       </p:sp>
       <p:sp>
         <p:nvSpPr>
-          <p:cNvPr id="426" name="Shape 3"/>
+          <p:cNvPr id="427" name="Shape 3"/>
           <p:cNvSpPr/>
           <p:nvPr/>
         </p:nvSpPr>
         <p:spPr>
           <a:xfrm>
             <a:off x="457200" y="1600200"/>
-            <a:ext cx="11273760" cy="4479840"/>
+            <a:ext cx="11273040" cy="4479120"/>
           </a:xfrm>
           <a:prstGeom prst="roundRect">
             <a:avLst>
@@ -30611,14 +30799,14 @@
       </p:sp>
       <p:sp>
         <p:nvSpPr>
-          <p:cNvPr id="427" name="Text 4"/>
+          <p:cNvPr id="428" name="Text 4"/>
           <p:cNvSpPr/>
           <p:nvPr/>
         </p:nvSpPr>
         <p:spPr>
           <a:xfrm>
             <a:off x="822960" y="1828800"/>
-            <a:ext cx="10514880" cy="456480"/>
+            <a:ext cx="10514160" cy="455760"/>
           </a:xfrm>
           <a:prstGeom prst="rect">
             <a:avLst/>
@@ -30672,14 +30860,14 @@
       </p:sp>
       <p:sp>
         <p:nvSpPr>
-          <p:cNvPr id="428" name="Shape 5"/>
+          <p:cNvPr id="429" name="Shape 5"/>
           <p:cNvSpPr/>
           <p:nvPr/>
         </p:nvSpPr>
         <p:spPr>
           <a:xfrm>
             <a:off x="822960" y="2423160"/>
-            <a:ext cx="419760" cy="419760"/>
+            <a:ext cx="419040" cy="419040"/>
           </a:xfrm>
           <a:prstGeom prst="ellipse">
             <a:avLst/>
@@ -30715,7 +30903,7 @@
       </p:sp>
       <p:pic>
         <p:nvPicPr>
-          <p:cNvPr id="429" name="Image 1" descr="icons/checkdouble.png"/>
+          <p:cNvPr id="430" name="Image 1" descr="icons/checkdouble.png"/>
           <p:cNvPicPr/>
           <p:nvPr/>
         </p:nvPicPr>
@@ -30726,7 +30914,7 @@
         <p:spPr>
           <a:xfrm>
             <a:off x="885960" y="2486160"/>
-            <a:ext cx="293760" cy="293760"/>
+            <a:ext cx="293040" cy="293040"/>
           </a:xfrm>
           <a:prstGeom prst="rect">
             <a:avLst/>
@@ -30739,14 +30927,14 @@
       </p:pic>
       <p:sp>
         <p:nvSpPr>
-          <p:cNvPr id="430" name="Shape 6"/>
+          <p:cNvPr id="431" name="Shape 6"/>
           <p:cNvSpPr/>
           <p:nvPr/>
         </p:nvSpPr>
         <p:spPr>
           <a:xfrm>
             <a:off x="1417320" y="2441520"/>
-            <a:ext cx="419760" cy="383400"/>
+            <a:ext cx="419040" cy="382680"/>
           </a:xfrm>
           <a:prstGeom prst="roundRect">
             <a:avLst>
@@ -30787,14 +30975,14 @@
       </p:sp>
       <p:sp>
         <p:nvSpPr>
-          <p:cNvPr id="431" name="Text 7"/>
+          <p:cNvPr id="432" name="Text 7"/>
           <p:cNvSpPr/>
           <p:nvPr/>
         </p:nvSpPr>
         <p:spPr>
           <a:xfrm>
             <a:off x="1417320" y="2441520"/>
-            <a:ext cx="419760" cy="383400"/>
+            <a:ext cx="419040" cy="382680"/>
           </a:xfrm>
           <a:prstGeom prst="rect">
             <a:avLst/>
@@ -30848,14 +31036,14 @@
       </p:sp>
       <p:sp>
         <p:nvSpPr>
-          <p:cNvPr id="432" name="Text 8"/>
+          <p:cNvPr id="433" name="Text 8"/>
           <p:cNvSpPr/>
           <p:nvPr/>
         </p:nvSpPr>
         <p:spPr>
           <a:xfrm>
             <a:off x="2011680" y="2423160"/>
-            <a:ext cx="9417600" cy="419760"/>
+            <a:ext cx="9416880" cy="419040"/>
           </a:xfrm>
           <a:prstGeom prst="rect">
             <a:avLst/>
@@ -30909,14 +31097,14 @@
       </p:sp>
       <p:sp>
         <p:nvSpPr>
-          <p:cNvPr id="433" name="Shape 9"/>
+          <p:cNvPr id="434" name="Shape 9"/>
           <p:cNvSpPr/>
           <p:nvPr/>
         </p:nvSpPr>
         <p:spPr>
           <a:xfrm>
             <a:off x="822960" y="3596760"/>
-            <a:ext cx="419760" cy="419760"/>
+            <a:ext cx="419040" cy="419040"/>
           </a:xfrm>
           <a:prstGeom prst="ellipse">
             <a:avLst/>
@@ -30952,7 +31140,7 @@
       </p:sp>
       <p:pic>
         <p:nvPicPr>
-          <p:cNvPr id="434" name="Image 2" descr="icons/checkdouble.png"/>
+          <p:cNvPr id="435" name="Image 2" descr="icons/checkdouble.png"/>
           <p:cNvPicPr/>
           <p:nvPr/>
         </p:nvPicPr>
@@ -30963,7 +31151,7 @@
         <p:spPr>
           <a:xfrm>
             <a:off x="885960" y="3659760"/>
-            <a:ext cx="293760" cy="293760"/>
+            <a:ext cx="293040" cy="293040"/>
           </a:xfrm>
           <a:prstGeom prst="rect">
             <a:avLst/>
@@ -30976,14 +31164,14 @@
       </p:pic>
       <p:sp>
         <p:nvSpPr>
-          <p:cNvPr id="435" name="Shape 10"/>
+          <p:cNvPr id="436" name="Shape 10"/>
           <p:cNvSpPr/>
           <p:nvPr/>
         </p:nvSpPr>
         <p:spPr>
           <a:xfrm>
             <a:off x="1417320" y="3614760"/>
-            <a:ext cx="419760" cy="383400"/>
+            <a:ext cx="419040" cy="382680"/>
           </a:xfrm>
           <a:prstGeom prst="roundRect">
             <a:avLst>
@@ -31024,14 +31212,14 @@
       </p:sp>
       <p:sp>
         <p:nvSpPr>
-          <p:cNvPr id="436" name="Text 11"/>
+          <p:cNvPr id="437" name="Text 11"/>
           <p:cNvSpPr/>
           <p:nvPr/>
         </p:nvSpPr>
         <p:spPr>
           <a:xfrm>
             <a:off x="1417320" y="3614760"/>
-            <a:ext cx="419760" cy="383400"/>
+            <a:ext cx="419040" cy="382680"/>
           </a:xfrm>
           <a:prstGeom prst="rect">
             <a:avLst/>
@@ -31085,14 +31273,14 @@
       </p:sp>
       <p:sp>
         <p:nvSpPr>
-          <p:cNvPr id="437" name="Text 12"/>
+          <p:cNvPr id="438" name="Text 12"/>
           <p:cNvSpPr/>
           <p:nvPr/>
         </p:nvSpPr>
         <p:spPr>
           <a:xfrm>
             <a:off x="2011680" y="3596760"/>
-            <a:ext cx="9417600" cy="419760"/>
+            <a:ext cx="9416880" cy="419040"/>
           </a:xfrm>
           <a:prstGeom prst="rect">
             <a:avLst/>
@@ -31146,14 +31334,14 @@
       </p:sp>
       <p:sp>
         <p:nvSpPr>
-          <p:cNvPr id="438" name="Shape 13"/>
+          <p:cNvPr id="439" name="Shape 13"/>
           <p:cNvSpPr/>
           <p:nvPr/>
         </p:nvSpPr>
         <p:spPr>
           <a:xfrm>
             <a:off x="822960" y="4770000"/>
-            <a:ext cx="419760" cy="419760"/>
+            <a:ext cx="419040" cy="419040"/>
           </a:xfrm>
           <a:prstGeom prst="ellipse">
             <a:avLst/>
@@ -31189,7 +31377,7 @@
       </p:sp>
       <p:pic>
         <p:nvPicPr>
-          <p:cNvPr id="439" name="Image 3" descr="icons/checkdouble.png"/>
+          <p:cNvPr id="440" name="Image 3" descr="icons/checkdouble.png"/>
           <p:cNvPicPr/>
           <p:nvPr/>
         </p:nvPicPr>
@@ -31200,7 +31388,7 @@
         <p:spPr>
           <a:xfrm>
             <a:off x="885960" y="4833360"/>
-            <a:ext cx="293760" cy="293760"/>
+            <a:ext cx="293040" cy="293040"/>
           </a:xfrm>
           <a:prstGeom prst="rect">
             <a:avLst/>
@@ -31213,14 +31401,14 @@
       </p:pic>
       <p:sp>
         <p:nvSpPr>
-          <p:cNvPr id="440" name="Shape 14"/>
+          <p:cNvPr id="441" name="Shape 14"/>
           <p:cNvSpPr/>
           <p:nvPr/>
         </p:nvSpPr>
         <p:spPr>
           <a:xfrm>
             <a:off x="1417320" y="4788360"/>
-            <a:ext cx="419760" cy="383400"/>
+            <a:ext cx="419040" cy="382680"/>
           </a:xfrm>
           <a:prstGeom prst="roundRect">
             <a:avLst>
@@ -31261,14 +31449,14 @@
       </p:sp>
       <p:sp>
         <p:nvSpPr>
-          <p:cNvPr id="441" name="Text 15"/>
+          <p:cNvPr id="442" name="Text 15"/>
           <p:cNvSpPr/>
           <p:nvPr/>
         </p:nvSpPr>
         <p:spPr>
           <a:xfrm>
             <a:off x="1417320" y="4788360"/>
-            <a:ext cx="419760" cy="383400"/>
+            <a:ext cx="419040" cy="382680"/>
           </a:xfrm>
           <a:prstGeom prst="rect">
             <a:avLst/>
@@ -31322,14 +31510,14 @@
       </p:sp>
       <p:sp>
         <p:nvSpPr>
-          <p:cNvPr id="442" name="Text 16"/>
+          <p:cNvPr id="443" name="Text 16"/>
           <p:cNvSpPr/>
           <p:nvPr/>
         </p:nvSpPr>
         <p:spPr>
           <a:xfrm>
             <a:off x="2011680" y="4770000"/>
-            <a:ext cx="9417600" cy="419760"/>
+            <a:ext cx="9416880" cy="419040"/>
           </a:xfrm>
           <a:prstGeom prst="rect">
             <a:avLst/>
@@ -31383,14 +31571,14 @@
       </p:sp>
       <p:sp>
         <p:nvSpPr>
-          <p:cNvPr id="443" name="Text 17"/>
+          <p:cNvPr id="444" name="Text 17"/>
           <p:cNvSpPr/>
           <p:nvPr/>
         </p:nvSpPr>
         <p:spPr>
           <a:xfrm>
             <a:off x="457200" y="6446520"/>
-            <a:ext cx="6400080" cy="273600"/>
+            <a:ext cx="6399360" cy="272880"/>
           </a:xfrm>
           <a:prstGeom prst="rect">
             <a:avLst/>
@@ -31444,14 +31632,14 @@
       </p:sp>
       <p:sp>
         <p:nvSpPr>
-          <p:cNvPr id="444" name="Text 18"/>
+          <p:cNvPr id="445" name="Text 18"/>
           <p:cNvSpPr/>
           <p:nvPr/>
         </p:nvSpPr>
         <p:spPr>
           <a:xfrm>
             <a:off x="11521440" y="6446520"/>
-            <a:ext cx="456480" cy="273600"/>
+            <a:ext cx="455760" cy="272880"/>
           </a:xfrm>
           <a:prstGeom prst="rect">
             <a:avLst/>
@@ -31542,14 +31730,14 @@
       </p:grpSpPr>
       <p:sp>
         <p:nvSpPr>
-          <p:cNvPr id="445" name="Shape 0"/>
+          <p:cNvPr id="446" name="Shape 0"/>
           <p:cNvSpPr/>
           <p:nvPr/>
         </p:nvSpPr>
         <p:spPr>
           <a:xfrm>
             <a:off x="-1828800" y="4114800"/>
-            <a:ext cx="5485680" cy="5485680"/>
+            <a:ext cx="5484960" cy="5484960"/>
           </a:xfrm>
           <a:prstGeom prst="ellipse">
             <a:avLst/>
@@ -31585,14 +31773,14 @@
       </p:sp>
       <p:sp>
         <p:nvSpPr>
-          <p:cNvPr id="446" name="Shape 1"/>
+          <p:cNvPr id="447" name="Shape 1"/>
           <p:cNvSpPr/>
           <p:nvPr/>
         </p:nvSpPr>
         <p:spPr>
           <a:xfrm>
             <a:off x="9601200" y="-2286000"/>
-            <a:ext cx="5485680" cy="5485680"/>
+            <a:ext cx="5484960" cy="5484960"/>
           </a:xfrm>
           <a:prstGeom prst="ellipse">
             <a:avLst/>
@@ -31628,14 +31816,14 @@
       </p:sp>
       <p:sp>
         <p:nvSpPr>
-          <p:cNvPr id="447" name="Shape 2"/>
+          <p:cNvPr id="448" name="Shape 2"/>
           <p:cNvSpPr/>
           <p:nvPr/>
         </p:nvSpPr>
         <p:spPr>
           <a:xfrm>
             <a:off x="5591520" y="731520"/>
-            <a:ext cx="1005120" cy="1005120"/>
+            <a:ext cx="1004400" cy="1004400"/>
           </a:xfrm>
           <a:prstGeom prst="ellipse">
             <a:avLst/>
@@ -31671,7 +31859,7 @@
       </p:sp>
       <p:pic>
         <p:nvPicPr>
-          <p:cNvPr id="448" name="Image 0" descr="icons/tasks.png"/>
+          <p:cNvPr id="449" name="Image 0" descr="icons/tasks.png"/>
           <p:cNvPicPr/>
           <p:nvPr/>
         </p:nvPicPr>
@@ -31682,7 +31870,7 @@
         <p:spPr>
           <a:xfrm>
             <a:off x="5742360" y="882360"/>
-            <a:ext cx="703440" cy="703440"/>
+            <a:ext cx="702720" cy="702720"/>
           </a:xfrm>
           <a:prstGeom prst="rect">
             <a:avLst/>
@@ -31695,14 +31883,14 @@
       </p:pic>
       <p:sp>
         <p:nvSpPr>
-          <p:cNvPr id="449" name="Text 3"/>
+          <p:cNvPr id="450" name="Text 3"/>
           <p:cNvSpPr/>
           <p:nvPr/>
         </p:nvSpPr>
         <p:spPr>
           <a:xfrm>
             <a:off x="914400" y="1965960"/>
-            <a:ext cx="10359360" cy="365040"/>
+            <a:ext cx="10358640" cy="364320"/>
           </a:xfrm>
           <a:prstGeom prst="rect">
             <a:avLst/>
@@ -31756,14 +31944,14 @@
       </p:sp>
       <p:sp>
         <p:nvSpPr>
-          <p:cNvPr id="450" name="Text 4"/>
+          <p:cNvPr id="451" name="Text 4"/>
           <p:cNvSpPr/>
           <p:nvPr/>
         </p:nvSpPr>
         <p:spPr>
           <a:xfrm>
             <a:off x="914400" y="2377440"/>
-            <a:ext cx="10359360" cy="2010960"/>
+            <a:ext cx="10358640" cy="2010240"/>
           </a:xfrm>
           <a:prstGeom prst="rect">
             <a:avLst/>
@@ -31817,14 +32005,14 @@
       </p:sp>
       <p:sp>
         <p:nvSpPr>
-          <p:cNvPr id="451" name="Text 5"/>
+          <p:cNvPr id="452" name="Text 5"/>
           <p:cNvSpPr/>
           <p:nvPr/>
         </p:nvSpPr>
         <p:spPr>
           <a:xfrm>
             <a:off x="1463040" y="4572000"/>
-            <a:ext cx="9262080" cy="1096560"/>
+            <a:ext cx="9261360" cy="1095840"/>
           </a:xfrm>
           <a:prstGeom prst="rect">
             <a:avLst/>
@@ -31878,14 +32066,14 @@
       </p:sp>
       <p:sp>
         <p:nvSpPr>
-          <p:cNvPr id="452" name="Text 6"/>
+          <p:cNvPr id="453" name="Text 6"/>
           <p:cNvSpPr/>
           <p:nvPr/>
         </p:nvSpPr>
         <p:spPr>
           <a:xfrm>
             <a:off x="11521440" y="6446520"/>
-            <a:ext cx="456480" cy="273600"/>
+            <a:ext cx="455760" cy="272880"/>
           </a:xfrm>
           <a:prstGeom prst="rect">
             <a:avLst/>
@@ -31976,14 +32164,14 @@
       </p:grpSpPr>
       <p:sp>
         <p:nvSpPr>
-          <p:cNvPr id="453" name="Shape 0"/>
+          <p:cNvPr id="454" name="Shape 0"/>
           <p:cNvSpPr/>
           <p:nvPr/>
         </p:nvSpPr>
         <p:spPr>
           <a:xfrm>
             <a:off x="10515600" y="5669280"/>
-            <a:ext cx="3199680" cy="3199680"/>
+            <a:ext cx="3198960" cy="3198960"/>
           </a:xfrm>
           <a:prstGeom prst="ellipse">
             <a:avLst/>
@@ -32019,14 +32207,14 @@
       </p:sp>
       <p:sp>
         <p:nvSpPr>
-          <p:cNvPr id="454" name="Shape 1"/>
+          <p:cNvPr id="455" name="Shape 1"/>
           <p:cNvSpPr/>
           <p:nvPr/>
         </p:nvSpPr>
         <p:spPr>
           <a:xfrm>
             <a:off x="457200" y="457200"/>
-            <a:ext cx="639360" cy="639360"/>
+            <a:ext cx="638640" cy="638640"/>
           </a:xfrm>
           <a:prstGeom prst="ellipse">
             <a:avLst/>
@@ -32062,7 +32250,7 @@
       </p:sp>
       <p:pic>
         <p:nvPicPr>
-          <p:cNvPr id="455" name="Image 0" descr="icons/tasks.png"/>
+          <p:cNvPr id="456" name="Image 0" descr="icons/tasks.png"/>
           <p:cNvPicPr/>
           <p:nvPr/>
         </p:nvPicPr>
@@ -32073,7 +32261,7 @@
         <p:spPr>
           <a:xfrm>
             <a:off x="553320" y="553320"/>
-            <a:ext cx="447480" cy="447480"/>
+            <a:ext cx="446760" cy="446760"/>
           </a:xfrm>
           <a:prstGeom prst="rect">
             <a:avLst/>
@@ -32086,14 +32274,14 @@
       </p:pic>
       <p:sp>
         <p:nvSpPr>
-          <p:cNvPr id="456" name="Text 2"/>
+          <p:cNvPr id="457" name="Text 2"/>
           <p:cNvSpPr/>
           <p:nvPr/>
         </p:nvSpPr>
         <p:spPr>
           <a:xfrm>
             <a:off x="1280160" y="457200"/>
-            <a:ext cx="10423440" cy="639360"/>
+            <a:ext cx="10422720" cy="638640"/>
           </a:xfrm>
           <a:prstGeom prst="rect">
             <a:avLst/>
@@ -32147,14 +32335,14 @@
       </p:sp>
       <p:sp>
         <p:nvSpPr>
-          <p:cNvPr id="457" name="Shape 3"/>
+          <p:cNvPr id="458" name="Shape 3"/>
           <p:cNvSpPr/>
           <p:nvPr/>
         </p:nvSpPr>
         <p:spPr>
           <a:xfrm>
             <a:off x="457200" y="1554480"/>
-            <a:ext cx="3656880" cy="4662720"/>
+            <a:ext cx="3656160" cy="4662000"/>
           </a:xfrm>
           <a:prstGeom prst="roundRect">
             <a:avLst>
@@ -32192,14 +32380,14 @@
       </p:sp>
       <p:sp>
         <p:nvSpPr>
-          <p:cNvPr id="458" name="Shape 4"/>
+          <p:cNvPr id="459" name="Shape 4"/>
           <p:cNvSpPr/>
           <p:nvPr/>
         </p:nvSpPr>
         <p:spPr>
           <a:xfrm>
             <a:off x="1508760" y="2194560"/>
-            <a:ext cx="1553760" cy="1553760"/>
+            <a:ext cx="1553040" cy="1553040"/>
           </a:xfrm>
           <a:prstGeom prst="ellipse">
             <a:avLst/>
@@ -32235,7 +32423,7 @@
       </p:sp>
       <p:pic>
         <p:nvPicPr>
-          <p:cNvPr id="459" name="Image 1" descr="icons/tasks.png"/>
+          <p:cNvPr id="460" name="Image 1" descr="icons/tasks.png"/>
           <p:cNvPicPr/>
           <p:nvPr/>
         </p:nvPicPr>
@@ -32246,7 +32434,7 @@
         <p:spPr>
           <a:xfrm>
             <a:off x="1742040" y="2427840"/>
-            <a:ext cx="1087560" cy="1087560"/>
+            <a:ext cx="1086840" cy="1086840"/>
           </a:xfrm>
           <a:prstGeom prst="rect">
             <a:avLst/>
@@ -32259,14 +32447,14 @@
       </p:pic>
       <p:sp>
         <p:nvSpPr>
-          <p:cNvPr id="460" name="Text 5"/>
+          <p:cNvPr id="461" name="Text 5"/>
           <p:cNvSpPr/>
           <p:nvPr/>
         </p:nvSpPr>
         <p:spPr>
           <a:xfrm>
             <a:off x="640080" y="3977640"/>
-            <a:ext cx="3291120" cy="1736640"/>
+            <a:ext cx="3290400" cy="1735920"/>
           </a:xfrm>
           <a:prstGeom prst="rect">
             <a:avLst/>
@@ -32350,14 +32538,14 @@
       </p:sp>
       <p:sp>
         <p:nvSpPr>
-          <p:cNvPr id="461" name="Text 6"/>
+          <p:cNvPr id="462" name="Text 6"/>
           <p:cNvSpPr/>
           <p:nvPr/>
         </p:nvSpPr>
         <p:spPr>
           <a:xfrm>
             <a:off x="4572000" y="1737360"/>
-            <a:ext cx="7131600" cy="4114080"/>
+            <a:ext cx="7130880" cy="4113360"/>
           </a:xfrm>
           <a:prstGeom prst="rect">
             <a:avLst/>
@@ -32521,14 +32709,14 @@
       </p:sp>
       <p:sp>
         <p:nvSpPr>
-          <p:cNvPr id="462" name="Text 7"/>
+          <p:cNvPr id="463" name="Text 7"/>
           <p:cNvSpPr/>
           <p:nvPr/>
         </p:nvSpPr>
         <p:spPr>
           <a:xfrm>
             <a:off x="457200" y="6446520"/>
-            <a:ext cx="6400080" cy="273600"/>
+            <a:ext cx="6399360" cy="272880"/>
           </a:xfrm>
           <a:prstGeom prst="rect">
             <a:avLst/>
@@ -32582,14 +32770,14 @@
       </p:sp>
       <p:sp>
         <p:nvSpPr>
-          <p:cNvPr id="463" name="Text 8"/>
+          <p:cNvPr id="464" name="Text 8"/>
           <p:cNvSpPr/>
           <p:nvPr/>
         </p:nvSpPr>
         <p:spPr>
           <a:xfrm>
             <a:off x="11521440" y="6446520"/>
-            <a:ext cx="456480" cy="273600"/>
+            <a:ext cx="455760" cy="272880"/>
           </a:xfrm>
           <a:prstGeom prst="rect">
             <a:avLst/>
@@ -32680,14 +32868,14 @@
       </p:grpSpPr>
       <p:sp>
         <p:nvSpPr>
-          <p:cNvPr id="464" name="Shape 0"/>
+          <p:cNvPr id="465" name="Shape 0"/>
           <p:cNvSpPr/>
           <p:nvPr/>
         </p:nvSpPr>
         <p:spPr>
           <a:xfrm>
             <a:off x="-1828800" y="4114800"/>
-            <a:ext cx="5485680" cy="5485680"/>
+            <a:ext cx="5484960" cy="5484960"/>
           </a:xfrm>
           <a:prstGeom prst="ellipse">
             <a:avLst/>
@@ -32723,14 +32911,14 @@
       </p:sp>
       <p:sp>
         <p:nvSpPr>
-          <p:cNvPr id="465" name="Shape 1"/>
+          <p:cNvPr id="466" name="Shape 1"/>
           <p:cNvSpPr/>
           <p:nvPr/>
         </p:nvSpPr>
         <p:spPr>
           <a:xfrm>
             <a:off x="9601200" y="-2286000"/>
-            <a:ext cx="5485680" cy="5485680"/>
+            <a:ext cx="5484960" cy="5484960"/>
           </a:xfrm>
           <a:prstGeom prst="ellipse">
             <a:avLst/>
@@ -32766,14 +32954,14 @@
       </p:sp>
       <p:sp>
         <p:nvSpPr>
-          <p:cNvPr id="466" name="Shape 2"/>
+          <p:cNvPr id="467" name="Shape 2"/>
           <p:cNvSpPr/>
           <p:nvPr/>
         </p:nvSpPr>
         <p:spPr>
           <a:xfrm>
             <a:off x="5591520" y="731520"/>
-            <a:ext cx="1005120" cy="1005120"/>
+            <a:ext cx="1004400" cy="1004400"/>
           </a:xfrm>
           <a:prstGeom prst="ellipse">
             <a:avLst/>
@@ -32809,7 +32997,7 @@
       </p:sp>
       <p:pic>
         <p:nvPicPr>
-          <p:cNvPr id="467" name="Image 0" descr="icons/sync.png"/>
+          <p:cNvPr id="468" name="Image 0" descr="icons/sync.png"/>
           <p:cNvPicPr/>
           <p:nvPr/>
         </p:nvPicPr>
@@ -32820,7 +33008,7 @@
         <p:spPr>
           <a:xfrm>
             <a:off x="5742360" y="882360"/>
-            <a:ext cx="703440" cy="703440"/>
+            <a:ext cx="702720" cy="702720"/>
           </a:xfrm>
           <a:prstGeom prst="rect">
             <a:avLst/>
@@ -32833,14 +33021,14 @@
       </p:pic>
       <p:sp>
         <p:nvSpPr>
-          <p:cNvPr id="468" name="Text 3"/>
+          <p:cNvPr id="469" name="Text 3"/>
           <p:cNvSpPr/>
           <p:nvPr/>
         </p:nvSpPr>
         <p:spPr>
           <a:xfrm>
             <a:off x="914400" y="1965960"/>
-            <a:ext cx="10359360" cy="365040"/>
+            <a:ext cx="10358640" cy="364320"/>
           </a:xfrm>
           <a:prstGeom prst="rect">
             <a:avLst/>
@@ -32894,14 +33082,14 @@
       </p:sp>
       <p:sp>
         <p:nvSpPr>
-          <p:cNvPr id="469" name="Text 4"/>
+          <p:cNvPr id="470" name="Text 4"/>
           <p:cNvSpPr/>
           <p:nvPr/>
         </p:nvSpPr>
         <p:spPr>
           <a:xfrm>
             <a:off x="914400" y="2377440"/>
-            <a:ext cx="10359360" cy="2010960"/>
+            <a:ext cx="10358640" cy="2010240"/>
           </a:xfrm>
           <a:prstGeom prst="rect">
             <a:avLst/>
@@ -32985,14 +33173,14 @@
       </p:sp>
       <p:sp>
         <p:nvSpPr>
-          <p:cNvPr id="470" name="Text 5"/>
+          <p:cNvPr id="471" name="Text 5"/>
           <p:cNvSpPr/>
           <p:nvPr/>
         </p:nvSpPr>
         <p:spPr>
           <a:xfrm>
             <a:off x="1463040" y="4572000"/>
-            <a:ext cx="9262080" cy="1096560"/>
+            <a:ext cx="9261360" cy="1095840"/>
           </a:xfrm>
           <a:prstGeom prst="rect">
             <a:avLst/>
@@ -33046,14 +33234,14 @@
       </p:sp>
       <p:sp>
         <p:nvSpPr>
-          <p:cNvPr id="471" name="Text 6"/>
+          <p:cNvPr id="472" name="Text 6"/>
           <p:cNvSpPr/>
           <p:nvPr/>
         </p:nvSpPr>
         <p:spPr>
           <a:xfrm>
             <a:off x="11521440" y="6446520"/>
-            <a:ext cx="456480" cy="273600"/>
+            <a:ext cx="455760" cy="272880"/>
           </a:xfrm>
           <a:prstGeom prst="rect">
             <a:avLst/>
@@ -33151,7 +33339,7 @@
         <p:spPr>
           <a:xfrm>
             <a:off x="10515600" y="5669280"/>
-            <a:ext cx="3199680" cy="3199680"/>
+            <a:ext cx="3198960" cy="3198960"/>
           </a:xfrm>
           <a:prstGeom prst="ellipse">
             <a:avLst/>
@@ -33194,7 +33382,7 @@
         <p:spPr>
           <a:xfrm>
             <a:off x="457200" y="457200"/>
-            <a:ext cx="639360" cy="639360"/>
+            <a:ext cx="638640" cy="638640"/>
           </a:xfrm>
           <a:prstGeom prst="ellipse">
             <a:avLst/>
@@ -33241,7 +33429,7 @@
         <p:spPr>
           <a:xfrm>
             <a:off x="553320" y="553320"/>
-            <a:ext cx="447480" cy="447480"/>
+            <a:ext cx="446760" cy="446760"/>
           </a:xfrm>
           <a:prstGeom prst="rect">
             <a:avLst/>
@@ -33261,7 +33449,7 @@
         <p:spPr>
           <a:xfrm>
             <a:off x="1280160" y="457200"/>
-            <a:ext cx="10423440" cy="639360"/>
+            <a:ext cx="10422720" cy="638640"/>
           </a:xfrm>
           <a:prstGeom prst="rect">
             <a:avLst/>
@@ -33322,7 +33510,7 @@
         <p:spPr>
           <a:xfrm>
             <a:off x="457200" y="1554480"/>
-            <a:ext cx="3656880" cy="4662720"/>
+            <a:ext cx="3656160" cy="4662000"/>
           </a:xfrm>
           <a:prstGeom prst="roundRect">
             <a:avLst>
@@ -33367,7 +33555,7 @@
         <p:spPr>
           <a:xfrm>
             <a:off x="1508760" y="2194560"/>
-            <a:ext cx="1553760" cy="1553760"/>
+            <a:ext cx="1553040" cy="1553040"/>
           </a:xfrm>
           <a:prstGeom prst="ellipse">
             <a:avLst/>
@@ -33414,7 +33602,7 @@
         <p:spPr>
           <a:xfrm>
             <a:off x="1742040" y="2427840"/>
-            <a:ext cx="1087560" cy="1087560"/>
+            <a:ext cx="1086840" cy="1086840"/>
           </a:xfrm>
           <a:prstGeom prst="rect">
             <a:avLst/>
@@ -33434,7 +33622,7 @@
         <p:spPr>
           <a:xfrm>
             <a:off x="640080" y="3977640"/>
-            <a:ext cx="3291120" cy="1736640"/>
+            <a:ext cx="3290400" cy="1735920"/>
           </a:xfrm>
           <a:prstGeom prst="rect">
             <a:avLst/>
@@ -33555,7 +33743,7 @@
         <p:spPr>
           <a:xfrm>
             <a:off x="4572000" y="1737360"/>
-            <a:ext cx="7131600" cy="4114080"/>
+            <a:ext cx="7130880" cy="4113360"/>
           </a:xfrm>
           <a:prstGeom prst="rect">
             <a:avLst/>
@@ -33764,7 +33952,7 @@
         <p:spPr>
           <a:xfrm>
             <a:off x="457200" y="6446520"/>
-            <a:ext cx="6400080" cy="273600"/>
+            <a:ext cx="6399360" cy="272880"/>
           </a:xfrm>
           <a:prstGeom prst="rect">
             <a:avLst/>
@@ -33825,7 +34013,7 @@
         <p:spPr>
           <a:xfrm>
             <a:off x="11521440" y="6446520"/>
-            <a:ext cx="456480" cy="273600"/>
+            <a:ext cx="455760" cy="272880"/>
           </a:xfrm>
           <a:prstGeom prst="rect">
             <a:avLst/>
@@ -33923,7 +34111,7 @@
         <p:spPr>
           <a:xfrm>
             <a:off x="-1828800" y="5120640"/>
-            <a:ext cx="3656880" cy="3656880"/>
+            <a:ext cx="3656160" cy="3656160"/>
           </a:xfrm>
           <a:prstGeom prst="ellipse">
             <a:avLst/>
@@ -33966,7 +34154,7 @@
         <p:spPr>
           <a:xfrm>
             <a:off x="457200" y="457200"/>
-            <a:ext cx="639360" cy="639360"/>
+            <a:ext cx="638640" cy="638640"/>
           </a:xfrm>
           <a:prstGeom prst="ellipse">
             <a:avLst/>
@@ -34013,7 +34201,7 @@
         <p:spPr>
           <a:xfrm>
             <a:off x="553320" y="553320"/>
-            <a:ext cx="447480" cy="447480"/>
+            <a:ext cx="446760" cy="446760"/>
           </a:xfrm>
           <a:prstGeom prst="rect">
             <a:avLst/>
@@ -34033,7 +34221,7 @@
         <p:spPr>
           <a:xfrm>
             <a:off x="1280160" y="457200"/>
-            <a:ext cx="10423440" cy="639360"/>
+            <a:ext cx="10422720" cy="638640"/>
           </a:xfrm>
           <a:prstGeom prst="rect">
             <a:avLst/>
@@ -34094,7 +34282,7 @@
         <p:spPr>
           <a:xfrm>
             <a:off x="548640" y="1828800"/>
-            <a:ext cx="4754160" cy="4022640"/>
+            <a:ext cx="4753440" cy="4021920"/>
           </a:xfrm>
           <a:prstGeom prst="rect">
             <a:avLst/>
@@ -34230,7 +34418,7 @@
         <p:spPr>
           <a:xfrm>
             <a:off x="5486400" y="1691640"/>
-            <a:ext cx="6217200" cy="4342680"/>
+            <a:ext cx="6216480" cy="4341960"/>
           </a:xfrm>
           <a:prstGeom prst="roundRect">
             <a:avLst>
@@ -34275,7 +34463,7 @@
         <p:spPr>
           <a:xfrm>
             <a:off x="5806440" y="1965960"/>
-            <a:ext cx="5577120" cy="3794040"/>
+            <a:ext cx="5576400" cy="3793320"/>
           </a:xfrm>
           <a:prstGeom prst="rect">
             <a:avLst/>
@@ -34546,7 +34734,7 @@
         <p:spPr>
           <a:xfrm>
             <a:off x="457200" y="6446520"/>
-            <a:ext cx="6400080" cy="273600"/>
+            <a:ext cx="6399360" cy="272880"/>
           </a:xfrm>
           <a:prstGeom prst="rect">
             <a:avLst/>
@@ -34607,7 +34795,7 @@
         <p:spPr>
           <a:xfrm>
             <a:off x="11521440" y="6446520"/>
-            <a:ext cx="456480" cy="273600"/>
+            <a:ext cx="455760" cy="272880"/>
           </a:xfrm>
           <a:prstGeom prst="rect">
             <a:avLst/>
@@ -34705,7 +34893,7 @@
         <p:spPr>
           <a:xfrm>
             <a:off x="457200" y="457200"/>
-            <a:ext cx="639360" cy="639360"/>
+            <a:ext cx="638640" cy="638640"/>
           </a:xfrm>
           <a:prstGeom prst="ellipse">
             <a:avLst/>
@@ -34752,7 +34940,7 @@
         <p:spPr>
           <a:xfrm>
             <a:off x="553320" y="553320"/>
-            <a:ext cx="447480" cy="447480"/>
+            <a:ext cx="446760" cy="446760"/>
           </a:xfrm>
           <a:prstGeom prst="rect">
             <a:avLst/>
@@ -34772,7 +34960,7 @@
         <p:spPr>
           <a:xfrm>
             <a:off x="1280160" y="457200"/>
-            <a:ext cx="10423440" cy="639360"/>
+            <a:ext cx="10422720" cy="638640"/>
           </a:xfrm>
           <a:prstGeom prst="rect">
             <a:avLst/>
@@ -34833,7 +35021,7 @@
         <p:spPr>
           <a:xfrm>
             <a:off x="548640" y="1417320"/>
-            <a:ext cx="11090880" cy="502200"/>
+            <a:ext cx="11090160" cy="501480"/>
           </a:xfrm>
           <a:prstGeom prst="roundRect">
             <a:avLst>
@@ -34878,7 +35066,7 @@
         <p:spPr>
           <a:xfrm>
             <a:off x="731520" y="1417320"/>
-            <a:ext cx="10725120" cy="502200"/>
+            <a:ext cx="10724400" cy="501480"/>
           </a:xfrm>
           <a:prstGeom prst="rect">
             <a:avLst/>
@@ -34939,7 +35127,7 @@
         <p:spPr>
           <a:xfrm>
             <a:off x="2743200" y="2743200"/>
-            <a:ext cx="1828080" cy="621000"/>
+            <a:ext cx="1827360" cy="620280"/>
           </a:xfrm>
           <a:prstGeom prst="roundRect">
             <a:avLst>
@@ -34987,7 +35175,7 @@
         <p:spPr>
           <a:xfrm>
             <a:off x="2743200" y="2743200"/>
-            <a:ext cx="1828080" cy="621000"/>
+            <a:ext cx="1827360" cy="620280"/>
           </a:xfrm>
           <a:prstGeom prst="rect">
             <a:avLst/>
@@ -35048,7 +35236,7 @@
         <p:spPr>
           <a:xfrm>
             <a:off x="2743200" y="2450520"/>
-            <a:ext cx="1828080" cy="273600"/>
+            <a:ext cx="1827360" cy="272880"/>
           </a:xfrm>
           <a:prstGeom prst="rect">
             <a:avLst/>
@@ -35109,7 +35297,7 @@
         <p:spPr>
           <a:xfrm>
             <a:off x="4626720" y="2743200"/>
-            <a:ext cx="1828080" cy="621000"/>
+            <a:ext cx="1827360" cy="620280"/>
           </a:xfrm>
           <a:prstGeom prst="roundRect">
             <a:avLst>
@@ -35157,7 +35345,7 @@
         <p:spPr>
           <a:xfrm>
             <a:off x="4626720" y="2743200"/>
-            <a:ext cx="1828080" cy="621000"/>
+            <a:ext cx="1827360" cy="620280"/>
           </a:xfrm>
           <a:prstGeom prst="rect">
             <a:avLst/>
@@ -35218,7 +35406,7 @@
         <p:spPr>
           <a:xfrm>
             <a:off x="6510600" y="2743200"/>
-            <a:ext cx="1828080" cy="621000"/>
+            <a:ext cx="1827360" cy="620280"/>
           </a:xfrm>
           <a:prstGeom prst="roundRect">
             <a:avLst>
@@ -35266,7 +35454,7 @@
         <p:spPr>
           <a:xfrm>
             <a:off x="6510600" y="2743200"/>
-            <a:ext cx="1828080" cy="621000"/>
+            <a:ext cx="1827360" cy="620280"/>
           </a:xfrm>
           <a:prstGeom prst="rect">
             <a:avLst/>
@@ -35327,7 +35515,7 @@
         <p:spPr>
           <a:xfrm>
             <a:off x="548640" y="4206240"/>
-            <a:ext cx="11090880" cy="1462320"/>
+            <a:ext cx="11090160" cy="1461600"/>
           </a:xfrm>
           <a:prstGeom prst="rect">
             <a:avLst/>
@@ -35463,7 +35651,7 @@
         <p:spPr>
           <a:xfrm>
             <a:off x="457200" y="6446520"/>
-            <a:ext cx="6400080" cy="273600"/>
+            <a:ext cx="6399360" cy="272880"/>
           </a:xfrm>
           <a:prstGeom prst="rect">
             <a:avLst/>
@@ -35524,7 +35712,7 @@
         <p:spPr>
           <a:xfrm>
             <a:off x="11521440" y="6446520"/>
-            <a:ext cx="456480" cy="273600"/>
+            <a:ext cx="455760" cy="272880"/>
           </a:xfrm>
           <a:prstGeom prst="rect">
             <a:avLst/>
@@ -35622,7 +35810,7 @@
         <p:spPr>
           <a:xfrm>
             <a:off x="-1828800" y="5120640"/>
-            <a:ext cx="3656880" cy="3656880"/>
+            <a:ext cx="3656160" cy="3656160"/>
           </a:xfrm>
           <a:prstGeom prst="ellipse">
             <a:avLst/>
@@ -35665,7 +35853,7 @@
         <p:spPr>
           <a:xfrm>
             <a:off x="457200" y="457200"/>
-            <a:ext cx="639360" cy="639360"/>
+            <a:ext cx="638640" cy="638640"/>
           </a:xfrm>
           <a:prstGeom prst="ellipse">
             <a:avLst/>
@@ -35712,7 +35900,7 @@
         <p:spPr>
           <a:xfrm>
             <a:off x="553320" y="553320"/>
-            <a:ext cx="447480" cy="447480"/>
+            <a:ext cx="446760" cy="446760"/>
           </a:xfrm>
           <a:prstGeom prst="rect">
             <a:avLst/>
@@ -35732,7 +35920,7 @@
         <p:spPr>
           <a:xfrm>
             <a:off x="1280160" y="457200"/>
-            <a:ext cx="10423440" cy="639360"/>
+            <a:ext cx="10422720" cy="638640"/>
           </a:xfrm>
           <a:prstGeom prst="rect">
             <a:avLst/>
@@ -35793,7 +35981,7 @@
         <p:spPr>
           <a:xfrm>
             <a:off x="548640" y="1828800"/>
-            <a:ext cx="4754160" cy="4022640"/>
+            <a:ext cx="4753440" cy="4021920"/>
           </a:xfrm>
           <a:prstGeom prst="rect">
             <a:avLst/>
@@ -35929,7 +36117,7 @@
         <p:spPr>
           <a:xfrm>
             <a:off x="5486400" y="1691640"/>
-            <a:ext cx="6217200" cy="4342680"/>
+            <a:ext cx="6216480" cy="4341960"/>
           </a:xfrm>
           <a:prstGeom prst="roundRect">
             <a:avLst>
@@ -35974,7 +36162,7 @@
         <p:spPr>
           <a:xfrm>
             <a:off x="5806440" y="1965960"/>
-            <a:ext cx="5577120" cy="3794040"/>
+            <a:ext cx="5576400" cy="3793320"/>
           </a:xfrm>
           <a:prstGeom prst="rect">
             <a:avLst/>
@@ -36275,7 +36463,7 @@
         <p:spPr>
           <a:xfrm>
             <a:off x="457200" y="6446520"/>
-            <a:ext cx="6400080" cy="273600"/>
+            <a:ext cx="6399360" cy="272880"/>
           </a:xfrm>
           <a:prstGeom prst="rect">
             <a:avLst/>
@@ -36336,7 +36524,7 @@
         <p:spPr>
           <a:xfrm>
             <a:off x="11521440" y="6446520"/>
-            <a:ext cx="456480" cy="273600"/>
+            <a:ext cx="455760" cy="272880"/>
           </a:xfrm>
           <a:prstGeom prst="rect">
             <a:avLst/>
@@ -36434,7 +36622,7 @@
         <p:spPr>
           <a:xfrm>
             <a:off x="-1828800" y="5120640"/>
-            <a:ext cx="3656880" cy="3656880"/>
+            <a:ext cx="3656160" cy="3656160"/>
           </a:xfrm>
           <a:prstGeom prst="ellipse">
             <a:avLst/>
@@ -36477,7 +36665,7 @@
         <p:spPr>
           <a:xfrm>
             <a:off x="457200" y="457200"/>
-            <a:ext cx="639360" cy="639360"/>
+            <a:ext cx="638640" cy="638640"/>
           </a:xfrm>
           <a:prstGeom prst="ellipse">
             <a:avLst/>
@@ -36524,7 +36712,7 @@
         <p:spPr>
           <a:xfrm>
             <a:off x="553320" y="553320"/>
-            <a:ext cx="447480" cy="447480"/>
+            <a:ext cx="446760" cy="446760"/>
           </a:xfrm>
           <a:prstGeom prst="rect">
             <a:avLst/>
@@ -36544,7 +36732,7 @@
         <p:spPr>
           <a:xfrm>
             <a:off x="1280160" y="457200"/>
-            <a:ext cx="10423440" cy="639360"/>
+            <a:ext cx="10422720" cy="638640"/>
           </a:xfrm>
           <a:prstGeom prst="rect">
             <a:avLst/>
@@ -36605,7 +36793,7 @@
         <p:spPr>
           <a:xfrm>
             <a:off x="548640" y="1828800"/>
-            <a:ext cx="4754160" cy="4022640"/>
+            <a:ext cx="4753440" cy="4021920"/>
           </a:xfrm>
           <a:prstGeom prst="rect">
             <a:avLst/>
@@ -36741,7 +36929,7 @@
         <p:spPr>
           <a:xfrm>
             <a:off x="5486400" y="1691640"/>
-            <a:ext cx="6217200" cy="4342680"/>
+            <a:ext cx="6216480" cy="4341960"/>
           </a:xfrm>
           <a:prstGeom prst="roundRect">
             <a:avLst>
@@ -36786,7 +36974,7 @@
         <p:spPr>
           <a:xfrm>
             <a:off x="5806440" y="1965960"/>
-            <a:ext cx="5577120" cy="3794040"/>
+            <a:ext cx="5576400" cy="3793320"/>
           </a:xfrm>
           <a:prstGeom prst="rect">
             <a:avLst/>
@@ -37057,7 +37245,7 @@
         <p:spPr>
           <a:xfrm>
             <a:off x="457200" y="6446520"/>
-            <a:ext cx="6400080" cy="273600"/>
+            <a:ext cx="6399360" cy="272880"/>
           </a:xfrm>
           <a:prstGeom prst="rect">
             <a:avLst/>
@@ -37118,7 +37306,7 @@
         <p:spPr>
           <a:xfrm>
             <a:off x="11521440" y="6446520"/>
-            <a:ext cx="456480" cy="273600"/>
+            <a:ext cx="455760" cy="272880"/>
           </a:xfrm>
           <a:prstGeom prst="rect">
             <a:avLst/>
@@ -37216,7 +37404,7 @@
         <p:spPr>
           <a:xfrm>
             <a:off x="-1828800" y="5120640"/>
-            <a:ext cx="3656880" cy="3656880"/>
+            <a:ext cx="3656160" cy="3656160"/>
           </a:xfrm>
           <a:prstGeom prst="ellipse">
             <a:avLst/>
@@ -37259,7 +37447,7 @@
         <p:spPr>
           <a:xfrm>
             <a:off x="457200" y="457200"/>
-            <a:ext cx="639360" cy="639360"/>
+            <a:ext cx="638640" cy="638640"/>
           </a:xfrm>
           <a:prstGeom prst="ellipse">
             <a:avLst/>
@@ -37306,7 +37494,7 @@
         <p:spPr>
           <a:xfrm>
             <a:off x="553320" y="553320"/>
-            <a:ext cx="447480" cy="447480"/>
+            <a:ext cx="446760" cy="446760"/>
           </a:xfrm>
           <a:prstGeom prst="rect">
             <a:avLst/>
@@ -37326,7 +37514,7 @@
         <p:spPr>
           <a:xfrm>
             <a:off x="1280160" y="457200"/>
-            <a:ext cx="10423440" cy="639360"/>
+            <a:ext cx="10422720" cy="638640"/>
           </a:xfrm>
           <a:prstGeom prst="rect">
             <a:avLst/>
@@ -37387,7 +37575,7 @@
         <p:spPr>
           <a:xfrm>
             <a:off x="548640" y="1828800"/>
-            <a:ext cx="4754160" cy="4022640"/>
+            <a:ext cx="4753440" cy="4021920"/>
           </a:xfrm>
           <a:prstGeom prst="rect">
             <a:avLst/>
@@ -37523,7 +37711,7 @@
         <p:spPr>
           <a:xfrm>
             <a:off x="5486400" y="1691640"/>
-            <a:ext cx="6217200" cy="4342680"/>
+            <a:ext cx="6216480" cy="4341960"/>
           </a:xfrm>
           <a:prstGeom prst="roundRect">
             <a:avLst>
@@ -37568,7 +37756,7 @@
         <p:spPr>
           <a:xfrm>
             <a:off x="5806440" y="1965960"/>
-            <a:ext cx="5577120" cy="3794040"/>
+            <a:ext cx="5576400" cy="3793320"/>
           </a:xfrm>
           <a:prstGeom prst="rect">
             <a:avLst/>
@@ -37839,7 +38027,7 @@
         <p:spPr>
           <a:xfrm>
             <a:off x="457200" y="6446520"/>
-            <a:ext cx="6400080" cy="273600"/>
+            <a:ext cx="6399360" cy="272880"/>
           </a:xfrm>
           <a:prstGeom prst="rect">
             <a:avLst/>
@@ -37900,7 +38088,7 @@
         <p:spPr>
           <a:xfrm>
             <a:off x="11521440" y="6446520"/>
-            <a:ext cx="456480" cy="273600"/>
+            <a:ext cx="455760" cy="272880"/>
           </a:xfrm>
           <a:prstGeom prst="rect">
             <a:avLst/>

--- a/slides/1_python_slides/5_loops.pptx
+++ b/slides/1_python_slides/5_loops.pptx
@@ -158,7 +158,117 @@
                 <a:uFillTx/>
                 <a:latin typeface="Arial"/>
               </a:rPr>
-              <a:t>Click to edit the notes format</a:t>
+              <a:t>Cli</a:t>
+            </a:r>
+            <a:r>
+              <a:rPr lang="en-US" sz="2000" b="0" u="none" strike="noStrike">
+                <a:solidFill>
+                  <a:srgbClr val="000000"/>
+                </a:solidFill>
+                <a:effectLst/>
+                <a:uFillTx/>
+                <a:latin typeface="Arial"/>
+              </a:rPr>
+              <a:t>ck </a:t>
+            </a:r>
+            <a:r>
+              <a:rPr lang="en-US" sz="2000" b="0" u="none" strike="noStrike">
+                <a:solidFill>
+                  <a:srgbClr val="000000"/>
+                </a:solidFill>
+                <a:effectLst/>
+                <a:uFillTx/>
+                <a:latin typeface="Arial"/>
+              </a:rPr>
+              <a:t>to </a:t>
+            </a:r>
+            <a:r>
+              <a:rPr lang="en-US" sz="2000" b="0" u="none" strike="noStrike">
+                <a:solidFill>
+                  <a:srgbClr val="000000"/>
+                </a:solidFill>
+                <a:effectLst/>
+                <a:uFillTx/>
+                <a:latin typeface="Arial"/>
+              </a:rPr>
+              <a:t>edi</a:t>
+            </a:r>
+            <a:r>
+              <a:rPr lang="en-US" sz="2000" b="0" u="none" strike="noStrike">
+                <a:solidFill>
+                  <a:srgbClr val="000000"/>
+                </a:solidFill>
+                <a:effectLst/>
+                <a:uFillTx/>
+                <a:latin typeface="Arial"/>
+              </a:rPr>
+              <a:t>t </a:t>
+            </a:r>
+            <a:r>
+              <a:rPr lang="en-US" sz="2000" b="0" u="none" strike="noStrike">
+                <a:solidFill>
+                  <a:srgbClr val="000000"/>
+                </a:solidFill>
+                <a:effectLst/>
+                <a:uFillTx/>
+                <a:latin typeface="Arial"/>
+              </a:rPr>
+              <a:t>the </a:t>
+            </a:r>
+            <a:r>
+              <a:rPr lang="en-US" sz="2000" b="0" u="none" strike="noStrike">
+                <a:solidFill>
+                  <a:srgbClr val="000000"/>
+                </a:solidFill>
+                <a:effectLst/>
+                <a:uFillTx/>
+                <a:latin typeface="Arial"/>
+              </a:rPr>
+              <a:t>not</a:t>
+            </a:r>
+            <a:r>
+              <a:rPr lang="en-US" sz="2000" b="0" u="none" strike="noStrike">
+                <a:solidFill>
+                  <a:srgbClr val="000000"/>
+                </a:solidFill>
+                <a:effectLst/>
+                <a:uFillTx/>
+                <a:latin typeface="Arial"/>
+              </a:rPr>
+              <a:t>es </a:t>
+            </a:r>
+            <a:r>
+              <a:rPr lang="en-US" sz="2000" b="0" u="none" strike="noStrike">
+                <a:solidFill>
+                  <a:srgbClr val="000000"/>
+                </a:solidFill>
+                <a:effectLst/>
+                <a:uFillTx/>
+                <a:latin typeface="Arial"/>
+              </a:rPr>
+              <a:t>for</a:t>
+            </a:r>
+            <a:r>
+              <a:rPr lang="en-US" sz="2000" b="0" u="none" strike="noStrike">
+                <a:solidFill>
+                  <a:srgbClr val="000000"/>
+                </a:solidFill>
+                <a:effectLst/>
+                <a:uFillTx/>
+                <a:latin typeface="Arial"/>
+              </a:rPr>
+              <a:t>ma</a:t>
+            </a:r>
+            <a:r>
+              <a:rPr lang="en-US" sz="2000" b="0" u="none" strike="noStrike">
+                <a:solidFill>
+                  <a:srgbClr val="000000"/>
+                </a:solidFill>
+                <a:effectLst/>
+                <a:uFillTx/>
+                <a:latin typeface="Arial"/>
+              </a:rPr>
+              <a:t>t</a:t>
             </a:r>
             <a:endParaRPr lang="en-US" sz="2000" b="0" u="none" strike="noStrike">
               <a:solidFill>
@@ -400,7 +510,7 @@
             <a:pPr indent="0" algn="r">
               <a:buNone/>
             </a:pPr>
-            <a:fld id="{78CD5037-CE89-46F3-958E-60D8402BB1EC}" type="slidenum">
+            <a:fld id="{3AF84F67-6AAA-410A-B797-863AFD07B16B}" type="slidenum">
               <a:rPr lang="en-US" sz="1400" b="0" u="none" strike="noStrike">
                 <a:solidFill>
                   <a:srgbClr val="000000"/>
@@ -458,7 +568,7 @@
         <p:spPr>
           <a:xfrm>
             <a:off x="685800" y="1143000"/>
-            <a:ext cx="5484960" cy="3084840"/>
+            <a:ext cx="5484240" cy="3084120"/>
           </a:xfrm>
           <a:prstGeom prst="rect">
             <a:avLst/>
@@ -481,7 +591,7 @@
         <p:spPr>
           <a:xfrm>
             <a:off x="685800" y="4400640"/>
-            <a:ext cx="5484960" cy="3598920"/>
+            <a:ext cx="5484240" cy="3598200"/>
           </a:xfrm>
           <a:prstGeom prst="rect">
             <a:avLst/>
@@ -540,7 +650,7 @@
         <p:spPr>
           <a:xfrm>
             <a:off x="3884760" y="8685360"/>
-            <a:ext cx="2970360" cy="457200"/>
+            <a:ext cx="2969640" cy="456480"/>
           </a:xfrm>
           <a:prstGeom prst="rect">
             <a:avLst/>
@@ -584,7 +694,7 @@
                 <a:tab pos="0" algn="l"/>
               </a:tabLst>
             </a:pPr>
-            <a:fld id="{C76B02D1-4F5F-4661-92AE-A1A2689DF263}" type="slidenum">
+            <a:fld id="{054F83D8-1A08-4F36-BBEA-1E1A4613E367}" type="slidenum">
               <a:rPr lang="en-US" sz="1200" b="0" u="none" strike="noStrike">
                 <a:solidFill>
                   <a:schemeClr val="dk1"/>
@@ -594,7 +704,7 @@
                 <a:latin typeface="+mn-lt"/>
                 <a:ea typeface="+mn-ea"/>
               </a:rPr>
-              <a:t>1</a:t>
+              <a:t>&lt;number&gt;</a:t>
             </a:fld>
             <a:endParaRPr lang="en-US" sz="1200" b="0" u="none" strike="noStrike">
               <a:solidFill>
@@ -642,7 +752,7 @@
         <p:spPr>
           <a:xfrm>
             <a:off x="685800" y="1143000"/>
-            <a:ext cx="5484960" cy="3084840"/>
+            <a:ext cx="5484240" cy="3084120"/>
           </a:xfrm>
           <a:prstGeom prst="rect">
             <a:avLst/>
@@ -665,7 +775,7 @@
         <p:spPr>
           <a:xfrm>
             <a:off x="685800" y="4400640"/>
-            <a:ext cx="5484960" cy="3598920"/>
+            <a:ext cx="5484240" cy="3598200"/>
           </a:xfrm>
           <a:prstGeom prst="rect">
             <a:avLst/>
@@ -724,7 +834,7 @@
         <p:spPr>
           <a:xfrm>
             <a:off x="3884760" y="8685360"/>
-            <a:ext cx="2970360" cy="457200"/>
+            <a:ext cx="2969640" cy="456480"/>
           </a:xfrm>
           <a:prstGeom prst="rect">
             <a:avLst/>
@@ -768,7 +878,7 @@
                 <a:tab pos="0" algn="l"/>
               </a:tabLst>
             </a:pPr>
-            <a:fld id="{7E623D86-40E8-40F3-8F46-1C9E65768E91}" type="slidenum">
+            <a:fld id="{20C06A7A-1538-4F21-B1B2-FA4FBC163D63}" type="slidenum">
               <a:rPr lang="en-US" sz="1200" b="0" u="none" strike="noStrike">
                 <a:solidFill>
                   <a:schemeClr val="dk1"/>
@@ -778,7 +888,7 @@
                 <a:latin typeface="+mn-lt"/>
                 <a:ea typeface="+mn-ea"/>
               </a:rPr>
-              <a:t>1</a:t>
+              <a:t>&lt;number&gt;</a:t>
             </a:fld>
             <a:endParaRPr lang="en-US" sz="1200" b="0" u="none" strike="noStrike">
               <a:solidFill>
@@ -826,7 +936,7 @@
         <p:spPr>
           <a:xfrm>
             <a:off x="685800" y="1143000"/>
-            <a:ext cx="5484960" cy="3084840"/>
+            <a:ext cx="5484240" cy="3084120"/>
           </a:xfrm>
           <a:prstGeom prst="rect">
             <a:avLst/>
@@ -849,7 +959,7 @@
         <p:spPr>
           <a:xfrm>
             <a:off x="685800" y="4400640"/>
-            <a:ext cx="5484960" cy="3598920"/>
+            <a:ext cx="5484240" cy="3598200"/>
           </a:xfrm>
           <a:prstGeom prst="rect">
             <a:avLst/>
@@ -908,7 +1018,7 @@
         <p:spPr>
           <a:xfrm>
             <a:off x="3884760" y="8685360"/>
-            <a:ext cx="2970360" cy="457200"/>
+            <a:ext cx="2969640" cy="456480"/>
           </a:xfrm>
           <a:prstGeom prst="rect">
             <a:avLst/>
@@ -952,7 +1062,7 @@
                 <a:tab pos="0" algn="l"/>
               </a:tabLst>
             </a:pPr>
-            <a:fld id="{92DB00FD-DFF1-4EAB-8C62-ECBD9CBCBEEA}" type="slidenum">
+            <a:fld id="{63AAE0D6-B0C3-42EB-8FD0-E78ACBC0A581}" type="slidenum">
               <a:rPr lang="en-US" sz="1200" b="0" u="none" strike="noStrike">
                 <a:solidFill>
                   <a:schemeClr val="dk1"/>
@@ -962,7 +1072,7 @@
                 <a:latin typeface="+mn-lt"/>
                 <a:ea typeface="+mn-ea"/>
               </a:rPr>
-              <a:t>1</a:t>
+              <a:t>&lt;number&gt;</a:t>
             </a:fld>
             <a:endParaRPr lang="en-US" sz="1200" b="0" u="none" strike="noStrike">
               <a:solidFill>
@@ -1010,7 +1120,7 @@
         <p:spPr>
           <a:xfrm>
             <a:off x="685800" y="1143000"/>
-            <a:ext cx="5484960" cy="3084840"/>
+            <a:ext cx="5484240" cy="3084120"/>
           </a:xfrm>
           <a:prstGeom prst="rect">
             <a:avLst/>
@@ -1033,7 +1143,7 @@
         <p:spPr>
           <a:xfrm>
             <a:off x="685800" y="4400640"/>
-            <a:ext cx="5484960" cy="3598920"/>
+            <a:ext cx="5484240" cy="3598200"/>
           </a:xfrm>
           <a:prstGeom prst="rect">
             <a:avLst/>
@@ -1075,7 +1185,7 @@
         <p:spPr>
           <a:xfrm>
             <a:off x="3884760" y="8685360"/>
-            <a:ext cx="2970360" cy="457200"/>
+            <a:ext cx="2969640" cy="456480"/>
           </a:xfrm>
           <a:prstGeom prst="rect">
             <a:avLst/>
@@ -1119,7 +1229,7 @@
                 <a:tab pos="0" algn="l"/>
               </a:tabLst>
             </a:pPr>
-            <a:fld id="{4EE19829-5739-4FD3-B3B9-FF0C92F5857F}" type="slidenum">
+            <a:fld id="{E2B08DC5-25EE-48A9-BCEF-0A463240060A}" type="slidenum">
               <a:rPr lang="en-US" sz="1200" b="0" u="none" strike="noStrike">
                 <a:solidFill>
                   <a:schemeClr val="dk1"/>
@@ -1129,7 +1239,7 @@
                 <a:latin typeface="+mn-lt"/>
                 <a:ea typeface="+mn-ea"/>
               </a:rPr>
-              <a:t>1</a:t>
+              <a:t>&lt;number&gt;</a:t>
             </a:fld>
             <a:endParaRPr lang="en-US" sz="1200" b="0" u="none" strike="noStrike">
               <a:solidFill>
@@ -1177,7 +1287,7 @@
         <p:spPr>
           <a:xfrm>
             <a:off x="685800" y="1143000"/>
-            <a:ext cx="5484960" cy="3084840"/>
+            <a:ext cx="5484240" cy="3084120"/>
           </a:xfrm>
           <a:prstGeom prst="rect">
             <a:avLst/>
@@ -1200,7 +1310,7 @@
         <p:spPr>
           <a:xfrm>
             <a:off x="685800" y="4400640"/>
-            <a:ext cx="5484960" cy="3598920"/>
+            <a:ext cx="5484240" cy="3598200"/>
           </a:xfrm>
           <a:prstGeom prst="rect">
             <a:avLst/>
@@ -1242,7 +1352,7 @@
         <p:spPr>
           <a:xfrm>
             <a:off x="3884760" y="8685360"/>
-            <a:ext cx="2970360" cy="457200"/>
+            <a:ext cx="2969640" cy="456480"/>
           </a:xfrm>
           <a:prstGeom prst="rect">
             <a:avLst/>
@@ -1286,7 +1396,7 @@
                 <a:tab pos="0" algn="l"/>
               </a:tabLst>
             </a:pPr>
-            <a:fld id="{4050DA91-7FB6-455F-9C13-1C88619EBC8A}" type="slidenum">
+            <a:fld id="{E378DB61-A66C-4DA5-985B-33F550E06D7A}" type="slidenum">
               <a:rPr lang="en-US" sz="1200" b="0" u="none" strike="noStrike">
                 <a:solidFill>
                   <a:schemeClr val="dk1"/>
@@ -1296,7 +1406,7 @@
                 <a:latin typeface="+mn-lt"/>
                 <a:ea typeface="+mn-ea"/>
               </a:rPr>
-              <a:t>1</a:t>
+              <a:t>&lt;number&gt;</a:t>
             </a:fld>
             <a:endParaRPr lang="en-US" sz="1200" b="0" u="none" strike="noStrike">
               <a:solidFill>
@@ -1344,7 +1454,7 @@
         <p:spPr>
           <a:xfrm>
             <a:off x="685800" y="1143000"/>
-            <a:ext cx="5484960" cy="3084840"/>
+            <a:ext cx="5484240" cy="3084120"/>
           </a:xfrm>
           <a:prstGeom prst="rect">
             <a:avLst/>
@@ -1367,7 +1477,7 @@
         <p:spPr>
           <a:xfrm>
             <a:off x="685800" y="4400640"/>
-            <a:ext cx="5484960" cy="3598920"/>
+            <a:ext cx="5484240" cy="3598200"/>
           </a:xfrm>
           <a:prstGeom prst="rect">
             <a:avLst/>
@@ -1409,7 +1519,7 @@
         <p:spPr>
           <a:xfrm>
             <a:off x="3884760" y="8685360"/>
-            <a:ext cx="2970360" cy="457200"/>
+            <a:ext cx="2969640" cy="456480"/>
           </a:xfrm>
           <a:prstGeom prst="rect">
             <a:avLst/>
@@ -1453,7 +1563,7 @@
                 <a:tab pos="0" algn="l"/>
               </a:tabLst>
             </a:pPr>
-            <a:fld id="{47092CFC-3E3A-43A5-8EEF-4BCA15E0E64E}" type="slidenum">
+            <a:fld id="{FBB553B3-88A8-425B-A299-2CE9BC29C550}" type="slidenum">
               <a:rPr lang="en-US" sz="1200" b="0" u="none" strike="noStrike">
                 <a:solidFill>
                   <a:schemeClr val="dk1"/>
@@ -1463,7 +1573,7 @@
                 <a:latin typeface="+mn-lt"/>
                 <a:ea typeface="+mn-ea"/>
               </a:rPr>
-              <a:t>1</a:t>
+              <a:t>&lt;number&gt;</a:t>
             </a:fld>
             <a:endParaRPr lang="en-US" sz="1200" b="0" u="none" strike="noStrike">
               <a:solidFill>
@@ -1511,7 +1621,7 @@
         <p:spPr>
           <a:xfrm>
             <a:off x="685800" y="1143000"/>
-            <a:ext cx="5484960" cy="3084840"/>
+            <a:ext cx="5484240" cy="3084120"/>
           </a:xfrm>
           <a:prstGeom prst="rect">
             <a:avLst/>
@@ -1534,7 +1644,7 @@
         <p:spPr>
           <a:xfrm>
             <a:off x="685800" y="4400640"/>
-            <a:ext cx="5484960" cy="3598920"/>
+            <a:ext cx="5484240" cy="3598200"/>
           </a:xfrm>
           <a:prstGeom prst="rect">
             <a:avLst/>
@@ -1576,7 +1686,7 @@
         <p:spPr>
           <a:xfrm>
             <a:off x="3884760" y="8685360"/>
-            <a:ext cx="2970360" cy="457200"/>
+            <a:ext cx="2969640" cy="456480"/>
           </a:xfrm>
           <a:prstGeom prst="rect">
             <a:avLst/>
@@ -1620,7 +1730,7 @@
                 <a:tab pos="0" algn="l"/>
               </a:tabLst>
             </a:pPr>
-            <a:fld id="{A9B8C7FB-262A-4A70-AEB1-B30D82E75E28}" type="slidenum">
+            <a:fld id="{729AF0B1-4369-4118-829D-5172F97E990E}" type="slidenum">
               <a:rPr lang="en-US" sz="1200" b="0" u="none" strike="noStrike">
                 <a:solidFill>
                   <a:schemeClr val="dk1"/>
@@ -1630,7 +1740,7 @@
                 <a:latin typeface="+mn-lt"/>
                 <a:ea typeface="+mn-ea"/>
               </a:rPr>
-              <a:t>1</a:t>
+              <a:t>&lt;number&gt;</a:t>
             </a:fld>
             <a:endParaRPr lang="en-US" sz="1200" b="0" u="none" strike="noStrike">
               <a:solidFill>
@@ -1678,7 +1788,7 @@
         <p:spPr>
           <a:xfrm>
             <a:off x="685800" y="1143000"/>
-            <a:ext cx="5484960" cy="3084840"/>
+            <a:ext cx="5484240" cy="3084120"/>
           </a:xfrm>
           <a:prstGeom prst="rect">
             <a:avLst/>
@@ -1701,7 +1811,7 @@
         <p:spPr>
           <a:xfrm>
             <a:off x="685800" y="4400640"/>
-            <a:ext cx="5484960" cy="3598920"/>
+            <a:ext cx="5484240" cy="3598200"/>
           </a:xfrm>
           <a:prstGeom prst="rect">
             <a:avLst/>
@@ -1760,7 +1870,7 @@
         <p:spPr>
           <a:xfrm>
             <a:off x="3884760" y="8685360"/>
-            <a:ext cx="2970360" cy="457200"/>
+            <a:ext cx="2969640" cy="456480"/>
           </a:xfrm>
           <a:prstGeom prst="rect">
             <a:avLst/>
@@ -1804,7 +1914,7 @@
                 <a:tab pos="0" algn="l"/>
               </a:tabLst>
             </a:pPr>
-            <a:fld id="{2A81BA3C-97C9-4459-8FE8-28466AB6DC7B}" type="slidenum">
+            <a:fld id="{E3B5174F-071F-4B98-BF96-90F1F62CE2F5}" type="slidenum">
               <a:rPr lang="en-US" sz="1200" b="0" u="none" strike="noStrike">
                 <a:solidFill>
                   <a:schemeClr val="dk1"/>
@@ -1814,7 +1924,7 @@
                 <a:latin typeface="+mn-lt"/>
                 <a:ea typeface="+mn-ea"/>
               </a:rPr>
-              <a:t>1</a:t>
+              <a:t>&lt;number&gt;</a:t>
             </a:fld>
             <a:endParaRPr lang="en-US" sz="1200" b="0" u="none" strike="noStrike">
               <a:solidFill>
@@ -1862,7 +1972,7 @@
         <p:spPr>
           <a:xfrm>
             <a:off x="685800" y="1143000"/>
-            <a:ext cx="5484960" cy="3084840"/>
+            <a:ext cx="5484240" cy="3084120"/>
           </a:xfrm>
           <a:prstGeom prst="rect">
             <a:avLst/>
@@ -1885,7 +1995,7 @@
         <p:spPr>
           <a:xfrm>
             <a:off x="685800" y="4400640"/>
-            <a:ext cx="5484960" cy="3598920"/>
+            <a:ext cx="5484240" cy="3598200"/>
           </a:xfrm>
           <a:prstGeom prst="rect">
             <a:avLst/>
@@ -1927,7 +2037,7 @@
         <p:spPr>
           <a:xfrm>
             <a:off x="3884760" y="8685360"/>
-            <a:ext cx="2970360" cy="457200"/>
+            <a:ext cx="2969640" cy="456480"/>
           </a:xfrm>
           <a:prstGeom prst="rect">
             <a:avLst/>
@@ -1971,7 +2081,7 @@
                 <a:tab pos="0" algn="l"/>
               </a:tabLst>
             </a:pPr>
-            <a:fld id="{49B1DBB8-D262-40DB-B0A4-EDAC126AC159}" type="slidenum">
+            <a:fld id="{BAD39E63-AB6F-43E4-B371-2B221F255C60}" type="slidenum">
               <a:rPr lang="en-US" sz="1200" b="0" u="none" strike="noStrike">
                 <a:solidFill>
                   <a:schemeClr val="dk1"/>
@@ -1981,7 +2091,7 @@
                 <a:latin typeface="+mn-lt"/>
                 <a:ea typeface="+mn-ea"/>
               </a:rPr>
-              <a:t>1</a:t>
+              <a:t>&lt;number&gt;</a:t>
             </a:fld>
             <a:endParaRPr lang="en-US" sz="1200" b="0" u="none" strike="noStrike">
               <a:solidFill>
@@ -2029,7 +2139,7 @@
         <p:spPr>
           <a:xfrm>
             <a:off x="685800" y="1143000"/>
-            <a:ext cx="5484960" cy="3084840"/>
+            <a:ext cx="5484240" cy="3084120"/>
           </a:xfrm>
           <a:prstGeom prst="rect">
             <a:avLst/>
@@ -2052,7 +2162,7 @@
         <p:spPr>
           <a:xfrm>
             <a:off x="685800" y="4400640"/>
-            <a:ext cx="5484960" cy="3598920"/>
+            <a:ext cx="5484240" cy="3598200"/>
           </a:xfrm>
           <a:prstGeom prst="rect">
             <a:avLst/>
@@ -2094,7 +2204,7 @@
         <p:spPr>
           <a:xfrm>
             <a:off x="3884760" y="8685360"/>
-            <a:ext cx="2970360" cy="457200"/>
+            <a:ext cx="2969640" cy="456480"/>
           </a:xfrm>
           <a:prstGeom prst="rect">
             <a:avLst/>
@@ -2138,7 +2248,7 @@
                 <a:tab pos="0" algn="l"/>
               </a:tabLst>
             </a:pPr>
-            <a:fld id="{65ECC5BF-0BE5-44C1-8BEC-E186B9BF18FD}" type="slidenum">
+            <a:fld id="{9BCCB586-B115-40C3-A2F1-313991AF9654}" type="slidenum">
               <a:rPr lang="en-US" sz="1200" b="0" u="none" strike="noStrike">
                 <a:solidFill>
                   <a:schemeClr val="dk1"/>
@@ -2148,7 +2258,7 @@
                 <a:latin typeface="+mn-lt"/>
                 <a:ea typeface="+mn-ea"/>
               </a:rPr>
-              <a:t>1</a:t>
+              <a:t>&lt;number&gt;</a:t>
             </a:fld>
             <a:endParaRPr lang="en-US" sz="1200" b="0" u="none" strike="noStrike">
               <a:solidFill>
@@ -2196,7 +2306,7 @@
         <p:spPr>
           <a:xfrm>
             <a:off x="685800" y="1143000"/>
-            <a:ext cx="5484960" cy="3084840"/>
+            <a:ext cx="5484240" cy="3084120"/>
           </a:xfrm>
           <a:prstGeom prst="rect">
             <a:avLst/>
@@ -2219,7 +2329,7 @@
         <p:spPr>
           <a:xfrm>
             <a:off x="685800" y="4400640"/>
-            <a:ext cx="5484960" cy="3598920"/>
+            <a:ext cx="5484240" cy="3598200"/>
           </a:xfrm>
           <a:prstGeom prst="rect">
             <a:avLst/>
@@ -2261,7 +2371,7 @@
         <p:spPr>
           <a:xfrm>
             <a:off x="3884760" y="8685360"/>
-            <a:ext cx="2970360" cy="457200"/>
+            <a:ext cx="2969640" cy="456480"/>
           </a:xfrm>
           <a:prstGeom prst="rect">
             <a:avLst/>
@@ -2305,7 +2415,7 @@
                 <a:tab pos="0" algn="l"/>
               </a:tabLst>
             </a:pPr>
-            <a:fld id="{707B41BD-96CA-4989-AE4E-2F53D4F31240}" type="slidenum">
+            <a:fld id="{D2634C3E-AE38-4140-A0FA-B41A8C13EA2C}" type="slidenum">
               <a:rPr lang="en-US" sz="1200" b="0" u="none" strike="noStrike">
                 <a:solidFill>
                   <a:schemeClr val="dk1"/>
@@ -2315,7 +2425,7 @@
                 <a:latin typeface="+mn-lt"/>
                 <a:ea typeface="+mn-ea"/>
               </a:rPr>
-              <a:t>1</a:t>
+              <a:t>&lt;number&gt;</a:t>
             </a:fld>
             <a:endParaRPr lang="en-US" sz="1200" b="0" u="none" strike="noStrike">
               <a:solidFill>
@@ -2363,7 +2473,7 @@
         <p:spPr>
           <a:xfrm>
             <a:off x="685800" y="1143000"/>
-            <a:ext cx="5484960" cy="3084840"/>
+            <a:ext cx="5484240" cy="3084120"/>
           </a:xfrm>
           <a:prstGeom prst="rect">
             <a:avLst/>
@@ -2386,7 +2496,7 @@
         <p:spPr>
           <a:xfrm>
             <a:off x="685800" y="4400640"/>
-            <a:ext cx="5484960" cy="3598920"/>
+            <a:ext cx="5484240" cy="3598200"/>
           </a:xfrm>
           <a:prstGeom prst="rect">
             <a:avLst/>
@@ -2428,7 +2538,7 @@
         <p:spPr>
           <a:xfrm>
             <a:off x="3884760" y="8685360"/>
-            <a:ext cx="2970360" cy="457200"/>
+            <a:ext cx="2969640" cy="456480"/>
           </a:xfrm>
           <a:prstGeom prst="rect">
             <a:avLst/>
@@ -2472,7 +2582,7 @@
                 <a:tab pos="0" algn="l"/>
               </a:tabLst>
             </a:pPr>
-            <a:fld id="{C3E30899-DFC3-4505-9A4B-73FDDE129912}" type="slidenum">
+            <a:fld id="{E74641F1-F922-4EF1-8FDD-9A4FC9DA7D5B}" type="slidenum">
               <a:rPr lang="en-US" sz="1200" b="0" u="none" strike="noStrike">
                 <a:solidFill>
                   <a:schemeClr val="dk1"/>
@@ -2482,7 +2592,7 @@
                 <a:latin typeface="+mn-lt"/>
                 <a:ea typeface="+mn-ea"/>
               </a:rPr>
-              <a:t>1</a:t>
+              <a:t>&lt;number&gt;</a:t>
             </a:fld>
             <a:endParaRPr lang="en-US" sz="1200" b="0" u="none" strike="noStrike">
               <a:solidFill>
@@ -2530,7 +2640,7 @@
         <p:spPr>
           <a:xfrm>
             <a:off x="685800" y="1143000"/>
-            <a:ext cx="5484960" cy="3084840"/>
+            <a:ext cx="5484240" cy="3084120"/>
           </a:xfrm>
           <a:prstGeom prst="rect">
             <a:avLst/>
@@ -2553,7 +2663,7 @@
         <p:spPr>
           <a:xfrm>
             <a:off x="685800" y="4400640"/>
-            <a:ext cx="5484960" cy="3598920"/>
+            <a:ext cx="5484240" cy="3598200"/>
           </a:xfrm>
           <a:prstGeom prst="rect">
             <a:avLst/>
@@ -2595,7 +2705,7 @@
         <p:spPr>
           <a:xfrm>
             <a:off x="3884760" y="8685360"/>
-            <a:ext cx="2970360" cy="457200"/>
+            <a:ext cx="2969640" cy="456480"/>
           </a:xfrm>
           <a:prstGeom prst="rect">
             <a:avLst/>
@@ -2639,7 +2749,7 @@
                 <a:tab pos="0" algn="l"/>
               </a:tabLst>
             </a:pPr>
-            <a:fld id="{3FF48C59-7798-409F-8292-B6D2DE13AB00}" type="slidenum">
+            <a:fld id="{AF56AA8C-7509-4B93-9481-9D2E0C3028F6}" type="slidenum">
               <a:rPr lang="en-US" sz="1200" b="0" u="none" strike="noStrike">
                 <a:solidFill>
                   <a:schemeClr val="dk1"/>
@@ -2649,7 +2759,7 @@
                 <a:latin typeface="+mn-lt"/>
                 <a:ea typeface="+mn-ea"/>
               </a:rPr>
-              <a:t>1</a:t>
+              <a:t>&lt;number&gt;</a:t>
             </a:fld>
             <a:endParaRPr lang="en-US" sz="1200" b="0" u="none" strike="noStrike">
               <a:solidFill>
@@ -2697,7 +2807,7 @@
         <p:spPr>
           <a:xfrm>
             <a:off x="685800" y="1143000"/>
-            <a:ext cx="5484960" cy="3084840"/>
+            <a:ext cx="5484240" cy="3084120"/>
           </a:xfrm>
           <a:prstGeom prst="rect">
             <a:avLst/>
@@ -2720,7 +2830,7 @@
         <p:spPr>
           <a:xfrm>
             <a:off x="685800" y="4400640"/>
-            <a:ext cx="5484960" cy="3598920"/>
+            <a:ext cx="5484240" cy="3598200"/>
           </a:xfrm>
           <a:prstGeom prst="rect">
             <a:avLst/>
@@ -2762,7 +2872,7 @@
         <p:spPr>
           <a:xfrm>
             <a:off x="3884760" y="8685360"/>
-            <a:ext cx="2970360" cy="457200"/>
+            <a:ext cx="2969640" cy="456480"/>
           </a:xfrm>
           <a:prstGeom prst="rect">
             <a:avLst/>
@@ -2806,7 +2916,7 @@
                 <a:tab pos="0" algn="l"/>
               </a:tabLst>
             </a:pPr>
-            <a:fld id="{23AF1B4E-7DA4-4149-8050-4BB47AAA8F8C}" type="slidenum">
+            <a:fld id="{B3A7B062-5049-4A3F-9188-12BE8078022E}" type="slidenum">
               <a:rPr lang="en-US" sz="1200" b="0" u="none" strike="noStrike">
                 <a:solidFill>
                   <a:schemeClr val="dk1"/>
@@ -2816,7 +2926,7 @@
                 <a:latin typeface="+mn-lt"/>
                 <a:ea typeface="+mn-ea"/>
               </a:rPr>
-              <a:t>1</a:t>
+              <a:t>&lt;number&gt;</a:t>
             </a:fld>
             <a:endParaRPr lang="en-US" sz="1200" b="0" u="none" strike="noStrike">
               <a:solidFill>
@@ -2864,7 +2974,7 @@
         <p:spPr>
           <a:xfrm>
             <a:off x="685800" y="1143000"/>
-            <a:ext cx="5484960" cy="3084840"/>
+            <a:ext cx="5484240" cy="3084120"/>
           </a:xfrm>
           <a:prstGeom prst="rect">
             <a:avLst/>
@@ -2887,7 +2997,7 @@
         <p:spPr>
           <a:xfrm>
             <a:off x="685800" y="4400640"/>
-            <a:ext cx="5484960" cy="3598920"/>
+            <a:ext cx="5484240" cy="3598200"/>
           </a:xfrm>
           <a:prstGeom prst="rect">
             <a:avLst/>
@@ -2929,7 +3039,7 @@
         <p:spPr>
           <a:xfrm>
             <a:off x="3884760" y="8685360"/>
-            <a:ext cx="2970360" cy="457200"/>
+            <a:ext cx="2969640" cy="456480"/>
           </a:xfrm>
           <a:prstGeom prst="rect">
             <a:avLst/>
@@ -2973,7 +3083,7 @@
                 <a:tab pos="0" algn="l"/>
               </a:tabLst>
             </a:pPr>
-            <a:fld id="{0CEA901D-F8EB-4A26-927D-4FCF8B3A4E9E}" type="slidenum">
+            <a:fld id="{4436871A-815A-4D0D-8A79-4537424BCA6C}" type="slidenum">
               <a:rPr lang="en-US" sz="1200" b="0" u="none" strike="noStrike">
                 <a:solidFill>
                   <a:schemeClr val="dk1"/>
@@ -2983,7 +3093,7 @@
                 <a:latin typeface="+mn-lt"/>
                 <a:ea typeface="+mn-ea"/>
               </a:rPr>
-              <a:t>1</a:t>
+              <a:t>&lt;number&gt;</a:t>
             </a:fld>
             <a:endParaRPr lang="en-US" sz="1200" b="0" u="none" strike="noStrike">
               <a:solidFill>
@@ -3031,7 +3141,7 @@
         <p:spPr>
           <a:xfrm>
             <a:off x="685800" y="1143000"/>
-            <a:ext cx="5484960" cy="3084840"/>
+            <a:ext cx="5484240" cy="3084120"/>
           </a:xfrm>
           <a:prstGeom prst="rect">
             <a:avLst/>
@@ -3054,7 +3164,7 @@
         <p:spPr>
           <a:xfrm>
             <a:off x="685800" y="4400640"/>
-            <a:ext cx="5484960" cy="3598920"/>
+            <a:ext cx="5484240" cy="3598200"/>
           </a:xfrm>
           <a:prstGeom prst="rect">
             <a:avLst/>
@@ -3113,7 +3223,7 @@
         <p:spPr>
           <a:xfrm>
             <a:off x="3884760" y="8685360"/>
-            <a:ext cx="2970360" cy="457200"/>
+            <a:ext cx="2969640" cy="456480"/>
           </a:xfrm>
           <a:prstGeom prst="rect">
             <a:avLst/>
@@ -3157,7 +3267,7 @@
                 <a:tab pos="0" algn="l"/>
               </a:tabLst>
             </a:pPr>
-            <a:fld id="{79FEA715-06CB-46D3-B43D-1E1C2F7A46CE}" type="slidenum">
+            <a:fld id="{0C38890A-625E-439C-8358-476176279153}" type="slidenum">
               <a:rPr lang="en-US" sz="1200" b="0" u="none" strike="noStrike">
                 <a:solidFill>
                   <a:schemeClr val="dk1"/>
@@ -3167,7 +3277,7 @@
                 <a:latin typeface="+mn-lt"/>
                 <a:ea typeface="+mn-ea"/>
               </a:rPr>
-              <a:t>1</a:t>
+              <a:t>&lt;number&gt;</a:t>
             </a:fld>
             <a:endParaRPr lang="en-US" sz="1200" b="0" u="none" strike="noStrike">
               <a:solidFill>
@@ -3215,7 +3325,7 @@
         <p:spPr>
           <a:xfrm>
             <a:off x="685800" y="1143000"/>
-            <a:ext cx="5484960" cy="3084840"/>
+            <a:ext cx="5484240" cy="3084120"/>
           </a:xfrm>
           <a:prstGeom prst="rect">
             <a:avLst/>
@@ -3238,7 +3348,7 @@
         <p:spPr>
           <a:xfrm>
             <a:off x="685800" y="4400640"/>
-            <a:ext cx="5484960" cy="3598920"/>
+            <a:ext cx="5484240" cy="3598200"/>
           </a:xfrm>
           <a:prstGeom prst="rect">
             <a:avLst/>
@@ -3297,7 +3407,7 @@
         <p:spPr>
           <a:xfrm>
             <a:off x="3884760" y="8685360"/>
-            <a:ext cx="2970360" cy="457200"/>
+            <a:ext cx="2969640" cy="456480"/>
           </a:xfrm>
           <a:prstGeom prst="rect">
             <a:avLst/>
@@ -3341,7 +3451,7 @@
                 <a:tab pos="0" algn="l"/>
               </a:tabLst>
             </a:pPr>
-            <a:fld id="{6DBB2CCD-0769-4A09-A56B-EC5FE68FF112}" type="slidenum">
+            <a:fld id="{BE19BDA1-A3BA-40E1-A5FC-5489C9B973CA}" type="slidenum">
               <a:rPr lang="en-US" sz="1200" b="0" u="none" strike="noStrike">
                 <a:solidFill>
                   <a:schemeClr val="dk1"/>
@@ -3351,7 +3461,7 @@
                 <a:latin typeface="+mn-lt"/>
                 <a:ea typeface="+mn-ea"/>
               </a:rPr>
-              <a:t>1</a:t>
+              <a:t>&lt;number&gt;</a:t>
             </a:fld>
             <a:endParaRPr lang="en-US" sz="1200" b="0" u="none" strike="noStrike">
               <a:solidFill>
@@ -3399,7 +3509,7 @@
         <p:spPr>
           <a:xfrm>
             <a:off x="685800" y="1143000"/>
-            <a:ext cx="5484960" cy="3084840"/>
+            <a:ext cx="5484240" cy="3084120"/>
           </a:xfrm>
           <a:prstGeom prst="rect">
             <a:avLst/>
@@ -3422,7 +3532,7 @@
         <p:spPr>
           <a:xfrm>
             <a:off x="685800" y="4400640"/>
-            <a:ext cx="5484960" cy="3598920"/>
+            <a:ext cx="5484240" cy="3598200"/>
           </a:xfrm>
           <a:prstGeom prst="rect">
             <a:avLst/>
@@ -3464,7 +3574,7 @@
         <p:spPr>
           <a:xfrm>
             <a:off x="3884760" y="8685360"/>
-            <a:ext cx="2970360" cy="457200"/>
+            <a:ext cx="2969640" cy="456480"/>
           </a:xfrm>
           <a:prstGeom prst="rect">
             <a:avLst/>
@@ -3508,7 +3618,7 @@
                 <a:tab pos="0" algn="l"/>
               </a:tabLst>
             </a:pPr>
-            <a:fld id="{D15B45CB-FA18-4124-9E35-943AA4EF8789}" type="slidenum">
+            <a:fld id="{BA031349-F89B-4D17-AB4A-1DB47022335D}" type="slidenum">
               <a:rPr lang="en-US" sz="1200" b="0" u="none" strike="noStrike">
                 <a:solidFill>
                   <a:schemeClr val="dk1"/>
@@ -3518,7 +3628,7 @@
                 <a:latin typeface="+mn-lt"/>
                 <a:ea typeface="+mn-ea"/>
               </a:rPr>
-              <a:t>1</a:t>
+              <a:t>&lt;number&gt;</a:t>
             </a:fld>
             <a:endParaRPr lang="en-US" sz="1200" b="0" u="none" strike="noStrike">
               <a:solidFill>
@@ -3566,7 +3676,7 @@
         <p:spPr>
           <a:xfrm>
             <a:off x="685800" y="1143000"/>
-            <a:ext cx="5484960" cy="3084840"/>
+            <a:ext cx="5484240" cy="3084120"/>
           </a:xfrm>
           <a:prstGeom prst="rect">
             <a:avLst/>
@@ -3589,7 +3699,7 @@
         <p:spPr>
           <a:xfrm>
             <a:off x="685800" y="4400640"/>
-            <a:ext cx="5484960" cy="3598920"/>
+            <a:ext cx="5484240" cy="3598200"/>
           </a:xfrm>
           <a:prstGeom prst="rect">
             <a:avLst/>
@@ -3631,7 +3741,7 @@
         <p:spPr>
           <a:xfrm>
             <a:off x="3884760" y="8685360"/>
-            <a:ext cx="2970360" cy="457200"/>
+            <a:ext cx="2969640" cy="456480"/>
           </a:xfrm>
           <a:prstGeom prst="rect">
             <a:avLst/>
@@ -3675,7 +3785,7 @@
                 <a:tab pos="0" algn="l"/>
               </a:tabLst>
             </a:pPr>
-            <a:fld id="{2BFEC303-E6A6-49D9-948D-7A3E83DE6AC4}" type="slidenum">
+            <a:fld id="{8A6D4628-94CE-461C-9477-265F74EB3ED4}" type="slidenum">
               <a:rPr lang="en-US" sz="1200" b="0" u="none" strike="noStrike">
                 <a:solidFill>
                   <a:schemeClr val="dk1"/>
@@ -3685,7 +3795,7 @@
                 <a:latin typeface="+mn-lt"/>
                 <a:ea typeface="+mn-ea"/>
               </a:rPr>
-              <a:t>1</a:t>
+              <a:t>&lt;number&gt;</a:t>
             </a:fld>
             <a:endParaRPr lang="en-US" sz="1200" b="0" u="none" strike="noStrike">
               <a:solidFill>
@@ -3733,7 +3843,7 @@
         <p:spPr>
           <a:xfrm>
             <a:off x="685800" y="1143000"/>
-            <a:ext cx="5484960" cy="3084840"/>
+            <a:ext cx="5484240" cy="3084120"/>
           </a:xfrm>
           <a:prstGeom prst="rect">
             <a:avLst/>
@@ -3756,7 +3866,7 @@
         <p:spPr>
           <a:xfrm>
             <a:off x="685800" y="4400640"/>
-            <a:ext cx="5484960" cy="3598920"/>
+            <a:ext cx="5484240" cy="3598200"/>
           </a:xfrm>
           <a:prstGeom prst="rect">
             <a:avLst/>
@@ -3798,7 +3908,7 @@
         <p:spPr>
           <a:xfrm>
             <a:off x="3884760" y="8685360"/>
-            <a:ext cx="2970360" cy="457200"/>
+            <a:ext cx="2969640" cy="456480"/>
           </a:xfrm>
           <a:prstGeom prst="rect">
             <a:avLst/>
@@ -3842,7 +3952,7 @@
                 <a:tab pos="0" algn="l"/>
               </a:tabLst>
             </a:pPr>
-            <a:fld id="{293166F9-D625-43BE-9862-4B2D2392A265}" type="slidenum">
+            <a:fld id="{888BA1CD-6382-4CEC-B9F6-47A9587F21BC}" type="slidenum">
               <a:rPr lang="en-US" sz="1200" b="0" u="none" strike="noStrike">
                 <a:solidFill>
                   <a:schemeClr val="dk1"/>
@@ -3852,7 +3962,7 @@
                 <a:latin typeface="+mn-lt"/>
                 <a:ea typeface="+mn-ea"/>
               </a:rPr>
-              <a:t>1</a:t>
+              <a:t>&lt;number&gt;</a:t>
             </a:fld>
             <a:endParaRPr lang="en-US" sz="1200" b="0" u="none" strike="noStrike">
               <a:solidFill>
@@ -3900,7 +4010,7 @@
         <p:spPr>
           <a:xfrm>
             <a:off x="685800" y="1143000"/>
-            <a:ext cx="5484960" cy="3084840"/>
+            <a:ext cx="5484240" cy="3084120"/>
           </a:xfrm>
           <a:prstGeom prst="rect">
             <a:avLst/>
@@ -3923,7 +4033,7 @@
         <p:spPr>
           <a:xfrm>
             <a:off x="685800" y="4400640"/>
-            <a:ext cx="5484960" cy="3598920"/>
+            <a:ext cx="5484240" cy="3598200"/>
           </a:xfrm>
           <a:prstGeom prst="rect">
             <a:avLst/>
@@ -3965,7 +4075,7 @@
         <p:spPr>
           <a:xfrm>
             <a:off x="3884760" y="8685360"/>
-            <a:ext cx="2970360" cy="457200"/>
+            <a:ext cx="2969640" cy="456480"/>
           </a:xfrm>
           <a:prstGeom prst="rect">
             <a:avLst/>
@@ -4009,7 +4119,7 @@
                 <a:tab pos="0" algn="l"/>
               </a:tabLst>
             </a:pPr>
-            <a:fld id="{564BE4B6-E325-4D1E-9916-5A703B75B317}" type="slidenum">
+            <a:fld id="{6BCD7E90-9CCE-42D0-B148-FDEBD3A9349E}" type="slidenum">
               <a:rPr lang="en-US" sz="1200" b="0" u="none" strike="noStrike">
                 <a:solidFill>
                   <a:schemeClr val="dk1"/>
@@ -4019,7 +4129,7 @@
                 <a:latin typeface="+mn-lt"/>
                 <a:ea typeface="+mn-ea"/>
               </a:rPr>
-              <a:t>1</a:t>
+              <a:t>&lt;number&gt;</a:t>
             </a:fld>
             <a:endParaRPr lang="en-US" sz="1200" b="0" u="none" strike="noStrike">
               <a:solidFill>
@@ -4067,7 +4177,7 @@
         <p:spPr>
           <a:xfrm>
             <a:off x="685800" y="1143000"/>
-            <a:ext cx="5484960" cy="3084840"/>
+            <a:ext cx="5484240" cy="3084120"/>
           </a:xfrm>
           <a:prstGeom prst="rect">
             <a:avLst/>
@@ -4090,7 +4200,7 @@
         <p:spPr>
           <a:xfrm>
             <a:off x="685800" y="4400640"/>
-            <a:ext cx="5484960" cy="3598920"/>
+            <a:ext cx="5484240" cy="3598200"/>
           </a:xfrm>
           <a:prstGeom prst="rect">
             <a:avLst/>
@@ -4149,7 +4259,7 @@
         <p:spPr>
           <a:xfrm>
             <a:off x="3884760" y="8685360"/>
-            <a:ext cx="2970360" cy="457200"/>
+            <a:ext cx="2969640" cy="456480"/>
           </a:xfrm>
           <a:prstGeom prst="rect">
             <a:avLst/>
@@ -4193,7 +4303,7 @@
                 <a:tab pos="0" algn="l"/>
               </a:tabLst>
             </a:pPr>
-            <a:fld id="{AA110A6F-1369-44BA-9255-0956D8D2D27B}" type="slidenum">
+            <a:fld id="{46EF5779-EC5D-4F8F-8F73-AF30B484EC3B}" type="slidenum">
               <a:rPr lang="en-US" sz="1200" b="0" u="none" strike="noStrike">
                 <a:solidFill>
                   <a:schemeClr val="dk1"/>
@@ -4203,7 +4313,7 @@
                 <a:latin typeface="+mn-lt"/>
                 <a:ea typeface="+mn-ea"/>
               </a:rPr>
-              <a:t>1</a:t>
+              <a:t>&lt;number&gt;</a:t>
             </a:fld>
             <a:endParaRPr lang="en-US" sz="1200" b="0" u="none" strike="noStrike">
               <a:solidFill>
@@ -4251,7 +4361,7 @@
         <p:spPr>
           <a:xfrm>
             <a:off x="685800" y="1143000"/>
-            <a:ext cx="5484960" cy="3084840"/>
+            <a:ext cx="5484240" cy="3084120"/>
           </a:xfrm>
           <a:prstGeom prst="rect">
             <a:avLst/>
@@ -4274,7 +4384,7 @@
         <p:spPr>
           <a:xfrm>
             <a:off x="685800" y="4400640"/>
-            <a:ext cx="5484960" cy="3598920"/>
+            <a:ext cx="5484240" cy="3598200"/>
           </a:xfrm>
           <a:prstGeom prst="rect">
             <a:avLst/>
@@ -4316,7 +4426,7 @@
         <p:spPr>
           <a:xfrm>
             <a:off x="3884760" y="8685360"/>
-            <a:ext cx="2970360" cy="457200"/>
+            <a:ext cx="2969640" cy="456480"/>
           </a:xfrm>
           <a:prstGeom prst="rect">
             <a:avLst/>
@@ -4360,7 +4470,7 @@
                 <a:tab pos="0" algn="l"/>
               </a:tabLst>
             </a:pPr>
-            <a:fld id="{5F29BA1D-2E8A-4090-B3C4-077F7AA11041}" type="slidenum">
+            <a:fld id="{970261FD-0522-4511-A509-CE278FD6765D}" type="slidenum">
               <a:rPr lang="en-US" sz="1200" b="0" u="none" strike="noStrike">
                 <a:solidFill>
                   <a:schemeClr val="dk1"/>
@@ -4370,7 +4480,7 @@
                 <a:latin typeface="+mn-lt"/>
                 <a:ea typeface="+mn-ea"/>
               </a:rPr>
-              <a:t>1</a:t>
+              <a:t>&lt;number&gt;</a:t>
             </a:fld>
             <a:endParaRPr lang="en-US" sz="1200" b="0" u="none" strike="noStrike">
               <a:solidFill>
@@ -4418,7 +4528,7 @@
         <p:spPr>
           <a:xfrm>
             <a:off x="685800" y="1143000"/>
-            <a:ext cx="5484960" cy="3084840"/>
+            <a:ext cx="5484240" cy="3084120"/>
           </a:xfrm>
           <a:prstGeom prst="rect">
             <a:avLst/>
@@ -4441,7 +4551,7 @@
         <p:spPr>
           <a:xfrm>
             <a:off x="685800" y="4400640"/>
-            <a:ext cx="5484960" cy="3598920"/>
+            <a:ext cx="5484240" cy="3598200"/>
           </a:xfrm>
           <a:prstGeom prst="rect">
             <a:avLst/>
@@ -4500,7 +4610,7 @@
         <p:spPr>
           <a:xfrm>
             <a:off x="3884760" y="8685360"/>
-            <a:ext cx="2970360" cy="457200"/>
+            <a:ext cx="2969640" cy="456480"/>
           </a:xfrm>
           <a:prstGeom prst="rect">
             <a:avLst/>
@@ -4544,7 +4654,7 @@
                 <a:tab pos="0" algn="l"/>
               </a:tabLst>
             </a:pPr>
-            <a:fld id="{D11CC41C-6AFC-465B-8BFE-DF44C00B29FF}" type="slidenum">
+            <a:fld id="{A50880FD-5CAC-46CB-BDC2-E015DAA3DFAB}" type="slidenum">
               <a:rPr lang="en-US" sz="1200" b="0" u="none" strike="noStrike">
                 <a:solidFill>
                   <a:schemeClr val="dk1"/>
@@ -4554,7 +4664,7 @@
                 <a:latin typeface="+mn-lt"/>
                 <a:ea typeface="+mn-ea"/>
               </a:rPr>
-              <a:t>1</a:t>
+              <a:t>&lt;number&gt;</a:t>
             </a:fld>
             <a:endParaRPr lang="en-US" sz="1200" b="0" u="none" strike="noStrike">
               <a:solidFill>
@@ -4602,7 +4712,7 @@
         <p:spPr>
           <a:xfrm>
             <a:off x="685800" y="1143000"/>
-            <a:ext cx="5484960" cy="3084840"/>
+            <a:ext cx="5484240" cy="3084120"/>
           </a:xfrm>
           <a:prstGeom prst="rect">
             <a:avLst/>
@@ -4625,7 +4735,7 @@
         <p:spPr>
           <a:xfrm>
             <a:off x="685800" y="4400640"/>
-            <a:ext cx="5484960" cy="3598920"/>
+            <a:ext cx="5484240" cy="3598200"/>
           </a:xfrm>
           <a:prstGeom prst="rect">
             <a:avLst/>
@@ -4684,7 +4794,7 @@
         <p:spPr>
           <a:xfrm>
             <a:off x="3884760" y="8685360"/>
-            <a:ext cx="2970360" cy="457200"/>
+            <a:ext cx="2969640" cy="456480"/>
           </a:xfrm>
           <a:prstGeom prst="rect">
             <a:avLst/>
@@ -4728,7 +4838,7 @@
                 <a:tab pos="0" algn="l"/>
               </a:tabLst>
             </a:pPr>
-            <a:fld id="{57DD6A1C-F193-4C3B-87D2-78EE1CE1EA20}" type="slidenum">
+            <a:fld id="{5B4B0E77-AE64-4BA3-A048-E4DAEE468CE4}" type="slidenum">
               <a:rPr lang="en-US" sz="1200" b="0" u="none" strike="noStrike">
                 <a:solidFill>
                   <a:schemeClr val="dk1"/>
@@ -4738,7 +4848,7 @@
                 <a:latin typeface="+mn-lt"/>
                 <a:ea typeface="+mn-ea"/>
               </a:rPr>
-              <a:t>1</a:t>
+              <a:t>&lt;number&gt;</a:t>
             </a:fld>
             <a:endParaRPr lang="en-US" sz="1200" b="0" u="none" strike="noStrike">
               <a:solidFill>
@@ -4786,7 +4896,7 @@
         <p:spPr>
           <a:xfrm>
             <a:off x="685800" y="1143000"/>
-            <a:ext cx="5484960" cy="3084840"/>
+            <a:ext cx="5484240" cy="3084120"/>
           </a:xfrm>
           <a:prstGeom prst="rect">
             <a:avLst/>
@@ -4809,7 +4919,7 @@
         <p:spPr>
           <a:xfrm>
             <a:off x="685800" y="4400640"/>
-            <a:ext cx="5484960" cy="3598920"/>
+            <a:ext cx="5484240" cy="3598200"/>
           </a:xfrm>
           <a:prstGeom prst="rect">
             <a:avLst/>
@@ -4851,7 +4961,7 @@
         <p:spPr>
           <a:xfrm>
             <a:off x="3884760" y="8685360"/>
-            <a:ext cx="2970360" cy="457200"/>
+            <a:ext cx="2969640" cy="456480"/>
           </a:xfrm>
           <a:prstGeom prst="rect">
             <a:avLst/>
@@ -4895,7 +5005,7 @@
                 <a:tab pos="0" algn="l"/>
               </a:tabLst>
             </a:pPr>
-            <a:fld id="{AC98530E-D0A0-47AC-B708-C0B2A6A4728B}" type="slidenum">
+            <a:fld id="{A37246D9-174F-4FF0-A105-93BAC34A5BB5}" type="slidenum">
               <a:rPr lang="en-US" sz="1200" b="0" u="none" strike="noStrike">
                 <a:solidFill>
                   <a:schemeClr val="dk1"/>
@@ -4905,7 +5015,7 @@
                 <a:latin typeface="+mn-lt"/>
                 <a:ea typeface="+mn-ea"/>
               </a:rPr>
-              <a:t>1</a:t>
+              <a:t>&lt;number&gt;</a:t>
             </a:fld>
             <a:endParaRPr lang="en-US" sz="1200" b="0" u="none" strike="noStrike">
               <a:solidFill>
@@ -4953,7 +5063,7 @@
         <p:spPr>
           <a:xfrm>
             <a:off x="685800" y="1143000"/>
-            <a:ext cx="5484960" cy="3084840"/>
+            <a:ext cx="5484240" cy="3084120"/>
           </a:xfrm>
           <a:prstGeom prst="rect">
             <a:avLst/>
@@ -4976,7 +5086,7 @@
         <p:spPr>
           <a:xfrm>
             <a:off x="685800" y="4400640"/>
-            <a:ext cx="5484960" cy="3598920"/>
+            <a:ext cx="5484240" cy="3598200"/>
           </a:xfrm>
           <a:prstGeom prst="rect">
             <a:avLst/>
@@ -5018,7 +5128,7 @@
         <p:spPr>
           <a:xfrm>
             <a:off x="3884760" y="8685360"/>
-            <a:ext cx="2970360" cy="457200"/>
+            <a:ext cx="2969640" cy="456480"/>
           </a:xfrm>
           <a:prstGeom prst="rect">
             <a:avLst/>
@@ -5062,7 +5172,7 @@
                 <a:tab pos="0" algn="l"/>
               </a:tabLst>
             </a:pPr>
-            <a:fld id="{20C1A6C2-4CC8-4DA3-B4DE-D073743FB420}" type="slidenum">
+            <a:fld id="{02A88F99-BEE0-417C-88B6-20C5841B6BF0}" type="slidenum">
               <a:rPr lang="en-US" sz="1200" b="0" u="none" strike="noStrike">
                 <a:solidFill>
                   <a:schemeClr val="dk1"/>
@@ -5072,7 +5182,7 @@
                 <a:latin typeface="+mn-lt"/>
                 <a:ea typeface="+mn-ea"/>
               </a:rPr>
-              <a:t>1</a:t>
+              <a:t>&lt;number&gt;</a:t>
             </a:fld>
             <a:endParaRPr lang="en-US" sz="1200" b="0" u="none" strike="noStrike">
               <a:solidFill>
@@ -5120,7 +5230,7 @@
         <p:spPr>
           <a:xfrm>
             <a:off x="685800" y="1143000"/>
-            <a:ext cx="5484960" cy="3084840"/>
+            <a:ext cx="5484240" cy="3084120"/>
           </a:xfrm>
           <a:prstGeom prst="rect">
             <a:avLst/>
@@ -5143,7 +5253,7 @@
         <p:spPr>
           <a:xfrm>
             <a:off x="685800" y="4400640"/>
-            <a:ext cx="5484960" cy="3598920"/>
+            <a:ext cx="5484240" cy="3598200"/>
           </a:xfrm>
           <a:prstGeom prst="rect">
             <a:avLst/>
@@ -5185,7 +5295,7 @@
         <p:spPr>
           <a:xfrm>
             <a:off x="3884760" y="8685360"/>
-            <a:ext cx="2970360" cy="457200"/>
+            <a:ext cx="2969640" cy="456480"/>
           </a:xfrm>
           <a:prstGeom prst="rect">
             <a:avLst/>
@@ -5229,7 +5339,7 @@
                 <a:tab pos="0" algn="l"/>
               </a:tabLst>
             </a:pPr>
-            <a:fld id="{0CEB0B7D-1DDE-4644-9367-350F8DD5B5A9}" type="slidenum">
+            <a:fld id="{872E5CB0-E446-4A40-96EB-CE606203A4E0}" type="slidenum">
               <a:rPr lang="en-US" sz="1200" b="0" u="none" strike="noStrike">
                 <a:solidFill>
                   <a:schemeClr val="dk1"/>
@@ -5239,7 +5349,7 @@
                 <a:latin typeface="+mn-lt"/>
                 <a:ea typeface="+mn-ea"/>
               </a:rPr>
-              <a:t>1</a:t>
+              <a:t>&lt;number&gt;</a:t>
             </a:fld>
             <a:endParaRPr lang="en-US" sz="1200" b="0" u="none" strike="noStrike">
               <a:solidFill>
@@ -5287,7 +5397,7 @@
         <p:spPr>
           <a:xfrm>
             <a:off x="685800" y="1143000"/>
-            <a:ext cx="5484960" cy="3084840"/>
+            <a:ext cx="5484240" cy="3084120"/>
           </a:xfrm>
           <a:prstGeom prst="rect">
             <a:avLst/>
@@ -5310,7 +5420,7 @@
         <p:spPr>
           <a:xfrm>
             <a:off x="685800" y="4400640"/>
-            <a:ext cx="5484960" cy="3598920"/>
+            <a:ext cx="5484240" cy="3598200"/>
           </a:xfrm>
           <a:prstGeom prst="rect">
             <a:avLst/>
@@ -5352,7 +5462,7 @@
         <p:spPr>
           <a:xfrm>
             <a:off x="3884760" y="8685360"/>
-            <a:ext cx="2970360" cy="457200"/>
+            <a:ext cx="2969640" cy="456480"/>
           </a:xfrm>
           <a:prstGeom prst="rect">
             <a:avLst/>
@@ -5396,7 +5506,7 @@
                 <a:tab pos="0" algn="l"/>
               </a:tabLst>
             </a:pPr>
-            <a:fld id="{D54ECA89-5319-40C5-858A-F68045A28CE8}" type="slidenum">
+            <a:fld id="{7DC0D3EA-B442-400E-9D88-ED7FD84647B2}" type="slidenum">
               <a:rPr lang="en-US" sz="1200" b="0" u="none" strike="noStrike">
                 <a:solidFill>
                   <a:schemeClr val="dk1"/>
@@ -5406,7 +5516,7 @@
                 <a:latin typeface="+mn-lt"/>
                 <a:ea typeface="+mn-ea"/>
               </a:rPr>
-              <a:t>1</a:t>
+              <a:t>&lt;number&gt;</a:t>
             </a:fld>
             <a:endParaRPr lang="en-US" sz="1200" b="0" u="none" strike="noStrike">
               <a:solidFill>
@@ -5454,7 +5564,7 @@
         <p:spPr>
           <a:xfrm>
             <a:off x="685800" y="1143000"/>
-            <a:ext cx="5484960" cy="3084840"/>
+            <a:ext cx="5484240" cy="3084120"/>
           </a:xfrm>
           <a:prstGeom prst="rect">
             <a:avLst/>
@@ -5477,7 +5587,7 @@
         <p:spPr>
           <a:xfrm>
             <a:off x="685800" y="4400640"/>
-            <a:ext cx="5484960" cy="3598920"/>
+            <a:ext cx="5484240" cy="3598200"/>
           </a:xfrm>
           <a:prstGeom prst="rect">
             <a:avLst/>
@@ -5519,7 +5629,7 @@
         <p:spPr>
           <a:xfrm>
             <a:off x="3884760" y="8685360"/>
-            <a:ext cx="2970360" cy="457200"/>
+            <a:ext cx="2969640" cy="456480"/>
           </a:xfrm>
           <a:prstGeom prst="rect">
             <a:avLst/>
@@ -5563,7 +5673,7 @@
                 <a:tab pos="0" algn="l"/>
               </a:tabLst>
             </a:pPr>
-            <a:fld id="{E73BF910-8D9A-4DEA-ACD1-D8FA14F2302C}" type="slidenum">
+            <a:fld id="{DCB22B5D-3A2D-4B17-9B68-460A0F317BB3}" type="slidenum">
               <a:rPr lang="en-US" sz="1200" b="0" u="none" strike="noStrike">
                 <a:solidFill>
                   <a:schemeClr val="dk1"/>
@@ -5573,7 +5683,7 @@
                 <a:latin typeface="+mn-lt"/>
                 <a:ea typeface="+mn-ea"/>
               </a:rPr>
-              <a:t>1</a:t>
+              <a:t>&lt;number&gt;</a:t>
             </a:fld>
             <a:endParaRPr lang="en-US" sz="1200" b="0" u="none" strike="noStrike">
               <a:solidFill>
@@ -5621,7 +5731,7 @@
         <p:spPr>
           <a:xfrm>
             <a:off x="685800" y="1143000"/>
-            <a:ext cx="5484960" cy="3084840"/>
+            <a:ext cx="5484240" cy="3084120"/>
           </a:xfrm>
           <a:prstGeom prst="rect">
             <a:avLst/>
@@ -5644,7 +5754,7 @@
         <p:spPr>
           <a:xfrm>
             <a:off x="685800" y="4400640"/>
-            <a:ext cx="5484960" cy="3598920"/>
+            <a:ext cx="5484240" cy="3598200"/>
           </a:xfrm>
           <a:prstGeom prst="rect">
             <a:avLst/>
@@ -5703,7 +5813,7 @@
         <p:spPr>
           <a:xfrm>
             <a:off x="3884760" y="8685360"/>
-            <a:ext cx="2970360" cy="457200"/>
+            <a:ext cx="2969640" cy="456480"/>
           </a:xfrm>
           <a:prstGeom prst="rect">
             <a:avLst/>
@@ -5747,7 +5857,7 @@
                 <a:tab pos="0" algn="l"/>
               </a:tabLst>
             </a:pPr>
-            <a:fld id="{C4779AF9-5295-42EA-B28B-2810E33B1FC2}" type="slidenum">
+            <a:fld id="{C8C7FA31-AA17-4660-9F90-77CC5C2799D0}" type="slidenum">
               <a:rPr lang="en-US" sz="1200" b="0" u="none" strike="noStrike">
                 <a:solidFill>
                   <a:schemeClr val="dk1"/>
@@ -5805,7 +5915,7 @@
         <p:spPr>
           <a:xfrm>
             <a:off x="685800" y="1143000"/>
-            <a:ext cx="5484960" cy="3084840"/>
+            <a:ext cx="5484240" cy="3084120"/>
           </a:xfrm>
           <a:prstGeom prst="rect">
             <a:avLst/>
@@ -5828,7 +5938,7 @@
         <p:spPr>
           <a:xfrm>
             <a:off x="685800" y="4400640"/>
-            <a:ext cx="5484960" cy="3598920"/>
+            <a:ext cx="5484240" cy="3598200"/>
           </a:xfrm>
           <a:prstGeom prst="rect">
             <a:avLst/>
@@ -5870,7 +5980,7 @@
         <p:spPr>
           <a:xfrm>
             <a:off x="3884760" y="8685360"/>
-            <a:ext cx="2970360" cy="457200"/>
+            <a:ext cx="2969640" cy="456480"/>
           </a:xfrm>
           <a:prstGeom prst="rect">
             <a:avLst/>
@@ -5914,7 +6024,7 @@
                 <a:tab pos="0" algn="l"/>
               </a:tabLst>
             </a:pPr>
-            <a:fld id="{2FA7E825-FF23-4C18-B2F9-ACFBAB29FBA2}" type="slidenum">
+            <a:fld id="{1BF579DD-1E57-4461-B5C8-0321D642B0C3}" type="slidenum">
               <a:rPr lang="en-US" sz="1200" b="0" u="none" strike="noStrike">
                 <a:solidFill>
                   <a:schemeClr val="dk1"/>
@@ -5924,7 +6034,7 @@
                 <a:latin typeface="+mn-lt"/>
                 <a:ea typeface="+mn-ea"/>
               </a:rPr>
-              <a:t>1</a:t>
+              <a:t>&lt;number&gt;</a:t>
             </a:fld>
             <a:endParaRPr lang="en-US" sz="1200" b="0" u="none" strike="noStrike">
               <a:solidFill>
@@ -5972,7 +6082,7 @@
         <p:spPr>
           <a:xfrm>
             <a:off x="685800" y="1143000"/>
-            <a:ext cx="5484960" cy="3084840"/>
+            <a:ext cx="5484240" cy="3084120"/>
           </a:xfrm>
           <a:prstGeom prst="rect">
             <a:avLst/>
@@ -5995,7 +6105,7 @@
         <p:spPr>
           <a:xfrm>
             <a:off x="685800" y="4400640"/>
-            <a:ext cx="5484960" cy="3598920"/>
+            <a:ext cx="5484240" cy="3598200"/>
           </a:xfrm>
           <a:prstGeom prst="rect">
             <a:avLst/>
@@ -6037,7 +6147,7 @@
         <p:spPr>
           <a:xfrm>
             <a:off x="3884760" y="8685360"/>
-            <a:ext cx="2970360" cy="457200"/>
+            <a:ext cx="2969640" cy="456480"/>
           </a:xfrm>
           <a:prstGeom prst="rect">
             <a:avLst/>
@@ -6081,7 +6191,7 @@
                 <a:tab pos="0" algn="l"/>
               </a:tabLst>
             </a:pPr>
-            <a:fld id="{4F150AD4-A582-4503-A178-382FFA8D5DE5}" type="slidenum">
+            <a:fld id="{1DC3C1E8-4D98-4C80-8D3B-AA1139CA7398}" type="slidenum">
               <a:rPr lang="en-US" sz="1200" b="0" u="none" strike="noStrike">
                 <a:solidFill>
                   <a:schemeClr val="dk1"/>
@@ -6091,7 +6201,7 @@
                 <a:latin typeface="+mn-lt"/>
                 <a:ea typeface="+mn-ea"/>
               </a:rPr>
-              <a:t>1</a:t>
+              <a:t>&lt;number&gt;</a:t>
             </a:fld>
             <a:endParaRPr lang="en-US" sz="1200" b="0" u="none" strike="noStrike">
               <a:solidFill>
@@ -6139,7 +6249,7 @@
         <p:spPr>
           <a:xfrm>
             <a:off x="685800" y="1143000"/>
-            <a:ext cx="5484960" cy="3084840"/>
+            <a:ext cx="5484240" cy="3084120"/>
           </a:xfrm>
           <a:prstGeom prst="rect">
             <a:avLst/>
@@ -6162,7 +6272,7 @@
         <p:spPr>
           <a:xfrm>
             <a:off x="685800" y="4400640"/>
-            <a:ext cx="5484960" cy="3598920"/>
+            <a:ext cx="5484240" cy="3598200"/>
           </a:xfrm>
           <a:prstGeom prst="rect">
             <a:avLst/>
@@ -6221,7 +6331,7 @@
         <p:spPr>
           <a:xfrm>
             <a:off x="3884760" y="8685360"/>
-            <a:ext cx="2970360" cy="457200"/>
+            <a:ext cx="2969640" cy="456480"/>
           </a:xfrm>
           <a:prstGeom prst="rect">
             <a:avLst/>
@@ -6265,7 +6375,7 @@
                 <a:tab pos="0" algn="l"/>
               </a:tabLst>
             </a:pPr>
-            <a:fld id="{C7773500-57E6-491B-8A26-1A924A2D22EF}" type="slidenum">
+            <a:fld id="{869C843E-BDA8-4255-9FAD-FF6CFEE3E2BB}" type="slidenum">
               <a:rPr lang="en-US" sz="1200" b="0" u="none" strike="noStrike">
                 <a:solidFill>
                   <a:schemeClr val="dk1"/>
@@ -6275,7 +6385,7 @@
                 <a:latin typeface="+mn-lt"/>
                 <a:ea typeface="+mn-ea"/>
               </a:rPr>
-              <a:t>1</a:t>
+              <a:t>&lt;number&gt;</a:t>
             </a:fld>
             <a:endParaRPr lang="en-US" sz="1200" b="0" u="none" strike="noStrike">
               <a:solidFill>
@@ -6323,7 +6433,7 @@
         <p:spPr>
           <a:xfrm>
             <a:off x="685800" y="1143000"/>
-            <a:ext cx="5484960" cy="3084840"/>
+            <a:ext cx="5484240" cy="3084120"/>
           </a:xfrm>
           <a:prstGeom prst="rect">
             <a:avLst/>
@@ -6346,7 +6456,7 @@
         <p:spPr>
           <a:xfrm>
             <a:off x="685800" y="4400640"/>
-            <a:ext cx="5484960" cy="3598920"/>
+            <a:ext cx="5484240" cy="3598200"/>
           </a:xfrm>
           <a:prstGeom prst="rect">
             <a:avLst/>
@@ -6388,7 +6498,7 @@
         <p:spPr>
           <a:xfrm>
             <a:off x="3884760" y="8685360"/>
-            <a:ext cx="2970360" cy="457200"/>
+            <a:ext cx="2969640" cy="456480"/>
           </a:xfrm>
           <a:prstGeom prst="rect">
             <a:avLst/>
@@ -6432,7 +6542,7 @@
                 <a:tab pos="0" algn="l"/>
               </a:tabLst>
             </a:pPr>
-            <a:fld id="{380F03E7-9932-426A-98DA-F5BFB8FCDA1E}" type="slidenum">
+            <a:fld id="{DCC9E58D-4D4D-41FB-89FF-65869472FE7A}" type="slidenum">
               <a:rPr lang="en-US" sz="1200" b="0" u="none" strike="noStrike">
                 <a:solidFill>
                   <a:schemeClr val="dk1"/>
@@ -6442,7 +6552,7 @@
                 <a:latin typeface="+mn-lt"/>
                 <a:ea typeface="+mn-ea"/>
               </a:rPr>
-              <a:t>1</a:t>
+              <a:t>&lt;number&gt;</a:t>
             </a:fld>
             <a:endParaRPr lang="en-US" sz="1200" b="0" u="none" strike="noStrike">
               <a:solidFill>
@@ -6490,7 +6600,7 @@
         <p:spPr>
           <a:xfrm>
             <a:off x="685800" y="1143000"/>
-            <a:ext cx="5484960" cy="3084840"/>
+            <a:ext cx="5484240" cy="3084120"/>
           </a:xfrm>
           <a:prstGeom prst="rect">
             <a:avLst/>
@@ -6513,7 +6623,7 @@
         <p:spPr>
           <a:xfrm>
             <a:off x="685800" y="4400640"/>
-            <a:ext cx="5484960" cy="3598920"/>
+            <a:ext cx="5484240" cy="3598200"/>
           </a:xfrm>
           <a:prstGeom prst="rect">
             <a:avLst/>
@@ -6572,7 +6682,7 @@
         <p:spPr>
           <a:xfrm>
             <a:off x="3884760" y="8685360"/>
-            <a:ext cx="2970360" cy="457200"/>
+            <a:ext cx="2969640" cy="456480"/>
           </a:xfrm>
           <a:prstGeom prst="rect">
             <a:avLst/>
@@ -6616,7 +6726,7 @@
                 <a:tab pos="0" algn="l"/>
               </a:tabLst>
             </a:pPr>
-            <a:fld id="{F064AEF3-384A-4953-9B91-793547FFFD64}" type="slidenum">
+            <a:fld id="{3272EFE2-5F19-46B7-88BF-AABBFB05F98C}" type="slidenum">
               <a:rPr lang="en-US" sz="1200" b="0" u="none" strike="noStrike">
                 <a:solidFill>
                   <a:schemeClr val="dk1"/>
@@ -6626,7 +6736,7 @@
                 <a:latin typeface="+mn-lt"/>
                 <a:ea typeface="+mn-ea"/>
               </a:rPr>
-              <a:t>1</a:t>
+              <a:t>&lt;number&gt;</a:t>
             </a:fld>
             <a:endParaRPr lang="en-US" sz="1200" b="0" u="none" strike="noStrike">
               <a:solidFill>
@@ -6674,7 +6784,7 @@
         <p:spPr>
           <a:xfrm>
             <a:off x="685800" y="1143000"/>
-            <a:ext cx="5484960" cy="3084840"/>
+            <a:ext cx="5484240" cy="3084120"/>
           </a:xfrm>
           <a:prstGeom prst="rect">
             <a:avLst/>
@@ -6697,7 +6807,7 @@
         <p:spPr>
           <a:xfrm>
             <a:off x="685800" y="4400640"/>
-            <a:ext cx="5484960" cy="3598920"/>
+            <a:ext cx="5484240" cy="3598200"/>
           </a:xfrm>
           <a:prstGeom prst="rect">
             <a:avLst/>
@@ -6739,7 +6849,7 @@
         <p:spPr>
           <a:xfrm>
             <a:off x="3884760" y="8685360"/>
-            <a:ext cx="2970360" cy="457200"/>
+            <a:ext cx="2969640" cy="456480"/>
           </a:xfrm>
           <a:prstGeom prst="rect">
             <a:avLst/>
@@ -6783,7 +6893,7 @@
                 <a:tab pos="0" algn="l"/>
               </a:tabLst>
             </a:pPr>
-            <a:fld id="{4AAFDCCB-9B31-4CC9-97CF-6495C62AB151}" type="slidenum">
+            <a:fld id="{77874E3E-D5BE-4ED6-884C-2B42405B9D1B}" type="slidenum">
               <a:rPr lang="en-US" sz="1200" b="0" u="none" strike="noStrike">
                 <a:solidFill>
                   <a:schemeClr val="dk1"/>
@@ -6793,7 +6903,7 @@
                 <a:latin typeface="+mn-lt"/>
                 <a:ea typeface="+mn-ea"/>
               </a:rPr>
-              <a:t>1</a:t>
+              <a:t>&lt;number&gt;</a:t>
             </a:fld>
             <a:endParaRPr lang="en-US" sz="1200" b="0" u="none" strike="noStrike">
               <a:solidFill>
@@ -6916,7 +7026,84 @@
                 <a:uFillTx/>
                 <a:latin typeface="Calibri"/>
               </a:rPr>
-              <a:t>Click to edit the title text format</a:t>
+              <a:t>Clic</a:t>
+            </a:r>
+            <a:r>
+              <a:rPr lang="en-US" sz="1800" b="0" u="none" strike="noStrike">
+                <a:solidFill>
+                  <a:schemeClr val="dk1"/>
+                </a:solidFill>
+                <a:effectLst/>
+                <a:uFillTx/>
+                <a:latin typeface="Calibri"/>
+              </a:rPr>
+              <a:t>k to </a:t>
+            </a:r>
+            <a:r>
+              <a:rPr lang="en-US" sz="1800" b="0" u="none" strike="noStrike">
+                <a:solidFill>
+                  <a:schemeClr val="dk1"/>
+                </a:solidFill>
+                <a:effectLst/>
+                <a:uFillTx/>
+                <a:latin typeface="Calibri"/>
+              </a:rPr>
+              <a:t>edit </a:t>
+            </a:r>
+            <a:r>
+              <a:rPr lang="en-US" sz="1800" b="0" u="none" strike="noStrike">
+                <a:solidFill>
+                  <a:schemeClr val="dk1"/>
+                </a:solidFill>
+                <a:effectLst/>
+                <a:uFillTx/>
+                <a:latin typeface="Calibri"/>
+              </a:rPr>
+              <a:t>the </a:t>
+            </a:r>
+            <a:r>
+              <a:rPr lang="en-US" sz="1800" b="0" u="none" strike="noStrike">
+                <a:solidFill>
+                  <a:schemeClr val="dk1"/>
+                </a:solidFill>
+                <a:effectLst/>
+                <a:uFillTx/>
+                <a:latin typeface="Calibri"/>
+              </a:rPr>
+              <a:t>title </a:t>
+            </a:r>
+            <a:r>
+              <a:rPr lang="en-US" sz="1800" b="0" u="none" strike="noStrike">
+                <a:solidFill>
+                  <a:schemeClr val="dk1"/>
+                </a:solidFill>
+                <a:effectLst/>
+                <a:uFillTx/>
+                <a:latin typeface="Calibri"/>
+              </a:rPr>
+              <a:t>text </a:t>
+            </a:r>
+            <a:r>
+              <a:rPr lang="en-US" sz="1800" b="0" u="none" strike="noStrike">
+                <a:solidFill>
+                  <a:schemeClr val="dk1"/>
+                </a:solidFill>
+                <a:effectLst/>
+                <a:uFillTx/>
+                <a:latin typeface="Calibri"/>
+              </a:rPr>
+              <a:t>for</a:t>
+            </a:r>
+            <a:r>
+              <a:rPr lang="en-US" sz="1800" b="0" u="none" strike="noStrike">
+                <a:solidFill>
+                  <a:schemeClr val="dk1"/>
+                </a:solidFill>
+                <a:effectLst/>
+                <a:uFillTx/>
+                <a:latin typeface="Calibri"/>
+              </a:rPr>
+              <a:t>mat</a:t>
             </a:r>
             <a:endParaRPr lang="en-US" sz="1800" b="0" u="none" strike="noStrike">
               <a:solidFill>
@@ -7359,7 +7546,7 @@
         <p:spPr>
           <a:xfrm>
             <a:off x="-2286000" y="3657600"/>
-            <a:ext cx="6399360" cy="6399360"/>
+            <a:ext cx="6398640" cy="6398640"/>
           </a:xfrm>
           <a:prstGeom prst="ellipse">
             <a:avLst/>
@@ -7402,7 +7589,7 @@
         <p:spPr>
           <a:xfrm>
             <a:off x="8229600" y="-2743200"/>
-            <a:ext cx="6399360" cy="6399360"/>
+            <a:ext cx="6398640" cy="6398640"/>
           </a:xfrm>
           <a:prstGeom prst="ellipse">
             <a:avLst/>
@@ -7445,7 +7632,7 @@
         <p:spPr>
           <a:xfrm>
             <a:off x="5500080" y="914400"/>
-            <a:ext cx="1187280" cy="1187280"/>
+            <a:ext cx="1186560" cy="1186560"/>
           </a:xfrm>
           <a:prstGeom prst="ellipse">
             <a:avLst/>
@@ -7492,7 +7679,7 @@
         <p:spPr>
           <a:xfrm>
             <a:off x="5678280" y="1092600"/>
-            <a:ext cx="830520" cy="830520"/>
+            <a:ext cx="829800" cy="829800"/>
           </a:xfrm>
           <a:prstGeom prst="rect">
             <a:avLst/>
@@ -7512,7 +7699,7 @@
         <p:spPr>
           <a:xfrm>
             <a:off x="914400" y="2377440"/>
-            <a:ext cx="10358640" cy="1004400"/>
+            <a:ext cx="10357920" cy="1003680"/>
           </a:xfrm>
           <a:prstGeom prst="rect">
             <a:avLst/>
@@ -7573,7 +7760,7 @@
         <p:spPr>
           <a:xfrm>
             <a:off x="914400" y="3383280"/>
-            <a:ext cx="10358640" cy="547200"/>
+            <a:ext cx="10357920" cy="546480"/>
           </a:xfrm>
           <a:prstGeom prst="rect">
             <a:avLst/>
@@ -7634,7 +7821,7 @@
         <p:spPr>
           <a:xfrm>
             <a:off x="914400" y="3977640"/>
-            <a:ext cx="10358640" cy="455760"/>
+            <a:ext cx="10357920" cy="455040"/>
           </a:xfrm>
           <a:prstGeom prst="rect">
             <a:avLst/>
@@ -7695,7 +7882,7 @@
         <p:spPr>
           <a:xfrm>
             <a:off x="11521440" y="6446520"/>
-            <a:ext cx="455760" cy="272880"/>
+            <a:ext cx="455040" cy="272160"/>
           </a:xfrm>
           <a:prstGeom prst="rect">
             <a:avLst/>
@@ -7793,7 +7980,7 @@
         <p:spPr>
           <a:xfrm>
             <a:off x="-1828800" y="5120640"/>
-            <a:ext cx="3656160" cy="3656160"/>
+            <a:ext cx="3655440" cy="3655440"/>
           </a:xfrm>
           <a:prstGeom prst="ellipse">
             <a:avLst/>
@@ -7836,7 +8023,7 @@
         <p:spPr>
           <a:xfrm>
             <a:off x="457200" y="457200"/>
-            <a:ext cx="638640" cy="638640"/>
+            <a:ext cx="637920" cy="637920"/>
           </a:xfrm>
           <a:prstGeom prst="ellipse">
             <a:avLst/>
@@ -7883,7 +8070,7 @@
         <p:spPr>
           <a:xfrm>
             <a:off x="553320" y="553320"/>
-            <a:ext cx="446760" cy="446760"/>
+            <a:ext cx="446040" cy="446040"/>
           </a:xfrm>
           <a:prstGeom prst="rect">
             <a:avLst/>
@@ -7903,7 +8090,7 @@
         <p:spPr>
           <a:xfrm>
             <a:off x="1280160" y="457200"/>
-            <a:ext cx="10422720" cy="638640"/>
+            <a:ext cx="10422000" cy="637920"/>
           </a:xfrm>
           <a:prstGeom prst="rect">
             <a:avLst/>
@@ -7964,7 +8151,7 @@
         <p:spPr>
           <a:xfrm>
             <a:off x="548640" y="1828800"/>
-            <a:ext cx="4753440" cy="4021920"/>
+            <a:ext cx="4752720" cy="4021200"/>
           </a:xfrm>
           <a:prstGeom prst="rect">
             <a:avLst/>
@@ -8065,7 +8252,7 @@
         <p:spPr>
           <a:xfrm>
             <a:off x="5486400" y="1691640"/>
-            <a:ext cx="6216480" cy="4341960"/>
+            <a:ext cx="6215760" cy="4341240"/>
           </a:xfrm>
           <a:prstGeom prst="roundRect">
             <a:avLst>
@@ -8110,7 +8297,7 @@
         <p:spPr>
           <a:xfrm>
             <a:off x="5806440" y="1965960"/>
-            <a:ext cx="5576400" cy="3793320"/>
+            <a:ext cx="5575680" cy="3792600"/>
           </a:xfrm>
           <a:prstGeom prst="rect">
             <a:avLst/>
@@ -8381,7 +8568,7 @@
         <p:spPr>
           <a:xfrm>
             <a:off x="457200" y="6446520"/>
-            <a:ext cx="6399360" cy="272880"/>
+            <a:ext cx="6398640" cy="272160"/>
           </a:xfrm>
           <a:prstGeom prst="rect">
             <a:avLst/>
@@ -8442,7 +8629,7 @@
         <p:spPr>
           <a:xfrm>
             <a:off x="11521440" y="6446520"/>
-            <a:ext cx="455760" cy="272880"/>
+            <a:ext cx="455040" cy="272160"/>
           </a:xfrm>
           <a:prstGeom prst="rect">
             <a:avLst/>
@@ -8540,7 +8727,7 @@
         <p:spPr>
           <a:xfrm>
             <a:off x="-1828800" y="5120640"/>
-            <a:ext cx="3656160" cy="3656160"/>
+            <a:ext cx="3655440" cy="3655440"/>
           </a:xfrm>
           <a:prstGeom prst="ellipse">
             <a:avLst/>
@@ -8583,7 +8770,7 @@
         <p:spPr>
           <a:xfrm>
             <a:off x="457200" y="457200"/>
-            <a:ext cx="638640" cy="638640"/>
+            <a:ext cx="637920" cy="637920"/>
           </a:xfrm>
           <a:prstGeom prst="ellipse">
             <a:avLst/>
@@ -8630,7 +8817,7 @@
         <p:spPr>
           <a:xfrm>
             <a:off x="553320" y="553320"/>
-            <a:ext cx="446760" cy="446760"/>
+            <a:ext cx="446040" cy="446040"/>
           </a:xfrm>
           <a:prstGeom prst="rect">
             <a:avLst/>
@@ -8650,7 +8837,7 @@
         <p:spPr>
           <a:xfrm>
             <a:off x="1280160" y="457200"/>
-            <a:ext cx="10422720" cy="638640"/>
+            <a:ext cx="10422000" cy="637920"/>
           </a:xfrm>
           <a:prstGeom prst="rect">
             <a:avLst/>
@@ -8711,7 +8898,7 @@
         <p:spPr>
           <a:xfrm>
             <a:off x="548640" y="1828800"/>
-            <a:ext cx="4753440" cy="4021920"/>
+            <a:ext cx="4752720" cy="4021200"/>
           </a:xfrm>
           <a:prstGeom prst="rect">
             <a:avLst/>
@@ -8847,7 +9034,7 @@
         <p:spPr>
           <a:xfrm>
             <a:off x="5486400" y="1691640"/>
-            <a:ext cx="6216480" cy="4341960"/>
+            <a:ext cx="6215760" cy="4341240"/>
           </a:xfrm>
           <a:prstGeom prst="roundRect">
             <a:avLst>
@@ -8892,7 +9079,7 @@
         <p:spPr>
           <a:xfrm>
             <a:off x="5806440" y="1965960"/>
-            <a:ext cx="5576400" cy="3793320"/>
+            <a:ext cx="5575680" cy="3792600"/>
           </a:xfrm>
           <a:prstGeom prst="rect">
             <a:avLst/>
@@ -9193,7 +9380,7 @@
         <p:spPr>
           <a:xfrm>
             <a:off x="457200" y="6446520"/>
-            <a:ext cx="6399360" cy="272880"/>
+            <a:ext cx="6398640" cy="272160"/>
           </a:xfrm>
           <a:prstGeom prst="rect">
             <a:avLst/>
@@ -9254,7 +9441,7 @@
         <p:spPr>
           <a:xfrm>
             <a:off x="11521440" y="6446520"/>
-            <a:ext cx="455760" cy="272880"/>
+            <a:ext cx="455040" cy="272160"/>
           </a:xfrm>
           <a:prstGeom prst="rect">
             <a:avLst/>
@@ -9352,7 +9539,7 @@
         <p:spPr>
           <a:xfrm>
             <a:off x="-1828800" y="5029200"/>
-            <a:ext cx="3656160" cy="3656160"/>
+            <a:ext cx="3655440" cy="3655440"/>
           </a:xfrm>
           <a:prstGeom prst="ellipse">
             <a:avLst/>
@@ -9395,7 +9582,7 @@
         <p:spPr>
           <a:xfrm>
             <a:off x="457200" y="457200"/>
-            <a:ext cx="638640" cy="638640"/>
+            <a:ext cx="637920" cy="637920"/>
           </a:xfrm>
           <a:prstGeom prst="ellipse">
             <a:avLst/>
@@ -9442,7 +9629,7 @@
         <p:spPr>
           <a:xfrm>
             <a:off x="553320" y="553320"/>
-            <a:ext cx="446760" cy="446760"/>
+            <a:ext cx="446040" cy="446040"/>
           </a:xfrm>
           <a:prstGeom prst="rect">
             <a:avLst/>
@@ -9462,7 +9649,7 @@
         <p:spPr>
           <a:xfrm>
             <a:off x="1280160" y="457200"/>
-            <a:ext cx="10422720" cy="638640"/>
+            <a:ext cx="10422000" cy="637920"/>
           </a:xfrm>
           <a:prstGeom prst="rect">
             <a:avLst/>
@@ -9523,7 +9710,7 @@
         <p:spPr>
           <a:xfrm>
             <a:off x="457200" y="1600200"/>
-            <a:ext cx="11273040" cy="4479120"/>
+            <a:ext cx="11272320" cy="4478400"/>
           </a:xfrm>
           <a:prstGeom prst="roundRect">
             <a:avLst>
@@ -9568,7 +9755,7 @@
         <p:spPr>
           <a:xfrm>
             <a:off x="822960" y="1828800"/>
-            <a:ext cx="10514160" cy="455760"/>
+            <a:ext cx="10513440" cy="455040"/>
           </a:xfrm>
           <a:prstGeom prst="rect">
             <a:avLst/>
@@ -9629,7 +9816,7 @@
         <p:spPr>
           <a:xfrm>
             <a:off x="822960" y="2423160"/>
-            <a:ext cx="382680" cy="382680"/>
+            <a:ext cx="381960" cy="381960"/>
           </a:xfrm>
           <a:prstGeom prst="ellipse">
             <a:avLst/>
@@ -9672,7 +9859,7 @@
         <p:spPr>
           <a:xfrm>
             <a:off x="822960" y="2423160"/>
-            <a:ext cx="382680" cy="382680"/>
+            <a:ext cx="381960" cy="381960"/>
           </a:xfrm>
           <a:prstGeom prst="rect">
             <a:avLst/>
@@ -9733,7 +9920,7 @@
         <p:spPr>
           <a:xfrm>
             <a:off x="1435680" y="2423160"/>
-            <a:ext cx="9581400" cy="382680"/>
+            <a:ext cx="9580680" cy="381960"/>
           </a:xfrm>
           <a:prstGeom prst="rect">
             <a:avLst/>
@@ -9794,7 +9981,7 @@
         <p:spPr>
           <a:xfrm>
             <a:off x="822960" y="3009960"/>
-            <a:ext cx="382680" cy="382680"/>
+            <a:ext cx="381960" cy="381960"/>
           </a:xfrm>
           <a:prstGeom prst="ellipse">
             <a:avLst/>
@@ -9837,7 +10024,7 @@
         <p:spPr>
           <a:xfrm>
             <a:off x="822960" y="3009960"/>
-            <a:ext cx="382680" cy="382680"/>
+            <a:ext cx="381960" cy="381960"/>
           </a:xfrm>
           <a:prstGeom prst="rect">
             <a:avLst/>
@@ -9898,7 +10085,7 @@
         <p:spPr>
           <a:xfrm>
             <a:off x="1435680" y="3009960"/>
-            <a:ext cx="9581400" cy="382680"/>
+            <a:ext cx="9580680" cy="381960"/>
           </a:xfrm>
           <a:prstGeom prst="rect">
             <a:avLst/>
@@ -9959,7 +10146,7 @@
         <p:spPr>
           <a:xfrm>
             <a:off x="822960" y="3596760"/>
-            <a:ext cx="382680" cy="382680"/>
+            <a:ext cx="381960" cy="381960"/>
           </a:xfrm>
           <a:prstGeom prst="ellipse">
             <a:avLst/>
@@ -10002,7 +10189,7 @@
         <p:spPr>
           <a:xfrm>
             <a:off x="822960" y="3596760"/>
-            <a:ext cx="382680" cy="382680"/>
+            <a:ext cx="381960" cy="381960"/>
           </a:xfrm>
           <a:prstGeom prst="rect">
             <a:avLst/>
@@ -10063,7 +10250,7 @@
         <p:spPr>
           <a:xfrm>
             <a:off x="1435680" y="3596760"/>
-            <a:ext cx="9581400" cy="382680"/>
+            <a:ext cx="9580680" cy="381960"/>
           </a:xfrm>
           <a:prstGeom prst="rect">
             <a:avLst/>
@@ -10124,7 +10311,7 @@
         <p:spPr>
           <a:xfrm>
             <a:off x="822960" y="4183560"/>
-            <a:ext cx="382680" cy="382680"/>
+            <a:ext cx="381960" cy="381960"/>
           </a:xfrm>
           <a:prstGeom prst="ellipse">
             <a:avLst/>
@@ -10167,7 +10354,7 @@
         <p:spPr>
           <a:xfrm>
             <a:off x="822960" y="4183560"/>
-            <a:ext cx="382680" cy="382680"/>
+            <a:ext cx="381960" cy="381960"/>
           </a:xfrm>
           <a:prstGeom prst="rect">
             <a:avLst/>
@@ -10228,7 +10415,7 @@
         <p:spPr>
           <a:xfrm>
             <a:off x="1435680" y="4183560"/>
-            <a:ext cx="9581400" cy="382680"/>
+            <a:ext cx="9580680" cy="381960"/>
           </a:xfrm>
           <a:prstGeom prst="rect">
             <a:avLst/>
@@ -10289,7 +10476,7 @@
         <p:spPr>
           <a:xfrm>
             <a:off x="822960" y="4770000"/>
-            <a:ext cx="382680" cy="382680"/>
+            <a:ext cx="381960" cy="381960"/>
           </a:xfrm>
           <a:prstGeom prst="ellipse">
             <a:avLst/>
@@ -10332,7 +10519,7 @@
         <p:spPr>
           <a:xfrm>
             <a:off x="822960" y="4770000"/>
-            <a:ext cx="382680" cy="382680"/>
+            <a:ext cx="381960" cy="381960"/>
           </a:xfrm>
           <a:prstGeom prst="rect">
             <a:avLst/>
@@ -10393,7 +10580,7 @@
         <p:spPr>
           <a:xfrm>
             <a:off x="1435680" y="4770000"/>
-            <a:ext cx="9581400" cy="382680"/>
+            <a:ext cx="9580680" cy="381960"/>
           </a:xfrm>
           <a:prstGeom prst="rect">
             <a:avLst/>
@@ -10454,7 +10641,7 @@
         <p:spPr>
           <a:xfrm>
             <a:off x="822960" y="5356800"/>
-            <a:ext cx="382680" cy="382680"/>
+            <a:ext cx="381960" cy="381960"/>
           </a:xfrm>
           <a:prstGeom prst="ellipse">
             <a:avLst/>
@@ -10497,7 +10684,7 @@
         <p:spPr>
           <a:xfrm>
             <a:off x="822960" y="5356800"/>
-            <a:ext cx="382680" cy="382680"/>
+            <a:ext cx="381960" cy="381960"/>
           </a:xfrm>
           <a:prstGeom prst="rect">
             <a:avLst/>
@@ -10558,7 +10745,7 @@
         <p:spPr>
           <a:xfrm>
             <a:off x="1435680" y="5356800"/>
-            <a:ext cx="9581400" cy="382680"/>
+            <a:ext cx="9580680" cy="381960"/>
           </a:xfrm>
           <a:prstGeom prst="rect">
             <a:avLst/>
@@ -10619,7 +10806,7 @@
         <p:spPr>
           <a:xfrm>
             <a:off x="457200" y="6446520"/>
-            <a:ext cx="6399360" cy="272880"/>
+            <a:ext cx="6398640" cy="272160"/>
           </a:xfrm>
           <a:prstGeom prst="rect">
             <a:avLst/>
@@ -10680,7 +10867,7 @@
         <p:spPr>
           <a:xfrm>
             <a:off x="11521440" y="6446520"/>
-            <a:ext cx="455760" cy="272880"/>
+            <a:ext cx="455040" cy="272160"/>
           </a:xfrm>
           <a:prstGeom prst="rect">
             <a:avLst/>
@@ -10778,7 +10965,7 @@
         <p:spPr>
           <a:xfrm>
             <a:off x="-1828800" y="4114800"/>
-            <a:ext cx="5484960" cy="5484960"/>
+            <a:ext cx="5484240" cy="5484240"/>
           </a:xfrm>
           <a:prstGeom prst="ellipse">
             <a:avLst/>
@@ -10821,7 +11008,7 @@
         <p:spPr>
           <a:xfrm>
             <a:off x="9601200" y="-2286000"/>
-            <a:ext cx="5484960" cy="5484960"/>
+            <a:ext cx="5484240" cy="5484240"/>
           </a:xfrm>
           <a:prstGeom prst="ellipse">
             <a:avLst/>
@@ -10864,7 +11051,7 @@
         <p:spPr>
           <a:xfrm>
             <a:off x="5591520" y="731520"/>
-            <a:ext cx="1004400" cy="1004400"/>
+            <a:ext cx="1003680" cy="1003680"/>
           </a:xfrm>
           <a:prstGeom prst="ellipse">
             <a:avLst/>
@@ -10911,7 +11098,7 @@
         <p:spPr>
           <a:xfrm>
             <a:off x="5742360" y="882360"/>
-            <a:ext cx="702720" cy="702720"/>
+            <a:ext cx="702000" cy="702000"/>
           </a:xfrm>
           <a:prstGeom prst="rect">
             <a:avLst/>
@@ -10931,7 +11118,7 @@
         <p:spPr>
           <a:xfrm>
             <a:off x="914400" y="1965960"/>
-            <a:ext cx="10358640" cy="364320"/>
+            <a:ext cx="10357920" cy="363600"/>
           </a:xfrm>
           <a:prstGeom prst="rect">
             <a:avLst/>
@@ -10992,7 +11179,7 @@
         <p:spPr>
           <a:xfrm>
             <a:off x="914400" y="2377440"/>
-            <a:ext cx="10358640" cy="2010240"/>
+            <a:ext cx="10357920" cy="2009520"/>
           </a:xfrm>
           <a:prstGeom prst="rect">
             <a:avLst/>
@@ -11053,7 +11240,7 @@
         <p:spPr>
           <a:xfrm>
             <a:off x="11521440" y="6446520"/>
-            <a:ext cx="455760" cy="272880"/>
+            <a:ext cx="455040" cy="272160"/>
           </a:xfrm>
           <a:prstGeom prst="rect">
             <a:avLst/>
@@ -11151,7 +11338,7 @@
         <p:spPr>
           <a:xfrm>
             <a:off x="-1828800" y="5120640"/>
-            <a:ext cx="3656160" cy="3656160"/>
+            <a:ext cx="3655440" cy="3655440"/>
           </a:xfrm>
           <a:prstGeom prst="ellipse">
             <a:avLst/>
@@ -11194,7 +11381,7 @@
         <p:spPr>
           <a:xfrm>
             <a:off x="457200" y="457200"/>
-            <a:ext cx="638640" cy="638640"/>
+            <a:ext cx="637920" cy="637920"/>
           </a:xfrm>
           <a:prstGeom prst="ellipse">
             <a:avLst/>
@@ -11241,7 +11428,7 @@
         <p:spPr>
           <a:xfrm>
             <a:off x="553320" y="553320"/>
-            <a:ext cx="446760" cy="446760"/>
+            <a:ext cx="446040" cy="446040"/>
           </a:xfrm>
           <a:prstGeom prst="rect">
             <a:avLst/>
@@ -11261,7 +11448,7 @@
         <p:spPr>
           <a:xfrm>
             <a:off x="1280160" y="457200"/>
-            <a:ext cx="10422720" cy="638640"/>
+            <a:ext cx="10422000" cy="637920"/>
           </a:xfrm>
           <a:prstGeom prst="rect">
             <a:avLst/>
@@ -11322,7 +11509,7 @@
         <p:spPr>
           <a:xfrm>
             <a:off x="548640" y="1828800"/>
-            <a:ext cx="4753440" cy="4021920"/>
+            <a:ext cx="4752720" cy="4021200"/>
           </a:xfrm>
           <a:prstGeom prst="rect">
             <a:avLst/>
@@ -11458,7 +11645,7 @@
         <p:spPr>
           <a:xfrm>
             <a:off x="5486400" y="1691640"/>
-            <a:ext cx="6216480" cy="4341960"/>
+            <a:ext cx="6215760" cy="4341240"/>
           </a:xfrm>
           <a:prstGeom prst="roundRect">
             <a:avLst>
@@ -11503,7 +11690,7 @@
         <p:spPr>
           <a:xfrm>
             <a:off x="5806440" y="1965960"/>
-            <a:ext cx="5576400" cy="3793320"/>
+            <a:ext cx="5575680" cy="3792600"/>
           </a:xfrm>
           <a:prstGeom prst="rect">
             <a:avLst/>
@@ -11744,7 +11931,7 @@
         <p:spPr>
           <a:xfrm>
             <a:off x="457200" y="6446520"/>
-            <a:ext cx="6399360" cy="272880"/>
+            <a:ext cx="6398640" cy="272160"/>
           </a:xfrm>
           <a:prstGeom prst="rect">
             <a:avLst/>
@@ -11805,7 +11992,7 @@
         <p:spPr>
           <a:xfrm>
             <a:off x="11521440" y="6446520"/>
-            <a:ext cx="455760" cy="272880"/>
+            <a:ext cx="455040" cy="272160"/>
           </a:xfrm>
           <a:prstGeom prst="rect">
             <a:avLst/>
@@ -11903,7 +12090,7 @@
         <p:spPr>
           <a:xfrm>
             <a:off x="457200" y="457200"/>
-            <a:ext cx="638640" cy="638640"/>
+            <a:ext cx="637920" cy="637920"/>
           </a:xfrm>
           <a:prstGeom prst="ellipse">
             <a:avLst/>
@@ -11950,7 +12137,7 @@
         <p:spPr>
           <a:xfrm>
             <a:off x="553320" y="553320"/>
-            <a:ext cx="446760" cy="446760"/>
+            <a:ext cx="446040" cy="446040"/>
           </a:xfrm>
           <a:prstGeom prst="rect">
             <a:avLst/>
@@ -11970,7 +12157,7 @@
         <p:spPr>
           <a:xfrm>
             <a:off x="1280160" y="457200"/>
-            <a:ext cx="10422720" cy="638640"/>
+            <a:ext cx="10422000" cy="637920"/>
           </a:xfrm>
           <a:prstGeom prst="rect">
             <a:avLst/>
@@ -12031,7 +12218,7 @@
         <p:spPr>
           <a:xfrm>
             <a:off x="457200" y="1645920"/>
-            <a:ext cx="5347800" cy="4479120"/>
+            <a:ext cx="5347080" cy="4478400"/>
           </a:xfrm>
           <a:prstGeom prst="roundRect">
             <a:avLst>
@@ -12076,7 +12263,7 @@
         <p:spPr>
           <a:xfrm>
             <a:off x="731520" y="1874520"/>
-            <a:ext cx="455760" cy="455760"/>
+            <a:ext cx="455040" cy="455040"/>
           </a:xfrm>
           <a:prstGeom prst="ellipse">
             <a:avLst/>
@@ -12123,7 +12310,7 @@
         <p:spPr>
           <a:xfrm>
             <a:off x="800280" y="1943280"/>
-            <a:ext cx="318600" cy="318600"/>
+            <a:ext cx="317880" cy="317880"/>
           </a:xfrm>
           <a:prstGeom prst="rect">
             <a:avLst/>
@@ -12143,7 +12330,7 @@
         <p:spPr>
           <a:xfrm>
             <a:off x="1325880" y="1874520"/>
-            <a:ext cx="4341960" cy="455760"/>
+            <a:ext cx="4341240" cy="455040"/>
           </a:xfrm>
           <a:prstGeom prst="rect">
             <a:avLst/>
@@ -12204,7 +12391,7 @@
         <p:spPr>
           <a:xfrm>
             <a:off x="731520" y="2514600"/>
-            <a:ext cx="4799160" cy="3381840"/>
+            <a:ext cx="4798440" cy="3381120"/>
           </a:xfrm>
           <a:prstGeom prst="rect">
             <a:avLst/>
@@ -12340,7 +12527,7 @@
         <p:spPr>
           <a:xfrm>
             <a:off x="6172200" y="1645920"/>
-            <a:ext cx="5347800" cy="4479120"/>
+            <a:ext cx="5347080" cy="4478400"/>
           </a:xfrm>
           <a:prstGeom prst="roundRect">
             <a:avLst>
@@ -12385,7 +12572,7 @@
         <p:spPr>
           <a:xfrm>
             <a:off x="6446520" y="1874520"/>
-            <a:ext cx="455760" cy="455760"/>
+            <a:ext cx="455040" cy="455040"/>
           </a:xfrm>
           <a:prstGeom prst="ellipse">
             <a:avLst/>
@@ -12432,7 +12619,7 @@
         <p:spPr>
           <a:xfrm>
             <a:off x="6515280" y="1943280"/>
-            <a:ext cx="318600" cy="318600"/>
+            <a:ext cx="317880" cy="317880"/>
           </a:xfrm>
           <a:prstGeom prst="rect">
             <a:avLst/>
@@ -12452,7 +12639,7 @@
         <p:spPr>
           <a:xfrm>
             <a:off x="7040880" y="1874520"/>
-            <a:ext cx="4341960" cy="455760"/>
+            <a:ext cx="4341240" cy="455040"/>
           </a:xfrm>
           <a:prstGeom prst="rect">
             <a:avLst/>
@@ -12513,7 +12700,7 @@
         <p:spPr>
           <a:xfrm>
             <a:off x="6446520" y="2514600"/>
-            <a:ext cx="4799160" cy="3381840"/>
+            <a:ext cx="4798440" cy="3381120"/>
           </a:xfrm>
           <a:prstGeom prst="rect">
             <a:avLst/>
@@ -12649,7 +12836,7 @@
         <p:spPr>
           <a:xfrm>
             <a:off x="457200" y="6446520"/>
-            <a:ext cx="6399360" cy="272880"/>
+            <a:ext cx="6398640" cy="272160"/>
           </a:xfrm>
           <a:prstGeom prst="rect">
             <a:avLst/>
@@ -12710,7 +12897,7 @@
         <p:spPr>
           <a:xfrm>
             <a:off x="11521440" y="6446520"/>
-            <a:ext cx="455760" cy="272880"/>
+            <a:ext cx="455040" cy="272160"/>
           </a:xfrm>
           <a:prstGeom prst="rect">
             <a:avLst/>
@@ -12808,7 +12995,7 @@
         <p:spPr>
           <a:xfrm>
             <a:off x="-1828800" y="5120640"/>
-            <a:ext cx="3656160" cy="3656160"/>
+            <a:ext cx="3655440" cy="3655440"/>
           </a:xfrm>
           <a:prstGeom prst="ellipse">
             <a:avLst/>
@@ -12851,7 +13038,7 @@
         <p:spPr>
           <a:xfrm>
             <a:off x="457200" y="457200"/>
-            <a:ext cx="638640" cy="638640"/>
+            <a:ext cx="637920" cy="637920"/>
           </a:xfrm>
           <a:prstGeom prst="ellipse">
             <a:avLst/>
@@ -12898,7 +13085,7 @@
         <p:spPr>
           <a:xfrm>
             <a:off x="553320" y="553320"/>
-            <a:ext cx="446760" cy="446760"/>
+            <a:ext cx="446040" cy="446040"/>
           </a:xfrm>
           <a:prstGeom prst="rect">
             <a:avLst/>
@@ -12918,7 +13105,7 @@
         <p:spPr>
           <a:xfrm>
             <a:off x="1280160" y="457200"/>
-            <a:ext cx="10422720" cy="638640"/>
+            <a:ext cx="10422000" cy="637920"/>
           </a:xfrm>
           <a:prstGeom prst="rect">
             <a:avLst/>
@@ -12979,7 +13166,7 @@
         <p:spPr>
           <a:xfrm>
             <a:off x="548640" y="1828800"/>
-            <a:ext cx="4753440" cy="4021920"/>
+            <a:ext cx="4752720" cy="4021200"/>
           </a:xfrm>
           <a:prstGeom prst="rect">
             <a:avLst/>
@@ -13115,7 +13302,7 @@
         <p:spPr>
           <a:xfrm>
             <a:off x="5486400" y="1691640"/>
-            <a:ext cx="6216480" cy="4341960"/>
+            <a:ext cx="6215760" cy="4341240"/>
           </a:xfrm>
           <a:prstGeom prst="roundRect">
             <a:avLst>
@@ -13160,7 +13347,7 @@
         <p:spPr>
           <a:xfrm>
             <a:off x="5806440" y="1965960"/>
-            <a:ext cx="5576400" cy="3793320"/>
+            <a:ext cx="5575680" cy="3792600"/>
           </a:xfrm>
           <a:prstGeom prst="rect">
             <a:avLst/>
@@ -13491,7 +13678,7 @@
         <p:spPr>
           <a:xfrm>
             <a:off x="457200" y="6446520"/>
-            <a:ext cx="6399360" cy="272880"/>
+            <a:ext cx="6398640" cy="272160"/>
           </a:xfrm>
           <a:prstGeom prst="rect">
             <a:avLst/>
@@ -13552,7 +13739,7 @@
         <p:spPr>
           <a:xfrm>
             <a:off x="11521440" y="6446520"/>
-            <a:ext cx="455760" cy="272880"/>
+            <a:ext cx="455040" cy="272160"/>
           </a:xfrm>
           <a:prstGeom prst="rect">
             <a:avLst/>
@@ -13650,7 +13837,7 @@
         <p:spPr>
           <a:xfrm>
             <a:off x="-1828800" y="5120640"/>
-            <a:ext cx="3656160" cy="3656160"/>
+            <a:ext cx="3655440" cy="3655440"/>
           </a:xfrm>
           <a:prstGeom prst="ellipse">
             <a:avLst/>
@@ -13693,7 +13880,7 @@
         <p:spPr>
           <a:xfrm>
             <a:off x="457200" y="457200"/>
-            <a:ext cx="638640" cy="638640"/>
+            <a:ext cx="637920" cy="637920"/>
           </a:xfrm>
           <a:prstGeom prst="ellipse">
             <a:avLst/>
@@ -13740,7 +13927,7 @@
         <p:spPr>
           <a:xfrm>
             <a:off x="553320" y="553320"/>
-            <a:ext cx="446760" cy="446760"/>
+            <a:ext cx="446040" cy="446040"/>
           </a:xfrm>
           <a:prstGeom prst="rect">
             <a:avLst/>
@@ -13760,7 +13947,7 @@
         <p:spPr>
           <a:xfrm>
             <a:off x="1280160" y="457200"/>
-            <a:ext cx="10422720" cy="638640"/>
+            <a:ext cx="10422000" cy="637920"/>
           </a:xfrm>
           <a:prstGeom prst="rect">
             <a:avLst/>
@@ -13821,7 +14008,7 @@
         <p:spPr>
           <a:xfrm>
             <a:off x="548640" y="1828800"/>
-            <a:ext cx="4753440" cy="4021920"/>
+            <a:ext cx="4752720" cy="4021200"/>
           </a:xfrm>
           <a:prstGeom prst="rect">
             <a:avLst/>
@@ -13922,7 +14109,7 @@
         <p:spPr>
           <a:xfrm>
             <a:off x="5486400" y="1691640"/>
-            <a:ext cx="6216480" cy="4341960"/>
+            <a:ext cx="6215760" cy="4341240"/>
           </a:xfrm>
           <a:prstGeom prst="roundRect">
             <a:avLst>
@@ -13967,7 +14154,7 @@
         <p:spPr>
           <a:xfrm>
             <a:off x="5806440" y="1965960"/>
-            <a:ext cx="5576400" cy="3793320"/>
+            <a:ext cx="5575680" cy="3792600"/>
           </a:xfrm>
           <a:prstGeom prst="rect">
             <a:avLst/>
@@ -14208,7 +14395,7 @@
         <p:spPr>
           <a:xfrm>
             <a:off x="457200" y="6446520"/>
-            <a:ext cx="6399360" cy="272880"/>
+            <a:ext cx="6398640" cy="272160"/>
           </a:xfrm>
           <a:prstGeom prst="rect">
             <a:avLst/>
@@ -14269,7 +14456,7 @@
         <p:spPr>
           <a:xfrm>
             <a:off x="11521440" y="6446520"/>
-            <a:ext cx="455760" cy="272880"/>
+            <a:ext cx="455040" cy="272160"/>
           </a:xfrm>
           <a:prstGeom prst="rect">
             <a:avLst/>
@@ -14367,7 +14554,7 @@
         <p:spPr>
           <a:xfrm>
             <a:off x="-1828800" y="5120640"/>
-            <a:ext cx="3656160" cy="3656160"/>
+            <a:ext cx="3655440" cy="3655440"/>
           </a:xfrm>
           <a:prstGeom prst="ellipse">
             <a:avLst/>
@@ -14410,7 +14597,7 @@
         <p:spPr>
           <a:xfrm>
             <a:off x="457200" y="457200"/>
-            <a:ext cx="638640" cy="638640"/>
+            <a:ext cx="637920" cy="637920"/>
           </a:xfrm>
           <a:prstGeom prst="ellipse">
             <a:avLst/>
@@ -14457,7 +14644,7 @@
         <p:spPr>
           <a:xfrm>
             <a:off x="553320" y="553320"/>
-            <a:ext cx="446760" cy="446760"/>
+            <a:ext cx="446040" cy="446040"/>
           </a:xfrm>
           <a:prstGeom prst="rect">
             <a:avLst/>
@@ -14477,7 +14664,7 @@
         <p:spPr>
           <a:xfrm>
             <a:off x="1280160" y="457200"/>
-            <a:ext cx="10422720" cy="638640"/>
+            <a:ext cx="10422000" cy="637920"/>
           </a:xfrm>
           <a:prstGeom prst="rect">
             <a:avLst/>
@@ -14538,7 +14725,7 @@
         <p:spPr>
           <a:xfrm>
             <a:off x="548640" y="1828800"/>
-            <a:ext cx="4753440" cy="4021920"/>
+            <a:ext cx="4752720" cy="4021200"/>
           </a:xfrm>
           <a:prstGeom prst="rect">
             <a:avLst/>
@@ -14639,7 +14826,7 @@
         <p:spPr>
           <a:xfrm>
             <a:off x="5486400" y="1691640"/>
-            <a:ext cx="6216480" cy="4341960"/>
+            <a:ext cx="6215760" cy="4341240"/>
           </a:xfrm>
           <a:prstGeom prst="roundRect">
             <a:avLst>
@@ -14684,7 +14871,7 @@
         <p:spPr>
           <a:xfrm>
             <a:off x="5806440" y="1965960"/>
-            <a:ext cx="5576400" cy="3793320"/>
+            <a:ext cx="5575680" cy="3792600"/>
           </a:xfrm>
           <a:prstGeom prst="rect">
             <a:avLst/>
@@ -14925,7 +15112,7 @@
         <p:spPr>
           <a:xfrm>
             <a:off x="457200" y="6446520"/>
-            <a:ext cx="6399360" cy="272880"/>
+            <a:ext cx="6398640" cy="272160"/>
           </a:xfrm>
           <a:prstGeom prst="rect">
             <a:avLst/>
@@ -14986,7 +15173,7 @@
         <p:spPr>
           <a:xfrm>
             <a:off x="11521440" y="6446520"/>
-            <a:ext cx="455760" cy="272880"/>
+            <a:ext cx="455040" cy="272160"/>
           </a:xfrm>
           <a:prstGeom prst="rect">
             <a:avLst/>
@@ -15084,7 +15271,7 @@
         <p:spPr>
           <a:xfrm>
             <a:off x="-1828800" y="5029200"/>
-            <a:ext cx="3656160" cy="3656160"/>
+            <a:ext cx="3655440" cy="3655440"/>
           </a:xfrm>
           <a:prstGeom prst="ellipse">
             <a:avLst/>
@@ -15127,7 +15314,7 @@
         <p:spPr>
           <a:xfrm>
             <a:off x="457200" y="457200"/>
-            <a:ext cx="638640" cy="638640"/>
+            <a:ext cx="637920" cy="637920"/>
           </a:xfrm>
           <a:prstGeom prst="ellipse">
             <a:avLst/>
@@ -15174,7 +15361,7 @@
         <p:spPr>
           <a:xfrm>
             <a:off x="553320" y="553320"/>
-            <a:ext cx="446760" cy="446760"/>
+            <a:ext cx="446040" cy="446040"/>
           </a:xfrm>
           <a:prstGeom prst="rect">
             <a:avLst/>
@@ -15194,7 +15381,7 @@
         <p:spPr>
           <a:xfrm>
             <a:off x="1280160" y="457200"/>
-            <a:ext cx="10422720" cy="638640"/>
+            <a:ext cx="10422000" cy="637920"/>
           </a:xfrm>
           <a:prstGeom prst="rect">
             <a:avLst/>
@@ -15255,7 +15442,7 @@
         <p:spPr>
           <a:xfrm>
             <a:off x="457200" y="1600200"/>
-            <a:ext cx="11273040" cy="4479120"/>
+            <a:ext cx="11272320" cy="4478400"/>
           </a:xfrm>
           <a:prstGeom prst="roundRect">
             <a:avLst>
@@ -15300,7 +15487,7 @@
         <p:spPr>
           <a:xfrm>
             <a:off x="822960" y="1828800"/>
-            <a:ext cx="10514160" cy="455760"/>
+            <a:ext cx="10513440" cy="455040"/>
           </a:xfrm>
           <a:prstGeom prst="rect">
             <a:avLst/>
@@ -15361,7 +15548,7 @@
         <p:spPr>
           <a:xfrm>
             <a:off x="822960" y="2423160"/>
-            <a:ext cx="382680" cy="382680"/>
+            <a:ext cx="381960" cy="381960"/>
           </a:xfrm>
           <a:prstGeom prst="ellipse">
             <a:avLst/>
@@ -15404,7 +15591,7 @@
         <p:spPr>
           <a:xfrm>
             <a:off x="822960" y="2423160"/>
-            <a:ext cx="382680" cy="382680"/>
+            <a:ext cx="381960" cy="381960"/>
           </a:xfrm>
           <a:prstGeom prst="rect">
             <a:avLst/>
@@ -15465,7 +15652,7 @@
         <p:spPr>
           <a:xfrm>
             <a:off x="1435680" y="2423160"/>
-            <a:ext cx="9581400" cy="382680"/>
+            <a:ext cx="9580680" cy="381960"/>
           </a:xfrm>
           <a:prstGeom prst="rect">
             <a:avLst/>
@@ -15526,7 +15713,7 @@
         <p:spPr>
           <a:xfrm>
             <a:off x="822960" y="3303360"/>
-            <a:ext cx="382680" cy="382680"/>
+            <a:ext cx="381960" cy="381960"/>
           </a:xfrm>
           <a:prstGeom prst="ellipse">
             <a:avLst/>
@@ -15569,7 +15756,7 @@
         <p:spPr>
           <a:xfrm>
             <a:off x="822960" y="3303360"/>
-            <a:ext cx="382680" cy="382680"/>
+            <a:ext cx="381960" cy="381960"/>
           </a:xfrm>
           <a:prstGeom prst="rect">
             <a:avLst/>
@@ -15630,7 +15817,7 @@
         <p:spPr>
           <a:xfrm>
             <a:off x="1435680" y="3303360"/>
-            <a:ext cx="9581400" cy="382680"/>
+            <a:ext cx="9580680" cy="381960"/>
           </a:xfrm>
           <a:prstGeom prst="rect">
             <a:avLst/>
@@ -15691,7 +15878,7 @@
         <p:spPr>
           <a:xfrm>
             <a:off x="822960" y="4183560"/>
-            <a:ext cx="382680" cy="382680"/>
+            <a:ext cx="381960" cy="381960"/>
           </a:xfrm>
           <a:prstGeom prst="ellipse">
             <a:avLst/>
@@ -15734,7 +15921,7 @@
         <p:spPr>
           <a:xfrm>
             <a:off x="822960" y="4183560"/>
-            <a:ext cx="382680" cy="382680"/>
+            <a:ext cx="381960" cy="381960"/>
           </a:xfrm>
           <a:prstGeom prst="rect">
             <a:avLst/>
@@ -15795,7 +15982,7 @@
         <p:spPr>
           <a:xfrm>
             <a:off x="1435680" y="4183560"/>
-            <a:ext cx="9581400" cy="382680"/>
+            <a:ext cx="9580680" cy="381960"/>
           </a:xfrm>
           <a:prstGeom prst="rect">
             <a:avLst/>
@@ -15856,7 +16043,7 @@
         <p:spPr>
           <a:xfrm>
             <a:off x="822960" y="5063400"/>
-            <a:ext cx="382680" cy="382680"/>
+            <a:ext cx="381960" cy="381960"/>
           </a:xfrm>
           <a:prstGeom prst="ellipse">
             <a:avLst/>
@@ -15899,7 +16086,7 @@
         <p:spPr>
           <a:xfrm>
             <a:off x="822960" y="5063400"/>
-            <a:ext cx="382680" cy="382680"/>
+            <a:ext cx="381960" cy="381960"/>
           </a:xfrm>
           <a:prstGeom prst="rect">
             <a:avLst/>
@@ -15960,7 +16147,7 @@
         <p:spPr>
           <a:xfrm>
             <a:off x="1435680" y="5063400"/>
-            <a:ext cx="9581400" cy="382680"/>
+            <a:ext cx="9580680" cy="381960"/>
           </a:xfrm>
           <a:prstGeom prst="rect">
             <a:avLst/>
@@ -16021,7 +16208,7 @@
         <p:spPr>
           <a:xfrm>
             <a:off x="457200" y="6446520"/>
-            <a:ext cx="6399360" cy="272880"/>
+            <a:ext cx="6398640" cy="272160"/>
           </a:xfrm>
           <a:prstGeom prst="rect">
             <a:avLst/>
@@ -16082,7 +16269,7 @@
         <p:spPr>
           <a:xfrm>
             <a:off x="11521440" y="6446520"/>
-            <a:ext cx="455760" cy="272880"/>
+            <a:ext cx="455040" cy="272160"/>
           </a:xfrm>
           <a:prstGeom prst="rect">
             <a:avLst/>
@@ -16180,7 +16367,7 @@
         <p:spPr>
           <a:xfrm>
             <a:off x="10515600" y="-1371600"/>
-            <a:ext cx="3656160" cy="3656160"/>
+            <a:ext cx="3655440" cy="3655440"/>
           </a:xfrm>
           <a:prstGeom prst="ellipse">
             <a:avLst/>
@@ -16223,7 +16410,7 @@
         <p:spPr>
           <a:xfrm>
             <a:off x="457200" y="457200"/>
-            <a:ext cx="638640" cy="638640"/>
+            <a:ext cx="637920" cy="637920"/>
           </a:xfrm>
           <a:prstGeom prst="ellipse">
             <a:avLst/>
@@ -16270,7 +16457,7 @@
         <p:spPr>
           <a:xfrm>
             <a:off x="553320" y="553320"/>
-            <a:ext cx="446760" cy="446760"/>
+            <a:ext cx="446040" cy="446040"/>
           </a:xfrm>
           <a:prstGeom prst="rect">
             <a:avLst/>
@@ -16290,7 +16477,7 @@
         <p:spPr>
           <a:xfrm>
             <a:off x="1280160" y="457200"/>
-            <a:ext cx="10422720" cy="638640"/>
+            <a:ext cx="10422000" cy="637920"/>
           </a:xfrm>
           <a:prstGeom prst="rect">
             <a:avLst/>
@@ -16351,7 +16538,7 @@
         <p:spPr>
           <a:xfrm>
             <a:off x="457200" y="1600200"/>
-            <a:ext cx="11273040" cy="445680"/>
+            <a:ext cx="11272320" cy="444960"/>
           </a:xfrm>
           <a:prstGeom prst="roundRect">
             <a:avLst>
@@ -16396,7 +16583,7 @@
         <p:spPr>
           <a:xfrm>
             <a:off x="621720" y="1662840"/>
-            <a:ext cx="320400" cy="320400"/>
+            <a:ext cx="319680" cy="319680"/>
           </a:xfrm>
           <a:prstGeom prst="ellipse">
             <a:avLst/>
@@ -16443,7 +16630,7 @@
         <p:spPr>
           <a:xfrm>
             <a:off x="669960" y="1711080"/>
-            <a:ext cx="223920" cy="223920"/>
+            <a:ext cx="223200" cy="223200"/>
           </a:xfrm>
           <a:prstGeom prst="rect">
             <a:avLst/>
@@ -16463,7 +16650,7 @@
         <p:spPr>
           <a:xfrm>
             <a:off x="1325880" y="1600200"/>
-            <a:ext cx="10056960" cy="445680"/>
+            <a:ext cx="10056240" cy="444960"/>
           </a:xfrm>
           <a:prstGeom prst="rect">
             <a:avLst/>
@@ -16524,7 +16711,7 @@
         <p:spPr>
           <a:xfrm>
             <a:off x="457200" y="2138760"/>
-            <a:ext cx="11273040" cy="445680"/>
+            <a:ext cx="11272320" cy="444960"/>
           </a:xfrm>
           <a:prstGeom prst="roundRect">
             <a:avLst>
@@ -16569,7 +16756,7 @@
         <p:spPr>
           <a:xfrm>
             <a:off x="621720" y="2201400"/>
-            <a:ext cx="320400" cy="320400"/>
+            <a:ext cx="319680" cy="319680"/>
           </a:xfrm>
           <a:prstGeom prst="ellipse">
             <a:avLst/>
@@ -16616,7 +16803,7 @@
         <p:spPr>
           <a:xfrm>
             <a:off x="669960" y="2249640"/>
-            <a:ext cx="223920" cy="223920"/>
+            <a:ext cx="223200" cy="223200"/>
           </a:xfrm>
           <a:prstGeom prst="rect">
             <a:avLst/>
@@ -16636,7 +16823,7 @@
         <p:spPr>
           <a:xfrm>
             <a:off x="1325880" y="2138760"/>
-            <a:ext cx="10056960" cy="445680"/>
+            <a:ext cx="10056240" cy="444960"/>
           </a:xfrm>
           <a:prstGeom prst="rect">
             <a:avLst/>
@@ -16697,7 +16884,7 @@
         <p:spPr>
           <a:xfrm>
             <a:off x="457200" y="2677320"/>
-            <a:ext cx="11273040" cy="445680"/>
+            <a:ext cx="11272320" cy="444960"/>
           </a:xfrm>
           <a:prstGeom prst="roundRect">
             <a:avLst>
@@ -16742,7 +16929,7 @@
         <p:spPr>
           <a:xfrm>
             <a:off x="621720" y="2739600"/>
-            <a:ext cx="320400" cy="320400"/>
+            <a:ext cx="319680" cy="319680"/>
           </a:xfrm>
           <a:prstGeom prst="ellipse">
             <a:avLst/>
@@ -16789,7 +16976,7 @@
         <p:spPr>
           <a:xfrm>
             <a:off x="669960" y="2788200"/>
-            <a:ext cx="223920" cy="223920"/>
+            <a:ext cx="223200" cy="223200"/>
           </a:xfrm>
           <a:prstGeom prst="rect">
             <a:avLst/>
@@ -16809,7 +16996,7 @@
         <p:spPr>
           <a:xfrm>
             <a:off x="1325880" y="2677320"/>
-            <a:ext cx="10056960" cy="445680"/>
+            <a:ext cx="10056240" cy="444960"/>
           </a:xfrm>
           <a:prstGeom prst="rect">
             <a:avLst/>
@@ -16870,7 +17057,7 @@
         <p:spPr>
           <a:xfrm>
             <a:off x="457200" y="3215520"/>
-            <a:ext cx="11273040" cy="445680"/>
+            <a:ext cx="11272320" cy="444960"/>
           </a:xfrm>
           <a:prstGeom prst="roundRect">
             <a:avLst>
@@ -16915,7 +17102,7 @@
         <p:spPr>
           <a:xfrm>
             <a:off x="621720" y="3278160"/>
-            <a:ext cx="320400" cy="320400"/>
+            <a:ext cx="319680" cy="319680"/>
           </a:xfrm>
           <a:prstGeom prst="ellipse">
             <a:avLst/>
@@ -16962,7 +17149,7 @@
         <p:spPr>
           <a:xfrm>
             <a:off x="669960" y="3326400"/>
-            <a:ext cx="223920" cy="223920"/>
+            <a:ext cx="223200" cy="223200"/>
           </a:xfrm>
           <a:prstGeom prst="rect">
             <a:avLst/>
@@ -16982,7 +17169,7 @@
         <p:spPr>
           <a:xfrm>
             <a:off x="1325880" y="3215520"/>
-            <a:ext cx="10056960" cy="445680"/>
+            <a:ext cx="10056240" cy="444960"/>
           </a:xfrm>
           <a:prstGeom prst="rect">
             <a:avLst/>
@@ -17043,7 +17230,7 @@
         <p:spPr>
           <a:xfrm>
             <a:off x="457200" y="3754080"/>
-            <a:ext cx="11273040" cy="445680"/>
+            <a:ext cx="11272320" cy="444960"/>
           </a:xfrm>
           <a:prstGeom prst="roundRect">
             <a:avLst>
@@ -17088,7 +17275,7 @@
         <p:spPr>
           <a:xfrm>
             <a:off x="621720" y="3816720"/>
-            <a:ext cx="320400" cy="320400"/>
+            <a:ext cx="319680" cy="319680"/>
           </a:xfrm>
           <a:prstGeom prst="ellipse">
             <a:avLst/>
@@ -17135,7 +17322,7 @@
         <p:spPr>
           <a:xfrm>
             <a:off x="669960" y="3864960"/>
-            <a:ext cx="223920" cy="223920"/>
+            <a:ext cx="223200" cy="223200"/>
           </a:xfrm>
           <a:prstGeom prst="rect">
             <a:avLst/>
@@ -17155,7 +17342,7 @@
         <p:spPr>
           <a:xfrm>
             <a:off x="1325880" y="3754080"/>
-            <a:ext cx="10056960" cy="445680"/>
+            <a:ext cx="10056240" cy="444960"/>
           </a:xfrm>
           <a:prstGeom prst="rect">
             <a:avLst/>
@@ -17216,7 +17403,7 @@
         <p:spPr>
           <a:xfrm>
             <a:off x="457200" y="4292640"/>
-            <a:ext cx="11273040" cy="445680"/>
+            <a:ext cx="11272320" cy="444960"/>
           </a:xfrm>
           <a:prstGeom prst="roundRect">
             <a:avLst>
@@ -17261,7 +17448,7 @@
         <p:spPr>
           <a:xfrm>
             <a:off x="621720" y="4355280"/>
-            <a:ext cx="320400" cy="320400"/>
+            <a:ext cx="319680" cy="319680"/>
           </a:xfrm>
           <a:prstGeom prst="ellipse">
             <a:avLst/>
@@ -17308,7 +17495,7 @@
         <p:spPr>
           <a:xfrm>
             <a:off x="669960" y="4403520"/>
-            <a:ext cx="223920" cy="223920"/>
+            <a:ext cx="223200" cy="223200"/>
           </a:xfrm>
           <a:prstGeom prst="rect">
             <a:avLst/>
@@ -17328,7 +17515,7 @@
         <p:spPr>
           <a:xfrm>
             <a:off x="1325880" y="4292640"/>
-            <a:ext cx="10056960" cy="445680"/>
+            <a:ext cx="10056240" cy="444960"/>
           </a:xfrm>
           <a:prstGeom prst="rect">
             <a:avLst/>
@@ -17389,7 +17576,7 @@
         <p:spPr>
           <a:xfrm>
             <a:off x="457200" y="4831200"/>
-            <a:ext cx="11273040" cy="445680"/>
+            <a:ext cx="11272320" cy="444960"/>
           </a:xfrm>
           <a:prstGeom prst="roundRect">
             <a:avLst>
@@ -17434,7 +17621,7 @@
         <p:spPr>
           <a:xfrm>
             <a:off x="621720" y="4893840"/>
-            <a:ext cx="320400" cy="320400"/>
+            <a:ext cx="319680" cy="319680"/>
           </a:xfrm>
           <a:prstGeom prst="ellipse">
             <a:avLst/>
@@ -17481,7 +17668,7 @@
         <p:spPr>
           <a:xfrm>
             <a:off x="669960" y="4942080"/>
-            <a:ext cx="223920" cy="223920"/>
+            <a:ext cx="223200" cy="223200"/>
           </a:xfrm>
           <a:prstGeom prst="rect">
             <a:avLst/>
@@ -17501,7 +17688,7 @@
         <p:spPr>
           <a:xfrm>
             <a:off x="1325880" y="4831200"/>
-            <a:ext cx="10056960" cy="445680"/>
+            <a:ext cx="10056240" cy="444960"/>
           </a:xfrm>
           <a:prstGeom prst="rect">
             <a:avLst/>
@@ -17562,7 +17749,7 @@
         <p:spPr>
           <a:xfrm>
             <a:off x="457200" y="5369400"/>
-            <a:ext cx="11273040" cy="445680"/>
+            <a:ext cx="11272320" cy="444960"/>
           </a:xfrm>
           <a:prstGeom prst="roundRect">
             <a:avLst>
@@ -17607,7 +17794,7 @@
         <p:spPr>
           <a:xfrm>
             <a:off x="621720" y="5432040"/>
-            <a:ext cx="320400" cy="320400"/>
+            <a:ext cx="319680" cy="319680"/>
           </a:xfrm>
           <a:prstGeom prst="ellipse">
             <a:avLst/>
@@ -17654,7 +17841,7 @@
         <p:spPr>
           <a:xfrm>
             <a:off x="669960" y="5480280"/>
-            <a:ext cx="223920" cy="223920"/>
+            <a:ext cx="223200" cy="223200"/>
           </a:xfrm>
           <a:prstGeom prst="rect">
             <a:avLst/>
@@ -17674,7 +17861,7 @@
         <p:spPr>
           <a:xfrm>
             <a:off x="1325880" y="5369400"/>
-            <a:ext cx="10056960" cy="445680"/>
+            <a:ext cx="10056240" cy="444960"/>
           </a:xfrm>
           <a:prstGeom prst="rect">
             <a:avLst/>
@@ -17735,7 +17922,7 @@
         <p:spPr>
           <a:xfrm>
             <a:off x="457200" y="5907960"/>
-            <a:ext cx="11273040" cy="445680"/>
+            <a:ext cx="11272320" cy="444960"/>
           </a:xfrm>
           <a:prstGeom prst="roundRect">
             <a:avLst>
@@ -17780,7 +17967,7 @@
         <p:spPr>
           <a:xfrm>
             <a:off x="621720" y="5970600"/>
-            <a:ext cx="320400" cy="320400"/>
+            <a:ext cx="319680" cy="319680"/>
           </a:xfrm>
           <a:prstGeom prst="ellipse">
             <a:avLst/>
@@ -17827,7 +18014,7 @@
         <p:spPr>
           <a:xfrm>
             <a:off x="669960" y="6018840"/>
-            <a:ext cx="223920" cy="223920"/>
+            <a:ext cx="223200" cy="223200"/>
           </a:xfrm>
           <a:prstGeom prst="rect">
             <a:avLst/>
@@ -17847,7 +18034,7 @@
         <p:spPr>
           <a:xfrm>
             <a:off x="1325880" y="5907960"/>
-            <a:ext cx="10056960" cy="445680"/>
+            <a:ext cx="10056240" cy="444960"/>
           </a:xfrm>
           <a:prstGeom prst="rect">
             <a:avLst/>
@@ -17908,7 +18095,7 @@
         <p:spPr>
           <a:xfrm>
             <a:off x="457200" y="6446520"/>
-            <a:ext cx="6399360" cy="272880"/>
+            <a:ext cx="6398640" cy="272160"/>
           </a:xfrm>
           <a:prstGeom prst="rect">
             <a:avLst/>
@@ -17969,7 +18156,7 @@
         <p:spPr>
           <a:xfrm>
             <a:off x="11521440" y="6446520"/>
-            <a:ext cx="455760" cy="272880"/>
+            <a:ext cx="455040" cy="272160"/>
           </a:xfrm>
           <a:prstGeom prst="rect">
             <a:avLst/>
@@ -18067,7 +18254,7 @@
         <p:spPr>
           <a:xfrm>
             <a:off x="-1828800" y="4114800"/>
-            <a:ext cx="5484960" cy="5484960"/>
+            <a:ext cx="5484240" cy="5484240"/>
           </a:xfrm>
           <a:prstGeom prst="ellipse">
             <a:avLst/>
@@ -18110,7 +18297,7 @@
         <p:spPr>
           <a:xfrm>
             <a:off x="9601200" y="-2286000"/>
-            <a:ext cx="5484960" cy="5484960"/>
+            <a:ext cx="5484240" cy="5484240"/>
           </a:xfrm>
           <a:prstGeom prst="ellipse">
             <a:avLst/>
@@ -18153,7 +18340,7 @@
         <p:spPr>
           <a:xfrm>
             <a:off x="5591520" y="731520"/>
-            <a:ext cx="1004400" cy="1004400"/>
+            <a:ext cx="1003680" cy="1003680"/>
           </a:xfrm>
           <a:prstGeom prst="ellipse">
             <a:avLst/>
@@ -18200,7 +18387,7 @@
         <p:spPr>
           <a:xfrm>
             <a:off x="5742360" y="882360"/>
-            <a:ext cx="702720" cy="702720"/>
+            <a:ext cx="702000" cy="702000"/>
           </a:xfrm>
           <a:prstGeom prst="rect">
             <a:avLst/>
@@ -18220,7 +18407,7 @@
         <p:spPr>
           <a:xfrm>
             <a:off x="914400" y="1965960"/>
-            <a:ext cx="10358640" cy="364320"/>
+            <a:ext cx="10357920" cy="363600"/>
           </a:xfrm>
           <a:prstGeom prst="rect">
             <a:avLst/>
@@ -18281,7 +18468,7 @@
         <p:spPr>
           <a:xfrm>
             <a:off x="914400" y="2377440"/>
-            <a:ext cx="10358640" cy="2010240"/>
+            <a:ext cx="10357920" cy="2009520"/>
           </a:xfrm>
           <a:prstGeom prst="rect">
             <a:avLst/>
@@ -18342,7 +18529,7 @@
         <p:spPr>
           <a:xfrm>
             <a:off x="11521440" y="6446520"/>
-            <a:ext cx="455760" cy="272880"/>
+            <a:ext cx="455040" cy="272160"/>
           </a:xfrm>
           <a:prstGeom prst="rect">
             <a:avLst/>
@@ -18440,7 +18627,7 @@
         <p:spPr>
           <a:xfrm>
             <a:off x="-1828800" y="5120640"/>
-            <a:ext cx="3656160" cy="3656160"/>
+            <a:ext cx="3655440" cy="3655440"/>
           </a:xfrm>
           <a:prstGeom prst="ellipse">
             <a:avLst/>
@@ -18483,7 +18670,7 @@
         <p:spPr>
           <a:xfrm>
             <a:off x="457200" y="457200"/>
-            <a:ext cx="638640" cy="638640"/>
+            <a:ext cx="637920" cy="637920"/>
           </a:xfrm>
           <a:prstGeom prst="ellipse">
             <a:avLst/>
@@ -18530,7 +18717,7 @@
         <p:spPr>
           <a:xfrm>
             <a:off x="553320" y="553320"/>
-            <a:ext cx="446760" cy="446760"/>
+            <a:ext cx="446040" cy="446040"/>
           </a:xfrm>
           <a:prstGeom prst="rect">
             <a:avLst/>
@@ -18550,7 +18737,7 @@
         <p:spPr>
           <a:xfrm>
             <a:off x="1280160" y="457200"/>
-            <a:ext cx="10422720" cy="638640"/>
+            <a:ext cx="10422000" cy="637920"/>
           </a:xfrm>
           <a:prstGeom prst="rect">
             <a:avLst/>
@@ -18611,7 +18798,7 @@
         <p:spPr>
           <a:xfrm>
             <a:off x="548640" y="1828800"/>
-            <a:ext cx="4753440" cy="4021920"/>
+            <a:ext cx="4752720" cy="4021200"/>
           </a:xfrm>
           <a:prstGeom prst="rect">
             <a:avLst/>
@@ -18712,7 +18899,7 @@
         <p:spPr>
           <a:xfrm>
             <a:off x="5486400" y="1691640"/>
-            <a:ext cx="6216480" cy="4341960"/>
+            <a:ext cx="6215760" cy="4341240"/>
           </a:xfrm>
           <a:prstGeom prst="roundRect">
             <a:avLst>
@@ -18757,7 +18944,7 @@
         <p:spPr>
           <a:xfrm>
             <a:off x="5806440" y="1965960"/>
-            <a:ext cx="5576400" cy="3793320"/>
+            <a:ext cx="5575680" cy="3792600"/>
           </a:xfrm>
           <a:prstGeom prst="rect">
             <a:avLst/>
@@ -18998,7 +19185,7 @@
         <p:spPr>
           <a:xfrm>
             <a:off x="457200" y="6446520"/>
-            <a:ext cx="6399360" cy="272880"/>
+            <a:ext cx="6398640" cy="272160"/>
           </a:xfrm>
           <a:prstGeom prst="rect">
             <a:avLst/>
@@ -19059,7 +19246,7 @@
         <p:spPr>
           <a:xfrm>
             <a:off x="11521440" y="6446520"/>
-            <a:ext cx="455760" cy="272880"/>
+            <a:ext cx="455040" cy="272160"/>
           </a:xfrm>
           <a:prstGeom prst="rect">
             <a:avLst/>
@@ -19157,7 +19344,7 @@
         <p:spPr>
           <a:xfrm>
             <a:off x="-1828800" y="5120640"/>
-            <a:ext cx="3656160" cy="3656160"/>
+            <a:ext cx="3655440" cy="3655440"/>
           </a:xfrm>
           <a:prstGeom prst="ellipse">
             <a:avLst/>
@@ -19200,7 +19387,7 @@
         <p:spPr>
           <a:xfrm>
             <a:off x="457200" y="457200"/>
-            <a:ext cx="638640" cy="638640"/>
+            <a:ext cx="637920" cy="637920"/>
           </a:xfrm>
           <a:prstGeom prst="ellipse">
             <a:avLst/>
@@ -19247,7 +19434,7 @@
         <p:spPr>
           <a:xfrm>
             <a:off x="553320" y="553320"/>
-            <a:ext cx="446760" cy="446760"/>
+            <a:ext cx="446040" cy="446040"/>
           </a:xfrm>
           <a:prstGeom prst="rect">
             <a:avLst/>
@@ -19267,7 +19454,7 @@
         <p:spPr>
           <a:xfrm>
             <a:off x="1280160" y="457200"/>
-            <a:ext cx="10422720" cy="638640"/>
+            <a:ext cx="10422000" cy="637920"/>
           </a:xfrm>
           <a:prstGeom prst="rect">
             <a:avLst/>
@@ -19328,7 +19515,7 @@
         <p:spPr>
           <a:xfrm>
             <a:off x="548640" y="1828800"/>
-            <a:ext cx="4753440" cy="4021920"/>
+            <a:ext cx="4752720" cy="4021200"/>
           </a:xfrm>
           <a:prstGeom prst="rect">
             <a:avLst/>
@@ -19429,7 +19616,7 @@
         <p:spPr>
           <a:xfrm>
             <a:off x="5486400" y="1691640"/>
-            <a:ext cx="6216480" cy="4341960"/>
+            <a:ext cx="6215760" cy="4341240"/>
           </a:xfrm>
           <a:prstGeom prst="roundRect">
             <a:avLst>
@@ -19474,7 +19661,7 @@
         <p:spPr>
           <a:xfrm>
             <a:off x="5806440" y="1965960"/>
-            <a:ext cx="5576400" cy="3793320"/>
+            <a:ext cx="5575680" cy="3792600"/>
           </a:xfrm>
           <a:prstGeom prst="rect">
             <a:avLst/>
@@ -19745,7 +19932,7 @@
         <p:spPr>
           <a:xfrm>
             <a:off x="457200" y="6446520"/>
-            <a:ext cx="6399360" cy="272880"/>
+            <a:ext cx="6398640" cy="272160"/>
           </a:xfrm>
           <a:prstGeom prst="rect">
             <a:avLst/>
@@ -19806,7 +19993,7 @@
         <p:spPr>
           <a:xfrm>
             <a:off x="11521440" y="6446520"/>
-            <a:ext cx="455760" cy="272880"/>
+            <a:ext cx="455040" cy="272160"/>
           </a:xfrm>
           <a:prstGeom prst="rect">
             <a:avLst/>
@@ -19904,7 +20091,7 @@
         <p:spPr>
           <a:xfrm>
             <a:off x="-1828800" y="5120640"/>
-            <a:ext cx="3656160" cy="3656160"/>
+            <a:ext cx="3655440" cy="3655440"/>
           </a:xfrm>
           <a:prstGeom prst="ellipse">
             <a:avLst/>
@@ -19947,7 +20134,7 @@
         <p:spPr>
           <a:xfrm>
             <a:off x="457200" y="457200"/>
-            <a:ext cx="638640" cy="638640"/>
+            <a:ext cx="637920" cy="637920"/>
           </a:xfrm>
           <a:prstGeom prst="ellipse">
             <a:avLst/>
@@ -19994,7 +20181,7 @@
         <p:spPr>
           <a:xfrm>
             <a:off x="553320" y="553320"/>
-            <a:ext cx="446760" cy="446760"/>
+            <a:ext cx="446040" cy="446040"/>
           </a:xfrm>
           <a:prstGeom prst="rect">
             <a:avLst/>
@@ -20014,7 +20201,7 @@
         <p:spPr>
           <a:xfrm>
             <a:off x="1280160" y="457200"/>
-            <a:ext cx="10422720" cy="638640"/>
+            <a:ext cx="10422000" cy="637920"/>
           </a:xfrm>
           <a:prstGeom prst="rect">
             <a:avLst/>
@@ -20075,7 +20262,7 @@
         <p:spPr>
           <a:xfrm>
             <a:off x="548640" y="1828800"/>
-            <a:ext cx="4753440" cy="4021920"/>
+            <a:ext cx="4752720" cy="4021200"/>
           </a:xfrm>
           <a:prstGeom prst="rect">
             <a:avLst/>
@@ -20211,7 +20398,7 @@
         <p:spPr>
           <a:xfrm>
             <a:off x="5486400" y="1691640"/>
-            <a:ext cx="6216480" cy="4341960"/>
+            <a:ext cx="6215760" cy="4341240"/>
           </a:xfrm>
           <a:prstGeom prst="roundRect">
             <a:avLst>
@@ -20256,7 +20443,7 @@
         <p:spPr>
           <a:xfrm>
             <a:off x="5806440" y="1965960"/>
-            <a:ext cx="5576400" cy="3793320"/>
+            <a:ext cx="5575680" cy="3792600"/>
           </a:xfrm>
           <a:prstGeom prst="rect">
             <a:avLst/>
@@ -20527,7 +20714,7 @@
         <p:spPr>
           <a:xfrm>
             <a:off x="457200" y="6446520"/>
-            <a:ext cx="6399360" cy="272880"/>
+            <a:ext cx="6398640" cy="272160"/>
           </a:xfrm>
           <a:prstGeom prst="rect">
             <a:avLst/>
@@ -20588,7 +20775,7 @@
         <p:spPr>
           <a:xfrm>
             <a:off x="11521440" y="6446520"/>
-            <a:ext cx="455760" cy="272880"/>
+            <a:ext cx="455040" cy="272160"/>
           </a:xfrm>
           <a:prstGeom prst="rect">
             <a:avLst/>
@@ -20686,7 +20873,7 @@
         <p:spPr>
           <a:xfrm>
             <a:off x="-1828800" y="5120640"/>
-            <a:ext cx="3656160" cy="3656160"/>
+            <a:ext cx="3655440" cy="3655440"/>
           </a:xfrm>
           <a:prstGeom prst="ellipse">
             <a:avLst/>
@@ -20729,7 +20916,7 @@
         <p:spPr>
           <a:xfrm>
             <a:off x="457200" y="457200"/>
-            <a:ext cx="638640" cy="638640"/>
+            <a:ext cx="637920" cy="637920"/>
           </a:xfrm>
           <a:prstGeom prst="ellipse">
             <a:avLst/>
@@ -20776,7 +20963,7 @@
         <p:spPr>
           <a:xfrm>
             <a:off x="553320" y="553320"/>
-            <a:ext cx="446760" cy="446760"/>
+            <a:ext cx="446040" cy="446040"/>
           </a:xfrm>
           <a:prstGeom prst="rect">
             <a:avLst/>
@@ -20796,7 +20983,7 @@
         <p:spPr>
           <a:xfrm>
             <a:off x="1280160" y="457200"/>
-            <a:ext cx="10422720" cy="638640"/>
+            <a:ext cx="10422000" cy="637920"/>
           </a:xfrm>
           <a:prstGeom prst="rect">
             <a:avLst/>
@@ -20857,7 +21044,7 @@
         <p:spPr>
           <a:xfrm>
             <a:off x="548640" y="1828800"/>
-            <a:ext cx="4753440" cy="4021920"/>
+            <a:ext cx="4752720" cy="4021200"/>
           </a:xfrm>
           <a:prstGeom prst="rect">
             <a:avLst/>
@@ -20958,7 +21145,7 @@
         <p:spPr>
           <a:xfrm>
             <a:off x="5486400" y="1691640"/>
-            <a:ext cx="6216480" cy="4341960"/>
+            <a:ext cx="6215760" cy="4341240"/>
           </a:xfrm>
           <a:prstGeom prst="roundRect">
             <a:avLst>
@@ -21003,7 +21190,7 @@
         <p:spPr>
           <a:xfrm>
             <a:off x="5806440" y="1965960"/>
-            <a:ext cx="5576400" cy="3793320"/>
+            <a:ext cx="5575680" cy="3792600"/>
           </a:xfrm>
           <a:prstGeom prst="rect">
             <a:avLst/>
@@ -21244,7 +21431,7 @@
         <p:spPr>
           <a:xfrm>
             <a:off x="457200" y="6446520"/>
-            <a:ext cx="6399360" cy="272880"/>
+            <a:ext cx="6398640" cy="272160"/>
           </a:xfrm>
           <a:prstGeom prst="rect">
             <a:avLst/>
@@ -21305,7 +21492,7 @@
         <p:spPr>
           <a:xfrm>
             <a:off x="11521440" y="6446520"/>
-            <a:ext cx="455760" cy="272880"/>
+            <a:ext cx="455040" cy="272160"/>
           </a:xfrm>
           <a:prstGeom prst="rect">
             <a:avLst/>
@@ -21403,7 +21590,7 @@
         <p:spPr>
           <a:xfrm>
             <a:off x="-1828800" y="5029200"/>
-            <a:ext cx="3656160" cy="3656160"/>
+            <a:ext cx="3655440" cy="3655440"/>
           </a:xfrm>
           <a:prstGeom prst="ellipse">
             <a:avLst/>
@@ -21446,7 +21633,7 @@
         <p:spPr>
           <a:xfrm>
             <a:off x="457200" y="457200"/>
-            <a:ext cx="638640" cy="638640"/>
+            <a:ext cx="637920" cy="637920"/>
           </a:xfrm>
           <a:prstGeom prst="ellipse">
             <a:avLst/>
@@ -21493,7 +21680,7 @@
         <p:spPr>
           <a:xfrm>
             <a:off x="553320" y="553320"/>
-            <a:ext cx="446760" cy="446760"/>
+            <a:ext cx="446040" cy="446040"/>
           </a:xfrm>
           <a:prstGeom prst="rect">
             <a:avLst/>
@@ -21513,7 +21700,7 @@
         <p:spPr>
           <a:xfrm>
             <a:off x="1280160" y="457200"/>
-            <a:ext cx="10422720" cy="638640"/>
+            <a:ext cx="10422000" cy="637920"/>
           </a:xfrm>
           <a:prstGeom prst="rect">
             <a:avLst/>
@@ -21574,7 +21761,7 @@
         <p:spPr>
           <a:xfrm>
             <a:off x="457200" y="1600200"/>
-            <a:ext cx="11273040" cy="4479120"/>
+            <a:ext cx="11272320" cy="4478400"/>
           </a:xfrm>
           <a:prstGeom prst="roundRect">
             <a:avLst>
@@ -21619,7 +21806,7 @@
         <p:spPr>
           <a:xfrm>
             <a:off x="822960" y="1828800"/>
-            <a:ext cx="10514160" cy="455760"/>
+            <a:ext cx="10513440" cy="455040"/>
           </a:xfrm>
           <a:prstGeom prst="rect">
             <a:avLst/>
@@ -21680,7 +21867,7 @@
         <p:spPr>
           <a:xfrm>
             <a:off x="822960" y="2423160"/>
-            <a:ext cx="382680" cy="382680"/>
+            <a:ext cx="381960" cy="381960"/>
           </a:xfrm>
           <a:prstGeom prst="ellipse">
             <a:avLst/>
@@ -21723,7 +21910,7 @@
         <p:spPr>
           <a:xfrm>
             <a:off x="822960" y="2423160"/>
-            <a:ext cx="382680" cy="382680"/>
+            <a:ext cx="381960" cy="381960"/>
           </a:xfrm>
           <a:prstGeom prst="rect">
             <a:avLst/>
@@ -21784,7 +21971,7 @@
         <p:spPr>
           <a:xfrm>
             <a:off x="1435680" y="2423160"/>
-            <a:ext cx="9581400" cy="382680"/>
+            <a:ext cx="9580680" cy="381960"/>
           </a:xfrm>
           <a:prstGeom prst="rect">
             <a:avLst/>
@@ -21845,7 +22032,7 @@
         <p:spPr>
           <a:xfrm>
             <a:off x="822960" y="3303360"/>
-            <a:ext cx="382680" cy="382680"/>
+            <a:ext cx="381960" cy="381960"/>
           </a:xfrm>
           <a:prstGeom prst="ellipse">
             <a:avLst/>
@@ -21888,7 +22075,7 @@
         <p:spPr>
           <a:xfrm>
             <a:off x="822960" y="3303360"/>
-            <a:ext cx="382680" cy="382680"/>
+            <a:ext cx="381960" cy="381960"/>
           </a:xfrm>
           <a:prstGeom prst="rect">
             <a:avLst/>
@@ -21949,7 +22136,7 @@
         <p:spPr>
           <a:xfrm>
             <a:off x="1435680" y="3303360"/>
-            <a:ext cx="9581400" cy="382680"/>
+            <a:ext cx="9580680" cy="381960"/>
           </a:xfrm>
           <a:prstGeom prst="rect">
             <a:avLst/>
@@ -22010,7 +22197,7 @@
         <p:spPr>
           <a:xfrm>
             <a:off x="822960" y="4183560"/>
-            <a:ext cx="382680" cy="382680"/>
+            <a:ext cx="381960" cy="381960"/>
           </a:xfrm>
           <a:prstGeom prst="ellipse">
             <a:avLst/>
@@ -22053,7 +22240,7 @@
         <p:spPr>
           <a:xfrm>
             <a:off x="822960" y="4183560"/>
-            <a:ext cx="382680" cy="382680"/>
+            <a:ext cx="381960" cy="381960"/>
           </a:xfrm>
           <a:prstGeom prst="rect">
             <a:avLst/>
@@ -22114,7 +22301,7 @@
         <p:spPr>
           <a:xfrm>
             <a:off x="1435680" y="4183560"/>
-            <a:ext cx="9581400" cy="382680"/>
+            <a:ext cx="9580680" cy="381960"/>
           </a:xfrm>
           <a:prstGeom prst="rect">
             <a:avLst/>
@@ -22175,7 +22362,7 @@
         <p:spPr>
           <a:xfrm>
             <a:off x="822960" y="5063400"/>
-            <a:ext cx="382680" cy="382680"/>
+            <a:ext cx="381960" cy="381960"/>
           </a:xfrm>
           <a:prstGeom prst="ellipse">
             <a:avLst/>
@@ -22218,7 +22405,7 @@
         <p:spPr>
           <a:xfrm>
             <a:off x="822960" y="5063400"/>
-            <a:ext cx="382680" cy="382680"/>
+            <a:ext cx="381960" cy="381960"/>
           </a:xfrm>
           <a:prstGeom prst="rect">
             <a:avLst/>
@@ -22279,7 +22466,7 @@
         <p:spPr>
           <a:xfrm>
             <a:off x="1435680" y="5063400"/>
-            <a:ext cx="9581400" cy="382680"/>
+            <a:ext cx="9580680" cy="381960"/>
           </a:xfrm>
           <a:prstGeom prst="rect">
             <a:avLst/>
@@ -22340,7 +22527,7 @@
         <p:spPr>
           <a:xfrm>
             <a:off x="457200" y="6446520"/>
-            <a:ext cx="6399360" cy="272880"/>
+            <a:ext cx="6398640" cy="272160"/>
           </a:xfrm>
           <a:prstGeom prst="rect">
             <a:avLst/>
@@ -22401,7 +22588,7 @@
         <p:spPr>
           <a:xfrm>
             <a:off x="11521440" y="6446520"/>
-            <a:ext cx="455760" cy="272880"/>
+            <a:ext cx="455040" cy="272160"/>
           </a:xfrm>
           <a:prstGeom prst="rect">
             <a:avLst/>
@@ -22499,7 +22686,7 @@
         <p:spPr>
           <a:xfrm>
             <a:off x="-1828800" y="4114800"/>
-            <a:ext cx="5484960" cy="5484960"/>
+            <a:ext cx="5484240" cy="5484240"/>
           </a:xfrm>
           <a:prstGeom prst="ellipse">
             <a:avLst/>
@@ -22542,7 +22729,7 @@
         <p:spPr>
           <a:xfrm>
             <a:off x="9601200" y="-2286000"/>
-            <a:ext cx="5484960" cy="5484960"/>
+            <a:ext cx="5484240" cy="5484240"/>
           </a:xfrm>
           <a:prstGeom prst="ellipse">
             <a:avLst/>
@@ -22585,7 +22772,7 @@
         <p:spPr>
           <a:xfrm>
             <a:off x="5591520" y="731520"/>
-            <a:ext cx="1004400" cy="1004400"/>
+            <a:ext cx="1003680" cy="1003680"/>
           </a:xfrm>
           <a:prstGeom prst="ellipse">
             <a:avLst/>
@@ -22632,7 +22819,7 @@
         <p:spPr>
           <a:xfrm>
             <a:off x="5742360" y="882360"/>
-            <a:ext cx="702720" cy="702720"/>
+            <a:ext cx="702000" cy="702000"/>
           </a:xfrm>
           <a:prstGeom prst="rect">
             <a:avLst/>
@@ -22652,7 +22839,7 @@
         <p:spPr>
           <a:xfrm>
             <a:off x="914400" y="1965960"/>
-            <a:ext cx="10358640" cy="364320"/>
+            <a:ext cx="10357920" cy="363600"/>
           </a:xfrm>
           <a:prstGeom prst="rect">
             <a:avLst/>
@@ -22713,7 +22900,7 @@
         <p:spPr>
           <a:xfrm>
             <a:off x="914400" y="2377440"/>
-            <a:ext cx="10358640" cy="2010240"/>
+            <a:ext cx="10357920" cy="2009520"/>
           </a:xfrm>
           <a:prstGeom prst="rect">
             <a:avLst/>
@@ -22774,7 +22961,7 @@
         <p:spPr>
           <a:xfrm>
             <a:off x="1463040" y="4572000"/>
-            <a:ext cx="9261360" cy="1095840"/>
+            <a:ext cx="9260640" cy="1095120"/>
           </a:xfrm>
           <a:prstGeom prst="rect">
             <a:avLst/>
@@ -22835,7 +23022,7 @@
         <p:spPr>
           <a:xfrm>
             <a:off x="11521440" y="6446520"/>
-            <a:ext cx="455760" cy="272880"/>
+            <a:ext cx="455040" cy="272160"/>
           </a:xfrm>
           <a:prstGeom prst="rect">
             <a:avLst/>
@@ -22933,7 +23120,7 @@
         <p:spPr>
           <a:xfrm>
             <a:off x="-1828800" y="5120640"/>
-            <a:ext cx="3656160" cy="3656160"/>
+            <a:ext cx="3655440" cy="3655440"/>
           </a:xfrm>
           <a:prstGeom prst="ellipse">
             <a:avLst/>
@@ -22976,7 +23163,7 @@
         <p:spPr>
           <a:xfrm>
             <a:off x="457200" y="277200"/>
-            <a:ext cx="638640" cy="638640"/>
+            <a:ext cx="637920" cy="637920"/>
           </a:xfrm>
           <a:prstGeom prst="ellipse">
             <a:avLst/>
@@ -23023,7 +23210,7 @@
         <p:spPr>
           <a:xfrm>
             <a:off x="553320" y="409320"/>
-            <a:ext cx="446760" cy="446760"/>
+            <a:ext cx="446040" cy="446040"/>
           </a:xfrm>
           <a:prstGeom prst="rect">
             <a:avLst/>
@@ -23043,7 +23230,7 @@
         <p:spPr>
           <a:xfrm>
             <a:off x="1235520" y="228600"/>
-            <a:ext cx="10422720" cy="638640"/>
+            <a:ext cx="10422000" cy="637920"/>
           </a:xfrm>
           <a:prstGeom prst="rect">
             <a:avLst/>
@@ -23104,7 +23291,7 @@
         <p:spPr>
           <a:xfrm>
             <a:off x="1875960" y="867240"/>
-            <a:ext cx="4753440" cy="4021920"/>
+            <a:ext cx="4752720" cy="4021200"/>
           </a:xfrm>
           <a:prstGeom prst="rect">
             <a:avLst/>
@@ -23594,8 +23781,8 @@
         </p:nvSpPr>
         <p:spPr>
           <a:xfrm>
-            <a:off x="6674400" y="1691640"/>
-            <a:ext cx="5523840" cy="4341960"/>
+            <a:off x="6400800" y="1691640"/>
+            <a:ext cx="5523120" cy="4341240"/>
           </a:xfrm>
           <a:prstGeom prst="roundRect">
             <a:avLst>
@@ -23639,8 +23826,8 @@
         </p:nvSpPr>
         <p:spPr>
           <a:xfrm>
-            <a:off x="7086600" y="1965960"/>
-            <a:ext cx="2422800" cy="3793320"/>
+            <a:off x="6721920" y="1922400"/>
+            <a:ext cx="2422080" cy="3792600"/>
           </a:xfrm>
           <a:prstGeom prst="rect">
             <a:avLst/>
@@ -23709,7 +23896,19 @@
                 <a:latin typeface="Cantarell"/>
                 <a:ea typeface="Consolas"/>
               </a:rPr>
-              <a:t>total = 0</a:t>
+              <a:t>Total = 0 # </a:t>
+            </a:r>
+            <a:r>
+              <a:rPr lang="en-US" sz="1300" b="1" u="none" strike="noStrike">
+                <a:solidFill>
+                  <a:srgbClr val="FFFFFF"/>
+                </a:solidFill>
+                <a:effectLst/>
+                <a:uFillTx/>
+                <a:latin typeface="Cambria"/>
+                <a:ea typeface="Cambria"/>
+              </a:rPr>
+              <a:t>Accumulator</a:t>
             </a:r>
             <a:endParaRPr lang="en-US" sz="1300" b="0" u="none" strike="noStrike">
               <a:solidFill>
@@ -23739,7 +23938,19 @@
                 <a:latin typeface="Cantarell"/>
                 <a:ea typeface="Consolas"/>
               </a:rPr>
-              <a:t>for n in numbers:</a:t>
+              <a:t>for n in numbe</a:t>
+            </a:r>
+            <a:r>
+              <a:rPr lang="en-US" sz="1300" b="0" u="none" strike="noStrike">
+                <a:solidFill>
+                  <a:srgbClr val="C9D3CC"/>
+                </a:solidFill>
+                <a:effectLst/>
+                <a:uFillTx/>
+                <a:latin typeface="Cantarell"/>
+                <a:ea typeface="Consolas"/>
+              </a:rPr>
+              <a:t>rs:</a:t>
             </a:r>
             <a:endParaRPr lang="en-US" sz="1300" b="0" u="none" strike="noStrike">
               <a:solidFill>
@@ -23986,7 +24197,7 @@
         <p:spPr>
           <a:xfrm>
             <a:off x="457200" y="6446520"/>
-            <a:ext cx="6399360" cy="272880"/>
+            <a:ext cx="6398640" cy="272160"/>
           </a:xfrm>
           <a:prstGeom prst="rect">
             <a:avLst/>
@@ -24047,7 +24258,7 @@
         <p:spPr>
           <a:xfrm>
             <a:off x="11521440" y="6446520"/>
-            <a:ext cx="455760" cy="272880"/>
+            <a:ext cx="455040" cy="272160"/>
           </a:xfrm>
           <a:prstGeom prst="rect">
             <a:avLst/>
@@ -24108,7 +24319,7 @@
         <p:spPr>
           <a:xfrm>
             <a:off x="10150200" y="1965960"/>
-            <a:ext cx="2422800" cy="3793320"/>
+            <a:ext cx="2422080" cy="3792600"/>
           </a:xfrm>
           <a:prstGeom prst="rect">
             <a:avLst/>
@@ -24344,7 +24555,7 @@
         <p:spPr>
           <a:xfrm>
             <a:off x="-1828800" y="5120640"/>
-            <a:ext cx="3656160" cy="3656160"/>
+            <a:ext cx="3655440" cy="3655440"/>
           </a:xfrm>
           <a:prstGeom prst="ellipse">
             <a:avLst/>
@@ -24387,7 +24598,7 @@
         <p:spPr>
           <a:xfrm>
             <a:off x="457200" y="457200"/>
-            <a:ext cx="638640" cy="638640"/>
+            <a:ext cx="637920" cy="637920"/>
           </a:xfrm>
           <a:prstGeom prst="ellipse">
             <a:avLst/>
@@ -24434,7 +24645,7 @@
         <p:spPr>
           <a:xfrm>
             <a:off x="553320" y="553320"/>
-            <a:ext cx="446760" cy="446760"/>
+            <a:ext cx="446040" cy="446040"/>
           </a:xfrm>
           <a:prstGeom prst="rect">
             <a:avLst/>
@@ -24454,7 +24665,7 @@
         <p:spPr>
           <a:xfrm>
             <a:off x="1280160" y="457200"/>
-            <a:ext cx="10422720" cy="638640"/>
+            <a:ext cx="10422000" cy="637920"/>
           </a:xfrm>
           <a:prstGeom prst="rect">
             <a:avLst/>
@@ -24515,7 +24726,7 @@
         <p:spPr>
           <a:xfrm>
             <a:off x="548640" y="1828800"/>
-            <a:ext cx="4753440" cy="4021920"/>
+            <a:ext cx="4752720" cy="4021200"/>
           </a:xfrm>
           <a:prstGeom prst="rect">
             <a:avLst/>
@@ -24616,7 +24827,7 @@
         <p:spPr>
           <a:xfrm>
             <a:off x="5486400" y="1691640"/>
-            <a:ext cx="6216480" cy="4341960"/>
+            <a:ext cx="6215760" cy="4341240"/>
           </a:xfrm>
           <a:prstGeom prst="roundRect">
             <a:avLst>
@@ -24661,7 +24872,7 @@
         <p:spPr>
           <a:xfrm>
             <a:off x="5806440" y="1965960"/>
-            <a:ext cx="5576400" cy="3793320"/>
+            <a:ext cx="5575680" cy="3792600"/>
           </a:xfrm>
           <a:prstGeom prst="rect">
             <a:avLst/>
@@ -24902,7 +25113,7 @@
         <p:spPr>
           <a:xfrm>
             <a:off x="457200" y="6446520"/>
-            <a:ext cx="6399360" cy="272880"/>
+            <a:ext cx="6398640" cy="272160"/>
           </a:xfrm>
           <a:prstGeom prst="rect">
             <a:avLst/>
@@ -24963,7 +25174,7 @@
         <p:spPr>
           <a:xfrm>
             <a:off x="11521440" y="6446520"/>
-            <a:ext cx="455760" cy="272880"/>
+            <a:ext cx="455040" cy="272160"/>
           </a:xfrm>
           <a:prstGeom prst="rect">
             <a:avLst/>
@@ -25061,7 +25272,7 @@
         <p:spPr>
           <a:xfrm>
             <a:off x="-1828800" y="5120640"/>
-            <a:ext cx="3656160" cy="3656160"/>
+            <a:ext cx="3655440" cy="3655440"/>
           </a:xfrm>
           <a:prstGeom prst="ellipse">
             <a:avLst/>
@@ -25104,7 +25315,7 @@
         <p:spPr>
           <a:xfrm>
             <a:off x="457200" y="457200"/>
-            <a:ext cx="638640" cy="638640"/>
+            <a:ext cx="637920" cy="637920"/>
           </a:xfrm>
           <a:prstGeom prst="ellipse">
             <a:avLst/>
@@ -25151,7 +25362,7 @@
         <p:spPr>
           <a:xfrm>
             <a:off x="553320" y="553320"/>
-            <a:ext cx="446760" cy="446760"/>
+            <a:ext cx="446040" cy="446040"/>
           </a:xfrm>
           <a:prstGeom prst="rect">
             <a:avLst/>
@@ -25171,7 +25382,7 @@
         <p:spPr>
           <a:xfrm>
             <a:off x="1280160" y="457200"/>
-            <a:ext cx="10422720" cy="638640"/>
+            <a:ext cx="10422000" cy="637920"/>
           </a:xfrm>
           <a:prstGeom prst="rect">
             <a:avLst/>
@@ -25232,7 +25443,7 @@
         <p:spPr>
           <a:xfrm>
             <a:off x="548640" y="1828800"/>
-            <a:ext cx="4753440" cy="4021920"/>
+            <a:ext cx="4752720" cy="4021200"/>
           </a:xfrm>
           <a:prstGeom prst="rect">
             <a:avLst/>
@@ -25368,7 +25579,7 @@
         <p:spPr>
           <a:xfrm>
             <a:off x="5486400" y="1691640"/>
-            <a:ext cx="6216480" cy="4341960"/>
+            <a:ext cx="6215760" cy="4341240"/>
           </a:xfrm>
           <a:prstGeom prst="roundRect">
             <a:avLst>
@@ -25413,7 +25624,7 @@
         <p:spPr>
           <a:xfrm>
             <a:off x="5806440" y="1965960"/>
-            <a:ext cx="5576400" cy="3793320"/>
+            <a:ext cx="5575680" cy="3792600"/>
           </a:xfrm>
           <a:prstGeom prst="rect">
             <a:avLst/>
@@ -25684,7 +25895,7 @@
         <p:spPr>
           <a:xfrm>
             <a:off x="457200" y="6446520"/>
-            <a:ext cx="6399360" cy="272880"/>
+            <a:ext cx="6398640" cy="272160"/>
           </a:xfrm>
           <a:prstGeom prst="rect">
             <a:avLst/>
@@ -25745,7 +25956,7 @@
         <p:spPr>
           <a:xfrm>
             <a:off x="11521440" y="6446520"/>
-            <a:ext cx="455760" cy="272880"/>
+            <a:ext cx="455040" cy="272160"/>
           </a:xfrm>
           <a:prstGeom prst="rect">
             <a:avLst/>
@@ -25843,7 +26054,7 @@
         <p:spPr>
           <a:xfrm>
             <a:off x="-1828800" y="4114800"/>
-            <a:ext cx="5484960" cy="5484960"/>
+            <a:ext cx="5484240" cy="5484240"/>
           </a:xfrm>
           <a:prstGeom prst="ellipse">
             <a:avLst/>
@@ -25886,7 +26097,7 @@
         <p:spPr>
           <a:xfrm>
             <a:off x="9601200" y="-2286000"/>
-            <a:ext cx="5484960" cy="5484960"/>
+            <a:ext cx="5484240" cy="5484240"/>
           </a:xfrm>
           <a:prstGeom prst="ellipse">
             <a:avLst/>
@@ -25929,7 +26140,7 @@
         <p:spPr>
           <a:xfrm>
             <a:off x="5591520" y="731520"/>
-            <a:ext cx="1004400" cy="1004400"/>
+            <a:ext cx="1003680" cy="1003680"/>
           </a:xfrm>
           <a:prstGeom prst="ellipse">
             <a:avLst/>
@@ -25976,7 +26187,7 @@
         <p:spPr>
           <a:xfrm>
             <a:off x="5742360" y="882360"/>
-            <a:ext cx="702720" cy="702720"/>
+            <a:ext cx="702000" cy="702000"/>
           </a:xfrm>
           <a:prstGeom prst="rect">
             <a:avLst/>
@@ -25996,7 +26207,7 @@
         <p:spPr>
           <a:xfrm>
             <a:off x="914400" y="1965960"/>
-            <a:ext cx="10358640" cy="364320"/>
+            <a:ext cx="10357920" cy="363600"/>
           </a:xfrm>
           <a:prstGeom prst="rect">
             <a:avLst/>
@@ -26057,7 +26268,7 @@
         <p:spPr>
           <a:xfrm>
             <a:off x="914400" y="2377440"/>
-            <a:ext cx="10358640" cy="2010240"/>
+            <a:ext cx="10357920" cy="2009520"/>
           </a:xfrm>
           <a:prstGeom prst="rect">
             <a:avLst/>
@@ -26118,7 +26329,7 @@
         <p:spPr>
           <a:xfrm>
             <a:off x="1463040" y="4572000"/>
-            <a:ext cx="9261360" cy="1095840"/>
+            <a:ext cx="9260640" cy="1095120"/>
           </a:xfrm>
           <a:prstGeom prst="rect">
             <a:avLst/>
@@ -26179,7 +26390,7 @@
         <p:spPr>
           <a:xfrm>
             <a:off x="11521440" y="6446520"/>
-            <a:ext cx="455760" cy="272880"/>
+            <a:ext cx="455040" cy="272160"/>
           </a:xfrm>
           <a:prstGeom prst="rect">
             <a:avLst/>
@@ -26277,7 +26488,7 @@
         <p:spPr>
           <a:xfrm>
             <a:off x="-1828800" y="5120640"/>
-            <a:ext cx="3656160" cy="3656160"/>
+            <a:ext cx="3655440" cy="3655440"/>
           </a:xfrm>
           <a:prstGeom prst="ellipse">
             <a:avLst/>
@@ -26320,7 +26531,7 @@
         <p:spPr>
           <a:xfrm>
             <a:off x="457200" y="457200"/>
-            <a:ext cx="638640" cy="638640"/>
+            <a:ext cx="637920" cy="637920"/>
           </a:xfrm>
           <a:prstGeom prst="ellipse">
             <a:avLst/>
@@ -26367,7 +26578,7 @@
         <p:spPr>
           <a:xfrm>
             <a:off x="553320" y="553320"/>
-            <a:ext cx="446760" cy="446760"/>
+            <a:ext cx="446040" cy="446040"/>
           </a:xfrm>
           <a:prstGeom prst="rect">
             <a:avLst/>
@@ -26387,7 +26598,7 @@
         <p:spPr>
           <a:xfrm>
             <a:off x="1280160" y="457200"/>
-            <a:ext cx="10422720" cy="638640"/>
+            <a:ext cx="10422000" cy="637920"/>
           </a:xfrm>
           <a:prstGeom prst="rect">
             <a:avLst/>
@@ -26448,7 +26659,7 @@
         <p:spPr>
           <a:xfrm>
             <a:off x="548640" y="1828800"/>
-            <a:ext cx="4753440" cy="4021920"/>
+            <a:ext cx="4752720" cy="4021200"/>
           </a:xfrm>
           <a:prstGeom prst="rect">
             <a:avLst/>
@@ -26584,7 +26795,7 @@
         <p:spPr>
           <a:xfrm>
             <a:off x="5486400" y="1691640"/>
-            <a:ext cx="6216480" cy="4341960"/>
+            <a:ext cx="6215760" cy="4341240"/>
           </a:xfrm>
           <a:prstGeom prst="roundRect">
             <a:avLst>
@@ -26629,7 +26840,7 @@
         <p:spPr>
           <a:xfrm>
             <a:off x="5806440" y="1965960"/>
-            <a:ext cx="5576400" cy="3793320"/>
+            <a:ext cx="5575680" cy="3792600"/>
           </a:xfrm>
           <a:prstGeom prst="rect">
             <a:avLst/>
@@ -27038,7 +27249,7 @@
         <p:spPr>
           <a:xfrm>
             <a:off x="457200" y="6446520"/>
-            <a:ext cx="6399360" cy="272880"/>
+            <a:ext cx="6398640" cy="272160"/>
           </a:xfrm>
           <a:prstGeom prst="rect">
             <a:avLst/>
@@ -27099,7 +27310,7 @@
         <p:spPr>
           <a:xfrm>
             <a:off x="11521440" y="6446520"/>
-            <a:ext cx="455760" cy="272880"/>
+            <a:ext cx="455040" cy="272160"/>
           </a:xfrm>
           <a:prstGeom prst="rect">
             <a:avLst/>
@@ -27197,7 +27408,7 @@
         <p:spPr>
           <a:xfrm>
             <a:off x="457200" y="457200"/>
-            <a:ext cx="638640" cy="638640"/>
+            <a:ext cx="637920" cy="637920"/>
           </a:xfrm>
           <a:prstGeom prst="ellipse">
             <a:avLst/>
@@ -27244,7 +27455,7 @@
         <p:spPr>
           <a:xfrm>
             <a:off x="553320" y="553320"/>
-            <a:ext cx="446760" cy="446760"/>
+            <a:ext cx="446040" cy="446040"/>
           </a:xfrm>
           <a:prstGeom prst="rect">
             <a:avLst/>
@@ -27264,7 +27475,7 @@
         <p:spPr>
           <a:xfrm>
             <a:off x="1280160" y="457200"/>
-            <a:ext cx="10422720" cy="638640"/>
+            <a:ext cx="10422000" cy="637920"/>
           </a:xfrm>
           <a:prstGeom prst="rect">
             <a:avLst/>
@@ -27325,7 +27536,7 @@
         <p:spPr>
           <a:xfrm>
             <a:off x="457200" y="1508760"/>
-            <a:ext cx="5521680" cy="4890600"/>
+            <a:ext cx="5520960" cy="4889880"/>
           </a:xfrm>
           <a:prstGeom prst="roundRect">
             <a:avLst>
@@ -27377,7 +27588,7 @@
         <p:spPr>
           <a:xfrm>
             <a:off x="2944440" y="2095920"/>
-            <a:ext cx="547200" cy="547200"/>
+            <a:ext cx="546480" cy="546480"/>
           </a:xfrm>
           <a:prstGeom prst="ellipse">
             <a:avLst/>
@@ -27424,7 +27635,7 @@
         <p:spPr>
           <a:xfrm>
             <a:off x="3026520" y="2178000"/>
-            <a:ext cx="382680" cy="382680"/>
+            <a:ext cx="381960" cy="381960"/>
           </a:xfrm>
           <a:prstGeom prst="rect">
             <a:avLst/>
@@ -27444,7 +27655,7 @@
         <p:spPr>
           <a:xfrm>
             <a:off x="548640" y="2717640"/>
-            <a:ext cx="5338800" cy="364320"/>
+            <a:ext cx="5338080" cy="363600"/>
           </a:xfrm>
           <a:prstGeom prst="rect">
             <a:avLst/>
@@ -27505,7 +27716,7 @@
         <p:spPr>
           <a:xfrm>
             <a:off x="603360" y="3101760"/>
-            <a:ext cx="5229000" cy="3251880"/>
+            <a:ext cx="5228280" cy="3251160"/>
           </a:xfrm>
           <a:prstGeom prst="rect">
             <a:avLst/>
@@ -27566,7 +27777,7 @@
         <p:spPr>
           <a:xfrm>
             <a:off x="6208920" y="1508760"/>
-            <a:ext cx="5521680" cy="4890600"/>
+            <a:ext cx="5520960" cy="4889880"/>
           </a:xfrm>
           <a:prstGeom prst="roundRect">
             <a:avLst>
@@ -27618,7 +27829,7 @@
         <p:spPr>
           <a:xfrm>
             <a:off x="8695800" y="2095920"/>
-            <a:ext cx="547200" cy="547200"/>
+            <a:ext cx="546480" cy="546480"/>
           </a:xfrm>
           <a:prstGeom prst="ellipse">
             <a:avLst/>
@@ -27665,7 +27876,7 @@
         <p:spPr>
           <a:xfrm>
             <a:off x="8778240" y="2178000"/>
-            <a:ext cx="382680" cy="382680"/>
+            <a:ext cx="381960" cy="381960"/>
           </a:xfrm>
           <a:prstGeom prst="rect">
             <a:avLst/>
@@ -27685,7 +27896,7 @@
         <p:spPr>
           <a:xfrm>
             <a:off x="6300360" y="2717640"/>
-            <a:ext cx="5338800" cy="364320"/>
+            <a:ext cx="5338080" cy="363600"/>
           </a:xfrm>
           <a:prstGeom prst="rect">
             <a:avLst/>
@@ -27746,7 +27957,7 @@
         <p:spPr>
           <a:xfrm>
             <a:off x="6355080" y="3101760"/>
-            <a:ext cx="5229000" cy="3251880"/>
+            <a:ext cx="5228280" cy="3251160"/>
           </a:xfrm>
           <a:prstGeom prst="rect">
             <a:avLst/>
@@ -27807,7 +28018,7 @@
         <p:spPr>
           <a:xfrm>
             <a:off x="457200" y="6446520"/>
-            <a:ext cx="6399360" cy="272880"/>
+            <a:ext cx="6398640" cy="272160"/>
           </a:xfrm>
           <a:prstGeom prst="rect">
             <a:avLst/>
@@ -27868,7 +28079,7 @@
         <p:spPr>
           <a:xfrm>
             <a:off x="11521440" y="6446520"/>
-            <a:ext cx="455760" cy="272880"/>
+            <a:ext cx="455040" cy="272160"/>
           </a:xfrm>
           <a:prstGeom prst="rect">
             <a:avLst/>
@@ -27966,7 +28177,7 @@
         <p:spPr>
           <a:xfrm>
             <a:off x="-1828800" y="5029200"/>
-            <a:ext cx="3656160" cy="3656160"/>
+            <a:ext cx="3655440" cy="3655440"/>
           </a:xfrm>
           <a:prstGeom prst="ellipse">
             <a:avLst/>
@@ -28009,7 +28220,7 @@
         <p:spPr>
           <a:xfrm>
             <a:off x="457200" y="457200"/>
-            <a:ext cx="638640" cy="638640"/>
+            <a:ext cx="637920" cy="637920"/>
           </a:xfrm>
           <a:prstGeom prst="ellipse">
             <a:avLst/>
@@ -28056,7 +28267,7 @@
         <p:spPr>
           <a:xfrm>
             <a:off x="553320" y="553320"/>
-            <a:ext cx="446760" cy="446760"/>
+            <a:ext cx="446040" cy="446040"/>
           </a:xfrm>
           <a:prstGeom prst="rect">
             <a:avLst/>
@@ -28076,7 +28287,7 @@
         <p:spPr>
           <a:xfrm>
             <a:off x="1280160" y="457200"/>
-            <a:ext cx="10422720" cy="638640"/>
+            <a:ext cx="10422000" cy="637920"/>
           </a:xfrm>
           <a:prstGeom prst="rect">
             <a:avLst/>
@@ -28137,7 +28348,7 @@
         <p:spPr>
           <a:xfrm>
             <a:off x="457200" y="1600200"/>
-            <a:ext cx="11273040" cy="4479120"/>
+            <a:ext cx="11272320" cy="4478400"/>
           </a:xfrm>
           <a:prstGeom prst="roundRect">
             <a:avLst>
@@ -28182,7 +28393,7 @@
         <p:spPr>
           <a:xfrm>
             <a:off x="822960" y="1828800"/>
-            <a:ext cx="10514160" cy="455760"/>
+            <a:ext cx="10513440" cy="455040"/>
           </a:xfrm>
           <a:prstGeom prst="rect">
             <a:avLst/>
@@ -28243,7 +28454,7 @@
         <p:spPr>
           <a:xfrm>
             <a:off x="822960" y="2423160"/>
-            <a:ext cx="382680" cy="382680"/>
+            <a:ext cx="381960" cy="381960"/>
           </a:xfrm>
           <a:prstGeom prst="ellipse">
             <a:avLst/>
@@ -28286,7 +28497,7 @@
         <p:spPr>
           <a:xfrm>
             <a:off x="822960" y="2423160"/>
-            <a:ext cx="382680" cy="382680"/>
+            <a:ext cx="381960" cy="381960"/>
           </a:xfrm>
           <a:prstGeom prst="rect">
             <a:avLst/>
@@ -28347,7 +28558,7 @@
         <p:spPr>
           <a:xfrm>
             <a:off x="1435680" y="2423160"/>
-            <a:ext cx="9581400" cy="382680"/>
+            <a:ext cx="9580680" cy="381960"/>
           </a:xfrm>
           <a:prstGeom prst="rect">
             <a:avLst/>
@@ -28408,7 +28619,7 @@
         <p:spPr>
           <a:xfrm>
             <a:off x="822960" y="3303360"/>
-            <a:ext cx="382680" cy="382680"/>
+            <a:ext cx="381960" cy="381960"/>
           </a:xfrm>
           <a:prstGeom prst="ellipse">
             <a:avLst/>
@@ -28451,7 +28662,7 @@
         <p:spPr>
           <a:xfrm>
             <a:off x="822960" y="3303360"/>
-            <a:ext cx="382680" cy="382680"/>
+            <a:ext cx="381960" cy="381960"/>
           </a:xfrm>
           <a:prstGeom prst="rect">
             <a:avLst/>
@@ -28512,7 +28723,7 @@
         <p:spPr>
           <a:xfrm>
             <a:off x="1435680" y="3303360"/>
-            <a:ext cx="9581400" cy="382680"/>
+            <a:ext cx="9580680" cy="381960"/>
           </a:xfrm>
           <a:prstGeom prst="rect">
             <a:avLst/>
@@ -28573,7 +28784,7 @@
         <p:spPr>
           <a:xfrm>
             <a:off x="822960" y="4183560"/>
-            <a:ext cx="382680" cy="382680"/>
+            <a:ext cx="381960" cy="381960"/>
           </a:xfrm>
           <a:prstGeom prst="ellipse">
             <a:avLst/>
@@ -28616,7 +28827,7 @@
         <p:spPr>
           <a:xfrm>
             <a:off x="822960" y="4183560"/>
-            <a:ext cx="382680" cy="382680"/>
+            <a:ext cx="381960" cy="381960"/>
           </a:xfrm>
           <a:prstGeom prst="rect">
             <a:avLst/>
@@ -28677,7 +28888,7 @@
         <p:spPr>
           <a:xfrm>
             <a:off x="1435680" y="4183560"/>
-            <a:ext cx="9581400" cy="382680"/>
+            <a:ext cx="9580680" cy="381960"/>
           </a:xfrm>
           <a:prstGeom prst="rect">
             <a:avLst/>
@@ -28738,7 +28949,7 @@
         <p:spPr>
           <a:xfrm>
             <a:off x="822960" y="5063400"/>
-            <a:ext cx="382680" cy="382680"/>
+            <a:ext cx="381960" cy="381960"/>
           </a:xfrm>
           <a:prstGeom prst="ellipse">
             <a:avLst/>
@@ -28781,7 +28992,7 @@
         <p:spPr>
           <a:xfrm>
             <a:off x="822960" y="5063400"/>
-            <a:ext cx="382680" cy="382680"/>
+            <a:ext cx="381960" cy="381960"/>
           </a:xfrm>
           <a:prstGeom prst="rect">
             <a:avLst/>
@@ -28842,7 +29053,7 @@
         <p:spPr>
           <a:xfrm>
             <a:off x="1435680" y="5063400"/>
-            <a:ext cx="9581400" cy="382680"/>
+            <a:ext cx="9580680" cy="381960"/>
           </a:xfrm>
           <a:prstGeom prst="rect">
             <a:avLst/>
@@ -28903,7 +29114,7 @@
         <p:spPr>
           <a:xfrm>
             <a:off x="457200" y="6446520"/>
-            <a:ext cx="6399360" cy="272880"/>
+            <a:ext cx="6398640" cy="272160"/>
           </a:xfrm>
           <a:prstGeom prst="rect">
             <a:avLst/>
@@ -28964,7 +29175,7 @@
         <p:spPr>
           <a:xfrm>
             <a:off x="11521440" y="6446520"/>
-            <a:ext cx="455760" cy="272880"/>
+            <a:ext cx="455040" cy="272160"/>
           </a:xfrm>
           <a:prstGeom prst="rect">
             <a:avLst/>
@@ -29062,7 +29273,7 @@
         <p:spPr>
           <a:xfrm>
             <a:off x="-1828800" y="5029200"/>
-            <a:ext cx="3656160" cy="3656160"/>
+            <a:ext cx="3655440" cy="3655440"/>
           </a:xfrm>
           <a:prstGeom prst="ellipse">
             <a:avLst/>
@@ -29105,7 +29316,7 @@
         <p:spPr>
           <a:xfrm>
             <a:off x="457200" y="457200"/>
-            <a:ext cx="638640" cy="638640"/>
+            <a:ext cx="637920" cy="637920"/>
           </a:xfrm>
           <a:prstGeom prst="ellipse">
             <a:avLst/>
@@ -29152,7 +29363,7 @@
         <p:spPr>
           <a:xfrm>
             <a:off x="553320" y="553320"/>
-            <a:ext cx="446760" cy="446760"/>
+            <a:ext cx="446040" cy="446040"/>
           </a:xfrm>
           <a:prstGeom prst="rect">
             <a:avLst/>
@@ -29172,7 +29383,7 @@
         <p:spPr>
           <a:xfrm>
             <a:off x="1280160" y="457200"/>
-            <a:ext cx="10422720" cy="638640"/>
+            <a:ext cx="10422000" cy="637920"/>
           </a:xfrm>
           <a:prstGeom prst="rect">
             <a:avLst/>
@@ -29233,7 +29444,7 @@
         <p:spPr>
           <a:xfrm>
             <a:off x="457200" y="1600200"/>
-            <a:ext cx="11273040" cy="4479120"/>
+            <a:ext cx="11272320" cy="4478400"/>
           </a:xfrm>
           <a:prstGeom prst="roundRect">
             <a:avLst>
@@ -29278,7 +29489,7 @@
         <p:spPr>
           <a:xfrm>
             <a:off x="822960" y="1828800"/>
-            <a:ext cx="10514160" cy="455760"/>
+            <a:ext cx="10513440" cy="455040"/>
           </a:xfrm>
           <a:prstGeom prst="rect">
             <a:avLst/>
@@ -29339,7 +29550,7 @@
         <p:spPr>
           <a:xfrm>
             <a:off x="822960" y="2423160"/>
-            <a:ext cx="419040" cy="419040"/>
+            <a:ext cx="418320" cy="418320"/>
           </a:xfrm>
           <a:prstGeom prst="ellipse">
             <a:avLst/>
@@ -29386,7 +29597,7 @@
         <p:spPr>
           <a:xfrm>
             <a:off x="885960" y="2486160"/>
-            <a:ext cx="293040" cy="293040"/>
+            <a:ext cx="292320" cy="292320"/>
           </a:xfrm>
           <a:prstGeom prst="rect">
             <a:avLst/>
@@ -29406,7 +29617,7 @@
         <p:spPr>
           <a:xfrm>
             <a:off x="1417320" y="2441520"/>
-            <a:ext cx="419040" cy="382680"/>
+            <a:ext cx="418320" cy="381960"/>
           </a:xfrm>
           <a:prstGeom prst="roundRect">
             <a:avLst>
@@ -29454,7 +29665,7 @@
         <p:spPr>
           <a:xfrm>
             <a:off x="1417320" y="2441520"/>
-            <a:ext cx="419040" cy="382680"/>
+            <a:ext cx="418320" cy="381960"/>
           </a:xfrm>
           <a:prstGeom prst="rect">
             <a:avLst/>
@@ -29515,7 +29726,7 @@
         <p:spPr>
           <a:xfrm>
             <a:off x="2011680" y="2423160"/>
-            <a:ext cx="9416880" cy="419040"/>
+            <a:ext cx="9416160" cy="418320"/>
           </a:xfrm>
           <a:prstGeom prst="rect">
             <a:avLst/>
@@ -29554,151 +29765,7 @@
                 <a:latin typeface="Calibri"/>
                 <a:ea typeface="Calibri"/>
               </a:rPr>
-              <a:t>Print </a:t>
-            </a:r>
-            <a:r>
-              <a:rPr lang="en-US" sz="1300" b="0" u="none" strike="noStrike">
-                <a:solidFill>
-                  <a:srgbClr val="1B2420"/>
-                </a:solidFill>
-                <a:effectLst/>
-                <a:uFillTx/>
-                <a:latin typeface="Calibri"/>
-                <a:ea typeface="Calibri"/>
-              </a:rPr>
-              <a:t>every </a:t>
-            </a:r>
-            <a:r>
-              <a:rPr lang="en-US" sz="1300" b="0" u="none" strike="noStrike">
-                <a:solidFill>
-                  <a:srgbClr val="1B2420"/>
-                </a:solidFill>
-                <a:effectLst/>
-                <a:uFillTx/>
-                <a:latin typeface="Calibri"/>
-                <a:ea typeface="Calibri"/>
-              </a:rPr>
-              <a:t>num</a:t>
-            </a:r>
-            <a:r>
-              <a:rPr lang="en-US" sz="1300" b="0" u="none" strike="noStrike">
-                <a:solidFill>
-                  <a:srgbClr val="1B2420"/>
-                </a:solidFill>
-                <a:effectLst/>
-                <a:uFillTx/>
-                <a:latin typeface="Calibri"/>
-                <a:ea typeface="Calibri"/>
-              </a:rPr>
-              <a:t>ber </a:t>
-            </a:r>
-            <a:r>
-              <a:rPr lang="en-US" sz="1300" b="0" u="none" strike="noStrike">
-                <a:solidFill>
-                  <a:srgbClr val="1B2420"/>
-                </a:solidFill>
-                <a:effectLst/>
-                <a:uFillTx/>
-                <a:latin typeface="Calibri"/>
-                <a:ea typeface="Calibri"/>
-              </a:rPr>
-              <a:t>from </a:t>
-            </a:r>
-            <a:r>
-              <a:rPr lang="en-US" sz="1300" b="0" u="none" strike="noStrike">
-                <a:solidFill>
-                  <a:srgbClr val="1B2420"/>
-                </a:solidFill>
-                <a:effectLst/>
-                <a:uFillTx/>
-                <a:latin typeface="Calibri"/>
-                <a:ea typeface="Calibri"/>
-              </a:rPr>
-              <a:t>1 to </a:t>
-            </a:r>
-            <a:r>
-              <a:rPr lang="en-US" sz="1300" b="0" u="none" strike="noStrike">
-                <a:solidFill>
-                  <a:srgbClr val="1B2420"/>
-                </a:solidFill>
-                <a:effectLst/>
-                <a:uFillTx/>
-                <a:latin typeface="Calibri"/>
-                <a:ea typeface="Calibri"/>
-              </a:rPr>
-              <a:t>10 </a:t>
-            </a:r>
-            <a:r>
-              <a:rPr lang="en-US" sz="1300" b="0" u="none" strike="noStrike">
-                <a:solidFill>
-                  <a:srgbClr val="1B2420"/>
-                </a:solidFill>
-                <a:effectLst/>
-                <a:uFillTx/>
-                <a:latin typeface="Calibri"/>
-                <a:ea typeface="Calibri"/>
-              </a:rPr>
-              <a:t>using </a:t>
-            </a:r>
-            <a:r>
-              <a:rPr lang="en-US" sz="1300" b="0" u="none" strike="noStrike">
-                <a:solidFill>
-                  <a:srgbClr val="1B2420"/>
-                </a:solidFill>
-                <a:effectLst/>
-                <a:uFillTx/>
-                <a:latin typeface="Calibri"/>
-                <a:ea typeface="Calibri"/>
-              </a:rPr>
-              <a:t>a for </a:t>
-            </a:r>
-            <a:r>
-              <a:rPr lang="en-US" sz="1300" b="0" u="none" strike="noStrike">
-                <a:solidFill>
-                  <a:srgbClr val="1B2420"/>
-                </a:solidFill>
-                <a:effectLst/>
-                <a:uFillTx/>
-                <a:latin typeface="Calibri"/>
-                <a:ea typeface="Calibri"/>
-              </a:rPr>
-              <a:t>loop </a:t>
-            </a:r>
-            <a:r>
-              <a:rPr lang="en-US" sz="1300" b="0" u="none" strike="noStrike">
-                <a:solidFill>
-                  <a:srgbClr val="1B2420"/>
-                </a:solidFill>
-                <a:effectLst/>
-                <a:uFillTx/>
-                <a:latin typeface="Calibri"/>
-                <a:ea typeface="Calibri"/>
-              </a:rPr>
-              <a:t>and </a:t>
-            </a:r>
-            <a:r>
-              <a:rPr lang="en-US" sz="1300" b="0" u="none" strike="noStrike">
-                <a:solidFill>
-                  <a:srgbClr val="1B2420"/>
-                </a:solidFill>
-                <a:effectLst/>
-                <a:uFillTx/>
-                <a:latin typeface="Calibri"/>
-                <a:ea typeface="Calibri"/>
-              </a:rPr>
-              <a:t>range</a:t>
-            </a:r>
-            <a:r>
-              <a:rPr lang="en-US" sz="1300" b="0" u="none" strike="noStrike">
-                <a:solidFill>
-                  <a:srgbClr val="1B2420"/>
-                </a:solidFill>
-                <a:effectLst/>
-                <a:uFillTx/>
-                <a:latin typeface="Calibri"/>
-                <a:ea typeface="Calibri"/>
-              </a:rPr>
-              <a:t>()</a:t>
+              <a:t>Print every number from 1 to 10 using a for loop and range()</a:t>
             </a:r>
             <a:endParaRPr lang="en-US" sz="1300" b="0" u="none" strike="noStrike">
               <a:solidFill>
@@ -29720,7 +29787,7 @@
         <p:spPr>
           <a:xfrm>
             <a:off x="822960" y="3303360"/>
-            <a:ext cx="419040" cy="419040"/>
+            <a:ext cx="418320" cy="418320"/>
           </a:xfrm>
           <a:prstGeom prst="ellipse">
             <a:avLst/>
@@ -29767,7 +29834,7 @@
         <p:spPr>
           <a:xfrm>
             <a:off x="885960" y="3366360"/>
-            <a:ext cx="293040" cy="293040"/>
+            <a:ext cx="292320" cy="292320"/>
           </a:xfrm>
           <a:prstGeom prst="rect">
             <a:avLst/>
@@ -29787,7 +29854,7 @@
         <p:spPr>
           <a:xfrm>
             <a:off x="1417320" y="3321720"/>
-            <a:ext cx="419040" cy="382680"/>
+            <a:ext cx="418320" cy="381960"/>
           </a:xfrm>
           <a:prstGeom prst="roundRect">
             <a:avLst>
@@ -29835,7 +29902,7 @@
         <p:spPr>
           <a:xfrm>
             <a:off x="1417320" y="3321720"/>
-            <a:ext cx="419040" cy="382680"/>
+            <a:ext cx="418320" cy="381960"/>
           </a:xfrm>
           <a:prstGeom prst="rect">
             <a:avLst/>
@@ -29896,7 +29963,7 @@
         <p:spPr>
           <a:xfrm>
             <a:off x="2011680" y="3303360"/>
-            <a:ext cx="9416880" cy="419040"/>
+            <a:ext cx="9416160" cy="418320"/>
           </a:xfrm>
           <a:prstGeom prst="rect">
             <a:avLst/>
@@ -29957,7 +30024,7 @@
         <p:spPr>
           <a:xfrm>
             <a:off x="822960" y="4183560"/>
-            <a:ext cx="419040" cy="419040"/>
+            <a:ext cx="418320" cy="418320"/>
           </a:xfrm>
           <a:prstGeom prst="ellipse">
             <a:avLst/>
@@ -30004,7 +30071,7 @@
         <p:spPr>
           <a:xfrm>
             <a:off x="885960" y="4246560"/>
-            <a:ext cx="293040" cy="293040"/>
+            <a:ext cx="292320" cy="292320"/>
           </a:xfrm>
           <a:prstGeom prst="rect">
             <a:avLst/>
@@ -30024,7 +30091,7 @@
         <p:spPr>
           <a:xfrm>
             <a:off x="1417320" y="4201560"/>
-            <a:ext cx="419040" cy="382680"/>
+            <a:ext cx="418320" cy="381960"/>
           </a:xfrm>
           <a:prstGeom prst="roundRect">
             <a:avLst>
@@ -30072,7 +30139,7 @@
         <p:spPr>
           <a:xfrm>
             <a:off x="1417320" y="4201560"/>
-            <a:ext cx="419040" cy="382680"/>
+            <a:ext cx="418320" cy="381960"/>
           </a:xfrm>
           <a:prstGeom prst="rect">
             <a:avLst/>
@@ -30133,7 +30200,7 @@
         <p:spPr>
           <a:xfrm>
             <a:off x="2011680" y="4183560"/>
-            <a:ext cx="9416880" cy="419040"/>
+            <a:ext cx="9416160" cy="418320"/>
           </a:xfrm>
           <a:prstGeom prst="rect">
             <a:avLst/>
@@ -30194,7 +30261,7 @@
         <p:spPr>
           <a:xfrm>
             <a:off x="822960" y="5063400"/>
-            <a:ext cx="419040" cy="419040"/>
+            <a:ext cx="418320" cy="418320"/>
           </a:xfrm>
           <a:prstGeom prst="ellipse">
             <a:avLst/>
@@ -30241,7 +30308,7 @@
         <p:spPr>
           <a:xfrm>
             <a:off x="885960" y="5126760"/>
-            <a:ext cx="293040" cy="293040"/>
+            <a:ext cx="292320" cy="292320"/>
           </a:xfrm>
           <a:prstGeom prst="rect">
             <a:avLst/>
@@ -30261,7 +30328,7 @@
         <p:spPr>
           <a:xfrm>
             <a:off x="1417320" y="5081760"/>
-            <a:ext cx="419040" cy="382680"/>
+            <a:ext cx="418320" cy="381960"/>
           </a:xfrm>
           <a:prstGeom prst="roundRect">
             <a:avLst>
@@ -30309,7 +30376,7 @@
         <p:spPr>
           <a:xfrm>
             <a:off x="1417320" y="5081760"/>
-            <a:ext cx="419040" cy="382680"/>
+            <a:ext cx="418320" cy="381960"/>
           </a:xfrm>
           <a:prstGeom prst="rect">
             <a:avLst/>
@@ -30370,7 +30437,7 @@
         <p:spPr>
           <a:xfrm>
             <a:off x="2011680" y="5063400"/>
-            <a:ext cx="9416880" cy="419040"/>
+            <a:ext cx="9416160" cy="418320"/>
           </a:xfrm>
           <a:prstGeom prst="rect">
             <a:avLst/>
@@ -30431,7 +30498,7 @@
         <p:spPr>
           <a:xfrm>
             <a:off x="457200" y="6446520"/>
-            <a:ext cx="6399360" cy="272880"/>
+            <a:ext cx="6398640" cy="272160"/>
           </a:xfrm>
           <a:prstGeom prst="rect">
             <a:avLst/>
@@ -30492,7 +30559,7 @@
         <p:spPr>
           <a:xfrm>
             <a:off x="11521440" y="6446520"/>
-            <a:ext cx="455760" cy="272880"/>
+            <a:ext cx="455040" cy="272160"/>
           </a:xfrm>
           <a:prstGeom prst="rect">
             <a:avLst/>
@@ -30590,7 +30657,7 @@
         <p:spPr>
           <a:xfrm>
             <a:off x="-1828800" y="5029200"/>
-            <a:ext cx="3656160" cy="3656160"/>
+            <a:ext cx="3655440" cy="3655440"/>
           </a:xfrm>
           <a:prstGeom prst="ellipse">
             <a:avLst/>
@@ -30633,7 +30700,7 @@
         <p:spPr>
           <a:xfrm>
             <a:off x="457200" y="457200"/>
-            <a:ext cx="638640" cy="638640"/>
+            <a:ext cx="637920" cy="637920"/>
           </a:xfrm>
           <a:prstGeom prst="ellipse">
             <a:avLst/>
@@ -30680,7 +30747,7 @@
         <p:spPr>
           <a:xfrm>
             <a:off x="553320" y="553320"/>
-            <a:ext cx="446760" cy="446760"/>
+            <a:ext cx="446040" cy="446040"/>
           </a:xfrm>
           <a:prstGeom prst="rect">
             <a:avLst/>
@@ -30700,7 +30767,7 @@
         <p:spPr>
           <a:xfrm>
             <a:off x="1280160" y="457200"/>
-            <a:ext cx="10422720" cy="638640"/>
+            <a:ext cx="10422000" cy="637920"/>
           </a:xfrm>
           <a:prstGeom prst="rect">
             <a:avLst/>
@@ -30761,7 +30828,7 @@
         <p:spPr>
           <a:xfrm>
             <a:off x="457200" y="1600200"/>
-            <a:ext cx="11273040" cy="4479120"/>
+            <a:ext cx="11272320" cy="4478400"/>
           </a:xfrm>
           <a:prstGeom prst="roundRect">
             <a:avLst>
@@ -30806,7 +30873,7 @@
         <p:spPr>
           <a:xfrm>
             <a:off x="822960" y="1828800"/>
-            <a:ext cx="10514160" cy="455760"/>
+            <a:ext cx="10513440" cy="455040"/>
           </a:xfrm>
           <a:prstGeom prst="rect">
             <a:avLst/>
@@ -30867,7 +30934,7 @@
         <p:spPr>
           <a:xfrm>
             <a:off x="822960" y="2423160"/>
-            <a:ext cx="419040" cy="419040"/>
+            <a:ext cx="418320" cy="418320"/>
           </a:xfrm>
           <a:prstGeom prst="ellipse">
             <a:avLst/>
@@ -30914,7 +30981,7 @@
         <p:spPr>
           <a:xfrm>
             <a:off x="885960" y="2486160"/>
-            <a:ext cx="293040" cy="293040"/>
+            <a:ext cx="292320" cy="292320"/>
           </a:xfrm>
           <a:prstGeom prst="rect">
             <a:avLst/>
@@ -30934,7 +31001,7 @@
         <p:spPr>
           <a:xfrm>
             <a:off x="1417320" y="2441520"/>
-            <a:ext cx="419040" cy="382680"/>
+            <a:ext cx="418320" cy="381960"/>
           </a:xfrm>
           <a:prstGeom prst="roundRect">
             <a:avLst>
@@ -30982,7 +31049,7 @@
         <p:spPr>
           <a:xfrm>
             <a:off x="1417320" y="2441520"/>
-            <a:ext cx="419040" cy="382680"/>
+            <a:ext cx="418320" cy="381960"/>
           </a:xfrm>
           <a:prstGeom prst="rect">
             <a:avLst/>
@@ -31043,7 +31110,7 @@
         <p:spPr>
           <a:xfrm>
             <a:off x="2011680" y="2423160"/>
-            <a:ext cx="9416880" cy="419040"/>
+            <a:ext cx="9416160" cy="418320"/>
           </a:xfrm>
           <a:prstGeom prst="rect">
             <a:avLst/>
@@ -31104,7 +31171,7 @@
         <p:spPr>
           <a:xfrm>
             <a:off x="822960" y="3596760"/>
-            <a:ext cx="419040" cy="419040"/>
+            <a:ext cx="418320" cy="418320"/>
           </a:xfrm>
           <a:prstGeom prst="ellipse">
             <a:avLst/>
@@ -31151,7 +31218,7 @@
         <p:spPr>
           <a:xfrm>
             <a:off x="885960" y="3659760"/>
-            <a:ext cx="293040" cy="293040"/>
+            <a:ext cx="292320" cy="292320"/>
           </a:xfrm>
           <a:prstGeom prst="rect">
             <a:avLst/>
@@ -31171,7 +31238,7 @@
         <p:spPr>
           <a:xfrm>
             <a:off x="1417320" y="3614760"/>
-            <a:ext cx="419040" cy="382680"/>
+            <a:ext cx="418320" cy="381960"/>
           </a:xfrm>
           <a:prstGeom prst="roundRect">
             <a:avLst>
@@ -31219,7 +31286,7 @@
         <p:spPr>
           <a:xfrm>
             <a:off x="1417320" y="3614760"/>
-            <a:ext cx="419040" cy="382680"/>
+            <a:ext cx="418320" cy="381960"/>
           </a:xfrm>
           <a:prstGeom prst="rect">
             <a:avLst/>
@@ -31280,7 +31347,7 @@
         <p:spPr>
           <a:xfrm>
             <a:off x="2011680" y="3596760"/>
-            <a:ext cx="9416880" cy="419040"/>
+            <a:ext cx="9416160" cy="418320"/>
           </a:xfrm>
           <a:prstGeom prst="rect">
             <a:avLst/>
@@ -31341,7 +31408,7 @@
         <p:spPr>
           <a:xfrm>
             <a:off x="822960" y="4770000"/>
-            <a:ext cx="419040" cy="419040"/>
+            <a:ext cx="418320" cy="418320"/>
           </a:xfrm>
           <a:prstGeom prst="ellipse">
             <a:avLst/>
@@ -31388,7 +31455,7 @@
         <p:spPr>
           <a:xfrm>
             <a:off x="885960" y="4833360"/>
-            <a:ext cx="293040" cy="293040"/>
+            <a:ext cx="292320" cy="292320"/>
           </a:xfrm>
           <a:prstGeom prst="rect">
             <a:avLst/>
@@ -31408,7 +31475,7 @@
         <p:spPr>
           <a:xfrm>
             <a:off x="1417320" y="4788360"/>
-            <a:ext cx="419040" cy="382680"/>
+            <a:ext cx="418320" cy="381960"/>
           </a:xfrm>
           <a:prstGeom prst="roundRect">
             <a:avLst>
@@ -31456,7 +31523,7 @@
         <p:spPr>
           <a:xfrm>
             <a:off x="1417320" y="4788360"/>
-            <a:ext cx="419040" cy="382680"/>
+            <a:ext cx="418320" cy="381960"/>
           </a:xfrm>
           <a:prstGeom prst="rect">
             <a:avLst/>
@@ -31517,7 +31584,7 @@
         <p:spPr>
           <a:xfrm>
             <a:off x="2011680" y="4770000"/>
-            <a:ext cx="9416880" cy="419040"/>
+            <a:ext cx="9416160" cy="418320"/>
           </a:xfrm>
           <a:prstGeom prst="rect">
             <a:avLst/>
@@ -31578,7 +31645,7 @@
         <p:spPr>
           <a:xfrm>
             <a:off x="457200" y="6446520"/>
-            <a:ext cx="6399360" cy="272880"/>
+            <a:ext cx="6398640" cy="272160"/>
           </a:xfrm>
           <a:prstGeom prst="rect">
             <a:avLst/>
@@ -31639,7 +31706,7 @@
         <p:spPr>
           <a:xfrm>
             <a:off x="11521440" y="6446520"/>
-            <a:ext cx="455760" cy="272880"/>
+            <a:ext cx="455040" cy="272160"/>
           </a:xfrm>
           <a:prstGeom prst="rect">
             <a:avLst/>
@@ -31737,7 +31804,7 @@
         <p:spPr>
           <a:xfrm>
             <a:off x="-1828800" y="4114800"/>
-            <a:ext cx="5484960" cy="5484960"/>
+            <a:ext cx="5484240" cy="5484240"/>
           </a:xfrm>
           <a:prstGeom prst="ellipse">
             <a:avLst/>
@@ -31780,7 +31847,7 @@
         <p:spPr>
           <a:xfrm>
             <a:off x="9601200" y="-2286000"/>
-            <a:ext cx="5484960" cy="5484960"/>
+            <a:ext cx="5484240" cy="5484240"/>
           </a:xfrm>
           <a:prstGeom prst="ellipse">
             <a:avLst/>
@@ -31823,7 +31890,7 @@
         <p:spPr>
           <a:xfrm>
             <a:off x="5591520" y="731520"/>
-            <a:ext cx="1004400" cy="1004400"/>
+            <a:ext cx="1003680" cy="1003680"/>
           </a:xfrm>
           <a:prstGeom prst="ellipse">
             <a:avLst/>
@@ -31870,7 +31937,7 @@
         <p:spPr>
           <a:xfrm>
             <a:off x="5742360" y="882360"/>
-            <a:ext cx="702720" cy="702720"/>
+            <a:ext cx="702000" cy="702000"/>
           </a:xfrm>
           <a:prstGeom prst="rect">
             <a:avLst/>
@@ -31890,7 +31957,7 @@
         <p:spPr>
           <a:xfrm>
             <a:off x="914400" y="1965960"/>
-            <a:ext cx="10358640" cy="364320"/>
+            <a:ext cx="10357920" cy="363600"/>
           </a:xfrm>
           <a:prstGeom prst="rect">
             <a:avLst/>
@@ -31951,7 +32018,7 @@
         <p:spPr>
           <a:xfrm>
             <a:off x="914400" y="2377440"/>
-            <a:ext cx="10358640" cy="2010240"/>
+            <a:ext cx="10357920" cy="2009520"/>
           </a:xfrm>
           <a:prstGeom prst="rect">
             <a:avLst/>
@@ -32012,7 +32079,7 @@
         <p:spPr>
           <a:xfrm>
             <a:off x="1463040" y="4572000"/>
-            <a:ext cx="9261360" cy="1095840"/>
+            <a:ext cx="9260640" cy="1095120"/>
           </a:xfrm>
           <a:prstGeom prst="rect">
             <a:avLst/>
@@ -32073,7 +32140,7 @@
         <p:spPr>
           <a:xfrm>
             <a:off x="11521440" y="6446520"/>
-            <a:ext cx="455760" cy="272880"/>
+            <a:ext cx="455040" cy="272160"/>
           </a:xfrm>
           <a:prstGeom prst="rect">
             <a:avLst/>
@@ -32171,7 +32238,7 @@
         <p:spPr>
           <a:xfrm>
             <a:off x="10515600" y="5669280"/>
-            <a:ext cx="3198960" cy="3198960"/>
+            <a:ext cx="3198240" cy="3198240"/>
           </a:xfrm>
           <a:prstGeom prst="ellipse">
             <a:avLst/>
@@ -32214,7 +32281,7 @@
         <p:spPr>
           <a:xfrm>
             <a:off x="457200" y="457200"/>
-            <a:ext cx="638640" cy="638640"/>
+            <a:ext cx="637920" cy="637920"/>
           </a:xfrm>
           <a:prstGeom prst="ellipse">
             <a:avLst/>
@@ -32261,7 +32328,7 @@
         <p:spPr>
           <a:xfrm>
             <a:off x="553320" y="553320"/>
-            <a:ext cx="446760" cy="446760"/>
+            <a:ext cx="446040" cy="446040"/>
           </a:xfrm>
           <a:prstGeom prst="rect">
             <a:avLst/>
@@ -32281,7 +32348,7 @@
         <p:spPr>
           <a:xfrm>
             <a:off x="1280160" y="457200"/>
-            <a:ext cx="10422720" cy="638640"/>
+            <a:ext cx="10422000" cy="637920"/>
           </a:xfrm>
           <a:prstGeom prst="rect">
             <a:avLst/>
@@ -32342,7 +32409,7 @@
         <p:spPr>
           <a:xfrm>
             <a:off x="457200" y="1554480"/>
-            <a:ext cx="3656160" cy="4662000"/>
+            <a:ext cx="3655440" cy="4661280"/>
           </a:xfrm>
           <a:prstGeom prst="roundRect">
             <a:avLst>
@@ -32387,7 +32454,7 @@
         <p:spPr>
           <a:xfrm>
             <a:off x="1508760" y="2194560"/>
-            <a:ext cx="1553040" cy="1553040"/>
+            <a:ext cx="1552320" cy="1552320"/>
           </a:xfrm>
           <a:prstGeom prst="ellipse">
             <a:avLst/>
@@ -32434,7 +32501,7 @@
         <p:spPr>
           <a:xfrm>
             <a:off x="1742040" y="2427840"/>
-            <a:ext cx="1086840" cy="1086840"/>
+            <a:ext cx="1086120" cy="1086120"/>
           </a:xfrm>
           <a:prstGeom prst="rect">
             <a:avLst/>
@@ -32454,7 +32521,7 @@
         <p:spPr>
           <a:xfrm>
             <a:off x="640080" y="3977640"/>
-            <a:ext cx="3290400" cy="1735920"/>
+            <a:ext cx="3289680" cy="1735200"/>
           </a:xfrm>
           <a:prstGeom prst="rect">
             <a:avLst/>
@@ -32545,7 +32612,7 @@
         <p:spPr>
           <a:xfrm>
             <a:off x="4572000" y="1737360"/>
-            <a:ext cx="7130880" cy="4113360"/>
+            <a:ext cx="7130160" cy="4112640"/>
           </a:xfrm>
           <a:prstGeom prst="rect">
             <a:avLst/>
@@ -32716,7 +32783,7 @@
         <p:spPr>
           <a:xfrm>
             <a:off x="457200" y="6446520"/>
-            <a:ext cx="6399360" cy="272880"/>
+            <a:ext cx="6398640" cy="272160"/>
           </a:xfrm>
           <a:prstGeom prst="rect">
             <a:avLst/>
@@ -32777,7 +32844,7 @@
         <p:spPr>
           <a:xfrm>
             <a:off x="11521440" y="6446520"/>
-            <a:ext cx="455760" cy="272880"/>
+            <a:ext cx="455040" cy="272160"/>
           </a:xfrm>
           <a:prstGeom prst="rect">
             <a:avLst/>
@@ -32875,7 +32942,7 @@
         <p:spPr>
           <a:xfrm>
             <a:off x="-1828800" y="4114800"/>
-            <a:ext cx="5484960" cy="5484960"/>
+            <a:ext cx="5484240" cy="5484240"/>
           </a:xfrm>
           <a:prstGeom prst="ellipse">
             <a:avLst/>
@@ -32918,7 +32985,7 @@
         <p:spPr>
           <a:xfrm>
             <a:off x="9601200" y="-2286000"/>
-            <a:ext cx="5484960" cy="5484960"/>
+            <a:ext cx="5484240" cy="5484240"/>
           </a:xfrm>
           <a:prstGeom prst="ellipse">
             <a:avLst/>
@@ -32961,7 +33028,7 @@
         <p:spPr>
           <a:xfrm>
             <a:off x="5591520" y="731520"/>
-            <a:ext cx="1004400" cy="1004400"/>
+            <a:ext cx="1003680" cy="1003680"/>
           </a:xfrm>
           <a:prstGeom prst="ellipse">
             <a:avLst/>
@@ -33008,7 +33075,7 @@
         <p:spPr>
           <a:xfrm>
             <a:off x="5742360" y="882360"/>
-            <a:ext cx="702720" cy="702720"/>
+            <a:ext cx="702000" cy="702000"/>
           </a:xfrm>
           <a:prstGeom prst="rect">
             <a:avLst/>
@@ -33028,7 +33095,7 @@
         <p:spPr>
           <a:xfrm>
             <a:off x="914400" y="1965960"/>
-            <a:ext cx="10358640" cy="364320"/>
+            <a:ext cx="10357920" cy="363600"/>
           </a:xfrm>
           <a:prstGeom prst="rect">
             <a:avLst/>
@@ -33089,7 +33156,7 @@
         <p:spPr>
           <a:xfrm>
             <a:off x="914400" y="2377440"/>
-            <a:ext cx="10358640" cy="2010240"/>
+            <a:ext cx="10357920" cy="2009520"/>
           </a:xfrm>
           <a:prstGeom prst="rect">
             <a:avLst/>
@@ -33180,7 +33247,7 @@
         <p:spPr>
           <a:xfrm>
             <a:off x="1463040" y="4572000"/>
-            <a:ext cx="9261360" cy="1095840"/>
+            <a:ext cx="9260640" cy="1095120"/>
           </a:xfrm>
           <a:prstGeom prst="rect">
             <a:avLst/>
@@ -33241,7 +33308,7 @@
         <p:spPr>
           <a:xfrm>
             <a:off x="11521440" y="6446520"/>
-            <a:ext cx="455760" cy="272880"/>
+            <a:ext cx="455040" cy="272160"/>
           </a:xfrm>
           <a:prstGeom prst="rect">
             <a:avLst/>
@@ -33339,7 +33406,7 @@
         <p:spPr>
           <a:xfrm>
             <a:off x="10515600" y="5669280"/>
-            <a:ext cx="3198960" cy="3198960"/>
+            <a:ext cx="3198240" cy="3198240"/>
           </a:xfrm>
           <a:prstGeom prst="ellipse">
             <a:avLst/>
@@ -33382,7 +33449,7 @@
         <p:spPr>
           <a:xfrm>
             <a:off x="457200" y="457200"/>
-            <a:ext cx="638640" cy="638640"/>
+            <a:ext cx="637920" cy="637920"/>
           </a:xfrm>
           <a:prstGeom prst="ellipse">
             <a:avLst/>
@@ -33429,7 +33496,7 @@
         <p:spPr>
           <a:xfrm>
             <a:off x="553320" y="553320"/>
-            <a:ext cx="446760" cy="446760"/>
+            <a:ext cx="446040" cy="446040"/>
           </a:xfrm>
           <a:prstGeom prst="rect">
             <a:avLst/>
@@ -33449,7 +33516,7 @@
         <p:spPr>
           <a:xfrm>
             <a:off x="1280160" y="457200"/>
-            <a:ext cx="10422720" cy="638640"/>
+            <a:ext cx="10422000" cy="637920"/>
           </a:xfrm>
           <a:prstGeom prst="rect">
             <a:avLst/>
@@ -33510,7 +33577,7 @@
         <p:spPr>
           <a:xfrm>
             <a:off x="457200" y="1554480"/>
-            <a:ext cx="3656160" cy="4662000"/>
+            <a:ext cx="3655440" cy="4661280"/>
           </a:xfrm>
           <a:prstGeom prst="roundRect">
             <a:avLst>
@@ -33555,7 +33622,7 @@
         <p:spPr>
           <a:xfrm>
             <a:off x="1508760" y="2194560"/>
-            <a:ext cx="1553040" cy="1553040"/>
+            <a:ext cx="1552320" cy="1552320"/>
           </a:xfrm>
           <a:prstGeom prst="ellipse">
             <a:avLst/>
@@ -33602,7 +33669,7 @@
         <p:spPr>
           <a:xfrm>
             <a:off x="1742040" y="2427840"/>
-            <a:ext cx="1086840" cy="1086840"/>
+            <a:ext cx="1086120" cy="1086120"/>
           </a:xfrm>
           <a:prstGeom prst="rect">
             <a:avLst/>
@@ -33622,7 +33689,7 @@
         <p:spPr>
           <a:xfrm>
             <a:off x="640080" y="3977640"/>
-            <a:ext cx="3290400" cy="1735920"/>
+            <a:ext cx="3289680" cy="1735200"/>
           </a:xfrm>
           <a:prstGeom prst="rect">
             <a:avLst/>
@@ -33743,7 +33810,7 @@
         <p:spPr>
           <a:xfrm>
             <a:off x="4572000" y="1737360"/>
-            <a:ext cx="7130880" cy="4113360"/>
+            <a:ext cx="7130160" cy="4112640"/>
           </a:xfrm>
           <a:prstGeom prst="rect">
             <a:avLst/>
@@ -33952,7 +34019,7 @@
         <p:spPr>
           <a:xfrm>
             <a:off x="457200" y="6446520"/>
-            <a:ext cx="6399360" cy="272880"/>
+            <a:ext cx="6398640" cy="272160"/>
           </a:xfrm>
           <a:prstGeom prst="rect">
             <a:avLst/>
@@ -34013,7 +34080,7 @@
         <p:spPr>
           <a:xfrm>
             <a:off x="11521440" y="6446520"/>
-            <a:ext cx="455760" cy="272880"/>
+            <a:ext cx="455040" cy="272160"/>
           </a:xfrm>
           <a:prstGeom prst="rect">
             <a:avLst/>
@@ -34111,7 +34178,7 @@
         <p:spPr>
           <a:xfrm>
             <a:off x="-1828800" y="5120640"/>
-            <a:ext cx="3656160" cy="3656160"/>
+            <a:ext cx="3655440" cy="3655440"/>
           </a:xfrm>
           <a:prstGeom prst="ellipse">
             <a:avLst/>
@@ -34154,7 +34221,7 @@
         <p:spPr>
           <a:xfrm>
             <a:off x="457200" y="457200"/>
-            <a:ext cx="638640" cy="638640"/>
+            <a:ext cx="637920" cy="637920"/>
           </a:xfrm>
           <a:prstGeom prst="ellipse">
             <a:avLst/>
@@ -34201,7 +34268,7 @@
         <p:spPr>
           <a:xfrm>
             <a:off x="553320" y="553320"/>
-            <a:ext cx="446760" cy="446760"/>
+            <a:ext cx="446040" cy="446040"/>
           </a:xfrm>
           <a:prstGeom prst="rect">
             <a:avLst/>
@@ -34221,7 +34288,7 @@
         <p:spPr>
           <a:xfrm>
             <a:off x="1280160" y="457200"/>
-            <a:ext cx="10422720" cy="638640"/>
+            <a:ext cx="10422000" cy="637920"/>
           </a:xfrm>
           <a:prstGeom prst="rect">
             <a:avLst/>
@@ -34282,7 +34349,7 @@
         <p:spPr>
           <a:xfrm>
             <a:off x="548640" y="1828800"/>
-            <a:ext cx="4753440" cy="4021920"/>
+            <a:ext cx="4752720" cy="4021200"/>
           </a:xfrm>
           <a:prstGeom prst="rect">
             <a:avLst/>
@@ -34418,7 +34485,7 @@
         <p:spPr>
           <a:xfrm>
             <a:off x="5486400" y="1691640"/>
-            <a:ext cx="6216480" cy="4341960"/>
+            <a:ext cx="6215760" cy="4341240"/>
           </a:xfrm>
           <a:prstGeom prst="roundRect">
             <a:avLst>
@@ -34463,7 +34530,7 @@
         <p:spPr>
           <a:xfrm>
             <a:off x="5806440" y="1965960"/>
-            <a:ext cx="5576400" cy="3793320"/>
+            <a:ext cx="5575680" cy="3792600"/>
           </a:xfrm>
           <a:prstGeom prst="rect">
             <a:avLst/>
@@ -34734,7 +34801,7 @@
         <p:spPr>
           <a:xfrm>
             <a:off x="457200" y="6446520"/>
-            <a:ext cx="6399360" cy="272880"/>
+            <a:ext cx="6398640" cy="272160"/>
           </a:xfrm>
           <a:prstGeom prst="rect">
             <a:avLst/>
@@ -34795,7 +34862,7 @@
         <p:spPr>
           <a:xfrm>
             <a:off x="11521440" y="6446520"/>
-            <a:ext cx="455760" cy="272880"/>
+            <a:ext cx="455040" cy="272160"/>
           </a:xfrm>
           <a:prstGeom prst="rect">
             <a:avLst/>
@@ -34893,7 +34960,7 @@
         <p:spPr>
           <a:xfrm>
             <a:off x="457200" y="457200"/>
-            <a:ext cx="638640" cy="638640"/>
+            <a:ext cx="637920" cy="637920"/>
           </a:xfrm>
           <a:prstGeom prst="ellipse">
             <a:avLst/>
@@ -34940,7 +35007,7 @@
         <p:spPr>
           <a:xfrm>
             <a:off x="553320" y="553320"/>
-            <a:ext cx="446760" cy="446760"/>
+            <a:ext cx="446040" cy="446040"/>
           </a:xfrm>
           <a:prstGeom prst="rect">
             <a:avLst/>
@@ -34960,7 +35027,7 @@
         <p:spPr>
           <a:xfrm>
             <a:off x="1280160" y="457200"/>
-            <a:ext cx="10422720" cy="638640"/>
+            <a:ext cx="10422000" cy="637920"/>
           </a:xfrm>
           <a:prstGeom prst="rect">
             <a:avLst/>
@@ -35021,7 +35088,7 @@
         <p:spPr>
           <a:xfrm>
             <a:off x="548640" y="1417320"/>
-            <a:ext cx="11090160" cy="501480"/>
+            <a:ext cx="11089440" cy="500760"/>
           </a:xfrm>
           <a:prstGeom prst="roundRect">
             <a:avLst>
@@ -35066,7 +35133,7 @@
         <p:spPr>
           <a:xfrm>
             <a:off x="731520" y="1417320"/>
-            <a:ext cx="10724400" cy="501480"/>
+            <a:ext cx="10723680" cy="500760"/>
           </a:xfrm>
           <a:prstGeom prst="rect">
             <a:avLst/>
@@ -35127,7 +35194,7 @@
         <p:spPr>
           <a:xfrm>
             <a:off x="2743200" y="2743200"/>
-            <a:ext cx="1827360" cy="620280"/>
+            <a:ext cx="1826640" cy="619560"/>
           </a:xfrm>
           <a:prstGeom prst="roundRect">
             <a:avLst>
@@ -35175,7 +35242,7 @@
         <p:spPr>
           <a:xfrm>
             <a:off x="2743200" y="2743200"/>
-            <a:ext cx="1827360" cy="620280"/>
+            <a:ext cx="1826640" cy="619560"/>
           </a:xfrm>
           <a:prstGeom prst="rect">
             <a:avLst/>
@@ -35236,7 +35303,7 @@
         <p:spPr>
           <a:xfrm>
             <a:off x="2743200" y="2450520"/>
-            <a:ext cx="1827360" cy="272880"/>
+            <a:ext cx="1826640" cy="272160"/>
           </a:xfrm>
           <a:prstGeom prst="rect">
             <a:avLst/>
@@ -35297,7 +35364,7 @@
         <p:spPr>
           <a:xfrm>
             <a:off x="4626720" y="2743200"/>
-            <a:ext cx="1827360" cy="620280"/>
+            <a:ext cx="1826640" cy="619560"/>
           </a:xfrm>
           <a:prstGeom prst="roundRect">
             <a:avLst>
@@ -35345,7 +35412,7 @@
         <p:spPr>
           <a:xfrm>
             <a:off x="4626720" y="2743200"/>
-            <a:ext cx="1827360" cy="620280"/>
+            <a:ext cx="1826640" cy="619560"/>
           </a:xfrm>
           <a:prstGeom prst="rect">
             <a:avLst/>
@@ -35406,7 +35473,7 @@
         <p:spPr>
           <a:xfrm>
             <a:off x="6510600" y="2743200"/>
-            <a:ext cx="1827360" cy="620280"/>
+            <a:ext cx="1826640" cy="619560"/>
           </a:xfrm>
           <a:prstGeom prst="roundRect">
             <a:avLst>
@@ -35454,7 +35521,7 @@
         <p:spPr>
           <a:xfrm>
             <a:off x="6510600" y="2743200"/>
-            <a:ext cx="1827360" cy="620280"/>
+            <a:ext cx="1826640" cy="619560"/>
           </a:xfrm>
           <a:prstGeom prst="rect">
             <a:avLst/>
@@ -35515,7 +35582,7 @@
         <p:spPr>
           <a:xfrm>
             <a:off x="548640" y="4206240"/>
-            <a:ext cx="11090160" cy="1461600"/>
+            <a:ext cx="11089440" cy="1460880"/>
           </a:xfrm>
           <a:prstGeom prst="rect">
             <a:avLst/>
@@ -35651,7 +35718,7 @@
         <p:spPr>
           <a:xfrm>
             <a:off x="457200" y="6446520"/>
-            <a:ext cx="6399360" cy="272880"/>
+            <a:ext cx="6398640" cy="272160"/>
           </a:xfrm>
           <a:prstGeom prst="rect">
             <a:avLst/>
@@ -35712,7 +35779,7 @@
         <p:spPr>
           <a:xfrm>
             <a:off x="11521440" y="6446520"/>
-            <a:ext cx="455760" cy="272880"/>
+            <a:ext cx="455040" cy="272160"/>
           </a:xfrm>
           <a:prstGeom prst="rect">
             <a:avLst/>
@@ -35810,7 +35877,7 @@
         <p:spPr>
           <a:xfrm>
             <a:off x="-1828800" y="5120640"/>
-            <a:ext cx="3656160" cy="3656160"/>
+            <a:ext cx="3655440" cy="3655440"/>
           </a:xfrm>
           <a:prstGeom prst="ellipse">
             <a:avLst/>
@@ -35853,7 +35920,7 @@
         <p:spPr>
           <a:xfrm>
             <a:off x="457200" y="457200"/>
-            <a:ext cx="638640" cy="638640"/>
+            <a:ext cx="637920" cy="637920"/>
           </a:xfrm>
           <a:prstGeom prst="ellipse">
             <a:avLst/>
@@ -35900,7 +35967,7 @@
         <p:spPr>
           <a:xfrm>
             <a:off x="553320" y="553320"/>
-            <a:ext cx="446760" cy="446760"/>
+            <a:ext cx="446040" cy="446040"/>
           </a:xfrm>
           <a:prstGeom prst="rect">
             <a:avLst/>
@@ -35920,7 +35987,7 @@
         <p:spPr>
           <a:xfrm>
             <a:off x="1280160" y="457200"/>
-            <a:ext cx="10422720" cy="638640"/>
+            <a:ext cx="10422000" cy="637920"/>
           </a:xfrm>
           <a:prstGeom prst="rect">
             <a:avLst/>
@@ -35981,7 +36048,7 @@
         <p:spPr>
           <a:xfrm>
             <a:off x="548640" y="1828800"/>
-            <a:ext cx="4753440" cy="4021920"/>
+            <a:ext cx="4752720" cy="4021200"/>
           </a:xfrm>
           <a:prstGeom prst="rect">
             <a:avLst/>
@@ -36117,7 +36184,7 @@
         <p:spPr>
           <a:xfrm>
             <a:off x="5486400" y="1691640"/>
-            <a:ext cx="6216480" cy="4341960"/>
+            <a:ext cx="6215760" cy="4341240"/>
           </a:xfrm>
           <a:prstGeom prst="roundRect">
             <a:avLst>
@@ -36162,7 +36229,7 @@
         <p:spPr>
           <a:xfrm>
             <a:off x="5806440" y="1965960"/>
-            <a:ext cx="5576400" cy="3793320"/>
+            <a:ext cx="5575680" cy="3792600"/>
           </a:xfrm>
           <a:prstGeom prst="rect">
             <a:avLst/>
@@ -36463,7 +36530,7 @@
         <p:spPr>
           <a:xfrm>
             <a:off x="457200" y="6446520"/>
-            <a:ext cx="6399360" cy="272880"/>
+            <a:ext cx="6398640" cy="272160"/>
           </a:xfrm>
           <a:prstGeom prst="rect">
             <a:avLst/>
@@ -36524,7 +36591,7 @@
         <p:spPr>
           <a:xfrm>
             <a:off x="11521440" y="6446520"/>
-            <a:ext cx="455760" cy="272880"/>
+            <a:ext cx="455040" cy="272160"/>
           </a:xfrm>
           <a:prstGeom prst="rect">
             <a:avLst/>
@@ -36622,7 +36689,7 @@
         <p:spPr>
           <a:xfrm>
             <a:off x="-1828800" y="5120640"/>
-            <a:ext cx="3656160" cy="3656160"/>
+            <a:ext cx="3655440" cy="3655440"/>
           </a:xfrm>
           <a:prstGeom prst="ellipse">
             <a:avLst/>
@@ -36665,7 +36732,7 @@
         <p:spPr>
           <a:xfrm>
             <a:off x="457200" y="457200"/>
-            <a:ext cx="638640" cy="638640"/>
+            <a:ext cx="637920" cy="637920"/>
           </a:xfrm>
           <a:prstGeom prst="ellipse">
             <a:avLst/>
@@ -36712,7 +36779,7 @@
         <p:spPr>
           <a:xfrm>
             <a:off x="553320" y="553320"/>
-            <a:ext cx="446760" cy="446760"/>
+            <a:ext cx="446040" cy="446040"/>
           </a:xfrm>
           <a:prstGeom prst="rect">
             <a:avLst/>
@@ -36732,7 +36799,7 @@
         <p:spPr>
           <a:xfrm>
             <a:off x="1280160" y="457200"/>
-            <a:ext cx="10422720" cy="638640"/>
+            <a:ext cx="10422000" cy="637920"/>
           </a:xfrm>
           <a:prstGeom prst="rect">
             <a:avLst/>
@@ -36793,7 +36860,7 @@
         <p:spPr>
           <a:xfrm>
             <a:off x="548640" y="1828800"/>
-            <a:ext cx="4753440" cy="4021920"/>
+            <a:ext cx="4752720" cy="4021200"/>
           </a:xfrm>
           <a:prstGeom prst="rect">
             <a:avLst/>
@@ -36929,7 +36996,7 @@
         <p:spPr>
           <a:xfrm>
             <a:off x="5486400" y="1691640"/>
-            <a:ext cx="6216480" cy="4341960"/>
+            <a:ext cx="6215760" cy="4341240"/>
           </a:xfrm>
           <a:prstGeom prst="roundRect">
             <a:avLst>
@@ -36974,7 +37041,7 @@
         <p:spPr>
           <a:xfrm>
             <a:off x="5806440" y="1965960"/>
-            <a:ext cx="5576400" cy="3793320"/>
+            <a:ext cx="5575680" cy="3792600"/>
           </a:xfrm>
           <a:prstGeom prst="rect">
             <a:avLst/>
@@ -37245,7 +37312,7 @@
         <p:spPr>
           <a:xfrm>
             <a:off x="457200" y="6446520"/>
-            <a:ext cx="6399360" cy="272880"/>
+            <a:ext cx="6398640" cy="272160"/>
           </a:xfrm>
           <a:prstGeom prst="rect">
             <a:avLst/>
@@ -37306,7 +37373,7 @@
         <p:spPr>
           <a:xfrm>
             <a:off x="11521440" y="6446520"/>
-            <a:ext cx="455760" cy="272880"/>
+            <a:ext cx="455040" cy="272160"/>
           </a:xfrm>
           <a:prstGeom prst="rect">
             <a:avLst/>
@@ -37404,7 +37471,7 @@
         <p:spPr>
           <a:xfrm>
             <a:off x="-1828800" y="5120640"/>
-            <a:ext cx="3656160" cy="3656160"/>
+            <a:ext cx="3655440" cy="3655440"/>
           </a:xfrm>
           <a:prstGeom prst="ellipse">
             <a:avLst/>
@@ -37447,7 +37514,7 @@
         <p:spPr>
           <a:xfrm>
             <a:off x="457200" y="457200"/>
-            <a:ext cx="638640" cy="638640"/>
+            <a:ext cx="637920" cy="637920"/>
           </a:xfrm>
           <a:prstGeom prst="ellipse">
             <a:avLst/>
@@ -37494,7 +37561,7 @@
         <p:spPr>
           <a:xfrm>
             <a:off x="553320" y="553320"/>
-            <a:ext cx="446760" cy="446760"/>
+            <a:ext cx="446040" cy="446040"/>
           </a:xfrm>
           <a:prstGeom prst="rect">
             <a:avLst/>
@@ -37514,7 +37581,7 @@
         <p:spPr>
           <a:xfrm>
             <a:off x="1280160" y="457200"/>
-            <a:ext cx="10422720" cy="638640"/>
+            <a:ext cx="10422000" cy="637920"/>
           </a:xfrm>
           <a:prstGeom prst="rect">
             <a:avLst/>
@@ -37575,7 +37642,7 @@
         <p:spPr>
           <a:xfrm>
             <a:off x="548640" y="1828800"/>
-            <a:ext cx="4753440" cy="4021920"/>
+            <a:ext cx="4752720" cy="4021200"/>
           </a:xfrm>
           <a:prstGeom prst="rect">
             <a:avLst/>
@@ -37711,7 +37778,7 @@
         <p:spPr>
           <a:xfrm>
             <a:off x="5486400" y="1691640"/>
-            <a:ext cx="6216480" cy="4341960"/>
+            <a:ext cx="6215760" cy="4341240"/>
           </a:xfrm>
           <a:prstGeom prst="roundRect">
             <a:avLst>
@@ -37756,7 +37823,7 @@
         <p:spPr>
           <a:xfrm>
             <a:off x="5806440" y="1965960"/>
-            <a:ext cx="5576400" cy="3793320"/>
+            <a:ext cx="5575680" cy="3792600"/>
           </a:xfrm>
           <a:prstGeom prst="rect">
             <a:avLst/>
@@ -38027,7 +38094,7 @@
         <p:spPr>
           <a:xfrm>
             <a:off x="457200" y="6446520"/>
-            <a:ext cx="6399360" cy="272880"/>
+            <a:ext cx="6398640" cy="272160"/>
           </a:xfrm>
           <a:prstGeom prst="rect">
             <a:avLst/>
@@ -38088,7 +38155,7 @@
         <p:spPr>
           <a:xfrm>
             <a:off x="11521440" y="6446520"/>
-            <a:ext cx="455760" cy="272880"/>
+            <a:ext cx="455040" cy="272160"/>
           </a:xfrm>
           <a:prstGeom prst="rect">
             <a:avLst/>
